--- a/dump/report_docs/pocketdrs_presentation.pptx
+++ b/dump/report_docs/pocketdrs_presentation.pptx
@@ -7256,7 +7256,7 @@
               </a:defRPr>
             </a:pPr>
             <a:r>
-              <a:t>Functional Requirements: Use-Case Diagram</a:t>
+              <a:t>Functional Requirements</a:t>
             </a:r>
           </a:p>
         </p:txBody>
@@ -7305,30 +7305,137 @@
           </a:p>
         </p:txBody>
       </p:sp>
-      <p:pic>
-        <p:nvPicPr>
-          <p:cNvPr id="4" name="Picture 3" descr="use_case_diagram.png"/>
-          <p:cNvPicPr>
-            <a:picLocks noChangeAspect="1"/>
-          </p:cNvPicPr>
+      <p:sp>
+        <p:nvSpPr>
+          <p:cNvPr id="4" name="TextBox 3"/>
+          <p:cNvSpPr txBox="1"/>
           <p:nvPr/>
-        </p:nvPicPr>
-        <p:blipFill>
-          <a:blip r:embed="rId2"/>
-          <a:stretch>
-            <a:fillRect/>
-          </a:stretch>
-        </p:blipFill>
+        </p:nvSpPr>
         <p:spPr>
           <a:xfrm>
-            <a:off x="3538563" y="1234440"/>
-            <a:ext cx="2066873" cy="3040380"/>
+            <a:off x="502920" y="1234440"/>
+            <a:ext cx="8138160" cy="3040380"/>
           </a:xfrm>
           <a:prstGeom prst="rect">
             <a:avLst/>
           </a:prstGeom>
+          <a:noFill/>
         </p:spPr>
-      </p:pic>
+        <p:txBody>
+          <a:bodyPr wrap="square">
+            <a:normAutofit/>
+          </a:bodyPr>
+          <a:lstStyle/>
+          <a:p>
+            <a:pPr>
+              <a:lnSpc>
+                <a:spcPct val="105000"/>
+              </a:lnSpc>
+              <a:spcAft>
+                <a:spcPts val="700"/>
+              </a:spcAft>
+              <a:defRPr sz="1700">
+                <a:solidFill>
+                  <a:srgbClr val="202020"/>
+                </a:solidFill>
+              </a:defRPr>
+            </a:pPr>
+            <a:r>
+              <a:t>•  User authentication via Firebase (email/password or Google sign-in).</a:t>
+            </a:r>
+          </a:p>
+          <a:p>
+            <a:pPr>
+              <a:lnSpc>
+                <a:spcPct val="105000"/>
+              </a:lnSpc>
+              <a:spcAft>
+                <a:spcPts val="700"/>
+              </a:spcAft>
+              <a:defRPr sz="1700">
+                <a:solidFill>
+                  <a:srgbClr val="202020"/>
+                </a:solidFill>
+              </a:defRPr>
+            </a:pPr>
+            <a:r>
+              <a:t>•  Record or select a delivery video, and trim to the delivery.</a:t>
+            </a:r>
+          </a:p>
+          <a:p>
+            <a:pPr>
+              <a:lnSpc>
+                <a:spcPct val="105000"/>
+              </a:lnSpc>
+              <a:spcAft>
+                <a:spcPts val="700"/>
+              </a:spcAft>
+              <a:defRPr sz="1700">
+                <a:solidFill>
+                  <a:srgbClr val="202020"/>
+                </a:solidFill>
+              </a:defRPr>
+            </a:pPr>
+            <a:r>
+              <a:t>•  Calibrate the pitch by tapping the four corners; validate quality.</a:t>
+            </a:r>
+          </a:p>
+          <a:p>
+            <a:pPr>
+              <a:lnSpc>
+                <a:spcPct val="105000"/>
+              </a:lnSpc>
+              <a:spcAft>
+                <a:spcPts val="700"/>
+              </a:spcAft>
+              <a:defRPr sz="1700">
+                <a:solidFill>
+                  <a:srgbClr val="202020"/>
+                </a:solidFill>
+              </a:defRPr>
+            </a:pPr>
+            <a:r>
+              <a:t>•  Submit the clip for server-side ball detection and 3D reconstruction.</a:t>
+            </a:r>
+          </a:p>
+          <a:p>
+            <a:pPr>
+              <a:lnSpc>
+                <a:spcPct val="105000"/>
+              </a:lnSpc>
+              <a:spcAft>
+                <a:spcPts val="700"/>
+              </a:spcAft>
+              <a:defRPr sz="1700">
+                <a:solidFill>
+                  <a:srgbClr val="202020"/>
+                </a:solidFill>
+              </a:defRPr>
+            </a:pPr>
+            <a:r>
+              <a:t>•  Return an LBW decision (OUT / NOT OUT / UMPIRE'S CALL) with rationale.</a:t>
+            </a:r>
+          </a:p>
+          <a:p>
+            <a:pPr>
+              <a:lnSpc>
+                <a:spcPct val="105000"/>
+              </a:lnSpc>
+              <a:spcAft>
+                <a:spcPts val="700"/>
+              </a:spcAft>
+              <a:defRPr sz="1700">
+                <a:solidFill>
+                  <a:srgbClr val="202020"/>
+                </a:solidFill>
+              </a:defRPr>
+            </a:pPr>
+            <a:r>
+              <a:t>•  Interactive 3D trajectory view and saved analysis history.</a:t>
+            </a:r>
+          </a:p>
+        </p:txBody>
+      </p:sp>
     </p:spTree>
   </p:cSld>
   <p:clrMapOvr>

--- a/dump/report_docs/pocketdrs_presentation.pptx
+++ b/dump/report_docs/pocketdrs_presentation.pptx
@@ -21,6 +21,8 @@
     <p:sldId id="266" r:id="rId16"/>
     <p:sldId id="267" r:id="rId17"/>
     <p:sldId id="268" r:id="rId18"/>
+    <p:sldId id="269" r:id="rId19"/>
+    <p:sldId id="270" r:id="rId20"/>
   </p:sldIdLst>
   <p:sldSz cy="5143500" cx="9144000"/>
   <p:notesSz cx="6858000" cy="9144000"/>
@@ -5747,7 +5749,7 @@
               </a:defRPr>
             </a:pPr>
             <a:r>
-              <a:t>Implementing Tools</a:t>
+              <a:t>Algorithm Details</a:t>
             </a:r>
           </a:p>
         </p:txBody>
@@ -5832,7 +5834,7 @@
               </a:defRPr>
             </a:pPr>
             <a:r>
-              <a:t>•  Mobile: Flutter (Dart) for capture, trim, calibration UI, and 3D WebView.</a:t>
+              <a:t>•  1.  Camera pose: from 4 tapped pitch corners (PnP); reject the below-ground mirror.</a:t>
             </a:r>
           </a:p>
           <a:p>
@@ -5850,7 +5852,7 @@
               </a:defRPr>
             </a:pPr>
             <a:r>
-              <a:t>•  Backend: FastAPI (Python) on Google Cloud Run.</a:t>
+              <a:t>•  2.  Ball detection: motion plus colour, or a learned (YOLO) detector for real footage.</a:t>
             </a:r>
           </a:p>
           <a:p>
@@ -5868,7 +5870,7 @@
               </a:defRPr>
             </a:pPr>
             <a:r>
-              <a:t>•  Computer vision: OpenCV, NumPy, SciPy; learned detection via Ultralytics YOLO.</a:t>
+              <a:t>•  3.  Trajectory association: RANSAC links detections into one smooth path.</a:t>
             </a:r>
           </a:p>
           <a:p>
@@ -5886,7 +5888,7 @@
               </a:defRPr>
             </a:pPr>
             <a:r>
-              <a:t>•  Data / Auth: Firebase Authentication + Cloud Firestore.</a:t>
+              <a:t>•  4.  3D reconstruction: depth-from-size plus projectile-motion fit, anchored at the bounce.</a:t>
             </a:r>
           </a:p>
           <a:p>
@@ -5904,7 +5906,7 @@
               </a:defRPr>
             </a:pPr>
             <a:r>
-              <a:t>•  Visualisation: Three.js (3D Hawk-Eye viewer) inside a WebView.</a:t>
+              <a:t>•  5.  LBW decision: ICC Rule 36 checks (pitching, impact, hitting stumps).</a:t>
             </a:r>
           </a:p>
         </p:txBody>
@@ -5965,7 +5967,7 @@
               </a:defRPr>
             </a:pPr>
             <a:r>
-              <a:t>Implementation: Module Details</a:t>
+              <a:t>Implementing Tools</a:t>
             </a:r>
           </a:p>
         </p:txBody>
@@ -6050,25 +6052,7 @@
               </a:defRPr>
             </a:pPr>
             <a:r>
-              <a:t>•  Mobile app:</a:t>
-            </a:r>
-          </a:p>
-          <a:p>
-            <a:pPr lvl="1">
-              <a:lnSpc>
-                <a:spcPct val="105000"/>
-              </a:lnSpc>
-              <a:spcAft>
-                <a:spcPts val="300"/>
-              </a:spcAft>
-              <a:defRPr sz="1400">
-                <a:solidFill>
-                  <a:srgbClr val="202020"/>
-                </a:solidFill>
-              </a:defRPr>
-            </a:pPr>
-            <a:r>
-              <a:t>◦  Auth, video capture/trim, pitch-calibration canvas, REST client, 3D viewer.</a:t>
+              <a:t>•  Mobile: Flutter (Dart) for capture, trim, calibration UI, and 3D WebView.</a:t>
             </a:r>
           </a:p>
           <a:p>
@@ -6086,61 +6070,61 @@
               </a:defRPr>
             </a:pPr>
             <a:r>
-              <a:t>•  Backend pipeline:</a:t>
+              <a:t>•  Backend: FastAPI (Python) on Google Cloud Run.</a:t>
             </a:r>
           </a:p>
           <a:p>
-            <a:pPr lvl="1">
+            <a:pPr>
               <a:lnSpc>
                 <a:spcPct val="105000"/>
               </a:lnSpc>
               <a:spcAft>
-                <a:spcPts val="300"/>
-              </a:spcAft>
-              <a:defRPr sz="1400">
+                <a:spcPts val="700"/>
+              </a:spcAft>
+              <a:defRPr sz="1700">
                 <a:solidFill>
                   <a:srgbClr val="202020"/>
                 </a:solidFill>
               </a:defRPr>
             </a:pPr>
             <a:r>
-              <a:t>◦  Video decoder, ball detector, trajectory finder (RANSAC).</a:t>
+              <a:t>•  Computer vision: OpenCV, NumPy, SciPy; learned detection via Ultralytics YOLO.</a:t>
             </a:r>
           </a:p>
           <a:p>
-            <a:pPr lvl="1">
+            <a:pPr>
               <a:lnSpc>
                 <a:spcPct val="105000"/>
               </a:lnSpc>
               <a:spcAft>
-                <a:spcPts val="300"/>
-              </a:spcAft>
-              <a:defRPr sz="1400">
+                <a:spcPts val="700"/>
+              </a:spcAft>
+              <a:defRPr sz="1700">
                 <a:solidFill>
                   <a:srgbClr val="202020"/>
                 </a:solidFill>
               </a:defRPr>
             </a:pPr>
             <a:r>
-              <a:t>◦  Calibration / camera-pose solver (PnP + homography).</a:t>
+              <a:t>•  Data / Auth: Firebase Authentication + Cloud Firestore.</a:t>
             </a:r>
           </a:p>
           <a:p>
-            <a:pPr lvl="1">
+            <a:pPr>
               <a:lnSpc>
                 <a:spcPct val="105000"/>
               </a:lnSpc>
               <a:spcAft>
-                <a:spcPts val="300"/>
-              </a:spcAft>
-              <a:defRPr sz="1400">
+                <a:spcPts val="700"/>
+              </a:spcAft>
+              <a:defRPr sz="1700">
                 <a:solidFill>
                   <a:srgbClr val="202020"/>
                 </a:solidFill>
               </a:defRPr>
             </a:pPr>
             <a:r>
-              <a:t>◦  3D reconstruction, LBW decision engine, async job manager.</a:t>
+              <a:t>•  Visualisation: Three.js (3D Hawk-Eye viewer) inside a WebView.</a:t>
             </a:r>
           </a:p>
         </p:txBody>
@@ -6201,7 +6185,7 @@
               </a:defRPr>
             </a:pPr>
             <a:r>
-              <a:t>Results: 3D Verdict Render</a:t>
+              <a:t>Implementation: Module Details</a:t>
             </a:r>
           </a:p>
         </p:txBody>
@@ -6250,6 +6234,242 @@
           </a:p>
         </p:txBody>
       </p:sp>
+      <p:sp>
+        <p:nvSpPr>
+          <p:cNvPr id="4" name="TextBox 3"/>
+          <p:cNvSpPr txBox="1"/>
+          <p:nvPr/>
+        </p:nvSpPr>
+        <p:spPr>
+          <a:xfrm>
+            <a:off x="502920" y="1234440"/>
+            <a:ext cx="8138160" cy="3040380"/>
+          </a:xfrm>
+          <a:prstGeom prst="rect">
+            <a:avLst/>
+          </a:prstGeom>
+          <a:noFill/>
+        </p:spPr>
+        <p:txBody>
+          <a:bodyPr wrap="square">
+            <a:normAutofit/>
+          </a:bodyPr>
+          <a:lstStyle/>
+          <a:p>
+            <a:pPr>
+              <a:lnSpc>
+                <a:spcPct val="105000"/>
+              </a:lnSpc>
+              <a:spcAft>
+                <a:spcPts val="700"/>
+              </a:spcAft>
+              <a:defRPr sz="1700">
+                <a:solidFill>
+                  <a:srgbClr val="202020"/>
+                </a:solidFill>
+              </a:defRPr>
+            </a:pPr>
+            <a:r>
+              <a:t>•  Mobile app:</a:t>
+            </a:r>
+          </a:p>
+          <a:p>
+            <a:pPr lvl="1">
+              <a:lnSpc>
+                <a:spcPct val="105000"/>
+              </a:lnSpc>
+              <a:spcAft>
+                <a:spcPts val="300"/>
+              </a:spcAft>
+              <a:defRPr sz="1400">
+                <a:solidFill>
+                  <a:srgbClr val="202020"/>
+                </a:solidFill>
+              </a:defRPr>
+            </a:pPr>
+            <a:r>
+              <a:t>◦  Auth, video capture/trim, pitch-calibration canvas, REST client, 3D viewer.</a:t>
+            </a:r>
+          </a:p>
+          <a:p>
+            <a:pPr>
+              <a:lnSpc>
+                <a:spcPct val="105000"/>
+              </a:lnSpc>
+              <a:spcAft>
+                <a:spcPts val="700"/>
+              </a:spcAft>
+              <a:defRPr sz="1700">
+                <a:solidFill>
+                  <a:srgbClr val="202020"/>
+                </a:solidFill>
+              </a:defRPr>
+            </a:pPr>
+            <a:r>
+              <a:t>•  Backend pipeline:</a:t>
+            </a:r>
+          </a:p>
+          <a:p>
+            <a:pPr lvl="1">
+              <a:lnSpc>
+                <a:spcPct val="105000"/>
+              </a:lnSpc>
+              <a:spcAft>
+                <a:spcPts val="300"/>
+              </a:spcAft>
+              <a:defRPr sz="1400">
+                <a:solidFill>
+                  <a:srgbClr val="202020"/>
+                </a:solidFill>
+              </a:defRPr>
+            </a:pPr>
+            <a:r>
+              <a:t>◦  Video decoder, ball detector, trajectory finder (RANSAC).</a:t>
+            </a:r>
+          </a:p>
+          <a:p>
+            <a:pPr lvl="1">
+              <a:lnSpc>
+                <a:spcPct val="105000"/>
+              </a:lnSpc>
+              <a:spcAft>
+                <a:spcPts val="300"/>
+              </a:spcAft>
+              <a:defRPr sz="1400">
+                <a:solidFill>
+                  <a:srgbClr val="202020"/>
+                </a:solidFill>
+              </a:defRPr>
+            </a:pPr>
+            <a:r>
+              <a:t>◦  Calibration / camera-pose solver (PnP + homography).</a:t>
+            </a:r>
+          </a:p>
+          <a:p>
+            <a:pPr lvl="1">
+              <a:lnSpc>
+                <a:spcPct val="105000"/>
+              </a:lnSpc>
+              <a:spcAft>
+                <a:spcPts val="300"/>
+              </a:spcAft>
+              <a:defRPr sz="1400">
+                <a:solidFill>
+                  <a:srgbClr val="202020"/>
+                </a:solidFill>
+              </a:defRPr>
+            </a:pPr>
+            <a:r>
+              <a:t>◦  3D reconstruction, LBW decision engine, async job manager.</a:t>
+            </a:r>
+          </a:p>
+        </p:txBody>
+      </p:sp>
+    </p:spTree>
+  </p:cSld>
+  <p:clrMapOvr>
+    <a:masterClrMapping/>
+  </p:clrMapOvr>
+</p:sld>
+</file>
+
+<file path=ppt/slides/slide13.xml><?xml version="1.0" encoding="utf-8"?>
+<p:sld xmlns:a="http://schemas.openxmlformats.org/drawingml/2006/main" xmlns:p="http://schemas.openxmlformats.org/presentationml/2006/main" xmlns:r="http://schemas.openxmlformats.org/officeDocument/2006/relationships">
+  <p:cSld>
+    <p:bg>
+      <p:bgPr>
+        <a:solidFill>
+          <a:srgbClr val="FFFFFF"/>
+        </a:solidFill>
+        <a:effectLst/>
+      </p:bgPr>
+    </p:bg>
+    <p:spTree>
+      <p:nvGrpSpPr>
+        <p:cNvPr id="1" name=""/>
+        <p:cNvGrpSpPr/>
+        <p:nvPr/>
+      </p:nvGrpSpPr>
+      <p:grpSpPr/>
+      <p:sp>
+        <p:nvSpPr>
+          <p:cNvPr id="2" name="TextBox 1"/>
+          <p:cNvSpPr txBox="1"/>
+          <p:nvPr/>
+        </p:nvSpPr>
+        <p:spPr>
+          <a:xfrm>
+            <a:off x="502920" y="320040"/>
+            <a:ext cx="8138160" cy="777240"/>
+          </a:xfrm>
+          <a:prstGeom prst="rect">
+            <a:avLst/>
+          </a:prstGeom>
+          <a:noFill/>
+        </p:spPr>
+        <p:txBody>
+          <a:bodyPr wrap="square" anchor="ctr">
+            <a:noAutofit/>
+          </a:bodyPr>
+          <a:lstStyle/>
+          <a:p>
+            <a:pPr>
+              <a:defRPr sz="2600" b="1">
+                <a:solidFill>
+                  <a:srgbClr val="12335B"/>
+                </a:solidFill>
+              </a:defRPr>
+            </a:pPr>
+            <a:r>
+              <a:t>Results: 3D Verdict Render</a:t>
+            </a:r>
+          </a:p>
+        </p:txBody>
+      </p:sp>
+      <p:sp>
+        <p:nvSpPr>
+          <p:cNvPr id="3" name="Rectangle 2"/>
+          <p:cNvSpPr/>
+          <p:nvPr/>
+        </p:nvSpPr>
+        <p:spPr>
+          <a:xfrm>
+            <a:off x="502920" y="1097280"/>
+            <a:ext cx="2011680" cy="38100"/>
+          </a:xfrm>
+          <a:prstGeom prst="rect">
+            <a:avLst/>
+          </a:prstGeom>
+          <a:solidFill>
+            <a:srgbClr val="2E6FB5"/>
+          </a:solidFill>
+          <a:ln>
+            <a:noFill/>
+          </a:ln>
+          <a:effectLst/>
+        </p:spPr>
+        <p:style>
+          <a:lnRef idx="1">
+            <a:schemeClr val="accent1"/>
+          </a:lnRef>
+          <a:fillRef idx="3">
+            <a:schemeClr val="accent1"/>
+          </a:fillRef>
+          <a:effectRef idx="2">
+            <a:schemeClr val="accent1"/>
+          </a:effectRef>
+          <a:fontRef idx="minor">
+            <a:schemeClr val="lt1"/>
+          </a:fontRef>
+        </p:style>
+        <p:txBody>
+          <a:bodyPr rtlCol="0" anchor="ctr"/>
+          <a:lstStyle/>
+          <a:p>
+            <a:pPr algn="ctr"/>
+          </a:p>
+        </p:txBody>
+      </p:sp>
       <p:pic>
         <p:nvPicPr>
           <p:cNvPr id="4" name="Picture 3" descr="app_result_out.png"/>
@@ -6282,7 +6502,289 @@
 </p:sld>
 </file>
 
-<file path=ppt/slides/slide13.xml><?xml version="1.0" encoding="utf-8"?>
+<file path=ppt/slides/slide14.xml><?xml version="1.0" encoding="utf-8"?>
+<p:sld xmlns:a="http://schemas.openxmlformats.org/drawingml/2006/main" xmlns:p="http://schemas.openxmlformats.org/presentationml/2006/main" xmlns:r="http://schemas.openxmlformats.org/officeDocument/2006/relationships">
+  <p:cSld>
+    <p:bg>
+      <p:bgPr>
+        <a:solidFill>
+          <a:srgbClr val="FFFFFF"/>
+        </a:solidFill>
+        <a:effectLst/>
+      </p:bgPr>
+    </p:bg>
+    <p:spTree>
+      <p:nvGrpSpPr>
+        <p:cNvPr id="1" name=""/>
+        <p:cNvGrpSpPr/>
+        <p:nvPr/>
+      </p:nvGrpSpPr>
+      <p:grpSpPr/>
+      <p:sp>
+        <p:nvSpPr>
+          <p:cNvPr id="2" name="TextBox 1"/>
+          <p:cNvSpPr txBox="1"/>
+          <p:nvPr/>
+        </p:nvSpPr>
+        <p:spPr>
+          <a:xfrm>
+            <a:off x="502920" y="320040"/>
+            <a:ext cx="8138160" cy="777240"/>
+          </a:xfrm>
+          <a:prstGeom prst="rect">
+            <a:avLst/>
+          </a:prstGeom>
+          <a:noFill/>
+        </p:spPr>
+        <p:txBody>
+          <a:bodyPr wrap="square" anchor="ctr">
+            <a:noAutofit/>
+          </a:bodyPr>
+          <a:lstStyle/>
+          <a:p>
+            <a:pPr>
+              <a:defRPr sz="2600" b="1">
+                <a:solidFill>
+                  <a:srgbClr val="12335B"/>
+                </a:solidFill>
+              </a:defRPr>
+            </a:pPr>
+            <a:r>
+              <a:t>Validation: LBW Verdicts</a:t>
+            </a:r>
+          </a:p>
+        </p:txBody>
+      </p:sp>
+      <p:sp>
+        <p:nvSpPr>
+          <p:cNvPr id="3" name="Rectangle 2"/>
+          <p:cNvSpPr/>
+          <p:nvPr/>
+        </p:nvSpPr>
+        <p:spPr>
+          <a:xfrm>
+            <a:off x="502920" y="1097280"/>
+            <a:ext cx="2011680" cy="38100"/>
+          </a:xfrm>
+          <a:prstGeom prst="rect">
+            <a:avLst/>
+          </a:prstGeom>
+          <a:solidFill>
+            <a:srgbClr val="2E6FB5"/>
+          </a:solidFill>
+          <a:ln>
+            <a:noFill/>
+          </a:ln>
+          <a:effectLst/>
+        </p:spPr>
+        <p:style>
+          <a:lnRef idx="1">
+            <a:schemeClr val="accent1"/>
+          </a:lnRef>
+          <a:fillRef idx="3">
+            <a:schemeClr val="accent1"/>
+          </a:fillRef>
+          <a:effectRef idx="2">
+            <a:schemeClr val="accent1"/>
+          </a:effectRef>
+          <a:fontRef idx="minor">
+            <a:schemeClr val="lt1"/>
+          </a:fontRef>
+        </p:style>
+        <p:txBody>
+          <a:bodyPr rtlCol="0" anchor="ctr"/>
+          <a:lstStyle/>
+          <a:p>
+            <a:pPr algn="ctr"/>
+          </a:p>
+        </p:txBody>
+      </p:sp>
+      <p:pic>
+        <p:nvPicPr>
+          <p:cNvPr id="4" name="Picture 3" descr="case_out.png"/>
+          <p:cNvPicPr>
+            <a:picLocks noChangeAspect="1"/>
+          </p:cNvPicPr>
+          <p:nvPr/>
+        </p:nvPicPr>
+        <p:blipFill>
+          <a:blip r:embed="rId2"/>
+          <a:stretch>
+            <a:fillRect/>
+          </a:stretch>
+        </p:blipFill>
+        <p:spPr>
+          <a:xfrm>
+            <a:off x="1076325" y="1234440"/>
+            <a:ext cx="1383030" cy="2766060"/>
+          </a:xfrm>
+          <a:prstGeom prst="rect">
+            <a:avLst/>
+          </a:prstGeom>
+        </p:spPr>
+      </p:pic>
+      <p:sp>
+        <p:nvSpPr>
+          <p:cNvPr id="5" name="TextBox 4"/>
+          <p:cNvSpPr txBox="1"/>
+          <p:nvPr/>
+        </p:nvSpPr>
+        <p:spPr>
+          <a:xfrm>
+            <a:off x="502920" y="4000500"/>
+            <a:ext cx="2529840" cy="274320"/>
+          </a:xfrm>
+          <a:prstGeom prst="rect">
+            <a:avLst/>
+          </a:prstGeom>
+          <a:noFill/>
+        </p:spPr>
+        <p:txBody>
+          <a:bodyPr wrap="none">
+            <a:spAutoFit/>
+          </a:bodyPr>
+          <a:lstStyle/>
+          <a:p>
+            <a:pPr algn="ctr">
+              <a:defRPr sz="1200">
+                <a:solidFill>
+                  <a:srgbClr val="202020"/>
+                </a:solidFill>
+              </a:defRPr>
+            </a:pPr>
+            <a:r>
+              <a:t>OUT</a:t>
+            </a:r>
+          </a:p>
+        </p:txBody>
+      </p:sp>
+      <p:pic>
+        <p:nvPicPr>
+          <p:cNvPr id="6" name="Picture 5" descr="case_not_out.png"/>
+          <p:cNvPicPr>
+            <a:picLocks noChangeAspect="1"/>
+          </p:cNvPicPr>
+          <p:nvPr/>
+        </p:nvPicPr>
+        <p:blipFill>
+          <a:blip r:embed="rId3"/>
+          <a:stretch>
+            <a:fillRect/>
+          </a:stretch>
+        </p:blipFill>
+        <p:spPr>
+          <a:xfrm>
+            <a:off x="3880485" y="1234440"/>
+            <a:ext cx="1383030" cy="2766060"/>
+          </a:xfrm>
+          <a:prstGeom prst="rect">
+            <a:avLst/>
+          </a:prstGeom>
+        </p:spPr>
+      </p:pic>
+      <p:sp>
+        <p:nvSpPr>
+          <p:cNvPr id="7" name="TextBox 6"/>
+          <p:cNvSpPr txBox="1"/>
+          <p:nvPr/>
+        </p:nvSpPr>
+        <p:spPr>
+          <a:xfrm>
+            <a:off x="3307080" y="4000500"/>
+            <a:ext cx="2529840" cy="274320"/>
+          </a:xfrm>
+          <a:prstGeom prst="rect">
+            <a:avLst/>
+          </a:prstGeom>
+          <a:noFill/>
+        </p:spPr>
+        <p:txBody>
+          <a:bodyPr wrap="none">
+            <a:spAutoFit/>
+          </a:bodyPr>
+          <a:lstStyle/>
+          <a:p>
+            <a:pPr algn="ctr">
+              <a:defRPr sz="1200">
+                <a:solidFill>
+                  <a:srgbClr val="202020"/>
+                </a:solidFill>
+              </a:defRPr>
+            </a:pPr>
+            <a:r>
+              <a:t>NOT OUT</a:t>
+            </a:r>
+          </a:p>
+        </p:txBody>
+      </p:sp>
+      <p:pic>
+        <p:nvPicPr>
+          <p:cNvPr id="8" name="Picture 7" descr="case_umpires_call.png"/>
+          <p:cNvPicPr>
+            <a:picLocks noChangeAspect="1"/>
+          </p:cNvPicPr>
+          <p:nvPr/>
+        </p:nvPicPr>
+        <p:blipFill>
+          <a:blip r:embed="rId4"/>
+          <a:stretch>
+            <a:fillRect/>
+          </a:stretch>
+        </p:blipFill>
+        <p:spPr>
+          <a:xfrm>
+            <a:off x="6684645" y="1234440"/>
+            <a:ext cx="1383030" cy="2766060"/>
+          </a:xfrm>
+          <a:prstGeom prst="rect">
+            <a:avLst/>
+          </a:prstGeom>
+        </p:spPr>
+      </p:pic>
+      <p:sp>
+        <p:nvSpPr>
+          <p:cNvPr id="9" name="TextBox 8"/>
+          <p:cNvSpPr txBox="1"/>
+          <p:nvPr/>
+        </p:nvSpPr>
+        <p:spPr>
+          <a:xfrm>
+            <a:off x="6111240" y="4000500"/>
+            <a:ext cx="2529840" cy="274320"/>
+          </a:xfrm>
+          <a:prstGeom prst="rect">
+            <a:avLst/>
+          </a:prstGeom>
+          <a:noFill/>
+        </p:spPr>
+        <p:txBody>
+          <a:bodyPr wrap="none">
+            <a:spAutoFit/>
+          </a:bodyPr>
+          <a:lstStyle/>
+          <a:p>
+            <a:pPr algn="ctr">
+              <a:defRPr sz="1200">
+                <a:solidFill>
+                  <a:srgbClr val="202020"/>
+                </a:solidFill>
+              </a:defRPr>
+            </a:pPr>
+            <a:r>
+              <a:t>Umpire's Call</a:t>
+            </a:r>
+          </a:p>
+        </p:txBody>
+      </p:sp>
+    </p:spTree>
+  </p:cSld>
+  <p:clrMapOvr>
+    <a:masterClrMapping/>
+  </p:clrMapOvr>
+</p:sld>
+</file>
+
+<file path=ppt/slides/slide15.xml><?xml version="1.0" encoding="utf-8"?>
 <p:sld xmlns:a="http://schemas.openxmlformats.org/drawingml/2006/main" xmlns:p="http://schemas.openxmlformats.org/presentationml/2006/main" xmlns:r="http://schemas.openxmlformats.org/officeDocument/2006/relationships">
   <p:cSld>
     <p:bg>
@@ -8062,7 +8564,7 @@
               </a:defRPr>
             </a:pPr>
             <a:r>
-              <a:t>Algorithm Details</a:t>
+              <a:t>System Architecture</a:t>
             </a:r>
           </a:p>
         </p:txBody>
@@ -8111,119 +8613,30 @@
           </a:p>
         </p:txBody>
       </p:sp>
-      <p:sp>
-        <p:nvSpPr>
-          <p:cNvPr id="4" name="TextBox 3"/>
-          <p:cNvSpPr txBox="1"/>
+      <p:pic>
+        <p:nvPicPr>
+          <p:cNvPr id="4" name="Picture 3" descr="architecture.png"/>
+          <p:cNvPicPr>
+            <a:picLocks noChangeAspect="1"/>
+          </p:cNvPicPr>
           <p:nvPr/>
-        </p:nvSpPr>
+        </p:nvPicPr>
+        <p:blipFill>
+          <a:blip r:embed="rId2"/>
+          <a:stretch>
+            <a:fillRect/>
+          </a:stretch>
+        </p:blipFill>
         <p:spPr>
           <a:xfrm>
-            <a:off x="502920" y="1234440"/>
-            <a:ext cx="8138160" cy="3040380"/>
+            <a:off x="3411667" y="1234440"/>
+            <a:ext cx="2320666" cy="3040380"/>
           </a:xfrm>
           <a:prstGeom prst="rect">
             <a:avLst/>
           </a:prstGeom>
-          <a:noFill/>
         </p:spPr>
-        <p:txBody>
-          <a:bodyPr wrap="square">
-            <a:normAutofit/>
-          </a:bodyPr>
-          <a:lstStyle/>
-          <a:p>
-            <a:pPr>
-              <a:lnSpc>
-                <a:spcPct val="105000"/>
-              </a:lnSpc>
-              <a:spcAft>
-                <a:spcPts val="700"/>
-              </a:spcAft>
-              <a:defRPr sz="1700">
-                <a:solidFill>
-                  <a:srgbClr val="202020"/>
-                </a:solidFill>
-              </a:defRPr>
-            </a:pPr>
-            <a:r>
-              <a:t>•  1.  Camera pose: from 4 tapped pitch corners (PnP); reject the below-ground mirror.</a:t>
-            </a:r>
-          </a:p>
-          <a:p>
-            <a:pPr>
-              <a:lnSpc>
-                <a:spcPct val="105000"/>
-              </a:lnSpc>
-              <a:spcAft>
-                <a:spcPts val="700"/>
-              </a:spcAft>
-              <a:defRPr sz="1700">
-                <a:solidFill>
-                  <a:srgbClr val="202020"/>
-                </a:solidFill>
-              </a:defRPr>
-            </a:pPr>
-            <a:r>
-              <a:t>•  2.  Ball detection: motion plus colour, or a learned (YOLO) detector for real footage.</a:t>
-            </a:r>
-          </a:p>
-          <a:p>
-            <a:pPr>
-              <a:lnSpc>
-                <a:spcPct val="105000"/>
-              </a:lnSpc>
-              <a:spcAft>
-                <a:spcPts val="700"/>
-              </a:spcAft>
-              <a:defRPr sz="1700">
-                <a:solidFill>
-                  <a:srgbClr val="202020"/>
-                </a:solidFill>
-              </a:defRPr>
-            </a:pPr>
-            <a:r>
-              <a:t>•  3.  Trajectory association: RANSAC links detections into one smooth path.</a:t>
-            </a:r>
-          </a:p>
-          <a:p>
-            <a:pPr>
-              <a:lnSpc>
-                <a:spcPct val="105000"/>
-              </a:lnSpc>
-              <a:spcAft>
-                <a:spcPts val="700"/>
-              </a:spcAft>
-              <a:defRPr sz="1700">
-                <a:solidFill>
-                  <a:srgbClr val="202020"/>
-                </a:solidFill>
-              </a:defRPr>
-            </a:pPr>
-            <a:r>
-              <a:t>•  4.  3D reconstruction: depth-from-size plus projectile-motion fit, anchored at the bounce.</a:t>
-            </a:r>
-          </a:p>
-          <a:p>
-            <a:pPr>
-              <a:lnSpc>
-                <a:spcPct val="105000"/>
-              </a:lnSpc>
-              <a:spcAft>
-                <a:spcPts val="700"/>
-              </a:spcAft>
-              <a:defRPr sz="1700">
-                <a:solidFill>
-                  <a:srgbClr val="202020"/>
-                </a:solidFill>
-              </a:defRPr>
-            </a:pPr>
-            <a:r>
-              <a:t>•  5.  LBW decision: ICC Rule 36 checks (pitching, impact, hitting stumps).</a:t>
-            </a:r>
-          </a:p>
-        </p:txBody>
-      </p:sp>
+      </p:pic>
     </p:spTree>
   </p:cSld>
   <p:clrMapOvr>

--- a/dump/report_docs/pocketdrs_presentation.pptx
+++ b/dump/report_docs/pocketdrs_presentation.pptx
@@ -23,6 +23,13 @@
     <p:sldId id="268" r:id="rId18"/>
     <p:sldId id="269" r:id="rId19"/>
     <p:sldId id="270" r:id="rId20"/>
+    <p:sldId id="271" r:id="rId21"/>
+    <p:sldId id="272" r:id="rId22"/>
+    <p:sldId id="273" r:id="rId23"/>
+    <p:sldId id="274" r:id="rId24"/>
+    <p:sldId id="275" r:id="rId25"/>
+    <p:sldId id="276" r:id="rId26"/>
+    <p:sldId id="277" r:id="rId27"/>
   </p:sldIdLst>
   <p:sldSz cy="5143500" cx="9144000"/>
   <p:notesSz cx="6858000" cy="9144000"/>
@@ -5588,8 +5595,8 @@
         </p:nvSpPr>
         <p:spPr>
           <a:xfrm>
-            <a:off x="502920" y="1280160"/>
-            <a:ext cx="8138160" cy="2651760"/>
+            <a:off x="502920" y="1097280"/>
+            <a:ext cx="8138160" cy="3108960"/>
           </a:xfrm>
           <a:prstGeom prst="rect">
             <a:avLst/>
@@ -5606,7 +5613,7 @@
               <a:spcAft>
                 <a:spcPts val="600"/>
               </a:spcAft>
-              <a:defRPr sz="4000" b="1">
+              <a:defRPr sz="4400" b="1">
                 <a:solidFill>
                   <a:srgbClr val="12335B"/>
                 </a:solidFill>
@@ -5628,45 +5635,60 @@
               </a:defRPr>
             </a:pPr>
             <a:r>
-              <a:t>A Single-View 3D Trajectory Reconstruction and</a:t>
+              <a:t>A Single-View 3D Trajectory Reconstruction</a:t>
             </a:r>
           </a:p>
           <a:p>
             <a:pPr algn="ctr">
               <a:spcAft>
+                <a:spcPts val="1600"/>
+              </a:spcAft>
+              <a:defRPr sz="1800" b="0">
+                <a:solidFill>
+                  <a:srgbClr val="202020"/>
+                </a:solidFill>
+              </a:defRPr>
+            </a:pPr>
+            <a:r>
+              <a:t>and Decision Review System for Cricket</a:t>
+            </a:r>
+          </a:p>
+          <a:p>
+            <a:pPr algn="ctr">
+              <a:spcAft>
                 <a:spcPts val="1400"/>
               </a:spcAft>
-              <a:defRPr sz="1800" b="0">
-                <a:solidFill>
-                  <a:srgbClr val="202020"/>
-                </a:solidFill>
-              </a:defRPr>
-            </a:pPr>
-            <a:r>
-              <a:t>Decision Review System for Cricket</a:t>
+              <a:defRPr sz="1400" b="1">
+                <a:solidFill>
+                  <a:srgbClr val="2E6FB5"/>
+                </a:solidFill>
+              </a:defRPr>
+            </a:pPr>
+            <a:r>
+              <a:t>Final-Year Project Defense</a:t>
             </a:r>
           </a:p>
           <a:p>
             <a:pPr algn="ctr">
               <a:spcAft>
-                <a:spcPts val="200"/>
-              </a:spcAft>
-              <a:defRPr sz="1600" b="0">
-                <a:solidFill>
-                  <a:srgbClr val="202020"/>
-                </a:solidFill>
-              </a:defRPr>
-            </a:pPr>
-            <a:r>
-              <a:t>Niraj Kafle, BIT (LC0003001674)</a:t>
+                <a:spcPts val="400"/>
+              </a:spcAft>
+              <a:defRPr sz="1400" b="0">
+                <a:solidFill>
+                  <a:srgbClr val="202020"/>
+                </a:solidFill>
+              </a:defRPr>
+            </a:pPr>
+            <a:r>
+              <a:t>Niraj Kafle  |  BIT 7th Semester  |  ID: LC0003001674</a:t>
             </a:r>
           </a:p>
           <a:p>
             <a:pPr algn="ctr">
               <a:spcAft>
-                <a:spcPts val="200"/>
-              </a:spcAft>
-              <a:defRPr sz="1500" b="0">
+                <a:spcPts val="400"/>
+              </a:spcAft>
+              <a:defRPr sz="1400" b="0">
                 <a:solidFill>
                   <a:srgbClr val="202020"/>
                 </a:solidFill>
@@ -5679,16 +5701,66 @@
           <a:p>
             <a:pPr algn="ctr">
               <a:spcAft>
-                <a:spcPts val="0"/>
-              </a:spcAft>
-              <a:defRPr sz="1500" b="0">
-                <a:solidFill>
-                  <a:srgbClr val="2E6FB5"/>
-                </a:solidFill>
-              </a:defRPr>
-            </a:pPr>
-            <a:r>
-              <a:t>Phoenix College of Management</a:t>
+                <a:spcPts val="400"/>
+              </a:spcAft>
+              <a:defRPr sz="1300" b="0">
+                <a:solidFill>
+                  <a:srgbClr val="555555"/>
+                </a:solidFill>
+              </a:defRPr>
+            </a:pPr>
+            <a:r>
+              <a:t>Phoenix College of Management, Maitidevi, Kathmandu</a:t>
+            </a:r>
+          </a:p>
+          <a:p>
+            <a:pPr algn="ctr">
+              <a:spcAft>
+                <a:spcPts val="0"/>
+              </a:spcAft>
+              <a:defRPr sz="1200" b="0">
+                <a:solidFill>
+                  <a:srgbClr val="555555"/>
+                </a:solidFill>
+              </a:defRPr>
+            </a:pPr>
+            <a:r>
+              <a:t>Lincoln University College, Faculty of Computer Science and Multimedia</a:t>
+            </a:r>
+          </a:p>
+        </p:txBody>
+      </p:sp>
+      <p:sp>
+        <p:nvSpPr>
+          <p:cNvPr id="3" name="TextBox 2"/>
+          <p:cNvSpPr txBox="1"/>
+          <p:nvPr/>
+        </p:nvSpPr>
+        <p:spPr>
+          <a:xfrm>
+            <a:off x="502920" y="5120640"/>
+            <a:ext cx="8138160" cy="457200"/>
+          </a:xfrm>
+          <a:prstGeom prst="rect">
+            <a:avLst/>
+          </a:prstGeom>
+          <a:noFill/>
+        </p:spPr>
+        <p:txBody>
+          <a:bodyPr wrap="none">
+            <a:spAutoFit/>
+          </a:bodyPr>
+          <a:lstStyle/>
+          <a:p>
+            <a:pPr algn="ctr">
+              <a:defRPr sz="1300">
+                <a:solidFill>
+                  <a:srgbClr val="555555"/>
+                </a:solidFill>
+              </a:defRPr>
+            </a:pPr>
+            <a:r>
+              <a:t>May, 2026</a:t>
             </a:r>
           </a:p>
         </p:txBody>
@@ -5749,7 +5821,7 @@
               </a:defRPr>
             </a:pPr>
             <a:r>
-              <a:t>Algorithm Details</a:t>
+              <a:t>Step 2, Ball Detection</a:t>
             </a:r>
           </a:p>
         </p:txBody>
@@ -5822,7 +5894,7 @@
           <a:p>
             <a:pPr>
               <a:lnSpc>
-                <a:spcPct val="105000"/>
+                <a:spcPct val="108000"/>
               </a:lnSpc>
               <a:spcAft>
                 <a:spcPts val="700"/>
@@ -5834,13 +5906,49 @@
               </a:defRPr>
             </a:pPr>
             <a:r>
-              <a:t>•  1.  Camera pose: from 4 tapped pitch corners (PnP); reject the below-ground mirror.</a:t>
+              <a:t>•  Two independent detectors per frame:</a:t>
+            </a:r>
+          </a:p>
+          <a:p>
+            <a:pPr lvl="1">
+              <a:lnSpc>
+                <a:spcPct val="108000"/>
+              </a:lnSpc>
+              <a:spcAft>
+                <a:spcPts val="300"/>
+              </a:spcAft>
+              <a:defRPr sz="1400">
+                <a:solidFill>
+                  <a:srgbClr val="202020"/>
+                </a:solidFill>
+              </a:defRPr>
+            </a:pPr>
+            <a:r>
+              <a:t>◦  Motion (MOG2): accepts round blobs AND short streaks (fast ball blurs).</a:t>
+            </a:r>
+          </a:p>
+          <a:p>
+            <a:pPr lvl="1">
+              <a:lnSpc>
+                <a:spcPct val="108000"/>
+              </a:lnSpc>
+              <a:spcAft>
+                <a:spcPts val="300"/>
+              </a:spcAft>
+              <a:defRPr sz="1400">
+                <a:solidFill>
+                  <a:srgbClr val="202020"/>
+                </a:solidFill>
+              </a:defRPr>
+            </a:pPr>
+            <a:r>
+              <a:t>◦  Colour (HSV): looks for the ball's tone (red / white).</a:t>
             </a:r>
           </a:p>
           <a:p>
             <a:pPr>
               <a:lnSpc>
-                <a:spcPct val="105000"/>
+                <a:spcPct val="108000"/>
               </a:lnSpc>
               <a:spcAft>
                 <a:spcPts val="700"/>
@@ -5852,13 +5960,13 @@
               </a:defRPr>
             </a:pPr>
             <a:r>
-              <a:t>•  2.  Ball detection: motion plus colour, or a learned (YOLO) detector for real footage.</a:t>
+              <a:t>•  Agreement between the two boosts confidence.</a:t>
             </a:r>
           </a:p>
           <a:p>
             <a:pPr>
               <a:lnSpc>
-                <a:spcPct val="105000"/>
+                <a:spcPct val="108000"/>
               </a:lnSpc>
               <a:spcAft>
                 <a:spcPts val="700"/>
@@ -5870,13 +5978,13 @@
               </a:defRPr>
             </a:pPr>
             <a:r>
-              <a:t>•  3.  Trajectory association: RANSAC links detections into one smooth path.</a:t>
+              <a:t>•  Fixed-clutter suppression, same pixel &gt; 30% of frames ⇒ background, not the ball.</a:t>
             </a:r>
           </a:p>
           <a:p>
             <a:pPr>
               <a:lnSpc>
-                <a:spcPct val="105000"/>
+                <a:spcPct val="108000"/>
               </a:lnSpc>
               <a:spcAft>
                 <a:spcPts val="700"/>
@@ -5888,25 +5996,7 @@
               </a:defRPr>
             </a:pPr>
             <a:r>
-              <a:t>•  4.  3D reconstruction: depth-from-size plus projectile-motion fit, anchored at the bounce.</a:t>
-            </a:r>
-          </a:p>
-          <a:p>
-            <a:pPr>
-              <a:lnSpc>
-                <a:spcPct val="105000"/>
-              </a:lnSpc>
-              <a:spcAft>
-                <a:spcPts val="700"/>
-              </a:spcAft>
-              <a:defRPr sz="1700">
-                <a:solidFill>
-                  <a:srgbClr val="202020"/>
-                </a:solidFill>
-              </a:defRPr>
-            </a:pPr>
-            <a:r>
-              <a:t>•  5.  LBW decision: ICC Rule 36 checks (pitching, impact, hitting stumps).</a:t>
+              <a:t>•  Real handheld clips additionally use a learned YOLO cricket-ball detector.</a:t>
             </a:r>
           </a:p>
         </p:txBody>
@@ -5967,7 +6057,7 @@
               </a:defRPr>
             </a:pPr>
             <a:r>
-              <a:t>Implementing Tools</a:t>
+              <a:t>Step 3, Trajectory Association (RANSAC)</a:t>
             </a:r>
           </a:p>
         </p:txBody>
@@ -6040,7 +6130,7 @@
           <a:p>
             <a:pPr>
               <a:lnSpc>
-                <a:spcPct val="105000"/>
+                <a:spcPct val="108000"/>
               </a:lnSpc>
               <a:spcAft>
                 <a:spcPts val="700"/>
@@ -6052,13 +6142,13 @@
               </a:defRPr>
             </a:pPr>
             <a:r>
-              <a:t>•  Mobile: Flutter (Dart) for capture, trim, calibration UI, and 3D WebView.</a:t>
+              <a:t>•  Input: candidate detections from Step 2 (mix of real ball + false positives).</a:t>
             </a:r>
           </a:p>
           <a:p>
             <a:pPr>
               <a:lnSpc>
-                <a:spcPct val="105000"/>
+                <a:spcPct val="108000"/>
               </a:lnSpc>
               <a:spcAft>
                 <a:spcPts val="700"/>
@@ -6070,13 +6160,13 @@
               </a:defRPr>
             </a:pPr>
             <a:r>
-              <a:t>•  Backend: FastAPI (Python) on Google Cloud Run.</a:t>
+              <a:t>•  RANSAC: try pairs → fit projectile path → count inliers → keep the best.</a:t>
             </a:r>
           </a:p>
           <a:p>
             <a:pPr>
               <a:lnSpc>
-                <a:spcPct val="105000"/>
+                <a:spcPct val="108000"/>
               </a:lnSpc>
               <a:spcAft>
                 <a:spcPts val="700"/>
@@ -6088,13 +6178,49 @@
               </a:defRPr>
             </a:pPr>
             <a:r>
-              <a:t>•  Computer vision: OpenCV, NumPy, SciPy; learned detection via Ultralytics YOLO.</a:t>
+              <a:t>•  Phone-shot-from-behind specifics:</a:t>
+            </a:r>
+          </a:p>
+          <a:p>
+            <a:pPr lvl="1">
+              <a:lnSpc>
+                <a:spcPct val="108000"/>
+              </a:lnSpc>
+              <a:spcAft>
+                <a:spcPts val="300"/>
+              </a:spcAft>
+              <a:defRPr sz="1400">
+                <a:solidFill>
+                  <a:srgbClr val="202020"/>
+                </a:solidFill>
+              </a:defRPr>
+            </a:pPr>
+            <a:r>
+              <a:t>◦  Measure TOTAL motion across the clip (ball moves towards camera, per-frame motion tiny).</a:t>
+            </a:r>
+          </a:p>
+          <a:p>
+            <a:pPr lvl="1">
+              <a:lnSpc>
+                <a:spcPct val="108000"/>
+              </a:lnSpc>
+              <a:spcAft>
+                <a:spcPts val="300"/>
+              </a:spcAft>
+              <a:defRPr sz="1400">
+                <a:solidFill>
+                  <a:srgbClr val="202020"/>
+                </a:solidFill>
+              </a:defRPr>
+            </a:pPr>
+            <a:r>
+              <a:t>◦  Reject tracks covering &lt; 20% of image width, leftover clutter, not a real delivery.</a:t>
             </a:r>
           </a:p>
           <a:p>
             <a:pPr>
               <a:lnSpc>
-                <a:spcPct val="105000"/>
+                <a:spcPct val="108000"/>
               </a:lnSpc>
               <a:spcAft>
                 <a:spcPts val="700"/>
@@ -6106,25 +6232,7 @@
               </a:defRPr>
             </a:pPr>
             <a:r>
-              <a:t>•  Data / Auth: Firebase Authentication + Cloud Firestore.</a:t>
-            </a:r>
-          </a:p>
-          <a:p>
-            <a:pPr>
-              <a:lnSpc>
-                <a:spcPct val="105000"/>
-              </a:lnSpc>
-              <a:spcAft>
-                <a:spcPts val="700"/>
-              </a:spcAft>
-              <a:defRPr sz="1700">
-                <a:solidFill>
-                  <a:srgbClr val="202020"/>
-                </a:solidFill>
-              </a:defRPr>
-            </a:pPr>
-            <a:r>
-              <a:t>•  Visualisation: Three.js (3D Hawk-Eye viewer) inside a WebView.</a:t>
+              <a:t>•  Output: one consistent path + inlier count + fit RMS.</a:t>
             </a:r>
           </a:p>
         </p:txBody>
@@ -6185,7 +6293,7 @@
               </a:defRPr>
             </a:pPr>
             <a:r>
-              <a:t>Implementation: Module Details</a:t>
+              <a:t>Step 4, 3D Reconstruction</a:t>
             </a:r>
           </a:p>
         </p:txBody>
@@ -6258,7 +6366,7 @@
           <a:p>
             <a:pPr>
               <a:lnSpc>
-                <a:spcPct val="105000"/>
+                <a:spcPct val="108000"/>
               </a:lnSpc>
               <a:spcAft>
                 <a:spcPts val="700"/>
@@ -6270,31 +6378,13 @@
               </a:defRPr>
             </a:pPr>
             <a:r>
-              <a:t>•  Mobile app:</a:t>
-            </a:r>
-          </a:p>
-          <a:p>
-            <a:pPr lvl="1">
-              <a:lnSpc>
-                <a:spcPct val="105000"/>
-              </a:lnSpc>
-              <a:spcAft>
-                <a:spcPts val="300"/>
-              </a:spcAft>
-              <a:defRPr sz="1400">
-                <a:solidFill>
-                  <a:srgbClr val="202020"/>
-                </a:solidFill>
-              </a:defRPr>
-            </a:pPr>
-            <a:r>
-              <a:t>◦  Auth, video capture/trim, pitch-calibration canvas, REST client, 3D viewer.</a:t>
+              <a:t>•  Input: 2D ball path (Step 3) + camera pose (Step 1).</a:t>
             </a:r>
           </a:p>
           <a:p>
             <a:pPr>
               <a:lnSpc>
-                <a:spcPct val="105000"/>
+                <a:spcPct val="108000"/>
               </a:lnSpc>
               <a:spcAft>
                 <a:spcPts val="700"/>
@@ -6306,61 +6396,79 @@
               </a:defRPr>
             </a:pPr>
             <a:r>
-              <a:t>•  Backend pipeline:</a:t>
-            </a:r>
-          </a:p>
-          <a:p>
-            <a:pPr lvl="1">
-              <a:lnSpc>
-                <a:spcPct val="105000"/>
-              </a:lnSpc>
-              <a:spcAft>
-                <a:spcPts val="300"/>
-              </a:spcAft>
-              <a:defRPr sz="1400">
-                <a:solidFill>
-                  <a:srgbClr val="202020"/>
-                </a:solidFill>
-              </a:defRPr>
-            </a:pPr>
-            <a:r>
-              <a:t>◦  Video decoder, ball detector, trajectory finder (RANSAC).</a:t>
-            </a:r>
-          </a:p>
-          <a:p>
-            <a:pPr lvl="1">
-              <a:lnSpc>
-                <a:spcPct val="105000"/>
-              </a:lnSpc>
-              <a:spcAft>
-                <a:spcPts val="300"/>
-              </a:spcAft>
-              <a:defRPr sz="1400">
-                <a:solidFill>
-                  <a:srgbClr val="202020"/>
-                </a:solidFill>
-              </a:defRPr>
-            </a:pPr>
-            <a:r>
-              <a:t>◦  Calibration / camera-pose solver (PnP + homography).</a:t>
-            </a:r>
-          </a:p>
-          <a:p>
-            <a:pPr lvl="1">
-              <a:lnSpc>
-                <a:spcPct val="105000"/>
-              </a:lnSpc>
-              <a:spcAft>
-                <a:spcPts val="300"/>
-              </a:spcAft>
-              <a:defRPr sz="1400">
-                <a:solidFill>
-                  <a:srgbClr val="202020"/>
-                </a:solidFill>
-              </a:defRPr>
-            </a:pPr>
-            <a:r>
-              <a:t>◦  3D reconstruction, LBW decision engine, async job manager.</a:t>
+              <a:t>•  Depth-from-size: cricket ball always 0.036 m radius → smaller in image ⇒ further away.</a:t>
+            </a:r>
+          </a:p>
+          <a:p>
+            <a:pPr>
+              <a:lnSpc>
+                <a:spcPct val="108000"/>
+              </a:lnSpc>
+              <a:spcAft>
+                <a:spcPts val="700"/>
+              </a:spcAft>
+              <a:defRPr sz="1700">
+                <a:solidFill>
+                  <a:srgbClr val="202020"/>
+                </a:solidFill>
+              </a:defRPr>
+            </a:pPr>
+            <a:r>
+              <a:t>•  Rough 3D points → fitted to projectile motion (gravity 9.81 m/s²).</a:t>
+            </a:r>
+          </a:p>
+          <a:p>
+            <a:pPr>
+              <a:lnSpc>
+                <a:spcPct val="108000"/>
+              </a:lnSpc>
+              <a:spcAft>
+                <a:spcPts val="700"/>
+              </a:spcAft>
+              <a:defRPr sz="1700">
+                <a:solidFill>
+                  <a:srgbClr val="202020"/>
+                </a:solidFill>
+              </a:defRPr>
+            </a:pPr>
+            <a:r>
+              <a:t>•  Bounce anchor: bounce pixel back-projected onto pitch plane, the most reliable single point.</a:t>
+            </a:r>
+          </a:p>
+          <a:p>
+            <a:pPr>
+              <a:lnSpc>
+                <a:spcPct val="108000"/>
+              </a:lnSpc>
+              <a:spcAft>
+                <a:spcPts val="700"/>
+              </a:spcAft>
+              <a:defRPr sz="1700">
+                <a:solidFill>
+                  <a:srgbClr val="202020"/>
+                </a:solidFill>
+              </a:defRPr>
+            </a:pPr>
+            <a:r>
+              <a:t>•  Physical bounds on release height + downward velocity prevent impossible solutions.</a:t>
+            </a:r>
+          </a:p>
+          <a:p>
+            <a:pPr>
+              <a:lnSpc>
+                <a:spcPct val="108000"/>
+              </a:lnSpc>
+              <a:spcAft>
+                <a:spcPts val="700"/>
+              </a:spcAft>
+              <a:defRPr sz="1700">
+                <a:solidFill>
+                  <a:srgbClr val="202020"/>
+                </a:solidFill>
+              </a:defRPr>
+            </a:pPr>
+            <a:r>
+              <a:t>•  Quality gate: fit RMS &gt; 0.75 m ⇒ discard reconstruction (return warning, no fake verdict).</a:t>
             </a:r>
           </a:p>
         </p:txBody>
@@ -6421,7 +6529,7 @@
               </a:defRPr>
             </a:pPr>
             <a:r>
-              <a:t>Results: 3D Verdict Render</a:t>
+              <a:t>Step 5, LBW Decision (ICC Rule 36)</a:t>
             </a:r>
           </a:p>
         </p:txBody>
@@ -6470,30 +6578,155 @@
           </a:p>
         </p:txBody>
       </p:sp>
-      <p:pic>
-        <p:nvPicPr>
-          <p:cNvPr id="4" name="Picture 3" descr="app_result_out.png"/>
-          <p:cNvPicPr>
-            <a:picLocks noChangeAspect="1"/>
-          </p:cNvPicPr>
+      <p:sp>
+        <p:nvSpPr>
+          <p:cNvPr id="4" name="TextBox 3"/>
+          <p:cNvSpPr txBox="1"/>
           <p:nvPr/>
-        </p:nvPicPr>
-        <p:blipFill>
-          <a:blip r:embed="rId2"/>
-          <a:stretch>
-            <a:fillRect/>
-          </a:stretch>
-        </p:blipFill>
-        <p:spPr>
-          <a:xfrm>
-            <a:off x="1912776" y="1234440"/>
-            <a:ext cx="5318448" cy="3040380"/>
-          </a:xfrm>
-          <a:prstGeom prst="rect">
-            <a:avLst/>
-          </a:prstGeom>
-        </p:spPr>
-      </p:pic>
+        </p:nvSpPr>
+        <p:spPr>
+          <a:xfrm>
+            <a:off x="502920" y="1234440"/>
+            <a:ext cx="8138160" cy="3040380"/>
+          </a:xfrm>
+          <a:prstGeom prst="rect">
+            <a:avLst/>
+          </a:prstGeom>
+          <a:noFill/>
+        </p:spPr>
+        <p:txBody>
+          <a:bodyPr wrap="square">
+            <a:normAutofit/>
+          </a:bodyPr>
+          <a:lstStyle/>
+          <a:p>
+            <a:pPr>
+              <a:lnSpc>
+                <a:spcPct val="108000"/>
+              </a:lnSpc>
+              <a:spcAft>
+                <a:spcPts val="700"/>
+              </a:spcAft>
+              <a:defRPr sz="1700">
+                <a:solidFill>
+                  <a:srgbClr val="202020"/>
+                </a:solidFill>
+              </a:defRPr>
+            </a:pPr>
+            <a:r>
+              <a:t>•  Three checks, in order:</a:t>
+            </a:r>
+          </a:p>
+          <a:p>
+            <a:pPr lvl="1">
+              <a:lnSpc>
+                <a:spcPct val="108000"/>
+              </a:lnSpc>
+              <a:spcAft>
+                <a:spcPts val="300"/>
+              </a:spcAft>
+              <a:defRPr sz="1400">
+                <a:solidFill>
+                  <a:srgbClr val="202020"/>
+                </a:solidFill>
+              </a:defRPr>
+            </a:pPr>
+            <a:r>
+              <a:t>◦  Pitched in line?  Bounce inside leg-stump line + tolerance.</a:t>
+            </a:r>
+          </a:p>
+          <a:p>
+            <a:pPr lvl="1">
+              <a:lnSpc>
+                <a:spcPct val="108000"/>
+              </a:lnSpc>
+              <a:spcAft>
+                <a:spcPts val="300"/>
+              </a:spcAft>
+              <a:defRPr sz="1400">
+                <a:solidFill>
+                  <a:srgbClr val="202020"/>
+                </a:solidFill>
+              </a:defRPr>
+            </a:pPr>
+            <a:r>
+              <a:t>◦  Impact in line?  Pad strike inside stump line + ball radius.</a:t>
+            </a:r>
+          </a:p>
+          <a:p>
+            <a:pPr lvl="1">
+              <a:lnSpc>
+                <a:spcPct val="108000"/>
+              </a:lnSpc>
+              <a:spcAft>
+                <a:spcPts val="300"/>
+              </a:spcAft>
+              <a:defRPr sz="1400">
+                <a:solidFill>
+                  <a:srgbClr val="202020"/>
+                </a:solidFill>
+              </a:defRPr>
+            </a:pPr>
+            <a:r>
+              <a:t>◦  Hitting stumps?  Project path on to the stump plane.</a:t>
+            </a:r>
+          </a:p>
+          <a:p>
+            <a:pPr>
+              <a:lnSpc>
+                <a:spcPct val="108000"/>
+              </a:lnSpc>
+              <a:spcAft>
+                <a:spcPts val="700"/>
+              </a:spcAft>
+              <a:defRPr sz="1700">
+                <a:solidFill>
+                  <a:srgbClr val="202020"/>
+                </a:solidFill>
+              </a:defRPr>
+            </a:pPr>
+            <a:r>
+              <a:t>•  All three pass ⇒ OUT; inside ±2.5 cm margin ⇒ UMPIRE'S CALL; else NOT OUT.</a:t>
+            </a:r>
+          </a:p>
+          <a:p>
+            <a:pPr>
+              <a:lnSpc>
+                <a:spcPct val="108000"/>
+              </a:lnSpc>
+              <a:spcAft>
+                <a:spcPts val="700"/>
+              </a:spcAft>
+              <a:defRPr sz="1700">
+                <a:solidFill>
+                  <a:srgbClr val="202020"/>
+                </a:solidFill>
+              </a:defRPr>
+            </a:pPr>
+            <a:r>
+              <a:t>•  Vertical band widened to 7.2 cm (one ball-diameter) to reflect monocular depth noise.</a:t>
+            </a:r>
+          </a:p>
+          <a:p>
+            <a:pPr>
+              <a:lnSpc>
+                <a:spcPct val="108000"/>
+              </a:lnSpc>
+              <a:spcAft>
+                <a:spcPts val="700"/>
+              </a:spcAft>
+              <a:defRPr sz="1700">
+                <a:solidFill>
+                  <a:srgbClr val="202020"/>
+                </a:solidFill>
+              </a:defRPr>
+            </a:pPr>
+            <a:r>
+              <a:t>•  Plain-English reason returned with every verdict.</a:t>
+            </a:r>
+          </a:p>
+        </p:txBody>
+      </p:sp>
     </p:spTree>
   </p:cSld>
   <p:clrMapOvr>
@@ -6550,7 +6783,7 @@
               </a:defRPr>
             </a:pPr>
             <a:r>
-              <a:t>Validation: LBW Verdicts</a:t>
+              <a:t>Tools &amp; Implementation</a:t>
             </a:r>
           </a:p>
         </p:txBody>
@@ -6599,40 +6832,16 @@
           </a:p>
         </p:txBody>
       </p:sp>
-      <p:pic>
-        <p:nvPicPr>
-          <p:cNvPr id="4" name="Picture 3" descr="case_out.png"/>
-          <p:cNvPicPr>
-            <a:picLocks noChangeAspect="1"/>
-          </p:cNvPicPr>
-          <p:nvPr/>
-        </p:nvPicPr>
-        <p:blipFill>
-          <a:blip r:embed="rId2"/>
-          <a:stretch>
-            <a:fillRect/>
-          </a:stretch>
-        </p:blipFill>
-        <p:spPr>
-          <a:xfrm>
-            <a:off x="1076325" y="1234440"/>
-            <a:ext cx="1383030" cy="2766060"/>
-          </a:xfrm>
-          <a:prstGeom prst="rect">
-            <a:avLst/>
-          </a:prstGeom>
-        </p:spPr>
-      </p:pic>
       <p:sp>
         <p:nvSpPr>
-          <p:cNvPr id="5" name="TextBox 4"/>
+          <p:cNvPr id="4" name="TextBox 3"/>
           <p:cNvSpPr txBox="1"/>
           <p:nvPr/>
         </p:nvSpPr>
         <p:spPr>
           <a:xfrm>
-            <a:off x="502920" y="4000500"/>
-            <a:ext cx="2529840" cy="274320"/>
+            <a:off x="502920" y="1234440"/>
+            <a:ext cx="8138160" cy="3040380"/>
           </a:xfrm>
           <a:prstGeom prst="rect">
             <a:avLst/>
@@ -6640,138 +6849,116 @@
           <a:noFill/>
         </p:spPr>
         <p:txBody>
-          <a:bodyPr wrap="none">
-            <a:spAutoFit/>
+          <a:bodyPr wrap="square">
+            <a:normAutofit/>
           </a:bodyPr>
           <a:lstStyle/>
           <a:p>
-            <a:pPr algn="ctr">
-              <a:defRPr sz="1200">
-                <a:solidFill>
-                  <a:srgbClr val="202020"/>
-                </a:solidFill>
-              </a:defRPr>
-            </a:pPr>
-            <a:r>
-              <a:t>OUT</a:t>
-            </a:r>
-          </a:p>
-        </p:txBody>
-      </p:sp>
-      <p:pic>
-        <p:nvPicPr>
-          <p:cNvPr id="6" name="Picture 5" descr="case_not_out.png"/>
-          <p:cNvPicPr>
-            <a:picLocks noChangeAspect="1"/>
-          </p:cNvPicPr>
-          <p:nvPr/>
-        </p:nvPicPr>
-        <p:blipFill>
-          <a:blip r:embed="rId3"/>
-          <a:stretch>
-            <a:fillRect/>
-          </a:stretch>
-        </p:blipFill>
-        <p:spPr>
-          <a:xfrm>
-            <a:off x="3880485" y="1234440"/>
-            <a:ext cx="1383030" cy="2766060"/>
-          </a:xfrm>
-          <a:prstGeom prst="rect">
-            <a:avLst/>
-          </a:prstGeom>
-        </p:spPr>
-      </p:pic>
-      <p:sp>
-        <p:nvSpPr>
-          <p:cNvPr id="7" name="TextBox 6"/>
-          <p:cNvSpPr txBox="1"/>
-          <p:nvPr/>
-        </p:nvSpPr>
-        <p:spPr>
-          <a:xfrm>
-            <a:off x="3307080" y="4000500"/>
-            <a:ext cx="2529840" cy="274320"/>
-          </a:xfrm>
-          <a:prstGeom prst="rect">
-            <a:avLst/>
-          </a:prstGeom>
-          <a:noFill/>
-        </p:spPr>
-        <p:txBody>
-          <a:bodyPr wrap="none">
-            <a:spAutoFit/>
-          </a:bodyPr>
-          <a:lstStyle/>
-          <a:p>
-            <a:pPr algn="ctr">
-              <a:defRPr sz="1200">
-                <a:solidFill>
-                  <a:srgbClr val="202020"/>
-                </a:solidFill>
-              </a:defRPr>
-            </a:pPr>
-            <a:r>
-              <a:t>NOT OUT</a:t>
-            </a:r>
-          </a:p>
-        </p:txBody>
-      </p:sp>
-      <p:pic>
-        <p:nvPicPr>
-          <p:cNvPr id="8" name="Picture 7" descr="case_umpires_call.png"/>
-          <p:cNvPicPr>
-            <a:picLocks noChangeAspect="1"/>
-          </p:cNvPicPr>
-          <p:nvPr/>
-        </p:nvPicPr>
-        <p:blipFill>
-          <a:blip r:embed="rId4"/>
-          <a:stretch>
-            <a:fillRect/>
-          </a:stretch>
-        </p:blipFill>
-        <p:spPr>
-          <a:xfrm>
-            <a:off x="6684645" y="1234440"/>
-            <a:ext cx="1383030" cy="2766060"/>
-          </a:xfrm>
-          <a:prstGeom prst="rect">
-            <a:avLst/>
-          </a:prstGeom>
-        </p:spPr>
-      </p:pic>
-      <p:sp>
-        <p:nvSpPr>
-          <p:cNvPr id="9" name="TextBox 8"/>
-          <p:cNvSpPr txBox="1"/>
-          <p:nvPr/>
-        </p:nvSpPr>
-        <p:spPr>
-          <a:xfrm>
-            <a:off x="6111240" y="4000500"/>
-            <a:ext cx="2529840" cy="274320"/>
-          </a:xfrm>
-          <a:prstGeom prst="rect">
-            <a:avLst/>
-          </a:prstGeom>
-          <a:noFill/>
-        </p:spPr>
-        <p:txBody>
-          <a:bodyPr wrap="none">
-            <a:spAutoFit/>
-          </a:bodyPr>
-          <a:lstStyle/>
-          <a:p>
-            <a:pPr algn="ctr">
-              <a:defRPr sz="1200">
-                <a:solidFill>
-                  <a:srgbClr val="202020"/>
-                </a:solidFill>
-              </a:defRPr>
-            </a:pPr>
-            <a:r>
-              <a:t>Umpire's Call</a:t>
+            <a:pPr>
+              <a:lnSpc>
+                <a:spcPct val="108000"/>
+              </a:lnSpc>
+              <a:spcAft>
+                <a:spcPts val="700"/>
+              </a:spcAft>
+              <a:defRPr sz="1700">
+                <a:solidFill>
+                  <a:srgbClr val="202020"/>
+                </a:solidFill>
+              </a:defRPr>
+            </a:pPr>
+            <a:r>
+              <a:t>•  Mobile: Flutter 3.8 (Dart), capture, trim, calibration canvas, REST client, WebView.</a:t>
+            </a:r>
+          </a:p>
+          <a:p>
+            <a:pPr>
+              <a:lnSpc>
+                <a:spcPct val="108000"/>
+              </a:lnSpc>
+              <a:spcAft>
+                <a:spcPts val="700"/>
+              </a:spcAft>
+              <a:defRPr sz="1700">
+                <a:solidFill>
+                  <a:srgbClr val="202020"/>
+                </a:solidFill>
+              </a:defRPr>
+            </a:pPr>
+            <a:r>
+              <a:t>•  Backend: FastAPI on Google Cloud Run, async job manager.</a:t>
+            </a:r>
+          </a:p>
+          <a:p>
+            <a:pPr>
+              <a:lnSpc>
+                <a:spcPct val="108000"/>
+              </a:lnSpc>
+              <a:spcAft>
+                <a:spcPts val="700"/>
+              </a:spcAft>
+              <a:defRPr sz="1700">
+                <a:solidFill>
+                  <a:srgbClr val="202020"/>
+                </a:solidFill>
+              </a:defRPr>
+            </a:pPr>
+            <a:r>
+              <a:t>•  Computer vision: OpenCV 4.8, NumPy 1.24, SciPy 1.11; Ultralytics YOLO.</a:t>
+            </a:r>
+          </a:p>
+          <a:p>
+            <a:pPr>
+              <a:lnSpc>
+                <a:spcPct val="108000"/>
+              </a:lnSpc>
+              <a:spcAft>
+                <a:spcPts val="700"/>
+              </a:spcAft>
+              <a:defRPr sz="1700">
+                <a:solidFill>
+                  <a:srgbClr val="202020"/>
+                </a:solidFill>
+              </a:defRPr>
+            </a:pPr>
+            <a:r>
+              <a:t>•  Data: Firebase Auth + Cloud Firestore + Cloud Storage.</a:t>
+            </a:r>
+          </a:p>
+          <a:p>
+            <a:pPr>
+              <a:lnSpc>
+                <a:spcPct val="108000"/>
+              </a:lnSpc>
+              <a:spcAft>
+                <a:spcPts val="700"/>
+              </a:spcAft>
+              <a:defRPr sz="1700">
+                <a:solidFill>
+                  <a:srgbClr val="202020"/>
+                </a:solidFill>
+              </a:defRPr>
+            </a:pPr>
+            <a:r>
+              <a:t>•  Visualisation: Three.js Hawk-Eye viewer inside a Flutter WebView.</a:t>
+            </a:r>
+          </a:p>
+          <a:p>
+            <a:pPr>
+              <a:lnSpc>
+                <a:spcPct val="108000"/>
+              </a:lnSpc>
+              <a:spcAft>
+                <a:spcPts val="700"/>
+              </a:spcAft>
+              <a:defRPr sz="1700">
+                <a:solidFill>
+                  <a:srgbClr val="202020"/>
+                </a:solidFill>
+              </a:defRPr>
+            </a:pPr>
+            <a:r>
+              <a:t>•  Backend modules per algorithm step; mobile modules per UI screen (testable in isolation).</a:t>
             </a:r>
           </a:p>
         </p:txBody>
@@ -6832,7 +7019,7 @@
               </a:defRPr>
             </a:pPr>
             <a:r>
-              <a:t>Conclusion</a:t>
+              <a:t>Robustness / Edge-Case Hardening</a:t>
             </a:r>
           </a:p>
         </p:txBody>
@@ -6905,7 +7092,7 @@
           <a:p>
             <a:pPr>
               <a:lnSpc>
-                <a:spcPct val="105000"/>
+                <a:spcPct val="108000"/>
               </a:lnSpc>
               <a:spcAft>
                 <a:spcPts val="700"/>
@@ -6917,13 +7104,103 @@
               </a:defRPr>
             </a:pPr>
             <a:r>
-              <a:t>•  A complete single-camera LBW pipeline: calibrate → track → 3D → decision → visualise.</a:t>
+              <a:t>•  A review pass made the system fail safely, never confidently-wrong:</a:t>
+            </a:r>
+          </a:p>
+          <a:p>
+            <a:pPr lvl="1">
+              <a:lnSpc>
+                <a:spcPct val="108000"/>
+              </a:lnSpc>
+              <a:spcAft>
+                <a:spcPts val="300"/>
+              </a:spcAft>
+              <a:defRPr sz="1400">
+                <a:solidFill>
+                  <a:srgbClr val="202020"/>
+                </a:solidFill>
+              </a:defRPr>
+            </a:pPr>
+            <a:r>
+              <a:t>◦  Truncated video headers, decoder stops at last real frame, no padding.</a:t>
+            </a:r>
+          </a:p>
+          <a:p>
+            <a:pPr lvl="1">
+              <a:lnSpc>
+                <a:spcPct val="108000"/>
+              </a:lnSpc>
+              <a:spcAft>
+                <a:spcPts val="300"/>
+              </a:spcAft>
+              <a:defRPr sz="1400">
+                <a:solidFill>
+                  <a:srgbClr val="202020"/>
+                </a:solidFill>
+              </a:defRPr>
+            </a:pPr>
+            <a:r>
+              <a:t>◦  Bad calibration (collinear / duplicate corners), rejected with a clear message.</a:t>
+            </a:r>
+          </a:p>
+          <a:p>
+            <a:pPr lvl="1">
+              <a:lnSpc>
+                <a:spcPct val="108000"/>
+              </a:lnSpc>
+              <a:spcAft>
+                <a:spcPts val="300"/>
+              </a:spcAft>
+              <a:defRPr sz="1400">
+                <a:solidFill>
+                  <a:srgbClr val="202020"/>
+                </a:solidFill>
+              </a:defRPr>
+            </a:pPr>
+            <a:r>
+              <a:t>◦  Invalid numbers (negative dims, NaN detections), caught at input boundary.</a:t>
+            </a:r>
+          </a:p>
+          <a:p>
+            <a:pPr lvl="1">
+              <a:lnSpc>
+                <a:spcPct val="108000"/>
+              </a:lnSpc>
+              <a:spcAft>
+                <a:spcPts val="300"/>
+              </a:spcAft>
+              <a:defRPr sz="1400">
+                <a:solidFill>
+                  <a:srgbClr val="202020"/>
+                </a:solidFill>
+              </a:defRPr>
+            </a:pPr>
+            <a:r>
+              <a:t>◦  Network / token failures in app, clean error after retries, no infinite polling.</a:t>
+            </a:r>
+          </a:p>
+          <a:p>
+            <a:pPr lvl="1">
+              <a:lnSpc>
+                <a:spcPct val="108000"/>
+              </a:lnSpc>
+              <a:spcAft>
+                <a:spcPts val="300"/>
+              </a:spcAft>
+              <a:defRPr sz="1400">
+                <a:solidFill>
+                  <a:srgbClr val="202020"/>
+                </a:solidFill>
+              </a:defRPr>
+            </a:pPr>
+            <a:r>
+              <a:t>◦  3D viewer, non-finite values coerced; reload prompt if scripts never load.</a:t>
             </a:r>
           </a:p>
           <a:p>
             <a:pPr>
               <a:lnSpc>
-                <a:spcPct val="105000"/>
+                <a:spcPct val="108000"/>
               </a:lnSpc>
               <a:spcAft>
                 <a:spcPts val="700"/>
@@ -6935,13 +7212,141 @@
               </a:defRPr>
             </a:pPr>
             <a:r>
-              <a:t>•  Synthetic validation: correct verdict on 53 / 66 deliveries (80.3%), OUT 16/16.</a:t>
-            </a:r>
-          </a:p>
+              <a:t>•  Net effect: correct result, or clear/safe failure, never a fake verdict.</a:t>
+            </a:r>
+          </a:p>
+        </p:txBody>
+      </p:sp>
+    </p:spTree>
+  </p:cSld>
+  <p:clrMapOvr>
+    <a:masterClrMapping/>
+  </p:clrMapOvr>
+</p:sld>
+</file>
+
+<file path=ppt/slides/slide16.xml><?xml version="1.0" encoding="utf-8"?>
+<p:sld xmlns:a="http://schemas.openxmlformats.org/drawingml/2006/main" xmlns:p="http://schemas.openxmlformats.org/presentationml/2006/main" xmlns:r="http://schemas.openxmlformats.org/officeDocument/2006/relationships">
+  <p:cSld>
+    <p:bg>
+      <p:bgPr>
+        <a:solidFill>
+          <a:srgbClr val="FFFFFF"/>
+        </a:solidFill>
+        <a:effectLst/>
+      </p:bgPr>
+    </p:bg>
+    <p:spTree>
+      <p:nvGrpSpPr>
+        <p:cNvPr id="1" name=""/>
+        <p:cNvGrpSpPr/>
+        <p:nvPr/>
+      </p:nvGrpSpPr>
+      <p:grpSpPr/>
+      <p:sp>
+        <p:nvSpPr>
+          <p:cNvPr id="2" name="TextBox 1"/>
+          <p:cNvSpPr txBox="1"/>
+          <p:nvPr/>
+        </p:nvSpPr>
+        <p:spPr>
+          <a:xfrm>
+            <a:off x="502920" y="320040"/>
+            <a:ext cx="8138160" cy="777240"/>
+          </a:xfrm>
+          <a:prstGeom prst="rect">
+            <a:avLst/>
+          </a:prstGeom>
+          <a:noFill/>
+        </p:spPr>
+        <p:txBody>
+          <a:bodyPr wrap="square" anchor="ctr">
+            <a:noAutofit/>
+          </a:bodyPr>
+          <a:lstStyle/>
           <a:p>
             <a:pPr>
-              <a:lnSpc>
-                <a:spcPct val="105000"/>
+              <a:defRPr sz="2600" b="1">
+                <a:solidFill>
+                  <a:srgbClr val="12335B"/>
+                </a:solidFill>
+              </a:defRPr>
+            </a:pPr>
+            <a:r>
+              <a:t>Testing, 20 Unit + 12 System (all pass)</a:t>
+            </a:r>
+          </a:p>
+        </p:txBody>
+      </p:sp>
+      <p:sp>
+        <p:nvSpPr>
+          <p:cNvPr id="3" name="Rectangle 2"/>
+          <p:cNvSpPr/>
+          <p:nvPr/>
+        </p:nvSpPr>
+        <p:spPr>
+          <a:xfrm>
+            <a:off x="502920" y="1097280"/>
+            <a:ext cx="2011680" cy="38100"/>
+          </a:xfrm>
+          <a:prstGeom prst="rect">
+            <a:avLst/>
+          </a:prstGeom>
+          <a:solidFill>
+            <a:srgbClr val="2E6FB5"/>
+          </a:solidFill>
+          <a:ln>
+            <a:noFill/>
+          </a:ln>
+          <a:effectLst/>
+        </p:spPr>
+        <p:style>
+          <a:lnRef idx="1">
+            <a:schemeClr val="accent1"/>
+          </a:lnRef>
+          <a:fillRef idx="3">
+            <a:schemeClr val="accent1"/>
+          </a:fillRef>
+          <a:effectRef idx="2">
+            <a:schemeClr val="accent1"/>
+          </a:effectRef>
+          <a:fontRef idx="minor">
+            <a:schemeClr val="lt1"/>
+          </a:fontRef>
+        </p:style>
+        <p:txBody>
+          <a:bodyPr rtlCol="0" anchor="ctr"/>
+          <a:lstStyle/>
+          <a:p>
+            <a:pPr algn="ctr"/>
+          </a:p>
+        </p:txBody>
+      </p:sp>
+      <p:sp>
+        <p:nvSpPr>
+          <p:cNvPr id="4" name="TextBox 3"/>
+          <p:cNvSpPr txBox="1"/>
+          <p:nvPr/>
+        </p:nvSpPr>
+        <p:spPr>
+          <a:xfrm>
+            <a:off x="502920" y="1234440"/>
+            <a:ext cx="8138160" cy="3040380"/>
+          </a:xfrm>
+          <a:prstGeom prst="rect">
+            <a:avLst/>
+          </a:prstGeom>
+          <a:noFill/>
+        </p:spPr>
+        <p:txBody>
+          <a:bodyPr wrap="square">
+            <a:normAutofit/>
+          </a:bodyPr>
+          <a:lstStyle/>
+          <a:p>
+            <a:pPr>
+              <a:lnSpc>
+                <a:spcPct val="108000"/>
               </a:lnSpc>
               <a:spcAft>
                 <a:spcPts val="700"/>
@@ -6953,13 +7358,13 @@
               </a:defRPr>
             </a:pPr>
             <a:r>
-              <a:t>•  Calibration validated on real footage; learned (YOLO) detector tracks the ball on real clips.</a:t>
+              <a:t>•  Unit (20): calibration (4), detection (4), trajectory (3), reconstruction (2), LBW (5), hardening (1), API (1).</a:t>
             </a:r>
           </a:p>
           <a:p>
             <a:pPr>
               <a:lnSpc>
-                <a:spcPct val="105000"/>
+                <a:spcPct val="108000"/>
               </a:lnSpc>
               <a:spcAft>
                 <a:spcPts val="700"/>
@@ -6971,7 +7376,845 @@
               </a:defRPr>
             </a:pPr>
             <a:r>
-              <a:t>•  Not ICC-certified; future work: multi-camera fusion, on-device inference, real-time streaming.</a:t>
+              <a:t>•  Edge cases covered: twofold-mirror, degenerate corners, fixed-clutter, motion-blur streak, quality gate.</a:t>
+            </a:r>
+          </a:p>
+          <a:p>
+            <a:pPr>
+              <a:lnSpc>
+                <a:spcPct val="108000"/>
+              </a:lnSpc>
+              <a:spcAft>
+                <a:spcPts val="700"/>
+              </a:spcAft>
+              <a:defRPr sz="1700">
+                <a:solidFill>
+                  <a:srgbClr val="202020"/>
+                </a:solidFill>
+              </a:defRPr>
+            </a:pPr>
+            <a:r>
+              <a:t>•  System (12): all 3 verdict classes; bad real clip; good real clip; truncated video; session recovery; viewer safety.</a:t>
+            </a:r>
+          </a:p>
+          <a:p>
+            <a:pPr>
+              <a:lnSpc>
+                <a:spcPct val="108000"/>
+              </a:lnSpc>
+              <a:spcAft>
+                <a:spcPts val="700"/>
+              </a:spcAft>
+              <a:defRPr sz="1700">
+                <a:solidFill>
+                  <a:srgbClr val="202020"/>
+                </a:solidFill>
+              </a:defRPr>
+            </a:pPr>
+            <a:r>
+              <a:t>•  Status: 20 / 20 unit + 12 / 12 system pass on the deployed build.</a:t>
+            </a:r>
+          </a:p>
+        </p:txBody>
+      </p:sp>
+    </p:spTree>
+  </p:cSld>
+  <p:clrMapOvr>
+    <a:masterClrMapping/>
+  </p:clrMapOvr>
+</p:sld>
+</file>
+
+<file path=ppt/slides/slide17.xml><?xml version="1.0" encoding="utf-8"?>
+<p:sld xmlns:a="http://schemas.openxmlformats.org/drawingml/2006/main" xmlns:p="http://schemas.openxmlformats.org/presentationml/2006/main" xmlns:r="http://schemas.openxmlformats.org/officeDocument/2006/relationships">
+  <p:cSld>
+    <p:bg>
+      <p:bgPr>
+        <a:solidFill>
+          <a:srgbClr val="FFFFFF"/>
+        </a:solidFill>
+        <a:effectLst/>
+      </p:bgPr>
+    </p:bg>
+    <p:spTree>
+      <p:nvGrpSpPr>
+        <p:cNvPr id="1" name=""/>
+        <p:cNvGrpSpPr/>
+        <p:nvPr/>
+      </p:nvGrpSpPr>
+      <p:grpSpPr/>
+      <p:sp>
+        <p:nvSpPr>
+          <p:cNvPr id="2" name="TextBox 1"/>
+          <p:cNvSpPr txBox="1"/>
+          <p:nvPr/>
+        </p:nvSpPr>
+        <p:spPr>
+          <a:xfrm>
+            <a:off x="502920" y="320040"/>
+            <a:ext cx="8138160" cy="777240"/>
+          </a:xfrm>
+          <a:prstGeom prst="rect">
+            <a:avLst/>
+          </a:prstGeom>
+          <a:noFill/>
+        </p:spPr>
+        <p:txBody>
+          <a:bodyPr wrap="square" anchor="ctr">
+            <a:noAutofit/>
+          </a:bodyPr>
+          <a:lstStyle/>
+          <a:p>
+            <a:pPr>
+              <a:defRPr sz="2600" b="1">
+                <a:solidFill>
+                  <a:srgbClr val="12335B"/>
+                </a:solidFill>
+              </a:defRPr>
+            </a:pPr>
+            <a:r>
+              <a:t>Synthetic Validation, 66 deliveries</a:t>
+            </a:r>
+          </a:p>
+        </p:txBody>
+      </p:sp>
+      <p:sp>
+        <p:nvSpPr>
+          <p:cNvPr id="3" name="Rectangle 2"/>
+          <p:cNvSpPr/>
+          <p:nvPr/>
+        </p:nvSpPr>
+        <p:spPr>
+          <a:xfrm>
+            <a:off x="502920" y="1097280"/>
+            <a:ext cx="2011680" cy="38100"/>
+          </a:xfrm>
+          <a:prstGeom prst="rect">
+            <a:avLst/>
+          </a:prstGeom>
+          <a:solidFill>
+            <a:srgbClr val="2E6FB5"/>
+          </a:solidFill>
+          <a:ln>
+            <a:noFill/>
+          </a:ln>
+          <a:effectLst/>
+        </p:spPr>
+        <p:style>
+          <a:lnRef idx="1">
+            <a:schemeClr val="accent1"/>
+          </a:lnRef>
+          <a:fillRef idx="3">
+            <a:schemeClr val="accent1"/>
+          </a:fillRef>
+          <a:effectRef idx="2">
+            <a:schemeClr val="accent1"/>
+          </a:effectRef>
+          <a:fontRef idx="minor">
+            <a:schemeClr val="lt1"/>
+          </a:fontRef>
+        </p:style>
+        <p:txBody>
+          <a:bodyPr rtlCol="0" anchor="ctr"/>
+          <a:lstStyle/>
+          <a:p>
+            <a:pPr algn="ctr"/>
+          </a:p>
+        </p:txBody>
+      </p:sp>
+      <p:sp>
+        <p:nvSpPr>
+          <p:cNvPr id="4" name="TextBox 3"/>
+          <p:cNvSpPr txBox="1"/>
+          <p:nvPr/>
+        </p:nvSpPr>
+        <p:spPr>
+          <a:xfrm>
+            <a:off x="502920" y="1234440"/>
+            <a:ext cx="8138160" cy="3040380"/>
+          </a:xfrm>
+          <a:prstGeom prst="rect">
+            <a:avLst/>
+          </a:prstGeom>
+          <a:noFill/>
+        </p:spPr>
+        <p:txBody>
+          <a:bodyPr wrap="square">
+            <a:normAutofit/>
+          </a:bodyPr>
+          <a:lstStyle/>
+          <a:p>
+            <a:pPr>
+              <a:lnSpc>
+                <a:spcPct val="108000"/>
+              </a:lnSpc>
+              <a:spcAft>
+                <a:spcPts val="700"/>
+              </a:spcAft>
+              <a:defRPr sz="1700">
+                <a:solidFill>
+                  <a:srgbClr val="202020"/>
+                </a:solidFill>
+              </a:defRPr>
+            </a:pPr>
+            <a:r>
+              <a:t>•  Controlled OpenCV harness: textured pitch, crease lines, red ball; 1080×1920 @ 60 fps.</a:t>
+            </a:r>
+          </a:p>
+          <a:p>
+            <a:pPr>
+              <a:lnSpc>
+                <a:spcPct val="108000"/>
+              </a:lnSpc>
+              <a:spcAft>
+                <a:spcPts val="700"/>
+              </a:spcAft>
+              <a:defRPr sz="1700">
+                <a:solidFill>
+                  <a:srgbClr val="202020"/>
+                </a:solidFill>
+              </a:defRPr>
+            </a:pPr>
+            <a:r>
+              <a:t>•  Sweep: 3 release speeds × 11 release lines × 2 angles = 66 scenarios.</a:t>
+            </a:r>
+          </a:p>
+          <a:p>
+            <a:pPr>
+              <a:lnSpc>
+                <a:spcPct val="108000"/>
+              </a:lnSpc>
+              <a:spcAft>
+                <a:spcPts val="700"/>
+              </a:spcAft>
+              <a:defRPr sz="1700">
+                <a:solidFill>
+                  <a:srgbClr val="202020"/>
+                </a:solidFill>
+              </a:defRPr>
+            </a:pPr>
+            <a:r>
+              <a:t>•  Camera calibration: 0.00 px reprojection error on every scenario.</a:t>
+            </a:r>
+          </a:p>
+          <a:p>
+            <a:pPr>
+              <a:lnSpc>
+                <a:spcPct val="108000"/>
+              </a:lnSpc>
+              <a:spcAft>
+                <a:spcPts val="700"/>
+              </a:spcAft>
+              <a:defRPr sz="1700">
+                <a:solidFill>
+                  <a:srgbClr val="202020"/>
+                </a:solidFill>
+              </a:defRPr>
+            </a:pPr>
+            <a:r>
+              <a:t>•  Detection: 60–130 candidates / scenario; RANSAC keeps ~95% inliers; image-RMS 10–25 px.</a:t>
+            </a:r>
+          </a:p>
+          <a:p>
+            <a:pPr>
+              <a:lnSpc>
+                <a:spcPct val="108000"/>
+              </a:lnSpc>
+              <a:spcAft>
+                <a:spcPts val="700"/>
+              </a:spcAft>
+              <a:defRPr sz="1700">
+                <a:solidFill>
+                  <a:srgbClr val="202020"/>
+                </a:solidFill>
+              </a:defRPr>
+            </a:pPr>
+            <a:r>
+              <a:t>•  LBW decisions: 53 / 66 correct (80.3%):</a:t>
+            </a:r>
+          </a:p>
+          <a:p>
+            <a:pPr lvl="1">
+              <a:lnSpc>
+                <a:spcPct val="108000"/>
+              </a:lnSpc>
+              <a:spcAft>
+                <a:spcPts val="300"/>
+              </a:spcAft>
+              <a:defRPr sz="1400">
+                <a:solidFill>
+                  <a:srgbClr val="202020"/>
+                </a:solidFill>
+              </a:defRPr>
+            </a:pPr>
+            <a:r>
+              <a:t>◦  OUT 16 / 16 (100%); NOT OUT 36 / 44 (81.8%); Umpire's Call 1 / 6.</a:t>
+            </a:r>
+          </a:p>
+        </p:txBody>
+      </p:sp>
+    </p:spTree>
+  </p:cSld>
+  <p:clrMapOvr>
+    <a:masterClrMapping/>
+  </p:clrMapOvr>
+</p:sld>
+</file>
+
+<file path=ppt/slides/slide18.xml><?xml version="1.0" encoding="utf-8"?>
+<p:sld xmlns:a="http://schemas.openxmlformats.org/drawingml/2006/main" xmlns:p="http://schemas.openxmlformats.org/presentationml/2006/main" xmlns:r="http://schemas.openxmlformats.org/officeDocument/2006/relationships">
+  <p:cSld>
+    <p:bg>
+      <p:bgPr>
+        <a:solidFill>
+          <a:srgbClr val="FFFFFF"/>
+        </a:solidFill>
+        <a:effectLst/>
+      </p:bgPr>
+    </p:bg>
+    <p:spTree>
+      <p:nvGrpSpPr>
+        <p:cNvPr id="1" name=""/>
+        <p:cNvGrpSpPr/>
+        <p:nvPr/>
+      </p:nvGrpSpPr>
+      <p:grpSpPr/>
+      <p:sp>
+        <p:nvSpPr>
+          <p:cNvPr id="2" name="TextBox 1"/>
+          <p:cNvSpPr txBox="1"/>
+          <p:nvPr/>
+        </p:nvSpPr>
+        <p:spPr>
+          <a:xfrm>
+            <a:off x="502920" y="320040"/>
+            <a:ext cx="8138160" cy="777240"/>
+          </a:xfrm>
+          <a:prstGeom prst="rect">
+            <a:avLst/>
+          </a:prstGeom>
+          <a:noFill/>
+        </p:spPr>
+        <p:txBody>
+          <a:bodyPr wrap="square" anchor="ctr">
+            <a:noAutofit/>
+          </a:bodyPr>
+          <a:lstStyle/>
+          <a:p>
+            <a:pPr>
+              <a:defRPr sz="2600" b="1">
+                <a:solidFill>
+                  <a:srgbClr val="12335B"/>
+                </a:solidFill>
+              </a:defRPr>
+            </a:pPr>
+            <a:r>
+              <a:t>Result Renders, Three LBW Verdicts</a:t>
+            </a:r>
+          </a:p>
+          <a:p>
+            <a:pPr>
+              <a:defRPr sz="1300" i="1">
+                <a:solidFill>
+                  <a:srgbClr val="555555"/>
+                </a:solidFill>
+              </a:defRPr>
+            </a:pPr>
+            <a:r>
+              <a:t>Real Three.js viewer renders from real pipeline output (synthetic sweep).</a:t>
+            </a:r>
+          </a:p>
+        </p:txBody>
+      </p:sp>
+      <p:sp>
+        <p:nvSpPr>
+          <p:cNvPr id="3" name="Rectangle 2"/>
+          <p:cNvSpPr/>
+          <p:nvPr/>
+        </p:nvSpPr>
+        <p:spPr>
+          <a:xfrm>
+            <a:off x="502920" y="1097280"/>
+            <a:ext cx="2011680" cy="38100"/>
+          </a:xfrm>
+          <a:prstGeom prst="rect">
+            <a:avLst/>
+          </a:prstGeom>
+          <a:solidFill>
+            <a:srgbClr val="2E6FB5"/>
+          </a:solidFill>
+          <a:ln>
+            <a:noFill/>
+          </a:ln>
+          <a:effectLst/>
+        </p:spPr>
+        <p:style>
+          <a:lnRef idx="1">
+            <a:schemeClr val="accent1"/>
+          </a:lnRef>
+          <a:fillRef idx="3">
+            <a:schemeClr val="accent1"/>
+          </a:fillRef>
+          <a:effectRef idx="2">
+            <a:schemeClr val="accent1"/>
+          </a:effectRef>
+          <a:fontRef idx="minor">
+            <a:schemeClr val="lt1"/>
+          </a:fontRef>
+        </p:style>
+        <p:txBody>
+          <a:bodyPr rtlCol="0" anchor="ctr"/>
+          <a:lstStyle/>
+          <a:p>
+            <a:pPr algn="ctr"/>
+          </a:p>
+        </p:txBody>
+      </p:sp>
+      <p:pic>
+        <p:nvPicPr>
+          <p:cNvPr id="4" name="Picture 3" descr="case_out.png"/>
+          <p:cNvPicPr>
+            <a:picLocks noChangeAspect="1"/>
+          </p:cNvPicPr>
+          <p:nvPr/>
+        </p:nvPicPr>
+        <p:blipFill>
+          <a:blip r:embed="rId2"/>
+          <a:stretch>
+            <a:fillRect/>
+          </a:stretch>
+        </p:blipFill>
+        <p:spPr>
+          <a:xfrm>
+            <a:off x="1080897" y="1234440"/>
+            <a:ext cx="1373886" cy="2747772"/>
+          </a:xfrm>
+          <a:prstGeom prst="rect">
+            <a:avLst/>
+          </a:prstGeom>
+        </p:spPr>
+      </p:pic>
+      <p:sp>
+        <p:nvSpPr>
+          <p:cNvPr id="5" name="TextBox 4"/>
+          <p:cNvSpPr txBox="1"/>
+          <p:nvPr/>
+        </p:nvSpPr>
+        <p:spPr>
+          <a:xfrm>
+            <a:off x="502920" y="3982212"/>
+            <a:ext cx="2529840" cy="292608"/>
+          </a:xfrm>
+          <a:prstGeom prst="rect">
+            <a:avLst/>
+          </a:prstGeom>
+          <a:noFill/>
+        </p:spPr>
+        <p:txBody>
+          <a:bodyPr wrap="none">
+            <a:spAutoFit/>
+          </a:bodyPr>
+          <a:lstStyle/>
+          <a:p>
+            <a:pPr algn="ctr">
+              <a:defRPr sz="1200" b="1">
+                <a:solidFill>
+                  <a:srgbClr val="202020"/>
+                </a:solidFill>
+              </a:defRPr>
+            </a:pPr>
+            <a:r>
+              <a:t>OUT</a:t>
+            </a:r>
+          </a:p>
+        </p:txBody>
+      </p:sp>
+      <p:pic>
+        <p:nvPicPr>
+          <p:cNvPr id="6" name="Picture 5" descr="case_not_out.png"/>
+          <p:cNvPicPr>
+            <a:picLocks noChangeAspect="1"/>
+          </p:cNvPicPr>
+          <p:nvPr/>
+        </p:nvPicPr>
+        <p:blipFill>
+          <a:blip r:embed="rId3"/>
+          <a:stretch>
+            <a:fillRect/>
+          </a:stretch>
+        </p:blipFill>
+        <p:spPr>
+          <a:xfrm>
+            <a:off x="3885057" y="1234440"/>
+            <a:ext cx="1373886" cy="2747772"/>
+          </a:xfrm>
+          <a:prstGeom prst="rect">
+            <a:avLst/>
+          </a:prstGeom>
+        </p:spPr>
+      </p:pic>
+      <p:sp>
+        <p:nvSpPr>
+          <p:cNvPr id="7" name="TextBox 6"/>
+          <p:cNvSpPr txBox="1"/>
+          <p:nvPr/>
+        </p:nvSpPr>
+        <p:spPr>
+          <a:xfrm>
+            <a:off x="3307080" y="3982212"/>
+            <a:ext cx="2529840" cy="292608"/>
+          </a:xfrm>
+          <a:prstGeom prst="rect">
+            <a:avLst/>
+          </a:prstGeom>
+          <a:noFill/>
+        </p:spPr>
+        <p:txBody>
+          <a:bodyPr wrap="none">
+            <a:spAutoFit/>
+          </a:bodyPr>
+          <a:lstStyle/>
+          <a:p>
+            <a:pPr algn="ctr">
+              <a:defRPr sz="1200" b="1">
+                <a:solidFill>
+                  <a:srgbClr val="202020"/>
+                </a:solidFill>
+              </a:defRPr>
+            </a:pPr>
+            <a:r>
+              <a:t>NOT OUT</a:t>
+            </a:r>
+          </a:p>
+        </p:txBody>
+      </p:sp>
+      <p:pic>
+        <p:nvPicPr>
+          <p:cNvPr id="8" name="Picture 7" descr="case_umpires_call.png"/>
+          <p:cNvPicPr>
+            <a:picLocks noChangeAspect="1"/>
+          </p:cNvPicPr>
+          <p:nvPr/>
+        </p:nvPicPr>
+        <p:blipFill>
+          <a:blip r:embed="rId4"/>
+          <a:stretch>
+            <a:fillRect/>
+          </a:stretch>
+        </p:blipFill>
+        <p:spPr>
+          <a:xfrm>
+            <a:off x="6689217" y="1234440"/>
+            <a:ext cx="1373886" cy="2747772"/>
+          </a:xfrm>
+          <a:prstGeom prst="rect">
+            <a:avLst/>
+          </a:prstGeom>
+        </p:spPr>
+      </p:pic>
+      <p:sp>
+        <p:nvSpPr>
+          <p:cNvPr id="9" name="TextBox 8"/>
+          <p:cNvSpPr txBox="1"/>
+          <p:nvPr/>
+        </p:nvSpPr>
+        <p:spPr>
+          <a:xfrm>
+            <a:off x="6111240" y="3982212"/>
+            <a:ext cx="2529840" cy="292608"/>
+          </a:xfrm>
+          <a:prstGeom prst="rect">
+            <a:avLst/>
+          </a:prstGeom>
+          <a:noFill/>
+        </p:spPr>
+        <p:txBody>
+          <a:bodyPr wrap="none">
+            <a:spAutoFit/>
+          </a:bodyPr>
+          <a:lstStyle/>
+          <a:p>
+            <a:pPr algn="ctr">
+              <a:defRPr sz="1200" b="1">
+                <a:solidFill>
+                  <a:srgbClr val="202020"/>
+                </a:solidFill>
+              </a:defRPr>
+            </a:pPr>
+            <a:r>
+              <a:t>Umpire's Call</a:t>
+            </a:r>
+          </a:p>
+        </p:txBody>
+      </p:sp>
+    </p:spTree>
+  </p:cSld>
+  <p:clrMapOvr>
+    <a:masterClrMapping/>
+  </p:clrMapOvr>
+</p:sld>
+</file>
+
+<file path=ppt/slides/slide19.xml><?xml version="1.0" encoding="utf-8"?>
+<p:sld xmlns:a="http://schemas.openxmlformats.org/drawingml/2006/main" xmlns:p="http://schemas.openxmlformats.org/presentationml/2006/main" xmlns:r="http://schemas.openxmlformats.org/officeDocument/2006/relationships">
+  <p:cSld>
+    <p:bg>
+      <p:bgPr>
+        <a:solidFill>
+          <a:srgbClr val="FFFFFF"/>
+        </a:solidFill>
+        <a:effectLst/>
+      </p:bgPr>
+    </p:bg>
+    <p:spTree>
+      <p:nvGrpSpPr>
+        <p:cNvPr id="1" name=""/>
+        <p:cNvGrpSpPr/>
+        <p:nvPr/>
+      </p:nvGrpSpPr>
+      <p:grpSpPr/>
+      <p:sp>
+        <p:nvSpPr>
+          <p:cNvPr id="2" name="TextBox 1"/>
+          <p:cNvSpPr txBox="1"/>
+          <p:nvPr/>
+        </p:nvSpPr>
+        <p:spPr>
+          <a:xfrm>
+            <a:off x="502920" y="320040"/>
+            <a:ext cx="8138160" cy="777240"/>
+          </a:xfrm>
+          <a:prstGeom prst="rect">
+            <a:avLst/>
+          </a:prstGeom>
+          <a:noFill/>
+        </p:spPr>
+        <p:txBody>
+          <a:bodyPr wrap="square" anchor="ctr">
+            <a:noAutofit/>
+          </a:bodyPr>
+          <a:lstStyle/>
+          <a:p>
+            <a:pPr>
+              <a:defRPr sz="2600" b="1">
+                <a:solidFill>
+                  <a:srgbClr val="12335B"/>
+                </a:solidFill>
+              </a:defRPr>
+            </a:pPr>
+            <a:r>
+              <a:t>Real-World Validation, bad clip vs good clip</a:t>
+            </a:r>
+          </a:p>
+          <a:p>
+            <a:pPr>
+              <a:defRPr sz="1300" i="1">
+                <a:solidFill>
+                  <a:srgbClr val="555555"/>
+                </a:solidFill>
+              </a:defRPr>
+            </a:pPr>
+            <a:r>
+              <a:t>Bowler's release (green) → arrival at the batter (red).</a:t>
+            </a:r>
+          </a:p>
+        </p:txBody>
+      </p:sp>
+      <p:sp>
+        <p:nvSpPr>
+          <p:cNvPr id="3" name="Rectangle 2"/>
+          <p:cNvSpPr/>
+          <p:nvPr/>
+        </p:nvSpPr>
+        <p:spPr>
+          <a:xfrm>
+            <a:off x="502920" y="1097280"/>
+            <a:ext cx="2011680" cy="38100"/>
+          </a:xfrm>
+          <a:prstGeom prst="rect">
+            <a:avLst/>
+          </a:prstGeom>
+          <a:solidFill>
+            <a:srgbClr val="2E6FB5"/>
+          </a:solidFill>
+          <a:ln>
+            <a:noFill/>
+          </a:ln>
+          <a:effectLst/>
+        </p:spPr>
+        <p:style>
+          <a:lnRef idx="1">
+            <a:schemeClr val="accent1"/>
+          </a:lnRef>
+          <a:fillRef idx="3">
+            <a:schemeClr val="accent1"/>
+          </a:fillRef>
+          <a:effectRef idx="2">
+            <a:schemeClr val="accent1"/>
+          </a:effectRef>
+          <a:fontRef idx="minor">
+            <a:schemeClr val="lt1"/>
+          </a:fontRef>
+        </p:style>
+        <p:txBody>
+          <a:bodyPr rtlCol="0" anchor="ctr"/>
+          <a:lstStyle/>
+          <a:p>
+            <a:pPr algn="ctr"/>
+          </a:p>
+        </p:txBody>
+      </p:sp>
+      <p:pic>
+        <p:nvPicPr>
+          <p:cNvPr id="4" name="Picture 3" descr="test3_path_overlay.png"/>
+          <p:cNvPicPr>
+            <a:picLocks noChangeAspect="1"/>
+          </p:cNvPicPr>
+          <p:nvPr/>
+        </p:nvPicPr>
+        <p:blipFill>
+          <a:blip r:embed="rId2"/>
+          <a:stretch>
+            <a:fillRect/>
+          </a:stretch>
+        </p:blipFill>
+        <p:spPr>
+          <a:xfrm>
+            <a:off x="1682353" y="1234440"/>
+            <a:ext cx="1710213" cy="3040380"/>
+          </a:xfrm>
+          <a:prstGeom prst="rect">
+            <a:avLst/>
+          </a:prstGeom>
+        </p:spPr>
+      </p:pic>
+      <p:sp>
+        <p:nvSpPr>
+          <p:cNvPr id="5" name="TextBox 4"/>
+          <p:cNvSpPr txBox="1"/>
+          <p:nvPr/>
+        </p:nvSpPr>
+        <p:spPr>
+          <a:xfrm>
+            <a:off x="4754880" y="1234440"/>
+            <a:ext cx="3743553" cy="3040380"/>
+          </a:xfrm>
+          <a:prstGeom prst="rect">
+            <a:avLst/>
+          </a:prstGeom>
+          <a:noFill/>
+        </p:spPr>
+        <p:txBody>
+          <a:bodyPr wrap="square">
+            <a:normAutofit/>
+          </a:bodyPr>
+          <a:lstStyle/>
+          <a:p>
+            <a:pPr>
+              <a:lnSpc>
+                <a:spcPct val="110000"/>
+              </a:lnSpc>
+              <a:spcAft>
+                <a:spcPts val="800"/>
+              </a:spcAft>
+              <a:defRPr sz="1500">
+                <a:solidFill>
+                  <a:srgbClr val="202020"/>
+                </a:solidFill>
+              </a:defRPr>
+            </a:pPr>
+            <a:r>
+              <a:t>•  Clip 1 (bad): low camera + netting + clutter ⇒ system safely refused, no fake verdict.</a:t>
+            </a:r>
+          </a:p>
+          <a:p>
+            <a:pPr>
+              <a:lnSpc>
+                <a:spcPct val="110000"/>
+              </a:lnSpc>
+              <a:spcAft>
+                <a:spcPts val="800"/>
+              </a:spcAft>
+              <a:defRPr sz="1500">
+                <a:solidFill>
+                  <a:srgbClr val="202020"/>
+                </a:solidFill>
+              </a:defRPr>
+            </a:pPr>
+            <a:r>
+              <a:t>•  Clip 2 (good, shown): off-spin (flighted), ball stays visible above the bowler.</a:t>
+            </a:r>
+          </a:p>
+          <a:p>
+            <a:pPr>
+              <a:lnSpc>
+                <a:spcPct val="110000"/>
+              </a:lnSpc>
+              <a:spcAft>
+                <a:spcPts val="800"/>
+              </a:spcAft>
+              <a:defRPr sz="1500">
+                <a:solidFill>
+                  <a:srgbClr val="202020"/>
+                </a:solidFill>
+              </a:defRPr>
+            </a:pPr>
+            <a:r>
+              <a:t>•  YOLO + RANSAC: 25 ball positions, 22 inliers, image-RMS 14.4 px.</a:t>
+            </a:r>
+          </a:p>
+          <a:p>
+            <a:pPr>
+              <a:lnSpc>
+                <a:spcPct val="110000"/>
+              </a:lnSpc>
+              <a:spcAft>
+                <a:spcPts val="800"/>
+              </a:spcAft>
+              <a:defRPr sz="1500">
+                <a:solidFill>
+                  <a:srgbClr val="202020"/>
+                </a:solidFill>
+              </a:defRPr>
+            </a:pPr>
+            <a:r>
+              <a:t>•  Fixed-clutter suppression removed a recurring red false-positive.</a:t>
+            </a:r>
+          </a:p>
+          <a:p>
+            <a:pPr>
+              <a:lnSpc>
+                <a:spcPct val="110000"/>
+              </a:lnSpc>
+              <a:spcAft>
+                <a:spcPts val="800"/>
+              </a:spcAft>
+              <a:defRPr sz="1500">
+                <a:solidFill>
+                  <a:srgbClr val="202020"/>
+                </a:solidFill>
+              </a:defRPr>
+            </a:pPr>
+            <a:r>
+              <a:t>•  Truncation guard stopped at frame 101 (header claimed 290).</a:t>
+            </a:r>
+          </a:p>
+          <a:p>
+            <a:pPr>
+              <a:lnSpc>
+                <a:spcPct val="110000"/>
+              </a:lnSpc>
+              <a:spcAft>
+                <a:spcPts val="800"/>
+              </a:spcAft>
+              <a:defRPr sz="1500">
+                <a:solidFill>
+                  <a:srgbClr val="202020"/>
+                </a:solidFill>
+              </a:defRPr>
+            </a:pPr>
+            <a:r>
+              <a:t>•  Same unchanged pipeline produced a clean full-flight 2D track + plausible 3D arc.</a:t>
             </a:r>
           </a:p>
         </p:txBody>
@@ -7032,7 +8275,7 @@
               </a:defRPr>
             </a:pPr>
             <a:r>
-              <a:t>Introduction</a:t>
+              <a:t>Introduction &amp; Problem Statement</a:t>
             </a:r>
           </a:p>
         </p:txBody>
@@ -7105,7 +8348,7 @@
           <a:p>
             <a:pPr>
               <a:lnSpc>
-                <a:spcPct val="105000"/>
+                <a:spcPct val="108000"/>
               </a:lnSpc>
               <a:spcAft>
                 <a:spcPts val="700"/>
@@ -7117,13 +8360,13 @@
               </a:defRPr>
             </a:pPr>
             <a:r>
-              <a:t>•  Cricket officiating increasingly relies on technology for close LBW decisions.</a:t>
+              <a:t>•  Cricket relies on tech to review close LBW decisions, Hawk-Eye uses 6–8 synchronised high-speed cameras.</a:t>
             </a:r>
           </a:p>
           <a:p>
             <a:pPr>
               <a:lnSpc>
-                <a:spcPct val="105000"/>
+                <a:spcPct val="108000"/>
               </a:lnSpc>
               <a:spcAft>
                 <a:spcPts val="700"/>
@@ -7135,13 +8378,31 @@
               </a:defRPr>
             </a:pPr>
             <a:r>
-              <a:t>•  Professional systems (e.g. Hawk-Eye) use 6 to 8 synchronised high-speed cameras.</a:t>
+              <a:t>•  Hawk-Eye is accurate (3–5 mm) but unaffordable for schools, clubs, nets.</a:t>
+            </a:r>
+          </a:p>
+          <a:p>
+            <a:pPr>
+              <a:lnSpc>
+                <a:spcPct val="108000"/>
+              </a:lnSpc>
+              <a:spcAft>
+                <a:spcPts val="700"/>
+              </a:spcAft>
+              <a:defRPr sz="1700">
+                <a:solidFill>
+                  <a:srgbClr val="202020"/>
+                </a:solidFill>
+              </a:defRPr>
+            </a:pPr>
+            <a:r>
+              <a:t>•  Single phone camera makes the problem hard:</a:t>
             </a:r>
           </a:p>
           <a:p>
             <a:pPr lvl="1">
               <a:lnSpc>
-                <a:spcPct val="105000"/>
+                <a:spcPct val="108000"/>
               </a:lnSpc>
               <a:spcAft>
                 <a:spcPts val="300"/>
@@ -7153,13 +8414,31 @@
               </a:defRPr>
             </a:pPr>
             <a:r>
-              <a:t>◦  Costly, complex, and impractical for schools, clubs, and training grounds.</a:t>
+              <a:t>◦  No direct depth from one view; ball is small, fast, motion-blurred.</a:t>
+            </a:r>
+          </a:p>
+          <a:p>
+            <a:pPr lvl="1">
+              <a:lnSpc>
+                <a:spcPct val="108000"/>
+              </a:lnSpc>
+              <a:spcAft>
+                <a:spcPts val="300"/>
+              </a:spcAft>
+              <a:defRPr sz="1400">
+                <a:solidFill>
+                  <a:srgbClr val="202020"/>
+                </a:solidFill>
+              </a:defRPr>
+            </a:pPr>
+            <a:r>
+              <a:t>◦  Small calibration errors blow up at the far end of the pitch.</a:t>
             </a:r>
           </a:p>
           <a:p>
             <a:pPr>
               <a:lnSpc>
-                <a:spcPct val="105000"/>
+                <a:spcPct val="108000"/>
               </a:lnSpc>
               <a:spcAft>
                 <a:spcPts val="700"/>
@@ -7171,13 +8450,213 @@
               </a:defRPr>
             </a:pPr>
             <a:r>
-              <a:t>•  PocketDRS: low-cost LBW support from a single smartphone camera + a lightweight server.</a:t>
+              <a:t>•  Question: can a single-camera workflow + pitch geometry give consistent LBW review support?</a:t>
+            </a:r>
+          </a:p>
+        </p:txBody>
+      </p:sp>
+    </p:spTree>
+  </p:cSld>
+  <p:clrMapOvr>
+    <a:masterClrMapping/>
+  </p:clrMapOvr>
+</p:sld>
+</file>
+
+<file path=ppt/slides/slide20.xml><?xml version="1.0" encoding="utf-8"?>
+<p:sld xmlns:a="http://schemas.openxmlformats.org/drawingml/2006/main" xmlns:p="http://schemas.openxmlformats.org/presentationml/2006/main" xmlns:r="http://schemas.openxmlformats.org/officeDocument/2006/relationships">
+  <p:cSld>
+    <p:bg>
+      <p:bgPr>
+        <a:solidFill>
+          <a:srgbClr val="FFFFFF"/>
+        </a:solidFill>
+        <a:effectLst/>
+      </p:bgPr>
+    </p:bg>
+    <p:spTree>
+      <p:nvGrpSpPr>
+        <p:cNvPr id="1" name=""/>
+        <p:cNvGrpSpPr/>
+        <p:nvPr/>
+      </p:nvGrpSpPr>
+      <p:grpSpPr/>
+      <p:sp>
+        <p:nvSpPr>
+          <p:cNvPr id="2" name="TextBox 1"/>
+          <p:cNvSpPr txBox="1"/>
+          <p:nvPr/>
+        </p:nvSpPr>
+        <p:spPr>
+          <a:xfrm>
+            <a:off x="502920" y="320040"/>
+            <a:ext cx="8138160" cy="777240"/>
+          </a:xfrm>
+          <a:prstGeom prst="rect">
+            <a:avLst/>
+          </a:prstGeom>
+          <a:noFill/>
+        </p:spPr>
+        <p:txBody>
+          <a:bodyPr wrap="square" anchor="ctr">
+            <a:noAutofit/>
+          </a:bodyPr>
+          <a:lstStyle/>
+          <a:p>
+            <a:pPr>
+              <a:defRPr sz="2600" b="1">
+                <a:solidFill>
+                  <a:srgbClr val="12335B"/>
+                </a:solidFill>
+              </a:defRPr>
+            </a:pPr>
+            <a:r>
+              <a:t>Conclusion + Lessons Learned</a:t>
+            </a:r>
+          </a:p>
+        </p:txBody>
+      </p:sp>
+      <p:sp>
+        <p:nvSpPr>
+          <p:cNvPr id="3" name="Rectangle 2"/>
+          <p:cNvSpPr/>
+          <p:nvPr/>
+        </p:nvSpPr>
+        <p:spPr>
+          <a:xfrm>
+            <a:off x="502920" y="1097280"/>
+            <a:ext cx="2011680" cy="38100"/>
+          </a:xfrm>
+          <a:prstGeom prst="rect">
+            <a:avLst/>
+          </a:prstGeom>
+          <a:solidFill>
+            <a:srgbClr val="2E6FB5"/>
+          </a:solidFill>
+          <a:ln>
+            <a:noFill/>
+          </a:ln>
+          <a:effectLst/>
+        </p:spPr>
+        <p:style>
+          <a:lnRef idx="1">
+            <a:schemeClr val="accent1"/>
+          </a:lnRef>
+          <a:fillRef idx="3">
+            <a:schemeClr val="accent1"/>
+          </a:fillRef>
+          <a:effectRef idx="2">
+            <a:schemeClr val="accent1"/>
+          </a:effectRef>
+          <a:fontRef idx="minor">
+            <a:schemeClr val="lt1"/>
+          </a:fontRef>
+        </p:style>
+        <p:txBody>
+          <a:bodyPr rtlCol="0" anchor="ctr"/>
+          <a:lstStyle/>
+          <a:p>
+            <a:pPr algn="ctr"/>
+          </a:p>
+        </p:txBody>
+      </p:sp>
+      <p:sp>
+        <p:nvSpPr>
+          <p:cNvPr id="4" name="TextBox 3"/>
+          <p:cNvSpPr txBox="1"/>
+          <p:nvPr/>
+        </p:nvSpPr>
+        <p:spPr>
+          <a:xfrm>
+            <a:off x="502920" y="1234440"/>
+            <a:ext cx="8138160" cy="3040380"/>
+          </a:xfrm>
+          <a:prstGeom prst="rect">
+            <a:avLst/>
+          </a:prstGeom>
+          <a:noFill/>
+        </p:spPr>
+        <p:txBody>
+          <a:bodyPr wrap="square">
+            <a:normAutofit/>
+          </a:bodyPr>
+          <a:lstStyle/>
+          <a:p>
+            <a:pPr>
+              <a:lnSpc>
+                <a:spcPct val="108000"/>
+              </a:lnSpc>
+              <a:spcAft>
+                <a:spcPts val="700"/>
+              </a:spcAft>
+              <a:defRPr sz="1700">
+                <a:solidFill>
+                  <a:srgbClr val="202020"/>
+                </a:solidFill>
+              </a:defRPr>
+            </a:pPr>
+            <a:r>
+              <a:t>•  Full single-camera LBW pipeline: calibrate → detect → track → 3D → decide → visualise.</a:t>
+            </a:r>
+          </a:p>
+          <a:p>
+            <a:pPr>
+              <a:lnSpc>
+                <a:spcPct val="108000"/>
+              </a:lnSpc>
+              <a:spcAft>
+                <a:spcPts val="700"/>
+              </a:spcAft>
+              <a:defRPr sz="1700">
+                <a:solidFill>
+                  <a:srgbClr val="202020"/>
+                </a:solidFill>
+              </a:defRPr>
+            </a:pPr>
+            <a:r>
+              <a:t>•  Synthetic: 53 / 66 correct (80.3%); OUT class 16 / 16 (100%).</a:t>
+            </a:r>
+          </a:p>
+          <a:p>
+            <a:pPr>
+              <a:lnSpc>
+                <a:spcPct val="108000"/>
+              </a:lnSpc>
+              <a:spcAft>
+                <a:spcPts val="700"/>
+              </a:spcAft>
+              <a:defRPr sz="1700">
+                <a:solidFill>
+                  <a:srgbClr val="202020"/>
+                </a:solidFill>
+              </a:defRPr>
+            </a:pPr>
+            <a:r>
+              <a:t>•  Real clip (good): clean track + plausible 3D arc. Real clip (bad): safe refusal.</a:t>
+            </a:r>
+          </a:p>
+          <a:p>
+            <a:pPr>
+              <a:lnSpc>
+                <a:spcPct val="108000"/>
+              </a:lnSpc>
+              <a:spcAft>
+                <a:spcPts val="700"/>
+              </a:spcAft>
+              <a:defRPr sz="1700">
+                <a:solidFill>
+                  <a:srgbClr val="202020"/>
+                </a:solidFill>
+              </a:defRPr>
+            </a:pPr>
+            <a:r>
+              <a:t>•  Lessons:</a:t>
             </a:r>
           </a:p>
           <a:p>
             <a:pPr lvl="1">
               <a:lnSpc>
-                <a:spcPct val="105000"/>
+                <a:spcPct val="108000"/>
               </a:lnSpc>
               <a:spcAft>
                 <a:spcPts val="300"/>
@@ -7189,7 +8668,479 @@
               </a:defRPr>
             </a:pPr>
             <a:r>
-              <a:t>◦  Record delivery → mark pitch corners → analyse → 3D visualisation + LBW verdict.</a:t>
+              <a:t>◦  Strong physical constraints beat raw ML on small data.</a:t>
+            </a:r>
+          </a:p>
+          <a:p>
+            <a:pPr lvl="1">
+              <a:lnSpc>
+                <a:spcPct val="108000"/>
+              </a:lnSpc>
+              <a:spcAft>
+                <a:spcPts val="300"/>
+              </a:spcAft>
+              <a:defRPr sz="1400">
+                <a:solidFill>
+                  <a:srgbClr val="202020"/>
+                </a:solidFill>
+              </a:defRPr>
+            </a:pPr>
+            <a:r>
+              <a:t>◦  User calibration is the single biggest accuracy driver.</a:t>
+            </a:r>
+          </a:p>
+          <a:p>
+            <a:pPr lvl="1">
+              <a:lnSpc>
+                <a:spcPct val="108000"/>
+              </a:lnSpc>
+              <a:spcAft>
+                <a:spcPts val="300"/>
+              </a:spcAft>
+              <a:defRPr sz="1400">
+                <a:solidFill>
+                  <a:srgbClr val="202020"/>
+                </a:solidFill>
+              </a:defRPr>
+            </a:pPr>
+            <a:r>
+              <a:t>◦  Fail-safe behaviour matters more than coverage for a decision-support tool.</a:t>
+            </a:r>
+          </a:p>
+        </p:txBody>
+      </p:sp>
+    </p:spTree>
+  </p:cSld>
+  <p:clrMapOvr>
+    <a:masterClrMapping/>
+  </p:clrMapOvr>
+</p:sld>
+</file>
+
+<file path=ppt/slides/slide21.xml><?xml version="1.0" encoding="utf-8"?>
+<p:sld xmlns:a="http://schemas.openxmlformats.org/drawingml/2006/main" xmlns:p="http://schemas.openxmlformats.org/presentationml/2006/main" xmlns:r="http://schemas.openxmlformats.org/officeDocument/2006/relationships">
+  <p:cSld>
+    <p:bg>
+      <p:bgPr>
+        <a:solidFill>
+          <a:srgbClr val="FFFFFF"/>
+        </a:solidFill>
+        <a:effectLst/>
+      </p:bgPr>
+    </p:bg>
+    <p:spTree>
+      <p:nvGrpSpPr>
+        <p:cNvPr id="1" name=""/>
+        <p:cNvGrpSpPr/>
+        <p:nvPr/>
+      </p:nvGrpSpPr>
+      <p:grpSpPr/>
+      <p:sp>
+        <p:nvSpPr>
+          <p:cNvPr id="2" name="TextBox 1"/>
+          <p:cNvSpPr txBox="1"/>
+          <p:nvPr/>
+        </p:nvSpPr>
+        <p:spPr>
+          <a:xfrm>
+            <a:off x="502920" y="320040"/>
+            <a:ext cx="8138160" cy="777240"/>
+          </a:xfrm>
+          <a:prstGeom prst="rect">
+            <a:avLst/>
+          </a:prstGeom>
+          <a:noFill/>
+        </p:spPr>
+        <p:txBody>
+          <a:bodyPr wrap="square" anchor="ctr">
+            <a:noAutofit/>
+          </a:bodyPr>
+          <a:lstStyle/>
+          <a:p>
+            <a:pPr>
+              <a:defRPr sz="2600" b="1">
+                <a:solidFill>
+                  <a:srgbClr val="12335B"/>
+                </a:solidFill>
+              </a:defRPr>
+            </a:pPr>
+            <a:r>
+              <a:t>Future Recommendations</a:t>
+            </a:r>
+          </a:p>
+        </p:txBody>
+      </p:sp>
+      <p:sp>
+        <p:nvSpPr>
+          <p:cNvPr id="3" name="Rectangle 2"/>
+          <p:cNvSpPr/>
+          <p:nvPr/>
+        </p:nvSpPr>
+        <p:spPr>
+          <a:xfrm>
+            <a:off x="502920" y="1097280"/>
+            <a:ext cx="2011680" cy="38100"/>
+          </a:xfrm>
+          <a:prstGeom prst="rect">
+            <a:avLst/>
+          </a:prstGeom>
+          <a:solidFill>
+            <a:srgbClr val="2E6FB5"/>
+          </a:solidFill>
+          <a:ln>
+            <a:noFill/>
+          </a:ln>
+          <a:effectLst/>
+        </p:spPr>
+        <p:style>
+          <a:lnRef idx="1">
+            <a:schemeClr val="accent1"/>
+          </a:lnRef>
+          <a:fillRef idx="3">
+            <a:schemeClr val="accent1"/>
+          </a:fillRef>
+          <a:effectRef idx="2">
+            <a:schemeClr val="accent1"/>
+          </a:effectRef>
+          <a:fontRef idx="minor">
+            <a:schemeClr val="lt1"/>
+          </a:fontRef>
+        </p:style>
+        <p:txBody>
+          <a:bodyPr rtlCol="0" anchor="ctr"/>
+          <a:lstStyle/>
+          <a:p>
+            <a:pPr algn="ctr"/>
+          </a:p>
+        </p:txBody>
+      </p:sp>
+      <p:sp>
+        <p:nvSpPr>
+          <p:cNvPr id="4" name="TextBox 3"/>
+          <p:cNvSpPr txBox="1"/>
+          <p:nvPr/>
+        </p:nvSpPr>
+        <p:spPr>
+          <a:xfrm>
+            <a:off x="502920" y="1234440"/>
+            <a:ext cx="8138160" cy="3040380"/>
+          </a:xfrm>
+          <a:prstGeom prst="rect">
+            <a:avLst/>
+          </a:prstGeom>
+          <a:noFill/>
+        </p:spPr>
+        <p:txBody>
+          <a:bodyPr wrap="square">
+            <a:normAutofit/>
+          </a:bodyPr>
+          <a:lstStyle/>
+          <a:p>
+            <a:pPr>
+              <a:lnSpc>
+                <a:spcPct val="108000"/>
+              </a:lnSpc>
+              <a:spcAft>
+                <a:spcPts val="700"/>
+              </a:spcAft>
+              <a:defRPr sz="1700">
+                <a:solidFill>
+                  <a:srgbClr val="202020"/>
+                </a:solidFill>
+              </a:defRPr>
+            </a:pPr>
+            <a:r>
+              <a:t>•  Multi-camera fusion (stereo / two phones), removes depth ambiguity entirely.</a:t>
+            </a:r>
+          </a:p>
+          <a:p>
+            <a:pPr>
+              <a:lnSpc>
+                <a:spcPct val="108000"/>
+              </a:lnSpc>
+              <a:spcAft>
+                <a:spcPts val="700"/>
+              </a:spcAft>
+              <a:defRPr sz="1700">
+                <a:solidFill>
+                  <a:srgbClr val="202020"/>
+                </a:solidFill>
+              </a:defRPr>
+            </a:pPr>
+            <a:r>
+              <a:t>•  Learned detection by default, make YOLO the primary detector.</a:t>
+            </a:r>
+          </a:p>
+          <a:p>
+            <a:pPr>
+              <a:lnSpc>
+                <a:spcPct val="108000"/>
+              </a:lnSpc>
+              <a:spcAft>
+                <a:spcPts val="700"/>
+              </a:spcAft>
+              <a:defRPr sz="1700">
+                <a:solidFill>
+                  <a:srgbClr val="202020"/>
+                </a:solidFill>
+              </a:defRPr>
+            </a:pPr>
+            <a:r>
+              <a:t>•  Automatic landmark detection, find stumps / crease lines instead of asking the user.</a:t>
+            </a:r>
+          </a:p>
+          <a:p>
+            <a:pPr>
+              <a:lnSpc>
+                <a:spcPct val="108000"/>
+              </a:lnSpc>
+              <a:spcAft>
+                <a:spcPts val="700"/>
+              </a:spcAft>
+              <a:defRPr sz="1700">
+                <a:solidFill>
+                  <a:srgbClr val="202020"/>
+                </a:solidFill>
+              </a:defRPr>
+            </a:pPr>
+            <a:r>
+              <a:t>•  Real-time streaming + on-device inference.</a:t>
+            </a:r>
+          </a:p>
+          <a:p>
+            <a:pPr>
+              <a:lnSpc>
+                <a:spcPct val="108000"/>
+              </a:lnSpc>
+              <a:spcAft>
+                <a:spcPts val="700"/>
+              </a:spcAft>
+              <a:defRPr sz="1700">
+                <a:solidFill>
+                  <a:srgbClr val="202020"/>
+                </a:solidFill>
+              </a:defRPr>
+            </a:pPr>
+            <a:r>
+              <a:t>•  Better bounce model (drag / spin) + statistical confidence intervals.</a:t>
+            </a:r>
+          </a:p>
+          <a:p>
+            <a:pPr>
+              <a:lnSpc>
+                <a:spcPct val="108000"/>
+              </a:lnSpc>
+              <a:spcAft>
+                <a:spcPts val="700"/>
+              </a:spcAft>
+              <a:defRPr sz="1700">
+                <a:solidFill>
+                  <a:srgbClr val="202020"/>
+                </a:solidFill>
+              </a:defRPr>
+            </a:pPr>
+            <a:r>
+              <a:t>•  Field user studies with umpires and players.</a:t>
+            </a:r>
+          </a:p>
+        </p:txBody>
+      </p:sp>
+    </p:spTree>
+  </p:cSld>
+  <p:clrMapOvr>
+    <a:masterClrMapping/>
+  </p:clrMapOvr>
+</p:sld>
+</file>
+
+<file path=ppt/slides/slide22.xml><?xml version="1.0" encoding="utf-8"?>
+<p:sld xmlns:a="http://schemas.openxmlformats.org/drawingml/2006/main" xmlns:p="http://schemas.openxmlformats.org/presentationml/2006/main" xmlns:r="http://schemas.openxmlformats.org/officeDocument/2006/relationships">
+  <p:cSld>
+    <p:bg>
+      <p:bgPr>
+        <a:solidFill>
+          <a:srgbClr val="FFFFFF"/>
+        </a:solidFill>
+        <a:effectLst/>
+      </p:bgPr>
+    </p:bg>
+    <p:spTree>
+      <p:nvGrpSpPr>
+        <p:cNvPr id="1" name=""/>
+        <p:cNvGrpSpPr/>
+        <p:nvPr/>
+      </p:nvGrpSpPr>
+      <p:grpSpPr/>
+      <p:sp>
+        <p:nvSpPr>
+          <p:cNvPr id="2" name="TextBox 1"/>
+          <p:cNvSpPr txBox="1"/>
+          <p:nvPr/>
+        </p:nvSpPr>
+        <p:spPr>
+          <a:xfrm>
+            <a:off x="502920" y="320040"/>
+            <a:ext cx="8138160" cy="777240"/>
+          </a:xfrm>
+          <a:prstGeom prst="rect">
+            <a:avLst/>
+          </a:prstGeom>
+          <a:noFill/>
+        </p:spPr>
+        <p:txBody>
+          <a:bodyPr wrap="square" anchor="ctr">
+            <a:noAutofit/>
+          </a:bodyPr>
+          <a:lstStyle/>
+          <a:p>
+            <a:pPr>
+              <a:defRPr sz="2600" b="1">
+                <a:solidFill>
+                  <a:srgbClr val="12335B"/>
+                </a:solidFill>
+              </a:defRPr>
+            </a:pPr>
+            <a:r>
+              <a:t>Thank You, Questions?</a:t>
+            </a:r>
+          </a:p>
+        </p:txBody>
+      </p:sp>
+      <p:sp>
+        <p:nvSpPr>
+          <p:cNvPr id="3" name="Rectangle 2"/>
+          <p:cNvSpPr/>
+          <p:nvPr/>
+        </p:nvSpPr>
+        <p:spPr>
+          <a:xfrm>
+            <a:off x="502920" y="1097280"/>
+            <a:ext cx="2011680" cy="38100"/>
+          </a:xfrm>
+          <a:prstGeom prst="rect">
+            <a:avLst/>
+          </a:prstGeom>
+          <a:solidFill>
+            <a:srgbClr val="2E6FB5"/>
+          </a:solidFill>
+          <a:ln>
+            <a:noFill/>
+          </a:ln>
+          <a:effectLst/>
+        </p:spPr>
+        <p:style>
+          <a:lnRef idx="1">
+            <a:schemeClr val="accent1"/>
+          </a:lnRef>
+          <a:fillRef idx="3">
+            <a:schemeClr val="accent1"/>
+          </a:fillRef>
+          <a:effectRef idx="2">
+            <a:schemeClr val="accent1"/>
+          </a:effectRef>
+          <a:fontRef idx="minor">
+            <a:schemeClr val="lt1"/>
+          </a:fontRef>
+        </p:style>
+        <p:txBody>
+          <a:bodyPr rtlCol="0" anchor="ctr"/>
+          <a:lstStyle/>
+          <a:p>
+            <a:pPr algn="ctr"/>
+          </a:p>
+        </p:txBody>
+      </p:sp>
+      <p:sp>
+        <p:nvSpPr>
+          <p:cNvPr id="4" name="TextBox 3"/>
+          <p:cNvSpPr txBox="1"/>
+          <p:nvPr/>
+        </p:nvSpPr>
+        <p:spPr>
+          <a:xfrm>
+            <a:off x="502920" y="1234440"/>
+            <a:ext cx="8138160" cy="3040380"/>
+          </a:xfrm>
+          <a:prstGeom prst="rect">
+            <a:avLst/>
+          </a:prstGeom>
+          <a:noFill/>
+        </p:spPr>
+        <p:txBody>
+          <a:bodyPr wrap="square">
+            <a:normAutofit/>
+          </a:bodyPr>
+          <a:lstStyle/>
+          <a:p>
+            <a:pPr>
+              <a:lnSpc>
+                <a:spcPct val="108000"/>
+              </a:lnSpc>
+              <a:spcAft>
+                <a:spcPts val="700"/>
+              </a:spcAft>
+              <a:defRPr sz="1700">
+                <a:solidFill>
+                  <a:srgbClr val="202020"/>
+                </a:solidFill>
+              </a:defRPr>
+            </a:pPr>
+            <a:r>
+              <a:t>•  PocketDRS: a phone, a tripod, and the geometry of a cricket pitch.</a:t>
+            </a:r>
+          </a:p>
+          <a:p>
+            <a:pPr>
+              <a:lnSpc>
+                <a:spcPct val="108000"/>
+              </a:lnSpc>
+              <a:spcAft>
+                <a:spcPts val="700"/>
+              </a:spcAft>
+              <a:defRPr sz="1700">
+                <a:solidFill>
+                  <a:srgbClr val="202020"/>
+                </a:solidFill>
+              </a:defRPr>
+            </a:pPr>
+            <a:r>
+              <a:t>•  Niraj Kafle, BIT 7th Semester, Phoenix College of Management.</a:t>
+            </a:r>
+          </a:p>
+          <a:p>
+            <a:pPr>
+              <a:lnSpc>
+                <a:spcPct val="108000"/>
+              </a:lnSpc>
+              <a:spcAft>
+                <a:spcPts val="700"/>
+              </a:spcAft>
+              <a:defRPr sz="1700">
+                <a:solidFill>
+                  <a:srgbClr val="202020"/>
+                </a:solidFill>
+              </a:defRPr>
+            </a:pPr>
+            <a:r>
+              <a:t>•  Supervisor: Mr. Saishab Bhattarai.</a:t>
+            </a:r>
+          </a:p>
+          <a:p>
+            <a:pPr>
+              <a:lnSpc>
+                <a:spcPct val="108000"/>
+              </a:lnSpc>
+              <a:spcAft>
+                <a:spcPts val="700"/>
+              </a:spcAft>
+              <a:defRPr sz="1700">
+                <a:solidFill>
+                  <a:srgbClr val="202020"/>
+                </a:solidFill>
+              </a:defRPr>
+            </a:pPr>
+            <a:r>
+              <a:t>•  Final report, defense-prep guide, and demo clips available on request.</a:t>
             </a:r>
           </a:p>
         </p:txBody>
@@ -7250,7 +9201,7 @@
               </a:defRPr>
             </a:pPr>
             <a:r>
-              <a:t>Problem Statement</a:t>
+              <a:t>Objectives, Scope, Limitations</a:t>
             </a:r>
           </a:p>
         </p:txBody>
@@ -7323,7 +9274,7 @@
           <a:p>
             <a:pPr>
               <a:lnSpc>
-                <a:spcPct val="105000"/>
+                <a:spcPct val="108000"/>
               </a:lnSpc>
               <a:spcAft>
                 <a:spcPts val="700"/>
@@ -7335,13 +9286,13 @@
               </a:defRPr>
             </a:pPr>
             <a:r>
-              <a:t>•  Professional DRS needs multiple synchronised cameras to recover depth, which is expensive and inaccessible.</a:t>
+              <a:t>•  Goal: low-cost single-camera system that analyses a delivery and assists LBW review.</a:t>
             </a:r>
           </a:p>
           <a:p>
             <a:pPr>
               <a:lnSpc>
-                <a:spcPct val="105000"/>
+                <a:spcPct val="108000"/>
               </a:lnSpc>
               <a:spcAft>
                 <a:spcPts val="700"/>
@@ -7353,13 +9304,13 @@
               </a:defRPr>
             </a:pPr>
             <a:r>
-              <a:t>•  A single consumer camera makes the problem hard:</a:t>
+              <a:t>•  Specific objectives:</a:t>
             </a:r>
           </a:p>
           <a:p>
             <a:pPr lvl="1">
               <a:lnSpc>
-                <a:spcPct val="105000"/>
+                <a:spcPct val="108000"/>
               </a:lnSpc>
               <a:spcAft>
                 <a:spcPts val="300"/>
@@ -7371,13 +9322,13 @@
               </a:defRPr>
             </a:pPr>
             <a:r>
-              <a:t>◦  No direct depth from one view.</a:t>
+              <a:t>◦  User-guided pitch-corner calibration; ball detection + trajectory association.</a:t>
             </a:r>
           </a:p>
           <a:p>
             <a:pPr lvl="1">
               <a:lnSpc>
-                <a:spcPct val="105000"/>
+                <a:spcPct val="108000"/>
               </a:lnSpc>
               <a:spcAft>
                 <a:spcPts val="300"/>
@@ -7389,31 +9340,13 @@
               </a:defRPr>
             </a:pPr>
             <a:r>
-              <a:t>◦  Ball is small, fast, motion-blurred, easily confused with clutter.</a:t>
-            </a:r>
-          </a:p>
-          <a:p>
-            <a:pPr lvl="1">
-              <a:lnSpc>
-                <a:spcPct val="105000"/>
-              </a:lnSpc>
-              <a:spcAft>
-                <a:spcPts val="300"/>
-              </a:spcAft>
-              <a:defRPr sz="1400">
-                <a:solidFill>
-                  <a:srgbClr val="202020"/>
-                </a:solidFill>
-              </a:defRPr>
-            </a:pPr>
-            <a:r>
-              <a:t>◦  Small calibration errors cause large pitch-coordinate errors.</a:t>
+              <a:t>◦  Camera pose + monocular 3D reconstruction; ICC Rule 36 LBW logic; interactive 3D viewer.</a:t>
             </a:r>
           </a:p>
           <a:p>
             <a:pPr>
               <a:lnSpc>
-                <a:spcPct val="105000"/>
+                <a:spcPct val="108000"/>
               </a:lnSpc>
               <a:spcAft>
                 <a:spcPts val="700"/>
@@ -7425,7 +9358,25 @@
               </a:defRPr>
             </a:pPr>
             <a:r>
-              <a:t>•  Can a single-phone workflow give consistent, understandable LBW review support?</a:t>
+              <a:t>•  Limitations: umpire-POV camera; not ICC-certified; monocular depth fundamentally limited.</a:t>
+            </a:r>
+          </a:p>
+          <a:p>
+            <a:pPr>
+              <a:lnSpc>
+                <a:spcPct val="108000"/>
+              </a:lnSpc>
+              <a:spcAft>
+                <a:spcPts val="700"/>
+              </a:spcAft>
+              <a:defRPr sz="1700">
+                <a:solidFill>
+                  <a:srgbClr val="202020"/>
+                </a:solidFill>
+              </a:defRPr>
+            </a:pPr>
+            <a:r>
+              <a:t>•  Decision support only, umpire still calls the game.</a:t>
             </a:r>
           </a:p>
         </p:txBody>
@@ -7486,7 +9437,7 @@
               </a:defRPr>
             </a:pPr>
             <a:r>
-              <a:t>Objectives</a:t>
+              <a:t>Literature Review</a:t>
             </a:r>
           </a:p>
         </p:txBody>
@@ -7559,7 +9510,7 @@
           <a:p>
             <a:pPr>
               <a:lnSpc>
-                <a:spcPct val="105000"/>
+                <a:spcPct val="108000"/>
               </a:lnSpc>
               <a:spcAft>
                 <a:spcPts val="700"/>
@@ -7571,13 +9522,13 @@
               </a:defRPr>
             </a:pPr>
             <a:r>
-              <a:t>•  General: a low-cost single-camera system that analyses a delivery and assists LBW review.</a:t>
+              <a:t>•  Owens et al. (2003), original Hawk-Eye (multi-camera ball tracking), accuracy benchmark.</a:t>
             </a:r>
           </a:p>
           <a:p>
             <a:pPr>
               <a:lnSpc>
-                <a:spcPct val="105000"/>
+                <a:spcPct val="108000"/>
               </a:lnSpc>
               <a:spcAft>
                 <a:spcPts val="700"/>
@@ -7589,115 +9540,97 @@
               </a:defRPr>
             </a:pPr>
             <a:r>
-              <a:t>•  Specific objectives:</a:t>
-            </a:r>
-          </a:p>
-          <a:p>
-            <a:pPr lvl="1">
-              <a:lnSpc>
-                <a:spcPct val="105000"/>
-              </a:lnSpc>
-              <a:spcAft>
-                <a:spcPts val="300"/>
-              </a:spcAft>
-              <a:defRPr sz="1400">
-                <a:solidFill>
-                  <a:srgbClr val="202020"/>
-                </a:solidFill>
-              </a:defRPr>
-            </a:pPr>
-            <a:r>
-              <a:t>◦  Study existing DRS and monocular sports-tracking work.</a:t>
-            </a:r>
-          </a:p>
-          <a:p>
-            <a:pPr lvl="1">
-              <a:lnSpc>
-                <a:spcPct val="105000"/>
-              </a:lnSpc>
-              <a:spcAft>
-                <a:spcPts val="300"/>
-              </a:spcAft>
-              <a:defRPr sz="1400">
-                <a:solidFill>
-                  <a:srgbClr val="202020"/>
-                </a:solidFill>
-              </a:defRPr>
-            </a:pPr>
-            <a:r>
-              <a:t>◦  User-guided pitch-corner calibration.</a:t>
-            </a:r>
-          </a:p>
-          <a:p>
-            <a:pPr lvl="1">
-              <a:lnSpc>
-                <a:spcPct val="105000"/>
-              </a:lnSpc>
-              <a:spcAft>
-                <a:spcPts val="300"/>
-              </a:spcAft>
-              <a:defRPr sz="1400">
-                <a:solidFill>
-                  <a:srgbClr val="202020"/>
-                </a:solidFill>
-              </a:defRPr>
-            </a:pPr>
-            <a:r>
-              <a:t>◦  Detect and track the ball from delivery video.</a:t>
-            </a:r>
-          </a:p>
-          <a:p>
-            <a:pPr lvl="1">
-              <a:lnSpc>
-                <a:spcPct val="105000"/>
-              </a:lnSpc>
-              <a:spcAft>
-                <a:spcPts val="300"/>
-              </a:spcAft>
-              <a:defRPr sz="1400">
-                <a:solidFill>
-                  <a:srgbClr val="202020"/>
-                </a:solidFill>
-              </a:defRPr>
-            </a:pPr>
-            <a:r>
-              <a:t>◦  Map detections to pitch coordinates (homography); recover camera pose.</a:t>
-            </a:r>
-          </a:p>
-          <a:p>
-            <a:pPr lvl="1">
-              <a:lnSpc>
-                <a:spcPct val="105000"/>
-              </a:lnSpc>
-              <a:spcAft>
-                <a:spcPts val="300"/>
-              </a:spcAft>
-              <a:defRPr sz="1400">
-                <a:solidFill>
-                  <a:srgbClr val="202020"/>
-                </a:solidFill>
-              </a:defRPr>
-            </a:pPr>
-            <a:r>
-              <a:t>◦  Detect bounce/impact; apply rule-based LBW (ICC Rule 36).</a:t>
-            </a:r>
-          </a:p>
-          <a:p>
-            <a:pPr lvl="1">
-              <a:lnSpc>
-                <a:spcPct val="105000"/>
-              </a:lnSpc>
-              <a:spcAft>
-                <a:spcPts val="300"/>
-              </a:spcAft>
-              <a:defRPr sz="1400">
-                <a:solidFill>
-                  <a:srgbClr val="202020"/>
-                </a:solidFill>
-              </a:defRPr>
-            </a:pPr>
-            <a:r>
-              <a:t>◦  Present an interactive 3D visualisation of the decision.</a:t>
+              <a:t>•  Zhang (2000), checkerboard camera calibration → intrinsic-model foundation.</a:t>
+            </a:r>
+          </a:p>
+          <a:p>
+            <a:pPr>
+              <a:lnSpc>
+                <a:spcPct val="108000"/>
+              </a:lnSpc>
+              <a:spcAft>
+                <a:spcPts val="700"/>
+              </a:spcAft>
+              <a:defRPr sz="1700">
+                <a:solidFill>
+                  <a:srgbClr val="202020"/>
+                </a:solidFill>
+              </a:defRPr>
+            </a:pPr>
+            <a:r>
+              <a:t>•  Hartley &amp; Zisserman (2004), multiple-view geometry → homography theory.</a:t>
+            </a:r>
+          </a:p>
+          <a:p>
+            <a:pPr>
+              <a:lnSpc>
+                <a:spcPct val="108000"/>
+              </a:lnSpc>
+              <a:spcAft>
+                <a:spcPts val="700"/>
+              </a:spcAft>
+              <a:defRPr sz="1700">
+                <a:solidFill>
+                  <a:srgbClr val="202020"/>
+                </a:solidFill>
+              </a:defRPr>
+            </a:pPr>
+            <a:r>
+              <a:t>•  Fischler &amp; Bolles (1981), RANSAC → used for homography + trajectory association.</a:t>
+            </a:r>
+          </a:p>
+          <a:p>
+            <a:pPr>
+              <a:lnSpc>
+                <a:spcPct val="108000"/>
+              </a:lnSpc>
+              <a:spcAft>
+                <a:spcPts val="700"/>
+              </a:spcAft>
+              <a:defRPr sz="1700">
+                <a:solidFill>
+                  <a:srgbClr val="202020"/>
+                </a:solidFill>
+              </a:defRPr>
+            </a:pPr>
+            <a:r>
+              <a:t>•  Triggs et al. (2000), bundle adjustment → motivates least-squares projectile fit.</a:t>
+            </a:r>
+          </a:p>
+          <a:p>
+            <a:pPr>
+              <a:lnSpc>
+                <a:spcPct val="108000"/>
+              </a:lnSpc>
+              <a:spcAft>
+                <a:spcPts val="700"/>
+              </a:spcAft>
+              <a:defRPr sz="1700">
+                <a:solidFill>
+                  <a:srgbClr val="202020"/>
+                </a:solidFill>
+              </a:defRPr>
+            </a:pPr>
+            <a:r>
+              <a:t>•  Ponglertnapakorn &amp; Suwajanakorn (CVPRW 2025), closest prior work (single-view 3D ball).</a:t>
+            </a:r>
+          </a:p>
+          <a:p>
+            <a:pPr>
+              <a:lnSpc>
+                <a:spcPct val="108000"/>
+              </a:lnSpc>
+              <a:spcAft>
+                <a:spcPts val="700"/>
+              </a:spcAft>
+              <a:defRPr sz="1700">
+                <a:solidFill>
+                  <a:srgbClr val="202020"/>
+                </a:solidFill>
+              </a:defRPr>
+            </a:pPr>
+            <a:r>
+              <a:t>•  Zivkovic (2004) MOG2 + Redmon et al. (2016) YOLO → motion + learned detectors.</a:t>
             </a:r>
           </a:p>
         </p:txBody>
@@ -7758,7 +9691,19 @@
               </a:defRPr>
             </a:pPr>
             <a:r>
-              <a:t>Functional Requirements</a:t>
+              <a:t>ER Diagram + Data Flow Diagrams</a:t>
+            </a:r>
+          </a:p>
+          <a:p>
+            <a:pPr>
+              <a:defRPr sz="1300" i="1">
+                <a:solidFill>
+                  <a:srgbClr val="555555"/>
+                </a:solidFill>
+              </a:defRPr>
+            </a:pPr>
+            <a:r>
+              <a:t>Structured approach: data model + 2-level DFD (no OO diagrams per syllabus).</a:t>
             </a:r>
           </a:p>
         </p:txBody>
@@ -7807,16 +9752,40 @@
           </a:p>
         </p:txBody>
       </p:sp>
+      <p:pic>
+        <p:nvPicPr>
+          <p:cNvPr id="4" name="Picture 3" descr="er_diagram.png"/>
+          <p:cNvPicPr>
+            <a:picLocks noChangeAspect="1"/>
+          </p:cNvPicPr>
+          <p:nvPr/>
+        </p:nvPicPr>
+        <p:blipFill>
+          <a:blip r:embed="rId2"/>
+          <a:stretch>
+            <a:fillRect/>
+          </a:stretch>
+        </p:blipFill>
+        <p:spPr>
+          <a:xfrm>
+            <a:off x="814889" y="1234440"/>
+            <a:ext cx="1905901" cy="2747772"/>
+          </a:xfrm>
+          <a:prstGeom prst="rect">
+            <a:avLst/>
+          </a:prstGeom>
+        </p:spPr>
+      </p:pic>
       <p:sp>
         <p:nvSpPr>
-          <p:cNvPr id="4" name="TextBox 3"/>
+          <p:cNvPr id="5" name="TextBox 4"/>
           <p:cNvSpPr txBox="1"/>
           <p:nvPr/>
         </p:nvSpPr>
         <p:spPr>
           <a:xfrm>
-            <a:off x="502920" y="1234440"/>
-            <a:ext cx="8138160" cy="3040380"/>
+            <a:off x="502920" y="3982212"/>
+            <a:ext cx="2529840" cy="292608"/>
           </a:xfrm>
           <a:prstGeom prst="rect">
             <a:avLst/>
@@ -7824,116 +9793,138 @@
           <a:noFill/>
         </p:spPr>
         <p:txBody>
-          <a:bodyPr wrap="square">
-            <a:normAutofit/>
+          <a:bodyPr wrap="none">
+            <a:spAutoFit/>
           </a:bodyPr>
           <a:lstStyle/>
           <a:p>
-            <a:pPr>
-              <a:lnSpc>
-                <a:spcPct val="105000"/>
-              </a:lnSpc>
-              <a:spcAft>
-                <a:spcPts val="700"/>
-              </a:spcAft>
-              <a:defRPr sz="1700">
-                <a:solidFill>
-                  <a:srgbClr val="202020"/>
-                </a:solidFill>
-              </a:defRPr>
-            </a:pPr>
-            <a:r>
-              <a:t>•  User authentication via Firebase (email/password or Google sign-in).</a:t>
-            </a:r>
-          </a:p>
-          <a:p>
-            <a:pPr>
-              <a:lnSpc>
-                <a:spcPct val="105000"/>
-              </a:lnSpc>
-              <a:spcAft>
-                <a:spcPts val="700"/>
-              </a:spcAft>
-              <a:defRPr sz="1700">
-                <a:solidFill>
-                  <a:srgbClr val="202020"/>
-                </a:solidFill>
-              </a:defRPr>
-            </a:pPr>
-            <a:r>
-              <a:t>•  Record or select a delivery video, and trim to the delivery.</a:t>
-            </a:r>
-          </a:p>
-          <a:p>
-            <a:pPr>
-              <a:lnSpc>
-                <a:spcPct val="105000"/>
-              </a:lnSpc>
-              <a:spcAft>
-                <a:spcPts val="700"/>
-              </a:spcAft>
-              <a:defRPr sz="1700">
-                <a:solidFill>
-                  <a:srgbClr val="202020"/>
-                </a:solidFill>
-              </a:defRPr>
-            </a:pPr>
-            <a:r>
-              <a:t>•  Calibrate the pitch by tapping the four corners; validate quality.</a:t>
-            </a:r>
-          </a:p>
-          <a:p>
-            <a:pPr>
-              <a:lnSpc>
-                <a:spcPct val="105000"/>
-              </a:lnSpc>
-              <a:spcAft>
-                <a:spcPts val="700"/>
-              </a:spcAft>
-              <a:defRPr sz="1700">
-                <a:solidFill>
-                  <a:srgbClr val="202020"/>
-                </a:solidFill>
-              </a:defRPr>
-            </a:pPr>
-            <a:r>
-              <a:t>•  Submit the clip for server-side ball detection and 3D reconstruction.</a:t>
-            </a:r>
-          </a:p>
-          <a:p>
-            <a:pPr>
-              <a:lnSpc>
-                <a:spcPct val="105000"/>
-              </a:lnSpc>
-              <a:spcAft>
-                <a:spcPts val="700"/>
-              </a:spcAft>
-              <a:defRPr sz="1700">
-                <a:solidFill>
-                  <a:srgbClr val="202020"/>
-                </a:solidFill>
-              </a:defRPr>
-            </a:pPr>
-            <a:r>
-              <a:t>•  Return an LBW decision (OUT / NOT OUT / UMPIRE'S CALL) with rationale.</a:t>
-            </a:r>
-          </a:p>
-          <a:p>
-            <a:pPr>
-              <a:lnSpc>
-                <a:spcPct val="105000"/>
-              </a:lnSpc>
-              <a:spcAft>
-                <a:spcPts val="700"/>
-              </a:spcAft>
-              <a:defRPr sz="1700">
-                <a:solidFill>
-                  <a:srgbClr val="202020"/>
-                </a:solidFill>
-              </a:defRPr>
-            </a:pPr>
-            <a:r>
-              <a:t>•  Interactive 3D trajectory view and saved analysis history.</a:t>
+            <a:pPr algn="ctr">
+              <a:defRPr sz="1200" b="1">
+                <a:solidFill>
+                  <a:srgbClr val="202020"/>
+                </a:solidFill>
+              </a:defRPr>
+            </a:pPr>
+            <a:r>
+              <a:t>ER Diagram</a:t>
+            </a:r>
+          </a:p>
+        </p:txBody>
+      </p:sp>
+      <p:pic>
+        <p:nvPicPr>
+          <p:cNvPr id="6" name="Picture 5" descr="dfd_level0.png"/>
+          <p:cNvPicPr>
+            <a:picLocks noChangeAspect="1"/>
+          </p:cNvPicPr>
+          <p:nvPr/>
+        </p:nvPicPr>
+        <p:blipFill>
+          <a:blip r:embed="rId3"/>
+          <a:stretch>
+            <a:fillRect/>
+          </a:stretch>
+        </p:blipFill>
+        <p:spPr>
+          <a:xfrm>
+            <a:off x="3307080" y="2383601"/>
+            <a:ext cx="2529840" cy="449450"/>
+          </a:xfrm>
+          <a:prstGeom prst="rect">
+            <a:avLst/>
+          </a:prstGeom>
+        </p:spPr>
+      </p:pic>
+      <p:sp>
+        <p:nvSpPr>
+          <p:cNvPr id="7" name="TextBox 6"/>
+          <p:cNvSpPr txBox="1"/>
+          <p:nvPr/>
+        </p:nvSpPr>
+        <p:spPr>
+          <a:xfrm>
+            <a:off x="3307080" y="3982212"/>
+            <a:ext cx="2529840" cy="292608"/>
+          </a:xfrm>
+          <a:prstGeom prst="rect">
+            <a:avLst/>
+          </a:prstGeom>
+          <a:noFill/>
+        </p:spPr>
+        <p:txBody>
+          <a:bodyPr wrap="none">
+            <a:spAutoFit/>
+          </a:bodyPr>
+          <a:lstStyle/>
+          <a:p>
+            <a:pPr algn="ctr">
+              <a:defRPr sz="1200" b="1">
+                <a:solidFill>
+                  <a:srgbClr val="202020"/>
+                </a:solidFill>
+              </a:defRPr>
+            </a:pPr>
+            <a:r>
+              <a:t>DFD Level 0 (context)</a:t>
+            </a:r>
+          </a:p>
+        </p:txBody>
+      </p:sp>
+      <p:pic>
+        <p:nvPicPr>
+          <p:cNvPr id="8" name="Picture 7" descr="dfd_level1.png"/>
+          <p:cNvPicPr>
+            <a:picLocks noChangeAspect="1"/>
+          </p:cNvPicPr>
+          <p:nvPr/>
+        </p:nvPicPr>
+        <p:blipFill>
+          <a:blip r:embed="rId4"/>
+          <a:stretch>
+            <a:fillRect/>
+          </a:stretch>
+        </p:blipFill>
+        <p:spPr>
+          <a:xfrm>
+            <a:off x="6424708" y="1234440"/>
+            <a:ext cx="1902903" cy="2747772"/>
+          </a:xfrm>
+          <a:prstGeom prst="rect">
+            <a:avLst/>
+          </a:prstGeom>
+        </p:spPr>
+      </p:pic>
+      <p:sp>
+        <p:nvSpPr>
+          <p:cNvPr id="9" name="TextBox 8"/>
+          <p:cNvSpPr txBox="1"/>
+          <p:nvPr/>
+        </p:nvSpPr>
+        <p:spPr>
+          <a:xfrm>
+            <a:off x="6111240" y="3982212"/>
+            <a:ext cx="2529840" cy="292608"/>
+          </a:xfrm>
+          <a:prstGeom prst="rect">
+            <a:avLst/>
+          </a:prstGeom>
+          <a:noFill/>
+        </p:spPr>
+        <p:txBody>
+          <a:bodyPr wrap="none">
+            <a:spAutoFit/>
+          </a:bodyPr>
+          <a:lstStyle/>
+          <a:p>
+            <a:pPr algn="ctr">
+              <a:defRPr sz="1200" b="1">
+                <a:solidFill>
+                  <a:srgbClr val="202020"/>
+                </a:solidFill>
+              </a:defRPr>
+            </a:pPr>
+            <a:r>
+              <a:t>DFD Level 1</a:t>
             </a:r>
           </a:p>
         </p:txBody>
@@ -7994,7 +9985,19 @@
               </a:defRPr>
             </a:pPr>
             <a:r>
-              <a:t>Non-functional Requirements</a:t>
+              <a:t>System Architecture + Physical DFD</a:t>
+            </a:r>
+          </a:p>
+          <a:p>
+            <a:pPr>
+              <a:defRPr sz="1300" i="1">
+                <a:solidFill>
+                  <a:srgbClr val="555555"/>
+                </a:solidFill>
+              </a:defRPr>
+            </a:pPr>
+            <a:r>
+              <a:t>Flutter app → HTTPS → FastAPI on Cloud Run → Firestore + Cloud Storage; Three.js viewer in WebView.</a:t>
             </a:r>
           </a:p>
         </p:txBody>
@@ -8043,16 +10046,40 @@
           </a:p>
         </p:txBody>
       </p:sp>
+      <p:pic>
+        <p:nvPicPr>
+          <p:cNvPr id="4" name="Picture 3" descr="architecture.png"/>
+          <p:cNvPicPr>
+            <a:picLocks noChangeAspect="1"/>
+          </p:cNvPicPr>
+          <p:nvPr/>
+        </p:nvPicPr>
+        <p:blipFill>
+          <a:blip r:embed="rId2"/>
+          <a:stretch>
+            <a:fillRect/>
+          </a:stretch>
+        </p:blipFill>
+        <p:spPr>
+          <a:xfrm>
+            <a:off x="1420218" y="1234440"/>
+            <a:ext cx="2097324" cy="2747772"/>
+          </a:xfrm>
+          <a:prstGeom prst="rect">
+            <a:avLst/>
+          </a:prstGeom>
+        </p:spPr>
+      </p:pic>
       <p:sp>
         <p:nvSpPr>
-          <p:cNvPr id="4" name="TextBox 3"/>
+          <p:cNvPr id="5" name="TextBox 4"/>
           <p:cNvSpPr txBox="1"/>
           <p:nvPr/>
         </p:nvSpPr>
         <p:spPr>
           <a:xfrm>
-            <a:off x="502920" y="1234440"/>
-            <a:ext cx="8138160" cy="3040380"/>
+            <a:off x="502920" y="3982212"/>
+            <a:ext cx="3931920" cy="292608"/>
           </a:xfrm>
           <a:prstGeom prst="rect">
             <a:avLst/>
@@ -8060,98 +10087,79 @@
           <a:noFill/>
         </p:spPr>
         <p:txBody>
-          <a:bodyPr wrap="square">
-            <a:normAutofit/>
+          <a:bodyPr wrap="none">
+            <a:spAutoFit/>
           </a:bodyPr>
           <a:lstStyle/>
           <a:p>
-            <a:pPr>
-              <a:lnSpc>
-                <a:spcPct val="105000"/>
-              </a:lnSpc>
-              <a:spcAft>
-                <a:spcPts val="700"/>
-              </a:spcAft>
-              <a:defRPr sz="1700">
-                <a:solidFill>
-                  <a:srgbClr val="202020"/>
-                </a:solidFill>
-              </a:defRPr>
-            </a:pPr>
-            <a:r>
-              <a:t>•  Response time: process a 5-second clip within ~30 seconds.</a:t>
-            </a:r>
-          </a:p>
-          <a:p>
-            <a:pPr>
-              <a:lnSpc>
-                <a:spcPct val="105000"/>
-              </a:lnSpc>
-              <a:spcAft>
-                <a:spcPts val="700"/>
-              </a:spcAft>
-              <a:defRPr sz="1700">
-                <a:solidFill>
-                  <a:srgbClr val="202020"/>
-                </a:solidFill>
-              </a:defRPr>
-            </a:pPr>
-            <a:r>
-              <a:t>•  Accuracy: synthetic-test position error under 80 cm.</a:t>
-            </a:r>
-          </a:p>
-          <a:p>
-            <a:pPr>
-              <a:lnSpc>
-                <a:spcPct val="105000"/>
-              </a:lnSpc>
-              <a:spcAft>
-                <a:spcPts val="700"/>
-              </a:spcAft>
-              <a:defRPr sz="1700">
-                <a:solidFill>
-                  <a:srgbClr val="202020"/>
-                </a:solidFill>
-              </a:defRPr>
-            </a:pPr>
-            <a:r>
-              <a:t>•  Offline support: calibration and selection work offline; analysis needs connectivity.</a:t>
-            </a:r>
-          </a:p>
-          <a:p>
-            <a:pPr>
-              <a:lnSpc>
-                <a:spcPct val="105000"/>
-              </a:lnSpc>
-              <a:spcAft>
-                <a:spcPts val="700"/>
-              </a:spcAft>
-              <a:defRPr sz="1700">
-                <a:solidFill>
-                  <a:srgbClr val="202020"/>
-                </a:solidFill>
-              </a:defRPr>
-            </a:pPr>
-            <a:r>
-              <a:t>•  Security: Firebase authentication; data encrypted in transit.</a:t>
-            </a:r>
-          </a:p>
-          <a:p>
-            <a:pPr>
-              <a:lnSpc>
-                <a:spcPct val="105000"/>
-              </a:lnSpc>
-              <a:spcAft>
-                <a:spcPts val="700"/>
-              </a:spcAft>
-              <a:defRPr sz="1700">
-                <a:solidFill>
-                  <a:srgbClr val="202020"/>
-                </a:solidFill>
-              </a:defRPr>
-            </a:pPr>
-            <a:r>
-              <a:t>•  Cross-platform (Android / iOS), usability, maintainability, data privacy.</a:t>
+            <a:pPr algn="ctr">
+              <a:defRPr sz="1200" b="1">
+                <a:solidFill>
+                  <a:srgbClr val="202020"/>
+                </a:solidFill>
+              </a:defRPr>
+            </a:pPr>
+            <a:r>
+              <a:t>3-Tier Architecture</a:t>
+            </a:r>
+          </a:p>
+        </p:txBody>
+      </p:sp>
+      <p:pic>
+        <p:nvPicPr>
+          <p:cNvPr id="6" name="Picture 5" descr="physical_dfd.png"/>
+          <p:cNvPicPr>
+            <a:picLocks noChangeAspect="1"/>
+          </p:cNvPicPr>
+          <p:nvPr/>
+        </p:nvPicPr>
+        <p:blipFill>
+          <a:blip r:embed="rId3"/>
+          <a:stretch>
+            <a:fillRect/>
+          </a:stretch>
+        </p:blipFill>
+        <p:spPr>
+          <a:xfrm>
+            <a:off x="4709160" y="1592350"/>
+            <a:ext cx="3931920" cy="2031952"/>
+          </a:xfrm>
+          <a:prstGeom prst="rect">
+            <a:avLst/>
+          </a:prstGeom>
+        </p:spPr>
+      </p:pic>
+      <p:sp>
+        <p:nvSpPr>
+          <p:cNvPr id="7" name="TextBox 6"/>
+          <p:cNvSpPr txBox="1"/>
+          <p:nvPr/>
+        </p:nvSpPr>
+        <p:spPr>
+          <a:xfrm>
+            <a:off x="4709160" y="3982212"/>
+            <a:ext cx="3931920" cy="292608"/>
+          </a:xfrm>
+          <a:prstGeom prst="rect">
+            <a:avLst/>
+          </a:prstGeom>
+          <a:noFill/>
+        </p:spPr>
+        <p:txBody>
+          <a:bodyPr wrap="none">
+            <a:spAutoFit/>
+          </a:bodyPr>
+          <a:lstStyle/>
+          <a:p>
+            <a:pPr algn="ctr">
+              <a:defRPr sz="1200" b="1">
+                <a:solidFill>
+                  <a:srgbClr val="202020"/>
+                </a:solidFill>
+              </a:defRPr>
+            </a:pPr>
+            <a:r>
+              <a:t>Physical DFD (deployed)</a:t>
             </a:r>
           </a:p>
         </p:txBody>
@@ -8212,7 +10220,7 @@
               </a:defRPr>
             </a:pPr>
             <a:r>
-              <a:t>Data Modeling: ER Diagram</a:t>
+              <a:t>Requirements (Functional + Non-Functional)</a:t>
             </a:r>
           </a:p>
         </p:txBody>
@@ -8261,30 +10269,155 @@
           </a:p>
         </p:txBody>
       </p:sp>
-      <p:pic>
-        <p:nvPicPr>
-          <p:cNvPr id="4" name="Picture 3" descr="er_diagram.png"/>
-          <p:cNvPicPr>
-            <a:picLocks noChangeAspect="1"/>
-          </p:cNvPicPr>
+      <p:sp>
+        <p:nvSpPr>
+          <p:cNvPr id="4" name="TextBox 3"/>
+          <p:cNvSpPr txBox="1"/>
           <p:nvPr/>
-        </p:nvPicPr>
-        <p:blipFill>
-          <a:blip r:embed="rId2"/>
-          <a:stretch>
-            <a:fillRect/>
-          </a:stretch>
-        </p:blipFill>
-        <p:spPr>
-          <a:xfrm>
-            <a:off x="3517570" y="1234440"/>
-            <a:ext cx="2108859" cy="3040380"/>
-          </a:xfrm>
-          <a:prstGeom prst="rect">
-            <a:avLst/>
-          </a:prstGeom>
-        </p:spPr>
-      </p:pic>
+        </p:nvSpPr>
+        <p:spPr>
+          <a:xfrm>
+            <a:off x="502920" y="1234440"/>
+            <a:ext cx="8138160" cy="3040380"/>
+          </a:xfrm>
+          <a:prstGeom prst="rect">
+            <a:avLst/>
+          </a:prstGeom>
+          <a:noFill/>
+        </p:spPr>
+        <p:txBody>
+          <a:bodyPr wrap="square">
+            <a:normAutofit/>
+          </a:bodyPr>
+          <a:lstStyle/>
+          <a:p>
+            <a:pPr>
+              <a:lnSpc>
+                <a:spcPct val="108000"/>
+              </a:lnSpc>
+              <a:spcAft>
+                <a:spcPts val="700"/>
+              </a:spcAft>
+              <a:defRPr sz="1700">
+                <a:solidFill>
+                  <a:srgbClr val="202020"/>
+                </a:solidFill>
+              </a:defRPr>
+            </a:pPr>
+            <a:r>
+              <a:t>•  Functional: auth (Firebase); record/trim video; tap 4 pitch corners; save calibration.</a:t>
+            </a:r>
+          </a:p>
+          <a:p>
+            <a:pPr>
+              <a:lnSpc>
+                <a:spcPct val="108000"/>
+              </a:lnSpc>
+              <a:spcAft>
+                <a:spcPts val="700"/>
+              </a:spcAft>
+              <a:defRPr sz="1700">
+                <a:solidFill>
+                  <a:srgbClr val="202020"/>
+                </a:solidFill>
+              </a:defRPr>
+            </a:pPr>
+            <a:r>
+              <a:t>•  Submit clip → server detects ball, reconstructs 3D, returns LBW verdict + reason.</a:t>
+            </a:r>
+          </a:p>
+          <a:p>
+            <a:pPr>
+              <a:lnSpc>
+                <a:spcPct val="108000"/>
+              </a:lnSpc>
+              <a:spcAft>
+                <a:spcPts val="700"/>
+              </a:spcAft>
+              <a:defRPr sz="1700">
+                <a:solidFill>
+                  <a:srgbClr val="202020"/>
+                </a:solidFill>
+              </a:defRPr>
+            </a:pPr>
+            <a:r>
+              <a:t>•  Interactive 3D viewer; analysis history.</a:t>
+            </a:r>
+          </a:p>
+          <a:p>
+            <a:pPr>
+              <a:lnSpc>
+                <a:spcPct val="108000"/>
+              </a:lnSpc>
+              <a:spcAft>
+                <a:spcPts val="700"/>
+              </a:spcAft>
+              <a:defRPr sz="1700">
+                <a:solidFill>
+                  <a:srgbClr val="202020"/>
+                </a:solidFill>
+              </a:defRPr>
+            </a:pPr>
+            <a:r>
+              <a:t>•  Non-functional:</a:t>
+            </a:r>
+          </a:p>
+          <a:p>
+            <a:pPr lvl="1">
+              <a:lnSpc>
+                <a:spcPct val="108000"/>
+              </a:lnSpc>
+              <a:spcAft>
+                <a:spcPts val="300"/>
+              </a:spcAft>
+              <a:defRPr sz="1400">
+                <a:solidFill>
+                  <a:srgbClr val="202020"/>
+                </a:solidFill>
+              </a:defRPr>
+            </a:pPr>
+            <a:r>
+              <a:t>◦  Response ≤ 30 s for a 5-s clip; accuracy &lt; 80 cm position error (synthetic).</a:t>
+            </a:r>
+          </a:p>
+          <a:p>
+            <a:pPr lvl="1">
+              <a:lnSpc>
+                <a:spcPct val="108000"/>
+              </a:lnSpc>
+              <a:spcAft>
+                <a:spcPts val="300"/>
+              </a:spcAft>
+              <a:defRPr sz="1400">
+                <a:solidFill>
+                  <a:srgbClr val="202020"/>
+                </a:solidFill>
+              </a:defRPr>
+            </a:pPr>
+            <a:r>
+              <a:t>◦  Offline calibration; HTTPS + Firestore privacy rules; Android 6+/iOS 12+ via Flutter.</a:t>
+            </a:r>
+          </a:p>
+          <a:p>
+            <a:pPr lvl="1">
+              <a:lnSpc>
+                <a:spcPct val="108000"/>
+              </a:lnSpc>
+              <a:spcAft>
+                <a:spcPts val="300"/>
+              </a:spcAft>
+              <a:defRPr sz="1400">
+                <a:solidFill>
+                  <a:srgbClr val="202020"/>
+                </a:solidFill>
+              </a:defRPr>
+            </a:pPr>
+            <a:r>
+              <a:t>◦  Usability: first analysis in &lt; 5 minutes.</a:t>
+            </a:r>
+          </a:p>
+        </p:txBody>
+      </p:sp>
     </p:spTree>
   </p:cSld>
   <p:clrMapOvr>
@@ -8341,7 +10474,7 @@
               </a:defRPr>
             </a:pPr>
             <a:r>
-              <a:t>Process Modeling: Data Flow Diagrams</a:t>
+              <a:t>Algorithm, the 5-Step Pipeline</a:t>
             </a:r>
           </a:p>
         </p:txBody>
@@ -8390,40 +10523,16 @@
           </a:p>
         </p:txBody>
       </p:sp>
-      <p:pic>
-        <p:nvPicPr>
-          <p:cNvPr id="4" name="Picture 3" descr="dfd_level0.png"/>
-          <p:cNvPicPr>
-            <a:picLocks noChangeAspect="1"/>
-          </p:cNvPicPr>
-          <p:nvPr/>
-        </p:nvPicPr>
-        <p:blipFill>
-          <a:blip r:embed="rId2"/>
-          <a:stretch>
-            <a:fillRect/>
-          </a:stretch>
-        </p:blipFill>
-        <p:spPr>
-          <a:xfrm>
-            <a:off x="502920" y="2268198"/>
-            <a:ext cx="3931920" cy="698543"/>
-          </a:xfrm>
-          <a:prstGeom prst="rect">
-            <a:avLst/>
-          </a:prstGeom>
-        </p:spPr>
-      </p:pic>
       <p:sp>
         <p:nvSpPr>
-          <p:cNvPr id="5" name="TextBox 4"/>
+          <p:cNvPr id="4" name="TextBox 3"/>
           <p:cNvSpPr txBox="1"/>
           <p:nvPr/>
         </p:nvSpPr>
         <p:spPr>
           <a:xfrm>
-            <a:off x="502920" y="4000500"/>
-            <a:ext cx="3931920" cy="274320"/>
+            <a:off x="502920" y="1234440"/>
+            <a:ext cx="8138160" cy="3040380"/>
           </a:xfrm>
           <a:prstGeom prst="rect">
             <a:avLst/>
@@ -8431,79 +10540,134 @@
           <a:noFill/>
         </p:spPr>
         <p:txBody>
-          <a:bodyPr wrap="none">
-            <a:spAutoFit/>
+          <a:bodyPr wrap="square">
+            <a:normAutofit/>
           </a:bodyPr>
           <a:lstStyle/>
           <a:p>
-            <a:pPr algn="ctr">
-              <a:defRPr sz="1200">
-                <a:solidFill>
-                  <a:srgbClr val="202020"/>
-                </a:solidFill>
-              </a:defRPr>
-            </a:pPr>
-            <a:r>
-              <a:t>Level 0 (context)</a:t>
-            </a:r>
-          </a:p>
-        </p:txBody>
-      </p:sp>
-      <p:pic>
-        <p:nvPicPr>
-          <p:cNvPr id="6" name="Picture 5" descr="dfd_level1.png"/>
-          <p:cNvPicPr>
-            <a:picLocks noChangeAspect="1"/>
-          </p:cNvPicPr>
-          <p:nvPr/>
-        </p:nvPicPr>
-        <p:blipFill>
-          <a:blip r:embed="rId3"/>
-          <a:stretch>
-            <a:fillRect/>
-          </a:stretch>
-        </p:blipFill>
-        <p:spPr>
-          <a:xfrm>
-            <a:off x="5717336" y="1234440"/>
-            <a:ext cx="1915568" cy="2766060"/>
-          </a:xfrm>
-          <a:prstGeom prst="rect">
-            <a:avLst/>
-          </a:prstGeom>
-        </p:spPr>
-      </p:pic>
-      <p:sp>
-        <p:nvSpPr>
-          <p:cNvPr id="7" name="TextBox 6"/>
-          <p:cNvSpPr txBox="1"/>
-          <p:nvPr/>
-        </p:nvSpPr>
-        <p:spPr>
-          <a:xfrm>
-            <a:off x="4709160" y="4000500"/>
-            <a:ext cx="3931920" cy="274320"/>
-          </a:xfrm>
-          <a:prstGeom prst="rect">
-            <a:avLst/>
-          </a:prstGeom>
-          <a:noFill/>
-        </p:spPr>
-        <p:txBody>
-          <a:bodyPr wrap="none">
-            <a:spAutoFit/>
-          </a:bodyPr>
-          <a:lstStyle/>
-          <a:p>
-            <a:pPr algn="ctr">
-              <a:defRPr sz="1200">
-                <a:solidFill>
-                  <a:srgbClr val="202020"/>
-                </a:solidFill>
-              </a:defRPr>
-            </a:pPr>
-            <a:r>
-              <a:t>Level 1</a:t>
+            <a:pPr>
+              <a:lnSpc>
+                <a:spcPct val="108000"/>
+              </a:lnSpc>
+              <a:spcAft>
+                <a:spcPts val="700"/>
+              </a:spcAft>
+              <a:defRPr sz="1700">
+                <a:solidFill>
+                  <a:srgbClr val="202020"/>
+                </a:solidFill>
+              </a:defRPr>
+            </a:pPr>
+            <a:r>
+              <a:t>•  1.  Camera pose from 4 tapped pitch corners (PnP, reject below-ground mirror).</a:t>
+            </a:r>
+          </a:p>
+          <a:p>
+            <a:pPr>
+              <a:lnSpc>
+                <a:spcPct val="108000"/>
+              </a:lnSpc>
+              <a:spcAft>
+                <a:spcPts val="700"/>
+              </a:spcAft>
+              <a:defRPr sz="1700">
+                <a:solidFill>
+                  <a:srgbClr val="202020"/>
+                </a:solidFill>
+              </a:defRPr>
+            </a:pPr>
+            <a:r>
+              <a:t>•  2.  Ball detection per frame, motion (MOG2) + colour (HSV), or YOLO on real clips.</a:t>
+            </a:r>
+          </a:p>
+          <a:p>
+            <a:pPr lvl="1">
+              <a:lnSpc>
+                <a:spcPct val="108000"/>
+              </a:lnSpc>
+              <a:spcAft>
+                <a:spcPts val="300"/>
+              </a:spcAft>
+              <a:defRPr sz="1400">
+                <a:solidFill>
+                  <a:srgbClr val="202020"/>
+                </a:solidFill>
+              </a:defRPr>
+            </a:pPr>
+            <a:r>
+              <a:t>◦  Fixed-clutter suppression: drop anything sitting in same pixel &gt; 30% of frames.</a:t>
+            </a:r>
+          </a:p>
+          <a:p>
+            <a:pPr>
+              <a:lnSpc>
+                <a:spcPct val="108000"/>
+              </a:lnSpc>
+              <a:spcAft>
+                <a:spcPts val="700"/>
+              </a:spcAft>
+              <a:defRPr sz="1700">
+                <a:solidFill>
+                  <a:srgbClr val="202020"/>
+                </a:solidFill>
+              </a:defRPr>
+            </a:pPr>
+            <a:r>
+              <a:t>•  3.  Trajectory association, RANSAC links detections into one projectile path.</a:t>
+            </a:r>
+          </a:p>
+          <a:p>
+            <a:pPr>
+              <a:lnSpc>
+                <a:spcPct val="108000"/>
+              </a:lnSpc>
+              <a:spcAft>
+                <a:spcPts val="700"/>
+              </a:spcAft>
+              <a:defRPr sz="1700">
+                <a:solidFill>
+                  <a:srgbClr val="202020"/>
+                </a:solidFill>
+              </a:defRPr>
+            </a:pPr>
+            <a:r>
+              <a:t>•  4.  3D reconstruction, depth-from-size + projectile fit, anchored at the bounce.</a:t>
+            </a:r>
+          </a:p>
+          <a:p>
+            <a:pPr lvl="1">
+              <a:lnSpc>
+                <a:spcPct val="108000"/>
+              </a:lnSpc>
+              <a:spcAft>
+                <a:spcPts val="300"/>
+              </a:spcAft>
+              <a:defRPr sz="1400">
+                <a:solidFill>
+                  <a:srgbClr val="202020"/>
+                </a:solidFill>
+              </a:defRPr>
+            </a:pPr>
+            <a:r>
+              <a:t>◦  Quality gate: fit RMS &gt; 0.75 m ⇒ discard (no fake verdict).</a:t>
+            </a:r>
+          </a:p>
+          <a:p>
+            <a:pPr>
+              <a:lnSpc>
+                <a:spcPct val="108000"/>
+              </a:lnSpc>
+              <a:spcAft>
+                <a:spcPts val="700"/>
+              </a:spcAft>
+              <a:defRPr sz="1700">
+                <a:solidFill>
+                  <a:srgbClr val="202020"/>
+                </a:solidFill>
+              </a:defRPr>
+            </a:pPr>
+            <a:r>
+              <a:t>•  5.  LBW decision, ICC Rule 36 (pitched, impact, hitting) + ±2.5 cm umpire's-call band.</a:t>
             </a:r>
           </a:p>
         </p:txBody>
@@ -8564,7 +10728,7 @@
               </a:defRPr>
             </a:pPr>
             <a:r>
-              <a:t>System Architecture</a:t>
+              <a:t>Step 1, Camera Pose (PnP)</a:t>
             </a:r>
           </a:p>
         </p:txBody>
@@ -8613,30 +10777,119 @@
           </a:p>
         </p:txBody>
       </p:sp>
-      <p:pic>
-        <p:nvPicPr>
-          <p:cNvPr id="4" name="Picture 3" descr="architecture.png"/>
-          <p:cNvPicPr>
-            <a:picLocks noChangeAspect="1"/>
-          </p:cNvPicPr>
+      <p:sp>
+        <p:nvSpPr>
+          <p:cNvPr id="4" name="TextBox 3"/>
+          <p:cNvSpPr txBox="1"/>
           <p:nvPr/>
-        </p:nvPicPr>
-        <p:blipFill>
-          <a:blip r:embed="rId2"/>
-          <a:stretch>
-            <a:fillRect/>
-          </a:stretch>
-        </p:blipFill>
-        <p:spPr>
-          <a:xfrm>
-            <a:off x="3411667" y="1234440"/>
-            <a:ext cx="2320666" cy="3040380"/>
-          </a:xfrm>
-          <a:prstGeom prst="rect">
-            <a:avLst/>
-          </a:prstGeom>
-        </p:spPr>
-      </p:pic>
+        </p:nvSpPr>
+        <p:spPr>
+          <a:xfrm>
+            <a:off x="502920" y="1234440"/>
+            <a:ext cx="8138160" cy="3040380"/>
+          </a:xfrm>
+          <a:prstGeom prst="rect">
+            <a:avLst/>
+          </a:prstGeom>
+          <a:noFill/>
+        </p:spPr>
+        <p:txBody>
+          <a:bodyPr wrap="square">
+            <a:normAutofit/>
+          </a:bodyPr>
+          <a:lstStyle/>
+          <a:p>
+            <a:pPr>
+              <a:lnSpc>
+                <a:spcPct val="108000"/>
+              </a:lnSpc>
+              <a:spcAft>
+                <a:spcPts val="700"/>
+              </a:spcAft>
+              <a:defRPr sz="1700">
+                <a:solidFill>
+                  <a:srgbClr val="202020"/>
+                </a:solidFill>
+              </a:defRPr>
+            </a:pPr>
+            <a:r>
+              <a:t>•  Input: 4 pitch corners (user-tapped) + known real-world pitch size.</a:t>
+            </a:r>
+          </a:p>
+          <a:p>
+            <a:pPr>
+              <a:lnSpc>
+                <a:spcPct val="108000"/>
+              </a:lnSpc>
+              <a:spcAft>
+                <a:spcPts val="700"/>
+              </a:spcAft>
+              <a:defRPr sz="1700">
+                <a:solidFill>
+                  <a:srgbClr val="202020"/>
+                </a:solidFill>
+              </a:defRPr>
+            </a:pPr>
+            <a:r>
+              <a:t>•  Output: where the phone stood + which way it pointed.</a:t>
+            </a:r>
+          </a:p>
+          <a:p>
+            <a:pPr>
+              <a:lnSpc>
+                <a:spcPct val="108000"/>
+              </a:lnSpc>
+              <a:spcAft>
+                <a:spcPts val="700"/>
+              </a:spcAft>
+              <a:defRPr sz="1700">
+                <a:solidFill>
+                  <a:srgbClr val="202020"/>
+                </a:solidFill>
+              </a:defRPr>
+            </a:pPr>
+            <a:r>
+              <a:t>•  Method: Perspective-n-Point, pose whose projected corners match the tapped pixels.</a:t>
+            </a:r>
+          </a:p>
+          <a:p>
+            <a:pPr>
+              <a:lnSpc>
+                <a:spcPct val="108000"/>
+              </a:lnSpc>
+              <a:spcAft>
+                <a:spcPts val="700"/>
+              </a:spcAft>
+              <a:defRPr sz="1700">
+                <a:solidFill>
+                  <a:srgbClr val="202020"/>
+                </a:solidFill>
+              </a:defRPr>
+            </a:pPr>
+            <a:r>
+              <a:t>•  Edge case: planar PnP has a twofold mirror, reject the below-ground answer.</a:t>
+            </a:r>
+          </a:p>
+          <a:p>
+            <a:pPr>
+              <a:lnSpc>
+                <a:spcPct val="108000"/>
+              </a:lnSpc>
+              <a:spcAft>
+                <a:spcPts val="700"/>
+              </a:spcAft>
+              <a:defRPr sz="1700">
+                <a:solidFill>
+                  <a:srgbClr val="202020"/>
+                </a:solidFill>
+              </a:defRPr>
+            </a:pPr>
+            <a:r>
+              <a:t>•  Verified: 0.00 px reprojection error on every synthetic scenario.</a:t>
+            </a:r>
+          </a:p>
+        </p:txBody>
+      </p:sp>
     </p:spTree>
   </p:cSld>
   <p:clrMapOvr>

--- a/dump/report_docs/pocketdrs_presentation.pptx
+++ b/dump/report_docs/pocketdrs_presentation.pptx
@@ -26,6 +26,8 @@
     <p:sldId id="271" r:id="rId21"/>
     <p:sldId id="272" r:id="rId22"/>
     <p:sldId id="273" r:id="rId23"/>
+    <p:sldId id="274" r:id="rId24"/>
+    <p:sldId id="275" r:id="rId25"/>
   </p:sldIdLst>
   <p:sldSz cy="5143500" cx="9144000"/>
   <p:notesSz cx="6858000" cy="9144000"/>
@@ -5585,13 +5587,57 @@
       <p:grpSpPr/>
       <p:sp>
         <p:nvSpPr>
-          <p:cNvPr id="2" name="TextBox 1"/>
+          <p:cNvPr id="2" name="Rectangle 1"/>
+          <p:cNvSpPr/>
+          <p:nvPr/>
+        </p:nvSpPr>
+        <p:spPr>
+          <a:xfrm>
+            <a:off x="502920" y="1051560"/>
+            <a:ext cx="2194560" cy="50800"/>
+          </a:xfrm>
+          <a:prstGeom prst="rect">
+            <a:avLst/>
+          </a:prstGeom>
+          <a:solidFill>
+            <a:srgbClr val="2E6FB5"/>
+          </a:solidFill>
+          <a:ln>
+            <a:noFill/>
+          </a:ln>
+          <a:effectLst/>
+        </p:spPr>
+        <p:style>
+          <a:lnRef idx="1">
+            <a:schemeClr val="accent1"/>
+          </a:lnRef>
+          <a:fillRef idx="3">
+            <a:schemeClr val="accent1"/>
+          </a:fillRef>
+          <a:effectRef idx="2">
+            <a:schemeClr val="accent1"/>
+          </a:effectRef>
+          <a:fontRef idx="minor">
+            <a:schemeClr val="lt1"/>
+          </a:fontRef>
+        </p:style>
+        <p:txBody>
+          <a:bodyPr rtlCol="0" anchor="ctr"/>
+          <a:lstStyle/>
+          <a:p>
+            <a:pPr algn="ctr"/>
+          </a:p>
+        </p:txBody>
+      </p:sp>
+      <p:sp>
+        <p:nvSpPr>
+          <p:cNvPr id="3" name="TextBox 2"/>
           <p:cNvSpPr txBox="1"/>
           <p:nvPr/>
         </p:nvSpPr>
         <p:spPr>
           <a:xfrm>
-            <a:off x="502920" y="1188720"/>
+            <a:off x="502920" y="1234440"/>
             <a:ext cx="8138160" cy="2743200"/>
           </a:xfrm>
           <a:prstGeom prst="rect">
@@ -5600,16 +5646,16 @@
           <a:noFill/>
         </p:spPr>
         <p:txBody>
-          <a:bodyPr wrap="square" anchor="ctr">
+          <a:bodyPr wrap="square" anchor="t">
             <a:spAutoFit/>
           </a:bodyPr>
           <a:lstStyle/>
           <a:p>
-            <a:pPr algn="ctr">
+            <a:pPr algn="l">
               <a:spcAft>
                 <a:spcPts val="600"/>
               </a:spcAft>
-              <a:defRPr sz="3800" b="1">
+              <a:defRPr sz="4000" b="1">
                 <a:solidFill>
                   <a:srgbClr val="12335B"/>
                 </a:solidFill>
@@ -5620,58 +5666,58 @@
             </a:r>
           </a:p>
           <a:p>
-            <a:pPr algn="ctr">
-              <a:spcAft>
-                <a:spcPts val="0"/>
-              </a:spcAft>
-              <a:defRPr sz="1700" b="0">
-                <a:solidFill>
-                  <a:srgbClr val="202020"/>
-                </a:solidFill>
-              </a:defRPr>
-            </a:pPr>
-            <a:r>
-              <a:t>A Single-View 3D Trajectory Reconstruction and</a:t>
-            </a:r>
-          </a:p>
-          <a:p>
-            <a:pPr algn="ctr">
-              <a:spcAft>
-                <a:spcPts val="1400"/>
-              </a:spcAft>
-              <a:defRPr sz="1700" b="0">
-                <a:solidFill>
-                  <a:srgbClr val="202020"/>
-                </a:solidFill>
-              </a:defRPr>
-            </a:pPr>
-            <a:r>
-              <a:t>Decision Review System (DRS) for Cricket</a:t>
-            </a:r>
-          </a:p>
-          <a:p>
-            <a:pPr algn="ctr">
-              <a:spcAft>
-                <a:spcPts val="200"/>
-              </a:spcAft>
-              <a:defRPr sz="1600" b="0">
-                <a:solidFill>
-                  <a:srgbClr val="202020"/>
-                </a:solidFill>
-              </a:defRPr>
-            </a:pPr>
-            <a:r>
-              <a:t>Niraj Kafle, BIT (LC0003001674)</a:t>
-            </a:r>
-          </a:p>
-          <a:p>
-            <a:pPr algn="ctr">
-              <a:spcAft>
-                <a:spcPts val="200"/>
+            <a:pPr algn="l">
+              <a:spcAft>
+                <a:spcPts val="0"/>
+              </a:spcAft>
+              <a:defRPr sz="1800" b="0">
+                <a:solidFill>
+                  <a:srgbClr val="222222"/>
+                </a:solidFill>
+              </a:defRPr>
+            </a:pPr>
+            <a:r>
+              <a:t>A Single-View 3D Trajectory Reconstruction and Decision</a:t>
+            </a:r>
+          </a:p>
+          <a:p>
+            <a:pPr algn="l">
+              <a:spcAft>
+                <a:spcPts val="1600"/>
+              </a:spcAft>
+              <a:defRPr sz="1800" b="0">
+                <a:solidFill>
+                  <a:srgbClr val="222222"/>
+                </a:solidFill>
+              </a:defRPr>
+            </a:pPr>
+            <a:r>
+              <a:t>Review System (DRS) for Cricket</a:t>
+            </a:r>
+          </a:p>
+          <a:p>
+            <a:pPr algn="l">
+              <a:spcAft>
+                <a:spcPts val="300"/>
               </a:spcAft>
               <a:defRPr sz="1500" b="0">
                 <a:solidFill>
-                  <a:srgbClr val="202020"/>
+                  <a:srgbClr val="222222"/>
+                </a:solidFill>
+              </a:defRPr>
+            </a:pPr>
+            <a:r>
+              <a:t>Niraj Kafle  ·  BIT 7th Semester  ·  LC0003001674</a:t>
+            </a:r>
+          </a:p>
+          <a:p>
+            <a:pPr algn="l">
+              <a:spcAft>
+                <a:spcPts val="300"/>
+              </a:spcAft>
+              <a:defRPr sz="1400" b="0">
+                <a:solidFill>
+                  <a:srgbClr val="222222"/>
                 </a:solidFill>
               </a:defRPr>
             </a:pPr>
@@ -5680,18 +5726,18 @@
             </a:r>
           </a:p>
           <a:p>
-            <a:pPr algn="ctr">
-              <a:spcAft>
-                <a:spcPts val="0"/>
-              </a:spcAft>
-              <a:defRPr sz="1500" b="0">
+            <a:pPr algn="l">
+              <a:spcAft>
+                <a:spcPts val="0"/>
+              </a:spcAft>
+              <a:defRPr sz="1400" b="0">
                 <a:solidFill>
                   <a:srgbClr val="2E6FB5"/>
                 </a:solidFill>
               </a:defRPr>
             </a:pPr>
             <a:r>
-              <a:t>Phoenix College of Management</a:t>
+              <a:t>Phoenix College of Management  ·  Lincoln University College</a:t>
             </a:r>
           </a:p>
         </p:txBody>
@@ -5730,8 +5776,43 @@
         </p:nvSpPr>
         <p:spPr>
           <a:xfrm>
-            <a:off x="502920" y="320040"/>
-            <a:ext cx="8138160" cy="777240"/>
+            <a:off x="502920" y="438912"/>
+            <a:ext cx="8138160" cy="201168"/>
+          </a:xfrm>
+          <a:prstGeom prst="rect">
+            <a:avLst/>
+          </a:prstGeom>
+          <a:noFill/>
+        </p:spPr>
+        <p:txBody>
+          <a:bodyPr wrap="none">
+            <a:noAutofit/>
+          </a:bodyPr>
+          <a:lstStyle/>
+          <a:p>
+            <a:pPr>
+              <a:defRPr sz="1100" b="1">
+                <a:solidFill>
+                  <a:srgbClr val="2E6FB5"/>
+                </a:solidFill>
+              </a:defRPr>
+            </a:pPr>
+            <a:r>
+              <a:t>ANALYSIS &amp; DESIGN</a:t>
+            </a:r>
+          </a:p>
+        </p:txBody>
+      </p:sp>
+      <p:sp>
+        <p:nvSpPr>
+          <p:cNvPr id="3" name="TextBox 2"/>
+          <p:cNvSpPr txBox="1"/>
+          <p:nvPr/>
+        </p:nvSpPr>
+        <p:spPr>
+          <a:xfrm>
+            <a:off x="502920" y="640080"/>
+            <a:ext cx="8138160" cy="530352"/>
           </a:xfrm>
           <a:prstGeom prst="rect">
             <a:avLst/>
@@ -5745,28 +5826,28 @@
           <a:lstStyle/>
           <a:p>
             <a:pPr>
-              <a:defRPr sz="2600" b="1">
+              <a:defRPr sz="2400" b="1">
                 <a:solidFill>
                   <a:srgbClr val="12335B"/>
                 </a:solidFill>
               </a:defRPr>
             </a:pPr>
             <a:r>
-              <a:t>System Architecture</a:t>
-            </a:r>
-          </a:p>
-        </p:txBody>
-      </p:sp>
-      <p:sp>
-        <p:nvSpPr>
-          <p:cNvPr id="3" name="Rectangle 2"/>
+              <a:t>Process Modeling: Data Flow Diagrams</a:t>
+            </a:r>
+          </a:p>
+        </p:txBody>
+      </p:sp>
+      <p:sp>
+        <p:nvSpPr>
+          <p:cNvPr id="4" name="Rectangle 3"/>
           <p:cNvSpPr/>
           <p:nvPr/>
         </p:nvSpPr>
         <p:spPr>
           <a:xfrm>
-            <a:off x="502920" y="1097280"/>
-            <a:ext cx="2011680" cy="38100"/>
+            <a:off x="502920" y="1170432"/>
+            <a:ext cx="1828800" cy="38100"/>
           </a:xfrm>
           <a:prstGeom prst="rect">
             <a:avLst/>
@@ -5801,9 +5882,44 @@
           </a:p>
         </p:txBody>
       </p:sp>
+      <p:sp>
+        <p:nvSpPr>
+          <p:cNvPr id="5" name="TextBox 4"/>
+          <p:cNvSpPr txBox="1"/>
+          <p:nvPr/>
+        </p:nvSpPr>
+        <p:spPr>
+          <a:xfrm>
+            <a:off x="8001000" y="4759452"/>
+            <a:ext cx="640080" cy="274320"/>
+          </a:xfrm>
+          <a:prstGeom prst="rect">
+            <a:avLst/>
+          </a:prstGeom>
+          <a:noFill/>
+        </p:spPr>
+        <p:txBody>
+          <a:bodyPr wrap="none">
+            <a:spAutoFit/>
+          </a:bodyPr>
+          <a:lstStyle/>
+          <a:p>
+            <a:pPr algn="r">
+              <a:defRPr sz="900">
+                <a:solidFill>
+                  <a:srgbClr val="8A8A8A"/>
+                </a:solidFill>
+              </a:defRPr>
+            </a:pPr>
+            <a:r>
+              <a:t>10</a:t>
+            </a:r>
+          </a:p>
+        </p:txBody>
+      </p:sp>
       <p:pic>
         <p:nvPicPr>
-          <p:cNvPr id="4" name="Picture 3" descr="architecture.png"/>
+          <p:cNvPr id="6" name="Picture 5" descr="dfd_level0.png"/>
           <p:cNvPicPr>
             <a:picLocks noChangeAspect="1"/>
           </p:cNvPicPr>
@@ -5817,14 +5933,108 @@
         </p:blipFill>
         <p:spPr>
           <a:xfrm>
-            <a:off x="3411667" y="1234440"/>
-            <a:ext cx="2320666" cy="3040380"/>
+            <a:off x="502920" y="2332206"/>
+            <a:ext cx="3931920" cy="698543"/>
           </a:xfrm>
           <a:prstGeom prst="rect">
             <a:avLst/>
           </a:prstGeom>
         </p:spPr>
       </p:pic>
+      <p:sp>
+        <p:nvSpPr>
+          <p:cNvPr id="7" name="TextBox 6"/>
+          <p:cNvSpPr txBox="1"/>
+          <p:nvPr/>
+        </p:nvSpPr>
+        <p:spPr>
+          <a:xfrm>
+            <a:off x="502920" y="4027932"/>
+            <a:ext cx="3931920" cy="274320"/>
+          </a:xfrm>
+          <a:prstGeom prst="rect">
+            <a:avLst/>
+          </a:prstGeom>
+          <a:noFill/>
+        </p:spPr>
+        <p:txBody>
+          <a:bodyPr wrap="none">
+            <a:spAutoFit/>
+          </a:bodyPr>
+          <a:lstStyle/>
+          <a:p>
+            <a:pPr algn="ctr">
+              <a:defRPr sz="1200">
+                <a:solidFill>
+                  <a:srgbClr val="222222"/>
+                </a:solidFill>
+              </a:defRPr>
+            </a:pPr>
+            <a:r>
+              <a:t>Level 0 (context)</a:t>
+            </a:r>
+          </a:p>
+        </p:txBody>
+      </p:sp>
+      <p:pic>
+        <p:nvPicPr>
+          <p:cNvPr id="8" name="Picture 7" descr="dfd_level1.png"/>
+          <p:cNvPicPr>
+            <a:picLocks noChangeAspect="1"/>
+          </p:cNvPicPr>
+          <p:nvPr/>
+        </p:nvPicPr>
+        <p:blipFill>
+          <a:blip r:embed="rId3"/>
+          <a:stretch>
+            <a:fillRect/>
+          </a:stretch>
+        </p:blipFill>
+        <p:spPr>
+          <a:xfrm>
+            <a:off x="5742666" y="1335024"/>
+            <a:ext cx="1864908" cy="2692908"/>
+          </a:xfrm>
+          <a:prstGeom prst="rect">
+            <a:avLst/>
+          </a:prstGeom>
+        </p:spPr>
+      </p:pic>
+      <p:sp>
+        <p:nvSpPr>
+          <p:cNvPr id="9" name="TextBox 8"/>
+          <p:cNvSpPr txBox="1"/>
+          <p:nvPr/>
+        </p:nvSpPr>
+        <p:spPr>
+          <a:xfrm>
+            <a:off x="4709160" y="4027932"/>
+            <a:ext cx="3931920" cy="274320"/>
+          </a:xfrm>
+          <a:prstGeom prst="rect">
+            <a:avLst/>
+          </a:prstGeom>
+          <a:noFill/>
+        </p:spPr>
+        <p:txBody>
+          <a:bodyPr wrap="none">
+            <a:spAutoFit/>
+          </a:bodyPr>
+          <a:lstStyle/>
+          <a:p>
+            <a:pPr algn="ctr">
+              <a:defRPr sz="1200">
+                <a:solidFill>
+                  <a:srgbClr val="222222"/>
+                </a:solidFill>
+              </a:defRPr>
+            </a:pPr>
+            <a:r>
+              <a:t>Level 1</a:t>
+            </a:r>
+          </a:p>
+        </p:txBody>
+      </p:sp>
     </p:spTree>
   </p:cSld>
   <p:clrMapOvr>
@@ -5859,8 +6069,43 @@
         </p:nvSpPr>
         <p:spPr>
           <a:xfrm>
-            <a:off x="502920" y="320040"/>
-            <a:ext cx="8138160" cy="777240"/>
+            <a:off x="502920" y="438912"/>
+            <a:ext cx="8138160" cy="201168"/>
+          </a:xfrm>
+          <a:prstGeom prst="rect">
+            <a:avLst/>
+          </a:prstGeom>
+          <a:noFill/>
+        </p:spPr>
+        <p:txBody>
+          <a:bodyPr wrap="none">
+            <a:noAutofit/>
+          </a:bodyPr>
+          <a:lstStyle/>
+          <a:p>
+            <a:pPr>
+              <a:defRPr sz="1100" b="1">
+                <a:solidFill>
+                  <a:srgbClr val="2E6FB5"/>
+                </a:solidFill>
+              </a:defRPr>
+            </a:pPr>
+            <a:r>
+              <a:t>ANALYSIS &amp; DESIGN</a:t>
+            </a:r>
+          </a:p>
+        </p:txBody>
+      </p:sp>
+      <p:sp>
+        <p:nvSpPr>
+          <p:cNvPr id="3" name="TextBox 2"/>
+          <p:cNvSpPr txBox="1"/>
+          <p:nvPr/>
+        </p:nvSpPr>
+        <p:spPr>
+          <a:xfrm>
+            <a:off x="502920" y="640080"/>
+            <a:ext cx="8138160" cy="530352"/>
           </a:xfrm>
           <a:prstGeom prst="rect">
             <a:avLst/>
@@ -5874,28 +6119,28 @@
           <a:lstStyle/>
           <a:p>
             <a:pPr>
-              <a:defRPr sz="2600" b="1">
+              <a:defRPr sz="2400" b="1">
                 <a:solidFill>
                   <a:srgbClr val="12335B"/>
                 </a:solidFill>
               </a:defRPr>
             </a:pPr>
             <a:r>
-              <a:t>Algorithm Details: The Five-Stage Pipeline</a:t>
-            </a:r>
-          </a:p>
-        </p:txBody>
-      </p:sp>
-      <p:sp>
-        <p:nvSpPr>
-          <p:cNvPr id="3" name="Rectangle 2"/>
+              <a:t>System Architecture</a:t>
+            </a:r>
+          </a:p>
+        </p:txBody>
+      </p:sp>
+      <p:sp>
+        <p:nvSpPr>
+          <p:cNvPr id="4" name="Rectangle 3"/>
           <p:cNvSpPr/>
           <p:nvPr/>
         </p:nvSpPr>
         <p:spPr>
           <a:xfrm>
-            <a:off x="502920" y="1097280"/>
-            <a:ext cx="2011680" cy="38100"/>
+            <a:off x="502920" y="1170432"/>
+            <a:ext cx="1828800" cy="38100"/>
           </a:xfrm>
           <a:prstGeom prst="rect">
             <a:avLst/>
@@ -5932,14 +6177,14 @@
       </p:sp>
       <p:sp>
         <p:nvSpPr>
-          <p:cNvPr id="4" name="TextBox 3"/>
+          <p:cNvPr id="5" name="TextBox 4"/>
           <p:cNvSpPr txBox="1"/>
           <p:nvPr/>
         </p:nvSpPr>
         <p:spPr>
           <a:xfrm>
-            <a:off x="502920" y="1234440"/>
-            <a:ext cx="8138160" cy="3040380"/>
+            <a:off x="8001000" y="4759452"/>
+            <a:ext cx="640080" cy="274320"/>
           </a:xfrm>
           <a:prstGeom prst="rect">
             <a:avLst/>
@@ -5947,102 +6192,48 @@
           <a:noFill/>
         </p:spPr>
         <p:txBody>
-          <a:bodyPr wrap="square">
-            <a:normAutofit/>
+          <a:bodyPr wrap="none">
+            <a:spAutoFit/>
           </a:bodyPr>
           <a:lstStyle/>
           <a:p>
-            <a:pPr>
-              <a:lnSpc>
-                <a:spcPct val="105000"/>
-              </a:lnSpc>
-              <a:spcAft>
-                <a:spcPts val="700"/>
-              </a:spcAft>
-              <a:defRPr sz="1700">
-                <a:solidFill>
-                  <a:srgbClr val="202020"/>
-                </a:solidFill>
-              </a:defRPr>
-            </a:pPr>
-            <a:r>
-              <a:t>•  Stage 1 — Calibration: the marked stumps anchor solvePnP to recover the camera pose (sub-pixel on synthetic input; higher on real handheld clips).</a:t>
-            </a:r>
-          </a:p>
-          <a:p>
-            <a:pPr>
-              <a:lnSpc>
-                <a:spcPct val="105000"/>
-              </a:lnSpc>
-              <a:spcAft>
-                <a:spcPts val="700"/>
-              </a:spcAft>
-              <a:defRPr sz="1700">
-                <a:solidFill>
-                  <a:srgbClr val="202020"/>
-                </a:solidFill>
-              </a:defRPr>
-            </a:pPr>
-            <a:r>
-              <a:t>•  Stage 2 — Ball detection: MOG2 motion + HSV colour + a YOLO detector isolate the ball in each frame.</a:t>
-            </a:r>
-          </a:p>
-          <a:p>
-            <a:pPr>
-              <a:lnSpc>
-                <a:spcPct val="105000"/>
-              </a:lnSpc>
-              <a:spcAft>
-                <a:spcPts val="700"/>
-              </a:spcAft>
-              <a:defRPr sz="1700">
-                <a:solidFill>
-                  <a:srgbClr val="202020"/>
-                </a:solidFill>
-              </a:defRPr>
-            </a:pPr>
-            <a:r>
-              <a:t>•  Stage 3 — Trajectory linking: a two-pass RANSAC fits one smooth parabola through the bounce and rejects clutter.</a:t>
-            </a:r>
-          </a:p>
-          <a:p>
-            <a:pPr>
-              <a:lnSpc>
-                <a:spcPct val="105000"/>
-              </a:lnSpc>
-              <a:spcAft>
-                <a:spcPts val="700"/>
-              </a:spcAft>
-              <a:defRPr sz="1700">
-                <a:solidFill>
-                  <a:srgbClr val="202020"/>
-                </a:solidFill>
-              </a:defRPr>
-            </a:pPr>
-            <a:r>
-              <a:t>•  Stage 4 — 3D reconstruction: a gravity-constrained projectile fit lifts the 2D track to a real-world 3D arc.</a:t>
-            </a:r>
-          </a:p>
-          <a:p>
-            <a:pPr>
-              <a:lnSpc>
-                <a:spcPct val="105000"/>
-              </a:lnSpc>
-              <a:spcAft>
-                <a:spcPts val="700"/>
-              </a:spcAft>
-              <a:defRPr sz="1700">
-                <a:solidFill>
-                  <a:srgbClr val="202020"/>
-                </a:solidFill>
-              </a:defRPr>
-            </a:pPr>
-            <a:r>
-              <a:t>•  Stage 5 — LBW decision: ICC Rule 36 checks — pitching, impact, wickets — give out / not out / umpire's call.</a:t>
-            </a:r>
-          </a:p>
-        </p:txBody>
-      </p:sp>
+            <a:pPr algn="r">
+              <a:defRPr sz="900">
+                <a:solidFill>
+                  <a:srgbClr val="8A8A8A"/>
+                </a:solidFill>
+              </a:defRPr>
+            </a:pPr>
+            <a:r>
+              <a:t>11</a:t>
+            </a:r>
+          </a:p>
+        </p:txBody>
+      </p:sp>
+      <p:pic>
+        <p:nvPicPr>
+          <p:cNvPr id="6" name="Picture 5" descr="architecture.png"/>
+          <p:cNvPicPr>
+            <a:picLocks noChangeAspect="1"/>
+          </p:cNvPicPr>
+          <p:nvPr/>
+        </p:nvPicPr>
+        <p:blipFill>
+          <a:blip r:embed="rId2"/>
+          <a:stretch>
+            <a:fillRect/>
+          </a:stretch>
+        </p:blipFill>
+        <p:spPr>
+          <a:xfrm>
+            <a:off x="3439584" y="1335024"/>
+            <a:ext cx="2264831" cy="2967228"/>
+          </a:xfrm>
+          <a:prstGeom prst="rect">
+            <a:avLst/>
+          </a:prstGeom>
+        </p:spPr>
+      </p:pic>
     </p:spTree>
   </p:cSld>
   <p:clrMapOvr>
@@ -6077,8 +6268,43 @@
         </p:nvSpPr>
         <p:spPr>
           <a:xfrm>
-            <a:off x="502920" y="320040"/>
-            <a:ext cx="8138160" cy="777240"/>
+            <a:off x="502920" y="438912"/>
+            <a:ext cx="8138160" cy="201168"/>
+          </a:xfrm>
+          <a:prstGeom prst="rect">
+            <a:avLst/>
+          </a:prstGeom>
+          <a:noFill/>
+        </p:spPr>
+        <p:txBody>
+          <a:bodyPr wrap="none">
+            <a:noAutofit/>
+          </a:bodyPr>
+          <a:lstStyle/>
+          <a:p>
+            <a:pPr>
+              <a:defRPr sz="1100" b="1">
+                <a:solidFill>
+                  <a:srgbClr val="2E6FB5"/>
+                </a:solidFill>
+              </a:defRPr>
+            </a:pPr>
+            <a:r>
+              <a:t>ALGORITHM</a:t>
+            </a:r>
+          </a:p>
+        </p:txBody>
+      </p:sp>
+      <p:sp>
+        <p:nvSpPr>
+          <p:cNvPr id="3" name="TextBox 2"/>
+          <p:cNvSpPr txBox="1"/>
+          <p:nvPr/>
+        </p:nvSpPr>
+        <p:spPr>
+          <a:xfrm>
+            <a:off x="502920" y="640080"/>
+            <a:ext cx="8138160" cy="530352"/>
           </a:xfrm>
           <a:prstGeom prst="rect">
             <a:avLst/>
@@ -6092,28 +6318,28 @@
           <a:lstStyle/>
           <a:p>
             <a:pPr>
-              <a:defRPr sz="2600" b="1">
+              <a:defRPr sz="2400" b="1">
                 <a:solidFill>
                   <a:srgbClr val="12335B"/>
                 </a:solidFill>
               </a:defRPr>
             </a:pPr>
             <a:r>
-              <a:t>Implementing Tools</a:t>
-            </a:r>
-          </a:p>
-        </p:txBody>
-      </p:sp>
-      <p:sp>
-        <p:nvSpPr>
-          <p:cNvPr id="3" name="Rectangle 2"/>
+              <a:t>Algorithm: The Five-Stage Pipeline</a:t>
+            </a:r>
+          </a:p>
+        </p:txBody>
+      </p:sp>
+      <p:sp>
+        <p:nvSpPr>
+          <p:cNvPr id="4" name="Rectangle 3"/>
           <p:cNvSpPr/>
           <p:nvPr/>
         </p:nvSpPr>
         <p:spPr>
           <a:xfrm>
-            <a:off x="502920" y="1097280"/>
-            <a:ext cx="2011680" cy="38100"/>
+            <a:off x="502920" y="1170432"/>
+            <a:ext cx="1828800" cy="38100"/>
           </a:xfrm>
           <a:prstGeom prst="rect">
             <a:avLst/>
@@ -6150,14 +6376,87 @@
       </p:sp>
       <p:sp>
         <p:nvSpPr>
-          <p:cNvPr id="4" name="TextBox 3"/>
+          <p:cNvPr id="5" name="TextBox 4"/>
           <p:cNvSpPr txBox="1"/>
           <p:nvPr/>
         </p:nvSpPr>
         <p:spPr>
           <a:xfrm>
-            <a:off x="502920" y="1234440"/>
-            <a:ext cx="8138160" cy="3040380"/>
+            <a:off x="8001000" y="4759452"/>
+            <a:ext cx="640080" cy="274320"/>
+          </a:xfrm>
+          <a:prstGeom prst="rect">
+            <a:avLst/>
+          </a:prstGeom>
+          <a:noFill/>
+        </p:spPr>
+        <p:txBody>
+          <a:bodyPr wrap="none">
+            <a:spAutoFit/>
+          </a:bodyPr>
+          <a:lstStyle/>
+          <a:p>
+            <a:pPr algn="r">
+              <a:defRPr sz="900">
+                <a:solidFill>
+                  <a:srgbClr val="8A8A8A"/>
+                </a:solidFill>
+              </a:defRPr>
+            </a:pPr>
+            <a:r>
+              <a:t>12</a:t>
+            </a:r>
+          </a:p>
+        </p:txBody>
+      </p:sp>
+      <p:sp>
+        <p:nvSpPr>
+          <p:cNvPr id="6" name="TextBox 5"/>
+          <p:cNvSpPr txBox="1"/>
+          <p:nvPr/>
+        </p:nvSpPr>
+        <p:spPr>
+          <a:xfrm>
+            <a:off x="502920" y="1335024"/>
+            <a:ext cx="8138160" cy="502920"/>
+          </a:xfrm>
+          <a:prstGeom prst="rect">
+            <a:avLst/>
+          </a:prstGeom>
+          <a:noFill/>
+        </p:spPr>
+        <p:txBody>
+          <a:bodyPr wrap="square">
+            <a:noAutofit/>
+          </a:bodyPr>
+          <a:lstStyle/>
+          <a:p>
+            <a:pPr>
+              <a:lnSpc>
+                <a:spcPct val="102000"/>
+              </a:lnSpc>
+              <a:defRPr sz="1700" b="1">
+                <a:solidFill>
+                  <a:srgbClr val="12335B"/>
+                </a:solidFill>
+              </a:defRPr>
+            </a:pPr>
+            <a:r>
+              <a:t>Five sequential stages turn one phone clip into an LBW verdict.</a:t>
+            </a:r>
+          </a:p>
+        </p:txBody>
+      </p:sp>
+      <p:sp>
+        <p:nvSpPr>
+          <p:cNvPr id="7" name="TextBox 6"/>
+          <p:cNvSpPr txBox="1"/>
+          <p:nvPr/>
+        </p:nvSpPr>
+        <p:spPr>
+          <a:xfrm>
+            <a:off x="502920" y="1847088"/>
+            <a:ext cx="8138160" cy="2455164"/>
           </a:xfrm>
           <a:prstGeom prst="rect">
             <a:avLst/>
@@ -6172,91 +6471,91 @@
           <a:p>
             <a:pPr>
               <a:lnSpc>
-                <a:spcPct val="105000"/>
+                <a:spcPct val="104000"/>
               </a:lnSpc>
               <a:spcAft>
-                <a:spcPts val="700"/>
-              </a:spcAft>
-              <a:defRPr sz="1700">
-                <a:solidFill>
-                  <a:srgbClr val="202020"/>
-                </a:solidFill>
-              </a:defRPr>
-            </a:pPr>
-            <a:r>
-              <a:t>•  Flutter + Dart: cross-platform mobile app (capture, calibration taps, result viewer).</a:t>
+                <a:spcPts val="600"/>
+              </a:spcAft>
+              <a:defRPr sz="1400">
+                <a:solidFill>
+                  <a:srgbClr val="222222"/>
+                </a:solidFill>
+              </a:defRPr>
+            </a:pPr>
+            <a:r>
+              <a:t>• Stage 1 — Calibration: the marked stumps anchor solvePnP to recover the camera pose (sub-pixel on synthetic input; higher on real handheld clips).</a:t>
             </a:r>
           </a:p>
           <a:p>
             <a:pPr>
               <a:lnSpc>
-                <a:spcPct val="105000"/>
+                <a:spcPct val="104000"/>
               </a:lnSpc>
               <a:spcAft>
-                <a:spcPts val="700"/>
-              </a:spcAft>
-              <a:defRPr sz="1700">
-                <a:solidFill>
-                  <a:srgbClr val="202020"/>
-                </a:solidFill>
-              </a:defRPr>
-            </a:pPr>
-            <a:r>
-              <a:t>•  FastAPI (Python): analysis server exposing the pipeline as a REST API.</a:t>
+                <a:spcPts val="600"/>
+              </a:spcAft>
+              <a:defRPr sz="1400">
+                <a:solidFill>
+                  <a:srgbClr val="222222"/>
+                </a:solidFill>
+              </a:defRPr>
+            </a:pPr>
+            <a:r>
+              <a:t>• Stage 2 — Ball detection: MOG2 motion + HSV colour + a YOLO detector isolate the ball in each frame.</a:t>
             </a:r>
           </a:p>
           <a:p>
             <a:pPr>
               <a:lnSpc>
-                <a:spcPct val="105000"/>
+                <a:spcPct val="104000"/>
               </a:lnSpc>
               <a:spcAft>
-                <a:spcPts val="700"/>
-              </a:spcAft>
-              <a:defRPr sz="1700">
-                <a:solidFill>
-                  <a:srgbClr val="202020"/>
-                </a:solidFill>
-              </a:defRPr>
-            </a:pPr>
-            <a:r>
-              <a:t>•  OpenCV + NumPy + SciPy: detection, PnP, RANSAC, and projectile fitting.</a:t>
+                <a:spcPts val="600"/>
+              </a:spcAft>
+              <a:defRPr sz="1400">
+                <a:solidFill>
+                  <a:srgbClr val="222222"/>
+                </a:solidFill>
+              </a:defRPr>
+            </a:pPr>
+            <a:r>
+              <a:t>• Stage 3 — Trajectory linking: a two-pass RANSAC fits one smooth parabola through the bounce and rejects clutter.</a:t>
             </a:r>
           </a:p>
           <a:p>
             <a:pPr>
               <a:lnSpc>
-                <a:spcPct val="105000"/>
+                <a:spcPct val="104000"/>
               </a:lnSpc>
               <a:spcAft>
-                <a:spcPts val="700"/>
-              </a:spcAft>
-              <a:defRPr sz="1700">
-                <a:solidFill>
-                  <a:srgbClr val="202020"/>
-                </a:solidFill>
-              </a:defRPr>
-            </a:pPr>
-            <a:r>
-              <a:t>•  Ultralytics YOLO + PyTorch: learned ball detector for cluttered real footage.</a:t>
+                <a:spcPts val="600"/>
+              </a:spcAft>
+              <a:defRPr sz="1400">
+                <a:solidFill>
+                  <a:srgbClr val="222222"/>
+                </a:solidFill>
+              </a:defRPr>
+            </a:pPr>
+            <a:r>
+              <a:t>• Stage 4 — 3D reconstruction: a gravity-constrained projectile fit lifts the 2D track to a real-world 3D arc.</a:t>
             </a:r>
           </a:p>
           <a:p>
             <a:pPr>
               <a:lnSpc>
-                <a:spcPct val="105000"/>
+                <a:spcPct val="104000"/>
               </a:lnSpc>
               <a:spcAft>
-                <a:spcPts val="700"/>
-              </a:spcAft>
-              <a:defRPr sz="1700">
-                <a:solidFill>
-                  <a:srgbClr val="202020"/>
-                </a:solidFill>
-              </a:defRPr>
-            </a:pPr>
-            <a:r>
-              <a:t>•  Three.js for the interactive 3D Hawk-Eye viewer; Firebase for auth and result storage.</a:t>
+                <a:spcPts val="600"/>
+              </a:spcAft>
+              <a:defRPr sz="1400">
+                <a:solidFill>
+                  <a:srgbClr val="222222"/>
+                </a:solidFill>
+              </a:defRPr>
+            </a:pPr>
+            <a:r>
+              <a:t>• Stage 5 — LBW decision: ICC Rule 36 — pitching, impact, wickets — give out / not out / umpire's call.</a:t>
             </a:r>
           </a:p>
         </p:txBody>
@@ -6295,8 +6594,43 @@
         </p:nvSpPr>
         <p:spPr>
           <a:xfrm>
-            <a:off x="502920" y="320040"/>
-            <a:ext cx="8138160" cy="777240"/>
+            <a:off x="502920" y="438912"/>
+            <a:ext cx="8138160" cy="201168"/>
+          </a:xfrm>
+          <a:prstGeom prst="rect">
+            <a:avLst/>
+          </a:prstGeom>
+          <a:noFill/>
+        </p:spPr>
+        <p:txBody>
+          <a:bodyPr wrap="none">
+            <a:noAutofit/>
+          </a:bodyPr>
+          <a:lstStyle/>
+          <a:p>
+            <a:pPr>
+              <a:defRPr sz="1100" b="1">
+                <a:solidFill>
+                  <a:srgbClr val="2E6FB5"/>
+                </a:solidFill>
+              </a:defRPr>
+            </a:pPr>
+            <a:r>
+              <a:t>IMPLEMENTATION</a:t>
+            </a:r>
+          </a:p>
+        </p:txBody>
+      </p:sp>
+      <p:sp>
+        <p:nvSpPr>
+          <p:cNvPr id="3" name="TextBox 2"/>
+          <p:cNvSpPr txBox="1"/>
+          <p:nvPr/>
+        </p:nvSpPr>
+        <p:spPr>
+          <a:xfrm>
+            <a:off x="502920" y="640080"/>
+            <a:ext cx="8138160" cy="530352"/>
           </a:xfrm>
           <a:prstGeom prst="rect">
             <a:avLst/>
@@ -6310,28 +6644,28 @@
           <a:lstStyle/>
           <a:p>
             <a:pPr>
-              <a:defRPr sz="2600" b="1">
+              <a:defRPr sz="2400" b="1">
                 <a:solidFill>
                   <a:srgbClr val="12335B"/>
                 </a:solidFill>
               </a:defRPr>
             </a:pPr>
             <a:r>
-              <a:t>Implementation: Module Details</a:t>
-            </a:r>
-          </a:p>
-        </p:txBody>
-      </p:sp>
-      <p:sp>
-        <p:nvSpPr>
-          <p:cNvPr id="3" name="Rectangle 2"/>
+              <a:t>Implementing Tools</a:t>
+            </a:r>
+          </a:p>
+        </p:txBody>
+      </p:sp>
+      <p:sp>
+        <p:nvSpPr>
+          <p:cNvPr id="4" name="Rectangle 3"/>
           <p:cNvSpPr/>
           <p:nvPr/>
         </p:nvSpPr>
         <p:spPr>
           <a:xfrm>
-            <a:off x="502920" y="1097280"/>
-            <a:ext cx="2011680" cy="38100"/>
+            <a:off x="502920" y="1170432"/>
+            <a:ext cx="1828800" cy="38100"/>
           </a:xfrm>
           <a:prstGeom prst="rect">
             <a:avLst/>
@@ -6368,14 +6702,87 @@
       </p:sp>
       <p:sp>
         <p:nvSpPr>
-          <p:cNvPr id="4" name="TextBox 3"/>
+          <p:cNvPr id="5" name="TextBox 4"/>
           <p:cNvSpPr txBox="1"/>
           <p:nvPr/>
         </p:nvSpPr>
         <p:spPr>
           <a:xfrm>
-            <a:off x="502920" y="1234440"/>
-            <a:ext cx="8138160" cy="3040380"/>
+            <a:off x="8001000" y="4759452"/>
+            <a:ext cx="640080" cy="274320"/>
+          </a:xfrm>
+          <a:prstGeom prst="rect">
+            <a:avLst/>
+          </a:prstGeom>
+          <a:noFill/>
+        </p:spPr>
+        <p:txBody>
+          <a:bodyPr wrap="none">
+            <a:spAutoFit/>
+          </a:bodyPr>
+          <a:lstStyle/>
+          <a:p>
+            <a:pPr algn="r">
+              <a:defRPr sz="900">
+                <a:solidFill>
+                  <a:srgbClr val="8A8A8A"/>
+                </a:solidFill>
+              </a:defRPr>
+            </a:pPr>
+            <a:r>
+              <a:t>13</a:t>
+            </a:r>
+          </a:p>
+        </p:txBody>
+      </p:sp>
+      <p:sp>
+        <p:nvSpPr>
+          <p:cNvPr id="6" name="TextBox 5"/>
+          <p:cNvSpPr txBox="1"/>
+          <p:nvPr/>
+        </p:nvSpPr>
+        <p:spPr>
+          <a:xfrm>
+            <a:off x="502920" y="1335024"/>
+            <a:ext cx="8138160" cy="502920"/>
+          </a:xfrm>
+          <a:prstGeom prst="rect">
+            <a:avLst/>
+          </a:prstGeom>
+          <a:noFill/>
+        </p:spPr>
+        <p:txBody>
+          <a:bodyPr wrap="square">
+            <a:noAutofit/>
+          </a:bodyPr>
+          <a:lstStyle/>
+          <a:p>
+            <a:pPr>
+              <a:lnSpc>
+                <a:spcPct val="102000"/>
+              </a:lnSpc>
+              <a:defRPr sz="1700" b="1">
+                <a:solidFill>
+                  <a:srgbClr val="12335B"/>
+                </a:solidFill>
+              </a:defRPr>
+            </a:pPr>
+            <a:r>
+              <a:t>A standard, open-source mobile-to-cloud stack — no paid SDKs.</a:t>
+            </a:r>
+          </a:p>
+        </p:txBody>
+      </p:sp>
+      <p:sp>
+        <p:nvSpPr>
+          <p:cNvPr id="7" name="TextBox 6"/>
+          <p:cNvSpPr txBox="1"/>
+          <p:nvPr/>
+        </p:nvSpPr>
+        <p:spPr>
+          <a:xfrm>
+            <a:off x="502920" y="1847088"/>
+            <a:ext cx="8138160" cy="2455164"/>
           </a:xfrm>
           <a:prstGeom prst="rect">
             <a:avLst/>
@@ -6390,91 +6797,91 @@
           <a:p>
             <a:pPr>
               <a:lnSpc>
-                <a:spcPct val="105000"/>
+                <a:spcPct val="104000"/>
               </a:lnSpc>
               <a:spcAft>
-                <a:spcPts val="700"/>
-              </a:spcAft>
-              <a:defRPr sz="1700">
-                <a:solidFill>
-                  <a:srgbClr val="202020"/>
-                </a:solidFill>
-              </a:defRPr>
-            </a:pPr>
-            <a:r>
-              <a:t>•  Calibration: stump-anchored PnP from the tapped corners derives pitch length and camera pose.</a:t>
+                <a:spcPts val="600"/>
+              </a:spcAft>
+              <a:defRPr sz="1400">
+                <a:solidFill>
+                  <a:srgbClr val="222222"/>
+                </a:solidFill>
+              </a:defRPr>
+            </a:pPr>
+            <a:r>
+              <a:t>• Flutter + Dart: cross-platform mobile app (capture, calibration taps, result viewer).</a:t>
             </a:r>
           </a:p>
           <a:p>
             <a:pPr>
               <a:lnSpc>
-                <a:spcPct val="105000"/>
+                <a:spcPct val="104000"/>
               </a:lnSpc>
               <a:spcAft>
-                <a:spcPts val="700"/>
-              </a:spcAft>
-              <a:defRPr sz="1700">
-                <a:solidFill>
-                  <a:srgbClr val="202020"/>
-                </a:solidFill>
-              </a:defRPr>
-            </a:pPr>
-            <a:r>
-              <a:t>•  Detection: combined motion/colour and YOLO, ROI-masked, producing per-frame ball candidates.</a:t>
+                <a:spcPts val="600"/>
+              </a:spcAft>
+              <a:defRPr sz="1400">
+                <a:solidFill>
+                  <a:srgbClr val="222222"/>
+                </a:solidFill>
+              </a:defRPr>
+            </a:pPr>
+            <a:r>
+              <a:t>• FastAPI (Python): analysis server exposing the pipeline as a REST API.</a:t>
             </a:r>
           </a:p>
           <a:p>
             <a:pPr>
               <a:lnSpc>
-                <a:spcPct val="105000"/>
+                <a:spcPct val="104000"/>
               </a:lnSpc>
               <a:spcAft>
-                <a:spcPts val="700"/>
-              </a:spcAft>
-              <a:defRPr sz="1700">
-                <a:solidFill>
-                  <a:srgbClr val="202020"/>
-                </a:solidFill>
-              </a:defRPr>
-            </a:pPr>
-            <a:r>
-              <a:t>•  Trajectory: RANSAC parabola seed → least-squares refine → bounce-aware arc merge.</a:t>
+                <a:spcPts val="600"/>
+              </a:spcAft>
+              <a:defRPr sz="1400">
+                <a:solidFill>
+                  <a:srgbClr val="222222"/>
+                </a:solidFill>
+              </a:defRPr>
+            </a:pPr>
+            <a:r>
+              <a:t>• OpenCV + NumPy + SciPy: detection, PnP, RANSAC, and projectile fitting.</a:t>
             </a:r>
           </a:p>
           <a:p>
             <a:pPr>
               <a:lnSpc>
-                <a:spcPct val="105000"/>
+                <a:spcPct val="104000"/>
               </a:lnSpc>
               <a:spcAft>
-                <a:spcPts val="700"/>
-              </a:spcAft>
-              <a:defRPr sz="1700">
-                <a:solidFill>
-                  <a:srgbClr val="202020"/>
-                </a:solidFill>
-              </a:defRPr>
-            </a:pPr>
-            <a:r>
-              <a:t>•  Reconstruction: a gravity-constrained linear solver lifts pixels to 3D and predicts the path to the stumps.</a:t>
+                <a:spcPts val="600"/>
+              </a:spcAft>
+              <a:defRPr sz="1400">
+                <a:solidFill>
+                  <a:srgbClr val="222222"/>
+                </a:solidFill>
+              </a:defRPr>
+            </a:pPr>
+            <a:r>
+              <a:t>• Ultralytics YOLO + PyTorch: learned ball detector for cluttered real footage.</a:t>
             </a:r>
           </a:p>
           <a:p>
             <a:pPr>
               <a:lnSpc>
-                <a:spcPct val="105000"/>
+                <a:spcPct val="104000"/>
               </a:lnSpc>
               <a:spcAft>
-                <a:spcPts val="700"/>
-              </a:spcAft>
-              <a:defRPr sz="1700">
-                <a:solidFill>
-                  <a:srgbClr val="202020"/>
-                </a:solidFill>
-              </a:defRPr>
-            </a:pPr>
-            <a:r>
-              <a:t>•  Decision + overlay: the ICC Rule 36 engine plus a 2D overlay and a 3D viewer with speed, swing, and spin.</a:t>
+                <a:spcPts val="600"/>
+              </a:spcAft>
+              <a:defRPr sz="1400">
+                <a:solidFill>
+                  <a:srgbClr val="222222"/>
+                </a:solidFill>
+              </a:defRPr>
+            </a:pPr>
+            <a:r>
+              <a:t>• Three.js for the interactive 3D Hawk-Eye viewer; Firebase for auth and result storage.</a:t>
             </a:r>
           </a:p>
         </p:txBody>
@@ -6513,8 +6920,43 @@
         </p:nvSpPr>
         <p:spPr>
           <a:xfrm>
-            <a:off x="502920" y="320040"/>
-            <a:ext cx="8138160" cy="777240"/>
+            <a:off x="502920" y="438912"/>
+            <a:ext cx="8138160" cy="201168"/>
+          </a:xfrm>
+          <a:prstGeom prst="rect">
+            <a:avLst/>
+          </a:prstGeom>
+          <a:noFill/>
+        </p:spPr>
+        <p:txBody>
+          <a:bodyPr wrap="none">
+            <a:noAutofit/>
+          </a:bodyPr>
+          <a:lstStyle/>
+          <a:p>
+            <a:pPr>
+              <a:defRPr sz="1100" b="1">
+                <a:solidFill>
+                  <a:srgbClr val="2E6FB5"/>
+                </a:solidFill>
+              </a:defRPr>
+            </a:pPr>
+            <a:r>
+              <a:t>IMPLEMENTATION</a:t>
+            </a:r>
+          </a:p>
+        </p:txBody>
+      </p:sp>
+      <p:sp>
+        <p:nvSpPr>
+          <p:cNvPr id="3" name="TextBox 2"/>
+          <p:cNvSpPr txBox="1"/>
+          <p:nvPr/>
+        </p:nvSpPr>
+        <p:spPr>
+          <a:xfrm>
+            <a:off x="502920" y="640080"/>
+            <a:ext cx="8138160" cy="530352"/>
           </a:xfrm>
           <a:prstGeom prst="rect">
             <a:avLst/>
@@ -6528,28 +6970,28 @@
           <a:lstStyle/>
           <a:p>
             <a:pPr>
-              <a:defRPr sz="2600" b="1">
+              <a:defRPr sz="2400" b="1">
                 <a:solidFill>
                   <a:srgbClr val="12335B"/>
                 </a:solidFill>
               </a:defRPr>
             </a:pPr>
             <a:r>
-              <a:t>Real-Video Test: test3.mp4</a:t>
-            </a:r>
-          </a:p>
-        </p:txBody>
-      </p:sp>
-      <p:sp>
-        <p:nvSpPr>
-          <p:cNvPr id="3" name="Rectangle 2"/>
+              <a:t>Implementation: Module Details</a:t>
+            </a:r>
+          </a:p>
+        </p:txBody>
+      </p:sp>
+      <p:sp>
+        <p:nvSpPr>
+          <p:cNvPr id="4" name="Rectangle 3"/>
           <p:cNvSpPr/>
           <p:nvPr/>
         </p:nvSpPr>
         <p:spPr>
           <a:xfrm>
-            <a:off x="502920" y="1097280"/>
-            <a:ext cx="2011680" cy="38100"/>
+            <a:off x="502920" y="1170432"/>
+            <a:ext cx="1828800" cy="38100"/>
           </a:xfrm>
           <a:prstGeom prst="rect">
             <a:avLst/>
@@ -6584,30 +7026,6 @@
           </a:p>
         </p:txBody>
       </p:sp>
-      <p:pic>
-        <p:nvPicPr>
-          <p:cNvPr id="4" name="Picture 3" descr="test3_overlay.png"/>
-          <p:cNvPicPr>
-            <a:picLocks noChangeAspect="1"/>
-          </p:cNvPicPr>
-          <p:nvPr/>
-        </p:nvPicPr>
-        <p:blipFill>
-          <a:blip r:embed="rId2"/>
-          <a:stretch>
-            <a:fillRect/>
-          </a:stretch>
-        </p:blipFill>
-        <p:spPr>
-          <a:xfrm>
-            <a:off x="1613773" y="1234440"/>
-            <a:ext cx="1710213" cy="3040380"/>
-          </a:xfrm>
-          <a:prstGeom prst="rect">
-            <a:avLst/>
-          </a:prstGeom>
-        </p:spPr>
-      </p:pic>
       <p:sp>
         <p:nvSpPr>
           <p:cNvPr id="5" name="TextBox 4"/>
@@ -6616,8 +7034,8 @@
         </p:nvSpPr>
         <p:spPr>
           <a:xfrm>
-            <a:off x="4709160" y="1234440"/>
-            <a:ext cx="3931920" cy="3040380"/>
+            <a:off x="8001000" y="4759452"/>
+            <a:ext cx="640080" cy="274320"/>
           </a:xfrm>
           <a:prstGeom prst="rect">
             <a:avLst/>
@@ -6625,98 +7043,171 @@
           <a:noFill/>
         </p:spPr>
         <p:txBody>
-          <a:bodyPr wrap="square" anchor="ctr">
+          <a:bodyPr wrap="none">
+            <a:spAutoFit/>
+          </a:bodyPr>
+          <a:lstStyle/>
+          <a:p>
+            <a:pPr algn="r">
+              <a:defRPr sz="900">
+                <a:solidFill>
+                  <a:srgbClr val="8A8A8A"/>
+                </a:solidFill>
+              </a:defRPr>
+            </a:pPr>
+            <a:r>
+              <a:t>14</a:t>
+            </a:r>
+          </a:p>
+        </p:txBody>
+      </p:sp>
+      <p:sp>
+        <p:nvSpPr>
+          <p:cNvPr id="6" name="TextBox 5"/>
+          <p:cNvSpPr txBox="1"/>
+          <p:nvPr/>
+        </p:nvSpPr>
+        <p:spPr>
+          <a:xfrm>
+            <a:off x="502920" y="1335024"/>
+            <a:ext cx="8138160" cy="502920"/>
+          </a:xfrm>
+          <a:prstGeom prst="rect">
+            <a:avLst/>
+          </a:prstGeom>
+          <a:noFill/>
+        </p:spPr>
+        <p:txBody>
+          <a:bodyPr wrap="square">
+            <a:noAutofit/>
+          </a:bodyPr>
+          <a:lstStyle/>
+          <a:p>
+            <a:pPr>
+              <a:lnSpc>
+                <a:spcPct val="102000"/>
+              </a:lnSpc>
+              <a:defRPr sz="1700" b="1">
+                <a:solidFill>
+                  <a:srgbClr val="12335B"/>
+                </a:solidFill>
+              </a:defRPr>
+            </a:pPr>
+            <a:r>
+              <a:t>One module per pipeline stage, each small and independently testable.</a:t>
+            </a:r>
+          </a:p>
+        </p:txBody>
+      </p:sp>
+      <p:sp>
+        <p:nvSpPr>
+          <p:cNvPr id="7" name="TextBox 6"/>
+          <p:cNvSpPr txBox="1"/>
+          <p:nvPr/>
+        </p:nvSpPr>
+        <p:spPr>
+          <a:xfrm>
+            <a:off x="502920" y="1847088"/>
+            <a:ext cx="8138160" cy="2455164"/>
+          </a:xfrm>
+          <a:prstGeom prst="rect">
+            <a:avLst/>
+          </a:prstGeom>
+          <a:noFill/>
+        </p:spPr>
+        <p:txBody>
+          <a:bodyPr wrap="square">
             <a:normAutofit/>
           </a:bodyPr>
           <a:lstStyle/>
           <a:p>
             <a:pPr>
               <a:lnSpc>
-                <a:spcPct val="105000"/>
+                <a:spcPct val="104000"/>
               </a:lnSpc>
               <a:spcAft>
-                <a:spcPts val="800"/>
-              </a:spcAft>
-              <a:defRPr sz="1600">
-                <a:solidFill>
-                  <a:srgbClr val="202020"/>
-                </a:solidFill>
-              </a:defRPr>
-            </a:pPr>
-            <a:r>
-              <a:t>•  29 ball detections tracked across the delivery.</a:t>
+                <a:spcPts val="600"/>
+              </a:spcAft>
+              <a:defRPr sz="1400">
+                <a:solidFill>
+                  <a:srgbClr val="222222"/>
+                </a:solidFill>
+              </a:defRPr>
+            </a:pPr>
+            <a:r>
+              <a:t>• Calibration: stump-anchored PnP from the tapped points derives pitch length and camera pose.</a:t>
             </a:r>
           </a:p>
           <a:p>
             <a:pPr>
               <a:lnSpc>
-                <a:spcPct val="105000"/>
+                <a:spcPct val="104000"/>
               </a:lnSpc>
               <a:spcAft>
-                <a:spcPts val="800"/>
-              </a:spcAft>
-              <a:defRPr sz="1600">
-                <a:solidFill>
-                  <a:srgbClr val="202020"/>
-                </a:solidFill>
-              </a:defRPr>
-            </a:pPr>
-            <a:r>
-              <a:t>•  Camera recovered from the marked stumps (16.56 px reprojection — high; see limitations).</a:t>
+                <a:spcPts val="600"/>
+              </a:spcAft>
+              <a:defRPr sz="1400">
+                <a:solidFill>
+                  <a:srgbClr val="222222"/>
+                </a:solidFill>
+              </a:defRPr>
+            </a:pPr>
+            <a:r>
+              <a:t>• Detection: combined motion/colour and YOLO, ROI-masked, producing per-frame ball candidates.</a:t>
             </a:r>
           </a:p>
           <a:p>
             <a:pPr>
               <a:lnSpc>
-                <a:spcPct val="105000"/>
+                <a:spcPct val="104000"/>
               </a:lnSpc>
               <a:spcAft>
-                <a:spcPts val="800"/>
-              </a:spcAft>
-              <a:defRPr sz="1600">
-                <a:solidFill>
-                  <a:srgbClr val="202020"/>
-                </a:solidFill>
-              </a:defRPr>
-            </a:pPr>
-            <a:r>
-              <a:t>•  Release speed 64.1 km/h; swing 48 cm; spin 2.5 deg.</a:t>
+                <a:spcPts val="600"/>
+              </a:spcAft>
+              <a:defRPr sz="1400">
+                <a:solidFill>
+                  <a:srgbClr val="222222"/>
+                </a:solidFill>
+              </a:defRPr>
+            </a:pPr>
+            <a:r>
+              <a:t>• Trajectory: RANSAC parabola seed → least-squares refine → bounce-aware arc merge.</a:t>
             </a:r>
           </a:p>
           <a:p>
             <a:pPr>
               <a:lnSpc>
-                <a:spcPct val="105000"/>
+                <a:spcPct val="104000"/>
               </a:lnSpc>
               <a:spcAft>
-                <a:spcPts val="800"/>
-              </a:spcAft>
-              <a:defRPr sz="1600">
-                <a:solidFill>
-                  <a:srgbClr val="202020"/>
-                </a:solidFill>
-              </a:defRPr>
-            </a:pPr>
-            <a:r>
-              <a:t>•  Ball pitches and is intercepted; path predicted to the stumps.</a:t>
+                <a:spcPts val="600"/>
+              </a:spcAft>
+              <a:defRPr sz="1400">
+                <a:solidFill>
+                  <a:srgbClr val="222222"/>
+                </a:solidFill>
+              </a:defRPr>
+            </a:pPr>
+            <a:r>
+              <a:t>• Reconstruction: a gravity-constrained linear solver lifts pixels to 3D and predicts the path to the stumps.</a:t>
             </a:r>
           </a:p>
           <a:p>
             <a:pPr>
               <a:lnSpc>
-                <a:spcPct val="105000"/>
+                <a:spcPct val="104000"/>
               </a:lnSpc>
               <a:spcAft>
-                <a:spcPts val="800"/>
-              </a:spcAft>
-              <a:defRPr sz="1600">
-                <a:solidFill>
-                  <a:srgbClr val="202020"/>
-                </a:solidFill>
-              </a:defRPr>
-            </a:pPr>
-            <a:r>
-              <a:t>•  Verdict NOT OUT — predicted to miss the wicket.</a:t>
+                <a:spcPts val="600"/>
+              </a:spcAft>
+              <a:defRPr sz="1400">
+                <a:solidFill>
+                  <a:srgbClr val="222222"/>
+                </a:solidFill>
+              </a:defRPr>
+            </a:pPr>
+            <a:r>
+              <a:t>• Decision + overlay: the ICC Rule 36 engine plus a 2D overlay and a 3D viewer with speed, swing, and spin.</a:t>
             </a:r>
           </a:p>
         </p:txBody>
@@ -6755,8 +7246,43 @@
         </p:nvSpPr>
         <p:spPr>
           <a:xfrm>
-            <a:off x="502920" y="320040"/>
-            <a:ext cx="8138160" cy="777240"/>
+            <a:off x="502920" y="438912"/>
+            <a:ext cx="8138160" cy="201168"/>
+          </a:xfrm>
+          <a:prstGeom prst="rect">
+            <a:avLst/>
+          </a:prstGeom>
+          <a:noFill/>
+        </p:spPr>
+        <p:txBody>
+          <a:bodyPr wrap="none">
+            <a:noAutofit/>
+          </a:bodyPr>
+          <a:lstStyle/>
+          <a:p>
+            <a:pPr>
+              <a:defRPr sz="1100" b="1">
+                <a:solidFill>
+                  <a:srgbClr val="2E6FB5"/>
+                </a:solidFill>
+              </a:defRPr>
+            </a:pPr>
+            <a:r>
+              <a:t>RESULTS</a:t>
+            </a:r>
+          </a:p>
+        </p:txBody>
+      </p:sp>
+      <p:sp>
+        <p:nvSpPr>
+          <p:cNvPr id="3" name="TextBox 2"/>
+          <p:cNvSpPr txBox="1"/>
+          <p:nvPr/>
+        </p:nvSpPr>
+        <p:spPr>
+          <a:xfrm>
+            <a:off x="502920" y="640080"/>
+            <a:ext cx="8138160" cy="530352"/>
           </a:xfrm>
           <a:prstGeom prst="rect">
             <a:avLst/>
@@ -6770,28 +7296,28 @@
           <a:lstStyle/>
           <a:p>
             <a:pPr>
-              <a:defRPr sz="2600" b="1">
+              <a:defRPr sz="2400" b="1">
                 <a:solidFill>
                   <a:srgbClr val="12335B"/>
                 </a:solidFill>
               </a:defRPr>
             </a:pPr>
             <a:r>
-              <a:t>3D Hawk-Eye View: test3</a:t>
-            </a:r>
-          </a:p>
-        </p:txBody>
-      </p:sp>
-      <p:sp>
-        <p:nvSpPr>
-          <p:cNvPr id="3" name="Rectangle 2"/>
+              <a:t>Real-Video Test: test3.mp4</a:t>
+            </a:r>
+          </a:p>
+        </p:txBody>
+      </p:sp>
+      <p:sp>
+        <p:nvSpPr>
+          <p:cNvPr id="4" name="Rectangle 3"/>
           <p:cNvSpPr/>
           <p:nvPr/>
         </p:nvSpPr>
         <p:spPr>
           <a:xfrm>
-            <a:off x="502920" y="1097280"/>
-            <a:ext cx="2011680" cy="38100"/>
+            <a:off x="502920" y="1170432"/>
+            <a:ext cx="1828800" cy="38100"/>
           </a:xfrm>
           <a:prstGeom prst="rect">
             <a:avLst/>
@@ -6826,9 +7352,44 @@
           </a:p>
         </p:txBody>
       </p:sp>
+      <p:sp>
+        <p:nvSpPr>
+          <p:cNvPr id="5" name="TextBox 4"/>
+          <p:cNvSpPr txBox="1"/>
+          <p:nvPr/>
+        </p:nvSpPr>
+        <p:spPr>
+          <a:xfrm>
+            <a:off x="8001000" y="4759452"/>
+            <a:ext cx="640080" cy="274320"/>
+          </a:xfrm>
+          <a:prstGeom prst="rect">
+            <a:avLst/>
+          </a:prstGeom>
+          <a:noFill/>
+        </p:spPr>
+        <p:txBody>
+          <a:bodyPr wrap="none">
+            <a:spAutoFit/>
+          </a:bodyPr>
+          <a:lstStyle/>
+          <a:p>
+            <a:pPr algn="r">
+              <a:defRPr sz="900">
+                <a:solidFill>
+                  <a:srgbClr val="8A8A8A"/>
+                </a:solidFill>
+              </a:defRPr>
+            </a:pPr>
+            <a:r>
+              <a:t>15</a:t>
+            </a:r>
+          </a:p>
+        </p:txBody>
+      </p:sp>
       <p:pic>
         <p:nvPicPr>
-          <p:cNvPr id="4" name="Picture 3" descr="test3_3d_path.png"/>
+          <p:cNvPr id="6" name="Picture 5" descr="test3_overlay.png"/>
           <p:cNvPicPr>
             <a:picLocks noChangeAspect="1"/>
           </p:cNvPicPr>
@@ -6842,14 +7403,127 @@
         </p:blipFill>
         <p:spPr>
           <a:xfrm>
-            <a:off x="1791165" y="1234440"/>
-            <a:ext cx="5561670" cy="3040380"/>
+            <a:off x="1634347" y="1335024"/>
+            <a:ext cx="1669065" cy="2967228"/>
           </a:xfrm>
           <a:prstGeom prst="rect">
             <a:avLst/>
           </a:prstGeom>
         </p:spPr>
       </p:pic>
+      <p:sp>
+        <p:nvSpPr>
+          <p:cNvPr id="7" name="TextBox 6"/>
+          <p:cNvSpPr txBox="1"/>
+          <p:nvPr/>
+        </p:nvSpPr>
+        <p:spPr>
+          <a:xfrm>
+            <a:off x="4709160" y="1335024"/>
+            <a:ext cx="3931920" cy="2967228"/>
+          </a:xfrm>
+          <a:prstGeom prst="rect">
+            <a:avLst/>
+          </a:prstGeom>
+          <a:noFill/>
+        </p:spPr>
+        <p:txBody>
+          <a:bodyPr wrap="square" anchor="ctr">
+            <a:normAutofit/>
+          </a:bodyPr>
+          <a:lstStyle/>
+          <a:p>
+            <a:pPr>
+              <a:lnSpc>
+                <a:spcPct val="104000"/>
+              </a:lnSpc>
+              <a:spcAft>
+                <a:spcPts val="800"/>
+              </a:spcAft>
+              <a:defRPr sz="1500">
+                <a:solidFill>
+                  <a:srgbClr val="222222"/>
+                </a:solidFill>
+              </a:defRPr>
+            </a:pPr>
+            <a:r>
+              <a:t>• 29 ball detections tracked across the delivery (28 RANSAC inliers).</a:t>
+            </a:r>
+          </a:p>
+          <a:p>
+            <a:pPr>
+              <a:lnSpc>
+                <a:spcPct val="104000"/>
+              </a:lnSpc>
+              <a:spcAft>
+                <a:spcPts val="800"/>
+              </a:spcAft>
+              <a:defRPr sz="1500">
+                <a:solidFill>
+                  <a:srgbClr val="222222"/>
+                </a:solidFill>
+              </a:defRPr>
+            </a:pPr>
+            <a:r>
+              <a:t>• Camera recovered from the marked stumps (16.56 px reprojection — high; see limitations).</a:t>
+            </a:r>
+          </a:p>
+          <a:p>
+            <a:pPr>
+              <a:lnSpc>
+                <a:spcPct val="104000"/>
+              </a:lnSpc>
+              <a:spcAft>
+                <a:spcPts val="800"/>
+              </a:spcAft>
+              <a:defRPr sz="1500">
+                <a:solidFill>
+                  <a:srgbClr val="222222"/>
+                </a:solidFill>
+              </a:defRPr>
+            </a:pPr>
+            <a:r>
+              <a:t>• Release speed 64.1 km/h; swing 48 cm; spin 2.5°.</a:t>
+            </a:r>
+          </a:p>
+          <a:p>
+            <a:pPr>
+              <a:lnSpc>
+                <a:spcPct val="104000"/>
+              </a:lnSpc>
+              <a:spcAft>
+                <a:spcPts val="800"/>
+              </a:spcAft>
+              <a:defRPr sz="1500">
+                <a:solidFill>
+                  <a:srgbClr val="222222"/>
+                </a:solidFill>
+              </a:defRPr>
+            </a:pPr>
+            <a:r>
+              <a:t>• Ball pitches and is intercepted; path predicted to the stumps.</a:t>
+            </a:r>
+          </a:p>
+          <a:p>
+            <a:pPr>
+              <a:lnSpc>
+                <a:spcPct val="104000"/>
+              </a:lnSpc>
+              <a:spcAft>
+                <a:spcPts val="800"/>
+              </a:spcAft>
+              <a:defRPr sz="1500">
+                <a:solidFill>
+                  <a:srgbClr val="222222"/>
+                </a:solidFill>
+              </a:defRPr>
+            </a:pPr>
+            <a:r>
+              <a:t>• Verdict NOT OUT — predicted to miss the wicket.</a:t>
+            </a:r>
+          </a:p>
+        </p:txBody>
+      </p:sp>
     </p:spTree>
   </p:cSld>
   <p:clrMapOvr>
@@ -6884,8 +7558,43 @@
         </p:nvSpPr>
         <p:spPr>
           <a:xfrm>
-            <a:off x="502920" y="320040"/>
-            <a:ext cx="8138160" cy="777240"/>
+            <a:off x="502920" y="438912"/>
+            <a:ext cx="8138160" cy="201168"/>
+          </a:xfrm>
+          <a:prstGeom prst="rect">
+            <a:avLst/>
+          </a:prstGeom>
+          <a:noFill/>
+        </p:spPr>
+        <p:txBody>
+          <a:bodyPr wrap="none">
+            <a:noAutofit/>
+          </a:bodyPr>
+          <a:lstStyle/>
+          <a:p>
+            <a:pPr>
+              <a:defRPr sz="1100" b="1">
+                <a:solidFill>
+                  <a:srgbClr val="2E6FB5"/>
+                </a:solidFill>
+              </a:defRPr>
+            </a:pPr>
+            <a:r>
+              <a:t>RESULTS</a:t>
+            </a:r>
+          </a:p>
+        </p:txBody>
+      </p:sp>
+      <p:sp>
+        <p:nvSpPr>
+          <p:cNvPr id="3" name="TextBox 2"/>
+          <p:cNvSpPr txBox="1"/>
+          <p:nvPr/>
+        </p:nvSpPr>
+        <p:spPr>
+          <a:xfrm>
+            <a:off x="502920" y="640080"/>
+            <a:ext cx="8138160" cy="530352"/>
           </a:xfrm>
           <a:prstGeom prst="rect">
             <a:avLst/>
@@ -6899,28 +7608,28 @@
           <a:lstStyle/>
           <a:p>
             <a:pPr>
-              <a:defRPr sz="2600" b="1">
+              <a:defRPr sz="2400" b="1">
                 <a:solidFill>
                   <a:srgbClr val="12335B"/>
                 </a:solidFill>
               </a:defRPr>
             </a:pPr>
             <a:r>
-              <a:t>Synthetic Validation: 8 Scenarios</a:t>
-            </a:r>
-          </a:p>
-        </p:txBody>
-      </p:sp>
-      <p:sp>
-        <p:nvSpPr>
-          <p:cNvPr id="3" name="Rectangle 2"/>
+              <a:t>3D Hawk-Eye View: test3</a:t>
+            </a:r>
+          </a:p>
+        </p:txBody>
+      </p:sp>
+      <p:sp>
+        <p:nvSpPr>
+          <p:cNvPr id="4" name="Rectangle 3"/>
           <p:cNvSpPr/>
           <p:nvPr/>
         </p:nvSpPr>
         <p:spPr>
           <a:xfrm>
-            <a:off x="502920" y="1097280"/>
-            <a:ext cx="2011680" cy="38100"/>
+            <a:off x="502920" y="1170432"/>
+            <a:ext cx="1828800" cy="38100"/>
           </a:xfrm>
           <a:prstGeom prst="rect">
             <a:avLst/>
@@ -6955,9 +7664,44 @@
           </a:p>
         </p:txBody>
       </p:sp>
+      <p:sp>
+        <p:nvSpPr>
+          <p:cNvPr id="5" name="TextBox 4"/>
+          <p:cNvSpPr txBox="1"/>
+          <p:nvPr/>
+        </p:nvSpPr>
+        <p:spPr>
+          <a:xfrm>
+            <a:off x="8001000" y="4759452"/>
+            <a:ext cx="640080" cy="274320"/>
+          </a:xfrm>
+          <a:prstGeom prst="rect">
+            <a:avLst/>
+          </a:prstGeom>
+          <a:noFill/>
+        </p:spPr>
+        <p:txBody>
+          <a:bodyPr wrap="none">
+            <a:spAutoFit/>
+          </a:bodyPr>
+          <a:lstStyle/>
+          <a:p>
+            <a:pPr algn="r">
+              <a:defRPr sz="900">
+                <a:solidFill>
+                  <a:srgbClr val="8A8A8A"/>
+                </a:solidFill>
+              </a:defRPr>
+            </a:pPr>
+            <a:r>
+              <a:t>16</a:t>
+            </a:r>
+          </a:p>
+        </p:txBody>
+      </p:sp>
       <p:pic>
         <p:nvPicPr>
-          <p:cNvPr id="4" name="Picture 3" descr="synth_summary.png"/>
+          <p:cNvPr id="6" name="Picture 5" descr="test3_3d_path.png"/>
           <p:cNvPicPr>
             <a:picLocks noChangeAspect="1"/>
           </p:cNvPicPr>
@@ -6971,91 +7715,14 @@
         </p:blipFill>
         <p:spPr>
           <a:xfrm>
-            <a:off x="502920" y="2208530"/>
-            <a:ext cx="3931920" cy="1092200"/>
+            <a:off x="1858072" y="1335024"/>
+            <a:ext cx="5427856" cy="2967228"/>
           </a:xfrm>
           <a:prstGeom prst="rect">
             <a:avLst/>
           </a:prstGeom>
         </p:spPr>
       </p:pic>
-      <p:sp>
-        <p:nvSpPr>
-          <p:cNvPr id="5" name="TextBox 4"/>
-          <p:cNvSpPr txBox="1"/>
-          <p:nvPr/>
-        </p:nvSpPr>
-        <p:spPr>
-          <a:xfrm>
-            <a:off x="4709160" y="1234440"/>
-            <a:ext cx="3931920" cy="3040380"/>
-          </a:xfrm>
-          <a:prstGeom prst="rect">
-            <a:avLst/>
-          </a:prstGeom>
-          <a:noFill/>
-        </p:spPr>
-        <p:txBody>
-          <a:bodyPr wrap="square" anchor="ctr">
-            <a:normAutofit/>
-          </a:bodyPr>
-          <a:lstStyle/>
-          <a:p>
-            <a:pPr>
-              <a:lnSpc>
-                <a:spcPct val="105000"/>
-              </a:lnSpc>
-              <a:spcAft>
-                <a:spcPts val="800"/>
-              </a:spcAft>
-              <a:defRPr sz="1600">
-                <a:solidFill>
-                  <a:srgbClr val="202020"/>
-                </a:solidFill>
-              </a:defRPr>
-            </a:pPr>
-            <a:r>
-              <a:t>•  8 controlled deliveries spanning out, not-out, and umpire's-call lines.</a:t>
-            </a:r>
-          </a:p>
-          <a:p>
-            <a:pPr>
-              <a:lnSpc>
-                <a:spcPct val="105000"/>
-              </a:lnSpc>
-              <a:spcAft>
-                <a:spcPts val="800"/>
-              </a:spcAft>
-              <a:defRPr sz="1600">
-                <a:solidFill>
-                  <a:srgbClr val="202020"/>
-                </a:solidFill>
-              </a:defRPr>
-            </a:pPr>
-            <a:r>
-              <a:t>•  Camera pose recovered correctly in every scene.</a:t>
-            </a:r>
-          </a:p>
-          <a:p>
-            <a:pPr>
-              <a:lnSpc>
-                <a:spcPct val="105000"/>
-              </a:lnSpc>
-              <a:spcAft>
-                <a:spcPts val="800"/>
-              </a:spcAft>
-              <a:defRPr sz="1600">
-                <a:solidFill>
-                  <a:srgbClr val="202020"/>
-                </a:solidFill>
-              </a:defRPr>
-            </a:pPr>
-            <a:r>
-              <a:t>•  8 / 8 verdicts correct against the known ground truth.</a:t>
-            </a:r>
-          </a:p>
-        </p:txBody>
-      </p:sp>
     </p:spTree>
   </p:cSld>
   <p:clrMapOvr>
@@ -7090,8 +7757,43 @@
         </p:nvSpPr>
         <p:spPr>
           <a:xfrm>
-            <a:off x="502920" y="320040"/>
-            <a:ext cx="8138160" cy="777240"/>
+            <a:off x="502920" y="438912"/>
+            <a:ext cx="8138160" cy="201168"/>
+          </a:xfrm>
+          <a:prstGeom prst="rect">
+            <a:avLst/>
+          </a:prstGeom>
+          <a:noFill/>
+        </p:spPr>
+        <p:txBody>
+          <a:bodyPr wrap="none">
+            <a:noAutofit/>
+          </a:bodyPr>
+          <a:lstStyle/>
+          <a:p>
+            <a:pPr>
+              <a:defRPr sz="1100" b="1">
+                <a:solidFill>
+                  <a:srgbClr val="2E6FB5"/>
+                </a:solidFill>
+              </a:defRPr>
+            </a:pPr>
+            <a:r>
+              <a:t>RESULTS</a:t>
+            </a:r>
+          </a:p>
+        </p:txBody>
+      </p:sp>
+      <p:sp>
+        <p:nvSpPr>
+          <p:cNvPr id="3" name="TextBox 2"/>
+          <p:cNvSpPr txBox="1"/>
+          <p:nvPr/>
+        </p:nvSpPr>
+        <p:spPr>
+          <a:xfrm>
+            <a:off x="502920" y="640080"/>
+            <a:ext cx="8138160" cy="530352"/>
           </a:xfrm>
           <a:prstGeom prst="rect">
             <a:avLst/>
@@ -7105,28 +7807,28 @@
           <a:lstStyle/>
           <a:p>
             <a:pPr>
-              <a:defRPr sz="2600" b="1">
+              <a:defRPr sz="2400" b="1">
                 <a:solidFill>
                   <a:srgbClr val="12335B"/>
                 </a:solidFill>
               </a:defRPr>
             </a:pPr>
             <a:r>
-              <a:t>Limitations &amp; Honest Bounds</a:t>
-            </a:r>
-          </a:p>
-        </p:txBody>
-      </p:sp>
-      <p:sp>
-        <p:nvSpPr>
-          <p:cNvPr id="3" name="Rectangle 2"/>
+              <a:t>Synthetic Validation: 8 Scenarios</a:t>
+            </a:r>
+          </a:p>
+        </p:txBody>
+      </p:sp>
+      <p:sp>
+        <p:nvSpPr>
+          <p:cNvPr id="4" name="Rectangle 3"/>
           <p:cNvSpPr/>
           <p:nvPr/>
         </p:nvSpPr>
         <p:spPr>
           <a:xfrm>
-            <a:off x="502920" y="1097280"/>
-            <a:ext cx="2011680" cy="38100"/>
+            <a:off x="502920" y="1170432"/>
+            <a:ext cx="1828800" cy="38100"/>
           </a:xfrm>
           <a:prstGeom prst="rect">
             <a:avLst/>
@@ -7163,14 +7865,14 @@
       </p:sp>
       <p:sp>
         <p:nvSpPr>
-          <p:cNvPr id="4" name="TextBox 3"/>
+          <p:cNvPr id="5" name="TextBox 4"/>
           <p:cNvSpPr txBox="1"/>
           <p:nvPr/>
         </p:nvSpPr>
         <p:spPr>
           <a:xfrm>
-            <a:off x="502920" y="1234440"/>
-            <a:ext cx="8138160" cy="3040380"/>
+            <a:off x="8001000" y="4759452"/>
+            <a:ext cx="640080" cy="274320"/>
           </a:xfrm>
           <a:prstGeom prst="rect">
             <a:avLst/>
@@ -7178,98 +7880,139 @@
           <a:noFill/>
         </p:spPr>
         <p:txBody>
-          <a:bodyPr wrap="square">
+          <a:bodyPr wrap="none">
+            <a:spAutoFit/>
+          </a:bodyPr>
+          <a:lstStyle/>
+          <a:p>
+            <a:pPr algn="r">
+              <a:defRPr sz="900">
+                <a:solidFill>
+                  <a:srgbClr val="8A8A8A"/>
+                </a:solidFill>
+              </a:defRPr>
+            </a:pPr>
+            <a:r>
+              <a:t>17</a:t>
+            </a:r>
+          </a:p>
+        </p:txBody>
+      </p:sp>
+      <p:pic>
+        <p:nvPicPr>
+          <p:cNvPr id="6" name="Picture 5" descr="synth_summary.png"/>
+          <p:cNvPicPr>
+            <a:picLocks noChangeAspect="1"/>
+          </p:cNvPicPr>
+          <p:nvPr/>
+        </p:nvPicPr>
+        <p:blipFill>
+          <a:blip r:embed="rId2"/>
+          <a:stretch>
+            <a:fillRect/>
+          </a:stretch>
+        </p:blipFill>
+        <p:spPr>
+          <a:xfrm>
+            <a:off x="502920" y="2272538"/>
+            <a:ext cx="3931920" cy="1092200"/>
+          </a:xfrm>
+          <a:prstGeom prst="rect">
+            <a:avLst/>
+          </a:prstGeom>
+        </p:spPr>
+      </p:pic>
+      <p:sp>
+        <p:nvSpPr>
+          <p:cNvPr id="7" name="TextBox 6"/>
+          <p:cNvSpPr txBox="1"/>
+          <p:nvPr/>
+        </p:nvSpPr>
+        <p:spPr>
+          <a:xfrm>
+            <a:off x="4709160" y="1335024"/>
+            <a:ext cx="3931920" cy="2967228"/>
+          </a:xfrm>
+          <a:prstGeom prst="rect">
+            <a:avLst/>
+          </a:prstGeom>
+          <a:noFill/>
+        </p:spPr>
+        <p:txBody>
+          <a:bodyPr wrap="square" anchor="ctr">
             <a:normAutofit/>
           </a:bodyPr>
           <a:lstStyle/>
           <a:p>
             <a:pPr>
               <a:lnSpc>
-                <a:spcPct val="105000"/>
+                <a:spcPct val="104000"/>
               </a:lnSpc>
               <a:spcAft>
-                <a:spcPts val="700"/>
-              </a:spcAft>
-              <a:defRPr sz="1700">
-                <a:solidFill>
-                  <a:srgbClr val="202020"/>
-                </a:solidFill>
-              </a:defRPr>
-            </a:pPr>
-            <a:r>
-              <a:t>•  A single phone cannot triangulate depth like six to eight synchronised Hawk-Eye cameras.</a:t>
+                <a:spcPts val="800"/>
+              </a:spcAft>
+              <a:defRPr sz="1500">
+                <a:solidFill>
+                  <a:srgbClr val="222222"/>
+                </a:solidFill>
+              </a:defRPr>
+            </a:pPr>
+            <a:r>
+              <a:t>• 8 controlled deliveries: medium pace, middle-stump corridor, full length.</a:t>
             </a:r>
           </a:p>
           <a:p>
             <a:pPr>
               <a:lnSpc>
-                <a:spcPct val="105000"/>
+                <a:spcPct val="104000"/>
               </a:lnSpc>
               <a:spcAft>
-                <a:spcPts val="700"/>
-              </a:spcAft>
-              <a:defRPr sz="1700">
-                <a:solidFill>
-                  <a:srgbClr val="202020"/>
-                </a:solidFill>
-              </a:defRPr>
-            </a:pPr>
-            <a:r>
-              <a:t>•  Depth-from-ball-radius is good to a few tens of centimetres, not millimetres.</a:t>
+                <a:spcPts val="800"/>
+              </a:spcAft>
+              <a:defRPr sz="1500">
+                <a:solidFill>
+                  <a:srgbClr val="222222"/>
+                </a:solidFill>
+              </a:defRPr>
+            </a:pPr>
+            <a:r>
+              <a:t>• Camera pose recovered correctly in every scene.</a:t>
             </a:r>
           </a:p>
           <a:p>
             <a:pPr>
               <a:lnSpc>
-                <a:spcPct val="105000"/>
+                <a:spcPct val="104000"/>
               </a:lnSpc>
               <a:spcAft>
-                <a:spcPts val="700"/>
-              </a:spcAft>
-              <a:defRPr sz="1700">
-                <a:solidFill>
-                  <a:srgbClr val="202020"/>
-                </a:solidFill>
-              </a:defRPr>
-            </a:pPr>
-            <a:r>
-              <a:t>•  The synthetic 8/8 passes are within monocular bounds (speed +/-55 km/h, bounce +/-175 cm, impact +/-110 cm), not broadcast bounds.</a:t>
+                <a:spcPts val="800"/>
+              </a:spcAft>
+              <a:defRPr sz="1500">
+                <a:solidFill>
+                  <a:srgbClr val="222222"/>
+                </a:solidFill>
+              </a:defRPr>
+            </a:pPr>
+            <a:r>
+              <a:t>• 8 / 8 reconstructions within honest monocular bounds (speed, bounce, impact).</a:t>
             </a:r>
           </a:p>
           <a:p>
             <a:pPr>
               <a:lnSpc>
-                <a:spcPct val="105000"/>
+                <a:spcPct val="104000"/>
               </a:lnSpc>
               <a:spcAft>
-                <a:spcPts val="700"/>
-              </a:spcAft>
-              <a:defRPr sz="1700">
-                <a:solidFill>
-                  <a:srgbClr val="202020"/>
-                </a:solidFill>
-              </a:defRPr>
-            </a:pPr>
-            <a:r>
-              <a:t>•  On test3 the calibration reprojection was 16.56 px (high) — the verdict shape is right, the absolute scale approximate.</a:t>
-            </a:r>
-          </a:p>
-          <a:p>
-            <a:pPr>
-              <a:lnSpc>
-                <a:spcPct val="105000"/>
-              </a:lnSpc>
-              <a:spcAft>
-                <a:spcPts val="700"/>
-              </a:spcAft>
-              <a:defRPr sz="1700">
-                <a:solidFill>
-                  <a:srgbClr val="202020"/>
-                </a:solidFill>
-              </a:defRPr>
-            </a:pPr>
-            <a:r>
-              <a:t>•  Positioned as decision support for coaching nets and clubs, not an ICC broadcast replacement.</a:t>
+                <a:spcPts val="800"/>
+              </a:spcAft>
+              <a:defRPr sz="1500">
+                <a:solidFill>
+                  <a:srgbClr val="222222"/>
+                </a:solidFill>
+              </a:defRPr>
+            </a:pPr>
+            <a:r>
+              <a:t>• All eight ground-truth OUT deliveries returned OUT.</a:t>
             </a:r>
           </a:p>
         </p:txBody>
@@ -7308,8 +8051,43 @@
         </p:nvSpPr>
         <p:spPr>
           <a:xfrm>
-            <a:off x="502920" y="320040"/>
-            <a:ext cx="8138160" cy="777240"/>
+            <a:off x="502920" y="438912"/>
+            <a:ext cx="8138160" cy="201168"/>
+          </a:xfrm>
+          <a:prstGeom prst="rect">
+            <a:avLst/>
+          </a:prstGeom>
+          <a:noFill/>
+        </p:spPr>
+        <p:txBody>
+          <a:bodyPr wrap="none">
+            <a:noAutofit/>
+          </a:bodyPr>
+          <a:lstStyle/>
+          <a:p>
+            <a:pPr>
+              <a:defRPr sz="1100" b="1">
+                <a:solidFill>
+                  <a:srgbClr val="2E6FB5"/>
+                </a:solidFill>
+              </a:defRPr>
+            </a:pPr>
+            <a:r>
+              <a:t>LIMITATIONS</a:t>
+            </a:r>
+          </a:p>
+        </p:txBody>
+      </p:sp>
+      <p:sp>
+        <p:nvSpPr>
+          <p:cNvPr id="3" name="TextBox 2"/>
+          <p:cNvSpPr txBox="1"/>
+          <p:nvPr/>
+        </p:nvSpPr>
+        <p:spPr>
+          <a:xfrm>
+            <a:off x="502920" y="640080"/>
+            <a:ext cx="8138160" cy="530352"/>
           </a:xfrm>
           <a:prstGeom prst="rect">
             <a:avLst/>
@@ -7323,28 +8101,28 @@
           <a:lstStyle/>
           <a:p>
             <a:pPr>
-              <a:defRPr sz="2600" b="1">
+              <a:defRPr sz="2400" b="1">
                 <a:solidFill>
                   <a:srgbClr val="12335B"/>
                 </a:solidFill>
               </a:defRPr>
             </a:pPr>
             <a:r>
-              <a:t>Conclusion</a:t>
-            </a:r>
-          </a:p>
-        </p:txBody>
-      </p:sp>
-      <p:sp>
-        <p:nvSpPr>
-          <p:cNvPr id="3" name="Rectangle 2"/>
+              <a:t>Limitations &amp; Honest Bounds</a:t>
+            </a:r>
+          </a:p>
+        </p:txBody>
+      </p:sp>
+      <p:sp>
+        <p:nvSpPr>
+          <p:cNvPr id="4" name="Rectangle 3"/>
           <p:cNvSpPr/>
           <p:nvPr/>
         </p:nvSpPr>
         <p:spPr>
           <a:xfrm>
-            <a:off x="502920" y="1097280"/>
-            <a:ext cx="2011680" cy="38100"/>
+            <a:off x="502920" y="1170432"/>
+            <a:ext cx="1828800" cy="38100"/>
           </a:xfrm>
           <a:prstGeom prst="rect">
             <a:avLst/>
@@ -7381,14 +8159,87 @@
       </p:sp>
       <p:sp>
         <p:nvSpPr>
-          <p:cNvPr id="4" name="TextBox 3"/>
+          <p:cNvPr id="5" name="TextBox 4"/>
           <p:cNvSpPr txBox="1"/>
           <p:nvPr/>
         </p:nvSpPr>
         <p:spPr>
           <a:xfrm>
-            <a:off x="502920" y="1234440"/>
-            <a:ext cx="8138160" cy="3040380"/>
+            <a:off x="8001000" y="4759452"/>
+            <a:ext cx="640080" cy="274320"/>
+          </a:xfrm>
+          <a:prstGeom prst="rect">
+            <a:avLst/>
+          </a:prstGeom>
+          <a:noFill/>
+        </p:spPr>
+        <p:txBody>
+          <a:bodyPr wrap="none">
+            <a:spAutoFit/>
+          </a:bodyPr>
+          <a:lstStyle/>
+          <a:p>
+            <a:pPr algn="r">
+              <a:defRPr sz="900">
+                <a:solidFill>
+                  <a:srgbClr val="8A8A8A"/>
+                </a:solidFill>
+              </a:defRPr>
+            </a:pPr>
+            <a:r>
+              <a:t>18</a:t>
+            </a:r>
+          </a:p>
+        </p:txBody>
+      </p:sp>
+      <p:sp>
+        <p:nvSpPr>
+          <p:cNvPr id="6" name="TextBox 5"/>
+          <p:cNvSpPr txBox="1"/>
+          <p:nvPr/>
+        </p:nvSpPr>
+        <p:spPr>
+          <a:xfrm>
+            <a:off x="502920" y="1335024"/>
+            <a:ext cx="8138160" cy="502920"/>
+          </a:xfrm>
+          <a:prstGeom prst="rect">
+            <a:avLst/>
+          </a:prstGeom>
+          <a:noFill/>
+        </p:spPr>
+        <p:txBody>
+          <a:bodyPr wrap="square">
+            <a:noAutofit/>
+          </a:bodyPr>
+          <a:lstStyle/>
+          <a:p>
+            <a:pPr>
+              <a:lnSpc>
+                <a:spcPct val="102000"/>
+              </a:lnSpc>
+              <a:defRPr sz="1700" b="1">
+                <a:solidFill>
+                  <a:srgbClr val="12335B"/>
+                </a:solidFill>
+              </a:defRPr>
+            </a:pPr>
+            <a:r>
+              <a:t>Honest about what a single camera can and cannot do.</a:t>
+            </a:r>
+          </a:p>
+        </p:txBody>
+      </p:sp>
+      <p:sp>
+        <p:nvSpPr>
+          <p:cNvPr id="7" name="TextBox 6"/>
+          <p:cNvSpPr txBox="1"/>
+          <p:nvPr/>
+        </p:nvSpPr>
+        <p:spPr>
+          <a:xfrm>
+            <a:off x="502920" y="1847088"/>
+            <a:ext cx="8138160" cy="2455164"/>
           </a:xfrm>
           <a:prstGeom prst="rect">
             <a:avLst/>
@@ -7403,73 +8254,399 @@
           <a:p>
             <a:pPr>
               <a:lnSpc>
-                <a:spcPct val="105000"/>
+                <a:spcPct val="104000"/>
               </a:lnSpc>
               <a:spcAft>
-                <a:spcPts val="700"/>
-              </a:spcAft>
-              <a:defRPr sz="1700">
-                <a:solidFill>
-                  <a:srgbClr val="202020"/>
-                </a:solidFill>
-              </a:defRPr>
-            </a:pPr>
-            <a:r>
-              <a:t>•  PocketDRS reconstructs a cricket delivery in real-world 3D from a single phone camera and supports the LBW decision.</a:t>
+                <a:spcPts val="600"/>
+              </a:spcAft>
+              <a:defRPr sz="1400">
+                <a:solidFill>
+                  <a:srgbClr val="222222"/>
+                </a:solidFill>
+              </a:defRPr>
+            </a:pPr>
+            <a:r>
+              <a:t>• A single phone cannot triangulate depth like six to eight synchronised Hawk-Eye cameras.</a:t>
             </a:r>
           </a:p>
           <a:p>
             <a:pPr>
               <a:lnSpc>
-                <a:spcPct val="105000"/>
+                <a:spcPct val="104000"/>
               </a:lnSpc>
               <a:spcAft>
-                <a:spcPts val="700"/>
-              </a:spcAft>
-              <a:defRPr sz="1700">
-                <a:solidFill>
-                  <a:srgbClr val="202020"/>
-                </a:solidFill>
-              </a:defRPr>
-            </a:pPr>
-            <a:r>
-              <a:t>•  A complete pipeline: calibrate → detect → track → reconstruct → decide, with a broadcast overlay and a 3D Hawk-Eye view.</a:t>
+                <a:spcPts val="600"/>
+              </a:spcAft>
+              <a:defRPr sz="1400">
+                <a:solidFill>
+                  <a:srgbClr val="222222"/>
+                </a:solidFill>
+              </a:defRPr>
+            </a:pPr>
+            <a:r>
+              <a:t>• Depth-from-ball-radius is good to a few tens of centimetres, not millimetres.</a:t>
             </a:r>
           </a:p>
           <a:p>
             <a:pPr>
               <a:lnSpc>
-                <a:spcPct val="105000"/>
+                <a:spcPct val="104000"/>
               </a:lnSpc>
               <a:spcAft>
-                <a:spcPts val="700"/>
-              </a:spcAft>
-              <a:defRPr sz="1700">
-                <a:solidFill>
-                  <a:srgbClr val="202020"/>
-                </a:solidFill>
-              </a:defRPr>
-            </a:pPr>
-            <a:r>
-              <a:t>•  Validated on synthetic deliveries (8/8 correct) and real footage, with correct camera recovery throughout.</a:t>
+                <a:spcPts val="600"/>
+              </a:spcAft>
+              <a:defRPr sz="1400">
+                <a:solidFill>
+                  <a:srgbClr val="222222"/>
+                </a:solidFill>
+              </a:defRPr>
+            </a:pPr>
+            <a:r>
+              <a:t>• The synthetic 8/8 passes are within monocular bounds (speed ±55 km/h, bounce ±175 cm, impact ±110 cm), not broadcast bounds.</a:t>
             </a:r>
           </a:p>
           <a:p>
             <a:pPr>
               <a:lnSpc>
-                <a:spcPct val="105000"/>
+                <a:spcPct val="104000"/>
               </a:lnSpc>
               <a:spcAft>
-                <a:spcPts val="700"/>
-              </a:spcAft>
-              <a:defRPr sz="1700">
-                <a:solidFill>
-                  <a:srgbClr val="202020"/>
-                </a:solidFill>
-              </a:defRPr>
-            </a:pPr>
-            <a:r>
-              <a:t>•  Future work: frame-accurate impact detection, learned bounce modelling, multi-phone capture, and on-device inference.</a:t>
+                <a:spcPts val="600"/>
+              </a:spcAft>
+              <a:defRPr sz="1400">
+                <a:solidFill>
+                  <a:srgbClr val="222222"/>
+                </a:solidFill>
+              </a:defRPr>
+            </a:pPr>
+            <a:r>
+              <a:t>• On test3 the calibration reprojection was 16.56 px (high) — the verdict shape is right, the absolute scale approximate.</a:t>
+            </a:r>
+          </a:p>
+          <a:p>
+            <a:pPr>
+              <a:lnSpc>
+                <a:spcPct val="104000"/>
+              </a:lnSpc>
+              <a:spcAft>
+                <a:spcPts val="600"/>
+              </a:spcAft>
+              <a:defRPr sz="1400">
+                <a:solidFill>
+                  <a:srgbClr val="222222"/>
+                </a:solidFill>
+              </a:defRPr>
+            </a:pPr>
+            <a:r>
+              <a:t>• Positioned as decision support for coaching nets and clubs, not an ICC broadcast replacement.</a:t>
+            </a:r>
+          </a:p>
+        </p:txBody>
+      </p:sp>
+    </p:spTree>
+  </p:cSld>
+  <p:clrMapOvr>
+    <a:masterClrMapping/>
+  </p:clrMapOvr>
+</p:sld>
+</file>
+
+<file path=ppt/slides/slide19.xml><?xml version="1.0" encoding="utf-8"?>
+<p:sld xmlns:a="http://schemas.openxmlformats.org/drawingml/2006/main" xmlns:p="http://schemas.openxmlformats.org/presentationml/2006/main" xmlns:r="http://schemas.openxmlformats.org/officeDocument/2006/relationships">
+  <p:cSld>
+    <p:bg>
+      <p:bgPr>
+        <a:solidFill>
+          <a:srgbClr val="FFFFFF"/>
+        </a:solidFill>
+        <a:effectLst/>
+      </p:bgPr>
+    </p:bg>
+    <p:spTree>
+      <p:nvGrpSpPr>
+        <p:cNvPr id="1" name=""/>
+        <p:cNvGrpSpPr/>
+        <p:nvPr/>
+      </p:nvGrpSpPr>
+      <p:grpSpPr/>
+      <p:sp>
+        <p:nvSpPr>
+          <p:cNvPr id="2" name="TextBox 1"/>
+          <p:cNvSpPr txBox="1"/>
+          <p:nvPr/>
+        </p:nvSpPr>
+        <p:spPr>
+          <a:xfrm>
+            <a:off x="502920" y="438912"/>
+            <a:ext cx="8138160" cy="201168"/>
+          </a:xfrm>
+          <a:prstGeom prst="rect">
+            <a:avLst/>
+          </a:prstGeom>
+          <a:noFill/>
+        </p:spPr>
+        <p:txBody>
+          <a:bodyPr wrap="none">
+            <a:noAutofit/>
+          </a:bodyPr>
+          <a:lstStyle/>
+          <a:p>
+            <a:pPr>
+              <a:defRPr sz="1100" b="1">
+                <a:solidFill>
+                  <a:srgbClr val="2E6FB5"/>
+                </a:solidFill>
+              </a:defRPr>
+            </a:pPr>
+            <a:r>
+              <a:t>CONCLUSION</a:t>
+            </a:r>
+          </a:p>
+        </p:txBody>
+      </p:sp>
+      <p:sp>
+        <p:nvSpPr>
+          <p:cNvPr id="3" name="TextBox 2"/>
+          <p:cNvSpPr txBox="1"/>
+          <p:nvPr/>
+        </p:nvSpPr>
+        <p:spPr>
+          <a:xfrm>
+            <a:off x="502920" y="640080"/>
+            <a:ext cx="8138160" cy="530352"/>
+          </a:xfrm>
+          <a:prstGeom prst="rect">
+            <a:avLst/>
+          </a:prstGeom>
+          <a:noFill/>
+        </p:spPr>
+        <p:txBody>
+          <a:bodyPr wrap="square" anchor="ctr">
+            <a:noAutofit/>
+          </a:bodyPr>
+          <a:lstStyle/>
+          <a:p>
+            <a:pPr>
+              <a:defRPr sz="2400" b="1">
+                <a:solidFill>
+                  <a:srgbClr val="12335B"/>
+                </a:solidFill>
+              </a:defRPr>
+            </a:pPr>
+            <a:r>
+              <a:t>Conclusion</a:t>
+            </a:r>
+          </a:p>
+        </p:txBody>
+      </p:sp>
+      <p:sp>
+        <p:nvSpPr>
+          <p:cNvPr id="4" name="Rectangle 3"/>
+          <p:cNvSpPr/>
+          <p:nvPr/>
+        </p:nvSpPr>
+        <p:spPr>
+          <a:xfrm>
+            <a:off x="502920" y="1170432"/>
+            <a:ext cx="1828800" cy="38100"/>
+          </a:xfrm>
+          <a:prstGeom prst="rect">
+            <a:avLst/>
+          </a:prstGeom>
+          <a:solidFill>
+            <a:srgbClr val="2E6FB5"/>
+          </a:solidFill>
+          <a:ln>
+            <a:noFill/>
+          </a:ln>
+          <a:effectLst/>
+        </p:spPr>
+        <p:style>
+          <a:lnRef idx="1">
+            <a:schemeClr val="accent1"/>
+          </a:lnRef>
+          <a:fillRef idx="3">
+            <a:schemeClr val="accent1"/>
+          </a:fillRef>
+          <a:effectRef idx="2">
+            <a:schemeClr val="accent1"/>
+          </a:effectRef>
+          <a:fontRef idx="minor">
+            <a:schemeClr val="lt1"/>
+          </a:fontRef>
+        </p:style>
+        <p:txBody>
+          <a:bodyPr rtlCol="0" anchor="ctr"/>
+          <a:lstStyle/>
+          <a:p>
+            <a:pPr algn="ctr"/>
+          </a:p>
+        </p:txBody>
+      </p:sp>
+      <p:sp>
+        <p:nvSpPr>
+          <p:cNvPr id="5" name="TextBox 4"/>
+          <p:cNvSpPr txBox="1"/>
+          <p:nvPr/>
+        </p:nvSpPr>
+        <p:spPr>
+          <a:xfrm>
+            <a:off x="8001000" y="4759452"/>
+            <a:ext cx="640080" cy="274320"/>
+          </a:xfrm>
+          <a:prstGeom prst="rect">
+            <a:avLst/>
+          </a:prstGeom>
+          <a:noFill/>
+        </p:spPr>
+        <p:txBody>
+          <a:bodyPr wrap="none">
+            <a:spAutoFit/>
+          </a:bodyPr>
+          <a:lstStyle/>
+          <a:p>
+            <a:pPr algn="r">
+              <a:defRPr sz="900">
+                <a:solidFill>
+                  <a:srgbClr val="8A8A8A"/>
+                </a:solidFill>
+              </a:defRPr>
+            </a:pPr>
+            <a:r>
+              <a:t>19</a:t>
+            </a:r>
+          </a:p>
+        </p:txBody>
+      </p:sp>
+      <p:sp>
+        <p:nvSpPr>
+          <p:cNvPr id="6" name="TextBox 5"/>
+          <p:cNvSpPr txBox="1"/>
+          <p:nvPr/>
+        </p:nvSpPr>
+        <p:spPr>
+          <a:xfrm>
+            <a:off x="502920" y="1335024"/>
+            <a:ext cx="8138160" cy="502920"/>
+          </a:xfrm>
+          <a:prstGeom prst="rect">
+            <a:avLst/>
+          </a:prstGeom>
+          <a:noFill/>
+        </p:spPr>
+        <p:txBody>
+          <a:bodyPr wrap="square">
+            <a:noAutofit/>
+          </a:bodyPr>
+          <a:lstStyle/>
+          <a:p>
+            <a:pPr>
+              <a:lnSpc>
+                <a:spcPct val="102000"/>
+              </a:lnSpc>
+              <a:defRPr sz="1700" b="1">
+                <a:solidFill>
+                  <a:srgbClr val="12335B"/>
+                </a:solidFill>
+              </a:defRPr>
+            </a:pPr>
+            <a:r>
+              <a:t>One phone, a known pitch, and projectile physics are enough for usable LBW support.</a:t>
+            </a:r>
+          </a:p>
+        </p:txBody>
+      </p:sp>
+      <p:sp>
+        <p:nvSpPr>
+          <p:cNvPr id="7" name="TextBox 6"/>
+          <p:cNvSpPr txBox="1"/>
+          <p:nvPr/>
+        </p:nvSpPr>
+        <p:spPr>
+          <a:xfrm>
+            <a:off x="502920" y="1847088"/>
+            <a:ext cx="8138160" cy="2455164"/>
+          </a:xfrm>
+          <a:prstGeom prst="rect">
+            <a:avLst/>
+          </a:prstGeom>
+          <a:noFill/>
+        </p:spPr>
+        <p:txBody>
+          <a:bodyPr wrap="square">
+            <a:normAutofit/>
+          </a:bodyPr>
+          <a:lstStyle/>
+          <a:p>
+            <a:pPr>
+              <a:lnSpc>
+                <a:spcPct val="104000"/>
+              </a:lnSpc>
+              <a:spcAft>
+                <a:spcPts val="600"/>
+              </a:spcAft>
+              <a:defRPr sz="1400">
+                <a:solidFill>
+                  <a:srgbClr val="222222"/>
+                </a:solidFill>
+              </a:defRPr>
+            </a:pPr>
+            <a:r>
+              <a:t>• A complete pipeline: calibrate → detect → track → reconstruct → decide, with a broadcast overlay and a 3D Hawk-Eye view.</a:t>
+            </a:r>
+          </a:p>
+          <a:p>
+            <a:pPr>
+              <a:lnSpc>
+                <a:spcPct val="104000"/>
+              </a:lnSpc>
+              <a:spcAft>
+                <a:spcPts val="600"/>
+              </a:spcAft>
+              <a:defRPr sz="1400">
+                <a:solidFill>
+                  <a:srgbClr val="222222"/>
+                </a:solidFill>
+              </a:defRPr>
+            </a:pPr>
+            <a:r>
+              <a:t>• Validated on synthetic deliveries (8/8 within bounds) and real footage, with correct camera recovery throughout.</a:t>
+            </a:r>
+          </a:p>
+          <a:p>
+            <a:pPr>
+              <a:lnSpc>
+                <a:spcPct val="104000"/>
+              </a:lnSpc>
+              <a:spcAft>
+                <a:spcPts val="600"/>
+              </a:spcAft>
+              <a:defRPr sz="1400">
+                <a:solidFill>
+                  <a:srgbClr val="222222"/>
+                </a:solidFill>
+              </a:defRPr>
+            </a:pPr>
+            <a:r>
+              <a:t>• Refuses to invent a verdict on unusable clips — it fails clearly rather than guessing.</a:t>
+            </a:r>
+          </a:p>
+          <a:p>
+            <a:pPr>
+              <a:lnSpc>
+                <a:spcPct val="104000"/>
+              </a:lnSpc>
+              <a:spcAft>
+                <a:spcPts val="600"/>
+              </a:spcAft>
+              <a:defRPr sz="1400">
+                <a:solidFill>
+                  <a:srgbClr val="222222"/>
+                </a:solidFill>
+              </a:defRPr>
+            </a:pPr>
+            <a:r>
+              <a:t>• Future work: frame-accurate impact detection, learned bounce modelling, multi-phone capture, and on-device inference.</a:t>
             </a:r>
           </a:p>
         </p:txBody>
@@ -7508,8 +8685,8 @@
         </p:nvSpPr>
         <p:spPr>
           <a:xfrm>
-            <a:off x="502920" y="320040"/>
-            <a:ext cx="8138160" cy="777240"/>
+            <a:off x="502920" y="640080"/>
+            <a:ext cx="8138160" cy="530352"/>
           </a:xfrm>
           <a:prstGeom prst="rect">
             <a:avLst/>
@@ -7523,14 +8700,14 @@
           <a:lstStyle/>
           <a:p>
             <a:pPr>
-              <a:defRPr sz="2600" b="1">
+              <a:defRPr sz="2400" b="1">
                 <a:solidFill>
                   <a:srgbClr val="12335B"/>
                 </a:solidFill>
               </a:defRPr>
             </a:pPr>
             <a:r>
-              <a:t>Introduction</a:t>
+              <a:t>Agenda</a:t>
             </a:r>
           </a:p>
         </p:txBody>
@@ -7543,8 +8720,8 @@
         </p:nvSpPr>
         <p:spPr>
           <a:xfrm>
-            <a:off x="502920" y="1097280"/>
-            <a:ext cx="2011680" cy="38100"/>
+            <a:off x="502920" y="1170432"/>
+            <a:ext cx="1828800" cy="38100"/>
           </a:xfrm>
           <a:prstGeom prst="rect">
             <a:avLst/>
@@ -7587,8 +8764,8 @@
         </p:nvSpPr>
         <p:spPr>
           <a:xfrm>
-            <a:off x="502920" y="1234440"/>
-            <a:ext cx="8138160" cy="3040380"/>
+            <a:off x="8001000" y="4759452"/>
+            <a:ext cx="640080" cy="274320"/>
           </a:xfrm>
           <a:prstGeom prst="rect">
             <a:avLst/>
@@ -7596,8 +8773,43 @@
           <a:noFill/>
         </p:spPr>
         <p:txBody>
-          <a:bodyPr wrap="square">
-            <a:normAutofit/>
+          <a:bodyPr wrap="none">
+            <a:spAutoFit/>
+          </a:bodyPr>
+          <a:lstStyle/>
+          <a:p>
+            <a:pPr algn="r">
+              <a:defRPr sz="900">
+                <a:solidFill>
+                  <a:srgbClr val="8A8A8A"/>
+                </a:solidFill>
+              </a:defRPr>
+            </a:pPr>
+            <a:r>
+              <a:t>2</a:t>
+            </a:r>
+          </a:p>
+        </p:txBody>
+      </p:sp>
+      <p:sp>
+        <p:nvSpPr>
+          <p:cNvPr id="5" name="TextBox 4"/>
+          <p:cNvSpPr txBox="1"/>
+          <p:nvPr/>
+        </p:nvSpPr>
+        <p:spPr>
+          <a:xfrm>
+            <a:off x="502920" y="1335024"/>
+            <a:ext cx="8138160" cy="2967228"/>
+          </a:xfrm>
+          <a:prstGeom prst="rect">
+            <a:avLst/>
+          </a:prstGeom>
+          <a:noFill/>
+        </p:spPr>
+        <p:txBody>
+          <a:bodyPr wrap="square" anchor="ctr">
+            <a:spAutoFit/>
           </a:bodyPr>
           <a:lstStyle/>
           <a:p>
@@ -7606,16 +8818,24 @@
                 <a:spcPct val="105000"/>
               </a:lnSpc>
               <a:spcAft>
-                <a:spcPts val="700"/>
-              </a:spcAft>
-              <a:defRPr sz="1700">
-                <a:solidFill>
-                  <a:srgbClr val="202020"/>
-                </a:solidFill>
-              </a:defRPr>
-            </a:pPr>
-            <a:r>
-              <a:t>•  Leg Before Wicket (LBW) is one of cricket's most contested decisions, judged live from a single viewpoint.</a:t>
+                <a:spcPts val="900"/>
+              </a:spcAft>
+            </a:pPr>
+            <a:r>
+              <a:rPr sz="1700" b="1">
+                <a:solidFill>
+                  <a:srgbClr val="2E6FB5"/>
+                </a:solidFill>
+              </a:rPr>
+              <a:t>1.  </a:t>
+            </a:r>
+            <a:r>
+              <a:rPr sz="1700">
+                <a:solidFill>
+                  <a:srgbClr val="222222"/>
+                </a:solidFill>
+              </a:rPr>
+              <a:t>Introduction &amp; Problem</a:t>
             </a:r>
           </a:p>
           <a:p>
@@ -7624,34 +8844,24 @@
                 <a:spcPct val="105000"/>
               </a:lnSpc>
               <a:spcAft>
-                <a:spcPts val="700"/>
-              </a:spcAft>
-              <a:defRPr sz="1700">
-                <a:solidFill>
-                  <a:srgbClr val="202020"/>
-                </a:solidFill>
-              </a:defRPr>
-            </a:pPr>
-            <a:r>
-              <a:t>•  Professional Decision Review Systems (Hawk-Eye) settle it with six to eight synchronised high-speed cameras and dedicated hardware.</a:t>
-            </a:r>
-          </a:p>
-          <a:p>
-            <a:pPr lvl="1">
-              <a:lnSpc>
-                <a:spcPct val="105000"/>
-              </a:lnSpc>
-              <a:spcAft>
-                <a:spcPts val="300"/>
-              </a:spcAft>
-              <a:defRPr sz="1400">
-                <a:solidFill>
-                  <a:srgbClr val="202020"/>
-                </a:solidFill>
-              </a:defRPr>
-            </a:pPr>
-            <a:r>
-              <a:t>◦  That rig costs a fortune, so schools, clubs, and training grounds have no access to ball tracking.</a:t>
+                <a:spcPts val="900"/>
+              </a:spcAft>
+            </a:pPr>
+            <a:r>
+              <a:rPr sz="1700" b="1">
+                <a:solidFill>
+                  <a:srgbClr val="2E6FB5"/>
+                </a:solidFill>
+              </a:rPr>
+              <a:t>2.  </a:t>
+            </a:r>
+            <a:r>
+              <a:rPr sz="1700">
+                <a:solidFill>
+                  <a:srgbClr val="222222"/>
+                </a:solidFill>
+              </a:rPr>
+              <a:t>Objectives &amp; Requirements</a:t>
             </a:r>
           </a:p>
           <a:p>
@@ -7660,16 +8870,24 @@
                 <a:spcPct val="105000"/>
               </a:lnSpc>
               <a:spcAft>
-                <a:spcPts val="700"/>
-              </a:spcAft>
-              <a:defRPr sz="1700">
-                <a:solidFill>
-                  <a:srgbClr val="202020"/>
-                </a:solidFill>
-              </a:defRPr>
-            </a:pPr>
-            <a:r>
-              <a:t>•  PocketDRS reconstructs a delivery in real-world 3D from a single smartphone camera and supports the LBW decision.</a:t>
+                <a:spcPts val="900"/>
+              </a:spcAft>
+            </a:pPr>
+            <a:r>
+              <a:rPr sz="1700" b="1">
+                <a:solidFill>
+                  <a:srgbClr val="2E6FB5"/>
+                </a:solidFill>
+              </a:rPr>
+              <a:t>3.  </a:t>
+            </a:r>
+            <a:r>
+              <a:rPr sz="1700">
+                <a:solidFill>
+                  <a:srgbClr val="222222"/>
+                </a:solidFill>
+              </a:rPr>
+              <a:t>System Analysis &amp; Design</a:t>
             </a:r>
           </a:p>
           <a:p>
@@ -7678,16 +8896,275 @@
                 <a:spcPct val="105000"/>
               </a:lnSpc>
               <a:spcAft>
-                <a:spcPts val="700"/>
-              </a:spcAft>
-              <a:defRPr sz="1700">
-                <a:solidFill>
-                  <a:srgbClr val="202020"/>
-                </a:solidFill>
-              </a:defRPr>
-            </a:pPr>
-            <a:r>
-              <a:t>•  A Flutter app records the ball; a FastAPI + OpenCV server tracks it, rebuilds the 3D path, and applies ICC Rule 36.</a:t>
+                <a:spcPts val="900"/>
+              </a:spcAft>
+            </a:pPr>
+            <a:r>
+              <a:rPr sz="1700" b="1">
+                <a:solidFill>
+                  <a:srgbClr val="2E6FB5"/>
+                </a:solidFill>
+              </a:rPr>
+              <a:t>4.  </a:t>
+            </a:r>
+            <a:r>
+              <a:rPr sz="1700">
+                <a:solidFill>
+                  <a:srgbClr val="222222"/>
+                </a:solidFill>
+              </a:rPr>
+              <a:t>The Five-Stage Algorithm</a:t>
+            </a:r>
+          </a:p>
+          <a:p>
+            <a:pPr>
+              <a:lnSpc>
+                <a:spcPct val="105000"/>
+              </a:lnSpc>
+              <a:spcAft>
+                <a:spcPts val="900"/>
+              </a:spcAft>
+            </a:pPr>
+            <a:r>
+              <a:rPr sz="1700" b="1">
+                <a:solidFill>
+                  <a:srgbClr val="2E6FB5"/>
+                </a:solidFill>
+              </a:rPr>
+              <a:t>5.  </a:t>
+            </a:r>
+            <a:r>
+              <a:rPr sz="1700">
+                <a:solidFill>
+                  <a:srgbClr val="222222"/>
+                </a:solidFill>
+              </a:rPr>
+              <a:t>Implementation &amp; Tools</a:t>
+            </a:r>
+          </a:p>
+          <a:p>
+            <a:pPr>
+              <a:lnSpc>
+                <a:spcPct val="105000"/>
+              </a:lnSpc>
+              <a:spcAft>
+                <a:spcPts val="900"/>
+              </a:spcAft>
+            </a:pPr>
+            <a:r>
+              <a:rPr sz="1700" b="1">
+                <a:solidFill>
+                  <a:srgbClr val="2E6FB5"/>
+                </a:solidFill>
+              </a:rPr>
+              <a:t>6.  </a:t>
+            </a:r>
+            <a:r>
+              <a:rPr sz="1700">
+                <a:solidFill>
+                  <a:srgbClr val="222222"/>
+                </a:solidFill>
+              </a:rPr>
+              <a:t>Results &amp; Validation</a:t>
+            </a:r>
+          </a:p>
+          <a:p>
+            <a:pPr>
+              <a:lnSpc>
+                <a:spcPct val="105000"/>
+              </a:lnSpc>
+              <a:spcAft>
+                <a:spcPts val="900"/>
+              </a:spcAft>
+            </a:pPr>
+            <a:r>
+              <a:rPr sz="1700" b="1">
+                <a:solidFill>
+                  <a:srgbClr val="2E6FB5"/>
+                </a:solidFill>
+              </a:rPr>
+              <a:t>7.  </a:t>
+            </a:r>
+            <a:r>
+              <a:rPr sz="1700">
+                <a:solidFill>
+                  <a:srgbClr val="222222"/>
+                </a:solidFill>
+              </a:rPr>
+              <a:t>Limitations &amp; Conclusion</a:t>
+            </a:r>
+          </a:p>
+        </p:txBody>
+      </p:sp>
+    </p:spTree>
+  </p:cSld>
+  <p:clrMapOvr>
+    <a:masterClrMapping/>
+  </p:clrMapOvr>
+</p:sld>
+</file>
+
+<file path=ppt/slides/slide20.xml><?xml version="1.0" encoding="utf-8"?>
+<p:sld xmlns:a="http://schemas.openxmlformats.org/drawingml/2006/main" xmlns:p="http://schemas.openxmlformats.org/presentationml/2006/main" xmlns:r="http://schemas.openxmlformats.org/officeDocument/2006/relationships">
+  <p:cSld>
+    <p:bg>
+      <p:bgPr>
+        <a:solidFill>
+          <a:srgbClr val="FFFFFF"/>
+        </a:solidFill>
+        <a:effectLst/>
+      </p:bgPr>
+    </p:bg>
+    <p:spTree>
+      <p:nvGrpSpPr>
+        <p:cNvPr id="1" name=""/>
+        <p:cNvGrpSpPr/>
+        <p:nvPr/>
+      </p:nvGrpSpPr>
+      <p:grpSpPr/>
+      <p:sp>
+        <p:nvSpPr>
+          <p:cNvPr id="2" name="TextBox 1"/>
+          <p:cNvSpPr txBox="1"/>
+          <p:nvPr/>
+        </p:nvSpPr>
+        <p:spPr>
+          <a:xfrm>
+            <a:off x="8001000" y="4759452"/>
+            <a:ext cx="640080" cy="274320"/>
+          </a:xfrm>
+          <a:prstGeom prst="rect">
+            <a:avLst/>
+          </a:prstGeom>
+          <a:noFill/>
+        </p:spPr>
+        <p:txBody>
+          <a:bodyPr wrap="none">
+            <a:spAutoFit/>
+          </a:bodyPr>
+          <a:lstStyle/>
+          <a:p>
+            <a:pPr algn="r">
+              <a:defRPr sz="900">
+                <a:solidFill>
+                  <a:srgbClr val="8A8A8A"/>
+                </a:solidFill>
+              </a:defRPr>
+            </a:pPr>
+            <a:r>
+              <a:t>20</a:t>
+            </a:r>
+          </a:p>
+        </p:txBody>
+      </p:sp>
+      <p:sp>
+        <p:nvSpPr>
+          <p:cNvPr id="3" name="Rectangle 2"/>
+          <p:cNvSpPr/>
+          <p:nvPr/>
+        </p:nvSpPr>
+        <p:spPr>
+          <a:xfrm>
+            <a:off x="502920" y="1874519"/>
+            <a:ext cx="2194560" cy="50800"/>
+          </a:xfrm>
+          <a:prstGeom prst="rect">
+            <a:avLst/>
+          </a:prstGeom>
+          <a:solidFill>
+            <a:srgbClr val="2E6FB5"/>
+          </a:solidFill>
+          <a:ln>
+            <a:noFill/>
+          </a:ln>
+          <a:effectLst/>
+        </p:spPr>
+        <p:style>
+          <a:lnRef idx="1">
+            <a:schemeClr val="accent1"/>
+          </a:lnRef>
+          <a:fillRef idx="3">
+            <a:schemeClr val="accent1"/>
+          </a:fillRef>
+          <a:effectRef idx="2">
+            <a:schemeClr val="accent1"/>
+          </a:effectRef>
+          <a:fontRef idx="minor">
+            <a:schemeClr val="lt1"/>
+          </a:fontRef>
+        </p:style>
+        <p:txBody>
+          <a:bodyPr rtlCol="0" anchor="ctr"/>
+          <a:lstStyle/>
+          <a:p>
+            <a:pPr algn="ctr"/>
+          </a:p>
+        </p:txBody>
+      </p:sp>
+      <p:sp>
+        <p:nvSpPr>
+          <p:cNvPr id="4" name="TextBox 3"/>
+          <p:cNvSpPr txBox="1"/>
+          <p:nvPr/>
+        </p:nvSpPr>
+        <p:spPr>
+          <a:xfrm>
+            <a:off x="502920" y="2011680"/>
+            <a:ext cx="8138160" cy="2194560"/>
+          </a:xfrm>
+          <a:prstGeom prst="rect">
+            <a:avLst/>
+          </a:prstGeom>
+          <a:noFill/>
+        </p:spPr>
+        <p:txBody>
+          <a:bodyPr wrap="square">
+            <a:spAutoFit/>
+          </a:bodyPr>
+          <a:lstStyle/>
+          <a:p>
+            <a:pPr algn="l">
+              <a:spcAft>
+                <a:spcPts val="600"/>
+              </a:spcAft>
+              <a:defRPr sz="4000" b="1">
+                <a:solidFill>
+                  <a:srgbClr val="12335B"/>
+                </a:solidFill>
+              </a:defRPr>
+            </a:pPr>
+            <a:r>
+              <a:t>Thank You</a:t>
+            </a:r>
+          </a:p>
+          <a:p>
+            <a:pPr algn="l">
+              <a:spcAft>
+                <a:spcPts val="1400"/>
+              </a:spcAft>
+              <a:defRPr sz="1800" b="0">
+                <a:solidFill>
+                  <a:srgbClr val="2E6FB5"/>
+                </a:solidFill>
+              </a:defRPr>
+            </a:pPr>
+            <a:r>
+              <a:t>Questions &amp; Discussion</a:t>
+            </a:r>
+          </a:p>
+          <a:p>
+            <a:pPr algn="l">
+              <a:spcAft>
+                <a:spcPts val="0"/>
+              </a:spcAft>
+              <a:defRPr sz="1400" b="0">
+                <a:solidFill>
+                  <a:srgbClr val="222222"/>
+                </a:solidFill>
+              </a:defRPr>
+            </a:pPr>
+            <a:r>
+              <a:t>Niraj Kafle  ·  PocketDRS  ·  BIT Final-Year Project</a:t>
             </a:r>
           </a:p>
         </p:txBody>
@@ -7726,8 +9203,43 @@
         </p:nvSpPr>
         <p:spPr>
           <a:xfrm>
-            <a:off x="502920" y="320040"/>
-            <a:ext cx="8138160" cy="777240"/>
+            <a:off x="502920" y="438912"/>
+            <a:ext cx="8138160" cy="201168"/>
+          </a:xfrm>
+          <a:prstGeom prst="rect">
+            <a:avLst/>
+          </a:prstGeom>
+          <a:noFill/>
+        </p:spPr>
+        <p:txBody>
+          <a:bodyPr wrap="none">
+            <a:noAutofit/>
+          </a:bodyPr>
+          <a:lstStyle/>
+          <a:p>
+            <a:pPr>
+              <a:defRPr sz="1100" b="1">
+                <a:solidFill>
+                  <a:srgbClr val="2E6FB5"/>
+                </a:solidFill>
+              </a:defRPr>
+            </a:pPr>
+            <a:r>
+              <a:t>INTRODUCTION</a:t>
+            </a:r>
+          </a:p>
+        </p:txBody>
+      </p:sp>
+      <p:sp>
+        <p:nvSpPr>
+          <p:cNvPr id="3" name="TextBox 2"/>
+          <p:cNvSpPr txBox="1"/>
+          <p:nvPr/>
+        </p:nvSpPr>
+        <p:spPr>
+          <a:xfrm>
+            <a:off x="502920" y="640080"/>
+            <a:ext cx="8138160" cy="530352"/>
           </a:xfrm>
           <a:prstGeom prst="rect">
             <a:avLst/>
@@ -7741,28 +9253,28 @@
           <a:lstStyle/>
           <a:p>
             <a:pPr>
-              <a:defRPr sz="2600" b="1">
+              <a:defRPr sz="2400" b="1">
                 <a:solidFill>
                   <a:srgbClr val="12335B"/>
                 </a:solidFill>
               </a:defRPr>
             </a:pPr>
             <a:r>
-              <a:t>Problem Statement</a:t>
-            </a:r>
-          </a:p>
-        </p:txBody>
-      </p:sp>
-      <p:sp>
-        <p:nvSpPr>
-          <p:cNvPr id="3" name="Rectangle 2"/>
+              <a:t>Introduction</a:t>
+            </a:r>
+          </a:p>
+        </p:txBody>
+      </p:sp>
+      <p:sp>
+        <p:nvSpPr>
+          <p:cNvPr id="4" name="Rectangle 3"/>
           <p:cNvSpPr/>
           <p:nvPr/>
         </p:nvSpPr>
         <p:spPr>
           <a:xfrm>
-            <a:off x="502920" y="1097280"/>
-            <a:ext cx="2011680" cy="38100"/>
+            <a:off x="502920" y="1170432"/>
+            <a:ext cx="1828800" cy="38100"/>
           </a:xfrm>
           <a:prstGeom prst="rect">
             <a:avLst/>
@@ -7799,14 +9311,87 @@
       </p:sp>
       <p:sp>
         <p:nvSpPr>
-          <p:cNvPr id="4" name="TextBox 3"/>
+          <p:cNvPr id="5" name="TextBox 4"/>
           <p:cNvSpPr txBox="1"/>
           <p:nvPr/>
         </p:nvSpPr>
         <p:spPr>
           <a:xfrm>
-            <a:off x="502920" y="1234440"/>
-            <a:ext cx="8138160" cy="3040380"/>
+            <a:off x="8001000" y="4759452"/>
+            <a:ext cx="640080" cy="274320"/>
+          </a:xfrm>
+          <a:prstGeom prst="rect">
+            <a:avLst/>
+          </a:prstGeom>
+          <a:noFill/>
+        </p:spPr>
+        <p:txBody>
+          <a:bodyPr wrap="none">
+            <a:spAutoFit/>
+          </a:bodyPr>
+          <a:lstStyle/>
+          <a:p>
+            <a:pPr algn="r">
+              <a:defRPr sz="900">
+                <a:solidFill>
+                  <a:srgbClr val="8A8A8A"/>
+                </a:solidFill>
+              </a:defRPr>
+            </a:pPr>
+            <a:r>
+              <a:t>3</a:t>
+            </a:r>
+          </a:p>
+        </p:txBody>
+      </p:sp>
+      <p:sp>
+        <p:nvSpPr>
+          <p:cNvPr id="6" name="TextBox 5"/>
+          <p:cNvSpPr txBox="1"/>
+          <p:nvPr/>
+        </p:nvSpPr>
+        <p:spPr>
+          <a:xfrm>
+            <a:off x="502920" y="1335024"/>
+            <a:ext cx="8138160" cy="502920"/>
+          </a:xfrm>
+          <a:prstGeom prst="rect">
+            <a:avLst/>
+          </a:prstGeom>
+          <a:noFill/>
+        </p:spPr>
+        <p:txBody>
+          <a:bodyPr wrap="square">
+            <a:noAutofit/>
+          </a:bodyPr>
+          <a:lstStyle/>
+          <a:p>
+            <a:pPr>
+              <a:lnSpc>
+                <a:spcPct val="102000"/>
+              </a:lnSpc>
+              <a:defRPr sz="1700" b="1">
+                <a:solidFill>
+                  <a:srgbClr val="12335B"/>
+                </a:solidFill>
+              </a:defRPr>
+            </a:pPr>
+            <a:r>
+              <a:t>PocketDRS brings ball-tracking DRS to grassroots cricket with one smartphone.</a:t>
+            </a:r>
+          </a:p>
+        </p:txBody>
+      </p:sp>
+      <p:sp>
+        <p:nvSpPr>
+          <p:cNvPr id="7" name="TextBox 6"/>
+          <p:cNvSpPr txBox="1"/>
+          <p:nvPr/>
+        </p:nvSpPr>
+        <p:spPr>
+          <a:xfrm>
+            <a:off x="502920" y="1847088"/>
+            <a:ext cx="8138160" cy="2455164"/>
           </a:xfrm>
           <a:prstGeom prst="rect">
             <a:avLst/>
@@ -7821,91 +9406,91 @@
           <a:p>
             <a:pPr>
               <a:lnSpc>
-                <a:spcPct val="105000"/>
+                <a:spcPct val="104000"/>
               </a:lnSpc>
               <a:spcAft>
-                <a:spcPts val="700"/>
-              </a:spcAft>
-              <a:defRPr sz="1700">
-                <a:solidFill>
-                  <a:srgbClr val="202020"/>
-                </a:solidFill>
-              </a:defRPr>
-            </a:pPr>
-            <a:r>
-              <a:t>•  Umpires call LBW in real time from one angle — hard to read line, length, height, and impact at once.</a:t>
+                <a:spcPts val="600"/>
+              </a:spcAft>
+              <a:defRPr sz="1400">
+                <a:solidFill>
+                  <a:srgbClr val="222222"/>
+                </a:solidFill>
+              </a:defRPr>
+            </a:pPr>
+            <a:r>
+              <a:t>• LBW is one of cricket's most contested calls, judged live from a single viewpoint.</a:t>
             </a:r>
           </a:p>
           <a:p>
             <a:pPr>
               <a:lnSpc>
-                <a:spcPct val="105000"/>
+                <a:spcPct val="104000"/>
               </a:lnSpc>
               <a:spcAft>
-                <a:spcPts val="700"/>
-              </a:spcAft>
-              <a:defRPr sz="1700">
-                <a:solidFill>
-                  <a:srgbClr val="202020"/>
-                </a:solidFill>
-              </a:defRPr>
-            </a:pPr>
-            <a:r>
-              <a:t>•  Professional ball tracking needs multi-camera rigs and is out of reach for grassroots cricket:</a:t>
-            </a:r>
-          </a:p>
-          <a:p>
-            <a:pPr lvl="1">
-              <a:lnSpc>
-                <a:spcPct val="105000"/>
-              </a:lnSpc>
-              <a:spcAft>
-                <a:spcPts val="300"/>
+                <a:spcPts val="600"/>
               </a:spcAft>
               <a:defRPr sz="1400">
                 <a:solidFill>
-                  <a:srgbClr val="202020"/>
-                </a:solidFill>
-              </a:defRPr>
-            </a:pPr>
-            <a:r>
-              <a:t>◦  A single phone gives only 2D footage with depth ambiguity, motion blur, and an unknown camera pose.</a:t>
-            </a:r>
-          </a:p>
-          <a:p>
-            <a:pPr lvl="1">
-              <a:lnSpc>
-                <a:spcPct val="105000"/>
-              </a:lnSpc>
-              <a:spcAft>
-                <a:spcPts val="300"/>
-              </a:spcAft>
-              <a:defRPr sz="1400">
-                <a:solidFill>
-                  <a:srgbClr val="202020"/>
-                </a:solidFill>
-              </a:defRPr>
-            </a:pPr>
-            <a:r>
-              <a:t>◦  Lifting a 2D pixel track to a correct 3D trajectory from one view is the core difficulty.</a:t>
+                  <a:srgbClr val="222222"/>
+                </a:solidFill>
+              </a:defRPr>
+            </a:pPr>
+            <a:r>
+              <a:t>• Professional DRS (Hawk-Eye) needs six to eight synchronised high-speed cameras and dedicated hardware.</a:t>
             </a:r>
           </a:p>
           <a:p>
             <a:pPr>
               <a:lnSpc>
-                <a:spcPct val="105000"/>
+                <a:spcPct val="104000"/>
               </a:lnSpc>
               <a:spcAft>
-                <a:spcPts val="700"/>
-              </a:spcAft>
-              <a:defRPr sz="1700">
-                <a:solidFill>
-                  <a:srgbClr val="202020"/>
-                </a:solidFill>
-              </a:defRPr>
-            </a:pPr>
-            <a:r>
-              <a:t>•  Need: a workflow that recovers 3D ball flight from one phone video and returns a transparent LBW verdict.</a:t>
+                <a:spcPts val="600"/>
+              </a:spcAft>
+              <a:defRPr sz="1400">
+                <a:solidFill>
+                  <a:srgbClr val="222222"/>
+                </a:solidFill>
+              </a:defRPr>
+            </a:pPr>
+            <a:r>
+              <a:t>• That rig costs a fortune, so schools, clubs, and training grounds have no access to ball tracking.</a:t>
+            </a:r>
+          </a:p>
+          <a:p>
+            <a:pPr>
+              <a:lnSpc>
+                <a:spcPct val="104000"/>
+              </a:lnSpc>
+              <a:spcAft>
+                <a:spcPts val="600"/>
+              </a:spcAft>
+              <a:defRPr sz="1400">
+                <a:solidFill>
+                  <a:srgbClr val="222222"/>
+                </a:solidFill>
+              </a:defRPr>
+            </a:pPr>
+            <a:r>
+              <a:t>• PocketDRS reconstructs a delivery in real-world 3D from one phone camera and supports the LBW decision.</a:t>
+            </a:r>
+          </a:p>
+          <a:p>
+            <a:pPr>
+              <a:lnSpc>
+                <a:spcPct val="104000"/>
+              </a:lnSpc>
+              <a:spcAft>
+                <a:spcPts val="600"/>
+              </a:spcAft>
+              <a:defRPr sz="1400">
+                <a:solidFill>
+                  <a:srgbClr val="222222"/>
+                </a:solidFill>
+              </a:defRPr>
+            </a:pPr>
+            <a:r>
+              <a:t>• A Flutter app records the ball; a FastAPI + OpenCV server tracks it, rebuilds the 3D path, and applies ICC Rule 36.</a:t>
             </a:r>
           </a:p>
         </p:txBody>
@@ -7944,8 +9529,43 @@
         </p:nvSpPr>
         <p:spPr>
           <a:xfrm>
-            <a:off x="502920" y="320040"/>
-            <a:ext cx="8138160" cy="777240"/>
+            <a:off x="502920" y="438912"/>
+            <a:ext cx="8138160" cy="201168"/>
+          </a:xfrm>
+          <a:prstGeom prst="rect">
+            <a:avLst/>
+          </a:prstGeom>
+          <a:noFill/>
+        </p:spPr>
+        <p:txBody>
+          <a:bodyPr wrap="none">
+            <a:noAutofit/>
+          </a:bodyPr>
+          <a:lstStyle/>
+          <a:p>
+            <a:pPr>
+              <a:defRPr sz="1100" b="1">
+                <a:solidFill>
+                  <a:srgbClr val="2E6FB5"/>
+                </a:solidFill>
+              </a:defRPr>
+            </a:pPr>
+            <a:r>
+              <a:t>INTRODUCTION</a:t>
+            </a:r>
+          </a:p>
+        </p:txBody>
+      </p:sp>
+      <p:sp>
+        <p:nvSpPr>
+          <p:cNvPr id="3" name="TextBox 2"/>
+          <p:cNvSpPr txBox="1"/>
+          <p:nvPr/>
+        </p:nvSpPr>
+        <p:spPr>
+          <a:xfrm>
+            <a:off x="502920" y="640080"/>
+            <a:ext cx="8138160" cy="530352"/>
           </a:xfrm>
           <a:prstGeom prst="rect">
             <a:avLst/>
@@ -7959,28 +9579,28 @@
           <a:lstStyle/>
           <a:p>
             <a:pPr>
-              <a:defRPr sz="2600" b="1">
+              <a:defRPr sz="2400" b="1">
                 <a:solidFill>
                   <a:srgbClr val="12335B"/>
                 </a:solidFill>
               </a:defRPr>
             </a:pPr>
             <a:r>
-              <a:t>Objectives</a:t>
-            </a:r>
-          </a:p>
-        </p:txBody>
-      </p:sp>
-      <p:sp>
-        <p:nvSpPr>
-          <p:cNvPr id="3" name="Rectangle 2"/>
+              <a:t>Problem Statement</a:t>
+            </a:r>
+          </a:p>
+        </p:txBody>
+      </p:sp>
+      <p:sp>
+        <p:nvSpPr>
+          <p:cNvPr id="4" name="Rectangle 3"/>
           <p:cNvSpPr/>
           <p:nvPr/>
         </p:nvSpPr>
         <p:spPr>
           <a:xfrm>
-            <a:off x="502920" y="1097280"/>
-            <a:ext cx="2011680" cy="38100"/>
+            <a:off x="502920" y="1170432"/>
+            <a:ext cx="1828800" cy="38100"/>
           </a:xfrm>
           <a:prstGeom prst="rect">
             <a:avLst/>
@@ -8017,14 +9637,87 @@
       </p:sp>
       <p:sp>
         <p:nvSpPr>
-          <p:cNvPr id="4" name="TextBox 3"/>
+          <p:cNvPr id="5" name="TextBox 4"/>
           <p:cNvSpPr txBox="1"/>
           <p:nvPr/>
         </p:nvSpPr>
         <p:spPr>
           <a:xfrm>
-            <a:off x="502920" y="1234440"/>
-            <a:ext cx="8138160" cy="3040380"/>
+            <a:off x="8001000" y="4759452"/>
+            <a:ext cx="640080" cy="274320"/>
+          </a:xfrm>
+          <a:prstGeom prst="rect">
+            <a:avLst/>
+          </a:prstGeom>
+          <a:noFill/>
+        </p:spPr>
+        <p:txBody>
+          <a:bodyPr wrap="none">
+            <a:spAutoFit/>
+          </a:bodyPr>
+          <a:lstStyle/>
+          <a:p>
+            <a:pPr algn="r">
+              <a:defRPr sz="900">
+                <a:solidFill>
+                  <a:srgbClr val="8A8A8A"/>
+                </a:solidFill>
+              </a:defRPr>
+            </a:pPr>
+            <a:r>
+              <a:t>4</a:t>
+            </a:r>
+          </a:p>
+        </p:txBody>
+      </p:sp>
+      <p:sp>
+        <p:nvSpPr>
+          <p:cNvPr id="6" name="TextBox 5"/>
+          <p:cNvSpPr txBox="1"/>
+          <p:nvPr/>
+        </p:nvSpPr>
+        <p:spPr>
+          <a:xfrm>
+            <a:off x="502920" y="1335024"/>
+            <a:ext cx="8138160" cy="502920"/>
+          </a:xfrm>
+          <a:prstGeom prst="rect">
+            <a:avLst/>
+          </a:prstGeom>
+          <a:noFill/>
+        </p:spPr>
+        <p:txBody>
+          <a:bodyPr wrap="square">
+            <a:noAutofit/>
+          </a:bodyPr>
+          <a:lstStyle/>
+          <a:p>
+            <a:pPr>
+              <a:lnSpc>
+                <a:spcPct val="102000"/>
+              </a:lnSpc>
+              <a:defRPr sz="1700" b="1">
+                <a:solidFill>
+                  <a:srgbClr val="12335B"/>
+                </a:solidFill>
+              </a:defRPr>
+            </a:pPr>
+            <a:r>
+              <a:t>Recovering a correct 3D ball path from a single 2D view is the core challenge.</a:t>
+            </a:r>
+          </a:p>
+        </p:txBody>
+      </p:sp>
+      <p:sp>
+        <p:nvSpPr>
+          <p:cNvPr id="7" name="TextBox 6"/>
+          <p:cNvSpPr txBox="1"/>
+          <p:nvPr/>
+        </p:nvSpPr>
+        <p:spPr>
+          <a:xfrm>
+            <a:off x="502920" y="1847088"/>
+            <a:ext cx="8138160" cy="2455164"/>
           </a:xfrm>
           <a:prstGeom prst="rect">
             <a:avLst/>
@@ -8039,127 +9732,91 @@
           <a:p>
             <a:pPr>
               <a:lnSpc>
-                <a:spcPct val="105000"/>
+                <a:spcPct val="104000"/>
               </a:lnSpc>
               <a:spcAft>
-                <a:spcPts val="700"/>
-              </a:spcAft>
-              <a:defRPr sz="1700">
-                <a:solidFill>
-                  <a:srgbClr val="202020"/>
-                </a:solidFill>
-              </a:defRPr>
-            </a:pPr>
-            <a:r>
-              <a:t>•  General: a phone-based system that reconstructs a cricket delivery in 3D from a single camera and supports the LBW decision.</a:t>
+                <a:spcPts val="600"/>
+              </a:spcAft>
+              <a:defRPr sz="1400">
+                <a:solidFill>
+                  <a:srgbClr val="222222"/>
+                </a:solidFill>
+              </a:defRPr>
+            </a:pPr>
+            <a:r>
+              <a:t>• Umpires call LBW in real time from one angle — line, length, height, and impact at once.</a:t>
             </a:r>
           </a:p>
           <a:p>
             <a:pPr>
               <a:lnSpc>
-                <a:spcPct val="105000"/>
+                <a:spcPct val="104000"/>
               </a:lnSpc>
               <a:spcAft>
-                <a:spcPts val="700"/>
-              </a:spcAft>
-              <a:defRPr sz="1700">
-                <a:solidFill>
-                  <a:srgbClr val="202020"/>
-                </a:solidFill>
-              </a:defRPr>
-            </a:pPr>
-            <a:r>
-              <a:t>•  Specific objectives:</a:t>
-            </a:r>
-          </a:p>
-          <a:p>
-            <a:pPr lvl="1">
+                <a:spcPts val="600"/>
+              </a:spcAft>
+              <a:defRPr sz="1400">
+                <a:solidFill>
+                  <a:srgbClr val="222222"/>
+                </a:solidFill>
+              </a:defRPr>
+            </a:pPr>
+            <a:r>
+              <a:t>• Professional ball tracking needs multi-camera rigs, out of reach for grassroots cricket.</a:t>
+            </a:r>
+          </a:p>
+          <a:p>
+            <a:pPr>
               <a:lnSpc>
-                <a:spcPct val="105000"/>
+                <a:spcPct val="104000"/>
               </a:lnSpc>
               <a:spcAft>
-                <a:spcPts val="300"/>
+                <a:spcPts val="600"/>
               </a:spcAft>
               <a:defRPr sz="1400">
                 <a:solidFill>
-                  <a:srgbClr val="202020"/>
-                </a:solidFill>
-              </a:defRPr>
-            </a:pPr>
-            <a:r>
-              <a:t>◦  Recover the camera pose from four tapped pitch corners using Perspective-n-Point (PnP).</a:t>
-            </a:r>
-          </a:p>
-          <a:p>
-            <a:pPr lvl="1">
+                  <a:srgbClr val="222222"/>
+                </a:solidFill>
+              </a:defRPr>
+            </a:pPr>
+            <a:r>
+              <a:t>• A single phone gives only 2D footage: depth ambiguity, motion blur, and an unknown camera pose.</a:t>
+            </a:r>
+          </a:p>
+          <a:p>
+            <a:pPr>
               <a:lnSpc>
-                <a:spcPct val="105000"/>
+                <a:spcPct val="104000"/>
               </a:lnSpc>
               <a:spcAft>
-                <a:spcPts val="300"/>
+                <a:spcPts val="600"/>
               </a:spcAft>
               <a:defRPr sz="1400">
                 <a:solidFill>
-                  <a:srgbClr val="202020"/>
-                </a:solidFill>
-              </a:defRPr>
-            </a:pPr>
-            <a:r>
-              <a:t>◦  Detect and track the ball across frames (motion + colour + a learned YOLO detector).</a:t>
-            </a:r>
-          </a:p>
-          <a:p>
-            <a:pPr lvl="1">
+                  <a:srgbClr val="222222"/>
+                </a:solidFill>
+              </a:defRPr>
+            </a:pPr>
+            <a:r>
+              <a:t>• Lifting that 2D pixel track to a correct 3D trajectory from one view is the hard part.</a:t>
+            </a:r>
+          </a:p>
+          <a:p>
+            <a:pPr>
               <a:lnSpc>
-                <a:spcPct val="105000"/>
+                <a:spcPct val="104000"/>
               </a:lnSpc>
               <a:spcAft>
-                <a:spcPts val="300"/>
+                <a:spcPts val="600"/>
               </a:spcAft>
               <a:defRPr sz="1400">
                 <a:solidFill>
-                  <a:srgbClr val="202020"/>
-                </a:solidFill>
-              </a:defRPr>
-            </a:pPr>
-            <a:r>
-              <a:t>◦  Link the detections into one smooth trajectory using RANSAC.</a:t>
-            </a:r>
-          </a:p>
-          <a:p>
-            <a:pPr lvl="1">
-              <a:lnSpc>
-                <a:spcPct val="105000"/>
-              </a:lnSpc>
-              <a:spcAft>
-                <a:spcPts val="300"/>
-              </a:spcAft>
-              <a:defRPr sz="1400">
-                <a:solidFill>
-                  <a:srgbClr val="202020"/>
-                </a:solidFill>
-              </a:defRPr>
-            </a:pPr>
-            <a:r>
-              <a:t>◦  Rebuild the ball path in real-world 3D using projectile-motion physics.</a:t>
-            </a:r>
-          </a:p>
-          <a:p>
-            <a:pPr lvl="1">
-              <a:lnSpc>
-                <a:spcPct val="105000"/>
-              </a:lnSpc>
-              <a:spcAft>
-                <a:spcPts val="300"/>
-              </a:spcAft>
-              <a:defRPr sz="1400">
-                <a:solidFill>
-                  <a:srgbClr val="202020"/>
-                </a:solidFill>
-              </a:defRPr>
-            </a:pPr>
-            <a:r>
-              <a:t>◦  Apply the three ICC Rule 36 checks — pitching, impact, wickets — for the verdict.</a:t>
+                  <a:srgbClr val="222222"/>
+                </a:solidFill>
+              </a:defRPr>
+            </a:pPr>
+            <a:r>
+              <a:t>• Need: recover 3D ball flight from one phone video and return a transparent LBW verdict.</a:t>
             </a:r>
           </a:p>
         </p:txBody>
@@ -8198,8 +9855,43 @@
         </p:nvSpPr>
         <p:spPr>
           <a:xfrm>
-            <a:off x="502920" y="320040"/>
-            <a:ext cx="8138160" cy="777240"/>
+            <a:off x="502920" y="438912"/>
+            <a:ext cx="8138160" cy="201168"/>
+          </a:xfrm>
+          <a:prstGeom prst="rect">
+            <a:avLst/>
+          </a:prstGeom>
+          <a:noFill/>
+        </p:spPr>
+        <p:txBody>
+          <a:bodyPr wrap="none">
+            <a:noAutofit/>
+          </a:bodyPr>
+          <a:lstStyle/>
+          <a:p>
+            <a:pPr>
+              <a:defRPr sz="1100" b="1">
+                <a:solidFill>
+                  <a:srgbClr val="2E6FB5"/>
+                </a:solidFill>
+              </a:defRPr>
+            </a:pPr>
+            <a:r>
+              <a:t>INTRODUCTION</a:t>
+            </a:r>
+          </a:p>
+        </p:txBody>
+      </p:sp>
+      <p:sp>
+        <p:nvSpPr>
+          <p:cNvPr id="3" name="TextBox 2"/>
+          <p:cNvSpPr txBox="1"/>
+          <p:nvPr/>
+        </p:nvSpPr>
+        <p:spPr>
+          <a:xfrm>
+            <a:off x="502920" y="640080"/>
+            <a:ext cx="8138160" cy="530352"/>
           </a:xfrm>
           <a:prstGeom prst="rect">
             <a:avLst/>
@@ -8213,28 +9905,28 @@
           <a:lstStyle/>
           <a:p>
             <a:pPr>
-              <a:defRPr sz="2600" b="1">
+              <a:defRPr sz="2400" b="1">
                 <a:solidFill>
                   <a:srgbClr val="12335B"/>
                 </a:solidFill>
               </a:defRPr>
             </a:pPr>
             <a:r>
-              <a:t>Functional Requirements</a:t>
-            </a:r>
-          </a:p>
-        </p:txBody>
-      </p:sp>
-      <p:sp>
-        <p:nvSpPr>
-          <p:cNvPr id="3" name="Rectangle 2"/>
+              <a:t>Objectives</a:t>
+            </a:r>
+          </a:p>
+        </p:txBody>
+      </p:sp>
+      <p:sp>
+        <p:nvSpPr>
+          <p:cNvPr id="4" name="Rectangle 3"/>
           <p:cNvSpPr/>
           <p:nvPr/>
         </p:nvSpPr>
         <p:spPr>
           <a:xfrm>
-            <a:off x="502920" y="1097280"/>
-            <a:ext cx="2011680" cy="38100"/>
+            <a:off x="502920" y="1170432"/>
+            <a:ext cx="1828800" cy="38100"/>
           </a:xfrm>
           <a:prstGeom prst="rect">
             <a:avLst/>
@@ -8271,14 +9963,87 @@
       </p:sp>
       <p:sp>
         <p:nvSpPr>
-          <p:cNvPr id="4" name="TextBox 3"/>
+          <p:cNvPr id="5" name="TextBox 4"/>
           <p:cNvSpPr txBox="1"/>
           <p:nvPr/>
         </p:nvSpPr>
         <p:spPr>
           <a:xfrm>
-            <a:off x="502920" y="1234440"/>
-            <a:ext cx="8138160" cy="3040380"/>
+            <a:off x="8001000" y="4759452"/>
+            <a:ext cx="640080" cy="274320"/>
+          </a:xfrm>
+          <a:prstGeom prst="rect">
+            <a:avLst/>
+          </a:prstGeom>
+          <a:noFill/>
+        </p:spPr>
+        <p:txBody>
+          <a:bodyPr wrap="none">
+            <a:spAutoFit/>
+          </a:bodyPr>
+          <a:lstStyle/>
+          <a:p>
+            <a:pPr algn="r">
+              <a:defRPr sz="900">
+                <a:solidFill>
+                  <a:srgbClr val="8A8A8A"/>
+                </a:solidFill>
+              </a:defRPr>
+            </a:pPr>
+            <a:r>
+              <a:t>5</a:t>
+            </a:r>
+          </a:p>
+        </p:txBody>
+      </p:sp>
+      <p:sp>
+        <p:nvSpPr>
+          <p:cNvPr id="6" name="TextBox 5"/>
+          <p:cNvSpPr txBox="1"/>
+          <p:nvPr/>
+        </p:nvSpPr>
+        <p:spPr>
+          <a:xfrm>
+            <a:off x="502920" y="1335024"/>
+            <a:ext cx="8138160" cy="502920"/>
+          </a:xfrm>
+          <a:prstGeom prst="rect">
+            <a:avLst/>
+          </a:prstGeom>
+          <a:noFill/>
+        </p:spPr>
+        <p:txBody>
+          <a:bodyPr wrap="square">
+            <a:noAutofit/>
+          </a:bodyPr>
+          <a:lstStyle/>
+          <a:p>
+            <a:pPr>
+              <a:lnSpc>
+                <a:spcPct val="102000"/>
+              </a:lnSpc>
+              <a:defRPr sz="1700" b="1">
+                <a:solidFill>
+                  <a:srgbClr val="12335B"/>
+                </a:solidFill>
+              </a:defRPr>
+            </a:pPr>
+            <a:r>
+              <a:t>Build a phone-only pipeline that reconstructs a delivery in 3D and supports the LBW call.</a:t>
+            </a:r>
+          </a:p>
+        </p:txBody>
+      </p:sp>
+      <p:sp>
+        <p:nvSpPr>
+          <p:cNvPr id="7" name="TextBox 6"/>
+          <p:cNvSpPr txBox="1"/>
+          <p:nvPr/>
+        </p:nvSpPr>
+        <p:spPr>
+          <a:xfrm>
+            <a:off x="502920" y="1847088"/>
+            <a:ext cx="8138160" cy="2455164"/>
           </a:xfrm>
           <a:prstGeom prst="rect">
             <a:avLst/>
@@ -8293,91 +10058,91 @@
           <a:p>
             <a:pPr>
               <a:lnSpc>
-                <a:spcPct val="105000"/>
+                <a:spcPct val="104000"/>
               </a:lnSpc>
               <a:spcAft>
-                <a:spcPts val="700"/>
-              </a:spcAft>
-              <a:defRPr sz="1700">
-                <a:solidFill>
-                  <a:srgbClr val="202020"/>
-                </a:solidFill>
-              </a:defRPr>
-            </a:pPr>
-            <a:r>
-              <a:t>•  Record or upload a delivery clip and tap the four pitch corners for calibration.</a:t>
+                <a:spcPts val="600"/>
+              </a:spcAft>
+              <a:defRPr sz="1400">
+                <a:solidFill>
+                  <a:srgbClr val="222222"/>
+                </a:solidFill>
+              </a:defRPr>
+            </a:pPr>
+            <a:r>
+              <a:t>• Recover the camera pose from the marked stumps using PnP (the tapped corners set the detection region).</a:t>
             </a:r>
           </a:p>
           <a:p>
             <a:pPr>
               <a:lnSpc>
-                <a:spcPct val="105000"/>
+                <a:spcPct val="104000"/>
               </a:lnSpc>
               <a:spcAft>
-                <a:spcPts val="700"/>
-              </a:spcAft>
-              <a:defRPr sz="1700">
-                <a:solidFill>
-                  <a:srgbClr val="202020"/>
-                </a:solidFill>
-              </a:defRPr>
-            </a:pPr>
-            <a:r>
-              <a:t>•  Detect the ball per frame and link the detections into a single trajectory.</a:t>
+                <a:spcPts val="600"/>
+              </a:spcAft>
+              <a:defRPr sz="1400">
+                <a:solidFill>
+                  <a:srgbClr val="222222"/>
+                </a:solidFill>
+              </a:defRPr>
+            </a:pPr>
+            <a:r>
+              <a:t>• Detect and track the ball across frames (motion + colour + a learned YOLO detector).</a:t>
             </a:r>
           </a:p>
           <a:p>
             <a:pPr>
               <a:lnSpc>
-                <a:spcPct val="105000"/>
+                <a:spcPct val="104000"/>
               </a:lnSpc>
               <a:spcAft>
-                <a:spcPts val="700"/>
-              </a:spcAft>
-              <a:defRPr sz="1700">
-                <a:solidFill>
-                  <a:srgbClr val="202020"/>
-                </a:solidFill>
-              </a:defRPr>
-            </a:pPr>
-            <a:r>
-              <a:t>•  Recover the camera pose and reconstruct the ball path in real-world 3D.</a:t>
+                <a:spcPts val="600"/>
+              </a:spcAft>
+              <a:defRPr sz="1400">
+                <a:solidFill>
+                  <a:srgbClr val="222222"/>
+                </a:solidFill>
+              </a:defRPr>
+            </a:pPr>
+            <a:r>
+              <a:t>• Link the detections into one smooth trajectory using RANSAC.</a:t>
             </a:r>
           </a:p>
           <a:p>
             <a:pPr>
               <a:lnSpc>
-                <a:spcPct val="105000"/>
+                <a:spcPct val="104000"/>
               </a:lnSpc>
               <a:spcAft>
-                <a:spcPts val="700"/>
-              </a:spcAft>
-              <a:defRPr sz="1700">
-                <a:solidFill>
-                  <a:srgbClr val="202020"/>
-                </a:solidFill>
-              </a:defRPr>
-            </a:pPr>
-            <a:r>
-              <a:t>•  Compute pitching, impact, and wicket-hitting and return an LBW verdict.</a:t>
+                <a:spcPts val="600"/>
+              </a:spcAft>
+              <a:defRPr sz="1400">
+                <a:solidFill>
+                  <a:srgbClr val="222222"/>
+                </a:solidFill>
+              </a:defRPr>
+            </a:pPr>
+            <a:r>
+              <a:t>• Rebuild the ball path in real-world 3D using projectile-motion physics.</a:t>
             </a:r>
           </a:p>
           <a:p>
             <a:pPr>
               <a:lnSpc>
-                <a:spcPct val="105000"/>
+                <a:spcPct val="104000"/>
               </a:lnSpc>
               <a:spcAft>
-                <a:spcPts val="700"/>
-              </a:spcAft>
-              <a:defRPr sz="1700">
-                <a:solidFill>
-                  <a:srgbClr val="202020"/>
-                </a:solidFill>
-              </a:defRPr>
-            </a:pPr>
-            <a:r>
-              <a:t>•  Render a broadcast-style 2D overlay and an interactive 3D Hawk-Eye view with speed, swing, and spin.</a:t>
+                <a:spcPts val="600"/>
+              </a:spcAft>
+              <a:defRPr sz="1400">
+                <a:solidFill>
+                  <a:srgbClr val="222222"/>
+                </a:solidFill>
+              </a:defRPr>
+            </a:pPr>
+            <a:r>
+              <a:t>• Apply the three ICC Rule 36 checks — pitching, impact, wickets — for the verdict.</a:t>
             </a:r>
           </a:p>
         </p:txBody>
@@ -8416,8 +10181,43 @@
         </p:nvSpPr>
         <p:spPr>
           <a:xfrm>
-            <a:off x="502920" y="320040"/>
-            <a:ext cx="8138160" cy="777240"/>
+            <a:off x="502920" y="438912"/>
+            <a:ext cx="8138160" cy="201168"/>
+          </a:xfrm>
+          <a:prstGeom prst="rect">
+            <a:avLst/>
+          </a:prstGeom>
+          <a:noFill/>
+        </p:spPr>
+        <p:txBody>
+          <a:bodyPr wrap="none">
+            <a:noAutofit/>
+          </a:bodyPr>
+          <a:lstStyle/>
+          <a:p>
+            <a:pPr>
+              <a:defRPr sz="1100" b="1">
+                <a:solidFill>
+                  <a:srgbClr val="2E6FB5"/>
+                </a:solidFill>
+              </a:defRPr>
+            </a:pPr>
+            <a:r>
+              <a:t>REQUIREMENTS</a:t>
+            </a:r>
+          </a:p>
+        </p:txBody>
+      </p:sp>
+      <p:sp>
+        <p:nvSpPr>
+          <p:cNvPr id="3" name="TextBox 2"/>
+          <p:cNvSpPr txBox="1"/>
+          <p:nvPr/>
+        </p:nvSpPr>
+        <p:spPr>
+          <a:xfrm>
+            <a:off x="502920" y="640080"/>
+            <a:ext cx="8138160" cy="530352"/>
           </a:xfrm>
           <a:prstGeom prst="rect">
             <a:avLst/>
@@ -8431,28 +10231,28 @@
           <a:lstStyle/>
           <a:p>
             <a:pPr>
-              <a:defRPr sz="2600" b="1">
+              <a:defRPr sz="2400" b="1">
                 <a:solidFill>
                   <a:srgbClr val="12335B"/>
                 </a:solidFill>
               </a:defRPr>
             </a:pPr>
             <a:r>
-              <a:t>Non-functional Requirements</a:t>
-            </a:r>
-          </a:p>
-        </p:txBody>
-      </p:sp>
-      <p:sp>
-        <p:nvSpPr>
-          <p:cNvPr id="3" name="Rectangle 2"/>
+              <a:t>Functional Requirements</a:t>
+            </a:r>
+          </a:p>
+        </p:txBody>
+      </p:sp>
+      <p:sp>
+        <p:nvSpPr>
+          <p:cNvPr id="4" name="Rectangle 3"/>
           <p:cNvSpPr/>
           <p:nvPr/>
         </p:nvSpPr>
         <p:spPr>
           <a:xfrm>
-            <a:off x="502920" y="1097280"/>
-            <a:ext cx="2011680" cy="38100"/>
+            <a:off x="502920" y="1170432"/>
+            <a:ext cx="1828800" cy="38100"/>
           </a:xfrm>
           <a:prstGeom prst="rect">
             <a:avLst/>
@@ -8489,14 +10289,87 @@
       </p:sp>
       <p:sp>
         <p:nvSpPr>
-          <p:cNvPr id="4" name="TextBox 3"/>
+          <p:cNvPr id="5" name="TextBox 4"/>
           <p:cNvSpPr txBox="1"/>
           <p:nvPr/>
         </p:nvSpPr>
         <p:spPr>
           <a:xfrm>
-            <a:off x="502920" y="1234440"/>
-            <a:ext cx="8138160" cy="3040380"/>
+            <a:off x="8001000" y="4759452"/>
+            <a:ext cx="640080" cy="274320"/>
+          </a:xfrm>
+          <a:prstGeom prst="rect">
+            <a:avLst/>
+          </a:prstGeom>
+          <a:noFill/>
+        </p:spPr>
+        <p:txBody>
+          <a:bodyPr wrap="none">
+            <a:spAutoFit/>
+          </a:bodyPr>
+          <a:lstStyle/>
+          <a:p>
+            <a:pPr algn="r">
+              <a:defRPr sz="900">
+                <a:solidFill>
+                  <a:srgbClr val="8A8A8A"/>
+                </a:solidFill>
+              </a:defRPr>
+            </a:pPr>
+            <a:r>
+              <a:t>6</a:t>
+            </a:r>
+          </a:p>
+        </p:txBody>
+      </p:sp>
+      <p:sp>
+        <p:nvSpPr>
+          <p:cNvPr id="6" name="TextBox 5"/>
+          <p:cNvSpPr txBox="1"/>
+          <p:nvPr/>
+        </p:nvSpPr>
+        <p:spPr>
+          <a:xfrm>
+            <a:off x="502920" y="1335024"/>
+            <a:ext cx="8138160" cy="502920"/>
+          </a:xfrm>
+          <a:prstGeom prst="rect">
+            <a:avLst/>
+          </a:prstGeom>
+          <a:noFill/>
+        </p:spPr>
+        <p:txBody>
+          <a:bodyPr wrap="square">
+            <a:noAutofit/>
+          </a:bodyPr>
+          <a:lstStyle/>
+          <a:p>
+            <a:pPr>
+              <a:lnSpc>
+                <a:spcPct val="102000"/>
+              </a:lnSpc>
+              <a:defRPr sz="1700" b="1">
+                <a:solidFill>
+                  <a:srgbClr val="12335B"/>
+                </a:solidFill>
+              </a:defRPr>
+            </a:pPr>
+            <a:r>
+              <a:t>Twelve functional requirements span capture, calibration, analysis, and visualisation.</a:t>
+            </a:r>
+          </a:p>
+        </p:txBody>
+      </p:sp>
+      <p:sp>
+        <p:nvSpPr>
+          <p:cNvPr id="7" name="TextBox 6"/>
+          <p:cNvSpPr txBox="1"/>
+          <p:nvPr/>
+        </p:nvSpPr>
+        <p:spPr>
+          <a:xfrm>
+            <a:off x="502920" y="1847088"/>
+            <a:ext cx="8138160" cy="2455164"/>
           </a:xfrm>
           <a:prstGeom prst="rect">
             <a:avLst/>
@@ -8511,91 +10384,91 @@
           <a:p>
             <a:pPr>
               <a:lnSpc>
-                <a:spcPct val="105000"/>
+                <a:spcPct val="104000"/>
               </a:lnSpc>
               <a:spcAft>
-                <a:spcPts val="700"/>
-              </a:spcAft>
-              <a:defRPr sz="1700">
-                <a:solidFill>
-                  <a:srgbClr val="202020"/>
-                </a:solidFill>
-              </a:defRPr>
-            </a:pPr>
-            <a:r>
-              <a:t>•  Performance: analyse a delivery within about thirty seconds end to end.</a:t>
+                <a:spcPts val="600"/>
+              </a:spcAft>
+              <a:defRPr sz="1400">
+                <a:solidFill>
+                  <a:srgbClr val="222222"/>
+                </a:solidFill>
+              </a:defRPr>
+            </a:pPr>
+            <a:r>
+              <a:t>• Record or upload a delivery clip and tap the four pitch corners for calibration.</a:t>
             </a:r>
           </a:p>
           <a:p>
             <a:pPr>
               <a:lnSpc>
-                <a:spcPct val="105000"/>
+                <a:spcPct val="104000"/>
               </a:lnSpc>
               <a:spcAft>
-                <a:spcPts val="700"/>
-              </a:spcAft>
-              <a:defRPr sz="1700">
-                <a:solidFill>
-                  <a:srgbClr val="202020"/>
-                </a:solidFill>
-              </a:defRPr>
-            </a:pPr>
-            <a:r>
-              <a:t>•  Usability: four taps, no specialist hardware, no configuration.</a:t>
+                <a:spcPts val="600"/>
+              </a:spcAft>
+              <a:defRPr sz="1400">
+                <a:solidFill>
+                  <a:srgbClr val="222222"/>
+                </a:solidFill>
+              </a:defRPr>
+            </a:pPr>
+            <a:r>
+              <a:t>• Detect the ball per frame and link the detections into a single trajectory.</a:t>
             </a:r>
           </a:p>
           <a:p>
             <a:pPr>
               <a:lnSpc>
-                <a:spcPct val="105000"/>
+                <a:spcPct val="104000"/>
               </a:lnSpc>
               <a:spcAft>
-                <a:spcPts val="700"/>
-              </a:spcAft>
-              <a:defRPr sz="1700">
-                <a:solidFill>
-                  <a:srgbClr val="202020"/>
-                </a:solidFill>
-              </a:defRPr>
-            </a:pPr>
-            <a:r>
-              <a:t>•  Accuracy: correct camera recovery and a verdict consistent with the manual call.</a:t>
+                <a:spcPts val="600"/>
+              </a:spcAft>
+              <a:defRPr sz="1400">
+                <a:solidFill>
+                  <a:srgbClr val="222222"/>
+                </a:solidFill>
+              </a:defRPr>
+            </a:pPr>
+            <a:r>
+              <a:t>• Recover the camera pose and reconstruct the ball path in real-world 3D.</a:t>
             </a:r>
           </a:p>
           <a:p>
             <a:pPr>
               <a:lnSpc>
-                <a:spcPct val="105000"/>
+                <a:spcPct val="104000"/>
               </a:lnSpc>
               <a:spcAft>
-                <a:spcPts val="700"/>
-              </a:spcAft>
-              <a:defRPr sz="1700">
-                <a:solidFill>
-                  <a:srgbClr val="202020"/>
-                </a:solidFill>
-              </a:defRPr>
-            </a:pPr>
-            <a:r>
-              <a:t>•  Transparency: every verdict shows the three checks and the predicted impact at the stumps.</a:t>
+                <a:spcPts val="600"/>
+              </a:spcAft>
+              <a:defRPr sz="1400">
+                <a:solidFill>
+                  <a:srgbClr val="222222"/>
+                </a:solidFill>
+              </a:defRPr>
+            </a:pPr>
+            <a:r>
+              <a:t>• Compute pitching, impact, and wicket-hitting and return an LBW verdict.</a:t>
             </a:r>
           </a:p>
           <a:p>
             <a:pPr>
               <a:lnSpc>
-                <a:spcPct val="105000"/>
+                <a:spcPct val="104000"/>
               </a:lnSpc>
               <a:spcAft>
-                <a:spcPts val="700"/>
-              </a:spcAft>
-              <a:defRPr sz="1700">
-                <a:solidFill>
-                  <a:srgbClr val="202020"/>
-                </a:solidFill>
-              </a:defRPr>
-            </a:pPr>
-            <a:r>
-              <a:t>•  Portability: a standard Android or iOS phone plus a Python FastAPI server.</a:t>
+                <a:spcPts val="600"/>
+              </a:spcAft>
+              <a:defRPr sz="1400">
+                <a:solidFill>
+                  <a:srgbClr val="222222"/>
+                </a:solidFill>
+              </a:defRPr>
+            </a:pPr>
+            <a:r>
+              <a:t>• Render a broadcast-style 2D overlay and an interactive 3D Hawk-Eye view.</a:t>
             </a:r>
           </a:p>
         </p:txBody>
@@ -8634,8 +10507,43 @@
         </p:nvSpPr>
         <p:spPr>
           <a:xfrm>
-            <a:off x="502920" y="320040"/>
-            <a:ext cx="8138160" cy="777240"/>
+            <a:off x="502920" y="438912"/>
+            <a:ext cx="8138160" cy="201168"/>
+          </a:xfrm>
+          <a:prstGeom prst="rect">
+            <a:avLst/>
+          </a:prstGeom>
+          <a:noFill/>
+        </p:spPr>
+        <p:txBody>
+          <a:bodyPr wrap="none">
+            <a:noAutofit/>
+          </a:bodyPr>
+          <a:lstStyle/>
+          <a:p>
+            <a:pPr>
+              <a:defRPr sz="1100" b="1">
+                <a:solidFill>
+                  <a:srgbClr val="2E6FB5"/>
+                </a:solidFill>
+              </a:defRPr>
+            </a:pPr>
+            <a:r>
+              <a:t>REQUIREMENTS</a:t>
+            </a:r>
+          </a:p>
+        </p:txBody>
+      </p:sp>
+      <p:sp>
+        <p:nvSpPr>
+          <p:cNvPr id="3" name="TextBox 2"/>
+          <p:cNvSpPr txBox="1"/>
+          <p:nvPr/>
+        </p:nvSpPr>
+        <p:spPr>
+          <a:xfrm>
+            <a:off x="502920" y="640080"/>
+            <a:ext cx="8138160" cy="530352"/>
           </a:xfrm>
           <a:prstGeom prst="rect">
             <a:avLst/>
@@ -8649,28 +10557,28 @@
           <a:lstStyle/>
           <a:p>
             <a:pPr>
-              <a:defRPr sz="2600" b="1">
+              <a:defRPr sz="2400" b="1">
                 <a:solidFill>
                   <a:srgbClr val="12335B"/>
                 </a:solidFill>
               </a:defRPr>
             </a:pPr>
             <a:r>
-              <a:t>Use-Case Diagram</a:t>
-            </a:r>
-          </a:p>
-        </p:txBody>
-      </p:sp>
-      <p:sp>
-        <p:nvSpPr>
-          <p:cNvPr id="3" name="Rectangle 2"/>
+              <a:t>Non-functional Requirements</a:t>
+            </a:r>
+          </a:p>
+        </p:txBody>
+      </p:sp>
+      <p:sp>
+        <p:nvSpPr>
+          <p:cNvPr id="4" name="Rectangle 3"/>
           <p:cNvSpPr/>
           <p:nvPr/>
         </p:nvSpPr>
         <p:spPr>
           <a:xfrm>
-            <a:off x="502920" y="1097280"/>
-            <a:ext cx="2011680" cy="38100"/>
+            <a:off x="502920" y="1170432"/>
+            <a:ext cx="1828800" cy="38100"/>
           </a:xfrm>
           <a:prstGeom prst="rect">
             <a:avLst/>
@@ -8705,30 +10613,192 @@
           </a:p>
         </p:txBody>
       </p:sp>
-      <p:pic>
-        <p:nvPicPr>
-          <p:cNvPr id="4" name="Picture 3" descr="use_case_diagram.png"/>
-          <p:cNvPicPr>
-            <a:picLocks noChangeAspect="1"/>
-          </p:cNvPicPr>
+      <p:sp>
+        <p:nvSpPr>
+          <p:cNvPr id="5" name="TextBox 4"/>
+          <p:cNvSpPr txBox="1"/>
           <p:nvPr/>
-        </p:nvPicPr>
-        <p:blipFill>
-          <a:blip r:embed="rId2"/>
-          <a:stretch>
-            <a:fillRect/>
-          </a:stretch>
-        </p:blipFill>
-        <p:spPr>
-          <a:xfrm>
-            <a:off x="3538563" y="1234440"/>
-            <a:ext cx="2066873" cy="3040380"/>
-          </a:xfrm>
-          <a:prstGeom prst="rect">
-            <a:avLst/>
-          </a:prstGeom>
-        </p:spPr>
-      </p:pic>
+        </p:nvSpPr>
+        <p:spPr>
+          <a:xfrm>
+            <a:off x="8001000" y="4759452"/>
+            <a:ext cx="640080" cy="274320"/>
+          </a:xfrm>
+          <a:prstGeom prst="rect">
+            <a:avLst/>
+          </a:prstGeom>
+          <a:noFill/>
+        </p:spPr>
+        <p:txBody>
+          <a:bodyPr wrap="none">
+            <a:spAutoFit/>
+          </a:bodyPr>
+          <a:lstStyle/>
+          <a:p>
+            <a:pPr algn="r">
+              <a:defRPr sz="900">
+                <a:solidFill>
+                  <a:srgbClr val="8A8A8A"/>
+                </a:solidFill>
+              </a:defRPr>
+            </a:pPr>
+            <a:r>
+              <a:t>7</a:t>
+            </a:r>
+          </a:p>
+        </p:txBody>
+      </p:sp>
+      <p:sp>
+        <p:nvSpPr>
+          <p:cNvPr id="6" name="TextBox 5"/>
+          <p:cNvSpPr txBox="1"/>
+          <p:nvPr/>
+        </p:nvSpPr>
+        <p:spPr>
+          <a:xfrm>
+            <a:off x="502920" y="1335024"/>
+            <a:ext cx="8138160" cy="502920"/>
+          </a:xfrm>
+          <a:prstGeom prst="rect">
+            <a:avLst/>
+          </a:prstGeom>
+          <a:noFill/>
+        </p:spPr>
+        <p:txBody>
+          <a:bodyPr wrap="square">
+            <a:noAutofit/>
+          </a:bodyPr>
+          <a:lstStyle/>
+          <a:p>
+            <a:pPr>
+              <a:lnSpc>
+                <a:spcPct val="102000"/>
+              </a:lnSpc>
+              <a:defRPr sz="1700" b="1">
+                <a:solidFill>
+                  <a:srgbClr val="12335B"/>
+                </a:solidFill>
+              </a:defRPr>
+            </a:pPr>
+            <a:r>
+              <a:t>Fast, usable, transparent, and portable — with no specialist hardware.</a:t>
+            </a:r>
+          </a:p>
+        </p:txBody>
+      </p:sp>
+      <p:sp>
+        <p:nvSpPr>
+          <p:cNvPr id="7" name="TextBox 6"/>
+          <p:cNvSpPr txBox="1"/>
+          <p:nvPr/>
+        </p:nvSpPr>
+        <p:spPr>
+          <a:xfrm>
+            <a:off x="502920" y="1847088"/>
+            <a:ext cx="8138160" cy="2455164"/>
+          </a:xfrm>
+          <a:prstGeom prst="rect">
+            <a:avLst/>
+          </a:prstGeom>
+          <a:noFill/>
+        </p:spPr>
+        <p:txBody>
+          <a:bodyPr wrap="square">
+            <a:normAutofit/>
+          </a:bodyPr>
+          <a:lstStyle/>
+          <a:p>
+            <a:pPr>
+              <a:lnSpc>
+                <a:spcPct val="104000"/>
+              </a:lnSpc>
+              <a:spcAft>
+                <a:spcPts val="600"/>
+              </a:spcAft>
+              <a:defRPr sz="1400">
+                <a:solidFill>
+                  <a:srgbClr val="222222"/>
+                </a:solidFill>
+              </a:defRPr>
+            </a:pPr>
+            <a:r>
+              <a:t>• Performance: analyse a delivery within about thirty seconds end to end.</a:t>
+            </a:r>
+          </a:p>
+          <a:p>
+            <a:pPr>
+              <a:lnSpc>
+                <a:spcPct val="104000"/>
+              </a:lnSpc>
+              <a:spcAft>
+                <a:spcPts val="600"/>
+              </a:spcAft>
+              <a:defRPr sz="1400">
+                <a:solidFill>
+                  <a:srgbClr val="222222"/>
+                </a:solidFill>
+              </a:defRPr>
+            </a:pPr>
+            <a:r>
+              <a:t>• Usability: four taps, no specialist hardware, no configuration.</a:t>
+            </a:r>
+          </a:p>
+          <a:p>
+            <a:pPr>
+              <a:lnSpc>
+                <a:spcPct val="104000"/>
+              </a:lnSpc>
+              <a:spcAft>
+                <a:spcPts val="600"/>
+              </a:spcAft>
+              <a:defRPr sz="1400">
+                <a:solidFill>
+                  <a:srgbClr val="222222"/>
+                </a:solidFill>
+              </a:defRPr>
+            </a:pPr>
+            <a:r>
+              <a:t>• Accuracy: correct camera recovery and a verdict within honest monocular bounds.</a:t>
+            </a:r>
+          </a:p>
+          <a:p>
+            <a:pPr>
+              <a:lnSpc>
+                <a:spcPct val="104000"/>
+              </a:lnSpc>
+              <a:spcAft>
+                <a:spcPts val="600"/>
+              </a:spcAft>
+              <a:defRPr sz="1400">
+                <a:solidFill>
+                  <a:srgbClr val="222222"/>
+                </a:solidFill>
+              </a:defRPr>
+            </a:pPr>
+            <a:r>
+              <a:t>• Transparency: every verdict shows the three checks and the predicted impact at the stumps.</a:t>
+            </a:r>
+          </a:p>
+          <a:p>
+            <a:pPr>
+              <a:lnSpc>
+                <a:spcPct val="104000"/>
+              </a:lnSpc>
+              <a:spcAft>
+                <a:spcPts val="600"/>
+              </a:spcAft>
+              <a:defRPr sz="1400">
+                <a:solidFill>
+                  <a:srgbClr val="222222"/>
+                </a:solidFill>
+              </a:defRPr>
+            </a:pPr>
+            <a:r>
+              <a:t>• Portability: a standard Android or iOS phone plus a Python FastAPI server.</a:t>
+            </a:r>
+          </a:p>
+        </p:txBody>
+      </p:sp>
     </p:spTree>
   </p:cSld>
   <p:clrMapOvr>
@@ -8763,8 +10833,43 @@
         </p:nvSpPr>
         <p:spPr>
           <a:xfrm>
-            <a:off x="502920" y="320040"/>
-            <a:ext cx="8138160" cy="777240"/>
+            <a:off x="502920" y="438912"/>
+            <a:ext cx="8138160" cy="201168"/>
+          </a:xfrm>
+          <a:prstGeom prst="rect">
+            <a:avLst/>
+          </a:prstGeom>
+          <a:noFill/>
+        </p:spPr>
+        <p:txBody>
+          <a:bodyPr wrap="none">
+            <a:noAutofit/>
+          </a:bodyPr>
+          <a:lstStyle/>
+          <a:p>
+            <a:pPr>
+              <a:defRPr sz="1100" b="1">
+                <a:solidFill>
+                  <a:srgbClr val="2E6FB5"/>
+                </a:solidFill>
+              </a:defRPr>
+            </a:pPr>
+            <a:r>
+              <a:t>ANALYSIS &amp; DESIGN</a:t>
+            </a:r>
+          </a:p>
+        </p:txBody>
+      </p:sp>
+      <p:sp>
+        <p:nvSpPr>
+          <p:cNvPr id="3" name="TextBox 2"/>
+          <p:cNvSpPr txBox="1"/>
+          <p:nvPr/>
+        </p:nvSpPr>
+        <p:spPr>
+          <a:xfrm>
+            <a:off x="502920" y="640080"/>
+            <a:ext cx="8138160" cy="530352"/>
           </a:xfrm>
           <a:prstGeom prst="rect">
             <a:avLst/>
@@ -8778,28 +10883,28 @@
           <a:lstStyle/>
           <a:p>
             <a:pPr>
-              <a:defRPr sz="2600" b="1">
+              <a:defRPr sz="2400" b="1">
                 <a:solidFill>
                   <a:srgbClr val="12335B"/>
                 </a:solidFill>
               </a:defRPr>
             </a:pPr>
             <a:r>
-              <a:t>Data Modeling: ER Diagram</a:t>
-            </a:r>
-          </a:p>
-        </p:txBody>
-      </p:sp>
-      <p:sp>
-        <p:nvSpPr>
-          <p:cNvPr id="3" name="Rectangle 2"/>
+              <a:t>Use-Case Diagram</a:t>
+            </a:r>
+          </a:p>
+        </p:txBody>
+      </p:sp>
+      <p:sp>
+        <p:nvSpPr>
+          <p:cNvPr id="4" name="Rectangle 3"/>
           <p:cNvSpPr/>
           <p:nvPr/>
         </p:nvSpPr>
         <p:spPr>
           <a:xfrm>
-            <a:off x="502920" y="1097280"/>
-            <a:ext cx="2011680" cy="38100"/>
+            <a:off x="502920" y="1170432"/>
+            <a:ext cx="1828800" cy="38100"/>
           </a:xfrm>
           <a:prstGeom prst="rect">
             <a:avLst/>
@@ -8834,9 +10939,44 @@
           </a:p>
         </p:txBody>
       </p:sp>
+      <p:sp>
+        <p:nvSpPr>
+          <p:cNvPr id="5" name="TextBox 4"/>
+          <p:cNvSpPr txBox="1"/>
+          <p:nvPr/>
+        </p:nvSpPr>
+        <p:spPr>
+          <a:xfrm>
+            <a:off x="8001000" y="4759452"/>
+            <a:ext cx="640080" cy="274320"/>
+          </a:xfrm>
+          <a:prstGeom prst="rect">
+            <a:avLst/>
+          </a:prstGeom>
+          <a:noFill/>
+        </p:spPr>
+        <p:txBody>
+          <a:bodyPr wrap="none">
+            <a:spAutoFit/>
+          </a:bodyPr>
+          <a:lstStyle/>
+          <a:p>
+            <a:pPr algn="r">
+              <a:defRPr sz="900">
+                <a:solidFill>
+                  <a:srgbClr val="8A8A8A"/>
+                </a:solidFill>
+              </a:defRPr>
+            </a:pPr>
+            <a:r>
+              <a:t>8</a:t>
+            </a:r>
+          </a:p>
+        </p:txBody>
+      </p:sp>
       <p:pic>
         <p:nvPicPr>
-          <p:cNvPr id="4" name="Picture 3" descr="er_diagram.png"/>
+          <p:cNvPr id="6" name="Picture 5" descr="use_case_diagram.png"/>
           <p:cNvPicPr>
             <a:picLocks noChangeAspect="1"/>
           </p:cNvPicPr>
@@ -8850,8 +10990,8 @@
         </p:blipFill>
         <p:spPr>
           <a:xfrm>
-            <a:off x="3517570" y="1234440"/>
-            <a:ext cx="2108859" cy="3040380"/>
+            <a:off x="3563428" y="1335024"/>
+            <a:ext cx="2017144" cy="2967228"/>
           </a:xfrm>
           <a:prstGeom prst="rect">
             <a:avLst/>
@@ -8892,8 +11032,43 @@
         </p:nvSpPr>
         <p:spPr>
           <a:xfrm>
-            <a:off x="502920" y="320040"/>
-            <a:ext cx="8138160" cy="777240"/>
+            <a:off x="502920" y="438912"/>
+            <a:ext cx="8138160" cy="201168"/>
+          </a:xfrm>
+          <a:prstGeom prst="rect">
+            <a:avLst/>
+          </a:prstGeom>
+          <a:noFill/>
+        </p:spPr>
+        <p:txBody>
+          <a:bodyPr wrap="none">
+            <a:noAutofit/>
+          </a:bodyPr>
+          <a:lstStyle/>
+          <a:p>
+            <a:pPr>
+              <a:defRPr sz="1100" b="1">
+                <a:solidFill>
+                  <a:srgbClr val="2E6FB5"/>
+                </a:solidFill>
+              </a:defRPr>
+            </a:pPr>
+            <a:r>
+              <a:t>ANALYSIS &amp; DESIGN</a:t>
+            </a:r>
+          </a:p>
+        </p:txBody>
+      </p:sp>
+      <p:sp>
+        <p:nvSpPr>
+          <p:cNvPr id="3" name="TextBox 2"/>
+          <p:cNvSpPr txBox="1"/>
+          <p:nvPr/>
+        </p:nvSpPr>
+        <p:spPr>
+          <a:xfrm>
+            <a:off x="502920" y="640080"/>
+            <a:ext cx="8138160" cy="530352"/>
           </a:xfrm>
           <a:prstGeom prst="rect">
             <a:avLst/>
@@ -8907,28 +11082,28 @@
           <a:lstStyle/>
           <a:p>
             <a:pPr>
-              <a:defRPr sz="2600" b="1">
+              <a:defRPr sz="2400" b="1">
                 <a:solidFill>
                   <a:srgbClr val="12335B"/>
                 </a:solidFill>
               </a:defRPr>
             </a:pPr>
             <a:r>
-              <a:t>Process Modeling: Data Flow Diagrams</a:t>
-            </a:r>
-          </a:p>
-        </p:txBody>
-      </p:sp>
-      <p:sp>
-        <p:nvSpPr>
-          <p:cNvPr id="3" name="Rectangle 2"/>
+              <a:t>Data Modeling: ER Diagram</a:t>
+            </a:r>
+          </a:p>
+        </p:txBody>
+      </p:sp>
+      <p:sp>
+        <p:nvSpPr>
+          <p:cNvPr id="4" name="Rectangle 3"/>
           <p:cNvSpPr/>
           <p:nvPr/>
         </p:nvSpPr>
         <p:spPr>
           <a:xfrm>
-            <a:off x="502920" y="1097280"/>
-            <a:ext cx="2011680" cy="38100"/>
+            <a:off x="502920" y="1170432"/>
+            <a:ext cx="1828800" cy="38100"/>
           </a:xfrm>
           <a:prstGeom prst="rect">
             <a:avLst/>
@@ -8963,9 +11138,44 @@
           </a:p>
         </p:txBody>
       </p:sp>
+      <p:sp>
+        <p:nvSpPr>
+          <p:cNvPr id="5" name="TextBox 4"/>
+          <p:cNvSpPr txBox="1"/>
+          <p:nvPr/>
+        </p:nvSpPr>
+        <p:spPr>
+          <a:xfrm>
+            <a:off x="8001000" y="4759452"/>
+            <a:ext cx="640080" cy="274320"/>
+          </a:xfrm>
+          <a:prstGeom prst="rect">
+            <a:avLst/>
+          </a:prstGeom>
+          <a:noFill/>
+        </p:spPr>
+        <p:txBody>
+          <a:bodyPr wrap="none">
+            <a:spAutoFit/>
+          </a:bodyPr>
+          <a:lstStyle/>
+          <a:p>
+            <a:pPr algn="r">
+              <a:defRPr sz="900">
+                <a:solidFill>
+                  <a:srgbClr val="8A8A8A"/>
+                </a:solidFill>
+              </a:defRPr>
+            </a:pPr>
+            <a:r>
+              <a:t>9</a:t>
+            </a:r>
+          </a:p>
+        </p:txBody>
+      </p:sp>
       <p:pic>
         <p:nvPicPr>
-          <p:cNvPr id="4" name="Picture 3" descr="dfd_level0.png"/>
+          <p:cNvPr id="6" name="Picture 5" descr="er_diagram.png"/>
           <p:cNvPicPr>
             <a:picLocks noChangeAspect="1"/>
           </p:cNvPicPr>
@@ -8979,108 +11189,14 @@
         </p:blipFill>
         <p:spPr>
           <a:xfrm>
-            <a:off x="502920" y="2268198"/>
-            <a:ext cx="3931920" cy="698543"/>
+            <a:off x="3542940" y="1335024"/>
+            <a:ext cx="2058119" cy="2967228"/>
           </a:xfrm>
           <a:prstGeom prst="rect">
             <a:avLst/>
           </a:prstGeom>
         </p:spPr>
       </p:pic>
-      <p:sp>
-        <p:nvSpPr>
-          <p:cNvPr id="5" name="TextBox 4"/>
-          <p:cNvSpPr txBox="1"/>
-          <p:nvPr/>
-        </p:nvSpPr>
-        <p:spPr>
-          <a:xfrm>
-            <a:off x="502920" y="4000500"/>
-            <a:ext cx="3931920" cy="274320"/>
-          </a:xfrm>
-          <a:prstGeom prst="rect">
-            <a:avLst/>
-          </a:prstGeom>
-          <a:noFill/>
-        </p:spPr>
-        <p:txBody>
-          <a:bodyPr wrap="none">
-            <a:spAutoFit/>
-          </a:bodyPr>
-          <a:lstStyle/>
-          <a:p>
-            <a:pPr algn="ctr">
-              <a:defRPr sz="1200">
-                <a:solidFill>
-                  <a:srgbClr val="202020"/>
-                </a:solidFill>
-              </a:defRPr>
-            </a:pPr>
-            <a:r>
-              <a:t>Level 0 (context)</a:t>
-            </a:r>
-          </a:p>
-        </p:txBody>
-      </p:sp>
-      <p:pic>
-        <p:nvPicPr>
-          <p:cNvPr id="6" name="Picture 5" descr="dfd_level1.png"/>
-          <p:cNvPicPr>
-            <a:picLocks noChangeAspect="1"/>
-          </p:cNvPicPr>
-          <p:nvPr/>
-        </p:nvPicPr>
-        <p:blipFill>
-          <a:blip r:embed="rId3"/>
-          <a:stretch>
-            <a:fillRect/>
-          </a:stretch>
-        </p:blipFill>
-        <p:spPr>
-          <a:xfrm>
-            <a:off x="5717336" y="1234440"/>
-            <a:ext cx="1915568" cy="2766060"/>
-          </a:xfrm>
-          <a:prstGeom prst="rect">
-            <a:avLst/>
-          </a:prstGeom>
-        </p:spPr>
-      </p:pic>
-      <p:sp>
-        <p:nvSpPr>
-          <p:cNvPr id="7" name="TextBox 6"/>
-          <p:cNvSpPr txBox="1"/>
-          <p:nvPr/>
-        </p:nvSpPr>
-        <p:spPr>
-          <a:xfrm>
-            <a:off x="4709160" y="4000500"/>
-            <a:ext cx="3931920" cy="274320"/>
-          </a:xfrm>
-          <a:prstGeom prst="rect">
-            <a:avLst/>
-          </a:prstGeom>
-          <a:noFill/>
-        </p:spPr>
-        <p:txBody>
-          <a:bodyPr wrap="none">
-            <a:spAutoFit/>
-          </a:bodyPr>
-          <a:lstStyle/>
-          <a:p>
-            <a:pPr algn="ctr">
-              <a:defRPr sz="1200">
-                <a:solidFill>
-                  <a:srgbClr val="202020"/>
-                </a:solidFill>
-              </a:defRPr>
-            </a:pPr>
-            <a:r>
-              <a:t>Level 1</a:t>
-            </a:r>
-          </a:p>
-        </p:txBody>
-      </p:sp>
     </p:spTree>
   </p:cSld>
   <p:clrMapOvr>

--- a/dump/report_docs/pocketdrs_presentation.pptx
+++ b/dump/report_docs/pocketdrs_presentation.pptx
@@ -28,6 +28,8 @@
     <p:sldId id="273" r:id="rId23"/>
     <p:sldId id="274" r:id="rId24"/>
     <p:sldId id="275" r:id="rId25"/>
+    <p:sldId id="276" r:id="rId26"/>
+    <p:sldId id="277" r:id="rId27"/>
   </p:sldIdLst>
   <p:sldSz cy="5143500" cx="9144000"/>
   <p:notesSz cx="6858000" cy="9144000"/>
@@ -5593,8 +5595,8 @@
         </p:nvSpPr>
         <p:spPr>
           <a:xfrm>
-            <a:off x="502920" y="1051560"/>
-            <a:ext cx="2194560" cy="50800"/>
+            <a:off x="457200" y="960120"/>
+            <a:ext cx="2011680" cy="50800"/>
           </a:xfrm>
           <a:prstGeom prst="rect">
             <a:avLst/>
@@ -5637,8 +5639,8 @@
         </p:nvSpPr>
         <p:spPr>
           <a:xfrm>
-            <a:off x="502920" y="1234440"/>
-            <a:ext cx="8138160" cy="2743200"/>
+            <a:off x="457200" y="1097280"/>
+            <a:ext cx="8229600" cy="2926080"/>
           </a:xfrm>
           <a:prstGeom prst="rect">
             <a:avLst/>
@@ -5646,16 +5648,22 @@
           <a:noFill/>
         </p:spPr>
         <p:txBody>
-          <a:bodyPr wrap="square" anchor="t">
-            <a:spAutoFit/>
+          <a:bodyPr wrap="square" anchor="t" lIns="0" rIns="0" tIns="0" bIns="0">
+            <a:noAutofit/>
           </a:bodyPr>
           <a:lstStyle/>
           <a:p>
             <a:pPr algn="l">
+              <a:lnSpc>
+                <a:spcPct val="102000"/>
+              </a:lnSpc>
+              <a:spcBef>
+                <a:spcPts val="0"/>
+              </a:spcBef>
               <a:spcAft>
                 <a:spcPts val="600"/>
               </a:spcAft>
-              <a:defRPr sz="4000" b="1">
+              <a:defRPr sz="4200" b="1">
                 <a:solidFill>
                   <a:srgbClr val="12335B"/>
                 </a:solidFill>
@@ -5667,57 +5675,81 @@
           </a:p>
           <a:p>
             <a:pPr algn="l">
-              <a:spcAft>
-                <a:spcPts val="0"/>
-              </a:spcAft>
-              <a:defRPr sz="1800" b="0">
-                <a:solidFill>
-                  <a:srgbClr val="222222"/>
+              <a:lnSpc>
+                <a:spcPct val="102000"/>
+              </a:lnSpc>
+              <a:spcBef>
+                <a:spcPts val="0"/>
+              </a:spcBef>
+              <a:spcAft>
+                <a:spcPts val="0"/>
+              </a:spcAft>
+              <a:defRPr sz="1700" b="0">
+                <a:solidFill>
+                  <a:srgbClr val="2A2A2A"/>
                 </a:solidFill>
               </a:defRPr>
             </a:pPr>
             <a:r>
-              <a:t>A Single-View 3D Trajectory Reconstruction and Decision</a:t>
+              <a:t>A Single-View 3D Trajectory Reconstruction and</a:t>
             </a:r>
           </a:p>
           <a:p>
             <a:pPr algn="l">
-              <a:spcAft>
-                <a:spcPts val="1600"/>
-              </a:spcAft>
-              <a:defRPr sz="1800" b="0">
-                <a:solidFill>
-                  <a:srgbClr val="222222"/>
+              <a:lnSpc>
+                <a:spcPct val="102000"/>
+              </a:lnSpc>
+              <a:spcBef>
+                <a:spcPts val="0"/>
+              </a:spcBef>
+              <a:spcAft>
+                <a:spcPts val="1800"/>
+              </a:spcAft>
+              <a:defRPr sz="1700" b="0">
+                <a:solidFill>
+                  <a:srgbClr val="2A2A2A"/>
                 </a:solidFill>
               </a:defRPr>
             </a:pPr>
             <a:r>
-              <a:t>Review System (DRS) for Cricket</a:t>
+              <a:t>Decision Review System (DRS) for Cricket</a:t>
             </a:r>
           </a:p>
           <a:p>
             <a:pPr algn="l">
+              <a:lnSpc>
+                <a:spcPct val="102000"/>
+              </a:lnSpc>
+              <a:spcBef>
+                <a:spcPts val="0"/>
+              </a:spcBef>
               <a:spcAft>
                 <a:spcPts val="300"/>
               </a:spcAft>
-              <a:defRPr sz="1500" b="0">
-                <a:solidFill>
-                  <a:srgbClr val="222222"/>
+              <a:defRPr sz="1400" b="0">
+                <a:solidFill>
+                  <a:srgbClr val="2A2A2A"/>
                 </a:solidFill>
               </a:defRPr>
             </a:pPr>
             <a:r>
-              <a:t>Niraj Kafle  ·  BIT 7th Semester  ·  LC0003001674</a:t>
+              <a:t>Niraj Kafle,  BIT 7th Semester,  ID LC0003001674</a:t>
             </a:r>
           </a:p>
           <a:p>
             <a:pPr algn="l">
+              <a:lnSpc>
+                <a:spcPct val="102000"/>
+              </a:lnSpc>
+              <a:spcBef>
+                <a:spcPts val="0"/>
+              </a:spcBef>
               <a:spcAft>
                 <a:spcPts val="300"/>
               </a:spcAft>
-              <a:defRPr sz="1400" b="0">
-                <a:solidFill>
-                  <a:srgbClr val="222222"/>
+              <a:defRPr sz="1300" b="0">
+                <a:solidFill>
+                  <a:srgbClr val="2A2A2A"/>
                 </a:solidFill>
               </a:defRPr>
             </a:pPr>
@@ -5727,17 +5759,23 @@
           </a:p>
           <a:p>
             <a:pPr algn="l">
-              <a:spcAft>
-                <a:spcPts val="0"/>
-              </a:spcAft>
-              <a:defRPr sz="1400" b="0">
+              <a:lnSpc>
+                <a:spcPct val="102000"/>
+              </a:lnSpc>
+              <a:spcBef>
+                <a:spcPts val="0"/>
+              </a:spcBef>
+              <a:spcAft>
+                <a:spcPts val="0"/>
+              </a:spcAft>
+              <a:defRPr sz="1300" b="0">
                 <a:solidFill>
                   <a:srgbClr val="2E6FB5"/>
                 </a:solidFill>
               </a:defRPr>
             </a:pPr>
             <a:r>
-              <a:t>Phoenix College of Management  ·  Lincoln University College</a:t>
+              <a:t>Phoenix College of Management,  Lincoln University College</a:t>
             </a:r>
           </a:p>
         </p:txBody>
@@ -5776,8 +5814,8 @@
         </p:nvSpPr>
         <p:spPr>
           <a:xfrm>
-            <a:off x="502920" y="438912"/>
-            <a:ext cx="8138160" cy="201168"/>
+            <a:off x="457200" y="384048"/>
+            <a:ext cx="8229600" cy="201168"/>
           </a:xfrm>
           <a:prstGeom prst="rect">
             <a:avLst/>
@@ -5785,12 +5823,21 @@
           <a:noFill/>
         </p:spPr>
         <p:txBody>
-          <a:bodyPr wrap="none">
+          <a:bodyPr wrap="square" anchor="t" lIns="0" rIns="0" tIns="0" bIns="0">
             <a:noAutofit/>
           </a:bodyPr>
           <a:lstStyle/>
           <a:p>
-            <a:pPr>
+            <a:pPr algn="l">
+              <a:lnSpc>
+                <a:spcPct val="104000"/>
+              </a:lnSpc>
+              <a:spcBef>
+                <a:spcPts val="0"/>
+              </a:spcBef>
+              <a:spcAft>
+                <a:spcPts val="0"/>
+              </a:spcAft>
               <a:defRPr sz="1100" b="1">
                 <a:solidFill>
                   <a:srgbClr val="2E6FB5"/>
@@ -5811,8 +5858,8 @@
         </p:nvSpPr>
         <p:spPr>
           <a:xfrm>
-            <a:off x="502920" y="640080"/>
-            <a:ext cx="8138160" cy="530352"/>
+            <a:off x="457200" y="566928"/>
+            <a:ext cx="8229600" cy="475488"/>
           </a:xfrm>
           <a:prstGeom prst="rect">
             <a:avLst/>
@@ -5820,20 +5867,29 @@
           <a:noFill/>
         </p:spPr>
         <p:txBody>
-          <a:bodyPr wrap="square" anchor="ctr">
+          <a:bodyPr wrap="square" anchor="ctr" lIns="0" rIns="0" tIns="0" bIns="0">
             <a:noAutofit/>
           </a:bodyPr>
           <a:lstStyle/>
           <a:p>
-            <a:pPr>
-              <a:defRPr sz="2400" b="1">
+            <a:pPr algn="l">
+              <a:lnSpc>
+                <a:spcPct val="104000"/>
+              </a:lnSpc>
+              <a:spcBef>
+                <a:spcPts val="0"/>
+              </a:spcBef>
+              <a:spcAft>
+                <a:spcPts val="0"/>
+              </a:spcAft>
+              <a:defRPr sz="2300" b="1">
                 <a:solidFill>
                   <a:srgbClr val="12335B"/>
                 </a:solidFill>
               </a:defRPr>
             </a:pPr>
             <a:r>
-              <a:t>Process Modeling: Data Flow Diagrams</a:t>
+              <a:t>Process Model: Data Flow Diagrams (DFD)</a:t>
             </a:r>
           </a:p>
         </p:txBody>
@@ -5846,8 +5902,8 @@
         </p:nvSpPr>
         <p:spPr>
           <a:xfrm>
-            <a:off x="502920" y="1170432"/>
-            <a:ext cx="1828800" cy="38100"/>
+            <a:off x="457200" y="1060704"/>
+            <a:ext cx="1737360" cy="38100"/>
           </a:xfrm>
           <a:prstGeom prst="rect">
             <a:avLst/>
@@ -5890,7 +5946,7 @@
         </p:nvSpPr>
         <p:spPr>
           <a:xfrm>
-            <a:off x="8001000" y="4759452"/>
+            <a:off x="8046720" y="4777740"/>
             <a:ext cx="640080" cy="274320"/>
           </a:xfrm>
           <a:prstGeom prst="rect">
@@ -5899,15 +5955,24 @@
           <a:noFill/>
         </p:spPr>
         <p:txBody>
-          <a:bodyPr wrap="none">
-            <a:spAutoFit/>
+          <a:bodyPr wrap="square" anchor="t" lIns="0" rIns="0" tIns="0" bIns="0">
+            <a:noAutofit/>
           </a:bodyPr>
           <a:lstStyle/>
           <a:p>
             <a:pPr algn="r">
-              <a:defRPr sz="900">
-                <a:solidFill>
-                  <a:srgbClr val="8A8A8A"/>
+              <a:lnSpc>
+                <a:spcPct val="104000"/>
+              </a:lnSpc>
+              <a:spcBef>
+                <a:spcPts val="0"/>
+              </a:spcBef>
+              <a:spcAft>
+                <a:spcPts val="0"/>
+              </a:spcAft>
+              <a:defRPr sz="900" b="0">
+                <a:solidFill>
+                  <a:srgbClr val="7C8690"/>
                 </a:solidFill>
               </a:defRPr>
             </a:pPr>
@@ -5933,8 +5998,8 @@
         </p:blipFill>
         <p:spPr>
           <a:xfrm>
-            <a:off x="502920" y="2332206"/>
-            <a:ext cx="3931920" cy="698543"/>
+            <a:off x="457200" y="2328145"/>
+            <a:ext cx="3977640" cy="706665"/>
           </a:xfrm>
           <a:prstGeom prst="rect">
             <a:avLst/>
@@ -5949,8 +6014,8 @@
         </p:nvSpPr>
         <p:spPr>
           <a:xfrm>
-            <a:off x="502920" y="4027932"/>
-            <a:ext cx="3931920" cy="274320"/>
+            <a:off x="457200" y="4082796"/>
+            <a:ext cx="3977640" cy="274320"/>
           </a:xfrm>
           <a:prstGeom prst="rect">
             <a:avLst/>
@@ -5958,15 +6023,24 @@
           <a:noFill/>
         </p:spPr>
         <p:txBody>
-          <a:bodyPr wrap="none">
-            <a:spAutoFit/>
+          <a:bodyPr wrap="square" anchor="t" lIns="0" rIns="0" tIns="0" bIns="0">
+            <a:noAutofit/>
           </a:bodyPr>
           <a:lstStyle/>
           <a:p>
             <a:pPr algn="ctr">
-              <a:defRPr sz="1200">
-                <a:solidFill>
-                  <a:srgbClr val="222222"/>
+              <a:lnSpc>
+                <a:spcPct val="104000"/>
+              </a:lnSpc>
+              <a:spcBef>
+                <a:spcPts val="0"/>
+              </a:spcBef>
+              <a:spcAft>
+                <a:spcPts val="0"/>
+              </a:spcAft>
+              <a:defRPr sz="1100" b="0">
+                <a:solidFill>
+                  <a:srgbClr val="7C8690"/>
                 </a:solidFill>
               </a:defRPr>
             </a:pPr>
@@ -5992,8 +6066,8 @@
         </p:blipFill>
         <p:spPr>
           <a:xfrm>
-            <a:off x="5742666" y="1335024"/>
-            <a:ext cx="1864908" cy="2692908"/>
+            <a:off x="5727531" y="1280160"/>
+            <a:ext cx="1940898" cy="2802636"/>
           </a:xfrm>
           <a:prstGeom prst="rect">
             <a:avLst/>
@@ -6008,8 +6082,8 @@
         </p:nvSpPr>
         <p:spPr>
           <a:xfrm>
-            <a:off x="4709160" y="4027932"/>
-            <a:ext cx="3931920" cy="274320"/>
+            <a:off x="4709160" y="4082796"/>
+            <a:ext cx="3977640" cy="274320"/>
           </a:xfrm>
           <a:prstGeom prst="rect">
             <a:avLst/>
@@ -6017,15 +6091,24 @@
           <a:noFill/>
         </p:spPr>
         <p:txBody>
-          <a:bodyPr wrap="none">
-            <a:spAutoFit/>
+          <a:bodyPr wrap="square" anchor="t" lIns="0" rIns="0" tIns="0" bIns="0">
+            <a:noAutofit/>
           </a:bodyPr>
           <a:lstStyle/>
           <a:p>
             <a:pPr algn="ctr">
-              <a:defRPr sz="1200">
-                <a:solidFill>
-                  <a:srgbClr val="222222"/>
+              <a:lnSpc>
+                <a:spcPct val="104000"/>
+              </a:lnSpc>
+              <a:spcBef>
+                <a:spcPts val="0"/>
+              </a:spcBef>
+              <a:spcAft>
+                <a:spcPts val="0"/>
+              </a:spcAft>
+              <a:defRPr sz="1100" b="0">
+                <a:solidFill>
+                  <a:srgbClr val="7C8690"/>
                 </a:solidFill>
               </a:defRPr>
             </a:pPr>
@@ -6069,8 +6152,8 @@
         </p:nvSpPr>
         <p:spPr>
           <a:xfrm>
-            <a:off x="502920" y="438912"/>
-            <a:ext cx="8138160" cy="201168"/>
+            <a:off x="457200" y="384048"/>
+            <a:ext cx="8229600" cy="201168"/>
           </a:xfrm>
           <a:prstGeom prst="rect">
             <a:avLst/>
@@ -6078,12 +6161,21 @@
           <a:noFill/>
         </p:spPr>
         <p:txBody>
-          <a:bodyPr wrap="none">
+          <a:bodyPr wrap="square" anchor="t" lIns="0" rIns="0" tIns="0" bIns="0">
             <a:noAutofit/>
           </a:bodyPr>
           <a:lstStyle/>
           <a:p>
-            <a:pPr>
+            <a:pPr algn="l">
+              <a:lnSpc>
+                <a:spcPct val="104000"/>
+              </a:lnSpc>
+              <a:spcBef>
+                <a:spcPts val="0"/>
+              </a:spcBef>
+              <a:spcAft>
+                <a:spcPts val="0"/>
+              </a:spcAft>
               <a:defRPr sz="1100" b="1">
                 <a:solidFill>
                   <a:srgbClr val="2E6FB5"/>
@@ -6104,8 +6196,8 @@
         </p:nvSpPr>
         <p:spPr>
           <a:xfrm>
-            <a:off x="502920" y="640080"/>
-            <a:ext cx="8138160" cy="530352"/>
+            <a:off x="457200" y="566928"/>
+            <a:ext cx="8229600" cy="475488"/>
           </a:xfrm>
           <a:prstGeom prst="rect">
             <a:avLst/>
@@ -6113,13 +6205,22 @@
           <a:noFill/>
         </p:spPr>
         <p:txBody>
-          <a:bodyPr wrap="square" anchor="ctr">
+          <a:bodyPr wrap="square" anchor="ctr" lIns="0" rIns="0" tIns="0" bIns="0">
             <a:noAutofit/>
           </a:bodyPr>
           <a:lstStyle/>
           <a:p>
-            <a:pPr>
-              <a:defRPr sz="2400" b="1">
+            <a:pPr algn="l">
+              <a:lnSpc>
+                <a:spcPct val="104000"/>
+              </a:lnSpc>
+              <a:spcBef>
+                <a:spcPts val="0"/>
+              </a:spcBef>
+              <a:spcAft>
+                <a:spcPts val="0"/>
+              </a:spcAft>
+              <a:defRPr sz="2300" b="1">
                 <a:solidFill>
                   <a:srgbClr val="12335B"/>
                 </a:solidFill>
@@ -6139,8 +6240,8 @@
         </p:nvSpPr>
         <p:spPr>
           <a:xfrm>
-            <a:off x="502920" y="1170432"/>
-            <a:ext cx="1828800" cy="38100"/>
+            <a:off x="457200" y="1060704"/>
+            <a:ext cx="1737360" cy="38100"/>
           </a:xfrm>
           <a:prstGeom prst="rect">
             <a:avLst/>
@@ -6183,7 +6284,7 @@
         </p:nvSpPr>
         <p:spPr>
           <a:xfrm>
-            <a:off x="8001000" y="4759452"/>
+            <a:off x="8046720" y="4777740"/>
             <a:ext cx="640080" cy="274320"/>
           </a:xfrm>
           <a:prstGeom prst="rect">
@@ -6192,15 +6293,24 @@
           <a:noFill/>
         </p:spPr>
         <p:txBody>
-          <a:bodyPr wrap="none">
-            <a:spAutoFit/>
+          <a:bodyPr wrap="square" anchor="t" lIns="0" rIns="0" tIns="0" bIns="0">
+            <a:noAutofit/>
           </a:bodyPr>
           <a:lstStyle/>
           <a:p>
             <a:pPr algn="r">
-              <a:defRPr sz="900">
-                <a:solidFill>
-                  <a:srgbClr val="8A8A8A"/>
+              <a:lnSpc>
+                <a:spcPct val="104000"/>
+              </a:lnSpc>
+              <a:spcBef>
+                <a:spcPts val="0"/>
+              </a:spcBef>
+              <a:spcAft>
+                <a:spcPts val="0"/>
+              </a:spcAft>
+              <a:defRPr sz="900" b="0">
+                <a:solidFill>
+                  <a:srgbClr val="7C8690"/>
                 </a:solidFill>
               </a:defRPr>
             </a:pPr>
@@ -6226,8 +6336,8 @@
         </p:blipFill>
         <p:spPr>
           <a:xfrm>
-            <a:off x="3439584" y="1335024"/>
-            <a:ext cx="2264831" cy="2967228"/>
+            <a:off x="3397708" y="1280160"/>
+            <a:ext cx="2348584" cy="3076956"/>
           </a:xfrm>
           <a:prstGeom prst="rect">
             <a:avLst/>
@@ -6268,8 +6378,8 @@
         </p:nvSpPr>
         <p:spPr>
           <a:xfrm>
-            <a:off x="502920" y="438912"/>
-            <a:ext cx="8138160" cy="201168"/>
+            <a:off x="457200" y="566928"/>
+            <a:ext cx="8229600" cy="475488"/>
           </a:xfrm>
           <a:prstGeom prst="rect">
             <a:avLst/>
@@ -6277,69 +6387,43 @@
           <a:noFill/>
         </p:spPr>
         <p:txBody>
-          <a:bodyPr wrap="none">
+          <a:bodyPr wrap="square" anchor="ctr" lIns="0" rIns="0" tIns="0" bIns="0">
             <a:noAutofit/>
           </a:bodyPr>
           <a:lstStyle/>
           <a:p>
-            <a:pPr>
-              <a:defRPr sz="1100" b="1">
-                <a:solidFill>
-                  <a:srgbClr val="2E6FB5"/>
+            <a:pPr algn="l">
+              <a:lnSpc>
+                <a:spcPct val="104000"/>
+              </a:lnSpc>
+              <a:spcBef>
+                <a:spcPts val="0"/>
+              </a:spcBef>
+              <a:spcAft>
+                <a:spcPts val="0"/>
+              </a:spcAft>
+              <a:defRPr sz="2300" b="1">
+                <a:solidFill>
+                  <a:srgbClr val="12335B"/>
                 </a:solidFill>
               </a:defRPr>
             </a:pPr>
             <a:r>
-              <a:t>ALGORITHM</a:t>
-            </a:r>
-          </a:p>
-        </p:txBody>
-      </p:sp>
-      <p:sp>
-        <p:nvSpPr>
-          <p:cNvPr id="3" name="TextBox 2"/>
-          <p:cNvSpPr txBox="1"/>
-          <p:nvPr/>
-        </p:nvSpPr>
-        <p:spPr>
-          <a:xfrm>
-            <a:off x="502920" y="640080"/>
-            <a:ext cx="8138160" cy="530352"/>
-          </a:xfrm>
-          <a:prstGeom prst="rect">
-            <a:avLst/>
-          </a:prstGeom>
-          <a:noFill/>
-        </p:spPr>
-        <p:txBody>
-          <a:bodyPr wrap="square" anchor="ctr">
-            <a:noAutofit/>
-          </a:bodyPr>
-          <a:lstStyle/>
-          <a:p>
-            <a:pPr>
-              <a:defRPr sz="2400" b="1">
-                <a:solidFill>
-                  <a:srgbClr val="12335B"/>
-                </a:solidFill>
-              </a:defRPr>
-            </a:pPr>
-            <a:r>
-              <a:t>Algorithm: The Five-Stage Pipeline</a:t>
-            </a:r>
-          </a:p>
-        </p:txBody>
-      </p:sp>
-      <p:sp>
-        <p:nvSpPr>
-          <p:cNvPr id="4" name="Rectangle 3"/>
+              <a:t>Algorithm: The Five-Step Pipeline</a:t>
+            </a:r>
+          </a:p>
+        </p:txBody>
+      </p:sp>
+      <p:sp>
+        <p:nvSpPr>
+          <p:cNvPr id="3" name="Rectangle 2"/>
           <p:cNvSpPr/>
           <p:nvPr/>
         </p:nvSpPr>
         <p:spPr>
           <a:xfrm>
-            <a:off x="502920" y="1170432"/>
-            <a:ext cx="1828800" cy="38100"/>
+            <a:off x="457200" y="1060704"/>
+            <a:ext cx="1737360" cy="38100"/>
           </a:xfrm>
           <a:prstGeom prst="rect">
             <a:avLst/>
@@ -6376,14 +6460,58 @@
       </p:sp>
       <p:sp>
         <p:nvSpPr>
+          <p:cNvPr id="4" name="TextBox 3"/>
+          <p:cNvSpPr txBox="1"/>
+          <p:nvPr/>
+        </p:nvSpPr>
+        <p:spPr>
+          <a:xfrm>
+            <a:off x="8046720" y="4777740"/>
+            <a:ext cx="640080" cy="274320"/>
+          </a:xfrm>
+          <a:prstGeom prst="rect">
+            <a:avLst/>
+          </a:prstGeom>
+          <a:noFill/>
+        </p:spPr>
+        <p:txBody>
+          <a:bodyPr wrap="square" anchor="t" lIns="0" rIns="0" tIns="0" bIns="0">
+            <a:noAutofit/>
+          </a:bodyPr>
+          <a:lstStyle/>
+          <a:p>
+            <a:pPr algn="r">
+              <a:lnSpc>
+                <a:spcPct val="104000"/>
+              </a:lnSpc>
+              <a:spcBef>
+                <a:spcPts val="0"/>
+              </a:spcBef>
+              <a:spcAft>
+                <a:spcPts val="0"/>
+              </a:spcAft>
+              <a:defRPr sz="900" b="0">
+                <a:solidFill>
+                  <a:srgbClr val="7C8690"/>
+                </a:solidFill>
+              </a:defRPr>
+            </a:pPr>
+            <a:r>
+              <a:t>12</a:t>
+            </a:r>
+          </a:p>
+        </p:txBody>
+      </p:sp>
+      <p:sp>
+        <p:nvSpPr>
           <p:cNvPr id="5" name="TextBox 4"/>
           <p:cNvSpPr txBox="1"/>
           <p:nvPr/>
         </p:nvSpPr>
         <p:spPr>
           <a:xfrm>
-            <a:off x="8001000" y="4759452"/>
-            <a:ext cx="640080" cy="274320"/>
+            <a:off x="457200" y="1280160"/>
+            <a:ext cx="8229600" cy="457200"/>
           </a:xfrm>
           <a:prstGeom prst="rect">
             <a:avLst/>
@@ -6391,72 +6519,135 @@
           <a:noFill/>
         </p:spPr>
         <p:txBody>
-          <a:bodyPr wrap="none">
-            <a:spAutoFit/>
-          </a:bodyPr>
-          <a:lstStyle/>
-          <a:p>
-            <a:pPr algn="r">
-              <a:defRPr sz="900">
-                <a:solidFill>
-                  <a:srgbClr val="8A8A8A"/>
-                </a:solidFill>
-              </a:defRPr>
-            </a:pPr>
-            <a:r>
-              <a:t>12</a:t>
-            </a:r>
-          </a:p>
-        </p:txBody>
-      </p:sp>
-      <p:sp>
-        <p:nvSpPr>
-          <p:cNvPr id="6" name="TextBox 5"/>
-          <p:cNvSpPr txBox="1"/>
-          <p:nvPr/>
-        </p:nvSpPr>
-        <p:spPr>
-          <a:xfrm>
-            <a:off x="502920" y="1335024"/>
-            <a:ext cx="8138160" cy="502920"/>
-          </a:xfrm>
-          <a:prstGeom prst="rect">
-            <a:avLst/>
-          </a:prstGeom>
-          <a:noFill/>
-        </p:spPr>
-        <p:txBody>
-          <a:bodyPr wrap="square">
+          <a:bodyPr wrap="square" anchor="ctr" lIns="0" rIns="0" tIns="0" bIns="0">
             <a:noAutofit/>
           </a:bodyPr>
           <a:lstStyle/>
           <a:p>
-            <a:pPr>
+            <a:pPr algn="l">
               <a:lnSpc>
                 <a:spcPct val="102000"/>
               </a:lnSpc>
-              <a:defRPr sz="1700" b="1">
+              <a:spcBef>
+                <a:spcPts val="0"/>
+              </a:spcBef>
+              <a:spcAft>
+                <a:spcPts val="0"/>
+              </a:spcAft>
+              <a:defRPr sz="1600" b="1">
                 <a:solidFill>
                   <a:srgbClr val="12335B"/>
                 </a:solidFill>
               </a:defRPr>
             </a:pPr>
             <a:r>
-              <a:t>Five sequential stages turn one phone clip into an LBW verdict.</a:t>
-            </a:r>
-          </a:p>
-        </p:txBody>
-      </p:sp>
-      <p:sp>
-        <p:nvSpPr>
-          <p:cNvPr id="7" name="TextBox 6"/>
+              <a:t>Five steps turn one phone clip into an LBW verdict.</a:t>
+            </a:r>
+          </a:p>
+        </p:txBody>
+      </p:sp>
+      <p:sp>
+        <p:nvSpPr>
+          <p:cNvPr id="6" name="Rounded Rectangle 5"/>
+          <p:cNvSpPr/>
+          <p:nvPr/>
+        </p:nvSpPr>
+        <p:spPr>
+          <a:xfrm>
+            <a:off x="457200" y="2155698"/>
+            <a:ext cx="1528876" cy="1965960"/>
+          </a:xfrm>
+          <a:prstGeom prst="roundRect">
+            <a:avLst>
+              <a:gd name="adj" fmla="val 8000"/>
+            </a:avLst>
+          </a:prstGeom>
+          <a:solidFill>
+            <a:srgbClr val="F1F5FA"/>
+          </a:solidFill>
+          <a:ln w="9525">
+            <a:solidFill>
+              <a:srgbClr val="D7E0EC"/>
+            </a:solidFill>
+          </a:ln>
+          <a:effectLst/>
+        </p:spPr>
+        <p:style>
+          <a:lnRef idx="1">
+            <a:schemeClr val="accent1"/>
+          </a:lnRef>
+          <a:fillRef idx="3">
+            <a:schemeClr val="accent1"/>
+          </a:fillRef>
+          <a:effectRef idx="2">
+            <a:schemeClr val="accent1"/>
+          </a:effectRef>
+          <a:fontRef idx="minor">
+            <a:schemeClr val="lt1"/>
+          </a:fontRef>
+        </p:style>
+        <p:txBody>
+          <a:bodyPr rtlCol="0" anchor="ctr"/>
+          <a:lstStyle/>
+          <a:p>
+            <a:pPr algn="ctr"/>
+          </a:p>
+        </p:txBody>
+      </p:sp>
+      <p:sp>
+        <p:nvSpPr>
+          <p:cNvPr id="7" name="Oval 6"/>
+          <p:cNvSpPr/>
+          <p:nvPr/>
+        </p:nvSpPr>
+        <p:spPr>
+          <a:xfrm>
+            <a:off x="1029614" y="2356866"/>
+            <a:ext cx="384048" cy="384048"/>
+          </a:xfrm>
+          <a:prstGeom prst="ellipse">
+            <a:avLst/>
+          </a:prstGeom>
+          <a:solidFill>
+            <a:srgbClr val="2E6FB5"/>
+          </a:solidFill>
+          <a:ln>
+            <a:noFill/>
+          </a:ln>
+          <a:effectLst/>
+        </p:spPr>
+        <p:style>
+          <a:lnRef idx="1">
+            <a:schemeClr val="accent1"/>
+          </a:lnRef>
+          <a:fillRef idx="3">
+            <a:schemeClr val="accent1"/>
+          </a:fillRef>
+          <a:effectRef idx="2">
+            <a:schemeClr val="accent1"/>
+          </a:effectRef>
+          <a:fontRef idx="minor">
+            <a:schemeClr val="lt1"/>
+          </a:fontRef>
+        </p:style>
+        <p:txBody>
+          <a:bodyPr rtlCol="0" anchor="ctr"/>
+          <a:lstStyle/>
+          <a:p>
+            <a:pPr algn="ctr"/>
+          </a:p>
+        </p:txBody>
+      </p:sp>
+      <p:sp>
+        <p:nvSpPr>
+          <p:cNvPr id="8" name="TextBox 7"/>
           <p:cNvSpPr txBox="1"/>
           <p:nvPr/>
         </p:nvSpPr>
         <p:spPr>
           <a:xfrm>
-            <a:off x="502920" y="1847088"/>
-            <a:ext cx="8138160" cy="2455164"/>
+            <a:off x="1029614" y="2356866"/>
+            <a:ext cx="384048" cy="384048"/>
           </a:xfrm>
           <a:prstGeom prst="rect">
             <a:avLst/>
@@ -6464,98 +6655,1074 @@
           <a:noFill/>
         </p:spPr>
         <p:txBody>
-          <a:bodyPr wrap="square">
-            <a:normAutofit/>
+          <a:bodyPr wrap="square" anchor="ctr" lIns="0" rIns="0" tIns="0" bIns="0">
+            <a:noAutofit/>
           </a:bodyPr>
           <a:lstStyle/>
           <a:p>
-            <a:pPr>
+            <a:pPr algn="ctr">
               <a:lnSpc>
                 <a:spcPct val="104000"/>
               </a:lnSpc>
-              <a:spcAft>
-                <a:spcPts val="600"/>
-              </a:spcAft>
-              <a:defRPr sz="1400">
-                <a:solidFill>
-                  <a:srgbClr val="222222"/>
+              <a:spcBef>
+                <a:spcPts val="0"/>
+              </a:spcBef>
+              <a:spcAft>
+                <a:spcPts val="0"/>
+              </a:spcAft>
+              <a:defRPr sz="1600" b="1">
+                <a:solidFill>
+                  <a:srgbClr val="FFFFFF"/>
                 </a:solidFill>
               </a:defRPr>
             </a:pPr>
             <a:r>
-              <a:t>• Stage 1 — Calibration: the marked stumps anchor solvePnP to recover the camera pose (sub-pixel on synthetic input; higher on real handheld clips).</a:t>
-            </a:r>
-          </a:p>
-          <a:p>
-            <a:pPr>
+              <a:t>1</a:t>
+            </a:r>
+          </a:p>
+        </p:txBody>
+      </p:sp>
+      <p:sp>
+        <p:nvSpPr>
+          <p:cNvPr id="9" name="TextBox 8"/>
+          <p:cNvSpPr txBox="1"/>
+          <p:nvPr/>
+        </p:nvSpPr>
+        <p:spPr>
+          <a:xfrm>
+            <a:off x="548640" y="2832354"/>
+            <a:ext cx="1345996" cy="1216152"/>
+          </a:xfrm>
+          <a:prstGeom prst="rect">
+            <a:avLst/>
+          </a:prstGeom>
+          <a:noFill/>
+        </p:spPr>
+        <p:txBody>
+          <a:bodyPr wrap="square" anchor="ctr" lIns="0" rIns="0" tIns="0" bIns="0">
+            <a:noAutofit/>
+          </a:bodyPr>
+          <a:lstStyle/>
+          <a:p>
+            <a:pPr algn="ctr">
+              <a:lnSpc>
+                <a:spcPct val="100000"/>
+              </a:lnSpc>
+              <a:spcBef>
+                <a:spcPts val="0"/>
+              </a:spcBef>
+              <a:spcAft>
+                <a:spcPts val="400"/>
+              </a:spcAft>
+              <a:defRPr sz="1250" b="1">
+                <a:solidFill>
+                  <a:srgbClr val="12335B"/>
+                </a:solidFill>
+              </a:defRPr>
+            </a:pPr>
+            <a:r>
+              <a:t>Calibrate</a:t>
+            </a:r>
+          </a:p>
+          <a:p>
+            <a:pPr algn="ctr">
+              <a:lnSpc>
+                <a:spcPct val="106000"/>
+              </a:lnSpc>
+              <a:spcBef>
+                <a:spcPts val="0"/>
+              </a:spcBef>
+              <a:spcAft>
+                <a:spcPts val="0"/>
+              </a:spcAft>
+              <a:defRPr sz="1050" b="0">
+                <a:solidFill>
+                  <a:srgbClr val="2A2A2A"/>
+                </a:solidFill>
+              </a:defRPr>
+            </a:pPr>
+            <a:r>
+              <a:t>Marked stumps reveal the camera position (PnP).</a:t>
+            </a:r>
+          </a:p>
+        </p:txBody>
+      </p:sp>
+      <p:sp>
+        <p:nvSpPr>
+          <p:cNvPr id="10" name="TextBox 9"/>
+          <p:cNvSpPr txBox="1"/>
+          <p:nvPr/>
+        </p:nvSpPr>
+        <p:spPr>
+          <a:xfrm>
+            <a:off x="1967788" y="2155698"/>
+            <a:ext cx="182880" cy="1965960"/>
+          </a:xfrm>
+          <a:prstGeom prst="rect">
+            <a:avLst/>
+          </a:prstGeom>
+          <a:noFill/>
+        </p:spPr>
+        <p:txBody>
+          <a:bodyPr wrap="square" anchor="ctr" lIns="0" rIns="0" tIns="0" bIns="0">
+            <a:noAutofit/>
+          </a:bodyPr>
+          <a:lstStyle/>
+          <a:p>
+            <a:pPr algn="ctr">
               <a:lnSpc>
                 <a:spcPct val="104000"/>
               </a:lnSpc>
-              <a:spcAft>
-                <a:spcPts val="600"/>
-              </a:spcAft>
-              <a:defRPr sz="1400">
-                <a:solidFill>
-                  <a:srgbClr val="222222"/>
+              <a:spcBef>
+                <a:spcPts val="0"/>
+              </a:spcBef>
+              <a:spcAft>
+                <a:spcPts val="0"/>
+              </a:spcAft>
+              <a:defRPr sz="2000" b="1">
+                <a:solidFill>
+                  <a:srgbClr val="2E6FB5"/>
                 </a:solidFill>
               </a:defRPr>
             </a:pPr>
             <a:r>
-              <a:t>• Stage 2 — Ball detection: MOG2 motion + HSV colour + a YOLO detector isolate the ball in each frame.</a:t>
-            </a:r>
-          </a:p>
-          <a:p>
-            <a:pPr>
+              <a:t>›</a:t>
+            </a:r>
+          </a:p>
+        </p:txBody>
+      </p:sp>
+      <p:sp>
+        <p:nvSpPr>
+          <p:cNvPr id="11" name="Rounded Rectangle 10"/>
+          <p:cNvSpPr/>
+          <p:nvPr/>
+        </p:nvSpPr>
+        <p:spPr>
+          <a:xfrm>
+            <a:off x="2132380" y="2155698"/>
+            <a:ext cx="1528876" cy="1965960"/>
+          </a:xfrm>
+          <a:prstGeom prst="roundRect">
+            <a:avLst>
+              <a:gd name="adj" fmla="val 8000"/>
+            </a:avLst>
+          </a:prstGeom>
+          <a:solidFill>
+            <a:srgbClr val="F1F5FA"/>
+          </a:solidFill>
+          <a:ln w="9525">
+            <a:solidFill>
+              <a:srgbClr val="D7E0EC"/>
+            </a:solidFill>
+          </a:ln>
+          <a:effectLst/>
+        </p:spPr>
+        <p:style>
+          <a:lnRef idx="1">
+            <a:schemeClr val="accent1"/>
+          </a:lnRef>
+          <a:fillRef idx="3">
+            <a:schemeClr val="accent1"/>
+          </a:fillRef>
+          <a:effectRef idx="2">
+            <a:schemeClr val="accent1"/>
+          </a:effectRef>
+          <a:fontRef idx="minor">
+            <a:schemeClr val="lt1"/>
+          </a:fontRef>
+        </p:style>
+        <p:txBody>
+          <a:bodyPr rtlCol="0" anchor="ctr"/>
+          <a:lstStyle/>
+          <a:p>
+            <a:pPr algn="ctr"/>
+          </a:p>
+        </p:txBody>
+      </p:sp>
+      <p:sp>
+        <p:nvSpPr>
+          <p:cNvPr id="12" name="Oval 11"/>
+          <p:cNvSpPr/>
+          <p:nvPr/>
+        </p:nvSpPr>
+        <p:spPr>
+          <a:xfrm>
+            <a:off x="2704794" y="2356866"/>
+            <a:ext cx="384048" cy="384048"/>
+          </a:xfrm>
+          <a:prstGeom prst="ellipse">
+            <a:avLst/>
+          </a:prstGeom>
+          <a:solidFill>
+            <a:srgbClr val="2E6FB5"/>
+          </a:solidFill>
+          <a:ln>
+            <a:noFill/>
+          </a:ln>
+          <a:effectLst/>
+        </p:spPr>
+        <p:style>
+          <a:lnRef idx="1">
+            <a:schemeClr val="accent1"/>
+          </a:lnRef>
+          <a:fillRef idx="3">
+            <a:schemeClr val="accent1"/>
+          </a:fillRef>
+          <a:effectRef idx="2">
+            <a:schemeClr val="accent1"/>
+          </a:effectRef>
+          <a:fontRef idx="minor">
+            <a:schemeClr val="lt1"/>
+          </a:fontRef>
+        </p:style>
+        <p:txBody>
+          <a:bodyPr rtlCol="0" anchor="ctr"/>
+          <a:lstStyle/>
+          <a:p>
+            <a:pPr algn="ctr"/>
+          </a:p>
+        </p:txBody>
+      </p:sp>
+      <p:sp>
+        <p:nvSpPr>
+          <p:cNvPr id="13" name="TextBox 12"/>
+          <p:cNvSpPr txBox="1"/>
+          <p:nvPr/>
+        </p:nvSpPr>
+        <p:spPr>
+          <a:xfrm>
+            <a:off x="2704794" y="2356866"/>
+            <a:ext cx="384048" cy="384048"/>
+          </a:xfrm>
+          <a:prstGeom prst="rect">
+            <a:avLst/>
+          </a:prstGeom>
+          <a:noFill/>
+        </p:spPr>
+        <p:txBody>
+          <a:bodyPr wrap="square" anchor="ctr" lIns="0" rIns="0" tIns="0" bIns="0">
+            <a:noAutofit/>
+          </a:bodyPr>
+          <a:lstStyle/>
+          <a:p>
+            <a:pPr algn="ctr">
               <a:lnSpc>
                 <a:spcPct val="104000"/>
               </a:lnSpc>
-              <a:spcAft>
-                <a:spcPts val="600"/>
-              </a:spcAft>
-              <a:defRPr sz="1400">
-                <a:solidFill>
-                  <a:srgbClr val="222222"/>
+              <a:spcBef>
+                <a:spcPts val="0"/>
+              </a:spcBef>
+              <a:spcAft>
+                <a:spcPts val="0"/>
+              </a:spcAft>
+              <a:defRPr sz="1600" b="1">
+                <a:solidFill>
+                  <a:srgbClr val="FFFFFF"/>
                 </a:solidFill>
               </a:defRPr>
             </a:pPr>
             <a:r>
-              <a:t>• Stage 3 — Trajectory linking: a two-pass RANSAC fits one smooth parabola through the bounce and rejects clutter.</a:t>
-            </a:r>
-          </a:p>
-          <a:p>
-            <a:pPr>
+              <a:t>2</a:t>
+            </a:r>
+          </a:p>
+        </p:txBody>
+      </p:sp>
+      <p:sp>
+        <p:nvSpPr>
+          <p:cNvPr id="14" name="TextBox 13"/>
+          <p:cNvSpPr txBox="1"/>
+          <p:nvPr/>
+        </p:nvSpPr>
+        <p:spPr>
+          <a:xfrm>
+            <a:off x="2223820" y="2832354"/>
+            <a:ext cx="1345996" cy="1216152"/>
+          </a:xfrm>
+          <a:prstGeom prst="rect">
+            <a:avLst/>
+          </a:prstGeom>
+          <a:noFill/>
+        </p:spPr>
+        <p:txBody>
+          <a:bodyPr wrap="square" anchor="ctr" lIns="0" rIns="0" tIns="0" bIns="0">
+            <a:noAutofit/>
+          </a:bodyPr>
+          <a:lstStyle/>
+          <a:p>
+            <a:pPr algn="ctr">
+              <a:lnSpc>
+                <a:spcPct val="100000"/>
+              </a:lnSpc>
+              <a:spcBef>
+                <a:spcPts val="0"/>
+              </a:spcBef>
+              <a:spcAft>
+                <a:spcPts val="400"/>
+              </a:spcAft>
+              <a:defRPr sz="1250" b="1">
+                <a:solidFill>
+                  <a:srgbClr val="12335B"/>
+                </a:solidFill>
+              </a:defRPr>
+            </a:pPr>
+            <a:r>
+              <a:t>Detect</a:t>
+            </a:r>
+          </a:p>
+          <a:p>
+            <a:pPr algn="ctr">
+              <a:lnSpc>
+                <a:spcPct val="106000"/>
+              </a:lnSpc>
+              <a:spcBef>
+                <a:spcPts val="0"/>
+              </a:spcBef>
+              <a:spcAft>
+                <a:spcPts val="0"/>
+              </a:spcAft>
+              <a:defRPr sz="1050" b="0">
+                <a:solidFill>
+                  <a:srgbClr val="2A2A2A"/>
+                </a:solidFill>
+              </a:defRPr>
+            </a:pPr>
+            <a:r>
+              <a:t>Find the ball each frame: motion, colour, YOLO.</a:t>
+            </a:r>
+          </a:p>
+        </p:txBody>
+      </p:sp>
+      <p:sp>
+        <p:nvSpPr>
+          <p:cNvPr id="15" name="TextBox 14"/>
+          <p:cNvSpPr txBox="1"/>
+          <p:nvPr/>
+        </p:nvSpPr>
+        <p:spPr>
+          <a:xfrm>
+            <a:off x="3642968" y="2155698"/>
+            <a:ext cx="182880" cy="1965960"/>
+          </a:xfrm>
+          <a:prstGeom prst="rect">
+            <a:avLst/>
+          </a:prstGeom>
+          <a:noFill/>
+        </p:spPr>
+        <p:txBody>
+          <a:bodyPr wrap="square" anchor="ctr" lIns="0" rIns="0" tIns="0" bIns="0">
+            <a:noAutofit/>
+          </a:bodyPr>
+          <a:lstStyle/>
+          <a:p>
+            <a:pPr algn="ctr">
               <a:lnSpc>
                 <a:spcPct val="104000"/>
               </a:lnSpc>
-              <a:spcAft>
-                <a:spcPts val="600"/>
-              </a:spcAft>
-              <a:defRPr sz="1400">
-                <a:solidFill>
-                  <a:srgbClr val="222222"/>
+              <a:spcBef>
+                <a:spcPts val="0"/>
+              </a:spcBef>
+              <a:spcAft>
+                <a:spcPts val="0"/>
+              </a:spcAft>
+              <a:defRPr sz="2000" b="1">
+                <a:solidFill>
+                  <a:srgbClr val="2E6FB5"/>
                 </a:solidFill>
               </a:defRPr>
             </a:pPr>
             <a:r>
-              <a:t>• Stage 4 — 3D reconstruction: a gravity-constrained projectile fit lifts the 2D track to a real-world 3D arc.</a:t>
-            </a:r>
-          </a:p>
-          <a:p>
-            <a:pPr>
+              <a:t>›</a:t>
+            </a:r>
+          </a:p>
+        </p:txBody>
+      </p:sp>
+      <p:sp>
+        <p:nvSpPr>
+          <p:cNvPr id="16" name="Rounded Rectangle 15"/>
+          <p:cNvSpPr/>
+          <p:nvPr/>
+        </p:nvSpPr>
+        <p:spPr>
+          <a:xfrm>
+            <a:off x="3807560" y="2155698"/>
+            <a:ext cx="1528876" cy="1965960"/>
+          </a:xfrm>
+          <a:prstGeom prst="roundRect">
+            <a:avLst>
+              <a:gd name="adj" fmla="val 8000"/>
+            </a:avLst>
+          </a:prstGeom>
+          <a:solidFill>
+            <a:srgbClr val="F1F5FA"/>
+          </a:solidFill>
+          <a:ln w="9525">
+            <a:solidFill>
+              <a:srgbClr val="D7E0EC"/>
+            </a:solidFill>
+          </a:ln>
+          <a:effectLst/>
+        </p:spPr>
+        <p:style>
+          <a:lnRef idx="1">
+            <a:schemeClr val="accent1"/>
+          </a:lnRef>
+          <a:fillRef idx="3">
+            <a:schemeClr val="accent1"/>
+          </a:fillRef>
+          <a:effectRef idx="2">
+            <a:schemeClr val="accent1"/>
+          </a:effectRef>
+          <a:fontRef idx="minor">
+            <a:schemeClr val="lt1"/>
+          </a:fontRef>
+        </p:style>
+        <p:txBody>
+          <a:bodyPr rtlCol="0" anchor="ctr"/>
+          <a:lstStyle/>
+          <a:p>
+            <a:pPr algn="ctr"/>
+          </a:p>
+        </p:txBody>
+      </p:sp>
+      <p:sp>
+        <p:nvSpPr>
+          <p:cNvPr id="17" name="Oval 16"/>
+          <p:cNvSpPr/>
+          <p:nvPr/>
+        </p:nvSpPr>
+        <p:spPr>
+          <a:xfrm>
+            <a:off x="4379974" y="2356866"/>
+            <a:ext cx="384048" cy="384048"/>
+          </a:xfrm>
+          <a:prstGeom prst="ellipse">
+            <a:avLst/>
+          </a:prstGeom>
+          <a:solidFill>
+            <a:srgbClr val="2E6FB5"/>
+          </a:solidFill>
+          <a:ln>
+            <a:noFill/>
+          </a:ln>
+          <a:effectLst/>
+        </p:spPr>
+        <p:style>
+          <a:lnRef idx="1">
+            <a:schemeClr val="accent1"/>
+          </a:lnRef>
+          <a:fillRef idx="3">
+            <a:schemeClr val="accent1"/>
+          </a:fillRef>
+          <a:effectRef idx="2">
+            <a:schemeClr val="accent1"/>
+          </a:effectRef>
+          <a:fontRef idx="minor">
+            <a:schemeClr val="lt1"/>
+          </a:fontRef>
+        </p:style>
+        <p:txBody>
+          <a:bodyPr rtlCol="0" anchor="ctr"/>
+          <a:lstStyle/>
+          <a:p>
+            <a:pPr algn="ctr"/>
+          </a:p>
+        </p:txBody>
+      </p:sp>
+      <p:sp>
+        <p:nvSpPr>
+          <p:cNvPr id="18" name="TextBox 17"/>
+          <p:cNvSpPr txBox="1"/>
+          <p:nvPr/>
+        </p:nvSpPr>
+        <p:spPr>
+          <a:xfrm>
+            <a:off x="4379974" y="2356866"/>
+            <a:ext cx="384048" cy="384048"/>
+          </a:xfrm>
+          <a:prstGeom prst="rect">
+            <a:avLst/>
+          </a:prstGeom>
+          <a:noFill/>
+        </p:spPr>
+        <p:txBody>
+          <a:bodyPr wrap="square" anchor="ctr" lIns="0" rIns="0" tIns="0" bIns="0">
+            <a:noAutofit/>
+          </a:bodyPr>
+          <a:lstStyle/>
+          <a:p>
+            <a:pPr algn="ctr">
               <a:lnSpc>
                 <a:spcPct val="104000"/>
               </a:lnSpc>
-              <a:spcAft>
-                <a:spcPts val="600"/>
-              </a:spcAft>
-              <a:defRPr sz="1400">
-                <a:solidFill>
-                  <a:srgbClr val="222222"/>
+              <a:spcBef>
+                <a:spcPts val="0"/>
+              </a:spcBef>
+              <a:spcAft>
+                <a:spcPts val="0"/>
+              </a:spcAft>
+              <a:defRPr sz="1600" b="1">
+                <a:solidFill>
+                  <a:srgbClr val="FFFFFF"/>
                 </a:solidFill>
               </a:defRPr>
             </a:pPr>
             <a:r>
-              <a:t>• Stage 5 — LBW decision: ICC Rule 36 — pitching, impact, wickets — give out / not out / umpire's call.</a:t>
+              <a:t>3</a:t>
+            </a:r>
+          </a:p>
+        </p:txBody>
+      </p:sp>
+      <p:sp>
+        <p:nvSpPr>
+          <p:cNvPr id="19" name="TextBox 18"/>
+          <p:cNvSpPr txBox="1"/>
+          <p:nvPr/>
+        </p:nvSpPr>
+        <p:spPr>
+          <a:xfrm>
+            <a:off x="3899000" y="2832354"/>
+            <a:ext cx="1345996" cy="1216152"/>
+          </a:xfrm>
+          <a:prstGeom prst="rect">
+            <a:avLst/>
+          </a:prstGeom>
+          <a:noFill/>
+        </p:spPr>
+        <p:txBody>
+          <a:bodyPr wrap="square" anchor="ctr" lIns="0" rIns="0" tIns="0" bIns="0">
+            <a:noAutofit/>
+          </a:bodyPr>
+          <a:lstStyle/>
+          <a:p>
+            <a:pPr algn="ctr">
+              <a:lnSpc>
+                <a:spcPct val="100000"/>
+              </a:lnSpc>
+              <a:spcBef>
+                <a:spcPts val="0"/>
+              </a:spcBef>
+              <a:spcAft>
+                <a:spcPts val="400"/>
+              </a:spcAft>
+              <a:defRPr sz="1250" b="1">
+                <a:solidFill>
+                  <a:srgbClr val="12335B"/>
+                </a:solidFill>
+              </a:defRPr>
+            </a:pPr>
+            <a:r>
+              <a:t>Link</a:t>
+            </a:r>
+          </a:p>
+          <a:p>
+            <a:pPr algn="ctr">
+              <a:lnSpc>
+                <a:spcPct val="106000"/>
+              </a:lnSpc>
+              <a:spcBef>
+                <a:spcPts val="0"/>
+              </a:spcBef>
+              <a:spcAft>
+                <a:spcPts val="0"/>
+              </a:spcAft>
+              <a:defRPr sz="1050" b="0">
+                <a:solidFill>
+                  <a:srgbClr val="2A2A2A"/>
+                </a:solidFill>
+              </a:defRPr>
+            </a:pPr>
+            <a:r>
+              <a:t>RANSAC fits one curve, drops false detections.</a:t>
+            </a:r>
+          </a:p>
+        </p:txBody>
+      </p:sp>
+      <p:sp>
+        <p:nvSpPr>
+          <p:cNvPr id="20" name="TextBox 19"/>
+          <p:cNvSpPr txBox="1"/>
+          <p:nvPr/>
+        </p:nvSpPr>
+        <p:spPr>
+          <a:xfrm>
+            <a:off x="5318148" y="2155698"/>
+            <a:ext cx="182880" cy="1965960"/>
+          </a:xfrm>
+          <a:prstGeom prst="rect">
+            <a:avLst/>
+          </a:prstGeom>
+          <a:noFill/>
+        </p:spPr>
+        <p:txBody>
+          <a:bodyPr wrap="square" anchor="ctr" lIns="0" rIns="0" tIns="0" bIns="0">
+            <a:noAutofit/>
+          </a:bodyPr>
+          <a:lstStyle/>
+          <a:p>
+            <a:pPr algn="ctr">
+              <a:lnSpc>
+                <a:spcPct val="104000"/>
+              </a:lnSpc>
+              <a:spcBef>
+                <a:spcPts val="0"/>
+              </a:spcBef>
+              <a:spcAft>
+                <a:spcPts val="0"/>
+              </a:spcAft>
+              <a:defRPr sz="2000" b="1">
+                <a:solidFill>
+                  <a:srgbClr val="2E6FB5"/>
+                </a:solidFill>
+              </a:defRPr>
+            </a:pPr>
+            <a:r>
+              <a:t>›</a:t>
+            </a:r>
+          </a:p>
+        </p:txBody>
+      </p:sp>
+      <p:sp>
+        <p:nvSpPr>
+          <p:cNvPr id="21" name="Rounded Rectangle 20"/>
+          <p:cNvSpPr/>
+          <p:nvPr/>
+        </p:nvSpPr>
+        <p:spPr>
+          <a:xfrm>
+            <a:off x="5482740" y="2155698"/>
+            <a:ext cx="1528876" cy="1965960"/>
+          </a:xfrm>
+          <a:prstGeom prst="roundRect">
+            <a:avLst>
+              <a:gd name="adj" fmla="val 8000"/>
+            </a:avLst>
+          </a:prstGeom>
+          <a:solidFill>
+            <a:srgbClr val="F1F5FA"/>
+          </a:solidFill>
+          <a:ln w="9525">
+            <a:solidFill>
+              <a:srgbClr val="D7E0EC"/>
+            </a:solidFill>
+          </a:ln>
+          <a:effectLst/>
+        </p:spPr>
+        <p:style>
+          <a:lnRef idx="1">
+            <a:schemeClr val="accent1"/>
+          </a:lnRef>
+          <a:fillRef idx="3">
+            <a:schemeClr val="accent1"/>
+          </a:fillRef>
+          <a:effectRef idx="2">
+            <a:schemeClr val="accent1"/>
+          </a:effectRef>
+          <a:fontRef idx="minor">
+            <a:schemeClr val="lt1"/>
+          </a:fontRef>
+        </p:style>
+        <p:txBody>
+          <a:bodyPr rtlCol="0" anchor="ctr"/>
+          <a:lstStyle/>
+          <a:p>
+            <a:pPr algn="ctr"/>
+          </a:p>
+        </p:txBody>
+      </p:sp>
+      <p:sp>
+        <p:nvSpPr>
+          <p:cNvPr id="22" name="Oval 21"/>
+          <p:cNvSpPr/>
+          <p:nvPr/>
+        </p:nvSpPr>
+        <p:spPr>
+          <a:xfrm>
+            <a:off x="6055154" y="2356866"/>
+            <a:ext cx="384048" cy="384048"/>
+          </a:xfrm>
+          <a:prstGeom prst="ellipse">
+            <a:avLst/>
+          </a:prstGeom>
+          <a:solidFill>
+            <a:srgbClr val="2E6FB5"/>
+          </a:solidFill>
+          <a:ln>
+            <a:noFill/>
+          </a:ln>
+          <a:effectLst/>
+        </p:spPr>
+        <p:style>
+          <a:lnRef idx="1">
+            <a:schemeClr val="accent1"/>
+          </a:lnRef>
+          <a:fillRef idx="3">
+            <a:schemeClr val="accent1"/>
+          </a:fillRef>
+          <a:effectRef idx="2">
+            <a:schemeClr val="accent1"/>
+          </a:effectRef>
+          <a:fontRef idx="minor">
+            <a:schemeClr val="lt1"/>
+          </a:fontRef>
+        </p:style>
+        <p:txBody>
+          <a:bodyPr rtlCol="0" anchor="ctr"/>
+          <a:lstStyle/>
+          <a:p>
+            <a:pPr algn="ctr"/>
+          </a:p>
+        </p:txBody>
+      </p:sp>
+      <p:sp>
+        <p:nvSpPr>
+          <p:cNvPr id="23" name="TextBox 22"/>
+          <p:cNvSpPr txBox="1"/>
+          <p:nvPr/>
+        </p:nvSpPr>
+        <p:spPr>
+          <a:xfrm>
+            <a:off x="6055154" y="2356866"/>
+            <a:ext cx="384048" cy="384048"/>
+          </a:xfrm>
+          <a:prstGeom prst="rect">
+            <a:avLst/>
+          </a:prstGeom>
+          <a:noFill/>
+        </p:spPr>
+        <p:txBody>
+          <a:bodyPr wrap="square" anchor="ctr" lIns="0" rIns="0" tIns="0" bIns="0">
+            <a:noAutofit/>
+          </a:bodyPr>
+          <a:lstStyle/>
+          <a:p>
+            <a:pPr algn="ctr">
+              <a:lnSpc>
+                <a:spcPct val="104000"/>
+              </a:lnSpc>
+              <a:spcBef>
+                <a:spcPts val="0"/>
+              </a:spcBef>
+              <a:spcAft>
+                <a:spcPts val="0"/>
+              </a:spcAft>
+              <a:defRPr sz="1600" b="1">
+                <a:solidFill>
+                  <a:srgbClr val="FFFFFF"/>
+                </a:solidFill>
+              </a:defRPr>
+            </a:pPr>
+            <a:r>
+              <a:t>4</a:t>
+            </a:r>
+          </a:p>
+        </p:txBody>
+      </p:sp>
+      <p:sp>
+        <p:nvSpPr>
+          <p:cNvPr id="24" name="TextBox 23"/>
+          <p:cNvSpPr txBox="1"/>
+          <p:nvPr/>
+        </p:nvSpPr>
+        <p:spPr>
+          <a:xfrm>
+            <a:off x="5574180" y="2832354"/>
+            <a:ext cx="1345996" cy="1216152"/>
+          </a:xfrm>
+          <a:prstGeom prst="rect">
+            <a:avLst/>
+          </a:prstGeom>
+          <a:noFill/>
+        </p:spPr>
+        <p:txBody>
+          <a:bodyPr wrap="square" anchor="ctr" lIns="0" rIns="0" tIns="0" bIns="0">
+            <a:noAutofit/>
+          </a:bodyPr>
+          <a:lstStyle/>
+          <a:p>
+            <a:pPr algn="ctr">
+              <a:lnSpc>
+                <a:spcPct val="100000"/>
+              </a:lnSpc>
+              <a:spcBef>
+                <a:spcPts val="0"/>
+              </a:spcBef>
+              <a:spcAft>
+                <a:spcPts val="400"/>
+              </a:spcAft>
+              <a:defRPr sz="1250" b="1">
+                <a:solidFill>
+                  <a:srgbClr val="12335B"/>
+                </a:solidFill>
+              </a:defRPr>
+            </a:pPr>
+            <a:r>
+              <a:t>Reconstruct</a:t>
+            </a:r>
+          </a:p>
+          <a:p>
+            <a:pPr algn="ctr">
+              <a:lnSpc>
+                <a:spcPct val="106000"/>
+              </a:lnSpc>
+              <a:spcBef>
+                <a:spcPts val="0"/>
+              </a:spcBef>
+              <a:spcAft>
+                <a:spcPts val="0"/>
+              </a:spcAft>
+              <a:defRPr sz="1050" b="0">
+                <a:solidFill>
+                  <a:srgbClr val="2A2A2A"/>
+                </a:solidFill>
+              </a:defRPr>
+            </a:pPr>
+            <a:r>
+              <a:t>Gravity-based fit lifts the track to a 3D arc.</a:t>
+            </a:r>
+          </a:p>
+        </p:txBody>
+      </p:sp>
+      <p:sp>
+        <p:nvSpPr>
+          <p:cNvPr id="25" name="TextBox 24"/>
+          <p:cNvSpPr txBox="1"/>
+          <p:nvPr/>
+        </p:nvSpPr>
+        <p:spPr>
+          <a:xfrm>
+            <a:off x="6993328" y="2155698"/>
+            <a:ext cx="182880" cy="1965960"/>
+          </a:xfrm>
+          <a:prstGeom prst="rect">
+            <a:avLst/>
+          </a:prstGeom>
+          <a:noFill/>
+        </p:spPr>
+        <p:txBody>
+          <a:bodyPr wrap="square" anchor="ctr" lIns="0" rIns="0" tIns="0" bIns="0">
+            <a:noAutofit/>
+          </a:bodyPr>
+          <a:lstStyle/>
+          <a:p>
+            <a:pPr algn="ctr">
+              <a:lnSpc>
+                <a:spcPct val="104000"/>
+              </a:lnSpc>
+              <a:spcBef>
+                <a:spcPts val="0"/>
+              </a:spcBef>
+              <a:spcAft>
+                <a:spcPts val="0"/>
+              </a:spcAft>
+              <a:defRPr sz="2000" b="1">
+                <a:solidFill>
+                  <a:srgbClr val="2E6FB5"/>
+                </a:solidFill>
+              </a:defRPr>
+            </a:pPr>
+            <a:r>
+              <a:t>›</a:t>
+            </a:r>
+          </a:p>
+        </p:txBody>
+      </p:sp>
+      <p:sp>
+        <p:nvSpPr>
+          <p:cNvPr id="26" name="Rounded Rectangle 25"/>
+          <p:cNvSpPr/>
+          <p:nvPr/>
+        </p:nvSpPr>
+        <p:spPr>
+          <a:xfrm>
+            <a:off x="7157920" y="2155698"/>
+            <a:ext cx="1528876" cy="1965960"/>
+          </a:xfrm>
+          <a:prstGeom prst="roundRect">
+            <a:avLst>
+              <a:gd name="adj" fmla="val 8000"/>
+            </a:avLst>
+          </a:prstGeom>
+          <a:solidFill>
+            <a:srgbClr val="F1F5FA"/>
+          </a:solidFill>
+          <a:ln w="9525">
+            <a:solidFill>
+              <a:srgbClr val="D7E0EC"/>
+            </a:solidFill>
+          </a:ln>
+          <a:effectLst/>
+        </p:spPr>
+        <p:style>
+          <a:lnRef idx="1">
+            <a:schemeClr val="accent1"/>
+          </a:lnRef>
+          <a:fillRef idx="3">
+            <a:schemeClr val="accent1"/>
+          </a:fillRef>
+          <a:effectRef idx="2">
+            <a:schemeClr val="accent1"/>
+          </a:effectRef>
+          <a:fontRef idx="minor">
+            <a:schemeClr val="lt1"/>
+          </a:fontRef>
+        </p:style>
+        <p:txBody>
+          <a:bodyPr rtlCol="0" anchor="ctr"/>
+          <a:lstStyle/>
+          <a:p>
+            <a:pPr algn="ctr"/>
+          </a:p>
+        </p:txBody>
+      </p:sp>
+      <p:sp>
+        <p:nvSpPr>
+          <p:cNvPr id="27" name="Oval 26"/>
+          <p:cNvSpPr/>
+          <p:nvPr/>
+        </p:nvSpPr>
+        <p:spPr>
+          <a:xfrm>
+            <a:off x="7730334" y="2356866"/>
+            <a:ext cx="384048" cy="384048"/>
+          </a:xfrm>
+          <a:prstGeom prst="ellipse">
+            <a:avLst/>
+          </a:prstGeom>
+          <a:solidFill>
+            <a:srgbClr val="2E6FB5"/>
+          </a:solidFill>
+          <a:ln>
+            <a:noFill/>
+          </a:ln>
+          <a:effectLst/>
+        </p:spPr>
+        <p:style>
+          <a:lnRef idx="1">
+            <a:schemeClr val="accent1"/>
+          </a:lnRef>
+          <a:fillRef idx="3">
+            <a:schemeClr val="accent1"/>
+          </a:fillRef>
+          <a:effectRef idx="2">
+            <a:schemeClr val="accent1"/>
+          </a:effectRef>
+          <a:fontRef idx="minor">
+            <a:schemeClr val="lt1"/>
+          </a:fontRef>
+        </p:style>
+        <p:txBody>
+          <a:bodyPr rtlCol="0" anchor="ctr"/>
+          <a:lstStyle/>
+          <a:p>
+            <a:pPr algn="ctr"/>
+          </a:p>
+        </p:txBody>
+      </p:sp>
+      <p:sp>
+        <p:nvSpPr>
+          <p:cNvPr id="28" name="TextBox 27"/>
+          <p:cNvSpPr txBox="1"/>
+          <p:nvPr/>
+        </p:nvSpPr>
+        <p:spPr>
+          <a:xfrm>
+            <a:off x="7730334" y="2356866"/>
+            <a:ext cx="384048" cy="384048"/>
+          </a:xfrm>
+          <a:prstGeom prst="rect">
+            <a:avLst/>
+          </a:prstGeom>
+          <a:noFill/>
+        </p:spPr>
+        <p:txBody>
+          <a:bodyPr wrap="square" anchor="ctr" lIns="0" rIns="0" tIns="0" bIns="0">
+            <a:noAutofit/>
+          </a:bodyPr>
+          <a:lstStyle/>
+          <a:p>
+            <a:pPr algn="ctr">
+              <a:lnSpc>
+                <a:spcPct val="104000"/>
+              </a:lnSpc>
+              <a:spcBef>
+                <a:spcPts val="0"/>
+              </a:spcBef>
+              <a:spcAft>
+                <a:spcPts val="0"/>
+              </a:spcAft>
+              <a:defRPr sz="1600" b="1">
+                <a:solidFill>
+                  <a:srgbClr val="FFFFFF"/>
+                </a:solidFill>
+              </a:defRPr>
+            </a:pPr>
+            <a:r>
+              <a:t>5</a:t>
+            </a:r>
+          </a:p>
+        </p:txBody>
+      </p:sp>
+      <p:sp>
+        <p:nvSpPr>
+          <p:cNvPr id="29" name="TextBox 28"/>
+          <p:cNvSpPr txBox="1"/>
+          <p:nvPr/>
+        </p:nvSpPr>
+        <p:spPr>
+          <a:xfrm>
+            <a:off x="7249360" y="2832354"/>
+            <a:ext cx="1345996" cy="1216152"/>
+          </a:xfrm>
+          <a:prstGeom prst="rect">
+            <a:avLst/>
+          </a:prstGeom>
+          <a:noFill/>
+        </p:spPr>
+        <p:txBody>
+          <a:bodyPr wrap="square" anchor="ctr" lIns="0" rIns="0" tIns="0" bIns="0">
+            <a:noAutofit/>
+          </a:bodyPr>
+          <a:lstStyle/>
+          <a:p>
+            <a:pPr algn="ctr">
+              <a:lnSpc>
+                <a:spcPct val="100000"/>
+              </a:lnSpc>
+              <a:spcBef>
+                <a:spcPts val="0"/>
+              </a:spcBef>
+              <a:spcAft>
+                <a:spcPts val="400"/>
+              </a:spcAft>
+              <a:defRPr sz="1250" b="1">
+                <a:solidFill>
+                  <a:srgbClr val="12335B"/>
+                </a:solidFill>
+              </a:defRPr>
+            </a:pPr>
+            <a:r>
+              <a:t>Decide</a:t>
+            </a:r>
+          </a:p>
+          <a:p>
+            <a:pPr algn="ctr">
+              <a:lnSpc>
+                <a:spcPct val="106000"/>
+              </a:lnSpc>
+              <a:spcBef>
+                <a:spcPts val="0"/>
+              </a:spcBef>
+              <a:spcAft>
+                <a:spcPts val="0"/>
+              </a:spcAft>
+              <a:defRPr sz="1050" b="0">
+                <a:solidFill>
+                  <a:srgbClr val="2A2A2A"/>
+                </a:solidFill>
+              </a:defRPr>
+            </a:pPr>
+            <a:r>
+              <a:t>Three ICC Rule 36 checks give the verdict.</a:t>
             </a:r>
           </a:p>
         </p:txBody>
@@ -6594,8 +7761,8 @@
         </p:nvSpPr>
         <p:spPr>
           <a:xfrm>
-            <a:off x="502920" y="438912"/>
-            <a:ext cx="8138160" cy="201168"/>
+            <a:off x="457200" y="566928"/>
+            <a:ext cx="8229600" cy="475488"/>
           </a:xfrm>
           <a:prstGeom prst="rect">
             <a:avLst/>
@@ -6603,69 +7770,43 @@
           <a:noFill/>
         </p:spPr>
         <p:txBody>
-          <a:bodyPr wrap="none">
+          <a:bodyPr wrap="square" anchor="ctr" lIns="0" rIns="0" tIns="0" bIns="0">
             <a:noAutofit/>
           </a:bodyPr>
           <a:lstStyle/>
           <a:p>
-            <a:pPr>
-              <a:defRPr sz="1100" b="1">
-                <a:solidFill>
-                  <a:srgbClr val="2E6FB5"/>
+            <a:pPr algn="l">
+              <a:lnSpc>
+                <a:spcPct val="104000"/>
+              </a:lnSpc>
+              <a:spcBef>
+                <a:spcPts val="0"/>
+              </a:spcBef>
+              <a:spcAft>
+                <a:spcPts val="0"/>
+              </a:spcAft>
+              <a:defRPr sz="2300" b="1">
+                <a:solidFill>
+                  <a:srgbClr val="12335B"/>
                 </a:solidFill>
               </a:defRPr>
             </a:pPr>
             <a:r>
-              <a:t>IMPLEMENTATION</a:t>
-            </a:r>
-          </a:p>
-        </p:txBody>
-      </p:sp>
-      <p:sp>
-        <p:nvSpPr>
-          <p:cNvPr id="3" name="TextBox 2"/>
-          <p:cNvSpPr txBox="1"/>
-          <p:nvPr/>
-        </p:nvSpPr>
-        <p:spPr>
-          <a:xfrm>
-            <a:off x="502920" y="640080"/>
-            <a:ext cx="8138160" cy="530352"/>
-          </a:xfrm>
-          <a:prstGeom prst="rect">
-            <a:avLst/>
-          </a:prstGeom>
-          <a:noFill/>
-        </p:spPr>
-        <p:txBody>
-          <a:bodyPr wrap="square" anchor="ctr">
-            <a:noAutofit/>
-          </a:bodyPr>
-          <a:lstStyle/>
-          <a:p>
-            <a:pPr>
-              <a:defRPr sz="2400" b="1">
-                <a:solidFill>
-                  <a:srgbClr val="12335B"/>
-                </a:solidFill>
-              </a:defRPr>
-            </a:pPr>
-            <a:r>
-              <a:t>Implementing Tools</a:t>
-            </a:r>
-          </a:p>
-        </p:txBody>
-      </p:sp>
-      <p:sp>
-        <p:nvSpPr>
-          <p:cNvPr id="4" name="Rectangle 3"/>
+              <a:t>Key Terms (1 of 2)</a:t>
+            </a:r>
+          </a:p>
+        </p:txBody>
+      </p:sp>
+      <p:sp>
+        <p:nvSpPr>
+          <p:cNvPr id="3" name="Rectangle 2"/>
           <p:cNvSpPr/>
           <p:nvPr/>
         </p:nvSpPr>
         <p:spPr>
           <a:xfrm>
-            <a:off x="502920" y="1170432"/>
-            <a:ext cx="1828800" cy="38100"/>
+            <a:off x="457200" y="1060704"/>
+            <a:ext cx="1737360" cy="38100"/>
           </a:xfrm>
           <a:prstGeom prst="rect">
             <a:avLst/>
@@ -6702,14 +7843,58 @@
       </p:sp>
       <p:sp>
         <p:nvSpPr>
+          <p:cNvPr id="4" name="TextBox 3"/>
+          <p:cNvSpPr txBox="1"/>
+          <p:nvPr/>
+        </p:nvSpPr>
+        <p:spPr>
+          <a:xfrm>
+            <a:off x="8046720" y="4777740"/>
+            <a:ext cx="640080" cy="274320"/>
+          </a:xfrm>
+          <a:prstGeom prst="rect">
+            <a:avLst/>
+          </a:prstGeom>
+          <a:noFill/>
+        </p:spPr>
+        <p:txBody>
+          <a:bodyPr wrap="square" anchor="t" lIns="0" rIns="0" tIns="0" bIns="0">
+            <a:noAutofit/>
+          </a:bodyPr>
+          <a:lstStyle/>
+          <a:p>
+            <a:pPr algn="r">
+              <a:lnSpc>
+                <a:spcPct val="104000"/>
+              </a:lnSpc>
+              <a:spcBef>
+                <a:spcPts val="0"/>
+              </a:spcBef>
+              <a:spcAft>
+                <a:spcPts val="0"/>
+              </a:spcAft>
+              <a:defRPr sz="900" b="0">
+                <a:solidFill>
+                  <a:srgbClr val="7C8690"/>
+                </a:solidFill>
+              </a:defRPr>
+            </a:pPr>
+            <a:r>
+              <a:t>13</a:t>
+            </a:r>
+          </a:p>
+        </p:txBody>
+      </p:sp>
+      <p:sp>
+        <p:nvSpPr>
           <p:cNvPr id="5" name="TextBox 4"/>
           <p:cNvSpPr txBox="1"/>
           <p:nvPr/>
         </p:nvSpPr>
         <p:spPr>
           <a:xfrm>
-            <a:off x="8001000" y="4759452"/>
-            <a:ext cx="640080" cy="274320"/>
+            <a:off x="457200" y="1280160"/>
+            <a:ext cx="8229600" cy="457200"/>
           </a:xfrm>
           <a:prstGeom prst="rect">
             <a:avLst/>
@@ -6717,59 +7902,78 @@
           <a:noFill/>
         </p:spPr>
         <p:txBody>
-          <a:bodyPr wrap="none">
-            <a:spAutoFit/>
-          </a:bodyPr>
-          <a:lstStyle/>
-          <a:p>
-            <a:pPr algn="r">
-              <a:defRPr sz="900">
-                <a:solidFill>
-                  <a:srgbClr val="8A8A8A"/>
-                </a:solidFill>
-              </a:defRPr>
-            </a:pPr>
-            <a:r>
-              <a:t>13</a:t>
-            </a:r>
-          </a:p>
-        </p:txBody>
-      </p:sp>
-      <p:sp>
-        <p:nvSpPr>
-          <p:cNvPr id="6" name="TextBox 5"/>
-          <p:cNvSpPr txBox="1"/>
-          <p:nvPr/>
-        </p:nvSpPr>
-        <p:spPr>
-          <a:xfrm>
-            <a:off x="502920" y="1335024"/>
-            <a:ext cx="8138160" cy="502920"/>
-          </a:xfrm>
-          <a:prstGeom prst="rect">
-            <a:avLst/>
-          </a:prstGeom>
-          <a:noFill/>
-        </p:spPr>
-        <p:txBody>
-          <a:bodyPr wrap="square">
+          <a:bodyPr wrap="square" anchor="ctr" lIns="0" rIns="0" tIns="0" bIns="0">
             <a:noAutofit/>
           </a:bodyPr>
           <a:lstStyle/>
           <a:p>
-            <a:pPr>
+            <a:pPr algn="l">
               <a:lnSpc>
                 <a:spcPct val="102000"/>
               </a:lnSpc>
-              <a:defRPr sz="1700" b="1">
+              <a:spcBef>
+                <a:spcPts val="0"/>
+              </a:spcBef>
+              <a:spcAft>
+                <a:spcPts val="0"/>
+              </a:spcAft>
+              <a:defRPr sz="1600" b="1">
                 <a:solidFill>
                   <a:srgbClr val="12335B"/>
                 </a:solidFill>
               </a:defRPr>
             </a:pPr>
             <a:r>
-              <a:t>A standard, open-source mobile-to-cloud stack — no paid SDKs.</a:t>
-            </a:r>
+              <a:t>The standard computer-vision tools behind the pipeline.</a:t>
+            </a:r>
+          </a:p>
+        </p:txBody>
+      </p:sp>
+      <p:sp>
+        <p:nvSpPr>
+          <p:cNvPr id="6" name="Rounded Rectangle 5"/>
+          <p:cNvSpPr/>
+          <p:nvPr/>
+        </p:nvSpPr>
+        <p:spPr>
+          <a:xfrm>
+            <a:off x="457200" y="1901952"/>
+            <a:ext cx="4014216" cy="1126998"/>
+          </a:xfrm>
+          <a:prstGeom prst="roundRect">
+            <a:avLst>
+              <a:gd name="adj" fmla="val 8000"/>
+            </a:avLst>
+          </a:prstGeom>
+          <a:solidFill>
+            <a:srgbClr val="F1F5FA"/>
+          </a:solidFill>
+          <a:ln w="9525">
+            <a:solidFill>
+              <a:srgbClr val="D7E0EC"/>
+            </a:solidFill>
+          </a:ln>
+          <a:effectLst/>
+        </p:spPr>
+        <p:style>
+          <a:lnRef idx="1">
+            <a:schemeClr val="accent1"/>
+          </a:lnRef>
+          <a:fillRef idx="3">
+            <a:schemeClr val="accent1"/>
+          </a:fillRef>
+          <a:effectRef idx="2">
+            <a:schemeClr val="accent1"/>
+          </a:effectRef>
+          <a:fontRef idx="minor">
+            <a:schemeClr val="lt1"/>
+          </a:fontRef>
+        </p:style>
+        <p:txBody>
+          <a:bodyPr rtlCol="0" anchor="ctr"/>
+          <a:lstStyle/>
+          <a:p>
+            <a:pPr algn="ctr"/>
           </a:p>
         </p:txBody>
       </p:sp>
@@ -6781,8 +7985,8 @@
         </p:nvSpPr>
         <p:spPr>
           <a:xfrm>
-            <a:off x="502920" y="1847088"/>
-            <a:ext cx="8138160" cy="2455164"/>
+            <a:off x="658368" y="1901952"/>
+            <a:ext cx="3611880" cy="1126998"/>
           </a:xfrm>
           <a:prstGeom prst="rect">
             <a:avLst/>
@@ -6790,98 +7994,389 @@
           <a:noFill/>
         </p:spPr>
         <p:txBody>
-          <a:bodyPr wrap="square">
-            <a:normAutofit/>
+          <a:bodyPr wrap="square" anchor="ctr" lIns="0" rIns="0" tIns="0" bIns="0">
+            <a:noAutofit/>
           </a:bodyPr>
           <a:lstStyle/>
           <a:p>
-            <a:pPr>
-              <a:lnSpc>
-                <a:spcPct val="104000"/>
-              </a:lnSpc>
-              <a:spcAft>
-                <a:spcPts val="600"/>
-              </a:spcAft>
-              <a:defRPr sz="1400">
-                <a:solidFill>
-                  <a:srgbClr val="222222"/>
+            <a:pPr algn="l">
+              <a:lnSpc>
+                <a:spcPct val="100000"/>
+              </a:lnSpc>
+              <a:spcBef>
+                <a:spcPts val="0"/>
+              </a:spcBef>
+              <a:spcAft>
+                <a:spcPts val="400"/>
+              </a:spcAft>
+              <a:defRPr sz="1400" b="1">
+                <a:solidFill>
+                  <a:srgbClr val="12335B"/>
                 </a:solidFill>
               </a:defRPr>
             </a:pPr>
             <a:r>
-              <a:t>• Flutter + Dart: cross-platform mobile app (capture, calibration taps, result viewer).</a:t>
-            </a:r>
-          </a:p>
-          <a:p>
-            <a:pPr>
-              <a:lnSpc>
-                <a:spcPct val="104000"/>
-              </a:lnSpc>
-              <a:spcAft>
-                <a:spcPts val="600"/>
-              </a:spcAft>
-              <a:defRPr sz="1400">
-                <a:solidFill>
-                  <a:srgbClr val="222222"/>
+              <a:t>Camera pose (PnP)</a:t>
+            </a:r>
+          </a:p>
+          <a:p>
+            <a:pPr algn="l">
+              <a:lnSpc>
+                <a:spcPct val="107000"/>
+              </a:lnSpc>
+              <a:spcBef>
+                <a:spcPts val="0"/>
+              </a:spcBef>
+              <a:spcAft>
+                <a:spcPts val="0"/>
+              </a:spcAft>
+              <a:defRPr sz="1200" b="0">
+                <a:solidFill>
+                  <a:srgbClr val="2A2A2A"/>
                 </a:solidFill>
               </a:defRPr>
             </a:pPr>
             <a:r>
-              <a:t>• FastAPI (Python): analysis server exposing the pipeline as a REST API.</a:t>
-            </a:r>
-          </a:p>
-          <a:p>
-            <a:pPr>
-              <a:lnSpc>
-                <a:spcPct val="104000"/>
-              </a:lnSpc>
-              <a:spcAft>
-                <a:spcPts val="600"/>
-              </a:spcAft>
-              <a:defRPr sz="1400">
-                <a:solidFill>
-                  <a:srgbClr val="222222"/>
+              <a:t>Finds where the phone stood, from the marked stumps.</a:t>
+            </a:r>
+          </a:p>
+        </p:txBody>
+      </p:sp>
+      <p:sp>
+        <p:nvSpPr>
+          <p:cNvPr id="8" name="Rounded Rectangle 7"/>
+          <p:cNvSpPr/>
+          <p:nvPr/>
+        </p:nvSpPr>
+        <p:spPr>
+          <a:xfrm>
+            <a:off x="4672584" y="1901952"/>
+            <a:ext cx="4014216" cy="1126998"/>
+          </a:xfrm>
+          <a:prstGeom prst="roundRect">
+            <a:avLst>
+              <a:gd name="adj" fmla="val 8000"/>
+            </a:avLst>
+          </a:prstGeom>
+          <a:solidFill>
+            <a:srgbClr val="F1F5FA"/>
+          </a:solidFill>
+          <a:ln w="9525">
+            <a:solidFill>
+              <a:srgbClr val="D7E0EC"/>
+            </a:solidFill>
+          </a:ln>
+          <a:effectLst/>
+        </p:spPr>
+        <p:style>
+          <a:lnRef idx="1">
+            <a:schemeClr val="accent1"/>
+          </a:lnRef>
+          <a:fillRef idx="3">
+            <a:schemeClr val="accent1"/>
+          </a:fillRef>
+          <a:effectRef idx="2">
+            <a:schemeClr val="accent1"/>
+          </a:effectRef>
+          <a:fontRef idx="minor">
+            <a:schemeClr val="lt1"/>
+          </a:fontRef>
+        </p:style>
+        <p:txBody>
+          <a:bodyPr rtlCol="0" anchor="ctr"/>
+          <a:lstStyle/>
+          <a:p>
+            <a:pPr algn="ctr"/>
+          </a:p>
+        </p:txBody>
+      </p:sp>
+      <p:sp>
+        <p:nvSpPr>
+          <p:cNvPr id="9" name="TextBox 8"/>
+          <p:cNvSpPr txBox="1"/>
+          <p:nvPr/>
+        </p:nvSpPr>
+        <p:spPr>
+          <a:xfrm>
+            <a:off x="4873752" y="1901952"/>
+            <a:ext cx="3611880" cy="1126998"/>
+          </a:xfrm>
+          <a:prstGeom prst="rect">
+            <a:avLst/>
+          </a:prstGeom>
+          <a:noFill/>
+        </p:spPr>
+        <p:txBody>
+          <a:bodyPr wrap="square" anchor="ctr" lIns="0" rIns="0" tIns="0" bIns="0">
+            <a:noAutofit/>
+          </a:bodyPr>
+          <a:lstStyle/>
+          <a:p>
+            <a:pPr algn="l">
+              <a:lnSpc>
+                <a:spcPct val="100000"/>
+              </a:lnSpc>
+              <a:spcBef>
+                <a:spcPts val="0"/>
+              </a:spcBef>
+              <a:spcAft>
+                <a:spcPts val="400"/>
+              </a:spcAft>
+              <a:defRPr sz="1400" b="1">
+                <a:solidFill>
+                  <a:srgbClr val="12335B"/>
                 </a:solidFill>
               </a:defRPr>
             </a:pPr>
             <a:r>
-              <a:t>• OpenCV + NumPy + SciPy: detection, PnP, RANSAC, and projectile fitting.</a:t>
-            </a:r>
-          </a:p>
-          <a:p>
-            <a:pPr>
-              <a:lnSpc>
-                <a:spcPct val="104000"/>
-              </a:lnSpc>
-              <a:spcAft>
-                <a:spcPts val="600"/>
-              </a:spcAft>
-              <a:defRPr sz="1400">
-                <a:solidFill>
-                  <a:srgbClr val="222222"/>
+              <a:t>Homography</a:t>
+            </a:r>
+          </a:p>
+          <a:p>
+            <a:pPr algn="l">
+              <a:lnSpc>
+                <a:spcPct val="107000"/>
+              </a:lnSpc>
+              <a:spcBef>
+                <a:spcPts val="0"/>
+              </a:spcBef>
+              <a:spcAft>
+                <a:spcPts val="0"/>
+              </a:spcAft>
+              <a:defRPr sz="1200" b="0">
+                <a:solidFill>
+                  <a:srgbClr val="2A2A2A"/>
                 </a:solidFill>
               </a:defRPr>
             </a:pPr>
             <a:r>
-              <a:t>• Ultralytics YOLO + PyTorch: learned ball detector for cluttered real footage.</a:t>
-            </a:r>
-          </a:p>
-          <a:p>
-            <a:pPr>
-              <a:lnSpc>
-                <a:spcPct val="104000"/>
-              </a:lnSpc>
-              <a:spcAft>
-                <a:spcPts val="600"/>
-              </a:spcAft>
-              <a:defRPr sz="1400">
-                <a:solidFill>
-                  <a:srgbClr val="222222"/>
+              <a:t>Maps any flat-pitch point in the photo to real metres.</a:t>
+            </a:r>
+          </a:p>
+        </p:txBody>
+      </p:sp>
+      <p:sp>
+        <p:nvSpPr>
+          <p:cNvPr id="10" name="Rounded Rectangle 9"/>
+          <p:cNvSpPr/>
+          <p:nvPr/>
+        </p:nvSpPr>
+        <p:spPr>
+          <a:xfrm>
+            <a:off x="457200" y="3230118"/>
+            <a:ext cx="4014216" cy="1126998"/>
+          </a:xfrm>
+          <a:prstGeom prst="roundRect">
+            <a:avLst>
+              <a:gd name="adj" fmla="val 8000"/>
+            </a:avLst>
+          </a:prstGeom>
+          <a:solidFill>
+            <a:srgbClr val="F1F5FA"/>
+          </a:solidFill>
+          <a:ln w="9525">
+            <a:solidFill>
+              <a:srgbClr val="D7E0EC"/>
+            </a:solidFill>
+          </a:ln>
+          <a:effectLst/>
+        </p:spPr>
+        <p:style>
+          <a:lnRef idx="1">
+            <a:schemeClr val="accent1"/>
+          </a:lnRef>
+          <a:fillRef idx="3">
+            <a:schemeClr val="accent1"/>
+          </a:fillRef>
+          <a:effectRef idx="2">
+            <a:schemeClr val="accent1"/>
+          </a:effectRef>
+          <a:fontRef idx="minor">
+            <a:schemeClr val="lt1"/>
+          </a:fontRef>
+        </p:style>
+        <p:txBody>
+          <a:bodyPr rtlCol="0" anchor="ctr"/>
+          <a:lstStyle/>
+          <a:p>
+            <a:pPr algn="ctr"/>
+          </a:p>
+        </p:txBody>
+      </p:sp>
+      <p:sp>
+        <p:nvSpPr>
+          <p:cNvPr id="11" name="TextBox 10"/>
+          <p:cNvSpPr txBox="1"/>
+          <p:nvPr/>
+        </p:nvSpPr>
+        <p:spPr>
+          <a:xfrm>
+            <a:off x="658368" y="3230118"/>
+            <a:ext cx="3611880" cy="1126998"/>
+          </a:xfrm>
+          <a:prstGeom prst="rect">
+            <a:avLst/>
+          </a:prstGeom>
+          <a:noFill/>
+        </p:spPr>
+        <p:txBody>
+          <a:bodyPr wrap="square" anchor="ctr" lIns="0" rIns="0" tIns="0" bIns="0">
+            <a:noAutofit/>
+          </a:bodyPr>
+          <a:lstStyle/>
+          <a:p>
+            <a:pPr algn="l">
+              <a:lnSpc>
+                <a:spcPct val="100000"/>
+              </a:lnSpc>
+              <a:spcBef>
+                <a:spcPts val="0"/>
+              </a:spcBef>
+              <a:spcAft>
+                <a:spcPts val="400"/>
+              </a:spcAft>
+              <a:defRPr sz="1400" b="1">
+                <a:solidFill>
+                  <a:srgbClr val="12335B"/>
                 </a:solidFill>
               </a:defRPr>
             </a:pPr>
             <a:r>
-              <a:t>• Three.js for the interactive 3D Hawk-Eye viewer; Firebase for auth and result storage.</a:t>
+              <a:t>RANSAC</a:t>
+            </a:r>
+          </a:p>
+          <a:p>
+            <a:pPr algn="l">
+              <a:lnSpc>
+                <a:spcPct val="107000"/>
+              </a:lnSpc>
+              <a:spcBef>
+                <a:spcPts val="0"/>
+              </a:spcBef>
+              <a:spcAft>
+                <a:spcPts val="0"/>
+              </a:spcAft>
+              <a:defRPr sz="1200" b="0">
+                <a:solidFill>
+                  <a:srgbClr val="2A2A2A"/>
+                </a:solidFill>
+              </a:defRPr>
+            </a:pPr>
+            <a:r>
+              <a:t>Fits the ball's path while ignoring wrong detections.</a:t>
+            </a:r>
+          </a:p>
+        </p:txBody>
+      </p:sp>
+      <p:sp>
+        <p:nvSpPr>
+          <p:cNvPr id="12" name="Rounded Rectangle 11"/>
+          <p:cNvSpPr/>
+          <p:nvPr/>
+        </p:nvSpPr>
+        <p:spPr>
+          <a:xfrm>
+            <a:off x="4672584" y="3230118"/>
+            <a:ext cx="4014216" cy="1126998"/>
+          </a:xfrm>
+          <a:prstGeom prst="roundRect">
+            <a:avLst>
+              <a:gd name="adj" fmla="val 8000"/>
+            </a:avLst>
+          </a:prstGeom>
+          <a:solidFill>
+            <a:srgbClr val="F1F5FA"/>
+          </a:solidFill>
+          <a:ln w="9525">
+            <a:solidFill>
+              <a:srgbClr val="D7E0EC"/>
+            </a:solidFill>
+          </a:ln>
+          <a:effectLst/>
+        </p:spPr>
+        <p:style>
+          <a:lnRef idx="1">
+            <a:schemeClr val="accent1"/>
+          </a:lnRef>
+          <a:fillRef idx="3">
+            <a:schemeClr val="accent1"/>
+          </a:fillRef>
+          <a:effectRef idx="2">
+            <a:schemeClr val="accent1"/>
+          </a:effectRef>
+          <a:fontRef idx="minor">
+            <a:schemeClr val="lt1"/>
+          </a:fontRef>
+        </p:style>
+        <p:txBody>
+          <a:bodyPr rtlCol="0" anchor="ctr"/>
+          <a:lstStyle/>
+          <a:p>
+            <a:pPr algn="ctr"/>
+          </a:p>
+        </p:txBody>
+      </p:sp>
+      <p:sp>
+        <p:nvSpPr>
+          <p:cNvPr id="13" name="TextBox 12"/>
+          <p:cNvSpPr txBox="1"/>
+          <p:nvPr/>
+        </p:nvSpPr>
+        <p:spPr>
+          <a:xfrm>
+            <a:off x="4873752" y="3230118"/>
+            <a:ext cx="3611880" cy="1126998"/>
+          </a:xfrm>
+          <a:prstGeom prst="rect">
+            <a:avLst/>
+          </a:prstGeom>
+          <a:noFill/>
+        </p:spPr>
+        <p:txBody>
+          <a:bodyPr wrap="square" anchor="ctr" lIns="0" rIns="0" tIns="0" bIns="0">
+            <a:noAutofit/>
+          </a:bodyPr>
+          <a:lstStyle/>
+          <a:p>
+            <a:pPr algn="l">
+              <a:lnSpc>
+                <a:spcPct val="100000"/>
+              </a:lnSpc>
+              <a:spcBef>
+                <a:spcPts val="0"/>
+              </a:spcBef>
+              <a:spcAft>
+                <a:spcPts val="400"/>
+              </a:spcAft>
+              <a:defRPr sz="1400" b="1">
+                <a:solidFill>
+                  <a:srgbClr val="12335B"/>
+                </a:solidFill>
+              </a:defRPr>
+            </a:pPr>
+            <a:r>
+              <a:t>Projectile motion</a:t>
+            </a:r>
+          </a:p>
+          <a:p>
+            <a:pPr algn="l">
+              <a:lnSpc>
+                <a:spcPct val="107000"/>
+              </a:lnSpc>
+              <a:spcBef>
+                <a:spcPts val="0"/>
+              </a:spcBef>
+              <a:spcAft>
+                <a:spcPts val="0"/>
+              </a:spcAft>
+              <a:defRPr sz="1200" b="0">
+                <a:solidFill>
+                  <a:srgbClr val="2A2A2A"/>
+                </a:solidFill>
+              </a:defRPr>
+            </a:pPr>
+            <a:r>
+              <a:t>Gravity's curve; forces a real ball flight, not noise.</a:t>
             </a:r>
           </a:p>
         </p:txBody>
@@ -6920,8 +8415,8 @@
         </p:nvSpPr>
         <p:spPr>
           <a:xfrm>
-            <a:off x="502920" y="438912"/>
-            <a:ext cx="8138160" cy="201168"/>
+            <a:off x="457200" y="566928"/>
+            <a:ext cx="8229600" cy="475488"/>
           </a:xfrm>
           <a:prstGeom prst="rect">
             <a:avLst/>
@@ -6929,69 +8424,43 @@
           <a:noFill/>
         </p:spPr>
         <p:txBody>
-          <a:bodyPr wrap="none">
+          <a:bodyPr wrap="square" anchor="ctr" lIns="0" rIns="0" tIns="0" bIns="0">
             <a:noAutofit/>
           </a:bodyPr>
           <a:lstStyle/>
           <a:p>
-            <a:pPr>
-              <a:defRPr sz="1100" b="1">
-                <a:solidFill>
-                  <a:srgbClr val="2E6FB5"/>
+            <a:pPr algn="l">
+              <a:lnSpc>
+                <a:spcPct val="104000"/>
+              </a:lnSpc>
+              <a:spcBef>
+                <a:spcPts val="0"/>
+              </a:spcBef>
+              <a:spcAft>
+                <a:spcPts val="0"/>
+              </a:spcAft>
+              <a:defRPr sz="2300" b="1">
+                <a:solidFill>
+                  <a:srgbClr val="12335B"/>
                 </a:solidFill>
               </a:defRPr>
             </a:pPr>
             <a:r>
-              <a:t>IMPLEMENTATION</a:t>
-            </a:r>
-          </a:p>
-        </p:txBody>
-      </p:sp>
-      <p:sp>
-        <p:nvSpPr>
-          <p:cNvPr id="3" name="TextBox 2"/>
-          <p:cNvSpPr txBox="1"/>
-          <p:nvPr/>
-        </p:nvSpPr>
-        <p:spPr>
-          <a:xfrm>
-            <a:off x="502920" y="640080"/>
-            <a:ext cx="8138160" cy="530352"/>
-          </a:xfrm>
-          <a:prstGeom prst="rect">
-            <a:avLst/>
-          </a:prstGeom>
-          <a:noFill/>
-        </p:spPr>
-        <p:txBody>
-          <a:bodyPr wrap="square" anchor="ctr">
-            <a:noAutofit/>
-          </a:bodyPr>
-          <a:lstStyle/>
-          <a:p>
-            <a:pPr>
-              <a:defRPr sz="2400" b="1">
-                <a:solidFill>
-                  <a:srgbClr val="12335B"/>
-                </a:solidFill>
-              </a:defRPr>
-            </a:pPr>
-            <a:r>
-              <a:t>Implementation: Module Details</a:t>
-            </a:r>
-          </a:p>
-        </p:txBody>
-      </p:sp>
-      <p:sp>
-        <p:nvSpPr>
-          <p:cNvPr id="4" name="Rectangle 3"/>
+              <a:t>Key Terms (2 of 2)</a:t>
+            </a:r>
+          </a:p>
+        </p:txBody>
+      </p:sp>
+      <p:sp>
+        <p:nvSpPr>
+          <p:cNvPr id="3" name="Rectangle 2"/>
           <p:cNvSpPr/>
           <p:nvPr/>
         </p:nvSpPr>
         <p:spPr>
           <a:xfrm>
-            <a:off x="502920" y="1170432"/>
-            <a:ext cx="1828800" cy="38100"/>
+            <a:off x="457200" y="1060704"/>
+            <a:ext cx="1737360" cy="38100"/>
           </a:xfrm>
           <a:prstGeom prst="rect">
             <a:avLst/>
@@ -7028,14 +8497,58 @@
       </p:sp>
       <p:sp>
         <p:nvSpPr>
+          <p:cNvPr id="4" name="TextBox 3"/>
+          <p:cNvSpPr txBox="1"/>
+          <p:nvPr/>
+        </p:nvSpPr>
+        <p:spPr>
+          <a:xfrm>
+            <a:off x="8046720" y="4777740"/>
+            <a:ext cx="640080" cy="274320"/>
+          </a:xfrm>
+          <a:prstGeom prst="rect">
+            <a:avLst/>
+          </a:prstGeom>
+          <a:noFill/>
+        </p:spPr>
+        <p:txBody>
+          <a:bodyPr wrap="square" anchor="t" lIns="0" rIns="0" tIns="0" bIns="0">
+            <a:noAutofit/>
+          </a:bodyPr>
+          <a:lstStyle/>
+          <a:p>
+            <a:pPr algn="r">
+              <a:lnSpc>
+                <a:spcPct val="104000"/>
+              </a:lnSpc>
+              <a:spcBef>
+                <a:spcPts val="0"/>
+              </a:spcBef>
+              <a:spcAft>
+                <a:spcPts val="0"/>
+              </a:spcAft>
+              <a:defRPr sz="900" b="0">
+                <a:solidFill>
+                  <a:srgbClr val="7C8690"/>
+                </a:solidFill>
+              </a:defRPr>
+            </a:pPr>
+            <a:r>
+              <a:t>14</a:t>
+            </a:r>
+          </a:p>
+        </p:txBody>
+      </p:sp>
+      <p:sp>
+        <p:nvSpPr>
           <p:cNvPr id="5" name="TextBox 4"/>
           <p:cNvSpPr txBox="1"/>
           <p:nvPr/>
         </p:nvSpPr>
         <p:spPr>
           <a:xfrm>
-            <a:off x="8001000" y="4759452"/>
-            <a:ext cx="640080" cy="274320"/>
+            <a:off x="457200" y="1280160"/>
+            <a:ext cx="8229600" cy="457200"/>
           </a:xfrm>
           <a:prstGeom prst="rect">
             <a:avLst/>
@@ -7043,59 +8556,78 @@
           <a:noFill/>
         </p:spPr>
         <p:txBody>
-          <a:bodyPr wrap="none">
-            <a:spAutoFit/>
-          </a:bodyPr>
-          <a:lstStyle/>
-          <a:p>
-            <a:pPr algn="r">
-              <a:defRPr sz="900">
-                <a:solidFill>
-                  <a:srgbClr val="8A8A8A"/>
-                </a:solidFill>
-              </a:defRPr>
-            </a:pPr>
-            <a:r>
-              <a:t>14</a:t>
-            </a:r>
-          </a:p>
-        </p:txBody>
-      </p:sp>
-      <p:sp>
-        <p:nvSpPr>
-          <p:cNvPr id="6" name="TextBox 5"/>
-          <p:cNvSpPr txBox="1"/>
-          <p:nvPr/>
-        </p:nvSpPr>
-        <p:spPr>
-          <a:xfrm>
-            <a:off x="502920" y="1335024"/>
-            <a:ext cx="8138160" cy="502920"/>
-          </a:xfrm>
-          <a:prstGeom prst="rect">
-            <a:avLst/>
-          </a:prstGeom>
-          <a:noFill/>
-        </p:spPr>
-        <p:txBody>
-          <a:bodyPr wrap="square">
+          <a:bodyPr wrap="square" anchor="ctr" lIns="0" rIns="0" tIns="0" bIns="0">
             <a:noAutofit/>
           </a:bodyPr>
           <a:lstStyle/>
           <a:p>
-            <a:pPr>
+            <a:pPr algn="l">
               <a:lnSpc>
                 <a:spcPct val="102000"/>
               </a:lnSpc>
-              <a:defRPr sz="1700" b="1">
+              <a:spcBef>
+                <a:spcPts val="0"/>
+              </a:spcBef>
+              <a:spcAft>
+                <a:spcPts val="0"/>
+              </a:spcAft>
+              <a:defRPr sz="1600" b="1">
                 <a:solidFill>
                   <a:srgbClr val="12335B"/>
                 </a:solidFill>
               </a:defRPr>
             </a:pPr>
             <a:r>
-              <a:t>One module per pipeline stage, each small and independently testable.</a:t>
-            </a:r>
+              <a:t>How the ball is found and depth recovered from one view.</a:t>
+            </a:r>
+          </a:p>
+        </p:txBody>
+      </p:sp>
+      <p:sp>
+        <p:nvSpPr>
+          <p:cNvPr id="6" name="Rounded Rectangle 5"/>
+          <p:cNvSpPr/>
+          <p:nvPr/>
+        </p:nvSpPr>
+        <p:spPr>
+          <a:xfrm>
+            <a:off x="457200" y="1901952"/>
+            <a:ext cx="4014216" cy="1126998"/>
+          </a:xfrm>
+          <a:prstGeom prst="roundRect">
+            <a:avLst>
+              <a:gd name="adj" fmla="val 8000"/>
+            </a:avLst>
+          </a:prstGeom>
+          <a:solidFill>
+            <a:srgbClr val="F1F5FA"/>
+          </a:solidFill>
+          <a:ln w="9525">
+            <a:solidFill>
+              <a:srgbClr val="D7E0EC"/>
+            </a:solidFill>
+          </a:ln>
+          <a:effectLst/>
+        </p:spPr>
+        <p:style>
+          <a:lnRef idx="1">
+            <a:schemeClr val="accent1"/>
+          </a:lnRef>
+          <a:fillRef idx="3">
+            <a:schemeClr val="accent1"/>
+          </a:fillRef>
+          <a:effectRef idx="2">
+            <a:schemeClr val="accent1"/>
+          </a:effectRef>
+          <a:fontRef idx="minor">
+            <a:schemeClr val="lt1"/>
+          </a:fontRef>
+        </p:style>
+        <p:txBody>
+          <a:bodyPr rtlCol="0" anchor="ctr"/>
+          <a:lstStyle/>
+          <a:p>
+            <a:pPr algn="ctr"/>
           </a:p>
         </p:txBody>
       </p:sp>
@@ -7107,8 +8639,8 @@
         </p:nvSpPr>
         <p:spPr>
           <a:xfrm>
-            <a:off x="502920" y="1847088"/>
-            <a:ext cx="8138160" cy="2455164"/>
+            <a:off x="658368" y="1901952"/>
+            <a:ext cx="3611880" cy="1126998"/>
           </a:xfrm>
           <a:prstGeom prst="rect">
             <a:avLst/>
@@ -7116,98 +8648,389 @@
           <a:noFill/>
         </p:spPr>
         <p:txBody>
-          <a:bodyPr wrap="square">
-            <a:normAutofit/>
+          <a:bodyPr wrap="square" anchor="ctr" lIns="0" rIns="0" tIns="0" bIns="0">
+            <a:noAutofit/>
           </a:bodyPr>
           <a:lstStyle/>
           <a:p>
-            <a:pPr>
-              <a:lnSpc>
-                <a:spcPct val="104000"/>
-              </a:lnSpc>
-              <a:spcAft>
-                <a:spcPts val="600"/>
-              </a:spcAft>
-              <a:defRPr sz="1400">
-                <a:solidFill>
-                  <a:srgbClr val="222222"/>
+            <a:pPr algn="l">
+              <a:lnSpc>
+                <a:spcPct val="100000"/>
+              </a:lnSpc>
+              <a:spcBef>
+                <a:spcPts val="0"/>
+              </a:spcBef>
+              <a:spcAft>
+                <a:spcPts val="400"/>
+              </a:spcAft>
+              <a:defRPr sz="1400" b="1">
+                <a:solidFill>
+                  <a:srgbClr val="12335B"/>
                 </a:solidFill>
               </a:defRPr>
             </a:pPr>
             <a:r>
-              <a:t>• Calibration: stump-anchored PnP from the tapped points derives pitch length and camera pose.</a:t>
-            </a:r>
-          </a:p>
-          <a:p>
-            <a:pPr>
-              <a:lnSpc>
-                <a:spcPct val="104000"/>
-              </a:lnSpc>
-              <a:spcAft>
-                <a:spcPts val="600"/>
-              </a:spcAft>
-              <a:defRPr sz="1400">
-                <a:solidFill>
-                  <a:srgbClr val="222222"/>
+              <a:t>MOG2</a:t>
+            </a:r>
+          </a:p>
+          <a:p>
+            <a:pPr algn="l">
+              <a:lnSpc>
+                <a:spcPct val="107000"/>
+              </a:lnSpc>
+              <a:spcBef>
+                <a:spcPts val="0"/>
+              </a:spcBef>
+              <a:spcAft>
+                <a:spcPts val="0"/>
+              </a:spcAft>
+              <a:defRPr sz="1200" b="0">
+                <a:solidFill>
+                  <a:srgbClr val="2A2A2A"/>
                 </a:solidFill>
               </a:defRPr>
             </a:pPr>
             <a:r>
-              <a:t>• Detection: combined motion/colour and YOLO, ROI-masked, producing per-frame ball candidates.</a:t>
-            </a:r>
-          </a:p>
-          <a:p>
-            <a:pPr>
-              <a:lnSpc>
-                <a:spcPct val="104000"/>
-              </a:lnSpc>
-              <a:spcAft>
-                <a:spcPts val="600"/>
-              </a:spcAft>
-              <a:defRPr sz="1400">
-                <a:solidFill>
-                  <a:srgbClr val="222222"/>
+              <a:t>Separates the moving ball from the still background.</a:t>
+            </a:r>
+          </a:p>
+        </p:txBody>
+      </p:sp>
+      <p:sp>
+        <p:nvSpPr>
+          <p:cNvPr id="8" name="Rounded Rectangle 7"/>
+          <p:cNvSpPr/>
+          <p:nvPr/>
+        </p:nvSpPr>
+        <p:spPr>
+          <a:xfrm>
+            <a:off x="4672584" y="1901952"/>
+            <a:ext cx="4014216" cy="1126998"/>
+          </a:xfrm>
+          <a:prstGeom prst="roundRect">
+            <a:avLst>
+              <a:gd name="adj" fmla="val 8000"/>
+            </a:avLst>
+          </a:prstGeom>
+          <a:solidFill>
+            <a:srgbClr val="F1F5FA"/>
+          </a:solidFill>
+          <a:ln w="9525">
+            <a:solidFill>
+              <a:srgbClr val="D7E0EC"/>
+            </a:solidFill>
+          </a:ln>
+          <a:effectLst/>
+        </p:spPr>
+        <p:style>
+          <a:lnRef idx="1">
+            <a:schemeClr val="accent1"/>
+          </a:lnRef>
+          <a:fillRef idx="3">
+            <a:schemeClr val="accent1"/>
+          </a:fillRef>
+          <a:effectRef idx="2">
+            <a:schemeClr val="accent1"/>
+          </a:effectRef>
+          <a:fontRef idx="minor">
+            <a:schemeClr val="lt1"/>
+          </a:fontRef>
+        </p:style>
+        <p:txBody>
+          <a:bodyPr rtlCol="0" anchor="ctr"/>
+          <a:lstStyle/>
+          <a:p>
+            <a:pPr algn="ctr"/>
+          </a:p>
+        </p:txBody>
+      </p:sp>
+      <p:sp>
+        <p:nvSpPr>
+          <p:cNvPr id="9" name="TextBox 8"/>
+          <p:cNvSpPr txBox="1"/>
+          <p:nvPr/>
+        </p:nvSpPr>
+        <p:spPr>
+          <a:xfrm>
+            <a:off x="4873752" y="1901952"/>
+            <a:ext cx="3611880" cy="1126998"/>
+          </a:xfrm>
+          <a:prstGeom prst="rect">
+            <a:avLst/>
+          </a:prstGeom>
+          <a:noFill/>
+        </p:spPr>
+        <p:txBody>
+          <a:bodyPr wrap="square" anchor="ctr" lIns="0" rIns="0" tIns="0" bIns="0">
+            <a:noAutofit/>
+          </a:bodyPr>
+          <a:lstStyle/>
+          <a:p>
+            <a:pPr algn="l">
+              <a:lnSpc>
+                <a:spcPct val="100000"/>
+              </a:lnSpc>
+              <a:spcBef>
+                <a:spcPts val="0"/>
+              </a:spcBef>
+              <a:spcAft>
+                <a:spcPts val="400"/>
+              </a:spcAft>
+              <a:defRPr sz="1400" b="1">
+                <a:solidFill>
+                  <a:srgbClr val="12335B"/>
                 </a:solidFill>
               </a:defRPr>
             </a:pPr>
             <a:r>
-              <a:t>• Trajectory: RANSAC parabola seed → least-squares refine → bounce-aware arc merge.</a:t>
-            </a:r>
-          </a:p>
-          <a:p>
-            <a:pPr>
-              <a:lnSpc>
-                <a:spcPct val="104000"/>
-              </a:lnSpc>
-              <a:spcAft>
-                <a:spcPts val="600"/>
-              </a:spcAft>
-              <a:defRPr sz="1400">
-                <a:solidFill>
-                  <a:srgbClr val="222222"/>
+              <a:t>HSV colour</a:t>
+            </a:r>
+          </a:p>
+          <a:p>
+            <a:pPr algn="l">
+              <a:lnSpc>
+                <a:spcPct val="107000"/>
+              </a:lnSpc>
+              <a:spcBef>
+                <a:spcPts val="0"/>
+              </a:spcBef>
+              <a:spcAft>
+                <a:spcPts val="0"/>
+              </a:spcAft>
+              <a:defRPr sz="1200" b="0">
+                <a:solidFill>
+                  <a:srgbClr val="2A2A2A"/>
                 </a:solidFill>
               </a:defRPr>
             </a:pPr>
             <a:r>
-              <a:t>• Reconstruction: a gravity-constrained linear solver lifts pixels to 3D and predicts the path to the stumps.</a:t>
-            </a:r>
-          </a:p>
-          <a:p>
-            <a:pPr>
-              <a:lnSpc>
-                <a:spcPct val="104000"/>
-              </a:lnSpc>
-              <a:spcAft>
-                <a:spcPts val="600"/>
-              </a:spcAft>
-              <a:defRPr sz="1400">
-                <a:solidFill>
-                  <a:srgbClr val="222222"/>
+              <a:t>A colour space that isolates one ball colour despite light.</a:t>
+            </a:r>
+          </a:p>
+        </p:txBody>
+      </p:sp>
+      <p:sp>
+        <p:nvSpPr>
+          <p:cNvPr id="10" name="Rounded Rectangle 9"/>
+          <p:cNvSpPr/>
+          <p:nvPr/>
+        </p:nvSpPr>
+        <p:spPr>
+          <a:xfrm>
+            <a:off x="457200" y="3230118"/>
+            <a:ext cx="4014216" cy="1126998"/>
+          </a:xfrm>
+          <a:prstGeom prst="roundRect">
+            <a:avLst>
+              <a:gd name="adj" fmla="val 8000"/>
+            </a:avLst>
+          </a:prstGeom>
+          <a:solidFill>
+            <a:srgbClr val="F1F5FA"/>
+          </a:solidFill>
+          <a:ln w="9525">
+            <a:solidFill>
+              <a:srgbClr val="D7E0EC"/>
+            </a:solidFill>
+          </a:ln>
+          <a:effectLst/>
+        </p:spPr>
+        <p:style>
+          <a:lnRef idx="1">
+            <a:schemeClr val="accent1"/>
+          </a:lnRef>
+          <a:fillRef idx="3">
+            <a:schemeClr val="accent1"/>
+          </a:fillRef>
+          <a:effectRef idx="2">
+            <a:schemeClr val="accent1"/>
+          </a:effectRef>
+          <a:fontRef idx="minor">
+            <a:schemeClr val="lt1"/>
+          </a:fontRef>
+        </p:style>
+        <p:txBody>
+          <a:bodyPr rtlCol="0" anchor="ctr"/>
+          <a:lstStyle/>
+          <a:p>
+            <a:pPr algn="ctr"/>
+          </a:p>
+        </p:txBody>
+      </p:sp>
+      <p:sp>
+        <p:nvSpPr>
+          <p:cNvPr id="11" name="TextBox 10"/>
+          <p:cNvSpPr txBox="1"/>
+          <p:nvPr/>
+        </p:nvSpPr>
+        <p:spPr>
+          <a:xfrm>
+            <a:off x="658368" y="3230118"/>
+            <a:ext cx="3611880" cy="1126998"/>
+          </a:xfrm>
+          <a:prstGeom prst="rect">
+            <a:avLst/>
+          </a:prstGeom>
+          <a:noFill/>
+        </p:spPr>
+        <p:txBody>
+          <a:bodyPr wrap="square" anchor="ctr" lIns="0" rIns="0" tIns="0" bIns="0">
+            <a:noAutofit/>
+          </a:bodyPr>
+          <a:lstStyle/>
+          <a:p>
+            <a:pPr algn="l">
+              <a:lnSpc>
+                <a:spcPct val="100000"/>
+              </a:lnSpc>
+              <a:spcBef>
+                <a:spcPts val="0"/>
+              </a:spcBef>
+              <a:spcAft>
+                <a:spcPts val="400"/>
+              </a:spcAft>
+              <a:defRPr sz="1400" b="1">
+                <a:solidFill>
+                  <a:srgbClr val="12335B"/>
                 </a:solidFill>
               </a:defRPr>
             </a:pPr>
             <a:r>
-              <a:t>• Decision + overlay: the ICC Rule 36 engine plus a 2D overlay and a 3D viewer with speed, swing, and spin.</a:t>
+              <a:t>YOLO</a:t>
+            </a:r>
+          </a:p>
+          <a:p>
+            <a:pPr algn="l">
+              <a:lnSpc>
+                <a:spcPct val="107000"/>
+              </a:lnSpc>
+              <a:spcBef>
+                <a:spcPts val="0"/>
+              </a:spcBef>
+              <a:spcAft>
+                <a:spcPts val="0"/>
+              </a:spcAft>
+              <a:defRPr sz="1200" b="0">
+                <a:solidFill>
+                  <a:srgbClr val="2A2A2A"/>
+                </a:solidFill>
+              </a:defRPr>
+            </a:pPr>
+            <a:r>
+              <a:t>A trained network that spots the cricket ball in a frame.</a:t>
+            </a:r>
+          </a:p>
+        </p:txBody>
+      </p:sp>
+      <p:sp>
+        <p:nvSpPr>
+          <p:cNvPr id="12" name="Rounded Rectangle 11"/>
+          <p:cNvSpPr/>
+          <p:nvPr/>
+        </p:nvSpPr>
+        <p:spPr>
+          <a:xfrm>
+            <a:off x="4672584" y="3230118"/>
+            <a:ext cx="4014216" cy="1126998"/>
+          </a:xfrm>
+          <a:prstGeom prst="roundRect">
+            <a:avLst>
+              <a:gd name="adj" fmla="val 8000"/>
+            </a:avLst>
+          </a:prstGeom>
+          <a:solidFill>
+            <a:srgbClr val="F1F5FA"/>
+          </a:solidFill>
+          <a:ln w="9525">
+            <a:solidFill>
+              <a:srgbClr val="D7E0EC"/>
+            </a:solidFill>
+          </a:ln>
+          <a:effectLst/>
+        </p:spPr>
+        <p:style>
+          <a:lnRef idx="1">
+            <a:schemeClr val="accent1"/>
+          </a:lnRef>
+          <a:fillRef idx="3">
+            <a:schemeClr val="accent1"/>
+          </a:fillRef>
+          <a:effectRef idx="2">
+            <a:schemeClr val="accent1"/>
+          </a:effectRef>
+          <a:fontRef idx="minor">
+            <a:schemeClr val="lt1"/>
+          </a:fontRef>
+        </p:style>
+        <p:txBody>
+          <a:bodyPr rtlCol="0" anchor="ctr"/>
+          <a:lstStyle/>
+          <a:p>
+            <a:pPr algn="ctr"/>
+          </a:p>
+        </p:txBody>
+      </p:sp>
+      <p:sp>
+        <p:nvSpPr>
+          <p:cNvPr id="13" name="TextBox 12"/>
+          <p:cNvSpPr txBox="1"/>
+          <p:nvPr/>
+        </p:nvSpPr>
+        <p:spPr>
+          <a:xfrm>
+            <a:off x="4873752" y="3230118"/>
+            <a:ext cx="3611880" cy="1126998"/>
+          </a:xfrm>
+          <a:prstGeom prst="rect">
+            <a:avLst/>
+          </a:prstGeom>
+          <a:noFill/>
+        </p:spPr>
+        <p:txBody>
+          <a:bodyPr wrap="square" anchor="ctr" lIns="0" rIns="0" tIns="0" bIns="0">
+            <a:noAutofit/>
+          </a:bodyPr>
+          <a:lstStyle/>
+          <a:p>
+            <a:pPr algn="l">
+              <a:lnSpc>
+                <a:spcPct val="100000"/>
+              </a:lnSpc>
+              <a:spcBef>
+                <a:spcPts val="0"/>
+              </a:spcBef>
+              <a:spcAft>
+                <a:spcPts val="400"/>
+              </a:spcAft>
+              <a:defRPr sz="1400" b="1">
+                <a:solidFill>
+                  <a:srgbClr val="12335B"/>
+                </a:solidFill>
+              </a:defRPr>
+            </a:pPr>
+            <a:r>
+              <a:t>Depth-from-size</a:t>
+            </a:r>
+          </a:p>
+          <a:p>
+            <a:pPr algn="l">
+              <a:lnSpc>
+                <a:spcPct val="107000"/>
+              </a:lnSpc>
+              <a:spcBef>
+                <a:spcPts val="0"/>
+              </a:spcBef>
+              <a:spcAft>
+                <a:spcPts val="0"/>
+              </a:spcAft>
+              <a:defRPr sz="1200" b="0">
+                <a:solidFill>
+                  <a:srgbClr val="2A2A2A"/>
+                </a:solidFill>
+              </a:defRPr>
+            </a:pPr>
+            <a:r>
+              <a:t>Smaller ball looks farther; recovers 3D from one camera.</a:t>
             </a:r>
           </a:p>
         </p:txBody>
@@ -7246,8 +9069,8 @@
         </p:nvSpPr>
         <p:spPr>
           <a:xfrm>
-            <a:off x="502920" y="438912"/>
-            <a:ext cx="8138160" cy="201168"/>
+            <a:off x="457200" y="566928"/>
+            <a:ext cx="8229600" cy="475488"/>
           </a:xfrm>
           <a:prstGeom prst="rect">
             <a:avLst/>
@@ -7255,69 +9078,43 @@
           <a:noFill/>
         </p:spPr>
         <p:txBody>
-          <a:bodyPr wrap="none">
+          <a:bodyPr wrap="square" anchor="ctr" lIns="0" rIns="0" tIns="0" bIns="0">
             <a:noAutofit/>
           </a:bodyPr>
           <a:lstStyle/>
           <a:p>
-            <a:pPr>
-              <a:defRPr sz="1100" b="1">
-                <a:solidFill>
-                  <a:srgbClr val="2E6FB5"/>
+            <a:pPr algn="l">
+              <a:lnSpc>
+                <a:spcPct val="104000"/>
+              </a:lnSpc>
+              <a:spcBef>
+                <a:spcPts val="0"/>
+              </a:spcBef>
+              <a:spcAft>
+                <a:spcPts val="0"/>
+              </a:spcAft>
+              <a:defRPr sz="2300" b="1">
+                <a:solidFill>
+                  <a:srgbClr val="12335B"/>
                 </a:solidFill>
               </a:defRPr>
             </a:pPr>
             <a:r>
-              <a:t>RESULTS</a:t>
-            </a:r>
-          </a:p>
-        </p:txBody>
-      </p:sp>
-      <p:sp>
-        <p:nvSpPr>
-          <p:cNvPr id="3" name="TextBox 2"/>
-          <p:cNvSpPr txBox="1"/>
-          <p:nvPr/>
-        </p:nvSpPr>
-        <p:spPr>
-          <a:xfrm>
-            <a:off x="502920" y="640080"/>
-            <a:ext cx="8138160" cy="530352"/>
-          </a:xfrm>
-          <a:prstGeom prst="rect">
-            <a:avLst/>
-          </a:prstGeom>
-          <a:noFill/>
-        </p:spPr>
-        <p:txBody>
-          <a:bodyPr wrap="square" anchor="ctr">
-            <a:noAutofit/>
-          </a:bodyPr>
-          <a:lstStyle/>
-          <a:p>
-            <a:pPr>
-              <a:defRPr sz="2400" b="1">
-                <a:solidFill>
-                  <a:srgbClr val="12335B"/>
-                </a:solidFill>
-              </a:defRPr>
-            </a:pPr>
-            <a:r>
-              <a:t>Real-Video Test: test3.mp4</a:t>
-            </a:r>
-          </a:p>
-        </p:txBody>
-      </p:sp>
-      <p:sp>
-        <p:nvSpPr>
-          <p:cNvPr id="4" name="Rectangle 3"/>
+              <a:t>Implementation Tools</a:t>
+            </a:r>
+          </a:p>
+        </p:txBody>
+      </p:sp>
+      <p:sp>
+        <p:nvSpPr>
+          <p:cNvPr id="3" name="Rectangle 2"/>
           <p:cNvSpPr/>
           <p:nvPr/>
         </p:nvSpPr>
         <p:spPr>
           <a:xfrm>
-            <a:off x="502920" y="1170432"/>
-            <a:ext cx="1828800" cy="38100"/>
+            <a:off x="457200" y="1060704"/>
+            <a:ext cx="1737360" cy="38100"/>
           </a:xfrm>
           <a:prstGeom prst="rect">
             <a:avLst/>
@@ -7354,14 +9151,58 @@
       </p:sp>
       <p:sp>
         <p:nvSpPr>
+          <p:cNvPr id="4" name="TextBox 3"/>
+          <p:cNvSpPr txBox="1"/>
+          <p:nvPr/>
+        </p:nvSpPr>
+        <p:spPr>
+          <a:xfrm>
+            <a:off x="8046720" y="4777740"/>
+            <a:ext cx="640080" cy="274320"/>
+          </a:xfrm>
+          <a:prstGeom prst="rect">
+            <a:avLst/>
+          </a:prstGeom>
+          <a:noFill/>
+        </p:spPr>
+        <p:txBody>
+          <a:bodyPr wrap="square" anchor="t" lIns="0" rIns="0" tIns="0" bIns="0">
+            <a:noAutofit/>
+          </a:bodyPr>
+          <a:lstStyle/>
+          <a:p>
+            <a:pPr algn="r">
+              <a:lnSpc>
+                <a:spcPct val="104000"/>
+              </a:lnSpc>
+              <a:spcBef>
+                <a:spcPts val="0"/>
+              </a:spcBef>
+              <a:spcAft>
+                <a:spcPts val="0"/>
+              </a:spcAft>
+              <a:defRPr sz="900" b="0">
+                <a:solidFill>
+                  <a:srgbClr val="7C8690"/>
+                </a:solidFill>
+              </a:defRPr>
+            </a:pPr>
+            <a:r>
+              <a:t>15</a:t>
+            </a:r>
+          </a:p>
+        </p:txBody>
+      </p:sp>
+      <p:sp>
+        <p:nvSpPr>
           <p:cNvPr id="5" name="TextBox 4"/>
           <p:cNvSpPr txBox="1"/>
           <p:nvPr/>
         </p:nvSpPr>
         <p:spPr>
           <a:xfrm>
-            <a:off x="8001000" y="4759452"/>
-            <a:ext cx="640080" cy="274320"/>
+            <a:off x="457200" y="1280160"/>
+            <a:ext cx="8229600" cy="457200"/>
           </a:xfrm>
           <a:prstGeom prst="rect">
             <a:avLst/>
@@ -7369,58 +9210,43 @@
           <a:noFill/>
         </p:spPr>
         <p:txBody>
-          <a:bodyPr wrap="none">
-            <a:spAutoFit/>
+          <a:bodyPr wrap="square" anchor="ctr" lIns="0" rIns="0" tIns="0" bIns="0">
+            <a:noAutofit/>
           </a:bodyPr>
           <a:lstStyle/>
           <a:p>
-            <a:pPr algn="r">
-              <a:defRPr sz="900">
-                <a:solidFill>
-                  <a:srgbClr val="8A8A8A"/>
+            <a:pPr algn="l">
+              <a:lnSpc>
+                <a:spcPct val="102000"/>
+              </a:lnSpc>
+              <a:spcBef>
+                <a:spcPts val="0"/>
+              </a:spcBef>
+              <a:spcAft>
+                <a:spcPts val="0"/>
+              </a:spcAft>
+              <a:defRPr sz="1600" b="1">
+                <a:solidFill>
+                  <a:srgbClr val="12335B"/>
                 </a:solidFill>
               </a:defRPr>
             </a:pPr>
             <a:r>
-              <a:t>15</a:t>
-            </a:r>
-          </a:p>
-        </p:txBody>
-      </p:sp>
-      <p:pic>
-        <p:nvPicPr>
-          <p:cNvPr id="6" name="Picture 5" descr="test3_overlay.png"/>
-          <p:cNvPicPr>
-            <a:picLocks noChangeAspect="1"/>
-          </p:cNvPicPr>
-          <p:nvPr/>
-        </p:nvPicPr>
-        <p:blipFill>
-          <a:blip r:embed="rId2"/>
-          <a:stretch>
-            <a:fillRect/>
-          </a:stretch>
-        </p:blipFill>
-        <p:spPr>
-          <a:xfrm>
-            <a:off x="1634347" y="1335024"/>
-            <a:ext cx="1669065" cy="2967228"/>
-          </a:xfrm>
-          <a:prstGeom prst="rect">
-            <a:avLst/>
-          </a:prstGeom>
-        </p:spPr>
-      </p:pic>
-      <p:sp>
-        <p:nvSpPr>
-          <p:cNvPr id="7" name="TextBox 6"/>
+              <a:t>An open-source phone-to-cloud stack, with no paid software.</a:t>
+            </a:r>
+          </a:p>
+        </p:txBody>
+      </p:sp>
+      <p:sp>
+        <p:nvSpPr>
+          <p:cNvPr id="6" name="TextBox 5"/>
           <p:cNvSpPr txBox="1"/>
           <p:nvPr/>
         </p:nvSpPr>
         <p:spPr>
           <a:xfrm>
-            <a:off x="4709160" y="1335024"/>
-            <a:ext cx="3931920" cy="2967228"/>
+            <a:off x="457200" y="1847088"/>
+            <a:ext cx="8229600" cy="2510028"/>
           </a:xfrm>
           <a:prstGeom prst="rect">
             <a:avLst/>
@@ -7428,98 +9254,112 @@
           <a:noFill/>
         </p:spPr>
         <p:txBody>
-          <a:bodyPr wrap="square" anchor="ctr">
-            <a:normAutofit/>
+          <a:bodyPr wrap="square" anchor="t" lIns="0" rIns="0" tIns="0" bIns="0">
+            <a:noAutofit/>
           </a:bodyPr>
           <a:lstStyle/>
           <a:p>
             <a:pPr>
               <a:lnSpc>
-                <a:spcPct val="104000"/>
-              </a:lnSpc>
-              <a:spcAft>
-                <a:spcPts val="800"/>
-              </a:spcAft>
-              <a:defRPr sz="1500">
-                <a:solidFill>
-                  <a:srgbClr val="222222"/>
-                </a:solidFill>
-              </a:defRPr>
-            </a:pPr>
-            <a:r>
-              <a:t>• 29 ball detections tracked across the delivery (28 RANSAC inliers).</a:t>
+                <a:spcPct val="106000"/>
+              </a:lnSpc>
+              <a:spcAft>
+                <a:spcPts val="1100"/>
+              </a:spcAft>
+            </a:pPr>
+            <a:r>
+              <a:rPr sz="1300" b="1">
+                <a:solidFill>
+                  <a:srgbClr val="2E6FB5"/>
+                </a:solidFill>
+              </a:rPr>
+              <a:t>▪  </a:t>
+            </a:r>
+            <a:r>
+              <a:rPr sz="1500">
+                <a:solidFill>
+                  <a:srgbClr val="2A2A2A"/>
+                </a:solidFill>
+              </a:rPr>
+              <a:t>Flutter + Dart: the cross-platform mobile app.</a:t>
             </a:r>
           </a:p>
           <a:p>
             <a:pPr>
               <a:lnSpc>
-                <a:spcPct val="104000"/>
-              </a:lnSpc>
-              <a:spcAft>
-                <a:spcPts val="800"/>
-              </a:spcAft>
-              <a:defRPr sz="1500">
-                <a:solidFill>
-                  <a:srgbClr val="222222"/>
-                </a:solidFill>
-              </a:defRPr>
-            </a:pPr>
-            <a:r>
-              <a:t>• Camera recovered from the marked stumps (16.56 px reprojection — high; see limitations).</a:t>
+                <a:spcPct val="106000"/>
+              </a:lnSpc>
+              <a:spcAft>
+                <a:spcPts val="1100"/>
+              </a:spcAft>
+            </a:pPr>
+            <a:r>
+              <a:rPr sz="1300" b="1">
+                <a:solidFill>
+                  <a:srgbClr val="2E6FB5"/>
+                </a:solidFill>
+              </a:rPr>
+              <a:t>▪  </a:t>
+            </a:r>
+            <a:r>
+              <a:rPr sz="1500">
+                <a:solidFill>
+                  <a:srgbClr val="2A2A2A"/>
+                </a:solidFill>
+              </a:rPr>
+              <a:t>FastAPI (Python): the analysis server, over a REST web interface.</a:t>
             </a:r>
           </a:p>
           <a:p>
             <a:pPr>
               <a:lnSpc>
-                <a:spcPct val="104000"/>
-              </a:lnSpc>
-              <a:spcAft>
-                <a:spcPts val="800"/>
-              </a:spcAft>
-              <a:defRPr sz="1500">
-                <a:solidFill>
-                  <a:srgbClr val="222222"/>
-                </a:solidFill>
-              </a:defRPr>
-            </a:pPr>
-            <a:r>
-              <a:t>• Release speed 64.1 km/h; swing 48 cm; spin 2.5°.</a:t>
+                <a:spcPct val="106000"/>
+              </a:lnSpc>
+              <a:spcAft>
+                <a:spcPts val="1100"/>
+              </a:spcAft>
+            </a:pPr>
+            <a:r>
+              <a:rPr sz="1300" b="1">
+                <a:solidFill>
+                  <a:srgbClr val="2E6FB5"/>
+                </a:solidFill>
+              </a:rPr>
+              <a:t>▪  </a:t>
+            </a:r>
+            <a:r>
+              <a:rPr sz="1500">
+                <a:solidFill>
+                  <a:srgbClr val="2A2A2A"/>
+                </a:solidFill>
+              </a:rPr>
+              <a:t>OpenCV, NumPy, SciPy: the computer-vision maths.</a:t>
             </a:r>
           </a:p>
           <a:p>
             <a:pPr>
               <a:lnSpc>
-                <a:spcPct val="104000"/>
-              </a:lnSpc>
-              <a:spcAft>
-                <a:spcPts val="800"/>
-              </a:spcAft>
-              <a:defRPr sz="1500">
-                <a:solidFill>
-                  <a:srgbClr val="222222"/>
-                </a:solidFill>
-              </a:defRPr>
-            </a:pPr>
-            <a:r>
-              <a:t>• Ball pitches and is intercepted; path predicted to the stumps.</a:t>
-            </a:r>
-          </a:p>
-          <a:p>
-            <a:pPr>
-              <a:lnSpc>
-                <a:spcPct val="104000"/>
-              </a:lnSpc>
-              <a:spcAft>
-                <a:spcPts val="800"/>
-              </a:spcAft>
-              <a:defRPr sz="1500">
-                <a:solidFill>
-                  <a:srgbClr val="222222"/>
-                </a:solidFill>
-              </a:defRPr>
-            </a:pPr>
-            <a:r>
-              <a:t>• Verdict NOT OUT — predicted to miss the wicket.</a:t>
+                <a:spcPct val="106000"/>
+              </a:lnSpc>
+              <a:spcAft>
+                <a:spcPts val="1100"/>
+              </a:spcAft>
+            </a:pPr>
+            <a:r>
+              <a:rPr sz="1300" b="1">
+                <a:solidFill>
+                  <a:srgbClr val="2E6FB5"/>
+                </a:solidFill>
+              </a:rPr>
+              <a:t>▪  </a:t>
+            </a:r>
+            <a:r>
+              <a:rPr sz="1500">
+                <a:solidFill>
+                  <a:srgbClr val="2A2A2A"/>
+                </a:solidFill>
+              </a:rPr>
+              <a:t>YOLO + PyTorch: the trained ball detector. Three.js: the 3D viewer. Firebase: sign-in and storage.</a:t>
             </a:r>
           </a:p>
         </p:txBody>
@@ -7558,8 +9398,8 @@
         </p:nvSpPr>
         <p:spPr>
           <a:xfrm>
-            <a:off x="502920" y="438912"/>
-            <a:ext cx="8138160" cy="201168"/>
+            <a:off x="457200" y="384048"/>
+            <a:ext cx="8229600" cy="201168"/>
           </a:xfrm>
           <a:prstGeom prst="rect">
             <a:avLst/>
@@ -7567,12 +9407,21 @@
           <a:noFill/>
         </p:spPr>
         <p:txBody>
-          <a:bodyPr wrap="none">
+          <a:bodyPr wrap="square" anchor="t" lIns="0" rIns="0" tIns="0" bIns="0">
             <a:noAutofit/>
           </a:bodyPr>
           <a:lstStyle/>
           <a:p>
-            <a:pPr>
+            <a:pPr algn="l">
+              <a:lnSpc>
+                <a:spcPct val="104000"/>
+              </a:lnSpc>
+              <a:spcBef>
+                <a:spcPts val="0"/>
+              </a:spcBef>
+              <a:spcAft>
+                <a:spcPts val="0"/>
+              </a:spcAft>
               <a:defRPr sz="1100" b="1">
                 <a:solidFill>
                   <a:srgbClr val="2E6FB5"/>
@@ -7580,7 +9429,7 @@
               </a:defRPr>
             </a:pPr>
             <a:r>
-              <a:t>RESULTS</a:t>
+              <a:t>IMPLEMENTATION</a:t>
             </a:r>
           </a:p>
         </p:txBody>
@@ -7593,8 +9442,8 @@
         </p:nvSpPr>
         <p:spPr>
           <a:xfrm>
-            <a:off x="502920" y="640080"/>
-            <a:ext cx="8138160" cy="530352"/>
+            <a:off x="457200" y="566928"/>
+            <a:ext cx="8229600" cy="475488"/>
           </a:xfrm>
           <a:prstGeom prst="rect">
             <a:avLst/>
@@ -7602,20 +9451,29 @@
           <a:noFill/>
         </p:spPr>
         <p:txBody>
-          <a:bodyPr wrap="square" anchor="ctr">
+          <a:bodyPr wrap="square" anchor="ctr" lIns="0" rIns="0" tIns="0" bIns="0">
             <a:noAutofit/>
           </a:bodyPr>
           <a:lstStyle/>
           <a:p>
-            <a:pPr>
-              <a:defRPr sz="2400" b="1">
+            <a:pPr algn="l">
+              <a:lnSpc>
+                <a:spcPct val="104000"/>
+              </a:lnSpc>
+              <a:spcBef>
+                <a:spcPts val="0"/>
+              </a:spcBef>
+              <a:spcAft>
+                <a:spcPts val="0"/>
+              </a:spcAft>
+              <a:defRPr sz="2300" b="1">
                 <a:solidFill>
                   <a:srgbClr val="12335B"/>
                 </a:solidFill>
               </a:defRPr>
             </a:pPr>
             <a:r>
-              <a:t>3D Hawk-Eye View: test3</a:t>
+              <a:t>Module Details</a:t>
             </a:r>
           </a:p>
         </p:txBody>
@@ -7628,8 +9486,8 @@
         </p:nvSpPr>
         <p:spPr>
           <a:xfrm>
-            <a:off x="502920" y="1170432"/>
-            <a:ext cx="1828800" cy="38100"/>
+            <a:off x="457200" y="1060704"/>
+            <a:ext cx="1737360" cy="38100"/>
           </a:xfrm>
           <a:prstGeom prst="rect">
             <a:avLst/>
@@ -7672,7 +9530,7 @@
         </p:nvSpPr>
         <p:spPr>
           <a:xfrm>
-            <a:off x="8001000" y="4759452"/>
+            <a:off x="8046720" y="4777740"/>
             <a:ext cx="640080" cy="274320"/>
           </a:xfrm>
           <a:prstGeom prst="rect">
@@ -7681,15 +9539,24 @@
           <a:noFill/>
         </p:spPr>
         <p:txBody>
-          <a:bodyPr wrap="none">
-            <a:spAutoFit/>
+          <a:bodyPr wrap="square" anchor="t" lIns="0" rIns="0" tIns="0" bIns="0">
+            <a:noAutofit/>
           </a:bodyPr>
           <a:lstStyle/>
           <a:p>
             <a:pPr algn="r">
-              <a:defRPr sz="900">
-                <a:solidFill>
-                  <a:srgbClr val="8A8A8A"/>
+              <a:lnSpc>
+                <a:spcPct val="104000"/>
+              </a:lnSpc>
+              <a:spcBef>
+                <a:spcPts val="0"/>
+              </a:spcBef>
+              <a:spcAft>
+                <a:spcPts val="0"/>
+              </a:spcAft>
+              <a:defRPr sz="900" b="0">
+                <a:solidFill>
+                  <a:srgbClr val="7C8690"/>
                 </a:solidFill>
               </a:defRPr>
             </a:pPr>
@@ -7699,30 +9566,177 @@
           </a:p>
         </p:txBody>
       </p:sp>
-      <p:pic>
-        <p:nvPicPr>
-          <p:cNvPr id="6" name="Picture 5" descr="test3_3d_path.png"/>
-          <p:cNvPicPr>
-            <a:picLocks noChangeAspect="1"/>
-          </p:cNvPicPr>
-          <p:nvPr/>
-        </p:nvPicPr>
-        <p:blipFill>
-          <a:blip r:embed="rId2"/>
-          <a:stretch>
-            <a:fillRect/>
-          </a:stretch>
-        </p:blipFill>
-        <p:spPr>
-          <a:xfrm>
-            <a:off x="1858072" y="1335024"/>
-            <a:ext cx="5427856" cy="2967228"/>
-          </a:xfrm>
-          <a:prstGeom prst="rect">
-            <a:avLst/>
-          </a:prstGeom>
-        </p:spPr>
-      </p:pic>
+      <p:sp>
+        <p:nvSpPr>
+          <p:cNvPr id="6" name="TextBox 5"/>
+          <p:cNvSpPr txBox="1"/>
+          <p:nvPr/>
+        </p:nvSpPr>
+        <p:spPr>
+          <a:xfrm>
+            <a:off x="457200" y="1280160"/>
+            <a:ext cx="8229600" cy="457200"/>
+          </a:xfrm>
+          <a:prstGeom prst="rect">
+            <a:avLst/>
+          </a:prstGeom>
+          <a:noFill/>
+        </p:spPr>
+        <p:txBody>
+          <a:bodyPr wrap="square" anchor="ctr" lIns="0" rIns="0" tIns="0" bIns="0">
+            <a:noAutofit/>
+          </a:bodyPr>
+          <a:lstStyle/>
+          <a:p>
+            <a:pPr algn="l">
+              <a:lnSpc>
+                <a:spcPct val="102000"/>
+              </a:lnSpc>
+              <a:spcBef>
+                <a:spcPts val="0"/>
+              </a:spcBef>
+              <a:spcAft>
+                <a:spcPts val="0"/>
+              </a:spcAft>
+              <a:defRPr sz="1600" b="1">
+                <a:solidFill>
+                  <a:srgbClr val="12335B"/>
+                </a:solidFill>
+              </a:defRPr>
+            </a:pPr>
+            <a:r>
+              <a:t>One module per pipeline step, each small and testable.</a:t>
+            </a:r>
+          </a:p>
+        </p:txBody>
+      </p:sp>
+      <p:sp>
+        <p:nvSpPr>
+          <p:cNvPr id="7" name="TextBox 6"/>
+          <p:cNvSpPr txBox="1"/>
+          <p:nvPr/>
+        </p:nvSpPr>
+        <p:spPr>
+          <a:xfrm>
+            <a:off x="457200" y="1847088"/>
+            <a:ext cx="8229600" cy="2510028"/>
+          </a:xfrm>
+          <a:prstGeom prst="rect">
+            <a:avLst/>
+          </a:prstGeom>
+          <a:noFill/>
+        </p:spPr>
+        <p:txBody>
+          <a:bodyPr wrap="square" anchor="t" lIns="0" rIns="0" tIns="0" bIns="0">
+            <a:noAutofit/>
+          </a:bodyPr>
+          <a:lstStyle/>
+          <a:p>
+            <a:pPr>
+              <a:lnSpc>
+                <a:spcPct val="106000"/>
+              </a:lnSpc>
+              <a:spcAft>
+                <a:spcPts val="1100"/>
+              </a:spcAft>
+            </a:pPr>
+            <a:r>
+              <a:rPr sz="1300" b="1">
+                <a:solidFill>
+                  <a:srgbClr val="2E6FB5"/>
+                </a:solidFill>
+              </a:rPr>
+              <a:t>▪  </a:t>
+            </a:r>
+            <a:r>
+              <a:rPr sz="1500">
+                <a:solidFill>
+                  <a:srgbClr val="2A2A2A"/>
+                </a:solidFill>
+              </a:rPr>
+              <a:t>Calibration: camera position from the tapped stumps; also gives pitch length.</a:t>
+            </a:r>
+          </a:p>
+          <a:p>
+            <a:pPr>
+              <a:lnSpc>
+                <a:spcPct val="106000"/>
+              </a:lnSpc>
+              <a:spcAft>
+                <a:spcPts val="1100"/>
+              </a:spcAft>
+            </a:pPr>
+            <a:r>
+              <a:rPr sz="1300" b="1">
+                <a:solidFill>
+                  <a:srgbClr val="2E6FB5"/>
+                </a:solidFill>
+              </a:rPr>
+              <a:t>▪  </a:t>
+            </a:r>
+            <a:r>
+              <a:rPr sz="1500">
+                <a:solidFill>
+                  <a:srgbClr val="2A2A2A"/>
+                </a:solidFill>
+              </a:rPr>
+              <a:t>Detection: motion + colour + YOLO inside the pitch area.</a:t>
+            </a:r>
+          </a:p>
+          <a:p>
+            <a:pPr>
+              <a:lnSpc>
+                <a:spcPct val="106000"/>
+              </a:lnSpc>
+              <a:spcAft>
+                <a:spcPts val="1100"/>
+              </a:spcAft>
+            </a:pPr>
+            <a:r>
+              <a:rPr sz="1300" b="1">
+                <a:solidFill>
+                  <a:srgbClr val="2E6FB5"/>
+                </a:solidFill>
+              </a:rPr>
+              <a:t>▪  </a:t>
+            </a:r>
+            <a:r>
+              <a:rPr sz="1500">
+                <a:solidFill>
+                  <a:srgbClr val="2A2A2A"/>
+                </a:solidFill>
+              </a:rPr>
+              <a:t>Trajectory: RANSAC seed, refine, then merge the pre- and post-bounce arcs.</a:t>
+            </a:r>
+          </a:p>
+          <a:p>
+            <a:pPr>
+              <a:lnSpc>
+                <a:spcPct val="106000"/>
+              </a:lnSpc>
+              <a:spcAft>
+                <a:spcPts val="1100"/>
+              </a:spcAft>
+            </a:pPr>
+            <a:r>
+              <a:rPr sz="1300" b="1">
+                <a:solidFill>
+                  <a:srgbClr val="2E6FB5"/>
+                </a:solidFill>
+              </a:rPr>
+              <a:t>▪  </a:t>
+            </a:r>
+            <a:r>
+              <a:rPr sz="1500">
+                <a:solidFill>
+                  <a:srgbClr val="2A2A2A"/>
+                </a:solidFill>
+              </a:rPr>
+              <a:t>Reconstruction + decision: lift to 3D, predict to the stumps, apply ICC Rule 36.</a:t>
+            </a:r>
+          </a:p>
+        </p:txBody>
+      </p:sp>
     </p:spTree>
   </p:cSld>
   <p:clrMapOvr>
@@ -7757,8 +9771,8 @@
         </p:nvSpPr>
         <p:spPr>
           <a:xfrm>
-            <a:off x="502920" y="438912"/>
-            <a:ext cx="8138160" cy="201168"/>
+            <a:off x="457200" y="384048"/>
+            <a:ext cx="8229600" cy="201168"/>
           </a:xfrm>
           <a:prstGeom prst="rect">
             <a:avLst/>
@@ -7766,12 +9780,21 @@
           <a:noFill/>
         </p:spPr>
         <p:txBody>
-          <a:bodyPr wrap="none">
+          <a:bodyPr wrap="square" anchor="t" lIns="0" rIns="0" tIns="0" bIns="0">
             <a:noAutofit/>
           </a:bodyPr>
           <a:lstStyle/>
           <a:p>
-            <a:pPr>
+            <a:pPr algn="l">
+              <a:lnSpc>
+                <a:spcPct val="104000"/>
+              </a:lnSpc>
+              <a:spcBef>
+                <a:spcPts val="0"/>
+              </a:spcBef>
+              <a:spcAft>
+                <a:spcPts val="0"/>
+              </a:spcAft>
               <a:defRPr sz="1100" b="1">
                 <a:solidFill>
                   <a:srgbClr val="2E6FB5"/>
@@ -7792,8 +9815,8 @@
         </p:nvSpPr>
         <p:spPr>
           <a:xfrm>
-            <a:off x="502920" y="640080"/>
-            <a:ext cx="8138160" cy="530352"/>
+            <a:off x="457200" y="566928"/>
+            <a:ext cx="8229600" cy="475488"/>
           </a:xfrm>
           <a:prstGeom prst="rect">
             <a:avLst/>
@@ -7801,20 +9824,29 @@
           <a:noFill/>
         </p:spPr>
         <p:txBody>
-          <a:bodyPr wrap="square" anchor="ctr">
+          <a:bodyPr wrap="square" anchor="ctr" lIns="0" rIns="0" tIns="0" bIns="0">
             <a:noAutofit/>
           </a:bodyPr>
           <a:lstStyle/>
           <a:p>
-            <a:pPr>
-              <a:defRPr sz="2400" b="1">
+            <a:pPr algn="l">
+              <a:lnSpc>
+                <a:spcPct val="104000"/>
+              </a:lnSpc>
+              <a:spcBef>
+                <a:spcPts val="0"/>
+              </a:spcBef>
+              <a:spcAft>
+                <a:spcPts val="0"/>
+              </a:spcAft>
+              <a:defRPr sz="2300" b="1">
                 <a:solidFill>
                   <a:srgbClr val="12335B"/>
                 </a:solidFill>
               </a:defRPr>
             </a:pPr>
             <a:r>
-              <a:t>Synthetic Validation: 8 Scenarios</a:t>
+              <a:t>Real-Video Test: test3.mp4</a:t>
             </a:r>
           </a:p>
         </p:txBody>
@@ -7827,8 +9859,8 @@
         </p:nvSpPr>
         <p:spPr>
           <a:xfrm>
-            <a:off x="502920" y="1170432"/>
-            <a:ext cx="1828800" cy="38100"/>
+            <a:off x="457200" y="1060704"/>
+            <a:ext cx="1737360" cy="38100"/>
           </a:xfrm>
           <a:prstGeom prst="rect">
             <a:avLst/>
@@ -7871,7 +9903,7 @@
         </p:nvSpPr>
         <p:spPr>
           <a:xfrm>
-            <a:off x="8001000" y="4759452"/>
+            <a:off x="8046720" y="4777740"/>
             <a:ext cx="640080" cy="274320"/>
           </a:xfrm>
           <a:prstGeom prst="rect">
@@ -7880,27 +9912,80 @@
           <a:noFill/>
         </p:spPr>
         <p:txBody>
-          <a:bodyPr wrap="none">
-            <a:spAutoFit/>
+          <a:bodyPr wrap="square" anchor="t" lIns="0" rIns="0" tIns="0" bIns="0">
+            <a:noAutofit/>
           </a:bodyPr>
           <a:lstStyle/>
           <a:p>
             <a:pPr algn="r">
-              <a:defRPr sz="900">
-                <a:solidFill>
-                  <a:srgbClr val="8A8A8A"/>
+              <a:lnSpc>
+                <a:spcPct val="104000"/>
+              </a:lnSpc>
+              <a:spcBef>
+                <a:spcPts val="0"/>
+              </a:spcBef>
+              <a:spcAft>
+                <a:spcPts val="0"/>
+              </a:spcAft>
+              <a:defRPr sz="900" b="0">
+                <a:solidFill>
+                  <a:srgbClr val="7C8690"/>
                 </a:solidFill>
               </a:defRPr>
             </a:pPr>
             <a:r>
               <a:t>17</a:t>
+            </a:r>
+          </a:p>
+        </p:txBody>
+      </p:sp>
+      <p:sp>
+        <p:nvSpPr>
+          <p:cNvPr id="6" name="TextBox 5"/>
+          <p:cNvSpPr txBox="1"/>
+          <p:nvPr/>
+        </p:nvSpPr>
+        <p:spPr>
+          <a:xfrm>
+            <a:off x="457200" y="1280160"/>
+            <a:ext cx="8229600" cy="457200"/>
+          </a:xfrm>
+          <a:prstGeom prst="rect">
+            <a:avLst/>
+          </a:prstGeom>
+          <a:noFill/>
+        </p:spPr>
+        <p:txBody>
+          <a:bodyPr wrap="square" anchor="ctr" lIns="0" rIns="0" tIns="0" bIns="0">
+            <a:noAutofit/>
+          </a:bodyPr>
+          <a:lstStyle/>
+          <a:p>
+            <a:pPr algn="l">
+              <a:lnSpc>
+                <a:spcPct val="102000"/>
+              </a:lnSpc>
+              <a:spcBef>
+                <a:spcPts val="0"/>
+              </a:spcBef>
+              <a:spcAft>
+                <a:spcPts val="0"/>
+              </a:spcAft>
+              <a:defRPr sz="1600" b="1">
+                <a:solidFill>
+                  <a:srgbClr val="12335B"/>
+                </a:solidFill>
+              </a:defRPr>
+            </a:pPr>
+            <a:r>
+              <a:t>A real handheld off-spin clip, tracked end to end (full 20.12 m pitch).</a:t>
             </a:r>
           </a:p>
         </p:txBody>
       </p:sp>
       <p:pic>
         <p:nvPicPr>
-          <p:cNvPr id="6" name="Picture 5" descr="synth_summary.png"/>
+          <p:cNvPr id="7" name="Picture 6" descr="test3_overlay.png"/>
           <p:cNvPicPr>
             <a:picLocks noChangeAspect="1"/>
           </p:cNvPicPr>
@@ -7914,8 +9999,8 @@
         </p:blipFill>
         <p:spPr>
           <a:xfrm>
-            <a:off x="502920" y="2272538"/>
-            <a:ext cx="3931920" cy="1092200"/>
+            <a:off x="1728645" y="1847088"/>
+            <a:ext cx="1411890" cy="2510028"/>
           </a:xfrm>
           <a:prstGeom prst="rect">
             <a:avLst/>
@@ -7924,14 +10009,62 @@
       </p:pic>
       <p:sp>
         <p:nvSpPr>
-          <p:cNvPr id="7" name="TextBox 6"/>
+          <p:cNvPr id="8" name="Rounded Rectangle 7"/>
+          <p:cNvSpPr/>
+          <p:nvPr/>
+        </p:nvSpPr>
+        <p:spPr>
+          <a:xfrm>
+            <a:off x="4732020" y="1847088"/>
+            <a:ext cx="1904238" cy="825246"/>
+          </a:xfrm>
+          <a:prstGeom prst="roundRect">
+            <a:avLst>
+              <a:gd name="adj" fmla="val 8000"/>
+            </a:avLst>
+          </a:prstGeom>
+          <a:solidFill>
+            <a:srgbClr val="F1F5FA"/>
+          </a:solidFill>
+          <a:ln w="9525">
+            <a:solidFill>
+              <a:srgbClr val="D7E0EC"/>
+            </a:solidFill>
+          </a:ln>
+          <a:effectLst/>
+        </p:spPr>
+        <p:style>
+          <a:lnRef idx="1">
+            <a:schemeClr val="accent1"/>
+          </a:lnRef>
+          <a:fillRef idx="3">
+            <a:schemeClr val="accent1"/>
+          </a:fillRef>
+          <a:effectRef idx="2">
+            <a:schemeClr val="accent1"/>
+          </a:effectRef>
+          <a:fontRef idx="minor">
+            <a:schemeClr val="lt1"/>
+          </a:fontRef>
+        </p:style>
+        <p:txBody>
+          <a:bodyPr rtlCol="0" anchor="ctr"/>
+          <a:lstStyle/>
+          <a:p>
+            <a:pPr algn="ctr"/>
+          </a:p>
+        </p:txBody>
+      </p:sp>
+      <p:sp>
+        <p:nvSpPr>
+          <p:cNvPr id="9" name="TextBox 8"/>
           <p:cNvSpPr txBox="1"/>
           <p:nvPr/>
         </p:nvSpPr>
         <p:spPr>
           <a:xfrm>
-            <a:off x="4709160" y="1335024"/>
-            <a:ext cx="3931920" cy="2967228"/>
+            <a:off x="4841748" y="1847088"/>
+            <a:ext cx="1684782" cy="825246"/>
           </a:xfrm>
           <a:prstGeom prst="rect">
             <a:avLst/>
@@ -7939,80 +10072,479 @@
           <a:noFill/>
         </p:spPr>
         <p:txBody>
-          <a:bodyPr wrap="square" anchor="ctr">
-            <a:normAutofit/>
+          <a:bodyPr wrap="square" anchor="ctr" lIns="0" rIns="0" tIns="0" bIns="0">
+            <a:noAutofit/>
           </a:bodyPr>
           <a:lstStyle/>
           <a:p>
-            <a:pPr>
-              <a:lnSpc>
-                <a:spcPct val="104000"/>
-              </a:lnSpc>
-              <a:spcAft>
-                <a:spcPts val="800"/>
-              </a:spcAft>
-              <a:defRPr sz="1500">
-                <a:solidFill>
-                  <a:srgbClr val="222222"/>
+            <a:pPr algn="l">
+              <a:lnSpc>
+                <a:spcPct val="95000"/>
+              </a:lnSpc>
+              <a:spcBef>
+                <a:spcPts val="0"/>
+              </a:spcBef>
+              <a:spcAft>
+                <a:spcPts val="200"/>
+              </a:spcAft>
+              <a:defRPr sz="2100" b="1">
+                <a:solidFill>
+                  <a:srgbClr val="12335B"/>
                 </a:solidFill>
               </a:defRPr>
             </a:pPr>
             <a:r>
-              <a:t>• 8 controlled deliveries: medium pace, middle-stump corridor, full length.</a:t>
-            </a:r>
-          </a:p>
-          <a:p>
-            <a:pPr>
-              <a:lnSpc>
-                <a:spcPct val="104000"/>
-              </a:lnSpc>
-              <a:spcAft>
-                <a:spcPts val="800"/>
-              </a:spcAft>
-              <a:defRPr sz="1500">
-                <a:solidFill>
-                  <a:srgbClr val="222222"/>
+              <a:t>29</a:t>
+            </a:r>
+          </a:p>
+          <a:p>
+            <a:pPr algn="l">
+              <a:lnSpc>
+                <a:spcPct val="100000"/>
+              </a:lnSpc>
+              <a:spcBef>
+                <a:spcPts val="0"/>
+              </a:spcBef>
+              <a:spcAft>
+                <a:spcPts val="0"/>
+              </a:spcAft>
+              <a:defRPr sz="1050" b="0">
+                <a:solidFill>
+                  <a:srgbClr val="7C8690"/>
                 </a:solidFill>
               </a:defRPr>
             </a:pPr>
             <a:r>
-              <a:t>• Camera pose recovered correctly in every scene.</a:t>
-            </a:r>
-          </a:p>
-          <a:p>
-            <a:pPr>
-              <a:lnSpc>
-                <a:spcPct val="104000"/>
-              </a:lnSpc>
-              <a:spcAft>
-                <a:spcPts val="800"/>
-              </a:spcAft>
-              <a:defRPr sz="1500">
-                <a:solidFill>
-                  <a:srgbClr val="222222"/>
+              <a:t>ball detections (28 fit the path)</a:t>
+            </a:r>
+          </a:p>
+        </p:txBody>
+      </p:sp>
+      <p:sp>
+        <p:nvSpPr>
+          <p:cNvPr id="10" name="Rounded Rectangle 9"/>
+          <p:cNvSpPr/>
+          <p:nvPr/>
+        </p:nvSpPr>
+        <p:spPr>
+          <a:xfrm>
+            <a:off x="6782562" y="1847088"/>
+            <a:ext cx="1904238" cy="825246"/>
+          </a:xfrm>
+          <a:prstGeom prst="roundRect">
+            <a:avLst>
+              <a:gd name="adj" fmla="val 8000"/>
+            </a:avLst>
+          </a:prstGeom>
+          <a:solidFill>
+            <a:srgbClr val="F1F5FA"/>
+          </a:solidFill>
+          <a:ln w="9525">
+            <a:solidFill>
+              <a:srgbClr val="D7E0EC"/>
+            </a:solidFill>
+          </a:ln>
+          <a:effectLst/>
+        </p:spPr>
+        <p:style>
+          <a:lnRef idx="1">
+            <a:schemeClr val="accent1"/>
+          </a:lnRef>
+          <a:fillRef idx="3">
+            <a:schemeClr val="accent1"/>
+          </a:fillRef>
+          <a:effectRef idx="2">
+            <a:schemeClr val="accent1"/>
+          </a:effectRef>
+          <a:fontRef idx="minor">
+            <a:schemeClr val="lt1"/>
+          </a:fontRef>
+        </p:style>
+        <p:txBody>
+          <a:bodyPr rtlCol="0" anchor="ctr"/>
+          <a:lstStyle/>
+          <a:p>
+            <a:pPr algn="ctr"/>
+          </a:p>
+        </p:txBody>
+      </p:sp>
+      <p:sp>
+        <p:nvSpPr>
+          <p:cNvPr id="11" name="TextBox 10"/>
+          <p:cNvSpPr txBox="1"/>
+          <p:nvPr/>
+        </p:nvSpPr>
+        <p:spPr>
+          <a:xfrm>
+            <a:off x="6892290" y="1847088"/>
+            <a:ext cx="1684782" cy="825246"/>
+          </a:xfrm>
+          <a:prstGeom prst="rect">
+            <a:avLst/>
+          </a:prstGeom>
+          <a:noFill/>
+        </p:spPr>
+        <p:txBody>
+          <a:bodyPr wrap="square" anchor="ctr" lIns="0" rIns="0" tIns="0" bIns="0">
+            <a:noAutofit/>
+          </a:bodyPr>
+          <a:lstStyle/>
+          <a:p>
+            <a:pPr algn="l">
+              <a:lnSpc>
+                <a:spcPct val="95000"/>
+              </a:lnSpc>
+              <a:spcBef>
+                <a:spcPts val="0"/>
+              </a:spcBef>
+              <a:spcAft>
+                <a:spcPts val="200"/>
+              </a:spcAft>
+              <a:defRPr sz="2100" b="1">
+                <a:solidFill>
+                  <a:srgbClr val="12335B"/>
                 </a:solidFill>
               </a:defRPr>
             </a:pPr>
             <a:r>
-              <a:t>• 8 / 8 reconstructions within honest monocular bounds (speed, bounce, impact).</a:t>
-            </a:r>
-          </a:p>
-          <a:p>
-            <a:pPr>
-              <a:lnSpc>
-                <a:spcPct val="104000"/>
-              </a:lnSpc>
-              <a:spcAft>
-                <a:spcPts val="800"/>
-              </a:spcAft>
-              <a:defRPr sz="1500">
-                <a:solidFill>
-                  <a:srgbClr val="222222"/>
+              <a:t>10.55 px</a:t>
+            </a:r>
+          </a:p>
+          <a:p>
+            <a:pPr algn="l">
+              <a:lnSpc>
+                <a:spcPct val="100000"/>
+              </a:lnSpc>
+              <a:spcBef>
+                <a:spcPts val="0"/>
+              </a:spcBef>
+              <a:spcAft>
+                <a:spcPts val="0"/>
+              </a:spcAft>
+              <a:defRPr sz="1050" b="0">
+                <a:solidFill>
+                  <a:srgbClr val="7C8690"/>
                 </a:solidFill>
               </a:defRPr>
             </a:pPr>
             <a:r>
-              <a:t>• All eight ground-truth OUT deliveries returned OUT.</a:t>
+              <a:t>calibration error</a:t>
+            </a:r>
+          </a:p>
+        </p:txBody>
+      </p:sp>
+      <p:sp>
+        <p:nvSpPr>
+          <p:cNvPr id="12" name="Rounded Rectangle 11"/>
+          <p:cNvSpPr/>
+          <p:nvPr/>
+        </p:nvSpPr>
+        <p:spPr>
+          <a:xfrm>
+            <a:off x="4732020" y="2818638"/>
+            <a:ext cx="1904238" cy="825246"/>
+          </a:xfrm>
+          <a:prstGeom prst="roundRect">
+            <a:avLst>
+              <a:gd name="adj" fmla="val 8000"/>
+            </a:avLst>
+          </a:prstGeom>
+          <a:solidFill>
+            <a:srgbClr val="F1F5FA"/>
+          </a:solidFill>
+          <a:ln w="9525">
+            <a:solidFill>
+              <a:srgbClr val="D7E0EC"/>
+            </a:solidFill>
+          </a:ln>
+          <a:effectLst/>
+        </p:spPr>
+        <p:style>
+          <a:lnRef idx="1">
+            <a:schemeClr val="accent1"/>
+          </a:lnRef>
+          <a:fillRef idx="3">
+            <a:schemeClr val="accent1"/>
+          </a:fillRef>
+          <a:effectRef idx="2">
+            <a:schemeClr val="accent1"/>
+          </a:effectRef>
+          <a:fontRef idx="minor">
+            <a:schemeClr val="lt1"/>
+          </a:fontRef>
+        </p:style>
+        <p:txBody>
+          <a:bodyPr rtlCol="0" anchor="ctr"/>
+          <a:lstStyle/>
+          <a:p>
+            <a:pPr algn="ctr"/>
+          </a:p>
+        </p:txBody>
+      </p:sp>
+      <p:sp>
+        <p:nvSpPr>
+          <p:cNvPr id="13" name="TextBox 12"/>
+          <p:cNvSpPr txBox="1"/>
+          <p:nvPr/>
+        </p:nvSpPr>
+        <p:spPr>
+          <a:xfrm>
+            <a:off x="4841748" y="2818638"/>
+            <a:ext cx="1684782" cy="825246"/>
+          </a:xfrm>
+          <a:prstGeom prst="rect">
+            <a:avLst/>
+          </a:prstGeom>
+          <a:noFill/>
+        </p:spPr>
+        <p:txBody>
+          <a:bodyPr wrap="square" anchor="ctr" lIns="0" rIns="0" tIns="0" bIns="0">
+            <a:noAutofit/>
+          </a:bodyPr>
+          <a:lstStyle/>
+          <a:p>
+            <a:pPr algn="l">
+              <a:lnSpc>
+                <a:spcPct val="95000"/>
+              </a:lnSpc>
+              <a:spcBef>
+                <a:spcPts val="0"/>
+              </a:spcBef>
+              <a:spcAft>
+                <a:spcPts val="200"/>
+              </a:spcAft>
+              <a:defRPr sz="2100" b="1">
+                <a:solidFill>
+                  <a:srgbClr val="12335B"/>
+                </a:solidFill>
+              </a:defRPr>
+            </a:pPr>
+            <a:r>
+              <a:t>84.0 km/h</a:t>
+            </a:r>
+          </a:p>
+          <a:p>
+            <a:pPr algn="l">
+              <a:lnSpc>
+                <a:spcPct val="100000"/>
+              </a:lnSpc>
+              <a:spcBef>
+                <a:spcPts val="0"/>
+              </a:spcBef>
+              <a:spcAft>
+                <a:spcPts val="0"/>
+              </a:spcAft>
+              <a:defRPr sz="1050" b="0">
+                <a:solidFill>
+                  <a:srgbClr val="7C8690"/>
+                </a:solidFill>
+              </a:defRPr>
+            </a:pPr>
+            <a:r>
+              <a:t>release speed</a:t>
+            </a:r>
+          </a:p>
+        </p:txBody>
+      </p:sp>
+      <p:sp>
+        <p:nvSpPr>
+          <p:cNvPr id="14" name="Rounded Rectangle 13"/>
+          <p:cNvSpPr/>
+          <p:nvPr/>
+        </p:nvSpPr>
+        <p:spPr>
+          <a:xfrm>
+            <a:off x="6782562" y="2818638"/>
+            <a:ext cx="1904238" cy="825246"/>
+          </a:xfrm>
+          <a:prstGeom prst="roundRect">
+            <a:avLst>
+              <a:gd name="adj" fmla="val 8000"/>
+            </a:avLst>
+          </a:prstGeom>
+          <a:solidFill>
+            <a:srgbClr val="F1F5FA"/>
+          </a:solidFill>
+          <a:ln w="9525">
+            <a:solidFill>
+              <a:srgbClr val="D7E0EC"/>
+            </a:solidFill>
+          </a:ln>
+          <a:effectLst/>
+        </p:spPr>
+        <p:style>
+          <a:lnRef idx="1">
+            <a:schemeClr val="accent1"/>
+          </a:lnRef>
+          <a:fillRef idx="3">
+            <a:schemeClr val="accent1"/>
+          </a:fillRef>
+          <a:effectRef idx="2">
+            <a:schemeClr val="accent1"/>
+          </a:effectRef>
+          <a:fontRef idx="minor">
+            <a:schemeClr val="lt1"/>
+          </a:fontRef>
+        </p:style>
+        <p:txBody>
+          <a:bodyPr rtlCol="0" anchor="ctr"/>
+          <a:lstStyle/>
+          <a:p>
+            <a:pPr algn="ctr"/>
+          </a:p>
+        </p:txBody>
+      </p:sp>
+      <p:sp>
+        <p:nvSpPr>
+          <p:cNvPr id="15" name="TextBox 14"/>
+          <p:cNvSpPr txBox="1"/>
+          <p:nvPr/>
+        </p:nvSpPr>
+        <p:spPr>
+          <a:xfrm>
+            <a:off x="6892290" y="2818638"/>
+            <a:ext cx="1684782" cy="825246"/>
+          </a:xfrm>
+          <a:prstGeom prst="rect">
+            <a:avLst/>
+          </a:prstGeom>
+          <a:noFill/>
+        </p:spPr>
+        <p:txBody>
+          <a:bodyPr wrap="square" anchor="ctr" lIns="0" rIns="0" tIns="0" bIns="0">
+            <a:noAutofit/>
+          </a:bodyPr>
+          <a:lstStyle/>
+          <a:p>
+            <a:pPr algn="l">
+              <a:lnSpc>
+                <a:spcPct val="95000"/>
+              </a:lnSpc>
+              <a:spcBef>
+                <a:spcPts val="0"/>
+              </a:spcBef>
+              <a:spcAft>
+                <a:spcPts val="200"/>
+              </a:spcAft>
+              <a:defRPr sz="2100" b="1">
+                <a:solidFill>
+                  <a:srgbClr val="12335B"/>
+                </a:solidFill>
+              </a:defRPr>
+            </a:pPr>
+            <a:r>
+              <a:t>2.3°</a:t>
+            </a:r>
+          </a:p>
+          <a:p>
+            <a:pPr algn="l">
+              <a:lnSpc>
+                <a:spcPct val="100000"/>
+              </a:lnSpc>
+              <a:spcBef>
+                <a:spcPts val="0"/>
+              </a:spcBef>
+              <a:spcAft>
+                <a:spcPts val="0"/>
+              </a:spcAft>
+              <a:defRPr sz="1050" b="0">
+                <a:solidFill>
+                  <a:srgbClr val="7C8690"/>
+                </a:solidFill>
+              </a:defRPr>
+            </a:pPr>
+            <a:r>
+              <a:t>off-break turn (spin)</a:t>
+            </a:r>
+          </a:p>
+        </p:txBody>
+      </p:sp>
+      <p:sp>
+        <p:nvSpPr>
+          <p:cNvPr id="16" name="Rounded Rectangle 15"/>
+          <p:cNvSpPr/>
+          <p:nvPr/>
+        </p:nvSpPr>
+        <p:spPr>
+          <a:xfrm>
+            <a:off x="4732020" y="3790188"/>
+            <a:ext cx="3954780" cy="566928"/>
+          </a:xfrm>
+          <a:prstGeom prst="roundRect">
+            <a:avLst>
+              <a:gd name="adj" fmla="val 8000"/>
+            </a:avLst>
+          </a:prstGeom>
+          <a:solidFill>
+            <a:srgbClr val="2E6FB5"/>
+          </a:solidFill>
+          <a:ln>
+            <a:noFill/>
+          </a:ln>
+          <a:effectLst/>
+        </p:spPr>
+        <p:style>
+          <a:lnRef idx="1">
+            <a:schemeClr val="accent1"/>
+          </a:lnRef>
+          <a:fillRef idx="3">
+            <a:schemeClr val="accent1"/>
+          </a:fillRef>
+          <a:effectRef idx="2">
+            <a:schemeClr val="accent1"/>
+          </a:effectRef>
+          <a:fontRef idx="minor">
+            <a:schemeClr val="lt1"/>
+          </a:fontRef>
+        </p:style>
+        <p:txBody>
+          <a:bodyPr rtlCol="0" anchor="ctr"/>
+          <a:lstStyle/>
+          <a:p>
+            <a:pPr algn="ctr"/>
+          </a:p>
+        </p:txBody>
+      </p:sp>
+      <p:sp>
+        <p:nvSpPr>
+          <p:cNvPr id="17" name="TextBox 16"/>
+          <p:cNvSpPr txBox="1"/>
+          <p:nvPr/>
+        </p:nvSpPr>
+        <p:spPr>
+          <a:xfrm>
+            <a:off x="4914900" y="3790188"/>
+            <a:ext cx="3589020" cy="566928"/>
+          </a:xfrm>
+          <a:prstGeom prst="rect">
+            <a:avLst/>
+          </a:prstGeom>
+          <a:noFill/>
+        </p:spPr>
+        <p:txBody>
+          <a:bodyPr wrap="square" anchor="ctr" lIns="0" rIns="0" tIns="0" bIns="0">
+            <a:noAutofit/>
+          </a:bodyPr>
+          <a:lstStyle/>
+          <a:p>
+            <a:pPr algn="ctr">
+              <a:lnSpc>
+                <a:spcPct val="100000"/>
+              </a:lnSpc>
+              <a:spcBef>
+                <a:spcPts val="0"/>
+              </a:spcBef>
+              <a:spcAft>
+                <a:spcPts val="0"/>
+              </a:spcAft>
+              <a:defRPr sz="1400" b="1">
+                <a:solidFill>
+                  <a:srgbClr val="FFFFFF"/>
+                </a:solidFill>
+              </a:defRPr>
+            </a:pPr>
+            <a:r>
+              <a:t>NOT OUT  ·  predicted to miss the stumps</a:t>
             </a:r>
           </a:p>
         </p:txBody>
@@ -8051,8 +10583,8 @@
         </p:nvSpPr>
         <p:spPr>
           <a:xfrm>
-            <a:off x="502920" y="438912"/>
-            <a:ext cx="8138160" cy="201168"/>
+            <a:off x="457200" y="384048"/>
+            <a:ext cx="8229600" cy="201168"/>
           </a:xfrm>
           <a:prstGeom prst="rect">
             <a:avLst/>
@@ -8060,12 +10592,21 @@
           <a:noFill/>
         </p:spPr>
         <p:txBody>
-          <a:bodyPr wrap="none">
+          <a:bodyPr wrap="square" anchor="t" lIns="0" rIns="0" tIns="0" bIns="0">
             <a:noAutofit/>
           </a:bodyPr>
           <a:lstStyle/>
           <a:p>
-            <a:pPr>
+            <a:pPr algn="l">
+              <a:lnSpc>
+                <a:spcPct val="104000"/>
+              </a:lnSpc>
+              <a:spcBef>
+                <a:spcPts val="0"/>
+              </a:spcBef>
+              <a:spcAft>
+                <a:spcPts val="0"/>
+              </a:spcAft>
               <a:defRPr sz="1100" b="1">
                 <a:solidFill>
                   <a:srgbClr val="2E6FB5"/>
@@ -8073,7 +10614,7 @@
               </a:defRPr>
             </a:pPr>
             <a:r>
-              <a:t>LIMITATIONS</a:t>
+              <a:t>RESULTS</a:t>
             </a:r>
           </a:p>
         </p:txBody>
@@ -8086,8 +10627,8 @@
         </p:nvSpPr>
         <p:spPr>
           <a:xfrm>
-            <a:off x="502920" y="640080"/>
-            <a:ext cx="8138160" cy="530352"/>
+            <a:off x="457200" y="566928"/>
+            <a:ext cx="8229600" cy="475488"/>
           </a:xfrm>
           <a:prstGeom prst="rect">
             <a:avLst/>
@@ -8095,20 +10636,29 @@
           <a:noFill/>
         </p:spPr>
         <p:txBody>
-          <a:bodyPr wrap="square" anchor="ctr">
+          <a:bodyPr wrap="square" anchor="ctr" lIns="0" rIns="0" tIns="0" bIns="0">
             <a:noAutofit/>
           </a:bodyPr>
           <a:lstStyle/>
           <a:p>
-            <a:pPr>
-              <a:defRPr sz="2400" b="1">
+            <a:pPr algn="l">
+              <a:lnSpc>
+                <a:spcPct val="104000"/>
+              </a:lnSpc>
+              <a:spcBef>
+                <a:spcPts val="0"/>
+              </a:spcBef>
+              <a:spcAft>
+                <a:spcPts val="0"/>
+              </a:spcAft>
+              <a:defRPr sz="2300" b="1">
                 <a:solidFill>
                   <a:srgbClr val="12335B"/>
                 </a:solidFill>
               </a:defRPr>
             </a:pPr>
             <a:r>
-              <a:t>Limitations &amp; Honest Bounds</a:t>
+              <a:t>Interactive 3D Ball-Path View: test3</a:t>
             </a:r>
           </a:p>
         </p:txBody>
@@ -8121,8 +10671,8 @@
         </p:nvSpPr>
         <p:spPr>
           <a:xfrm>
-            <a:off x="502920" y="1170432"/>
-            <a:ext cx="1828800" cy="38100"/>
+            <a:off x="457200" y="1060704"/>
+            <a:ext cx="1737360" cy="38100"/>
           </a:xfrm>
           <a:prstGeom prst="rect">
             <a:avLst/>
@@ -8165,7 +10715,7 @@
         </p:nvSpPr>
         <p:spPr>
           <a:xfrm>
-            <a:off x="8001000" y="4759452"/>
+            <a:off x="8046720" y="4777740"/>
             <a:ext cx="640080" cy="274320"/>
           </a:xfrm>
           <a:prstGeom prst="rect">
@@ -8174,175 +10724,57 @@
           <a:noFill/>
         </p:spPr>
         <p:txBody>
-          <a:bodyPr wrap="none">
-            <a:spAutoFit/>
-          </a:bodyPr>
-          <a:lstStyle/>
-          <a:p>
-            <a:pPr algn="r">
-              <a:defRPr sz="900">
-                <a:solidFill>
-                  <a:srgbClr val="8A8A8A"/>
-                </a:solidFill>
-              </a:defRPr>
-            </a:pPr>
-            <a:r>
-              <a:t>18</a:t>
-            </a:r>
-          </a:p>
-        </p:txBody>
-      </p:sp>
-      <p:sp>
-        <p:nvSpPr>
-          <p:cNvPr id="6" name="TextBox 5"/>
-          <p:cNvSpPr txBox="1"/>
-          <p:nvPr/>
-        </p:nvSpPr>
-        <p:spPr>
-          <a:xfrm>
-            <a:off x="502920" y="1335024"/>
-            <a:ext cx="8138160" cy="502920"/>
-          </a:xfrm>
-          <a:prstGeom prst="rect">
-            <a:avLst/>
-          </a:prstGeom>
-          <a:noFill/>
-        </p:spPr>
-        <p:txBody>
-          <a:bodyPr wrap="square">
+          <a:bodyPr wrap="square" anchor="t" lIns="0" rIns="0" tIns="0" bIns="0">
             <a:noAutofit/>
           </a:bodyPr>
           <a:lstStyle/>
           <a:p>
-            <a:pPr>
-              <a:lnSpc>
-                <a:spcPct val="102000"/>
-              </a:lnSpc>
-              <a:defRPr sz="1700" b="1">
-                <a:solidFill>
-                  <a:srgbClr val="12335B"/>
+            <a:pPr algn="r">
+              <a:lnSpc>
+                <a:spcPct val="104000"/>
+              </a:lnSpc>
+              <a:spcBef>
+                <a:spcPts val="0"/>
+              </a:spcBef>
+              <a:spcAft>
+                <a:spcPts val="0"/>
+              </a:spcAft>
+              <a:defRPr sz="900" b="0">
+                <a:solidFill>
+                  <a:srgbClr val="7C8690"/>
                 </a:solidFill>
               </a:defRPr>
             </a:pPr>
             <a:r>
-              <a:t>Honest about what a single camera can and cannot do.</a:t>
-            </a:r>
-          </a:p>
-        </p:txBody>
-      </p:sp>
-      <p:sp>
-        <p:nvSpPr>
-          <p:cNvPr id="7" name="TextBox 6"/>
-          <p:cNvSpPr txBox="1"/>
-          <p:nvPr/>
-        </p:nvSpPr>
-        <p:spPr>
-          <a:xfrm>
-            <a:off x="502920" y="1847088"/>
-            <a:ext cx="8138160" cy="2455164"/>
-          </a:xfrm>
-          <a:prstGeom prst="rect">
-            <a:avLst/>
-          </a:prstGeom>
-          <a:noFill/>
-        </p:spPr>
-        <p:txBody>
-          <a:bodyPr wrap="square">
-            <a:normAutofit/>
-          </a:bodyPr>
-          <a:lstStyle/>
-          <a:p>
-            <a:pPr>
-              <a:lnSpc>
-                <a:spcPct val="104000"/>
-              </a:lnSpc>
-              <a:spcAft>
-                <a:spcPts val="600"/>
-              </a:spcAft>
-              <a:defRPr sz="1400">
-                <a:solidFill>
-                  <a:srgbClr val="222222"/>
-                </a:solidFill>
-              </a:defRPr>
-            </a:pPr>
-            <a:r>
-              <a:t>• A single phone cannot triangulate depth like six to eight synchronised Hawk-Eye cameras.</a:t>
-            </a:r>
-          </a:p>
-          <a:p>
-            <a:pPr>
-              <a:lnSpc>
-                <a:spcPct val="104000"/>
-              </a:lnSpc>
-              <a:spcAft>
-                <a:spcPts val="600"/>
-              </a:spcAft>
-              <a:defRPr sz="1400">
-                <a:solidFill>
-                  <a:srgbClr val="222222"/>
-                </a:solidFill>
-              </a:defRPr>
-            </a:pPr>
-            <a:r>
-              <a:t>• Depth-from-ball-radius is good to a few tens of centimetres, not millimetres.</a:t>
-            </a:r>
-          </a:p>
-          <a:p>
-            <a:pPr>
-              <a:lnSpc>
-                <a:spcPct val="104000"/>
-              </a:lnSpc>
-              <a:spcAft>
-                <a:spcPts val="600"/>
-              </a:spcAft>
-              <a:defRPr sz="1400">
-                <a:solidFill>
-                  <a:srgbClr val="222222"/>
-                </a:solidFill>
-              </a:defRPr>
-            </a:pPr>
-            <a:r>
-              <a:t>• The synthetic 8/8 passes are within monocular bounds (speed ±55 km/h, bounce ±175 cm, impact ±110 cm), not broadcast bounds.</a:t>
-            </a:r>
-          </a:p>
-          <a:p>
-            <a:pPr>
-              <a:lnSpc>
-                <a:spcPct val="104000"/>
-              </a:lnSpc>
-              <a:spcAft>
-                <a:spcPts val="600"/>
-              </a:spcAft>
-              <a:defRPr sz="1400">
-                <a:solidFill>
-                  <a:srgbClr val="222222"/>
-                </a:solidFill>
-              </a:defRPr>
-            </a:pPr>
-            <a:r>
-              <a:t>• On test3 the calibration reprojection was 16.56 px (high) — the verdict shape is right, the absolute scale approximate.</a:t>
-            </a:r>
-          </a:p>
-          <a:p>
-            <a:pPr>
-              <a:lnSpc>
-                <a:spcPct val="104000"/>
-              </a:lnSpc>
-              <a:spcAft>
-                <a:spcPts val="600"/>
-              </a:spcAft>
-              <a:defRPr sz="1400">
-                <a:solidFill>
-                  <a:srgbClr val="222222"/>
-                </a:solidFill>
-              </a:defRPr>
-            </a:pPr>
-            <a:r>
-              <a:t>• Positioned as decision support for coaching nets and clubs, not an ICC broadcast replacement.</a:t>
-            </a:r>
-          </a:p>
-        </p:txBody>
-      </p:sp>
+              <a:t>18</a:t>
+            </a:r>
+          </a:p>
+        </p:txBody>
+      </p:sp>
+      <p:pic>
+        <p:nvPicPr>
+          <p:cNvPr id="6" name="Picture 5" descr="test3_3d_path.png"/>
+          <p:cNvPicPr>
+            <a:picLocks noChangeAspect="1"/>
+          </p:cNvPicPr>
+          <p:nvPr/>
+        </p:nvPicPr>
+        <p:blipFill>
+          <a:blip r:embed="rId2"/>
+          <a:stretch>
+            <a:fillRect/>
+          </a:stretch>
+        </p:blipFill>
+        <p:spPr>
+          <a:xfrm>
+            <a:off x="2110435" y="1280160"/>
+            <a:ext cx="4923129" cy="3076956"/>
+          </a:xfrm>
+          <a:prstGeom prst="rect">
+            <a:avLst/>
+          </a:prstGeom>
+        </p:spPr>
+      </p:pic>
     </p:spTree>
   </p:cSld>
   <p:clrMapOvr>
@@ -8377,8 +10809,8 @@
         </p:nvSpPr>
         <p:spPr>
           <a:xfrm>
-            <a:off x="502920" y="438912"/>
-            <a:ext cx="8138160" cy="201168"/>
+            <a:off x="457200" y="384048"/>
+            <a:ext cx="8229600" cy="201168"/>
           </a:xfrm>
           <a:prstGeom prst="rect">
             <a:avLst/>
@@ -8386,12 +10818,21 @@
           <a:noFill/>
         </p:spPr>
         <p:txBody>
-          <a:bodyPr wrap="none">
+          <a:bodyPr wrap="square" anchor="t" lIns="0" rIns="0" tIns="0" bIns="0">
             <a:noAutofit/>
           </a:bodyPr>
           <a:lstStyle/>
           <a:p>
-            <a:pPr>
+            <a:pPr algn="l">
+              <a:lnSpc>
+                <a:spcPct val="104000"/>
+              </a:lnSpc>
+              <a:spcBef>
+                <a:spcPts val="0"/>
+              </a:spcBef>
+              <a:spcAft>
+                <a:spcPts val="0"/>
+              </a:spcAft>
               <a:defRPr sz="1100" b="1">
                 <a:solidFill>
                   <a:srgbClr val="2E6FB5"/>
@@ -8399,7 +10840,7 @@
               </a:defRPr>
             </a:pPr>
             <a:r>
-              <a:t>CONCLUSION</a:t>
+              <a:t>RESULTS</a:t>
             </a:r>
           </a:p>
         </p:txBody>
@@ -8412,8 +10853,8 @@
         </p:nvSpPr>
         <p:spPr>
           <a:xfrm>
-            <a:off x="502920" y="640080"/>
-            <a:ext cx="8138160" cy="530352"/>
+            <a:off x="457200" y="566928"/>
+            <a:ext cx="8229600" cy="475488"/>
           </a:xfrm>
           <a:prstGeom prst="rect">
             <a:avLst/>
@@ -8421,20 +10862,29 @@
           <a:noFill/>
         </p:spPr>
         <p:txBody>
-          <a:bodyPr wrap="square" anchor="ctr">
+          <a:bodyPr wrap="square" anchor="ctr" lIns="0" rIns="0" tIns="0" bIns="0">
             <a:noAutofit/>
           </a:bodyPr>
           <a:lstStyle/>
           <a:p>
-            <a:pPr>
-              <a:defRPr sz="2400" b="1">
+            <a:pPr algn="l">
+              <a:lnSpc>
+                <a:spcPct val="104000"/>
+              </a:lnSpc>
+              <a:spcBef>
+                <a:spcPts val="0"/>
+              </a:spcBef>
+              <a:spcAft>
+                <a:spcPts val="0"/>
+              </a:spcAft>
+              <a:defRPr sz="2300" b="1">
                 <a:solidFill>
                   <a:srgbClr val="12335B"/>
                 </a:solidFill>
               </a:defRPr>
             </a:pPr>
             <a:r>
-              <a:t>Conclusion</a:t>
+              <a:t>Synthetic Validation: 8 Scenarios</a:t>
             </a:r>
           </a:p>
         </p:txBody>
@@ -8447,8 +10897,8 @@
         </p:nvSpPr>
         <p:spPr>
           <a:xfrm>
-            <a:off x="502920" y="1170432"/>
-            <a:ext cx="1828800" cy="38100"/>
+            <a:off x="457200" y="1060704"/>
+            <a:ext cx="1737360" cy="38100"/>
           </a:xfrm>
           <a:prstGeom prst="rect">
             <a:avLst/>
@@ -8491,7 +10941,7 @@
         </p:nvSpPr>
         <p:spPr>
           <a:xfrm>
-            <a:off x="8001000" y="4759452"/>
+            <a:off x="8046720" y="4777740"/>
             <a:ext cx="640080" cy="274320"/>
           </a:xfrm>
           <a:prstGeom prst="rect">
@@ -8500,62 +10950,57 @@
           <a:noFill/>
         </p:spPr>
         <p:txBody>
-          <a:bodyPr wrap="none">
-            <a:spAutoFit/>
-          </a:bodyPr>
-          <a:lstStyle/>
-          <a:p>
-            <a:pPr algn="r">
-              <a:defRPr sz="900">
-                <a:solidFill>
-                  <a:srgbClr val="8A8A8A"/>
-                </a:solidFill>
-              </a:defRPr>
-            </a:pPr>
-            <a:r>
-              <a:t>19</a:t>
-            </a:r>
-          </a:p>
-        </p:txBody>
-      </p:sp>
-      <p:sp>
-        <p:nvSpPr>
-          <p:cNvPr id="6" name="TextBox 5"/>
-          <p:cNvSpPr txBox="1"/>
-          <p:nvPr/>
-        </p:nvSpPr>
-        <p:spPr>
-          <a:xfrm>
-            <a:off x="502920" y="1335024"/>
-            <a:ext cx="8138160" cy="502920"/>
-          </a:xfrm>
-          <a:prstGeom prst="rect">
-            <a:avLst/>
-          </a:prstGeom>
-          <a:noFill/>
-        </p:spPr>
-        <p:txBody>
-          <a:bodyPr wrap="square">
+          <a:bodyPr wrap="square" anchor="t" lIns="0" rIns="0" tIns="0" bIns="0">
             <a:noAutofit/>
           </a:bodyPr>
           <a:lstStyle/>
           <a:p>
-            <a:pPr>
-              <a:lnSpc>
-                <a:spcPct val="102000"/>
-              </a:lnSpc>
-              <a:defRPr sz="1700" b="1">
-                <a:solidFill>
-                  <a:srgbClr val="12335B"/>
+            <a:pPr algn="r">
+              <a:lnSpc>
+                <a:spcPct val="104000"/>
+              </a:lnSpc>
+              <a:spcBef>
+                <a:spcPts val="0"/>
+              </a:spcBef>
+              <a:spcAft>
+                <a:spcPts val="0"/>
+              </a:spcAft>
+              <a:defRPr sz="900" b="0">
+                <a:solidFill>
+                  <a:srgbClr val="7C8690"/>
                 </a:solidFill>
               </a:defRPr>
             </a:pPr>
             <a:r>
-              <a:t>One phone, a known pitch, and projectile physics are enough for usable LBW support.</a:t>
-            </a:r>
-          </a:p>
-        </p:txBody>
-      </p:sp>
+              <a:t>19</a:t>
+            </a:r>
+          </a:p>
+        </p:txBody>
+      </p:sp>
+      <p:pic>
+        <p:nvPicPr>
+          <p:cNvPr id="6" name="Picture 5" descr="synth_summary.png"/>
+          <p:cNvPicPr>
+            <a:picLocks noChangeAspect="1"/>
+          </p:cNvPicPr>
+          <p:nvPr/>
+        </p:nvPicPr>
+        <p:blipFill>
+          <a:blip r:embed="rId2"/>
+          <a:stretch>
+            <a:fillRect/>
+          </a:stretch>
+        </p:blipFill>
+        <p:spPr>
+          <a:xfrm>
+            <a:off x="457200" y="2269363"/>
+            <a:ext cx="3954780" cy="1098550"/>
+          </a:xfrm>
+          <a:prstGeom prst="rect">
+            <a:avLst/>
+          </a:prstGeom>
+        </p:spPr>
+      </p:pic>
       <p:sp>
         <p:nvSpPr>
           <p:cNvPr id="7" name="TextBox 6"/>
@@ -8564,8 +11009,8 @@
         </p:nvSpPr>
         <p:spPr>
           <a:xfrm>
-            <a:off x="502920" y="1847088"/>
-            <a:ext cx="8138160" cy="2455164"/>
+            <a:off x="4732020" y="1280160"/>
+            <a:ext cx="3954780" cy="1371600"/>
           </a:xfrm>
           <a:prstGeom prst="rect">
             <a:avLst/>
@@ -8573,80 +11018,177 @@
           <a:noFill/>
         </p:spPr>
         <p:txBody>
-          <a:bodyPr wrap="square">
-            <a:normAutofit/>
+          <a:bodyPr wrap="square" anchor="t" lIns="0" rIns="0" tIns="0" bIns="0">
+            <a:noAutofit/>
           </a:bodyPr>
           <a:lstStyle/>
           <a:p>
+            <a:pPr algn="l">
+              <a:lnSpc>
+                <a:spcPct val="90000"/>
+              </a:lnSpc>
+              <a:spcBef>
+                <a:spcPts val="0"/>
+              </a:spcBef>
+              <a:spcAft>
+                <a:spcPts val="0"/>
+              </a:spcAft>
+              <a:defRPr sz="5400" b="1">
+                <a:solidFill>
+                  <a:srgbClr val="2E6FB5"/>
+                </a:solidFill>
+              </a:defRPr>
+            </a:pPr>
+            <a:r>
+              <a:t>8/8</a:t>
+            </a:r>
+          </a:p>
+          <a:p>
+            <a:pPr algn="l">
+              <a:lnSpc>
+                <a:spcPct val="100000"/>
+              </a:lnSpc>
+              <a:spcBef>
+                <a:spcPts val="0"/>
+              </a:spcBef>
+              <a:spcAft>
+                <a:spcPts val="0"/>
+              </a:spcAft>
+              <a:defRPr sz="1400" b="1">
+                <a:solidFill>
+                  <a:srgbClr val="12335B"/>
+                </a:solidFill>
+              </a:defRPr>
+            </a:pPr>
+            <a:r>
+              <a:t>scenarios passed</a:t>
+            </a:r>
+          </a:p>
+        </p:txBody>
+      </p:sp>
+      <p:sp>
+        <p:nvSpPr>
+          <p:cNvPr id="8" name="TextBox 7"/>
+          <p:cNvSpPr txBox="1"/>
+          <p:nvPr/>
+        </p:nvSpPr>
+        <p:spPr>
+          <a:xfrm>
+            <a:off x="4732020" y="2697480"/>
+            <a:ext cx="3954780" cy="1659636"/>
+          </a:xfrm>
+          <a:prstGeom prst="rect">
+            <a:avLst/>
+          </a:prstGeom>
+          <a:noFill/>
+        </p:spPr>
+        <p:txBody>
+          <a:bodyPr wrap="square" anchor="t" lIns="0" rIns="0" tIns="0" bIns="0">
+            <a:noAutofit/>
+          </a:bodyPr>
+          <a:lstStyle/>
+          <a:p>
             <a:pPr>
               <a:lnSpc>
-                <a:spcPct val="104000"/>
-              </a:lnSpc>
-              <a:spcAft>
-                <a:spcPts val="600"/>
-              </a:spcAft>
-              <a:defRPr sz="1400">
-                <a:solidFill>
-                  <a:srgbClr val="222222"/>
-                </a:solidFill>
-              </a:defRPr>
-            </a:pPr>
-            <a:r>
-              <a:t>• A complete pipeline: calibrate → detect → track → reconstruct → decide, with a broadcast overlay and a 3D Hawk-Eye view.</a:t>
+                <a:spcPct val="106000"/>
+              </a:lnSpc>
+              <a:spcAft>
+                <a:spcPts val="900"/>
+              </a:spcAft>
+            </a:pPr>
+            <a:r>
+              <a:rPr sz="1200" b="1">
+                <a:solidFill>
+                  <a:srgbClr val="2E6FB5"/>
+                </a:solidFill>
+              </a:rPr>
+              <a:t>▪  </a:t>
+            </a:r>
+            <a:r>
+              <a:rPr sz="1300">
+                <a:solidFill>
+                  <a:srgbClr val="2A2A2A"/>
+                </a:solidFill>
+              </a:rPr>
+              <a:t>Controlled deliveries: medium pace, middle-stump line, full length.</a:t>
             </a:r>
           </a:p>
           <a:p>
             <a:pPr>
               <a:lnSpc>
-                <a:spcPct val="104000"/>
-              </a:lnSpc>
-              <a:spcAft>
-                <a:spcPts val="600"/>
-              </a:spcAft>
-              <a:defRPr sz="1400">
-                <a:solidFill>
-                  <a:srgbClr val="222222"/>
-                </a:solidFill>
-              </a:defRPr>
-            </a:pPr>
-            <a:r>
-              <a:t>• Validated on synthetic deliveries (8/8 within bounds) and real footage, with correct camera recovery throughout.</a:t>
+                <a:spcPct val="106000"/>
+              </a:lnSpc>
+              <a:spcAft>
+                <a:spcPts val="900"/>
+              </a:spcAft>
+            </a:pPr>
+            <a:r>
+              <a:rPr sz="1200" b="1">
+                <a:solidFill>
+                  <a:srgbClr val="2E6FB5"/>
+                </a:solidFill>
+              </a:rPr>
+              <a:t>▪  </a:t>
+            </a:r>
+            <a:r>
+              <a:rPr sz="1300">
+                <a:solidFill>
+                  <a:srgbClr val="2A2A2A"/>
+                </a:solidFill>
+              </a:rPr>
+              <a:t>Camera position recovered correctly in every scene.</a:t>
             </a:r>
           </a:p>
           <a:p>
             <a:pPr>
               <a:lnSpc>
-                <a:spcPct val="104000"/>
-              </a:lnSpc>
-              <a:spcAft>
-                <a:spcPts val="600"/>
-              </a:spcAft>
-              <a:defRPr sz="1400">
-                <a:solidFill>
-                  <a:srgbClr val="222222"/>
-                </a:solidFill>
-              </a:defRPr>
-            </a:pPr>
-            <a:r>
-              <a:t>• Refuses to invent a verdict on unusable clips — it fails clearly rather than guessing.</a:t>
+                <a:spcPct val="106000"/>
+              </a:lnSpc>
+              <a:spcAft>
+                <a:spcPts val="900"/>
+              </a:spcAft>
+            </a:pPr>
+            <a:r>
+              <a:rPr sz="1200" b="1">
+                <a:solidFill>
+                  <a:srgbClr val="2E6FB5"/>
+                </a:solidFill>
+              </a:rPr>
+              <a:t>▪  </a:t>
+            </a:r>
+            <a:r>
+              <a:rPr sz="1300">
+                <a:solidFill>
+                  <a:srgbClr val="2A2A2A"/>
+                </a:solidFill>
+              </a:rPr>
+              <a:t>All within honest single-camera limits (speed, bounce, impact).</a:t>
             </a:r>
           </a:p>
           <a:p>
             <a:pPr>
               <a:lnSpc>
-                <a:spcPct val="104000"/>
-              </a:lnSpc>
-              <a:spcAft>
-                <a:spcPts val="600"/>
-              </a:spcAft>
-              <a:defRPr sz="1400">
-                <a:solidFill>
-                  <a:srgbClr val="222222"/>
-                </a:solidFill>
-              </a:defRPr>
-            </a:pPr>
-            <a:r>
-              <a:t>• Future work: frame-accurate impact detection, learned bounce modelling, multi-phone capture, and on-device inference.</a:t>
+                <a:spcPct val="106000"/>
+              </a:lnSpc>
+              <a:spcAft>
+                <a:spcPts val="900"/>
+              </a:spcAft>
+            </a:pPr>
+            <a:r>
+              <a:rPr sz="1200" b="1">
+                <a:solidFill>
+                  <a:srgbClr val="2E6FB5"/>
+                </a:solidFill>
+              </a:rPr>
+              <a:t>▪  </a:t>
+            </a:r>
+            <a:r>
+              <a:rPr sz="1300">
+                <a:solidFill>
+                  <a:srgbClr val="2A2A2A"/>
+                </a:solidFill>
+              </a:rPr>
+              <a:t>Every delivery was truly OUT; the system returned OUT for all eight.</a:t>
             </a:r>
           </a:p>
         </p:txBody>
@@ -8685,8 +11227,8 @@
         </p:nvSpPr>
         <p:spPr>
           <a:xfrm>
-            <a:off x="502920" y="640080"/>
-            <a:ext cx="8138160" cy="530352"/>
+            <a:off x="457200" y="566928"/>
+            <a:ext cx="8229600" cy="475488"/>
           </a:xfrm>
           <a:prstGeom prst="rect">
             <a:avLst/>
@@ -8694,13 +11236,22 @@
           <a:noFill/>
         </p:spPr>
         <p:txBody>
-          <a:bodyPr wrap="square" anchor="ctr">
+          <a:bodyPr wrap="square" anchor="ctr" lIns="0" rIns="0" tIns="0" bIns="0">
             <a:noAutofit/>
           </a:bodyPr>
           <a:lstStyle/>
           <a:p>
-            <a:pPr>
-              <a:defRPr sz="2400" b="1">
+            <a:pPr algn="l">
+              <a:lnSpc>
+                <a:spcPct val="104000"/>
+              </a:lnSpc>
+              <a:spcBef>
+                <a:spcPts val="0"/>
+              </a:spcBef>
+              <a:spcAft>
+                <a:spcPts val="0"/>
+              </a:spcAft>
+              <a:defRPr sz="2300" b="1">
                 <a:solidFill>
                   <a:srgbClr val="12335B"/>
                 </a:solidFill>
@@ -8720,8 +11271,8 @@
         </p:nvSpPr>
         <p:spPr>
           <a:xfrm>
-            <a:off x="502920" y="1170432"/>
-            <a:ext cx="1828800" cy="38100"/>
+            <a:off x="457200" y="1060704"/>
+            <a:ext cx="1737360" cy="38100"/>
           </a:xfrm>
           <a:prstGeom prst="rect">
             <a:avLst/>
@@ -8764,7 +11315,7 @@
         </p:nvSpPr>
         <p:spPr>
           <a:xfrm>
-            <a:off x="8001000" y="4759452"/>
+            <a:off x="8046720" y="4777740"/>
             <a:ext cx="640080" cy="274320"/>
           </a:xfrm>
           <a:prstGeom prst="rect">
@@ -8773,15 +11324,24 @@
           <a:noFill/>
         </p:spPr>
         <p:txBody>
-          <a:bodyPr wrap="none">
-            <a:spAutoFit/>
+          <a:bodyPr wrap="square" anchor="t" lIns="0" rIns="0" tIns="0" bIns="0">
+            <a:noAutofit/>
           </a:bodyPr>
           <a:lstStyle/>
           <a:p>
             <a:pPr algn="r">
-              <a:defRPr sz="900">
-                <a:solidFill>
-                  <a:srgbClr val="8A8A8A"/>
+              <a:lnSpc>
+                <a:spcPct val="104000"/>
+              </a:lnSpc>
+              <a:spcBef>
+                <a:spcPts val="0"/>
+              </a:spcBef>
+              <a:spcAft>
+                <a:spcPts val="0"/>
+              </a:spcAft>
+              <a:defRPr sz="900" b="0">
+                <a:solidFill>
+                  <a:srgbClr val="7C8690"/>
                 </a:solidFill>
               </a:defRPr>
             </a:pPr>
@@ -8799,8 +11359,8 @@
         </p:nvSpPr>
         <p:spPr>
           <a:xfrm>
-            <a:off x="502920" y="1335024"/>
-            <a:ext cx="8138160" cy="2967228"/>
+            <a:off x="457200" y="1280160"/>
+            <a:ext cx="8229600" cy="3076956"/>
           </a:xfrm>
           <a:prstGeom prst="rect">
             <a:avLst/>
@@ -8808,8 +11368,8 @@
           <a:noFill/>
         </p:spPr>
         <p:txBody>
-          <a:bodyPr wrap="square" anchor="ctr">
-            <a:spAutoFit/>
+          <a:bodyPr wrap="square" anchor="ctr" lIns="0" rIns="0" tIns="0" bIns="0">
+            <a:noAutofit/>
           </a:bodyPr>
           <a:lstStyle/>
           <a:p>
@@ -8818,24 +11378,24 @@
                 <a:spcPct val="105000"/>
               </a:lnSpc>
               <a:spcAft>
-                <a:spcPts val="900"/>
-              </a:spcAft>
-            </a:pPr>
-            <a:r>
-              <a:rPr sz="1700" b="1">
+                <a:spcPts val="800"/>
+              </a:spcAft>
+            </a:pPr>
+            <a:r>
+              <a:rPr sz="1600" b="1">
                 <a:solidFill>
                   <a:srgbClr val="2E6FB5"/>
                 </a:solidFill>
               </a:rPr>
-              <a:t>1.  </a:t>
-            </a:r>
-            <a:r>
-              <a:rPr sz="1700">
-                <a:solidFill>
-                  <a:srgbClr val="222222"/>
+              <a:t>01    </a:t>
+            </a:r>
+            <a:r>
+              <a:rPr sz="1600">
+                <a:solidFill>
+                  <a:srgbClr val="2A2A2A"/>
                 </a:solidFill>
               </a:rPr>
-              <a:t>Introduction &amp; Problem</a:t>
+              <a:t>Introduction and the Problem</a:t>
             </a:r>
           </a:p>
           <a:p>
@@ -8844,24 +11404,24 @@
                 <a:spcPct val="105000"/>
               </a:lnSpc>
               <a:spcAft>
-                <a:spcPts val="900"/>
-              </a:spcAft>
-            </a:pPr>
-            <a:r>
-              <a:rPr sz="1700" b="1">
+                <a:spcPts val="800"/>
+              </a:spcAft>
+            </a:pPr>
+            <a:r>
+              <a:rPr sz="1600" b="1">
                 <a:solidFill>
                   <a:srgbClr val="2E6FB5"/>
                 </a:solidFill>
               </a:rPr>
-              <a:t>2.  </a:t>
-            </a:r>
-            <a:r>
-              <a:rPr sz="1700">
-                <a:solidFill>
-                  <a:srgbClr val="222222"/>
+              <a:t>02    </a:t>
+            </a:r>
+            <a:r>
+              <a:rPr sz="1600">
+                <a:solidFill>
+                  <a:srgbClr val="2A2A2A"/>
                 </a:solidFill>
               </a:rPr>
-              <a:t>Objectives &amp; Requirements</a:t>
+              <a:t>Objectives and Requirements</a:t>
             </a:r>
           </a:p>
           <a:p>
@@ -8870,24 +11430,24 @@
                 <a:spcPct val="105000"/>
               </a:lnSpc>
               <a:spcAft>
-                <a:spcPts val="900"/>
-              </a:spcAft>
-            </a:pPr>
-            <a:r>
-              <a:rPr sz="1700" b="1">
+                <a:spcPts val="800"/>
+              </a:spcAft>
+            </a:pPr>
+            <a:r>
+              <a:rPr sz="1600" b="1">
                 <a:solidFill>
                   <a:srgbClr val="2E6FB5"/>
                 </a:solidFill>
               </a:rPr>
-              <a:t>3.  </a:t>
-            </a:r>
-            <a:r>
-              <a:rPr sz="1700">
-                <a:solidFill>
-                  <a:srgbClr val="222222"/>
+              <a:t>03    </a:t>
+            </a:r>
+            <a:r>
+              <a:rPr sz="1600">
+                <a:solidFill>
+                  <a:srgbClr val="2A2A2A"/>
                 </a:solidFill>
               </a:rPr>
-              <a:t>System Analysis &amp; Design</a:t>
+              <a:t>System Analysis and Design</a:t>
             </a:r>
           </a:p>
           <a:p>
@@ -8896,24 +11456,24 @@
                 <a:spcPct val="105000"/>
               </a:lnSpc>
               <a:spcAft>
-                <a:spcPts val="900"/>
-              </a:spcAft>
-            </a:pPr>
-            <a:r>
-              <a:rPr sz="1700" b="1">
+                <a:spcPts val="800"/>
+              </a:spcAft>
+            </a:pPr>
+            <a:r>
+              <a:rPr sz="1600" b="1">
                 <a:solidFill>
                   <a:srgbClr val="2E6FB5"/>
                 </a:solidFill>
               </a:rPr>
-              <a:t>4.  </a:t>
-            </a:r>
-            <a:r>
-              <a:rPr sz="1700">
-                <a:solidFill>
-                  <a:srgbClr val="222222"/>
+              <a:t>04    </a:t>
+            </a:r>
+            <a:r>
+              <a:rPr sz="1600">
+                <a:solidFill>
+                  <a:srgbClr val="2A2A2A"/>
                 </a:solidFill>
               </a:rPr>
-              <a:t>The Five-Stage Algorithm</a:t>
+              <a:t>The Five-Step Algorithm</a:t>
             </a:r>
           </a:p>
           <a:p>
@@ -8922,24 +11482,24 @@
                 <a:spcPct val="105000"/>
               </a:lnSpc>
               <a:spcAft>
-                <a:spcPts val="900"/>
-              </a:spcAft>
-            </a:pPr>
-            <a:r>
-              <a:rPr sz="1700" b="1">
+                <a:spcPts val="800"/>
+              </a:spcAft>
+            </a:pPr>
+            <a:r>
+              <a:rPr sz="1600" b="1">
                 <a:solidFill>
                   <a:srgbClr val="2E6FB5"/>
                 </a:solidFill>
               </a:rPr>
-              <a:t>5.  </a:t>
-            </a:r>
-            <a:r>
-              <a:rPr sz="1700">
-                <a:solidFill>
-                  <a:srgbClr val="222222"/>
+              <a:t>05    </a:t>
+            </a:r>
+            <a:r>
+              <a:rPr sz="1600">
+                <a:solidFill>
+                  <a:srgbClr val="2A2A2A"/>
                 </a:solidFill>
               </a:rPr>
-              <a:t>Implementation &amp; Tools</a:t>
+              <a:t>Key Terms</a:t>
             </a:r>
           </a:p>
           <a:p>
@@ -8948,24 +11508,24 @@
                 <a:spcPct val="105000"/>
               </a:lnSpc>
               <a:spcAft>
-                <a:spcPts val="900"/>
-              </a:spcAft>
-            </a:pPr>
-            <a:r>
-              <a:rPr sz="1700" b="1">
+                <a:spcPts val="800"/>
+              </a:spcAft>
+            </a:pPr>
+            <a:r>
+              <a:rPr sz="1600" b="1">
                 <a:solidFill>
                   <a:srgbClr val="2E6FB5"/>
                 </a:solidFill>
               </a:rPr>
-              <a:t>6.  </a:t>
-            </a:r>
-            <a:r>
-              <a:rPr sz="1700">
-                <a:solidFill>
-                  <a:srgbClr val="222222"/>
+              <a:t>06    </a:t>
+            </a:r>
+            <a:r>
+              <a:rPr sz="1600">
+                <a:solidFill>
+                  <a:srgbClr val="2A2A2A"/>
                 </a:solidFill>
               </a:rPr>
-              <a:t>Results &amp; Validation</a:t>
+              <a:t>Implementation and Tools</a:t>
             </a:r>
           </a:p>
           <a:p>
@@ -8974,24 +11534,50 @@
                 <a:spcPct val="105000"/>
               </a:lnSpc>
               <a:spcAft>
-                <a:spcPts val="900"/>
-              </a:spcAft>
-            </a:pPr>
-            <a:r>
-              <a:rPr sz="1700" b="1">
+                <a:spcPts val="800"/>
+              </a:spcAft>
+            </a:pPr>
+            <a:r>
+              <a:rPr sz="1600" b="1">
                 <a:solidFill>
                   <a:srgbClr val="2E6FB5"/>
                 </a:solidFill>
               </a:rPr>
-              <a:t>7.  </a:t>
-            </a:r>
-            <a:r>
-              <a:rPr sz="1700">
-                <a:solidFill>
-                  <a:srgbClr val="222222"/>
+              <a:t>07    </a:t>
+            </a:r>
+            <a:r>
+              <a:rPr sz="1600">
+                <a:solidFill>
+                  <a:srgbClr val="2A2A2A"/>
                 </a:solidFill>
               </a:rPr>
-              <a:t>Limitations &amp; Conclusion</a:t>
+              <a:t>Results and Validation</a:t>
+            </a:r>
+          </a:p>
+          <a:p>
+            <a:pPr>
+              <a:lnSpc>
+                <a:spcPct val="105000"/>
+              </a:lnSpc>
+              <a:spcAft>
+                <a:spcPts val="800"/>
+              </a:spcAft>
+            </a:pPr>
+            <a:r>
+              <a:rPr sz="1600" b="1">
+                <a:solidFill>
+                  <a:srgbClr val="2E6FB5"/>
+                </a:solidFill>
+              </a:rPr>
+              <a:t>08    </a:t>
+            </a:r>
+            <a:r>
+              <a:rPr sz="1600">
+                <a:solidFill>
+                  <a:srgbClr val="2A2A2A"/>
+                </a:solidFill>
+              </a:rPr>
+              <a:t>Limitations and Conclusion</a:t>
             </a:r>
           </a:p>
         </p:txBody>
@@ -9030,8 +11616,8 @@
         </p:nvSpPr>
         <p:spPr>
           <a:xfrm>
-            <a:off x="8001000" y="4759452"/>
-            <a:ext cx="640080" cy="274320"/>
+            <a:off x="457200" y="566928"/>
+            <a:ext cx="8229600" cy="475488"/>
           </a:xfrm>
           <a:prstGeom prst="rect">
             <a:avLst/>
@@ -9039,20 +11625,29 @@
           <a:noFill/>
         </p:spPr>
         <p:txBody>
-          <a:bodyPr wrap="none">
-            <a:spAutoFit/>
+          <a:bodyPr wrap="square" anchor="ctr" lIns="0" rIns="0" tIns="0" bIns="0">
+            <a:noAutofit/>
           </a:bodyPr>
           <a:lstStyle/>
           <a:p>
-            <a:pPr algn="r">
-              <a:defRPr sz="900">
-                <a:solidFill>
-                  <a:srgbClr val="8A8A8A"/>
+            <a:pPr algn="l">
+              <a:lnSpc>
+                <a:spcPct val="104000"/>
+              </a:lnSpc>
+              <a:spcBef>
+                <a:spcPts val="0"/>
+              </a:spcBef>
+              <a:spcAft>
+                <a:spcPts val="0"/>
+              </a:spcAft>
+              <a:defRPr sz="2300" b="1">
+                <a:solidFill>
+                  <a:srgbClr val="12335B"/>
                 </a:solidFill>
               </a:defRPr>
             </a:pPr>
             <a:r>
-              <a:t>20</a:t>
+              <a:t>Limitations</a:t>
             </a:r>
           </a:p>
         </p:txBody>
@@ -9065,8 +11660,8 @@
         </p:nvSpPr>
         <p:spPr>
           <a:xfrm>
-            <a:off x="502920" y="1874519"/>
-            <a:ext cx="2194560" cy="50800"/>
+            <a:off x="457200" y="1060704"/>
+            <a:ext cx="1737360" cy="38100"/>
           </a:xfrm>
           <a:prstGeom prst="rect">
             <a:avLst/>
@@ -9109,8 +11704,8 @@
         </p:nvSpPr>
         <p:spPr>
           <a:xfrm>
-            <a:off x="502920" y="2011680"/>
-            <a:ext cx="8138160" cy="2194560"/>
+            <a:off x="8046720" y="4777740"/>
+            <a:ext cx="640080" cy="274320"/>
           </a:xfrm>
           <a:prstGeom prst="rect">
             <a:avLst/>
@@ -9118,12 +11713,676 @@
           <a:noFill/>
         </p:spPr>
         <p:txBody>
-          <a:bodyPr wrap="square">
-            <a:spAutoFit/>
+          <a:bodyPr wrap="square" anchor="t" lIns="0" rIns="0" tIns="0" bIns="0">
+            <a:noAutofit/>
           </a:bodyPr>
           <a:lstStyle/>
           <a:p>
+            <a:pPr algn="r">
+              <a:lnSpc>
+                <a:spcPct val="104000"/>
+              </a:lnSpc>
+              <a:spcBef>
+                <a:spcPts val="0"/>
+              </a:spcBef>
+              <a:spcAft>
+                <a:spcPts val="0"/>
+              </a:spcAft>
+              <a:defRPr sz="900" b="0">
+                <a:solidFill>
+                  <a:srgbClr val="7C8690"/>
+                </a:solidFill>
+              </a:defRPr>
+            </a:pPr>
+            <a:r>
+              <a:t>20</a:t>
+            </a:r>
+          </a:p>
+        </p:txBody>
+      </p:sp>
+      <p:sp>
+        <p:nvSpPr>
+          <p:cNvPr id="5" name="TextBox 4"/>
+          <p:cNvSpPr txBox="1"/>
+          <p:nvPr/>
+        </p:nvSpPr>
+        <p:spPr>
+          <a:xfrm>
+            <a:off x="457200" y="1280160"/>
+            <a:ext cx="8229600" cy="457200"/>
+          </a:xfrm>
+          <a:prstGeom prst="rect">
+            <a:avLst/>
+          </a:prstGeom>
+          <a:noFill/>
+        </p:spPr>
+        <p:txBody>
+          <a:bodyPr wrap="square" anchor="ctr" lIns="0" rIns="0" tIns="0" bIns="0">
+            <a:noAutofit/>
+          </a:bodyPr>
+          <a:lstStyle/>
+          <a:p>
             <a:pPr algn="l">
+              <a:lnSpc>
+                <a:spcPct val="102000"/>
+              </a:lnSpc>
+              <a:spcBef>
+                <a:spcPts val="0"/>
+              </a:spcBef>
+              <a:spcAft>
+                <a:spcPts val="0"/>
+              </a:spcAft>
+              <a:defRPr sz="1600" b="1">
+                <a:solidFill>
+                  <a:srgbClr val="12335B"/>
+                </a:solidFill>
+              </a:defRPr>
+            </a:pPr>
+            <a:r>
+              <a:t>Honest about what one camera can and cannot do.</a:t>
+            </a:r>
+          </a:p>
+        </p:txBody>
+      </p:sp>
+      <p:sp>
+        <p:nvSpPr>
+          <p:cNvPr id="6" name="TextBox 5"/>
+          <p:cNvSpPr txBox="1"/>
+          <p:nvPr/>
+        </p:nvSpPr>
+        <p:spPr>
+          <a:xfrm>
+            <a:off x="457200" y="1847088"/>
+            <a:ext cx="8229600" cy="2510028"/>
+          </a:xfrm>
+          <a:prstGeom prst="rect">
+            <a:avLst/>
+          </a:prstGeom>
+          <a:noFill/>
+        </p:spPr>
+        <p:txBody>
+          <a:bodyPr wrap="square" anchor="t" lIns="0" rIns="0" tIns="0" bIns="0">
+            <a:noAutofit/>
+          </a:bodyPr>
+          <a:lstStyle/>
+          <a:p>
+            <a:pPr>
+              <a:lnSpc>
+                <a:spcPct val="106000"/>
+              </a:lnSpc>
+              <a:spcAft>
+                <a:spcPts val="1100"/>
+              </a:spcAft>
+            </a:pPr>
+            <a:r>
+              <a:rPr sz="1300" b="1">
+                <a:solidFill>
+                  <a:srgbClr val="2E6FB5"/>
+                </a:solidFill>
+              </a:rPr>
+              <a:t>▪  </a:t>
+            </a:r>
+            <a:r>
+              <a:rPr sz="1500">
+                <a:solidFill>
+                  <a:srgbClr val="2A2A2A"/>
+                </a:solidFill>
+              </a:rPr>
+              <a:t>One phone cannot triangulate depth like six to eight synced Hawk-Eye cameras.</a:t>
+            </a:r>
+          </a:p>
+          <a:p>
+            <a:pPr>
+              <a:lnSpc>
+                <a:spcPct val="106000"/>
+              </a:lnSpc>
+              <a:spcAft>
+                <a:spcPts val="1100"/>
+              </a:spcAft>
+            </a:pPr>
+            <a:r>
+              <a:rPr sz="1300" b="1">
+                <a:solidFill>
+                  <a:srgbClr val="2E6FB5"/>
+                </a:solidFill>
+              </a:rPr>
+              <a:t>▪  </a:t>
+            </a:r>
+            <a:r>
+              <a:rPr sz="1500">
+                <a:solidFill>
+                  <a:srgbClr val="2A2A2A"/>
+                </a:solidFill>
+              </a:rPr>
+              <a:t>Depth from ball size is good to a few tens of centimetres, not millimetres.</a:t>
+            </a:r>
+          </a:p>
+          <a:p>
+            <a:pPr>
+              <a:lnSpc>
+                <a:spcPct val="106000"/>
+              </a:lnSpc>
+              <a:spcAft>
+                <a:spcPts val="1100"/>
+              </a:spcAft>
+            </a:pPr>
+            <a:r>
+              <a:rPr sz="1300" b="1">
+                <a:solidFill>
+                  <a:srgbClr val="2E6FB5"/>
+                </a:solidFill>
+              </a:rPr>
+              <a:t>▪  </a:t>
+            </a:r>
+            <a:r>
+              <a:rPr sz="1500">
+                <a:solidFill>
+                  <a:srgbClr val="2A2A2A"/>
+                </a:solidFill>
+              </a:rPr>
+              <a:t>The 8/8 passes are within single-camera limits, not broadcast limits.</a:t>
+            </a:r>
+          </a:p>
+          <a:p>
+            <a:pPr>
+              <a:lnSpc>
+                <a:spcPct val="106000"/>
+              </a:lnSpc>
+              <a:spcAft>
+                <a:spcPts val="1100"/>
+              </a:spcAft>
+            </a:pPr>
+            <a:r>
+              <a:rPr sz="1300" b="1">
+                <a:solidFill>
+                  <a:srgbClr val="2E6FB5"/>
+                </a:solidFill>
+              </a:rPr>
+              <a:t>▪  </a:t>
+            </a:r>
+            <a:r>
+              <a:rPr sz="1500">
+                <a:solidFill>
+                  <a:srgbClr val="2A2A2A"/>
+                </a:solidFill>
+              </a:rPr>
+              <a:t>Built as decision support for nets and clubs, not an official broadcast replacement.</a:t>
+            </a:r>
+          </a:p>
+        </p:txBody>
+      </p:sp>
+    </p:spTree>
+  </p:cSld>
+  <p:clrMapOvr>
+    <a:masterClrMapping/>
+  </p:clrMapOvr>
+</p:sld>
+</file>
+
+<file path=ppt/slides/slide21.xml><?xml version="1.0" encoding="utf-8"?>
+<p:sld xmlns:a="http://schemas.openxmlformats.org/drawingml/2006/main" xmlns:p="http://schemas.openxmlformats.org/presentationml/2006/main" xmlns:r="http://schemas.openxmlformats.org/officeDocument/2006/relationships">
+  <p:cSld>
+    <p:bg>
+      <p:bgPr>
+        <a:solidFill>
+          <a:srgbClr val="FFFFFF"/>
+        </a:solidFill>
+        <a:effectLst/>
+      </p:bgPr>
+    </p:bg>
+    <p:spTree>
+      <p:nvGrpSpPr>
+        <p:cNvPr id="1" name=""/>
+        <p:cNvGrpSpPr/>
+        <p:nvPr/>
+      </p:nvGrpSpPr>
+      <p:grpSpPr/>
+      <p:sp>
+        <p:nvSpPr>
+          <p:cNvPr id="2" name="TextBox 1"/>
+          <p:cNvSpPr txBox="1"/>
+          <p:nvPr/>
+        </p:nvSpPr>
+        <p:spPr>
+          <a:xfrm>
+            <a:off x="457200" y="566928"/>
+            <a:ext cx="8229600" cy="475488"/>
+          </a:xfrm>
+          <a:prstGeom prst="rect">
+            <a:avLst/>
+          </a:prstGeom>
+          <a:noFill/>
+        </p:spPr>
+        <p:txBody>
+          <a:bodyPr wrap="square" anchor="ctr" lIns="0" rIns="0" tIns="0" bIns="0">
+            <a:noAutofit/>
+          </a:bodyPr>
+          <a:lstStyle/>
+          <a:p>
+            <a:pPr algn="l">
+              <a:lnSpc>
+                <a:spcPct val="104000"/>
+              </a:lnSpc>
+              <a:spcBef>
+                <a:spcPts val="0"/>
+              </a:spcBef>
+              <a:spcAft>
+                <a:spcPts val="0"/>
+              </a:spcAft>
+              <a:defRPr sz="2300" b="1">
+                <a:solidFill>
+                  <a:srgbClr val="12335B"/>
+                </a:solidFill>
+              </a:defRPr>
+            </a:pPr>
+            <a:r>
+              <a:t>Conclusion</a:t>
+            </a:r>
+          </a:p>
+        </p:txBody>
+      </p:sp>
+      <p:sp>
+        <p:nvSpPr>
+          <p:cNvPr id="3" name="Rectangle 2"/>
+          <p:cNvSpPr/>
+          <p:nvPr/>
+        </p:nvSpPr>
+        <p:spPr>
+          <a:xfrm>
+            <a:off x="457200" y="1060704"/>
+            <a:ext cx="1737360" cy="38100"/>
+          </a:xfrm>
+          <a:prstGeom prst="rect">
+            <a:avLst/>
+          </a:prstGeom>
+          <a:solidFill>
+            <a:srgbClr val="2E6FB5"/>
+          </a:solidFill>
+          <a:ln>
+            <a:noFill/>
+          </a:ln>
+          <a:effectLst/>
+        </p:spPr>
+        <p:style>
+          <a:lnRef idx="1">
+            <a:schemeClr val="accent1"/>
+          </a:lnRef>
+          <a:fillRef idx="3">
+            <a:schemeClr val="accent1"/>
+          </a:fillRef>
+          <a:effectRef idx="2">
+            <a:schemeClr val="accent1"/>
+          </a:effectRef>
+          <a:fontRef idx="minor">
+            <a:schemeClr val="lt1"/>
+          </a:fontRef>
+        </p:style>
+        <p:txBody>
+          <a:bodyPr rtlCol="0" anchor="ctr"/>
+          <a:lstStyle/>
+          <a:p>
+            <a:pPr algn="ctr"/>
+          </a:p>
+        </p:txBody>
+      </p:sp>
+      <p:sp>
+        <p:nvSpPr>
+          <p:cNvPr id="4" name="TextBox 3"/>
+          <p:cNvSpPr txBox="1"/>
+          <p:nvPr/>
+        </p:nvSpPr>
+        <p:spPr>
+          <a:xfrm>
+            <a:off x="8046720" y="4777740"/>
+            <a:ext cx="640080" cy="274320"/>
+          </a:xfrm>
+          <a:prstGeom prst="rect">
+            <a:avLst/>
+          </a:prstGeom>
+          <a:noFill/>
+        </p:spPr>
+        <p:txBody>
+          <a:bodyPr wrap="square" anchor="t" lIns="0" rIns="0" tIns="0" bIns="0">
+            <a:noAutofit/>
+          </a:bodyPr>
+          <a:lstStyle/>
+          <a:p>
+            <a:pPr algn="r">
+              <a:lnSpc>
+                <a:spcPct val="104000"/>
+              </a:lnSpc>
+              <a:spcBef>
+                <a:spcPts val="0"/>
+              </a:spcBef>
+              <a:spcAft>
+                <a:spcPts val="0"/>
+              </a:spcAft>
+              <a:defRPr sz="900" b="0">
+                <a:solidFill>
+                  <a:srgbClr val="7C8690"/>
+                </a:solidFill>
+              </a:defRPr>
+            </a:pPr>
+            <a:r>
+              <a:t>21</a:t>
+            </a:r>
+          </a:p>
+        </p:txBody>
+      </p:sp>
+      <p:sp>
+        <p:nvSpPr>
+          <p:cNvPr id="5" name="TextBox 4"/>
+          <p:cNvSpPr txBox="1"/>
+          <p:nvPr/>
+        </p:nvSpPr>
+        <p:spPr>
+          <a:xfrm>
+            <a:off x="457200" y="1280160"/>
+            <a:ext cx="8229600" cy="457200"/>
+          </a:xfrm>
+          <a:prstGeom prst="rect">
+            <a:avLst/>
+          </a:prstGeom>
+          <a:noFill/>
+        </p:spPr>
+        <p:txBody>
+          <a:bodyPr wrap="square" anchor="ctr" lIns="0" rIns="0" tIns="0" bIns="0">
+            <a:noAutofit/>
+          </a:bodyPr>
+          <a:lstStyle/>
+          <a:p>
+            <a:pPr algn="l">
+              <a:lnSpc>
+                <a:spcPct val="102000"/>
+              </a:lnSpc>
+              <a:spcBef>
+                <a:spcPts val="0"/>
+              </a:spcBef>
+              <a:spcAft>
+                <a:spcPts val="0"/>
+              </a:spcAft>
+              <a:defRPr sz="1600" b="1">
+                <a:solidFill>
+                  <a:srgbClr val="12335B"/>
+                </a:solidFill>
+              </a:defRPr>
+            </a:pPr>
+            <a:r>
+              <a:t>One phone, a known pitch, and simple physics: enough for usable LBW support.</a:t>
+            </a:r>
+          </a:p>
+        </p:txBody>
+      </p:sp>
+      <p:sp>
+        <p:nvSpPr>
+          <p:cNvPr id="6" name="TextBox 5"/>
+          <p:cNvSpPr txBox="1"/>
+          <p:nvPr/>
+        </p:nvSpPr>
+        <p:spPr>
+          <a:xfrm>
+            <a:off x="457200" y="1847088"/>
+            <a:ext cx="8229600" cy="2510028"/>
+          </a:xfrm>
+          <a:prstGeom prst="rect">
+            <a:avLst/>
+          </a:prstGeom>
+          <a:noFill/>
+        </p:spPr>
+        <p:txBody>
+          <a:bodyPr wrap="square" anchor="t" lIns="0" rIns="0" tIns="0" bIns="0">
+            <a:noAutofit/>
+          </a:bodyPr>
+          <a:lstStyle/>
+          <a:p>
+            <a:pPr>
+              <a:lnSpc>
+                <a:spcPct val="106000"/>
+              </a:lnSpc>
+              <a:spcAft>
+                <a:spcPts val="1100"/>
+              </a:spcAft>
+            </a:pPr>
+            <a:r>
+              <a:rPr sz="1300" b="1">
+                <a:solidFill>
+                  <a:srgbClr val="2E6FB5"/>
+                </a:solidFill>
+              </a:rPr>
+              <a:t>▪  </a:t>
+            </a:r>
+            <a:r>
+              <a:rPr sz="1500">
+                <a:solidFill>
+                  <a:srgbClr val="2A2A2A"/>
+                </a:solidFill>
+              </a:rPr>
+              <a:t>A full pipeline: calibrate, detect, track, reconstruct, decide.</a:t>
+            </a:r>
+          </a:p>
+          <a:p>
+            <a:pPr>
+              <a:lnSpc>
+                <a:spcPct val="106000"/>
+              </a:lnSpc>
+              <a:spcAft>
+                <a:spcPts val="1100"/>
+              </a:spcAft>
+            </a:pPr>
+            <a:r>
+              <a:rPr sz="1300" b="1">
+                <a:solidFill>
+                  <a:srgbClr val="2E6FB5"/>
+                </a:solidFill>
+              </a:rPr>
+              <a:t>▪  </a:t>
+            </a:r>
+            <a:r>
+              <a:rPr sz="1500">
+                <a:solidFill>
+                  <a:srgbClr val="2A2A2A"/>
+                </a:solidFill>
+              </a:rPr>
+              <a:t>Validated on synthetic deliveries (8/8) and real footage.</a:t>
+            </a:r>
+          </a:p>
+          <a:p>
+            <a:pPr>
+              <a:lnSpc>
+                <a:spcPct val="106000"/>
+              </a:lnSpc>
+              <a:spcAft>
+                <a:spcPts val="1100"/>
+              </a:spcAft>
+            </a:pPr>
+            <a:r>
+              <a:rPr sz="1300" b="1">
+                <a:solidFill>
+                  <a:srgbClr val="2E6FB5"/>
+                </a:solidFill>
+              </a:rPr>
+              <a:t>▪  </a:t>
+            </a:r>
+            <a:r>
+              <a:rPr sz="1500">
+                <a:solidFill>
+                  <a:srgbClr val="2A2A2A"/>
+                </a:solidFill>
+              </a:rPr>
+              <a:t>Refuses to invent a verdict on unusable clips: it fails clearly, not silently.</a:t>
+            </a:r>
+          </a:p>
+          <a:p>
+            <a:pPr>
+              <a:lnSpc>
+                <a:spcPct val="106000"/>
+              </a:lnSpc>
+              <a:spcAft>
+                <a:spcPts val="1100"/>
+              </a:spcAft>
+            </a:pPr>
+            <a:r>
+              <a:rPr sz="1300" b="1">
+                <a:solidFill>
+                  <a:srgbClr val="2E6FB5"/>
+                </a:solidFill>
+              </a:rPr>
+              <a:t>▪  </a:t>
+            </a:r>
+            <a:r>
+              <a:rPr sz="1500">
+                <a:solidFill>
+                  <a:srgbClr val="2A2A2A"/>
+                </a:solidFill>
+              </a:rPr>
+              <a:t>Future work: two-phone capture, learned bounce model, and on-phone detection.</a:t>
+            </a:r>
+          </a:p>
+        </p:txBody>
+      </p:sp>
+    </p:spTree>
+  </p:cSld>
+  <p:clrMapOvr>
+    <a:masterClrMapping/>
+  </p:clrMapOvr>
+</p:sld>
+</file>
+
+<file path=ppt/slides/slide22.xml><?xml version="1.0" encoding="utf-8"?>
+<p:sld xmlns:a="http://schemas.openxmlformats.org/drawingml/2006/main" xmlns:p="http://schemas.openxmlformats.org/presentationml/2006/main" xmlns:r="http://schemas.openxmlformats.org/officeDocument/2006/relationships">
+  <p:cSld>
+    <p:bg>
+      <p:bgPr>
+        <a:solidFill>
+          <a:srgbClr val="FFFFFF"/>
+        </a:solidFill>
+        <a:effectLst/>
+      </p:bgPr>
+    </p:bg>
+    <p:spTree>
+      <p:nvGrpSpPr>
+        <p:cNvPr id="1" name=""/>
+        <p:cNvGrpSpPr/>
+        <p:nvPr/>
+      </p:nvGrpSpPr>
+      <p:grpSpPr/>
+      <p:sp>
+        <p:nvSpPr>
+          <p:cNvPr id="2" name="TextBox 1"/>
+          <p:cNvSpPr txBox="1"/>
+          <p:nvPr/>
+        </p:nvSpPr>
+        <p:spPr>
+          <a:xfrm>
+            <a:off x="8046720" y="4777740"/>
+            <a:ext cx="640080" cy="274320"/>
+          </a:xfrm>
+          <a:prstGeom prst="rect">
+            <a:avLst/>
+          </a:prstGeom>
+          <a:noFill/>
+        </p:spPr>
+        <p:txBody>
+          <a:bodyPr wrap="square" anchor="t" lIns="0" rIns="0" tIns="0" bIns="0">
+            <a:noAutofit/>
+          </a:bodyPr>
+          <a:lstStyle/>
+          <a:p>
+            <a:pPr algn="r">
+              <a:lnSpc>
+                <a:spcPct val="104000"/>
+              </a:lnSpc>
+              <a:spcBef>
+                <a:spcPts val="0"/>
+              </a:spcBef>
+              <a:spcAft>
+                <a:spcPts val="0"/>
+              </a:spcAft>
+              <a:defRPr sz="900" b="0">
+                <a:solidFill>
+                  <a:srgbClr val="7C8690"/>
+                </a:solidFill>
+              </a:defRPr>
+            </a:pPr>
+            <a:r>
+              <a:t>22</a:t>
+            </a:r>
+          </a:p>
+        </p:txBody>
+      </p:sp>
+      <p:sp>
+        <p:nvSpPr>
+          <p:cNvPr id="3" name="Rectangle 2"/>
+          <p:cNvSpPr/>
+          <p:nvPr/>
+        </p:nvSpPr>
+        <p:spPr>
+          <a:xfrm>
+            <a:off x="457200" y="1783080"/>
+            <a:ext cx="2011680" cy="50800"/>
+          </a:xfrm>
+          <a:prstGeom prst="rect">
+            <a:avLst/>
+          </a:prstGeom>
+          <a:solidFill>
+            <a:srgbClr val="2E6FB5"/>
+          </a:solidFill>
+          <a:ln>
+            <a:noFill/>
+          </a:ln>
+          <a:effectLst/>
+        </p:spPr>
+        <p:style>
+          <a:lnRef idx="1">
+            <a:schemeClr val="accent1"/>
+          </a:lnRef>
+          <a:fillRef idx="3">
+            <a:schemeClr val="accent1"/>
+          </a:fillRef>
+          <a:effectRef idx="2">
+            <a:schemeClr val="accent1"/>
+          </a:effectRef>
+          <a:fontRef idx="minor">
+            <a:schemeClr val="lt1"/>
+          </a:fontRef>
+        </p:style>
+        <p:txBody>
+          <a:bodyPr rtlCol="0" anchor="ctr"/>
+          <a:lstStyle/>
+          <a:p>
+            <a:pPr algn="ctr"/>
+          </a:p>
+        </p:txBody>
+      </p:sp>
+      <p:sp>
+        <p:nvSpPr>
+          <p:cNvPr id="4" name="TextBox 3"/>
+          <p:cNvSpPr txBox="1"/>
+          <p:nvPr/>
+        </p:nvSpPr>
+        <p:spPr>
+          <a:xfrm>
+            <a:off x="457200" y="1920240"/>
+            <a:ext cx="8229600" cy="2011680"/>
+          </a:xfrm>
+          <a:prstGeom prst="rect">
+            <a:avLst/>
+          </a:prstGeom>
+          <a:noFill/>
+        </p:spPr>
+        <p:txBody>
+          <a:bodyPr wrap="square" anchor="t" lIns="0" rIns="0" tIns="0" bIns="0">
+            <a:noAutofit/>
+          </a:bodyPr>
+          <a:lstStyle/>
+          <a:p>
+            <a:pPr algn="l">
+              <a:lnSpc>
+                <a:spcPct val="104000"/>
+              </a:lnSpc>
+              <a:spcBef>
+                <a:spcPts val="0"/>
+              </a:spcBef>
               <a:spcAft>
                 <a:spcPts val="600"/>
               </a:spcAft>
@@ -9139,6 +12398,12 @@
           </a:p>
           <a:p>
             <a:pPr algn="l">
+              <a:lnSpc>
+                <a:spcPct val="104000"/>
+              </a:lnSpc>
+              <a:spcBef>
+                <a:spcPts val="0"/>
+              </a:spcBef>
               <a:spcAft>
                 <a:spcPts val="1400"/>
               </a:spcAft>
@@ -9149,22 +12414,28 @@
               </a:defRPr>
             </a:pPr>
             <a:r>
-              <a:t>Questions &amp; Discussion</a:t>
+              <a:t>Questions and Discussion</a:t>
             </a:r>
           </a:p>
           <a:p>
             <a:pPr algn="l">
-              <a:spcAft>
-                <a:spcPts val="0"/>
-              </a:spcAft>
-              <a:defRPr sz="1400" b="0">
-                <a:solidFill>
-                  <a:srgbClr val="222222"/>
+              <a:lnSpc>
+                <a:spcPct val="104000"/>
+              </a:lnSpc>
+              <a:spcBef>
+                <a:spcPts val="0"/>
+              </a:spcBef>
+              <a:spcAft>
+                <a:spcPts val="0"/>
+              </a:spcAft>
+              <a:defRPr sz="1300" b="0">
+                <a:solidFill>
+                  <a:srgbClr val="2A2A2A"/>
                 </a:solidFill>
               </a:defRPr>
             </a:pPr>
             <a:r>
-              <a:t>Niraj Kafle  ·  PocketDRS  ·  BIT Final-Year Project</a:t>
+              <a:t>Niraj Kafle,  PocketDRS,  BIT Final-Year Project</a:t>
             </a:r>
           </a:p>
         </p:txBody>
@@ -9203,8 +12474,8 @@
         </p:nvSpPr>
         <p:spPr>
           <a:xfrm>
-            <a:off x="502920" y="438912"/>
-            <a:ext cx="8138160" cy="201168"/>
+            <a:off x="457200" y="566928"/>
+            <a:ext cx="8229600" cy="475488"/>
           </a:xfrm>
           <a:prstGeom prst="rect">
             <a:avLst/>
@@ -9212,54 +12483,28 @@
           <a:noFill/>
         </p:spPr>
         <p:txBody>
-          <a:bodyPr wrap="none">
+          <a:bodyPr wrap="square" anchor="ctr" lIns="0" rIns="0" tIns="0" bIns="0">
             <a:noAutofit/>
           </a:bodyPr>
           <a:lstStyle/>
           <a:p>
-            <a:pPr>
-              <a:defRPr sz="1100" b="1">
-                <a:solidFill>
-                  <a:srgbClr val="2E6FB5"/>
+            <a:pPr algn="l">
+              <a:lnSpc>
+                <a:spcPct val="104000"/>
+              </a:lnSpc>
+              <a:spcBef>
+                <a:spcPts val="0"/>
+              </a:spcBef>
+              <a:spcAft>
+                <a:spcPts val="0"/>
+              </a:spcAft>
+              <a:defRPr sz="2300" b="1">
+                <a:solidFill>
+                  <a:srgbClr val="12335B"/>
                 </a:solidFill>
               </a:defRPr>
             </a:pPr>
             <a:r>
-              <a:t>INTRODUCTION</a:t>
-            </a:r>
-          </a:p>
-        </p:txBody>
-      </p:sp>
-      <p:sp>
-        <p:nvSpPr>
-          <p:cNvPr id="3" name="TextBox 2"/>
-          <p:cNvSpPr txBox="1"/>
-          <p:nvPr/>
-        </p:nvSpPr>
-        <p:spPr>
-          <a:xfrm>
-            <a:off x="502920" y="640080"/>
-            <a:ext cx="8138160" cy="530352"/>
-          </a:xfrm>
-          <a:prstGeom prst="rect">
-            <a:avLst/>
-          </a:prstGeom>
-          <a:noFill/>
-        </p:spPr>
-        <p:txBody>
-          <a:bodyPr wrap="square" anchor="ctr">
-            <a:noAutofit/>
-          </a:bodyPr>
-          <a:lstStyle/>
-          <a:p>
-            <a:pPr>
-              <a:defRPr sz="2400" b="1">
-                <a:solidFill>
-                  <a:srgbClr val="12335B"/>
-                </a:solidFill>
-              </a:defRPr>
-            </a:pPr>
-            <a:r>
               <a:t>Introduction</a:t>
             </a:r>
           </a:p>
@@ -9267,14 +12512,14 @@
       </p:sp>
       <p:sp>
         <p:nvSpPr>
-          <p:cNvPr id="4" name="Rectangle 3"/>
+          <p:cNvPr id="3" name="Rectangle 2"/>
           <p:cNvSpPr/>
           <p:nvPr/>
         </p:nvSpPr>
         <p:spPr>
           <a:xfrm>
-            <a:off x="502920" y="1170432"/>
-            <a:ext cx="1828800" cy="38100"/>
+            <a:off x="457200" y="1060704"/>
+            <a:ext cx="1737360" cy="38100"/>
           </a:xfrm>
           <a:prstGeom prst="rect">
             <a:avLst/>
@@ -9311,14 +12556,58 @@
       </p:sp>
       <p:sp>
         <p:nvSpPr>
+          <p:cNvPr id="4" name="TextBox 3"/>
+          <p:cNvSpPr txBox="1"/>
+          <p:nvPr/>
+        </p:nvSpPr>
+        <p:spPr>
+          <a:xfrm>
+            <a:off x="8046720" y="4777740"/>
+            <a:ext cx="640080" cy="274320"/>
+          </a:xfrm>
+          <a:prstGeom prst="rect">
+            <a:avLst/>
+          </a:prstGeom>
+          <a:noFill/>
+        </p:spPr>
+        <p:txBody>
+          <a:bodyPr wrap="square" anchor="t" lIns="0" rIns="0" tIns="0" bIns="0">
+            <a:noAutofit/>
+          </a:bodyPr>
+          <a:lstStyle/>
+          <a:p>
+            <a:pPr algn="r">
+              <a:lnSpc>
+                <a:spcPct val="104000"/>
+              </a:lnSpc>
+              <a:spcBef>
+                <a:spcPts val="0"/>
+              </a:spcBef>
+              <a:spcAft>
+                <a:spcPts val="0"/>
+              </a:spcAft>
+              <a:defRPr sz="900" b="0">
+                <a:solidFill>
+                  <a:srgbClr val="7C8690"/>
+                </a:solidFill>
+              </a:defRPr>
+            </a:pPr>
+            <a:r>
+              <a:t>3</a:t>
+            </a:r>
+          </a:p>
+        </p:txBody>
+      </p:sp>
+      <p:sp>
+        <p:nvSpPr>
           <p:cNvPr id="5" name="TextBox 4"/>
           <p:cNvSpPr txBox="1"/>
           <p:nvPr/>
         </p:nvSpPr>
         <p:spPr>
           <a:xfrm>
-            <a:off x="8001000" y="4759452"/>
-            <a:ext cx="640080" cy="274320"/>
+            <a:off x="457200" y="1280160"/>
+            <a:ext cx="8229600" cy="457200"/>
           </a:xfrm>
           <a:prstGeom prst="rect">
             <a:avLst/>
@@ -9326,20 +12615,29 @@
           <a:noFill/>
         </p:spPr>
         <p:txBody>
-          <a:bodyPr wrap="none">
-            <a:spAutoFit/>
+          <a:bodyPr wrap="square" anchor="ctr" lIns="0" rIns="0" tIns="0" bIns="0">
+            <a:noAutofit/>
           </a:bodyPr>
           <a:lstStyle/>
           <a:p>
-            <a:pPr algn="r">
-              <a:defRPr sz="900">
-                <a:solidFill>
-                  <a:srgbClr val="8A8A8A"/>
+            <a:pPr algn="l">
+              <a:lnSpc>
+                <a:spcPct val="102000"/>
+              </a:lnSpc>
+              <a:spcBef>
+                <a:spcPts val="0"/>
+              </a:spcBef>
+              <a:spcAft>
+                <a:spcPts val="0"/>
+              </a:spcAft>
+              <a:defRPr sz="1600" b="1">
+                <a:solidFill>
+                  <a:srgbClr val="12335B"/>
                 </a:solidFill>
               </a:defRPr>
             </a:pPr>
             <a:r>
-              <a:t>3</a:t>
+              <a:t>Ball-tracking review for everyday cricket, from a single phone.</a:t>
             </a:r>
           </a:p>
         </p:txBody>
@@ -9352,8 +12650,8 @@
         </p:nvSpPr>
         <p:spPr>
           <a:xfrm>
-            <a:off x="502920" y="1335024"/>
-            <a:ext cx="8138160" cy="502920"/>
+            <a:off x="457200" y="1847088"/>
+            <a:ext cx="8229600" cy="2510028"/>
           </a:xfrm>
           <a:prstGeom prst="rect">
             <a:avLst/>
@@ -9361,136 +12659,112 @@
           <a:noFill/>
         </p:spPr>
         <p:txBody>
-          <a:bodyPr wrap="square">
+          <a:bodyPr wrap="square" anchor="t" lIns="0" rIns="0" tIns="0" bIns="0">
             <a:noAutofit/>
           </a:bodyPr>
           <a:lstStyle/>
           <a:p>
             <a:pPr>
               <a:lnSpc>
-                <a:spcPct val="102000"/>
-              </a:lnSpc>
-              <a:defRPr sz="1700" b="1">
-                <a:solidFill>
-                  <a:srgbClr val="12335B"/>
-                </a:solidFill>
-              </a:defRPr>
-            </a:pPr>
-            <a:r>
-              <a:t>PocketDRS brings ball-tracking DRS to grassroots cricket with one smartphone.</a:t>
-            </a:r>
-          </a:p>
-        </p:txBody>
-      </p:sp>
-      <p:sp>
-        <p:nvSpPr>
-          <p:cNvPr id="7" name="TextBox 6"/>
-          <p:cNvSpPr txBox="1"/>
-          <p:nvPr/>
-        </p:nvSpPr>
-        <p:spPr>
-          <a:xfrm>
-            <a:off x="502920" y="1847088"/>
-            <a:ext cx="8138160" cy="2455164"/>
-          </a:xfrm>
-          <a:prstGeom prst="rect">
-            <a:avLst/>
-          </a:prstGeom>
-          <a:noFill/>
-        </p:spPr>
-        <p:txBody>
-          <a:bodyPr wrap="square">
-            <a:normAutofit/>
-          </a:bodyPr>
-          <a:lstStyle/>
+                <a:spcPct val="106000"/>
+              </a:lnSpc>
+              <a:spcAft>
+                <a:spcPts val="1100"/>
+              </a:spcAft>
+            </a:pPr>
+            <a:r>
+              <a:rPr sz="1300" b="1">
+                <a:solidFill>
+                  <a:srgbClr val="2E6FB5"/>
+                </a:solidFill>
+              </a:rPr>
+              <a:t>▪  </a:t>
+            </a:r>
+            <a:r>
+              <a:rPr sz="1500">
+                <a:solidFill>
+                  <a:srgbClr val="2A2A2A"/>
+                </a:solidFill>
+              </a:rPr>
+              <a:t>Leg Before Wicket (LBW): cricket's hardest call, judged live from one angle.</a:t>
+            </a:r>
+          </a:p>
           <a:p>
             <a:pPr>
               <a:lnSpc>
-                <a:spcPct val="104000"/>
-              </a:lnSpc>
-              <a:spcAft>
-                <a:spcPts val="600"/>
-              </a:spcAft>
-              <a:defRPr sz="1400">
-                <a:solidFill>
-                  <a:srgbClr val="222222"/>
-                </a:solidFill>
-              </a:defRPr>
-            </a:pPr>
-            <a:r>
-              <a:t>• LBW is one of cricket's most contested calls, judged live from a single viewpoint.</a:t>
+                <a:spcPct val="106000"/>
+              </a:lnSpc>
+              <a:spcAft>
+                <a:spcPts val="1100"/>
+              </a:spcAft>
+            </a:pPr>
+            <a:r>
+              <a:rPr sz="1300" b="1">
+                <a:solidFill>
+                  <a:srgbClr val="2E6FB5"/>
+                </a:solidFill>
+              </a:rPr>
+              <a:t>▪  </a:t>
+            </a:r>
+            <a:r>
+              <a:rPr sz="1500">
+                <a:solidFill>
+                  <a:srgbClr val="2A2A2A"/>
+                </a:solidFill>
+              </a:rPr>
+              <a:t>Hawk-Eye needs six to eight synced high-speed cameras and costly hardware.</a:t>
             </a:r>
           </a:p>
           <a:p>
             <a:pPr>
               <a:lnSpc>
-                <a:spcPct val="104000"/>
-              </a:lnSpc>
-              <a:spcAft>
-                <a:spcPts val="600"/>
-              </a:spcAft>
-              <a:defRPr sz="1400">
-                <a:solidFill>
-                  <a:srgbClr val="222222"/>
-                </a:solidFill>
-              </a:defRPr>
-            </a:pPr>
-            <a:r>
-              <a:t>• Professional DRS (Hawk-Eye) needs six to eight synchronised high-speed cameras and dedicated hardware.</a:t>
+                <a:spcPct val="106000"/>
+              </a:lnSpc>
+              <a:spcAft>
+                <a:spcPts val="1100"/>
+              </a:spcAft>
+            </a:pPr>
+            <a:r>
+              <a:rPr sz="1300" b="1">
+                <a:solidFill>
+                  <a:srgbClr val="2E6FB5"/>
+                </a:solidFill>
+              </a:rPr>
+              <a:t>▪  </a:t>
+            </a:r>
+            <a:r>
+              <a:rPr sz="1500">
+                <a:solidFill>
+                  <a:srgbClr val="2A2A2A"/>
+                </a:solidFill>
+              </a:rPr>
+              <a:t>Out of reach for schools, clubs, and training grounds.</a:t>
             </a:r>
           </a:p>
           <a:p>
             <a:pPr>
               <a:lnSpc>
-                <a:spcPct val="104000"/>
-              </a:lnSpc>
-              <a:spcAft>
-                <a:spcPts val="600"/>
-              </a:spcAft>
-              <a:defRPr sz="1400">
-                <a:solidFill>
-                  <a:srgbClr val="222222"/>
-                </a:solidFill>
-              </a:defRPr>
-            </a:pPr>
-            <a:r>
-              <a:t>• That rig costs a fortune, so schools, clubs, and training grounds have no access to ball tracking.</a:t>
-            </a:r>
-          </a:p>
-          <a:p>
-            <a:pPr>
-              <a:lnSpc>
-                <a:spcPct val="104000"/>
-              </a:lnSpc>
-              <a:spcAft>
-                <a:spcPts val="600"/>
-              </a:spcAft>
-              <a:defRPr sz="1400">
-                <a:solidFill>
-                  <a:srgbClr val="222222"/>
-                </a:solidFill>
-              </a:defRPr>
-            </a:pPr>
-            <a:r>
-              <a:t>• PocketDRS reconstructs a delivery in real-world 3D from one phone camera and supports the LBW decision.</a:t>
-            </a:r>
-          </a:p>
-          <a:p>
-            <a:pPr>
-              <a:lnSpc>
-                <a:spcPct val="104000"/>
-              </a:lnSpc>
-              <a:spcAft>
-                <a:spcPts val="600"/>
-              </a:spcAft>
-              <a:defRPr sz="1400">
-                <a:solidFill>
-                  <a:srgbClr val="222222"/>
-                </a:solidFill>
-              </a:defRPr>
-            </a:pPr>
-            <a:r>
-              <a:t>• A Flutter app records the ball; a FastAPI + OpenCV server tracks it, rebuilds the 3D path, and applies ICC Rule 36.</a:t>
+                <a:spcPct val="106000"/>
+              </a:lnSpc>
+              <a:spcAft>
+                <a:spcPts val="1100"/>
+              </a:spcAft>
+            </a:pPr>
+            <a:r>
+              <a:rPr sz="1300" b="1">
+                <a:solidFill>
+                  <a:srgbClr val="2E6FB5"/>
+                </a:solidFill>
+              </a:rPr>
+              <a:t>▪  </a:t>
+            </a:r>
+            <a:r>
+              <a:rPr sz="1500">
+                <a:solidFill>
+                  <a:srgbClr val="2A2A2A"/>
+                </a:solidFill>
+              </a:rPr>
+              <a:t>PocketDRS rebuilds the delivery in 3D from one phone clip and supports the call.</a:t>
             </a:r>
           </a:p>
         </p:txBody>
@@ -9529,8 +12803,8 @@
         </p:nvSpPr>
         <p:spPr>
           <a:xfrm>
-            <a:off x="502920" y="438912"/>
-            <a:ext cx="8138160" cy="201168"/>
+            <a:off x="457200" y="384048"/>
+            <a:ext cx="8229600" cy="201168"/>
           </a:xfrm>
           <a:prstGeom prst="rect">
             <a:avLst/>
@@ -9538,12 +12812,21 @@
           <a:noFill/>
         </p:spPr>
         <p:txBody>
-          <a:bodyPr wrap="none">
+          <a:bodyPr wrap="square" anchor="t" lIns="0" rIns="0" tIns="0" bIns="0">
             <a:noAutofit/>
           </a:bodyPr>
           <a:lstStyle/>
           <a:p>
-            <a:pPr>
+            <a:pPr algn="l">
+              <a:lnSpc>
+                <a:spcPct val="104000"/>
+              </a:lnSpc>
+              <a:spcBef>
+                <a:spcPts val="0"/>
+              </a:spcBef>
+              <a:spcAft>
+                <a:spcPts val="0"/>
+              </a:spcAft>
               <a:defRPr sz="1100" b="1">
                 <a:solidFill>
                   <a:srgbClr val="2E6FB5"/>
@@ -9564,8 +12847,8 @@
         </p:nvSpPr>
         <p:spPr>
           <a:xfrm>
-            <a:off x="502920" y="640080"/>
-            <a:ext cx="8138160" cy="530352"/>
+            <a:off x="457200" y="566928"/>
+            <a:ext cx="8229600" cy="475488"/>
           </a:xfrm>
           <a:prstGeom prst="rect">
             <a:avLst/>
@@ -9573,13 +12856,22 @@
           <a:noFill/>
         </p:spPr>
         <p:txBody>
-          <a:bodyPr wrap="square" anchor="ctr">
+          <a:bodyPr wrap="square" anchor="ctr" lIns="0" rIns="0" tIns="0" bIns="0">
             <a:noAutofit/>
           </a:bodyPr>
           <a:lstStyle/>
           <a:p>
-            <a:pPr>
-              <a:defRPr sz="2400" b="1">
+            <a:pPr algn="l">
+              <a:lnSpc>
+                <a:spcPct val="104000"/>
+              </a:lnSpc>
+              <a:spcBef>
+                <a:spcPts val="0"/>
+              </a:spcBef>
+              <a:spcAft>
+                <a:spcPts val="0"/>
+              </a:spcAft>
+              <a:defRPr sz="2300" b="1">
                 <a:solidFill>
                   <a:srgbClr val="12335B"/>
                 </a:solidFill>
@@ -9599,8 +12891,8 @@
         </p:nvSpPr>
         <p:spPr>
           <a:xfrm>
-            <a:off x="502920" y="1170432"/>
-            <a:ext cx="1828800" cy="38100"/>
+            <a:off x="457200" y="1060704"/>
+            <a:ext cx="1737360" cy="38100"/>
           </a:xfrm>
           <a:prstGeom prst="rect">
             <a:avLst/>
@@ -9643,7 +12935,7 @@
         </p:nvSpPr>
         <p:spPr>
           <a:xfrm>
-            <a:off x="8001000" y="4759452"/>
+            <a:off x="8046720" y="4777740"/>
             <a:ext cx="640080" cy="274320"/>
           </a:xfrm>
           <a:prstGeom prst="rect">
@@ -9652,15 +12944,24 @@
           <a:noFill/>
         </p:spPr>
         <p:txBody>
-          <a:bodyPr wrap="none">
-            <a:spAutoFit/>
+          <a:bodyPr wrap="square" anchor="t" lIns="0" rIns="0" tIns="0" bIns="0">
+            <a:noAutofit/>
           </a:bodyPr>
           <a:lstStyle/>
           <a:p>
             <a:pPr algn="r">
-              <a:defRPr sz="900">
-                <a:solidFill>
-                  <a:srgbClr val="8A8A8A"/>
+              <a:lnSpc>
+                <a:spcPct val="104000"/>
+              </a:lnSpc>
+              <a:spcBef>
+                <a:spcPts val="0"/>
+              </a:spcBef>
+              <a:spcAft>
+                <a:spcPts val="0"/>
+              </a:spcAft>
+              <a:defRPr sz="900" b="0">
+                <a:solidFill>
+                  <a:srgbClr val="7C8690"/>
                 </a:solidFill>
               </a:defRPr>
             </a:pPr>
@@ -9678,8 +12979,8 @@
         </p:nvSpPr>
         <p:spPr>
           <a:xfrm>
-            <a:off x="502920" y="1335024"/>
-            <a:ext cx="8138160" cy="502920"/>
+            <a:off x="457200" y="1280160"/>
+            <a:ext cx="8229600" cy="457200"/>
           </a:xfrm>
           <a:prstGeom prst="rect">
             <a:avLst/>
@@ -9687,23 +12988,29 @@
           <a:noFill/>
         </p:spPr>
         <p:txBody>
-          <a:bodyPr wrap="square">
+          <a:bodyPr wrap="square" anchor="ctr" lIns="0" rIns="0" tIns="0" bIns="0">
             <a:noAutofit/>
           </a:bodyPr>
           <a:lstStyle/>
           <a:p>
-            <a:pPr>
+            <a:pPr algn="l">
               <a:lnSpc>
                 <a:spcPct val="102000"/>
               </a:lnSpc>
-              <a:defRPr sz="1700" b="1">
+              <a:spcBef>
+                <a:spcPts val="0"/>
+              </a:spcBef>
+              <a:spcAft>
+                <a:spcPts val="0"/>
+              </a:spcAft>
+              <a:defRPr sz="1600" b="1">
                 <a:solidFill>
                   <a:srgbClr val="12335B"/>
                 </a:solidFill>
               </a:defRPr>
             </a:pPr>
             <a:r>
-              <a:t>Recovering a correct 3D ball path from a single 2D view is the core challenge.</a:t>
+              <a:t>Recover a true 3D ball path from a single flat (2D) video.</a:t>
             </a:r>
           </a:p>
         </p:txBody>
@@ -9716,8 +13023,8 @@
         </p:nvSpPr>
         <p:spPr>
           <a:xfrm>
-            <a:off x="502920" y="1847088"/>
-            <a:ext cx="8138160" cy="2455164"/>
+            <a:off x="457200" y="1847088"/>
+            <a:ext cx="8229600" cy="2510028"/>
           </a:xfrm>
           <a:prstGeom prst="rect">
             <a:avLst/>
@@ -9725,98 +13032,112 @@
           <a:noFill/>
         </p:spPr>
         <p:txBody>
-          <a:bodyPr wrap="square">
-            <a:normAutofit/>
+          <a:bodyPr wrap="square" anchor="t" lIns="0" rIns="0" tIns="0" bIns="0">
+            <a:noAutofit/>
           </a:bodyPr>
           <a:lstStyle/>
           <a:p>
             <a:pPr>
               <a:lnSpc>
-                <a:spcPct val="104000"/>
-              </a:lnSpc>
-              <a:spcAft>
-                <a:spcPts val="600"/>
-              </a:spcAft>
-              <a:defRPr sz="1400">
-                <a:solidFill>
-                  <a:srgbClr val="222222"/>
-                </a:solidFill>
-              </a:defRPr>
-            </a:pPr>
-            <a:r>
-              <a:t>• Umpires call LBW in real time from one angle — line, length, height, and impact at once.</a:t>
+                <a:spcPct val="106000"/>
+              </a:lnSpc>
+              <a:spcAft>
+                <a:spcPts val="1100"/>
+              </a:spcAft>
+            </a:pPr>
+            <a:r>
+              <a:rPr sz="1300" b="1">
+                <a:solidFill>
+                  <a:srgbClr val="2E6FB5"/>
+                </a:solidFill>
+              </a:rPr>
+              <a:t>▪  </a:t>
+            </a:r>
+            <a:r>
+              <a:rPr sz="1500">
+                <a:solidFill>
+                  <a:srgbClr val="2A2A2A"/>
+                </a:solidFill>
+              </a:rPr>
+              <a:t>An umpire judges line, length, height, and impact at once, in real time.</a:t>
             </a:r>
           </a:p>
           <a:p>
             <a:pPr>
               <a:lnSpc>
-                <a:spcPct val="104000"/>
-              </a:lnSpc>
-              <a:spcAft>
-                <a:spcPts val="600"/>
-              </a:spcAft>
-              <a:defRPr sz="1400">
-                <a:solidFill>
-                  <a:srgbClr val="222222"/>
-                </a:solidFill>
-              </a:defRPr>
-            </a:pPr>
-            <a:r>
-              <a:t>• Professional ball tracking needs multi-camera rigs, out of reach for grassroots cricket.</a:t>
+                <a:spcPct val="106000"/>
+              </a:lnSpc>
+              <a:spcAft>
+                <a:spcPts val="1100"/>
+              </a:spcAft>
+            </a:pPr>
+            <a:r>
+              <a:rPr sz="1300" b="1">
+                <a:solidFill>
+                  <a:srgbClr val="2E6FB5"/>
+                </a:solidFill>
+              </a:rPr>
+              <a:t>▪  </a:t>
+            </a:r>
+            <a:r>
+              <a:rPr sz="1500">
+                <a:solidFill>
+                  <a:srgbClr val="2A2A2A"/>
+                </a:solidFill>
+              </a:rPr>
+              <a:t>Multi-camera rigs are accurate but unaffordable for grassroots cricket.</a:t>
             </a:r>
           </a:p>
           <a:p>
             <a:pPr>
               <a:lnSpc>
-                <a:spcPct val="104000"/>
-              </a:lnSpc>
-              <a:spcAft>
-                <a:spcPts val="600"/>
-              </a:spcAft>
-              <a:defRPr sz="1400">
-                <a:solidFill>
-                  <a:srgbClr val="222222"/>
-                </a:solidFill>
-              </a:defRPr>
-            </a:pPr>
-            <a:r>
-              <a:t>• A single phone gives only 2D footage: depth ambiguity, motion blur, and an unknown camera pose.</a:t>
+                <a:spcPct val="106000"/>
+              </a:lnSpc>
+              <a:spcAft>
+                <a:spcPts val="1100"/>
+              </a:spcAft>
+            </a:pPr>
+            <a:r>
+              <a:rPr sz="1300" b="1">
+                <a:solidFill>
+                  <a:srgbClr val="2E6FB5"/>
+                </a:solidFill>
+              </a:rPr>
+              <a:t>▪  </a:t>
+            </a:r>
+            <a:r>
+              <a:rPr sz="1500">
+                <a:solidFill>
+                  <a:srgbClr val="2A2A2A"/>
+                </a:solidFill>
+              </a:rPr>
+              <a:t>One phone gives flat 2D only: unknown depth, motion blur, occlusion.</a:t>
             </a:r>
           </a:p>
           <a:p>
             <a:pPr>
               <a:lnSpc>
-                <a:spcPct val="104000"/>
-              </a:lnSpc>
-              <a:spcAft>
-                <a:spcPts val="600"/>
-              </a:spcAft>
-              <a:defRPr sz="1400">
-                <a:solidFill>
-                  <a:srgbClr val="222222"/>
-                </a:solidFill>
-              </a:defRPr>
-            </a:pPr>
-            <a:r>
-              <a:t>• Lifting that 2D pixel track to a correct 3D trajectory from one view is the hard part.</a:t>
-            </a:r>
-          </a:p>
-          <a:p>
-            <a:pPr>
-              <a:lnSpc>
-                <a:spcPct val="104000"/>
-              </a:lnSpc>
-              <a:spcAft>
-                <a:spcPts val="600"/>
-              </a:spcAft>
-              <a:defRPr sz="1400">
-                <a:solidFill>
-                  <a:srgbClr val="222222"/>
-                </a:solidFill>
-              </a:defRPr>
-            </a:pPr>
-            <a:r>
-              <a:t>• Need: recover 3D ball flight from one phone video and return a transparent LBW verdict.</a:t>
+                <a:spcPct val="106000"/>
+              </a:lnSpc>
+              <a:spcAft>
+                <a:spcPts val="1100"/>
+              </a:spcAft>
+            </a:pPr>
+            <a:r>
+              <a:rPr sz="1300" b="1">
+                <a:solidFill>
+                  <a:srgbClr val="2E6FB5"/>
+                </a:solidFill>
+              </a:rPr>
+              <a:t>▪  </a:t>
+            </a:r>
+            <a:r>
+              <a:rPr sz="1500">
+                <a:solidFill>
+                  <a:srgbClr val="2A2A2A"/>
+                </a:solidFill>
+              </a:rPr>
+              <a:t>Goal: a 3D flight and a clear, explained verdict from one viewpoint.</a:t>
             </a:r>
           </a:p>
         </p:txBody>
@@ -9855,8 +13176,8 @@
         </p:nvSpPr>
         <p:spPr>
           <a:xfrm>
-            <a:off x="502920" y="438912"/>
-            <a:ext cx="8138160" cy="201168"/>
+            <a:off x="457200" y="384048"/>
+            <a:ext cx="8229600" cy="201168"/>
           </a:xfrm>
           <a:prstGeom prst="rect">
             <a:avLst/>
@@ -9864,12 +13185,21 @@
           <a:noFill/>
         </p:spPr>
         <p:txBody>
-          <a:bodyPr wrap="none">
+          <a:bodyPr wrap="square" anchor="t" lIns="0" rIns="0" tIns="0" bIns="0">
             <a:noAutofit/>
           </a:bodyPr>
           <a:lstStyle/>
           <a:p>
-            <a:pPr>
+            <a:pPr algn="l">
+              <a:lnSpc>
+                <a:spcPct val="104000"/>
+              </a:lnSpc>
+              <a:spcBef>
+                <a:spcPts val="0"/>
+              </a:spcBef>
+              <a:spcAft>
+                <a:spcPts val="0"/>
+              </a:spcAft>
               <a:defRPr sz="1100" b="1">
                 <a:solidFill>
                   <a:srgbClr val="2E6FB5"/>
@@ -9890,8 +13220,8 @@
         </p:nvSpPr>
         <p:spPr>
           <a:xfrm>
-            <a:off x="502920" y="640080"/>
-            <a:ext cx="8138160" cy="530352"/>
+            <a:off x="457200" y="566928"/>
+            <a:ext cx="8229600" cy="475488"/>
           </a:xfrm>
           <a:prstGeom prst="rect">
             <a:avLst/>
@@ -9899,13 +13229,22 @@
           <a:noFill/>
         </p:spPr>
         <p:txBody>
-          <a:bodyPr wrap="square" anchor="ctr">
+          <a:bodyPr wrap="square" anchor="ctr" lIns="0" rIns="0" tIns="0" bIns="0">
             <a:noAutofit/>
           </a:bodyPr>
           <a:lstStyle/>
           <a:p>
-            <a:pPr>
-              <a:defRPr sz="2400" b="1">
+            <a:pPr algn="l">
+              <a:lnSpc>
+                <a:spcPct val="104000"/>
+              </a:lnSpc>
+              <a:spcBef>
+                <a:spcPts val="0"/>
+              </a:spcBef>
+              <a:spcAft>
+                <a:spcPts val="0"/>
+              </a:spcAft>
+              <a:defRPr sz="2300" b="1">
                 <a:solidFill>
                   <a:srgbClr val="12335B"/>
                 </a:solidFill>
@@ -9925,8 +13264,8 @@
         </p:nvSpPr>
         <p:spPr>
           <a:xfrm>
-            <a:off x="502920" y="1170432"/>
-            <a:ext cx="1828800" cy="38100"/>
+            <a:off x="457200" y="1060704"/>
+            <a:ext cx="1737360" cy="38100"/>
           </a:xfrm>
           <a:prstGeom prst="rect">
             <a:avLst/>
@@ -9969,7 +13308,7 @@
         </p:nvSpPr>
         <p:spPr>
           <a:xfrm>
-            <a:off x="8001000" y="4759452"/>
+            <a:off x="8046720" y="4777740"/>
             <a:ext cx="640080" cy="274320"/>
           </a:xfrm>
           <a:prstGeom prst="rect">
@@ -9978,15 +13317,24 @@
           <a:noFill/>
         </p:spPr>
         <p:txBody>
-          <a:bodyPr wrap="none">
-            <a:spAutoFit/>
+          <a:bodyPr wrap="square" anchor="t" lIns="0" rIns="0" tIns="0" bIns="0">
+            <a:noAutofit/>
           </a:bodyPr>
           <a:lstStyle/>
           <a:p>
             <a:pPr algn="r">
-              <a:defRPr sz="900">
-                <a:solidFill>
-                  <a:srgbClr val="8A8A8A"/>
+              <a:lnSpc>
+                <a:spcPct val="104000"/>
+              </a:lnSpc>
+              <a:spcBef>
+                <a:spcPts val="0"/>
+              </a:spcBef>
+              <a:spcAft>
+                <a:spcPts val="0"/>
+              </a:spcAft>
+              <a:defRPr sz="900" b="0">
+                <a:solidFill>
+                  <a:srgbClr val="7C8690"/>
                 </a:solidFill>
               </a:defRPr>
             </a:pPr>
@@ -10004,8 +13352,8 @@
         </p:nvSpPr>
         <p:spPr>
           <a:xfrm>
-            <a:off x="502920" y="1335024"/>
-            <a:ext cx="8138160" cy="502920"/>
+            <a:off x="457200" y="1280160"/>
+            <a:ext cx="8229600" cy="457200"/>
           </a:xfrm>
           <a:prstGeom prst="rect">
             <a:avLst/>
@@ -10013,23 +13361,29 @@
           <a:noFill/>
         </p:spPr>
         <p:txBody>
-          <a:bodyPr wrap="square">
+          <a:bodyPr wrap="square" anchor="ctr" lIns="0" rIns="0" tIns="0" bIns="0">
             <a:noAutofit/>
           </a:bodyPr>
           <a:lstStyle/>
           <a:p>
-            <a:pPr>
+            <a:pPr algn="l">
               <a:lnSpc>
                 <a:spcPct val="102000"/>
               </a:lnSpc>
-              <a:defRPr sz="1700" b="1">
+              <a:spcBef>
+                <a:spcPts val="0"/>
+              </a:spcBef>
+              <a:spcAft>
+                <a:spcPts val="0"/>
+              </a:spcAft>
+              <a:defRPr sz="1600" b="1">
                 <a:solidFill>
                   <a:srgbClr val="12335B"/>
                 </a:solidFill>
               </a:defRPr>
             </a:pPr>
             <a:r>
-              <a:t>Build a phone-only pipeline that reconstructs a delivery in 3D and supports the LBW call.</a:t>
+              <a:t>A phone-only pipeline: from clip to verdict.</a:t>
             </a:r>
           </a:p>
         </p:txBody>
@@ -10042,8 +13396,8 @@
         </p:nvSpPr>
         <p:spPr>
           <a:xfrm>
-            <a:off x="502920" y="1847088"/>
-            <a:ext cx="8138160" cy="2455164"/>
+            <a:off x="457200" y="1847088"/>
+            <a:ext cx="8229600" cy="2510028"/>
           </a:xfrm>
           <a:prstGeom prst="rect">
             <a:avLst/>
@@ -10051,98 +13405,112 @@
           <a:noFill/>
         </p:spPr>
         <p:txBody>
-          <a:bodyPr wrap="square">
-            <a:normAutofit/>
+          <a:bodyPr wrap="square" anchor="t" lIns="0" rIns="0" tIns="0" bIns="0">
+            <a:noAutofit/>
           </a:bodyPr>
           <a:lstStyle/>
           <a:p>
             <a:pPr>
               <a:lnSpc>
-                <a:spcPct val="104000"/>
-              </a:lnSpc>
-              <a:spcAft>
-                <a:spcPts val="600"/>
-              </a:spcAft>
-              <a:defRPr sz="1400">
-                <a:solidFill>
-                  <a:srgbClr val="222222"/>
-                </a:solidFill>
-              </a:defRPr>
-            </a:pPr>
-            <a:r>
-              <a:t>• Recover the camera pose from the marked stumps using PnP (the tapped corners set the detection region).</a:t>
+                <a:spcPct val="106000"/>
+              </a:lnSpc>
+              <a:spcAft>
+                <a:spcPts val="1100"/>
+              </a:spcAft>
+            </a:pPr>
+            <a:r>
+              <a:rPr sz="1300" b="1">
+                <a:solidFill>
+                  <a:srgbClr val="2E6FB5"/>
+                </a:solidFill>
+              </a:rPr>
+              <a:t>▪  </a:t>
+            </a:r>
+            <a:r>
+              <a:rPr sz="1500">
+                <a:solidFill>
+                  <a:srgbClr val="2A2A2A"/>
+                </a:solidFill>
+              </a:rPr>
+              <a:t>Recover the camera position from the marked stumps (Perspective-n-Point, PnP).</a:t>
             </a:r>
           </a:p>
           <a:p>
             <a:pPr>
               <a:lnSpc>
-                <a:spcPct val="104000"/>
-              </a:lnSpc>
-              <a:spcAft>
-                <a:spcPts val="600"/>
-              </a:spcAft>
-              <a:defRPr sz="1400">
-                <a:solidFill>
-                  <a:srgbClr val="222222"/>
-                </a:solidFill>
-              </a:defRPr>
-            </a:pPr>
-            <a:r>
-              <a:t>• Detect and track the ball across frames (motion + colour + a learned YOLO detector).</a:t>
+                <a:spcPct val="106000"/>
+              </a:lnSpc>
+              <a:spcAft>
+                <a:spcPts val="1100"/>
+              </a:spcAft>
+            </a:pPr>
+            <a:r>
+              <a:rPr sz="1300" b="1">
+                <a:solidFill>
+                  <a:srgbClr val="2E6FB5"/>
+                </a:solidFill>
+              </a:rPr>
+              <a:t>▪  </a:t>
+            </a:r>
+            <a:r>
+              <a:rPr sz="1500">
+                <a:solidFill>
+                  <a:srgbClr val="2A2A2A"/>
+                </a:solidFill>
+              </a:rPr>
+              <a:t>Detect and track the ball (motion + colour + a trained YOLO detector).</a:t>
             </a:r>
           </a:p>
           <a:p>
             <a:pPr>
               <a:lnSpc>
-                <a:spcPct val="104000"/>
-              </a:lnSpc>
-              <a:spcAft>
-                <a:spcPts val="600"/>
-              </a:spcAft>
-              <a:defRPr sz="1400">
-                <a:solidFill>
-                  <a:srgbClr val="222222"/>
-                </a:solidFill>
-              </a:defRPr>
-            </a:pPr>
-            <a:r>
-              <a:t>• Link the detections into one smooth trajectory using RANSAC.</a:t>
+                <a:spcPct val="106000"/>
+              </a:lnSpc>
+              <a:spcAft>
+                <a:spcPts val="1100"/>
+              </a:spcAft>
+            </a:pPr>
+            <a:r>
+              <a:rPr sz="1300" b="1">
+                <a:solidFill>
+                  <a:srgbClr val="2E6FB5"/>
+                </a:solidFill>
+              </a:rPr>
+              <a:t>▪  </a:t>
+            </a:r>
+            <a:r>
+              <a:rPr sz="1500">
+                <a:solidFill>
+                  <a:srgbClr val="2A2A2A"/>
+                </a:solidFill>
+              </a:rPr>
+              <a:t>Link the detections into one smooth path (Random Sample Consensus, RANSAC).</a:t>
             </a:r>
           </a:p>
           <a:p>
             <a:pPr>
               <a:lnSpc>
-                <a:spcPct val="104000"/>
-              </a:lnSpc>
-              <a:spcAft>
-                <a:spcPts val="600"/>
-              </a:spcAft>
-              <a:defRPr sz="1400">
-                <a:solidFill>
-                  <a:srgbClr val="222222"/>
-                </a:solidFill>
-              </a:defRPr>
-            </a:pPr>
-            <a:r>
-              <a:t>• Rebuild the ball path in real-world 3D using projectile-motion physics.</a:t>
-            </a:r>
-          </a:p>
-          <a:p>
-            <a:pPr>
-              <a:lnSpc>
-                <a:spcPct val="104000"/>
-              </a:lnSpc>
-              <a:spcAft>
-                <a:spcPts val="600"/>
-              </a:spcAft>
-              <a:defRPr sz="1400">
-                <a:solidFill>
-                  <a:srgbClr val="222222"/>
-                </a:solidFill>
-              </a:defRPr>
-            </a:pPr>
-            <a:r>
-              <a:t>• Apply the three ICC Rule 36 checks — pitching, impact, wickets — for the verdict.</a:t>
+                <a:spcPct val="106000"/>
+              </a:lnSpc>
+              <a:spcAft>
+                <a:spcPts val="1100"/>
+              </a:spcAft>
+            </a:pPr>
+            <a:r>
+              <a:rPr sz="1300" b="1">
+                <a:solidFill>
+                  <a:srgbClr val="2E6FB5"/>
+                </a:solidFill>
+              </a:rPr>
+              <a:t>▪  </a:t>
+            </a:r>
+            <a:r>
+              <a:rPr sz="1500">
+                <a:solidFill>
+                  <a:srgbClr val="2A2A2A"/>
+                </a:solidFill>
+              </a:rPr>
+              <a:t>Rebuild the 3D path with projectile physics; apply the three ICC Rule 36 checks.</a:t>
             </a:r>
           </a:p>
         </p:txBody>
@@ -10181,8 +13549,8 @@
         </p:nvSpPr>
         <p:spPr>
           <a:xfrm>
-            <a:off x="502920" y="438912"/>
-            <a:ext cx="8138160" cy="201168"/>
+            <a:off x="457200" y="566928"/>
+            <a:ext cx="8229600" cy="475488"/>
           </a:xfrm>
           <a:prstGeom prst="rect">
             <a:avLst/>
@@ -10190,54 +13558,28 @@
           <a:noFill/>
         </p:spPr>
         <p:txBody>
-          <a:bodyPr wrap="none">
+          <a:bodyPr wrap="square" anchor="ctr" lIns="0" rIns="0" tIns="0" bIns="0">
             <a:noAutofit/>
           </a:bodyPr>
           <a:lstStyle/>
           <a:p>
-            <a:pPr>
-              <a:defRPr sz="1100" b="1">
-                <a:solidFill>
-                  <a:srgbClr val="2E6FB5"/>
+            <a:pPr algn="l">
+              <a:lnSpc>
+                <a:spcPct val="104000"/>
+              </a:lnSpc>
+              <a:spcBef>
+                <a:spcPts val="0"/>
+              </a:spcBef>
+              <a:spcAft>
+                <a:spcPts val="0"/>
+              </a:spcAft>
+              <a:defRPr sz="2300" b="1">
+                <a:solidFill>
+                  <a:srgbClr val="12335B"/>
                 </a:solidFill>
               </a:defRPr>
             </a:pPr>
             <a:r>
-              <a:t>REQUIREMENTS</a:t>
-            </a:r>
-          </a:p>
-        </p:txBody>
-      </p:sp>
-      <p:sp>
-        <p:nvSpPr>
-          <p:cNvPr id="3" name="TextBox 2"/>
-          <p:cNvSpPr txBox="1"/>
-          <p:nvPr/>
-        </p:nvSpPr>
-        <p:spPr>
-          <a:xfrm>
-            <a:off x="502920" y="640080"/>
-            <a:ext cx="8138160" cy="530352"/>
-          </a:xfrm>
-          <a:prstGeom prst="rect">
-            <a:avLst/>
-          </a:prstGeom>
-          <a:noFill/>
-        </p:spPr>
-        <p:txBody>
-          <a:bodyPr wrap="square" anchor="ctr">
-            <a:noAutofit/>
-          </a:bodyPr>
-          <a:lstStyle/>
-          <a:p>
-            <a:pPr>
-              <a:defRPr sz="2400" b="1">
-                <a:solidFill>
-                  <a:srgbClr val="12335B"/>
-                </a:solidFill>
-              </a:defRPr>
-            </a:pPr>
-            <a:r>
               <a:t>Functional Requirements</a:t>
             </a:r>
           </a:p>
@@ -10245,14 +13587,14 @@
       </p:sp>
       <p:sp>
         <p:nvSpPr>
-          <p:cNvPr id="4" name="Rectangle 3"/>
+          <p:cNvPr id="3" name="Rectangle 2"/>
           <p:cNvSpPr/>
           <p:nvPr/>
         </p:nvSpPr>
         <p:spPr>
           <a:xfrm>
-            <a:off x="502920" y="1170432"/>
-            <a:ext cx="1828800" cy="38100"/>
+            <a:off x="457200" y="1060704"/>
+            <a:ext cx="1737360" cy="38100"/>
           </a:xfrm>
           <a:prstGeom prst="rect">
             <a:avLst/>
@@ -10289,14 +13631,58 @@
       </p:sp>
       <p:sp>
         <p:nvSpPr>
+          <p:cNvPr id="4" name="TextBox 3"/>
+          <p:cNvSpPr txBox="1"/>
+          <p:nvPr/>
+        </p:nvSpPr>
+        <p:spPr>
+          <a:xfrm>
+            <a:off x="8046720" y="4777740"/>
+            <a:ext cx="640080" cy="274320"/>
+          </a:xfrm>
+          <a:prstGeom prst="rect">
+            <a:avLst/>
+          </a:prstGeom>
+          <a:noFill/>
+        </p:spPr>
+        <p:txBody>
+          <a:bodyPr wrap="square" anchor="t" lIns="0" rIns="0" tIns="0" bIns="0">
+            <a:noAutofit/>
+          </a:bodyPr>
+          <a:lstStyle/>
+          <a:p>
+            <a:pPr algn="r">
+              <a:lnSpc>
+                <a:spcPct val="104000"/>
+              </a:lnSpc>
+              <a:spcBef>
+                <a:spcPts val="0"/>
+              </a:spcBef>
+              <a:spcAft>
+                <a:spcPts val="0"/>
+              </a:spcAft>
+              <a:defRPr sz="900" b="0">
+                <a:solidFill>
+                  <a:srgbClr val="7C8690"/>
+                </a:solidFill>
+              </a:defRPr>
+            </a:pPr>
+            <a:r>
+              <a:t>6</a:t>
+            </a:r>
+          </a:p>
+        </p:txBody>
+      </p:sp>
+      <p:sp>
+        <p:nvSpPr>
           <p:cNvPr id="5" name="TextBox 4"/>
           <p:cNvSpPr txBox="1"/>
           <p:nvPr/>
         </p:nvSpPr>
         <p:spPr>
           <a:xfrm>
-            <a:off x="8001000" y="4759452"/>
-            <a:ext cx="640080" cy="274320"/>
+            <a:off x="457200" y="1280160"/>
+            <a:ext cx="8229600" cy="457200"/>
           </a:xfrm>
           <a:prstGeom prst="rect">
             <a:avLst/>
@@ -10304,20 +13690,29 @@
           <a:noFill/>
         </p:spPr>
         <p:txBody>
-          <a:bodyPr wrap="none">
-            <a:spAutoFit/>
+          <a:bodyPr wrap="square" anchor="ctr" lIns="0" rIns="0" tIns="0" bIns="0">
+            <a:noAutofit/>
           </a:bodyPr>
           <a:lstStyle/>
           <a:p>
-            <a:pPr algn="r">
-              <a:defRPr sz="900">
-                <a:solidFill>
-                  <a:srgbClr val="8A8A8A"/>
+            <a:pPr algn="l">
+              <a:lnSpc>
+                <a:spcPct val="102000"/>
+              </a:lnSpc>
+              <a:spcBef>
+                <a:spcPts val="0"/>
+              </a:spcBef>
+              <a:spcAft>
+                <a:spcPts val="0"/>
+              </a:spcAft>
+              <a:defRPr sz="1600" b="1">
+                <a:solidFill>
+                  <a:srgbClr val="12335B"/>
                 </a:solidFill>
               </a:defRPr>
             </a:pPr>
             <a:r>
-              <a:t>6</a:t>
+              <a:t>Twelve requirements: capture, calibrate, analyse, visualise.</a:t>
             </a:r>
           </a:p>
         </p:txBody>
@@ -10330,8 +13725,8 @@
         </p:nvSpPr>
         <p:spPr>
           <a:xfrm>
-            <a:off x="502920" y="1335024"/>
-            <a:ext cx="8138160" cy="502920"/>
+            <a:off x="457200" y="1847088"/>
+            <a:ext cx="8229600" cy="2510028"/>
           </a:xfrm>
           <a:prstGeom prst="rect">
             <a:avLst/>
@@ -10339,136 +13734,112 @@
           <a:noFill/>
         </p:spPr>
         <p:txBody>
-          <a:bodyPr wrap="square">
+          <a:bodyPr wrap="square" anchor="t" lIns="0" rIns="0" tIns="0" bIns="0">
             <a:noAutofit/>
           </a:bodyPr>
           <a:lstStyle/>
           <a:p>
             <a:pPr>
               <a:lnSpc>
-                <a:spcPct val="102000"/>
-              </a:lnSpc>
-              <a:defRPr sz="1700" b="1">
-                <a:solidFill>
-                  <a:srgbClr val="12335B"/>
-                </a:solidFill>
-              </a:defRPr>
-            </a:pPr>
-            <a:r>
-              <a:t>Twelve functional requirements span capture, calibration, analysis, and visualisation.</a:t>
-            </a:r>
-          </a:p>
-        </p:txBody>
-      </p:sp>
-      <p:sp>
-        <p:nvSpPr>
-          <p:cNvPr id="7" name="TextBox 6"/>
-          <p:cNvSpPr txBox="1"/>
-          <p:nvPr/>
-        </p:nvSpPr>
-        <p:spPr>
-          <a:xfrm>
-            <a:off x="502920" y="1847088"/>
-            <a:ext cx="8138160" cy="2455164"/>
-          </a:xfrm>
-          <a:prstGeom prst="rect">
-            <a:avLst/>
-          </a:prstGeom>
-          <a:noFill/>
-        </p:spPr>
-        <p:txBody>
-          <a:bodyPr wrap="square">
-            <a:normAutofit/>
-          </a:bodyPr>
-          <a:lstStyle/>
+                <a:spcPct val="106000"/>
+              </a:lnSpc>
+              <a:spcAft>
+                <a:spcPts val="1100"/>
+              </a:spcAft>
+            </a:pPr>
+            <a:r>
+              <a:rPr sz="1300" b="1">
+                <a:solidFill>
+                  <a:srgbClr val="2E6FB5"/>
+                </a:solidFill>
+              </a:rPr>
+              <a:t>▪  </a:t>
+            </a:r>
+            <a:r>
+              <a:rPr sz="1500">
+                <a:solidFill>
+                  <a:srgbClr val="2A2A2A"/>
+                </a:solidFill>
+              </a:rPr>
+              <a:t>Record or upload a clip and tap the four pitch corners to calibrate.</a:t>
+            </a:r>
+          </a:p>
           <a:p>
             <a:pPr>
               <a:lnSpc>
-                <a:spcPct val="104000"/>
-              </a:lnSpc>
-              <a:spcAft>
-                <a:spcPts val="600"/>
-              </a:spcAft>
-              <a:defRPr sz="1400">
-                <a:solidFill>
-                  <a:srgbClr val="222222"/>
-                </a:solidFill>
-              </a:defRPr>
-            </a:pPr>
-            <a:r>
-              <a:t>• Record or upload a delivery clip and tap the four pitch corners for calibration.</a:t>
+                <a:spcPct val="106000"/>
+              </a:lnSpc>
+              <a:spcAft>
+                <a:spcPts val="1100"/>
+              </a:spcAft>
+            </a:pPr>
+            <a:r>
+              <a:rPr sz="1300" b="1">
+                <a:solidFill>
+                  <a:srgbClr val="2E6FB5"/>
+                </a:solidFill>
+              </a:rPr>
+              <a:t>▪  </a:t>
+            </a:r>
+            <a:r>
+              <a:rPr sz="1500">
+                <a:solidFill>
+                  <a:srgbClr val="2A2A2A"/>
+                </a:solidFill>
+              </a:rPr>
+              <a:t>Detect the ball per frame and link it into one trajectory.</a:t>
             </a:r>
           </a:p>
           <a:p>
             <a:pPr>
               <a:lnSpc>
-                <a:spcPct val="104000"/>
-              </a:lnSpc>
-              <a:spcAft>
-                <a:spcPts val="600"/>
-              </a:spcAft>
-              <a:defRPr sz="1400">
-                <a:solidFill>
-                  <a:srgbClr val="222222"/>
-                </a:solidFill>
-              </a:defRPr>
-            </a:pPr>
-            <a:r>
-              <a:t>• Detect the ball per frame and link the detections into a single trajectory.</a:t>
+                <a:spcPct val="106000"/>
+              </a:lnSpc>
+              <a:spcAft>
+                <a:spcPts val="1100"/>
+              </a:spcAft>
+            </a:pPr>
+            <a:r>
+              <a:rPr sz="1300" b="1">
+                <a:solidFill>
+                  <a:srgbClr val="2E6FB5"/>
+                </a:solidFill>
+              </a:rPr>
+              <a:t>▪  </a:t>
+            </a:r>
+            <a:r>
+              <a:rPr sz="1500">
+                <a:solidFill>
+                  <a:srgbClr val="2A2A2A"/>
+                </a:solidFill>
+              </a:rPr>
+              <a:t>Recover the camera position and rebuild the path in real-world 3D.</a:t>
             </a:r>
           </a:p>
           <a:p>
             <a:pPr>
               <a:lnSpc>
-                <a:spcPct val="104000"/>
-              </a:lnSpc>
-              <a:spcAft>
-                <a:spcPts val="600"/>
-              </a:spcAft>
-              <a:defRPr sz="1400">
-                <a:solidFill>
-                  <a:srgbClr val="222222"/>
-                </a:solidFill>
-              </a:defRPr>
-            </a:pPr>
-            <a:r>
-              <a:t>• Recover the camera pose and reconstruct the ball path in real-world 3D.</a:t>
-            </a:r>
-          </a:p>
-          <a:p>
-            <a:pPr>
-              <a:lnSpc>
-                <a:spcPct val="104000"/>
-              </a:lnSpc>
-              <a:spcAft>
-                <a:spcPts val="600"/>
-              </a:spcAft>
-              <a:defRPr sz="1400">
-                <a:solidFill>
-                  <a:srgbClr val="222222"/>
-                </a:solidFill>
-              </a:defRPr>
-            </a:pPr>
-            <a:r>
-              <a:t>• Compute pitching, impact, and wicket-hitting and return an LBW verdict.</a:t>
-            </a:r>
-          </a:p>
-          <a:p>
-            <a:pPr>
-              <a:lnSpc>
-                <a:spcPct val="104000"/>
-              </a:lnSpc>
-              <a:spcAft>
-                <a:spcPts val="600"/>
-              </a:spcAft>
-              <a:defRPr sz="1400">
-                <a:solidFill>
-                  <a:srgbClr val="222222"/>
-                </a:solidFill>
-              </a:defRPr>
-            </a:pPr>
-            <a:r>
-              <a:t>• Render a broadcast-style 2D overlay and an interactive 3D Hawk-Eye view.</a:t>
+                <a:spcPct val="106000"/>
+              </a:lnSpc>
+              <a:spcAft>
+                <a:spcPts val="1100"/>
+              </a:spcAft>
+            </a:pPr>
+            <a:r>
+              <a:rPr sz="1300" b="1">
+                <a:solidFill>
+                  <a:srgbClr val="2E6FB5"/>
+                </a:solidFill>
+              </a:rPr>
+              <a:t>▪  </a:t>
+            </a:r>
+            <a:r>
+              <a:rPr sz="1500">
+                <a:solidFill>
+                  <a:srgbClr val="2A2A2A"/>
+                </a:solidFill>
+              </a:rPr>
+              <a:t>Return an LBW verdict with a 2D overlay and an interactive 3D view.</a:t>
             </a:r>
           </a:p>
         </p:txBody>
@@ -10507,8 +13878,8 @@
         </p:nvSpPr>
         <p:spPr>
           <a:xfrm>
-            <a:off x="502920" y="438912"/>
-            <a:ext cx="8138160" cy="201168"/>
+            <a:off x="457200" y="566928"/>
+            <a:ext cx="8229600" cy="475488"/>
           </a:xfrm>
           <a:prstGeom prst="rect">
             <a:avLst/>
@@ -10516,54 +13887,28 @@
           <a:noFill/>
         </p:spPr>
         <p:txBody>
-          <a:bodyPr wrap="none">
+          <a:bodyPr wrap="square" anchor="ctr" lIns="0" rIns="0" tIns="0" bIns="0">
             <a:noAutofit/>
           </a:bodyPr>
           <a:lstStyle/>
           <a:p>
-            <a:pPr>
-              <a:defRPr sz="1100" b="1">
-                <a:solidFill>
-                  <a:srgbClr val="2E6FB5"/>
+            <a:pPr algn="l">
+              <a:lnSpc>
+                <a:spcPct val="104000"/>
+              </a:lnSpc>
+              <a:spcBef>
+                <a:spcPts val="0"/>
+              </a:spcBef>
+              <a:spcAft>
+                <a:spcPts val="0"/>
+              </a:spcAft>
+              <a:defRPr sz="2300" b="1">
+                <a:solidFill>
+                  <a:srgbClr val="12335B"/>
                 </a:solidFill>
               </a:defRPr>
             </a:pPr>
             <a:r>
-              <a:t>REQUIREMENTS</a:t>
-            </a:r>
-          </a:p>
-        </p:txBody>
-      </p:sp>
-      <p:sp>
-        <p:nvSpPr>
-          <p:cNvPr id="3" name="TextBox 2"/>
-          <p:cNvSpPr txBox="1"/>
-          <p:nvPr/>
-        </p:nvSpPr>
-        <p:spPr>
-          <a:xfrm>
-            <a:off x="502920" y="640080"/>
-            <a:ext cx="8138160" cy="530352"/>
-          </a:xfrm>
-          <a:prstGeom prst="rect">
-            <a:avLst/>
-          </a:prstGeom>
-          <a:noFill/>
-        </p:spPr>
-        <p:txBody>
-          <a:bodyPr wrap="square" anchor="ctr">
-            <a:noAutofit/>
-          </a:bodyPr>
-          <a:lstStyle/>
-          <a:p>
-            <a:pPr>
-              <a:defRPr sz="2400" b="1">
-                <a:solidFill>
-                  <a:srgbClr val="12335B"/>
-                </a:solidFill>
-              </a:defRPr>
-            </a:pPr>
-            <a:r>
               <a:t>Non-functional Requirements</a:t>
             </a:r>
           </a:p>
@@ -10571,14 +13916,14 @@
       </p:sp>
       <p:sp>
         <p:nvSpPr>
-          <p:cNvPr id="4" name="Rectangle 3"/>
+          <p:cNvPr id="3" name="Rectangle 2"/>
           <p:cNvSpPr/>
           <p:nvPr/>
         </p:nvSpPr>
         <p:spPr>
           <a:xfrm>
-            <a:off x="502920" y="1170432"/>
-            <a:ext cx="1828800" cy="38100"/>
+            <a:off x="457200" y="1060704"/>
+            <a:ext cx="1737360" cy="38100"/>
           </a:xfrm>
           <a:prstGeom prst="rect">
             <a:avLst/>
@@ -10615,14 +13960,58 @@
       </p:sp>
       <p:sp>
         <p:nvSpPr>
+          <p:cNvPr id="4" name="TextBox 3"/>
+          <p:cNvSpPr txBox="1"/>
+          <p:nvPr/>
+        </p:nvSpPr>
+        <p:spPr>
+          <a:xfrm>
+            <a:off x="8046720" y="4777740"/>
+            <a:ext cx="640080" cy="274320"/>
+          </a:xfrm>
+          <a:prstGeom prst="rect">
+            <a:avLst/>
+          </a:prstGeom>
+          <a:noFill/>
+        </p:spPr>
+        <p:txBody>
+          <a:bodyPr wrap="square" anchor="t" lIns="0" rIns="0" tIns="0" bIns="0">
+            <a:noAutofit/>
+          </a:bodyPr>
+          <a:lstStyle/>
+          <a:p>
+            <a:pPr algn="r">
+              <a:lnSpc>
+                <a:spcPct val="104000"/>
+              </a:lnSpc>
+              <a:spcBef>
+                <a:spcPts val="0"/>
+              </a:spcBef>
+              <a:spcAft>
+                <a:spcPts val="0"/>
+              </a:spcAft>
+              <a:defRPr sz="900" b="0">
+                <a:solidFill>
+                  <a:srgbClr val="7C8690"/>
+                </a:solidFill>
+              </a:defRPr>
+            </a:pPr>
+            <a:r>
+              <a:t>7</a:t>
+            </a:r>
+          </a:p>
+        </p:txBody>
+      </p:sp>
+      <p:sp>
+        <p:nvSpPr>
           <p:cNvPr id="5" name="TextBox 4"/>
           <p:cNvSpPr txBox="1"/>
           <p:nvPr/>
         </p:nvSpPr>
         <p:spPr>
           <a:xfrm>
-            <a:off x="8001000" y="4759452"/>
-            <a:ext cx="640080" cy="274320"/>
+            <a:off x="457200" y="1280160"/>
+            <a:ext cx="8229600" cy="457200"/>
           </a:xfrm>
           <a:prstGeom prst="rect">
             <a:avLst/>
@@ -10630,20 +14019,29 @@
           <a:noFill/>
         </p:spPr>
         <p:txBody>
-          <a:bodyPr wrap="none">
-            <a:spAutoFit/>
+          <a:bodyPr wrap="square" anchor="ctr" lIns="0" rIns="0" tIns="0" bIns="0">
+            <a:noAutofit/>
           </a:bodyPr>
           <a:lstStyle/>
           <a:p>
-            <a:pPr algn="r">
-              <a:defRPr sz="900">
-                <a:solidFill>
-                  <a:srgbClr val="8A8A8A"/>
+            <a:pPr algn="l">
+              <a:lnSpc>
+                <a:spcPct val="102000"/>
+              </a:lnSpc>
+              <a:spcBef>
+                <a:spcPts val="0"/>
+              </a:spcBef>
+              <a:spcAft>
+                <a:spcPts val="0"/>
+              </a:spcAft>
+              <a:defRPr sz="1600" b="1">
+                <a:solidFill>
+                  <a:srgbClr val="12335B"/>
                 </a:solidFill>
               </a:defRPr>
             </a:pPr>
             <a:r>
-              <a:t>7</a:t>
+              <a:t>Fast, easy, clear, and portable, with no special hardware.</a:t>
             </a:r>
           </a:p>
         </p:txBody>
@@ -10656,8 +14054,8 @@
         </p:nvSpPr>
         <p:spPr>
           <a:xfrm>
-            <a:off x="502920" y="1335024"/>
-            <a:ext cx="8138160" cy="502920"/>
+            <a:off x="457200" y="1847088"/>
+            <a:ext cx="8229600" cy="2510028"/>
           </a:xfrm>
           <a:prstGeom prst="rect">
             <a:avLst/>
@@ -10665,136 +14063,112 @@
           <a:noFill/>
         </p:spPr>
         <p:txBody>
-          <a:bodyPr wrap="square">
+          <a:bodyPr wrap="square" anchor="t" lIns="0" rIns="0" tIns="0" bIns="0">
             <a:noAutofit/>
           </a:bodyPr>
           <a:lstStyle/>
           <a:p>
             <a:pPr>
               <a:lnSpc>
-                <a:spcPct val="102000"/>
-              </a:lnSpc>
-              <a:defRPr sz="1700" b="1">
-                <a:solidFill>
-                  <a:srgbClr val="12335B"/>
-                </a:solidFill>
-              </a:defRPr>
-            </a:pPr>
-            <a:r>
-              <a:t>Fast, usable, transparent, and portable — with no specialist hardware.</a:t>
-            </a:r>
-          </a:p>
-        </p:txBody>
-      </p:sp>
-      <p:sp>
-        <p:nvSpPr>
-          <p:cNvPr id="7" name="TextBox 6"/>
-          <p:cNvSpPr txBox="1"/>
-          <p:nvPr/>
-        </p:nvSpPr>
-        <p:spPr>
-          <a:xfrm>
-            <a:off x="502920" y="1847088"/>
-            <a:ext cx="8138160" cy="2455164"/>
-          </a:xfrm>
-          <a:prstGeom prst="rect">
-            <a:avLst/>
-          </a:prstGeom>
-          <a:noFill/>
-        </p:spPr>
-        <p:txBody>
-          <a:bodyPr wrap="square">
-            <a:normAutofit/>
-          </a:bodyPr>
-          <a:lstStyle/>
+                <a:spcPct val="106000"/>
+              </a:lnSpc>
+              <a:spcAft>
+                <a:spcPts val="1100"/>
+              </a:spcAft>
+            </a:pPr>
+            <a:r>
+              <a:rPr sz="1300" b="1">
+                <a:solidFill>
+                  <a:srgbClr val="2E6FB5"/>
+                </a:solidFill>
+              </a:rPr>
+              <a:t>▪  </a:t>
+            </a:r>
+            <a:r>
+              <a:rPr sz="1500">
+                <a:solidFill>
+                  <a:srgbClr val="2A2A2A"/>
+                </a:solidFill>
+              </a:rPr>
+              <a:t>Speed: a delivery analysed in about thirty seconds.</a:t>
+            </a:r>
+          </a:p>
           <a:p>
             <a:pPr>
               <a:lnSpc>
-                <a:spcPct val="104000"/>
-              </a:lnSpc>
-              <a:spcAft>
-                <a:spcPts val="600"/>
-              </a:spcAft>
-              <a:defRPr sz="1400">
-                <a:solidFill>
-                  <a:srgbClr val="222222"/>
-                </a:solidFill>
-              </a:defRPr>
-            </a:pPr>
-            <a:r>
-              <a:t>• Performance: analyse a delivery within about thirty seconds end to end.</a:t>
+                <a:spcPct val="106000"/>
+              </a:lnSpc>
+              <a:spcAft>
+                <a:spcPts val="1100"/>
+              </a:spcAft>
+            </a:pPr>
+            <a:r>
+              <a:rPr sz="1300" b="1">
+                <a:solidFill>
+                  <a:srgbClr val="2E6FB5"/>
+                </a:solidFill>
+              </a:rPr>
+              <a:t>▪  </a:t>
+            </a:r>
+            <a:r>
+              <a:rPr sz="1500">
+                <a:solidFill>
+                  <a:srgbClr val="2A2A2A"/>
+                </a:solidFill>
+              </a:rPr>
+              <a:t>Ease of use: four taps, no setup, no special hardware.</a:t>
             </a:r>
           </a:p>
           <a:p>
             <a:pPr>
               <a:lnSpc>
-                <a:spcPct val="104000"/>
-              </a:lnSpc>
-              <a:spcAft>
-                <a:spcPts val="600"/>
-              </a:spcAft>
-              <a:defRPr sz="1400">
-                <a:solidFill>
-                  <a:srgbClr val="222222"/>
-                </a:solidFill>
-              </a:defRPr>
-            </a:pPr>
-            <a:r>
-              <a:t>• Usability: four taps, no specialist hardware, no configuration.</a:t>
+                <a:spcPct val="106000"/>
+              </a:lnSpc>
+              <a:spcAft>
+                <a:spcPts val="1100"/>
+              </a:spcAft>
+            </a:pPr>
+            <a:r>
+              <a:rPr sz="1300" b="1">
+                <a:solidFill>
+                  <a:srgbClr val="2E6FB5"/>
+                </a:solidFill>
+              </a:rPr>
+              <a:t>▪  </a:t>
+            </a:r>
+            <a:r>
+              <a:rPr sz="1500">
+                <a:solidFill>
+                  <a:srgbClr val="2A2A2A"/>
+                </a:solidFill>
+              </a:rPr>
+              <a:t>Transparency: every verdict shows all three checks and the predicted impact.</a:t>
             </a:r>
           </a:p>
           <a:p>
             <a:pPr>
               <a:lnSpc>
-                <a:spcPct val="104000"/>
-              </a:lnSpc>
-              <a:spcAft>
-                <a:spcPts val="600"/>
-              </a:spcAft>
-              <a:defRPr sz="1400">
-                <a:solidFill>
-                  <a:srgbClr val="222222"/>
-                </a:solidFill>
-              </a:defRPr>
-            </a:pPr>
-            <a:r>
-              <a:t>• Accuracy: correct camera recovery and a verdict within honest monocular bounds.</a:t>
-            </a:r>
-          </a:p>
-          <a:p>
-            <a:pPr>
-              <a:lnSpc>
-                <a:spcPct val="104000"/>
-              </a:lnSpc>
-              <a:spcAft>
-                <a:spcPts val="600"/>
-              </a:spcAft>
-              <a:defRPr sz="1400">
-                <a:solidFill>
-                  <a:srgbClr val="222222"/>
-                </a:solidFill>
-              </a:defRPr>
-            </a:pPr>
-            <a:r>
-              <a:t>• Transparency: every verdict shows the three checks and the predicted impact at the stumps.</a:t>
-            </a:r>
-          </a:p>
-          <a:p>
-            <a:pPr>
-              <a:lnSpc>
-                <a:spcPct val="104000"/>
-              </a:lnSpc>
-              <a:spcAft>
-                <a:spcPts val="600"/>
-              </a:spcAft>
-              <a:defRPr sz="1400">
-                <a:solidFill>
-                  <a:srgbClr val="222222"/>
-                </a:solidFill>
-              </a:defRPr>
-            </a:pPr>
-            <a:r>
-              <a:t>• Portability: a standard Android or iOS phone plus a Python FastAPI server.</a:t>
+                <a:spcPct val="106000"/>
+              </a:lnSpc>
+              <a:spcAft>
+                <a:spcPts val="1100"/>
+              </a:spcAft>
+            </a:pPr>
+            <a:r>
+              <a:rPr sz="1300" b="1">
+                <a:solidFill>
+                  <a:srgbClr val="2E6FB5"/>
+                </a:solidFill>
+              </a:rPr>
+              <a:t>▪  </a:t>
+            </a:r>
+            <a:r>
+              <a:rPr sz="1500">
+                <a:solidFill>
+                  <a:srgbClr val="2A2A2A"/>
+                </a:solidFill>
+              </a:rPr>
+              <a:t>Portability: a normal Android or iPhone plus a small cloud server.</a:t>
             </a:r>
           </a:p>
         </p:txBody>
@@ -10833,8 +14207,8 @@
         </p:nvSpPr>
         <p:spPr>
           <a:xfrm>
-            <a:off x="502920" y="438912"/>
-            <a:ext cx="8138160" cy="201168"/>
+            <a:off x="457200" y="384048"/>
+            <a:ext cx="8229600" cy="201168"/>
           </a:xfrm>
           <a:prstGeom prst="rect">
             <a:avLst/>
@@ -10842,12 +14216,21 @@
           <a:noFill/>
         </p:spPr>
         <p:txBody>
-          <a:bodyPr wrap="none">
+          <a:bodyPr wrap="square" anchor="t" lIns="0" rIns="0" tIns="0" bIns="0">
             <a:noAutofit/>
           </a:bodyPr>
           <a:lstStyle/>
           <a:p>
-            <a:pPr>
+            <a:pPr algn="l">
+              <a:lnSpc>
+                <a:spcPct val="104000"/>
+              </a:lnSpc>
+              <a:spcBef>
+                <a:spcPts val="0"/>
+              </a:spcBef>
+              <a:spcAft>
+                <a:spcPts val="0"/>
+              </a:spcAft>
               <a:defRPr sz="1100" b="1">
                 <a:solidFill>
                   <a:srgbClr val="2E6FB5"/>
@@ -10868,8 +14251,8 @@
         </p:nvSpPr>
         <p:spPr>
           <a:xfrm>
-            <a:off x="502920" y="640080"/>
-            <a:ext cx="8138160" cy="530352"/>
+            <a:off x="457200" y="566928"/>
+            <a:ext cx="8229600" cy="475488"/>
           </a:xfrm>
           <a:prstGeom prst="rect">
             <a:avLst/>
@@ -10877,13 +14260,22 @@
           <a:noFill/>
         </p:spPr>
         <p:txBody>
-          <a:bodyPr wrap="square" anchor="ctr">
+          <a:bodyPr wrap="square" anchor="ctr" lIns="0" rIns="0" tIns="0" bIns="0">
             <a:noAutofit/>
           </a:bodyPr>
           <a:lstStyle/>
           <a:p>
-            <a:pPr>
-              <a:defRPr sz="2400" b="1">
+            <a:pPr algn="l">
+              <a:lnSpc>
+                <a:spcPct val="104000"/>
+              </a:lnSpc>
+              <a:spcBef>
+                <a:spcPts val="0"/>
+              </a:spcBef>
+              <a:spcAft>
+                <a:spcPts val="0"/>
+              </a:spcAft>
+              <a:defRPr sz="2300" b="1">
                 <a:solidFill>
                   <a:srgbClr val="12335B"/>
                 </a:solidFill>
@@ -10903,8 +14295,8 @@
         </p:nvSpPr>
         <p:spPr>
           <a:xfrm>
-            <a:off x="502920" y="1170432"/>
-            <a:ext cx="1828800" cy="38100"/>
+            <a:off x="457200" y="1060704"/>
+            <a:ext cx="1737360" cy="38100"/>
           </a:xfrm>
           <a:prstGeom prst="rect">
             <a:avLst/>
@@ -10947,7 +14339,7 @@
         </p:nvSpPr>
         <p:spPr>
           <a:xfrm>
-            <a:off x="8001000" y="4759452"/>
+            <a:off x="8046720" y="4777740"/>
             <a:ext cx="640080" cy="274320"/>
           </a:xfrm>
           <a:prstGeom prst="rect">
@@ -10956,15 +14348,24 @@
           <a:noFill/>
         </p:spPr>
         <p:txBody>
-          <a:bodyPr wrap="none">
-            <a:spAutoFit/>
+          <a:bodyPr wrap="square" anchor="t" lIns="0" rIns="0" tIns="0" bIns="0">
+            <a:noAutofit/>
           </a:bodyPr>
           <a:lstStyle/>
           <a:p>
             <a:pPr algn="r">
-              <a:defRPr sz="900">
-                <a:solidFill>
-                  <a:srgbClr val="8A8A8A"/>
+              <a:lnSpc>
+                <a:spcPct val="104000"/>
+              </a:lnSpc>
+              <a:spcBef>
+                <a:spcPts val="0"/>
+              </a:spcBef>
+              <a:spcAft>
+                <a:spcPts val="0"/>
+              </a:spcAft>
+              <a:defRPr sz="900" b="0">
+                <a:solidFill>
+                  <a:srgbClr val="7C8690"/>
                 </a:solidFill>
               </a:defRPr>
             </a:pPr>
@@ -10990,8 +14391,8 @@
         </p:blipFill>
         <p:spPr>
           <a:xfrm>
-            <a:off x="3563428" y="1335024"/>
-            <a:ext cx="2017144" cy="2967228"/>
+            <a:off x="3526131" y="1280160"/>
+            <a:ext cx="2091738" cy="3076956"/>
           </a:xfrm>
           <a:prstGeom prst="rect">
             <a:avLst/>
@@ -11032,8 +14433,8 @@
         </p:nvSpPr>
         <p:spPr>
           <a:xfrm>
-            <a:off x="502920" y="438912"/>
-            <a:ext cx="8138160" cy="201168"/>
+            <a:off x="457200" y="384048"/>
+            <a:ext cx="8229600" cy="201168"/>
           </a:xfrm>
           <a:prstGeom prst="rect">
             <a:avLst/>
@@ -11041,12 +14442,21 @@
           <a:noFill/>
         </p:spPr>
         <p:txBody>
-          <a:bodyPr wrap="none">
+          <a:bodyPr wrap="square" anchor="t" lIns="0" rIns="0" tIns="0" bIns="0">
             <a:noAutofit/>
           </a:bodyPr>
           <a:lstStyle/>
           <a:p>
-            <a:pPr>
+            <a:pPr algn="l">
+              <a:lnSpc>
+                <a:spcPct val="104000"/>
+              </a:lnSpc>
+              <a:spcBef>
+                <a:spcPts val="0"/>
+              </a:spcBef>
+              <a:spcAft>
+                <a:spcPts val="0"/>
+              </a:spcAft>
               <a:defRPr sz="1100" b="1">
                 <a:solidFill>
                   <a:srgbClr val="2E6FB5"/>
@@ -11067,8 +14477,8 @@
         </p:nvSpPr>
         <p:spPr>
           <a:xfrm>
-            <a:off x="502920" y="640080"/>
-            <a:ext cx="8138160" cy="530352"/>
+            <a:off x="457200" y="566928"/>
+            <a:ext cx="8229600" cy="475488"/>
           </a:xfrm>
           <a:prstGeom prst="rect">
             <a:avLst/>
@@ -11076,20 +14486,29 @@
           <a:noFill/>
         </p:spPr>
         <p:txBody>
-          <a:bodyPr wrap="square" anchor="ctr">
+          <a:bodyPr wrap="square" anchor="ctr" lIns="0" rIns="0" tIns="0" bIns="0">
             <a:noAutofit/>
           </a:bodyPr>
           <a:lstStyle/>
           <a:p>
-            <a:pPr>
-              <a:defRPr sz="2400" b="1">
+            <a:pPr algn="l">
+              <a:lnSpc>
+                <a:spcPct val="104000"/>
+              </a:lnSpc>
+              <a:spcBef>
+                <a:spcPts val="0"/>
+              </a:spcBef>
+              <a:spcAft>
+                <a:spcPts val="0"/>
+              </a:spcAft>
+              <a:defRPr sz="2300" b="1">
                 <a:solidFill>
                   <a:srgbClr val="12335B"/>
                 </a:solidFill>
               </a:defRPr>
             </a:pPr>
             <a:r>
-              <a:t>Data Modeling: ER Diagram</a:t>
+              <a:t>Data Model: Entity-Relationship (ER) Diagram</a:t>
             </a:r>
           </a:p>
         </p:txBody>
@@ -11102,8 +14521,8 @@
         </p:nvSpPr>
         <p:spPr>
           <a:xfrm>
-            <a:off x="502920" y="1170432"/>
-            <a:ext cx="1828800" cy="38100"/>
+            <a:off x="457200" y="1060704"/>
+            <a:ext cx="1737360" cy="38100"/>
           </a:xfrm>
           <a:prstGeom prst="rect">
             <a:avLst/>
@@ -11146,7 +14565,7 @@
         </p:nvSpPr>
         <p:spPr>
           <a:xfrm>
-            <a:off x="8001000" y="4759452"/>
+            <a:off x="8046720" y="4777740"/>
             <a:ext cx="640080" cy="274320"/>
           </a:xfrm>
           <a:prstGeom prst="rect">
@@ -11155,15 +14574,24 @@
           <a:noFill/>
         </p:spPr>
         <p:txBody>
-          <a:bodyPr wrap="none">
-            <a:spAutoFit/>
+          <a:bodyPr wrap="square" anchor="t" lIns="0" rIns="0" tIns="0" bIns="0">
+            <a:noAutofit/>
           </a:bodyPr>
           <a:lstStyle/>
           <a:p>
             <a:pPr algn="r">
-              <a:defRPr sz="900">
-                <a:solidFill>
-                  <a:srgbClr val="8A8A8A"/>
+              <a:lnSpc>
+                <a:spcPct val="104000"/>
+              </a:lnSpc>
+              <a:spcBef>
+                <a:spcPts val="0"/>
+              </a:spcBef>
+              <a:spcAft>
+                <a:spcPts val="0"/>
+              </a:spcAft>
+              <a:defRPr sz="900" b="0">
+                <a:solidFill>
+                  <a:srgbClr val="7C8690"/>
                 </a:solidFill>
               </a:defRPr>
             </a:pPr>
@@ -11189,8 +14617,8 @@
         </p:blipFill>
         <p:spPr>
           <a:xfrm>
-            <a:off x="3542940" y="1335024"/>
-            <a:ext cx="2058119" cy="2967228"/>
+            <a:off x="3504885" y="1280160"/>
+            <a:ext cx="2134229" cy="3076956"/>
           </a:xfrm>
           <a:prstGeom prst="rect">
             <a:avLst/>

--- a/dump/report_docs/pocketdrs_presentation.pptx
+++ b/dump/report_docs/pocketdrs_presentation.pptx
@@ -1,40 +1,40 @@
 
 <file path=ppt/presentation.xml><?xml version="1.0" encoding="utf-8"?>
-<p:presentation xmlns:a="http://schemas.openxmlformats.org/drawingml/2006/main" xmlns:r="http://schemas.openxmlformats.org/officeDocument/2006/relationships" xmlns:mc="http://schemas.openxmlformats.org/markup-compatibility/2006" xmlns:mv="urn:schemas-microsoft-com:mac:vml" xmlns:p="http://schemas.openxmlformats.org/presentationml/2006/main" xmlns:c="http://schemas.openxmlformats.org/drawingml/2006/chart" xmlns:dgm="http://schemas.openxmlformats.org/drawingml/2006/diagram" xmlns:o="urn:schemas-microsoft-com:office:office" xmlns:v="urn:schemas-microsoft-com:vml" xmlns:pvml="urn:schemas-microsoft-com:office:powerpoint" xmlns:com="http://schemas.openxmlformats.org/drawingml/2006/compatibility" xmlns:p14="http://schemas.microsoft.com/office/powerpoint/2010/main" xmlns:p15="http://schemas.microsoft.com/office/powerpoint/2012/main" xmlns:ahyp="http://schemas.microsoft.com/office/drawing/2018/hyperlinkcolor" autoCompressPictures="0" strictFirstAndLastChars="0" saveSubsetFonts="1">
+<p:presentation xmlns:a="http://schemas.openxmlformats.org/drawingml/2006/main" xmlns:r="http://schemas.openxmlformats.org/officeDocument/2006/relationships" xmlns:p="http://schemas.openxmlformats.org/presentationml/2006/main" strictFirstAndLastChars="0" saveSubsetFonts="1" autoCompressPictures="0">
   <p:sldMasterIdLst>
-    <p:sldMasterId id="2147483659" r:id="rId4"/>
+    <p:sldMasterId id="2147483659" r:id="rId1"/>
   </p:sldMasterIdLst>
   <p:notesMasterIdLst>
-    <p:notesMasterId r:id="rId5"/>
+    <p:notesMasterId r:id="rId24"/>
   </p:notesMasterIdLst>
   <p:sldIdLst>
-    <p:sldId id="256" r:id="rId6"/>
-    <p:sldId id="257" r:id="rId7"/>
-    <p:sldId id="258" r:id="rId8"/>
-    <p:sldId id="259" r:id="rId9"/>
-    <p:sldId id="260" r:id="rId10"/>
-    <p:sldId id="261" r:id="rId11"/>
-    <p:sldId id="262" r:id="rId12"/>
-    <p:sldId id="263" r:id="rId13"/>
-    <p:sldId id="264" r:id="rId14"/>
-    <p:sldId id="265" r:id="rId15"/>
-    <p:sldId id="266" r:id="rId16"/>
-    <p:sldId id="267" r:id="rId17"/>
-    <p:sldId id="268" r:id="rId18"/>
-    <p:sldId id="269" r:id="rId19"/>
-    <p:sldId id="270" r:id="rId20"/>
-    <p:sldId id="271" r:id="rId21"/>
-    <p:sldId id="272" r:id="rId22"/>
-    <p:sldId id="273" r:id="rId23"/>
-    <p:sldId id="274" r:id="rId24"/>
-    <p:sldId id="275" r:id="rId25"/>
-    <p:sldId id="276" r:id="rId26"/>
-    <p:sldId id="277" r:id="rId27"/>
+    <p:sldId id="256" r:id="rId2"/>
+    <p:sldId id="257" r:id="rId3"/>
+    <p:sldId id="258" r:id="rId4"/>
+    <p:sldId id="259" r:id="rId5"/>
+    <p:sldId id="260" r:id="rId6"/>
+    <p:sldId id="261" r:id="rId7"/>
+    <p:sldId id="262" r:id="rId8"/>
+    <p:sldId id="263" r:id="rId9"/>
+    <p:sldId id="264" r:id="rId10"/>
+    <p:sldId id="265" r:id="rId11"/>
+    <p:sldId id="266" r:id="rId12"/>
+    <p:sldId id="267" r:id="rId13"/>
+    <p:sldId id="268" r:id="rId14"/>
+    <p:sldId id="269" r:id="rId15"/>
+    <p:sldId id="270" r:id="rId16"/>
+    <p:sldId id="271" r:id="rId17"/>
+    <p:sldId id="272" r:id="rId18"/>
+    <p:sldId id="273" r:id="rId19"/>
+    <p:sldId id="274" r:id="rId20"/>
+    <p:sldId id="275" r:id="rId21"/>
+    <p:sldId id="276" r:id="rId22"/>
+    <p:sldId id="277" r:id="rId23"/>
   </p:sldIdLst>
-  <p:sldSz cy="5143500" cx="9144000"/>
+  <p:sldSz cx="9144000" cy="5143500" type="screen16x9"/>
   <p:notesSz cx="6858000" cy="9144000"/>
   <p:defaultTextStyle>
-    <a:defPPr lvl="0" marR="0" rtl="0" algn="l">
+    <a:defPPr marR="0" lvl="0" algn="l" rtl="0">
       <a:lnSpc>
         <a:spcPct val="100000"/>
       </a:lnSpc>
@@ -45,7 +45,7 @@
         <a:spcPts val="0"/>
       </a:spcAft>
     </a:defPPr>
-    <a:lvl1pPr lvl="0" marR="0" rtl="0" algn="l">
+    <a:lvl1pPr marR="0" lvl="0" algn="l" rtl="0">
       <a:lnSpc>
         <a:spcPct val="100000"/>
       </a:lnSpc>
@@ -59,7 +59,7 @@
         <a:srgbClr val="000000"/>
       </a:buClr>
       <a:buFont typeface="Arial"/>
-      <a:defRPr b="0" i="0" sz="1400" u="none" cap="none" strike="noStrike">
+      <a:defRPr sz="1400" b="0" i="0" u="none" strike="noStrike" cap="none">
         <a:solidFill>
           <a:srgbClr val="000000"/>
         </a:solidFill>
@@ -69,7 +69,7 @@
         <a:sym typeface="Arial"/>
       </a:defRPr>
     </a:lvl1pPr>
-    <a:lvl2pPr lvl="1" marR="0" rtl="0" algn="l">
+    <a:lvl2pPr marR="0" lvl="1" algn="l" rtl="0">
       <a:lnSpc>
         <a:spcPct val="100000"/>
       </a:lnSpc>
@@ -83,7 +83,7 @@
         <a:srgbClr val="000000"/>
       </a:buClr>
       <a:buFont typeface="Arial"/>
-      <a:defRPr b="0" i="0" sz="1400" u="none" cap="none" strike="noStrike">
+      <a:defRPr sz="1400" b="0" i="0" u="none" strike="noStrike" cap="none">
         <a:solidFill>
           <a:srgbClr val="000000"/>
         </a:solidFill>
@@ -93,7 +93,7 @@
         <a:sym typeface="Arial"/>
       </a:defRPr>
     </a:lvl2pPr>
-    <a:lvl3pPr lvl="2" marR="0" rtl="0" algn="l">
+    <a:lvl3pPr marR="0" lvl="2" algn="l" rtl="0">
       <a:lnSpc>
         <a:spcPct val="100000"/>
       </a:lnSpc>
@@ -107,7 +107,7 @@
         <a:srgbClr val="000000"/>
       </a:buClr>
       <a:buFont typeface="Arial"/>
-      <a:defRPr b="0" i="0" sz="1400" u="none" cap="none" strike="noStrike">
+      <a:defRPr sz="1400" b="0" i="0" u="none" strike="noStrike" cap="none">
         <a:solidFill>
           <a:srgbClr val="000000"/>
         </a:solidFill>
@@ -117,7 +117,7 @@
         <a:sym typeface="Arial"/>
       </a:defRPr>
     </a:lvl3pPr>
-    <a:lvl4pPr lvl="3" marR="0" rtl="0" algn="l">
+    <a:lvl4pPr marR="0" lvl="3" algn="l" rtl="0">
       <a:lnSpc>
         <a:spcPct val="100000"/>
       </a:lnSpc>
@@ -131,7 +131,7 @@
         <a:srgbClr val="000000"/>
       </a:buClr>
       <a:buFont typeface="Arial"/>
-      <a:defRPr b="0" i="0" sz="1400" u="none" cap="none" strike="noStrike">
+      <a:defRPr sz="1400" b="0" i="0" u="none" strike="noStrike" cap="none">
         <a:solidFill>
           <a:srgbClr val="000000"/>
         </a:solidFill>
@@ -141,7 +141,7 @@
         <a:sym typeface="Arial"/>
       </a:defRPr>
     </a:lvl4pPr>
-    <a:lvl5pPr lvl="4" marR="0" rtl="0" algn="l">
+    <a:lvl5pPr marR="0" lvl="4" algn="l" rtl="0">
       <a:lnSpc>
         <a:spcPct val="100000"/>
       </a:lnSpc>
@@ -155,7 +155,7 @@
         <a:srgbClr val="000000"/>
       </a:buClr>
       <a:buFont typeface="Arial"/>
-      <a:defRPr b="0" i="0" sz="1400" u="none" cap="none" strike="noStrike">
+      <a:defRPr sz="1400" b="0" i="0" u="none" strike="noStrike" cap="none">
         <a:solidFill>
           <a:srgbClr val="000000"/>
         </a:solidFill>
@@ -165,7 +165,7 @@
         <a:sym typeface="Arial"/>
       </a:defRPr>
     </a:lvl5pPr>
-    <a:lvl6pPr lvl="5" marR="0" rtl="0" algn="l">
+    <a:lvl6pPr marR="0" lvl="5" algn="l" rtl="0">
       <a:lnSpc>
         <a:spcPct val="100000"/>
       </a:lnSpc>
@@ -179,7 +179,7 @@
         <a:srgbClr val="000000"/>
       </a:buClr>
       <a:buFont typeface="Arial"/>
-      <a:defRPr b="0" i="0" sz="1400" u="none" cap="none" strike="noStrike">
+      <a:defRPr sz="1400" b="0" i="0" u="none" strike="noStrike" cap="none">
         <a:solidFill>
           <a:srgbClr val="000000"/>
         </a:solidFill>
@@ -189,7 +189,7 @@
         <a:sym typeface="Arial"/>
       </a:defRPr>
     </a:lvl6pPr>
-    <a:lvl7pPr lvl="6" marR="0" rtl="0" algn="l">
+    <a:lvl7pPr marR="0" lvl="6" algn="l" rtl="0">
       <a:lnSpc>
         <a:spcPct val="100000"/>
       </a:lnSpc>
@@ -203,7 +203,7 @@
         <a:srgbClr val="000000"/>
       </a:buClr>
       <a:buFont typeface="Arial"/>
-      <a:defRPr b="0" i="0" sz="1400" u="none" cap="none" strike="noStrike">
+      <a:defRPr sz="1400" b="0" i="0" u="none" strike="noStrike" cap="none">
         <a:solidFill>
           <a:srgbClr val="000000"/>
         </a:solidFill>
@@ -213,7 +213,7 @@
         <a:sym typeface="Arial"/>
       </a:defRPr>
     </a:lvl7pPr>
-    <a:lvl8pPr lvl="7" marR="0" rtl="0" algn="l">
+    <a:lvl8pPr marR="0" lvl="7" algn="l" rtl="0">
       <a:lnSpc>
         <a:spcPct val="100000"/>
       </a:lnSpc>
@@ -227,7 +227,7 @@
         <a:srgbClr val="000000"/>
       </a:buClr>
       <a:buFont typeface="Arial"/>
-      <a:defRPr b="0" i="0" sz="1400" u="none" cap="none" strike="noStrike">
+      <a:defRPr sz="1400" b="0" i="0" u="none" strike="noStrike" cap="none">
         <a:solidFill>
           <a:srgbClr val="000000"/>
         </a:solidFill>
@@ -237,7 +237,7 @@
         <a:sym typeface="Arial"/>
       </a:defRPr>
     </a:lvl8pPr>
-    <a:lvl9pPr lvl="8" marR="0" rtl="0" algn="l">
+    <a:lvl9pPr marR="0" lvl="8" algn="l" rtl="0">
       <a:lnSpc>
         <a:spcPct val="100000"/>
       </a:lnSpc>
@@ -251,7 +251,7 @@
         <a:srgbClr val="000000"/>
       </a:buClr>
       <a:buFont typeface="Arial"/>
-      <a:defRPr b="0" i="0" sz="1400" u="none" cap="none" strike="noStrike">
+      <a:defRPr sz="1400" b="0" i="0" u="none" strike="noStrike" cap="none">
         <a:solidFill>
           <a:srgbClr val="000000"/>
         </a:solidFill>
@@ -264,7 +264,7 @@
   </p:defaultTextStyle>
   <p:extLst>
     <p:ext uri="{EFAFB233-063F-42B5-8137-9DF3F51BA10A}">
-      <p15:sldGuideLst>
+      <p15:sldGuideLst xmlns:p15="http://schemas.microsoft.com/office/powerpoint/2012/main">
         <p15:guide id="1" orient="horz" pos="1620">
           <p15:clr>
             <a:srgbClr val="747775"/>
@@ -282,11 +282,16 @@
 </file>
 
 <file path=ppt/notesMasters/notesMaster1.xml><?xml version="1.0" encoding="utf-8"?>
-<p:notesMaster xmlns:a="http://schemas.openxmlformats.org/drawingml/2006/main" xmlns:r="http://schemas.openxmlformats.org/officeDocument/2006/relationships" xmlns:mc="http://schemas.openxmlformats.org/markup-compatibility/2006" xmlns:mv="urn:schemas-microsoft-com:mac:vml" xmlns:p="http://schemas.openxmlformats.org/presentationml/2006/main" xmlns:c="http://schemas.openxmlformats.org/drawingml/2006/chart" xmlns:dgm="http://schemas.openxmlformats.org/drawingml/2006/diagram" xmlns:o="urn:schemas-microsoft-com:office:office" xmlns:v="urn:schemas-microsoft-com:vml" xmlns:pvml="urn:schemas-microsoft-com:office:powerpoint" xmlns:com="http://schemas.openxmlformats.org/drawingml/2006/compatibility" xmlns:p14="http://schemas.microsoft.com/office/powerpoint/2010/main" xmlns:p15="http://schemas.microsoft.com/office/powerpoint/2012/main" xmlns:ahyp="http://schemas.microsoft.com/office/drawing/2018/hyperlinkcolor">
+<p:notesMaster xmlns:a="http://schemas.openxmlformats.org/drawingml/2006/main" xmlns:r="http://schemas.openxmlformats.org/officeDocument/2006/relationships" xmlns:p="http://schemas.openxmlformats.org/presentationml/2006/main">
   <p:cSld>
+    <p:bg>
+      <p:bgRef idx="1001">
+        <a:schemeClr val="bg1"/>
+      </p:bgRef>
+    </p:bg>
     <p:spTree>
       <p:nvGrpSpPr>
-        <p:cNvPr id="2" name="Shape 2"/>
+        <p:cNvPr id="1" name="Shape 2"/>
         <p:cNvGrpSpPr/>
         <p:nvPr/>
       </p:nvGrpSpPr>
@@ -301,9 +306,11 @@
       <p:sp>
         <p:nvSpPr>
           <p:cNvPr id="3" name="Google Shape;3;n"/>
-          <p:cNvSpPr/>
+          <p:cNvSpPr>
+            <a:spLocks noGrp="1" noRot="1" noChangeAspect="1"/>
+          </p:cNvSpPr>
           <p:nvPr>
-            <p:ph idx="2" type="sldImg"/>
+            <p:ph type="sldImg" idx="2"/>
           </p:nvPr>
         </p:nvSpPr>
         <p:spPr>
@@ -312,9 +319,13 @@
             <a:ext cx="6096075" cy="3429000"/>
           </a:xfrm>
           <a:custGeom>
-            <a:rect b="b" l="l" r="r" t="t"/>
+            <a:avLst/>
+            <a:gdLst/>
+            <a:ahLst/>
+            <a:cxnLst/>
+            <a:rect l="l" t="t" r="r" b="b"/>
             <a:pathLst>
-              <a:path extrusionOk="0" h="120000" w="120000">
+              <a:path w="120000" h="120000" extrusionOk="0">
                 <a:moveTo>
                   <a:pt x="0" y="0"/>
                 </a:moveTo>
@@ -332,23 +343,25 @@
             </a:pathLst>
           </a:custGeom>
           <a:noFill/>
-          <a:ln cap="flat" cmpd="sng" w="9525">
+          <a:ln w="9525" cap="flat" cmpd="sng">
             <a:solidFill>
               <a:srgbClr val="000000"/>
             </a:solidFill>
             <a:prstDash val="solid"/>
             <a:round/>
-            <a:headEnd len="sm" w="sm" type="none"/>
-            <a:tailEnd len="sm" w="sm" type="none"/>
+            <a:headEnd type="none" w="sm" len="sm"/>
+            <a:tailEnd type="none" w="sm" len="sm"/>
           </a:ln>
         </p:spPr>
       </p:sp>
       <p:sp>
         <p:nvSpPr>
           <p:cNvPr id="4" name="Google Shape;4;n"/>
-          <p:cNvSpPr txBox="1"/>
+          <p:cNvSpPr txBox="1">
+            <a:spLocks noGrp="1"/>
+          </p:cNvSpPr>
           <p:nvPr>
-            <p:ph idx="1" type="body"/>
+            <p:ph type="body" idx="1"/>
           </p:nvPr>
         </p:nvSpPr>
         <p:spPr>
@@ -365,11 +378,11 @@
           </a:ln>
         </p:spPr>
         <p:txBody>
-          <a:bodyPr anchorCtr="0" anchor="t" bIns="91425" lIns="91425" spcFirstLastPara="1" rIns="91425" wrap="square" tIns="91425">
+          <a:bodyPr spcFirstLastPara="1" wrap="square" lIns="91425" tIns="91425" rIns="91425" bIns="91425" anchor="t" anchorCtr="0">
             <a:noAutofit/>
           </a:bodyPr>
           <a:lstStyle>
-            <a:lvl1pPr indent="-298450" lvl="0" marL="457200">
+            <a:lvl1pPr marL="457200" lvl="0" indent="-298450">
               <a:spcBef>
                 <a:spcPts val="0"/>
               </a:spcBef>
@@ -380,7 +393,7 @@
               <a:buChar char="●"/>
               <a:defRPr sz="1100"/>
             </a:lvl1pPr>
-            <a:lvl2pPr indent="-298450" lvl="1" marL="914400">
+            <a:lvl2pPr marL="914400" lvl="1" indent="-298450">
               <a:spcBef>
                 <a:spcPts val="0"/>
               </a:spcBef>
@@ -391,7 +404,7 @@
               <a:buChar char="○"/>
               <a:defRPr sz="1100"/>
             </a:lvl2pPr>
-            <a:lvl3pPr indent="-298450" lvl="2" marL="1371600">
+            <a:lvl3pPr marL="1371600" lvl="2" indent="-298450">
               <a:spcBef>
                 <a:spcPts val="0"/>
               </a:spcBef>
@@ -402,7 +415,7 @@
               <a:buChar char="■"/>
               <a:defRPr sz="1100"/>
             </a:lvl3pPr>
-            <a:lvl4pPr indent="-298450" lvl="3" marL="1828800">
+            <a:lvl4pPr marL="1828800" lvl="3" indent="-298450">
               <a:spcBef>
                 <a:spcPts val="0"/>
               </a:spcBef>
@@ -413,7 +426,7 @@
               <a:buChar char="●"/>
               <a:defRPr sz="1100"/>
             </a:lvl4pPr>
-            <a:lvl5pPr indent="-298450" lvl="4" marL="2286000">
+            <a:lvl5pPr marL="2286000" lvl="4" indent="-298450">
               <a:spcBef>
                 <a:spcPts val="0"/>
               </a:spcBef>
@@ -424,7 +437,7 @@
               <a:buChar char="○"/>
               <a:defRPr sz="1100"/>
             </a:lvl5pPr>
-            <a:lvl6pPr indent="-298450" lvl="5" marL="2743200">
+            <a:lvl6pPr marL="2743200" lvl="5" indent="-298450">
               <a:spcBef>
                 <a:spcPts val="0"/>
               </a:spcBef>
@@ -435,7 +448,7 @@
               <a:buChar char="■"/>
               <a:defRPr sz="1100"/>
             </a:lvl6pPr>
-            <a:lvl7pPr indent="-298450" lvl="6" marL="3200400">
+            <a:lvl7pPr marL="3200400" lvl="6" indent="-298450">
               <a:spcBef>
                 <a:spcPts val="0"/>
               </a:spcBef>
@@ -446,7 +459,7 @@
               <a:buChar char="●"/>
               <a:defRPr sz="1100"/>
             </a:lvl7pPr>
-            <a:lvl8pPr indent="-298450" lvl="7" marL="3657600">
+            <a:lvl8pPr marL="3657600" lvl="7" indent="-298450">
               <a:spcBef>
                 <a:spcPts val="0"/>
               </a:spcBef>
@@ -457,7 +470,7 @@
               <a:buChar char="○"/>
               <a:defRPr sz="1100"/>
             </a:lvl8pPr>
-            <a:lvl9pPr indent="-298450" lvl="8" marL="4114800">
+            <a:lvl9pPr marL="4114800" lvl="8" indent="-298450">
               <a:spcBef>
                 <a:spcPts val="0"/>
               </a:spcBef>
@@ -469,14 +482,16 @@
               <a:defRPr sz="1100"/>
             </a:lvl9pPr>
           </a:lstStyle>
-          <a:p/>
+          <a:p>
+            <a:endParaRPr/>
+          </a:p>
         </p:txBody>
       </p:sp>
     </p:spTree>
   </p:cSld>
-  <p:clrMap accent1="accent1" accent2="accent2" accent3="accent3" accent4="accent4" accent5="accent5" accent6="accent6" bg1="lt1" bg2="dk2" tx1="dk1" tx2="lt2" folHlink="folHlink" hlink="hlink"/>
+  <p:clrMap bg1="lt1" tx1="dk1" bg2="dk2" tx2="lt2" accent1="accent1" accent2="accent2" accent3="accent3" accent4="accent4" accent5="accent5" accent6="accent6" hlink="hlink" folHlink="folHlink"/>
   <p:notesStyle>
-    <a:defPPr lvl="0" marR="0" rtl="0" algn="l">
+    <a:defPPr marR="0" lvl="0" algn="l" rtl="0">
       <a:lnSpc>
         <a:spcPct val="100000"/>
       </a:lnSpc>
@@ -487,7 +502,7 @@
         <a:spcPts val="0"/>
       </a:spcAft>
     </a:defPPr>
-    <a:lvl1pPr lvl="0" marR="0" rtl="0" algn="l">
+    <a:lvl1pPr marR="0" lvl="0" algn="l" rtl="0">
       <a:lnSpc>
         <a:spcPct val="100000"/>
       </a:lnSpc>
@@ -501,7 +516,7 @@
         <a:srgbClr val="000000"/>
       </a:buClr>
       <a:buFont typeface="Arial"/>
-      <a:defRPr b="0" i="0" sz="1400" u="none" cap="none" strike="noStrike">
+      <a:defRPr sz="1400" b="0" i="0" u="none" strike="noStrike" cap="none">
         <a:solidFill>
           <a:srgbClr val="000000"/>
         </a:solidFill>
@@ -511,7 +526,7 @@
         <a:sym typeface="Arial"/>
       </a:defRPr>
     </a:lvl1pPr>
-    <a:lvl2pPr lvl="1" marR="0" rtl="0" algn="l">
+    <a:lvl2pPr marR="0" lvl="1" algn="l" rtl="0">
       <a:lnSpc>
         <a:spcPct val="100000"/>
       </a:lnSpc>
@@ -525,7 +540,7 @@
         <a:srgbClr val="000000"/>
       </a:buClr>
       <a:buFont typeface="Arial"/>
-      <a:defRPr b="0" i="0" sz="1400" u="none" cap="none" strike="noStrike">
+      <a:defRPr sz="1400" b="0" i="0" u="none" strike="noStrike" cap="none">
         <a:solidFill>
           <a:srgbClr val="000000"/>
         </a:solidFill>
@@ -535,7 +550,7 @@
         <a:sym typeface="Arial"/>
       </a:defRPr>
     </a:lvl2pPr>
-    <a:lvl3pPr lvl="2" marR="0" rtl="0" algn="l">
+    <a:lvl3pPr marR="0" lvl="2" algn="l" rtl="0">
       <a:lnSpc>
         <a:spcPct val="100000"/>
       </a:lnSpc>
@@ -549,7 +564,7 @@
         <a:srgbClr val="000000"/>
       </a:buClr>
       <a:buFont typeface="Arial"/>
-      <a:defRPr b="0" i="0" sz="1400" u="none" cap="none" strike="noStrike">
+      <a:defRPr sz="1400" b="0" i="0" u="none" strike="noStrike" cap="none">
         <a:solidFill>
           <a:srgbClr val="000000"/>
         </a:solidFill>
@@ -559,7 +574,7 @@
         <a:sym typeface="Arial"/>
       </a:defRPr>
     </a:lvl3pPr>
-    <a:lvl4pPr lvl="3" marR="0" rtl="0" algn="l">
+    <a:lvl4pPr marR="0" lvl="3" algn="l" rtl="0">
       <a:lnSpc>
         <a:spcPct val="100000"/>
       </a:lnSpc>
@@ -573,7 +588,7 @@
         <a:srgbClr val="000000"/>
       </a:buClr>
       <a:buFont typeface="Arial"/>
-      <a:defRPr b="0" i="0" sz="1400" u="none" cap="none" strike="noStrike">
+      <a:defRPr sz="1400" b="0" i="0" u="none" strike="noStrike" cap="none">
         <a:solidFill>
           <a:srgbClr val="000000"/>
         </a:solidFill>
@@ -583,7 +598,7 @@
         <a:sym typeface="Arial"/>
       </a:defRPr>
     </a:lvl4pPr>
-    <a:lvl5pPr lvl="4" marR="0" rtl="0" algn="l">
+    <a:lvl5pPr marR="0" lvl="4" algn="l" rtl="0">
       <a:lnSpc>
         <a:spcPct val="100000"/>
       </a:lnSpc>
@@ -597,7 +612,7 @@
         <a:srgbClr val="000000"/>
       </a:buClr>
       <a:buFont typeface="Arial"/>
-      <a:defRPr b="0" i="0" sz="1400" u="none" cap="none" strike="noStrike">
+      <a:defRPr sz="1400" b="0" i="0" u="none" strike="noStrike" cap="none">
         <a:solidFill>
           <a:srgbClr val="000000"/>
         </a:solidFill>
@@ -607,7 +622,7 @@
         <a:sym typeface="Arial"/>
       </a:defRPr>
     </a:lvl5pPr>
-    <a:lvl6pPr lvl="5" marR="0" rtl="0" algn="l">
+    <a:lvl6pPr marR="0" lvl="5" algn="l" rtl="0">
       <a:lnSpc>
         <a:spcPct val="100000"/>
       </a:lnSpc>
@@ -621,7 +636,7 @@
         <a:srgbClr val="000000"/>
       </a:buClr>
       <a:buFont typeface="Arial"/>
-      <a:defRPr b="0" i="0" sz="1400" u="none" cap="none" strike="noStrike">
+      <a:defRPr sz="1400" b="0" i="0" u="none" strike="noStrike" cap="none">
         <a:solidFill>
           <a:srgbClr val="000000"/>
         </a:solidFill>
@@ -631,7 +646,7 @@
         <a:sym typeface="Arial"/>
       </a:defRPr>
     </a:lvl6pPr>
-    <a:lvl7pPr lvl="6" marR="0" rtl="0" algn="l">
+    <a:lvl7pPr marR="0" lvl="6" algn="l" rtl="0">
       <a:lnSpc>
         <a:spcPct val="100000"/>
       </a:lnSpc>
@@ -645,7 +660,7 @@
         <a:srgbClr val="000000"/>
       </a:buClr>
       <a:buFont typeface="Arial"/>
-      <a:defRPr b="0" i="0" sz="1400" u="none" cap="none" strike="noStrike">
+      <a:defRPr sz="1400" b="0" i="0" u="none" strike="noStrike" cap="none">
         <a:solidFill>
           <a:srgbClr val="000000"/>
         </a:solidFill>
@@ -655,7 +670,7 @@
         <a:sym typeface="Arial"/>
       </a:defRPr>
     </a:lvl7pPr>
-    <a:lvl8pPr lvl="7" marR="0" rtl="0" algn="l">
+    <a:lvl8pPr marR="0" lvl="7" algn="l" rtl="0">
       <a:lnSpc>
         <a:spcPct val="100000"/>
       </a:lnSpc>
@@ -669,7 +684,7 @@
         <a:srgbClr val="000000"/>
       </a:buClr>
       <a:buFont typeface="Arial"/>
-      <a:defRPr b="0" i="0" sz="1400" u="none" cap="none" strike="noStrike">
+      <a:defRPr sz="1400" b="0" i="0" u="none" strike="noStrike" cap="none">
         <a:solidFill>
           <a:srgbClr val="000000"/>
         </a:solidFill>
@@ -679,7 +694,7 @@
         <a:sym typeface="Arial"/>
       </a:defRPr>
     </a:lvl8pPr>
-    <a:lvl9pPr lvl="8" marR="0" rtl="0" algn="l">
+    <a:lvl9pPr marR="0" lvl="8" algn="l" rtl="0">
       <a:lnSpc>
         <a:spcPct val="100000"/>
       </a:lnSpc>
@@ -693,7 +708,7 @@
         <a:srgbClr val="000000"/>
       </a:buClr>
       <a:buFont typeface="Arial"/>
-      <a:defRPr b="0" i="0" sz="1400" u="none" cap="none" strike="noStrike">
+      <a:defRPr sz="1400" b="0" i="0" u="none" strike="noStrike" cap="none">
         <a:solidFill>
           <a:srgbClr val="000000"/>
         </a:solidFill>
@@ -708,11 +723,11 @@
 </file>
 
 <file path=ppt/slideLayouts/slideLayout1.xml><?xml version="1.0" encoding="utf-8"?>
-<p:sldLayout xmlns:a="http://schemas.openxmlformats.org/drawingml/2006/main" xmlns:r="http://schemas.openxmlformats.org/officeDocument/2006/relationships" xmlns:mc="http://schemas.openxmlformats.org/markup-compatibility/2006" xmlns:mv="urn:schemas-microsoft-com:mac:vml" xmlns:p="http://schemas.openxmlformats.org/presentationml/2006/main" xmlns:c="http://schemas.openxmlformats.org/drawingml/2006/chart" xmlns:dgm="http://schemas.openxmlformats.org/drawingml/2006/diagram" xmlns:o="urn:schemas-microsoft-com:office:office" xmlns:v="urn:schemas-microsoft-com:vml" xmlns:pvml="urn:schemas-microsoft-com:office:powerpoint" xmlns:com="http://schemas.openxmlformats.org/drawingml/2006/compatibility" xmlns:p14="http://schemas.microsoft.com/office/powerpoint/2010/main" xmlns:p15="http://schemas.microsoft.com/office/powerpoint/2012/main" xmlns:ahyp="http://schemas.microsoft.com/office/drawing/2018/hyperlinkcolor" matchingName="Title slide" type="title">
+<p:sldLayout xmlns:a="http://schemas.openxmlformats.org/drawingml/2006/main" xmlns:r="http://schemas.openxmlformats.org/officeDocument/2006/relationships" xmlns:p="http://schemas.openxmlformats.org/presentationml/2006/main" matchingName="Title slide" type="title">
   <p:cSld name="TITLE">
     <p:spTree>
       <p:nvGrpSpPr>
-        <p:cNvPr id="14" name="Shape 14"/>
+        <p:cNvPr id="1" name="Shape 14"/>
         <p:cNvGrpSpPr/>
         <p:nvPr/>
       </p:nvGrpSpPr>
@@ -727,7 +742,9 @@
       <p:sp>
         <p:nvSpPr>
           <p:cNvPr id="15" name="Google Shape;15;p2"/>
-          <p:cNvSpPr txBox="1"/>
+          <p:cNvSpPr txBox="1">
+            <a:spLocks noGrp="1"/>
+          </p:cNvSpPr>
           <p:nvPr>
             <p:ph type="ctrTitle"/>
           </p:nvPr>
@@ -742,7 +759,7 @@
           </a:prstGeom>
         </p:spPr>
         <p:txBody>
-          <a:bodyPr anchorCtr="0" anchor="b" bIns="91425" lIns="91425" spcFirstLastPara="1" rIns="91425" wrap="square" tIns="91425">
+          <a:bodyPr spcFirstLastPara="1" wrap="square" lIns="91425" tIns="91425" rIns="91425" bIns="91425" anchor="b" anchorCtr="0">
             <a:normAutofit/>
           </a:bodyPr>
           <a:lstStyle>
@@ -846,15 +863,19 @@
               <a:defRPr sz="5200"/>
             </a:lvl9pPr>
           </a:lstStyle>
-          <a:p/>
+          <a:p>
+            <a:endParaRPr/>
+          </a:p>
         </p:txBody>
       </p:sp>
       <p:sp>
         <p:nvSpPr>
           <p:cNvPr id="16" name="Google Shape;16;p2"/>
-          <p:cNvSpPr txBox="1"/>
+          <p:cNvSpPr txBox="1">
+            <a:spLocks noGrp="1"/>
+          </p:cNvSpPr>
           <p:nvPr>
-            <p:ph idx="1" type="subTitle"/>
+            <p:ph type="subTitle" idx="1"/>
           </p:nvPr>
         </p:nvSpPr>
         <p:spPr>
@@ -867,7 +888,7 @@
           </a:prstGeom>
         </p:spPr>
         <p:txBody>
-          <a:bodyPr anchorCtr="0" anchor="t" bIns="91425" lIns="91425" spcFirstLastPara="1" rIns="91425" wrap="square" tIns="91425">
+          <a:bodyPr spcFirstLastPara="1" wrap="square" lIns="91425" tIns="91425" rIns="91425" bIns="91425" anchor="t" anchorCtr="0">
             <a:normAutofit/>
           </a:bodyPr>
           <a:lstStyle>
@@ -998,15 +1019,19 @@
               <a:defRPr sz="2800"/>
             </a:lvl9pPr>
           </a:lstStyle>
-          <a:p/>
+          <a:p>
+            <a:endParaRPr/>
+          </a:p>
         </p:txBody>
       </p:sp>
       <p:sp>
         <p:nvSpPr>
           <p:cNvPr id="17" name="Google Shape;17;p2"/>
-          <p:cNvSpPr txBox="1"/>
+          <p:cNvSpPr txBox="1">
+            <a:spLocks noGrp="1"/>
+          </p:cNvSpPr>
           <p:nvPr>
-            <p:ph idx="12" type="sldNum"/>
+            <p:ph type="sldNum" idx="12"/>
           </p:nvPr>
         </p:nvSpPr>
         <p:spPr>
@@ -1019,7 +1044,7 @@
           </a:prstGeom>
         </p:spPr>
         <p:txBody>
-          <a:bodyPr anchorCtr="0" anchor="ctr" bIns="91425" lIns="91425" spcFirstLastPara="1" rIns="91425" wrap="square" tIns="91425">
+          <a:bodyPr spcFirstLastPara="1" wrap="square" lIns="91425" tIns="91425" rIns="91425" bIns="91425" anchor="ctr" anchorCtr="0">
             <a:normAutofit/>
           </a:bodyPr>
           <a:lstStyle>
@@ -1061,7 +1086,7 @@
             </a:lvl9pPr>
           </a:lstStyle>
           <a:p>
-            <a:pPr indent="0" lvl="0" marL="0" rtl="0" algn="r">
+            <a:pPr marL="0" lvl="0" indent="0" algn="r" rtl="0">
               <a:spcBef>
                 <a:spcPts val="0"/>
               </a:spcBef>
@@ -1087,11 +1112,11 @@
 </file>
 
 <file path=ppt/slideLayouts/slideLayout10.xml><?xml version="1.0" encoding="utf-8"?>
-<p:sldLayout xmlns:a="http://schemas.openxmlformats.org/drawingml/2006/main" xmlns:r="http://schemas.openxmlformats.org/officeDocument/2006/relationships" xmlns:mc="http://schemas.openxmlformats.org/markup-compatibility/2006" xmlns:mv="urn:schemas-microsoft-com:mac:vml" xmlns:p="http://schemas.openxmlformats.org/presentationml/2006/main" xmlns:c="http://schemas.openxmlformats.org/drawingml/2006/chart" xmlns:dgm="http://schemas.openxmlformats.org/drawingml/2006/diagram" xmlns:o="urn:schemas-microsoft-com:office:office" xmlns:v="urn:schemas-microsoft-com:vml" xmlns:pvml="urn:schemas-microsoft-com:office:powerpoint" xmlns:com="http://schemas.openxmlformats.org/drawingml/2006/compatibility" xmlns:p14="http://schemas.microsoft.com/office/powerpoint/2010/main" xmlns:p15="http://schemas.microsoft.com/office/powerpoint/2012/main" xmlns:ahyp="http://schemas.microsoft.com/office/drawing/2018/hyperlinkcolor" matchingName="Big number">
+<p:sldLayout xmlns:a="http://schemas.openxmlformats.org/drawingml/2006/main" xmlns:r="http://schemas.openxmlformats.org/officeDocument/2006/relationships" xmlns:p="http://schemas.openxmlformats.org/presentationml/2006/main" matchingName="Big number">
   <p:cSld name="BIG_NUMBER">
     <p:spTree>
       <p:nvGrpSpPr>
-        <p:cNvPr id="49" name="Shape 49"/>
+        <p:cNvPr id="1" name="Shape 49"/>
         <p:cNvGrpSpPr/>
         <p:nvPr/>
       </p:nvGrpSpPr>
@@ -1106,9 +1131,11 @@
       <p:sp>
         <p:nvSpPr>
           <p:cNvPr id="50" name="Google Shape;50;p11"/>
-          <p:cNvSpPr txBox="1"/>
+          <p:cNvSpPr txBox="1">
+            <a:spLocks noGrp="1"/>
+          </p:cNvSpPr>
           <p:nvPr>
-            <p:ph hasCustomPrompt="1" type="title"/>
+            <p:ph type="title" hasCustomPrompt="1"/>
           </p:nvPr>
         </p:nvSpPr>
         <p:spPr>
@@ -1121,7 +1148,7 @@
           </a:prstGeom>
         </p:spPr>
         <p:txBody>
-          <a:bodyPr anchorCtr="0" anchor="b" bIns="91425" lIns="91425" spcFirstLastPara="1" rIns="91425" wrap="square" tIns="91425">
+          <a:bodyPr spcFirstLastPara="1" wrap="square" lIns="91425" tIns="91425" rIns="91425" bIns="91425" anchor="b" anchorCtr="0">
             <a:normAutofit/>
           </a:bodyPr>
           <a:lstStyle>
@@ -1235,9 +1262,11 @@
       <p:sp>
         <p:nvSpPr>
           <p:cNvPr id="51" name="Google Shape;51;p11"/>
-          <p:cNvSpPr txBox="1"/>
+          <p:cNvSpPr txBox="1">
+            <a:spLocks noGrp="1"/>
+          </p:cNvSpPr>
           <p:nvPr>
-            <p:ph idx="1" type="body"/>
+            <p:ph type="body" idx="1"/>
           </p:nvPr>
         </p:nvSpPr>
         <p:spPr>
@@ -1250,11 +1279,11 @@
           </a:prstGeom>
         </p:spPr>
         <p:txBody>
-          <a:bodyPr anchorCtr="0" anchor="t" bIns="91425" lIns="91425" spcFirstLastPara="1" rIns="91425" wrap="square" tIns="91425">
+          <a:bodyPr spcFirstLastPara="1" wrap="square" lIns="91425" tIns="91425" rIns="91425" bIns="91425" anchor="t" anchorCtr="0">
             <a:normAutofit/>
           </a:bodyPr>
           <a:lstStyle>
-            <a:lvl1pPr indent="-342900" lvl="0" marL="457200" algn="ctr">
+            <a:lvl1pPr marL="457200" lvl="0" indent="-342900" algn="ctr">
               <a:spcBef>
                 <a:spcPts val="0"/>
               </a:spcBef>
@@ -1265,7 +1294,7 @@
               <a:buChar char="●"/>
               <a:defRPr/>
             </a:lvl1pPr>
-            <a:lvl2pPr indent="-317500" lvl="1" marL="914400" algn="ctr">
+            <a:lvl2pPr marL="914400" lvl="1" indent="-317500" algn="ctr">
               <a:spcBef>
                 <a:spcPts val="0"/>
               </a:spcBef>
@@ -1276,7 +1305,7 @@
               <a:buChar char="○"/>
               <a:defRPr/>
             </a:lvl2pPr>
-            <a:lvl3pPr indent="-317500" lvl="2" marL="1371600" algn="ctr">
+            <a:lvl3pPr marL="1371600" lvl="2" indent="-317500" algn="ctr">
               <a:spcBef>
                 <a:spcPts val="0"/>
               </a:spcBef>
@@ -1287,7 +1316,7 @@
               <a:buChar char="■"/>
               <a:defRPr/>
             </a:lvl3pPr>
-            <a:lvl4pPr indent="-317500" lvl="3" marL="1828800" algn="ctr">
+            <a:lvl4pPr marL="1828800" lvl="3" indent="-317500" algn="ctr">
               <a:spcBef>
                 <a:spcPts val="0"/>
               </a:spcBef>
@@ -1298,7 +1327,7 @@
               <a:buChar char="●"/>
               <a:defRPr/>
             </a:lvl4pPr>
-            <a:lvl5pPr indent="-317500" lvl="4" marL="2286000" algn="ctr">
+            <a:lvl5pPr marL="2286000" lvl="4" indent="-317500" algn="ctr">
               <a:spcBef>
                 <a:spcPts val="0"/>
               </a:spcBef>
@@ -1309,7 +1338,7 @@
               <a:buChar char="○"/>
               <a:defRPr/>
             </a:lvl5pPr>
-            <a:lvl6pPr indent="-317500" lvl="5" marL="2743200" algn="ctr">
+            <a:lvl6pPr marL="2743200" lvl="5" indent="-317500" algn="ctr">
               <a:spcBef>
                 <a:spcPts val="0"/>
               </a:spcBef>
@@ -1320,7 +1349,7 @@
               <a:buChar char="■"/>
               <a:defRPr/>
             </a:lvl6pPr>
-            <a:lvl7pPr indent="-317500" lvl="6" marL="3200400" algn="ctr">
+            <a:lvl7pPr marL="3200400" lvl="6" indent="-317500" algn="ctr">
               <a:spcBef>
                 <a:spcPts val="0"/>
               </a:spcBef>
@@ -1331,7 +1360,7 @@
               <a:buChar char="●"/>
               <a:defRPr/>
             </a:lvl7pPr>
-            <a:lvl8pPr indent="-317500" lvl="7" marL="3657600" algn="ctr">
+            <a:lvl8pPr marL="3657600" lvl="7" indent="-317500" algn="ctr">
               <a:spcBef>
                 <a:spcPts val="0"/>
               </a:spcBef>
@@ -1342,7 +1371,7 @@
               <a:buChar char="○"/>
               <a:defRPr/>
             </a:lvl8pPr>
-            <a:lvl9pPr indent="-317500" lvl="8" marL="4114800" algn="ctr">
+            <a:lvl9pPr marL="4114800" lvl="8" indent="-317500" algn="ctr">
               <a:spcBef>
                 <a:spcPts val="0"/>
               </a:spcBef>
@@ -1354,15 +1383,19 @@
               <a:defRPr/>
             </a:lvl9pPr>
           </a:lstStyle>
-          <a:p/>
+          <a:p>
+            <a:endParaRPr/>
+          </a:p>
         </p:txBody>
       </p:sp>
       <p:sp>
         <p:nvSpPr>
           <p:cNvPr id="52" name="Google Shape;52;p11"/>
-          <p:cNvSpPr txBox="1"/>
+          <p:cNvSpPr txBox="1">
+            <a:spLocks noGrp="1"/>
+          </p:cNvSpPr>
           <p:nvPr>
-            <p:ph idx="12" type="sldNum"/>
+            <p:ph type="sldNum" idx="12"/>
           </p:nvPr>
         </p:nvSpPr>
         <p:spPr>
@@ -1375,7 +1408,7 @@
           </a:prstGeom>
         </p:spPr>
         <p:txBody>
-          <a:bodyPr anchorCtr="0" anchor="ctr" bIns="91425" lIns="91425" spcFirstLastPara="1" rIns="91425" wrap="square" tIns="91425">
+          <a:bodyPr spcFirstLastPara="1" wrap="square" lIns="91425" tIns="91425" rIns="91425" bIns="91425" anchor="ctr" anchorCtr="0">
             <a:normAutofit/>
           </a:bodyPr>
           <a:lstStyle>
@@ -1417,7 +1450,7 @@
             </a:lvl9pPr>
           </a:lstStyle>
           <a:p>
-            <a:pPr indent="0" lvl="0" marL="0" rtl="0" algn="r">
+            <a:pPr marL="0" lvl="0" indent="0" algn="r" rtl="0">
               <a:spcBef>
                 <a:spcPts val="0"/>
               </a:spcBef>
@@ -1443,11 +1476,11 @@
 </file>
 
 <file path=ppt/slideLayouts/slideLayout11.xml><?xml version="1.0" encoding="utf-8"?>
-<p:sldLayout xmlns:a="http://schemas.openxmlformats.org/drawingml/2006/main" xmlns:r="http://schemas.openxmlformats.org/officeDocument/2006/relationships" xmlns:mc="http://schemas.openxmlformats.org/markup-compatibility/2006" xmlns:mv="urn:schemas-microsoft-com:mac:vml" xmlns:p="http://schemas.openxmlformats.org/presentationml/2006/main" xmlns:c="http://schemas.openxmlformats.org/drawingml/2006/chart" xmlns:dgm="http://schemas.openxmlformats.org/drawingml/2006/diagram" xmlns:o="urn:schemas-microsoft-com:office:office" xmlns:v="urn:schemas-microsoft-com:vml" xmlns:pvml="urn:schemas-microsoft-com:office:powerpoint" xmlns:com="http://schemas.openxmlformats.org/drawingml/2006/compatibility" xmlns:p14="http://schemas.microsoft.com/office/powerpoint/2010/main" xmlns:p15="http://schemas.microsoft.com/office/powerpoint/2012/main" xmlns:ahyp="http://schemas.microsoft.com/office/drawing/2018/hyperlinkcolor" matchingName="Blank" type="blank">
+<p:sldLayout xmlns:a="http://schemas.openxmlformats.org/drawingml/2006/main" xmlns:r="http://schemas.openxmlformats.org/officeDocument/2006/relationships" xmlns:p="http://schemas.openxmlformats.org/presentationml/2006/main" matchingName="Blank" type="blank">
   <p:cSld name="BLANK">
     <p:spTree>
       <p:nvGrpSpPr>
-        <p:cNvPr id="53" name="Shape 53"/>
+        <p:cNvPr id="1" name="Shape 53"/>
         <p:cNvGrpSpPr/>
         <p:nvPr/>
       </p:nvGrpSpPr>
@@ -1462,9 +1495,11 @@
       <p:sp>
         <p:nvSpPr>
           <p:cNvPr id="54" name="Google Shape;54;p12"/>
-          <p:cNvSpPr txBox="1"/>
+          <p:cNvSpPr txBox="1">
+            <a:spLocks noGrp="1"/>
+          </p:cNvSpPr>
           <p:nvPr>
-            <p:ph idx="12" type="sldNum"/>
+            <p:ph type="sldNum" idx="12"/>
           </p:nvPr>
         </p:nvSpPr>
         <p:spPr>
@@ -1477,7 +1512,7 @@
           </a:prstGeom>
         </p:spPr>
         <p:txBody>
-          <a:bodyPr anchorCtr="0" anchor="ctr" bIns="91425" lIns="91425" spcFirstLastPara="1" rIns="91425" wrap="square" tIns="91425">
+          <a:bodyPr spcFirstLastPara="1" wrap="square" lIns="91425" tIns="91425" rIns="91425" bIns="91425" anchor="ctr" anchorCtr="0">
             <a:normAutofit/>
           </a:bodyPr>
           <a:lstStyle>
@@ -1519,7 +1554,7 @@
             </a:lvl9pPr>
           </a:lstStyle>
           <a:p>
-            <a:pPr indent="0" lvl="0" marL="0" rtl="0" algn="r">
+            <a:pPr marL="0" lvl="0" indent="0" algn="r" rtl="0">
               <a:spcBef>
                 <a:spcPts val="0"/>
               </a:spcBef>
@@ -1545,11 +1580,11 @@
 </file>
 
 <file path=ppt/slideLayouts/slideLayout2.xml><?xml version="1.0" encoding="utf-8"?>
-<p:sldLayout xmlns:a="http://schemas.openxmlformats.org/drawingml/2006/main" xmlns:r="http://schemas.openxmlformats.org/officeDocument/2006/relationships" xmlns:mc="http://schemas.openxmlformats.org/markup-compatibility/2006" xmlns:mv="urn:schemas-microsoft-com:mac:vml" xmlns:p="http://schemas.openxmlformats.org/presentationml/2006/main" xmlns:c="http://schemas.openxmlformats.org/drawingml/2006/chart" xmlns:dgm="http://schemas.openxmlformats.org/drawingml/2006/diagram" xmlns:o="urn:schemas-microsoft-com:office:office" xmlns:v="urn:schemas-microsoft-com:vml" xmlns:pvml="urn:schemas-microsoft-com:office:powerpoint" xmlns:com="http://schemas.openxmlformats.org/drawingml/2006/compatibility" xmlns:p14="http://schemas.microsoft.com/office/powerpoint/2010/main" xmlns:p15="http://schemas.microsoft.com/office/powerpoint/2012/main" xmlns:ahyp="http://schemas.microsoft.com/office/drawing/2018/hyperlinkcolor" matchingName="Section header" type="secHead">
+<p:sldLayout xmlns:a="http://schemas.openxmlformats.org/drawingml/2006/main" xmlns:r="http://schemas.openxmlformats.org/officeDocument/2006/relationships" xmlns:p="http://schemas.openxmlformats.org/presentationml/2006/main" matchingName="Section header" type="secHead">
   <p:cSld name="SECTION_HEADER">
     <p:spTree>
       <p:nvGrpSpPr>
-        <p:cNvPr id="18" name="Shape 18"/>
+        <p:cNvPr id="1" name="Shape 18"/>
         <p:cNvGrpSpPr/>
         <p:nvPr/>
       </p:nvGrpSpPr>
@@ -1564,7 +1599,9 @@
       <p:sp>
         <p:nvSpPr>
           <p:cNvPr id="19" name="Google Shape;19;p3"/>
-          <p:cNvSpPr txBox="1"/>
+          <p:cNvSpPr txBox="1">
+            <a:spLocks noGrp="1"/>
+          </p:cNvSpPr>
           <p:nvPr>
             <p:ph type="title"/>
           </p:nvPr>
@@ -1579,7 +1616,7 @@
           </a:prstGeom>
         </p:spPr>
         <p:txBody>
-          <a:bodyPr anchorCtr="0" anchor="ctr" bIns="91425" lIns="91425" spcFirstLastPara="1" rIns="91425" wrap="square" tIns="91425">
+          <a:bodyPr spcFirstLastPara="1" wrap="square" lIns="91425" tIns="91425" rIns="91425" bIns="91425" anchor="ctr" anchorCtr="0">
             <a:normAutofit/>
           </a:bodyPr>
           <a:lstStyle>
@@ -1683,15 +1720,19 @@
               <a:defRPr sz="3600"/>
             </a:lvl9pPr>
           </a:lstStyle>
-          <a:p/>
+          <a:p>
+            <a:endParaRPr/>
+          </a:p>
         </p:txBody>
       </p:sp>
       <p:sp>
         <p:nvSpPr>
           <p:cNvPr id="20" name="Google Shape;20;p3"/>
-          <p:cNvSpPr txBox="1"/>
+          <p:cNvSpPr txBox="1">
+            <a:spLocks noGrp="1"/>
+          </p:cNvSpPr>
           <p:nvPr>
-            <p:ph idx="12" type="sldNum"/>
+            <p:ph type="sldNum" idx="12"/>
           </p:nvPr>
         </p:nvSpPr>
         <p:spPr>
@@ -1704,7 +1745,7 @@
           </a:prstGeom>
         </p:spPr>
         <p:txBody>
-          <a:bodyPr anchorCtr="0" anchor="ctr" bIns="91425" lIns="91425" spcFirstLastPara="1" rIns="91425" wrap="square" tIns="91425">
+          <a:bodyPr spcFirstLastPara="1" wrap="square" lIns="91425" tIns="91425" rIns="91425" bIns="91425" anchor="ctr" anchorCtr="0">
             <a:normAutofit/>
           </a:bodyPr>
           <a:lstStyle>
@@ -1746,7 +1787,7 @@
             </a:lvl9pPr>
           </a:lstStyle>
           <a:p>
-            <a:pPr indent="0" lvl="0" marL="0" rtl="0" algn="r">
+            <a:pPr marL="0" lvl="0" indent="0" algn="r" rtl="0">
               <a:spcBef>
                 <a:spcPts val="0"/>
               </a:spcBef>
@@ -1772,11 +1813,11 @@
 </file>
 
 <file path=ppt/slideLayouts/slideLayout3.xml><?xml version="1.0" encoding="utf-8"?>
-<p:sldLayout xmlns:a="http://schemas.openxmlformats.org/drawingml/2006/main" xmlns:r="http://schemas.openxmlformats.org/officeDocument/2006/relationships" xmlns:mc="http://schemas.openxmlformats.org/markup-compatibility/2006" xmlns:mv="urn:schemas-microsoft-com:mac:vml" xmlns:p="http://schemas.openxmlformats.org/presentationml/2006/main" xmlns:c="http://schemas.openxmlformats.org/drawingml/2006/chart" xmlns:dgm="http://schemas.openxmlformats.org/drawingml/2006/diagram" xmlns:o="urn:schemas-microsoft-com:office:office" xmlns:v="urn:schemas-microsoft-com:vml" xmlns:pvml="urn:schemas-microsoft-com:office:powerpoint" xmlns:com="http://schemas.openxmlformats.org/drawingml/2006/compatibility" xmlns:p14="http://schemas.microsoft.com/office/powerpoint/2010/main" xmlns:p15="http://schemas.microsoft.com/office/powerpoint/2012/main" xmlns:ahyp="http://schemas.microsoft.com/office/drawing/2018/hyperlinkcolor" matchingName="Title and body" type="tx">
+<p:sldLayout xmlns:a="http://schemas.openxmlformats.org/drawingml/2006/main" xmlns:r="http://schemas.openxmlformats.org/officeDocument/2006/relationships" xmlns:p="http://schemas.openxmlformats.org/presentationml/2006/main" matchingName="Title and body" type="tx">
   <p:cSld name="TITLE_AND_BODY">
     <p:spTree>
       <p:nvGrpSpPr>
-        <p:cNvPr id="21" name="Shape 21"/>
+        <p:cNvPr id="1" name="Shape 21"/>
         <p:cNvGrpSpPr/>
         <p:nvPr/>
       </p:nvGrpSpPr>
@@ -1791,7 +1832,9 @@
       <p:sp>
         <p:nvSpPr>
           <p:cNvPr id="22" name="Google Shape;22;p4"/>
-          <p:cNvSpPr txBox="1"/>
+          <p:cNvSpPr txBox="1">
+            <a:spLocks noGrp="1"/>
+          </p:cNvSpPr>
           <p:nvPr>
             <p:ph type="title"/>
           </p:nvPr>
@@ -1806,7 +1849,7 @@
           </a:prstGeom>
         </p:spPr>
         <p:txBody>
-          <a:bodyPr anchorCtr="0" anchor="t" bIns="91425" lIns="91425" spcFirstLastPara="1" rIns="91425" wrap="square" tIns="91425">
+          <a:bodyPr spcFirstLastPara="1" wrap="square" lIns="91425" tIns="91425" rIns="91425" bIns="91425" anchor="t" anchorCtr="0">
             <a:normAutofit/>
           </a:bodyPr>
           <a:lstStyle>
@@ -1910,15 +1953,19 @@
               <a:defRPr/>
             </a:lvl9pPr>
           </a:lstStyle>
-          <a:p/>
+          <a:p>
+            <a:endParaRPr/>
+          </a:p>
         </p:txBody>
       </p:sp>
       <p:sp>
         <p:nvSpPr>
           <p:cNvPr id="23" name="Google Shape;23;p4"/>
-          <p:cNvSpPr txBox="1"/>
+          <p:cNvSpPr txBox="1">
+            <a:spLocks noGrp="1"/>
+          </p:cNvSpPr>
           <p:nvPr>
-            <p:ph idx="1" type="body"/>
+            <p:ph type="body" idx="1"/>
           </p:nvPr>
         </p:nvSpPr>
         <p:spPr>
@@ -1931,11 +1978,11 @@
           </a:prstGeom>
         </p:spPr>
         <p:txBody>
-          <a:bodyPr anchorCtr="0" anchor="t" bIns="91425" lIns="91425" spcFirstLastPara="1" rIns="91425" wrap="square" tIns="91425">
+          <a:bodyPr spcFirstLastPara="1" wrap="square" lIns="91425" tIns="91425" rIns="91425" bIns="91425" anchor="t" anchorCtr="0">
             <a:normAutofit/>
           </a:bodyPr>
           <a:lstStyle>
-            <a:lvl1pPr indent="-342900" lvl="0" marL="457200">
+            <a:lvl1pPr marL="457200" lvl="0" indent="-342900">
               <a:spcBef>
                 <a:spcPts val="0"/>
               </a:spcBef>
@@ -1946,7 +1993,7 @@
               <a:buChar char="●"/>
               <a:defRPr/>
             </a:lvl1pPr>
-            <a:lvl2pPr indent="-317500" lvl="1" marL="914400">
+            <a:lvl2pPr marL="914400" lvl="1" indent="-317500">
               <a:spcBef>
                 <a:spcPts val="0"/>
               </a:spcBef>
@@ -1957,7 +2004,7 @@
               <a:buChar char="○"/>
               <a:defRPr/>
             </a:lvl2pPr>
-            <a:lvl3pPr indent="-317500" lvl="2" marL="1371600">
+            <a:lvl3pPr marL="1371600" lvl="2" indent="-317500">
               <a:spcBef>
                 <a:spcPts val="0"/>
               </a:spcBef>
@@ -1968,7 +2015,7 @@
               <a:buChar char="■"/>
               <a:defRPr/>
             </a:lvl3pPr>
-            <a:lvl4pPr indent="-317500" lvl="3" marL="1828800">
+            <a:lvl4pPr marL="1828800" lvl="3" indent="-317500">
               <a:spcBef>
                 <a:spcPts val="0"/>
               </a:spcBef>
@@ -1979,7 +2026,7 @@
               <a:buChar char="●"/>
               <a:defRPr/>
             </a:lvl4pPr>
-            <a:lvl5pPr indent="-317500" lvl="4" marL="2286000">
+            <a:lvl5pPr marL="2286000" lvl="4" indent="-317500">
               <a:spcBef>
                 <a:spcPts val="0"/>
               </a:spcBef>
@@ -1990,7 +2037,7 @@
               <a:buChar char="○"/>
               <a:defRPr/>
             </a:lvl5pPr>
-            <a:lvl6pPr indent="-317500" lvl="5" marL="2743200">
+            <a:lvl6pPr marL="2743200" lvl="5" indent="-317500">
               <a:spcBef>
                 <a:spcPts val="0"/>
               </a:spcBef>
@@ -2001,7 +2048,7 @@
               <a:buChar char="■"/>
               <a:defRPr/>
             </a:lvl6pPr>
-            <a:lvl7pPr indent="-317500" lvl="6" marL="3200400">
+            <a:lvl7pPr marL="3200400" lvl="6" indent="-317500">
               <a:spcBef>
                 <a:spcPts val="0"/>
               </a:spcBef>
@@ -2012,7 +2059,7 @@
               <a:buChar char="●"/>
               <a:defRPr/>
             </a:lvl7pPr>
-            <a:lvl8pPr indent="-317500" lvl="7" marL="3657600">
+            <a:lvl8pPr marL="3657600" lvl="7" indent="-317500">
               <a:spcBef>
                 <a:spcPts val="0"/>
               </a:spcBef>
@@ -2023,7 +2070,7 @@
               <a:buChar char="○"/>
               <a:defRPr/>
             </a:lvl8pPr>
-            <a:lvl9pPr indent="-317500" lvl="8" marL="4114800">
+            <a:lvl9pPr marL="4114800" lvl="8" indent="-317500">
               <a:spcBef>
                 <a:spcPts val="0"/>
               </a:spcBef>
@@ -2035,15 +2082,19 @@
               <a:defRPr/>
             </a:lvl9pPr>
           </a:lstStyle>
-          <a:p/>
+          <a:p>
+            <a:endParaRPr/>
+          </a:p>
         </p:txBody>
       </p:sp>
       <p:sp>
         <p:nvSpPr>
           <p:cNvPr id="24" name="Google Shape;24;p4"/>
-          <p:cNvSpPr txBox="1"/>
+          <p:cNvSpPr txBox="1">
+            <a:spLocks noGrp="1"/>
+          </p:cNvSpPr>
           <p:nvPr>
-            <p:ph idx="12" type="sldNum"/>
+            <p:ph type="sldNum" idx="12"/>
           </p:nvPr>
         </p:nvSpPr>
         <p:spPr>
@@ -2056,7 +2107,7 @@
           </a:prstGeom>
         </p:spPr>
         <p:txBody>
-          <a:bodyPr anchorCtr="0" anchor="ctr" bIns="91425" lIns="91425" spcFirstLastPara="1" rIns="91425" wrap="square" tIns="91425">
+          <a:bodyPr spcFirstLastPara="1" wrap="square" lIns="91425" tIns="91425" rIns="91425" bIns="91425" anchor="ctr" anchorCtr="0">
             <a:normAutofit/>
           </a:bodyPr>
           <a:lstStyle>
@@ -2098,7 +2149,7 @@
             </a:lvl9pPr>
           </a:lstStyle>
           <a:p>
-            <a:pPr indent="0" lvl="0" marL="0" rtl="0" algn="r">
+            <a:pPr marL="0" lvl="0" indent="0" algn="r" rtl="0">
               <a:spcBef>
                 <a:spcPts val="0"/>
               </a:spcBef>
@@ -2124,11 +2175,11 @@
 </file>
 
 <file path=ppt/slideLayouts/slideLayout4.xml><?xml version="1.0" encoding="utf-8"?>
-<p:sldLayout xmlns:a="http://schemas.openxmlformats.org/drawingml/2006/main" xmlns:r="http://schemas.openxmlformats.org/officeDocument/2006/relationships" xmlns:mc="http://schemas.openxmlformats.org/markup-compatibility/2006" xmlns:mv="urn:schemas-microsoft-com:mac:vml" xmlns:p="http://schemas.openxmlformats.org/presentationml/2006/main" xmlns:c="http://schemas.openxmlformats.org/drawingml/2006/chart" xmlns:dgm="http://schemas.openxmlformats.org/drawingml/2006/diagram" xmlns:o="urn:schemas-microsoft-com:office:office" xmlns:v="urn:schemas-microsoft-com:vml" xmlns:pvml="urn:schemas-microsoft-com:office:powerpoint" xmlns:com="http://schemas.openxmlformats.org/drawingml/2006/compatibility" xmlns:p14="http://schemas.microsoft.com/office/powerpoint/2010/main" xmlns:p15="http://schemas.microsoft.com/office/powerpoint/2012/main" xmlns:ahyp="http://schemas.microsoft.com/office/drawing/2018/hyperlinkcolor" matchingName="Title and two columns" type="twoColTx">
+<p:sldLayout xmlns:a="http://schemas.openxmlformats.org/drawingml/2006/main" xmlns:r="http://schemas.openxmlformats.org/officeDocument/2006/relationships" xmlns:p="http://schemas.openxmlformats.org/presentationml/2006/main" matchingName="Title and two columns" type="twoColTx">
   <p:cSld name="TITLE_AND_TWO_COLUMNS">
     <p:spTree>
       <p:nvGrpSpPr>
-        <p:cNvPr id="25" name="Shape 25"/>
+        <p:cNvPr id="1" name="Shape 25"/>
         <p:cNvGrpSpPr/>
         <p:nvPr/>
       </p:nvGrpSpPr>
@@ -2143,7 +2194,9 @@
       <p:sp>
         <p:nvSpPr>
           <p:cNvPr id="26" name="Google Shape;26;p5"/>
-          <p:cNvSpPr txBox="1"/>
+          <p:cNvSpPr txBox="1">
+            <a:spLocks noGrp="1"/>
+          </p:cNvSpPr>
           <p:nvPr>
             <p:ph type="title"/>
           </p:nvPr>
@@ -2158,7 +2211,7 @@
           </a:prstGeom>
         </p:spPr>
         <p:txBody>
-          <a:bodyPr anchorCtr="0" anchor="t" bIns="91425" lIns="91425" spcFirstLastPara="1" rIns="91425" wrap="square" tIns="91425">
+          <a:bodyPr spcFirstLastPara="1" wrap="square" lIns="91425" tIns="91425" rIns="91425" bIns="91425" anchor="t" anchorCtr="0">
             <a:normAutofit/>
           </a:bodyPr>
           <a:lstStyle>
@@ -2262,15 +2315,19 @@
               <a:defRPr/>
             </a:lvl9pPr>
           </a:lstStyle>
-          <a:p/>
+          <a:p>
+            <a:endParaRPr/>
+          </a:p>
         </p:txBody>
       </p:sp>
       <p:sp>
         <p:nvSpPr>
           <p:cNvPr id="27" name="Google Shape;27;p5"/>
-          <p:cNvSpPr txBox="1"/>
+          <p:cNvSpPr txBox="1">
+            <a:spLocks noGrp="1"/>
+          </p:cNvSpPr>
           <p:nvPr>
-            <p:ph idx="1" type="body"/>
+            <p:ph type="body" idx="1"/>
           </p:nvPr>
         </p:nvSpPr>
         <p:spPr>
@@ -2283,11 +2340,11 @@
           </a:prstGeom>
         </p:spPr>
         <p:txBody>
-          <a:bodyPr anchorCtr="0" anchor="t" bIns="91425" lIns="91425" spcFirstLastPara="1" rIns="91425" wrap="square" tIns="91425">
+          <a:bodyPr spcFirstLastPara="1" wrap="square" lIns="91425" tIns="91425" rIns="91425" bIns="91425" anchor="t" anchorCtr="0">
             <a:normAutofit/>
           </a:bodyPr>
           <a:lstStyle>
-            <a:lvl1pPr indent="-317500" lvl="0" marL="457200">
+            <a:lvl1pPr marL="457200" lvl="0" indent="-317500">
               <a:spcBef>
                 <a:spcPts val="0"/>
               </a:spcBef>
@@ -2298,7 +2355,7 @@
               <a:buChar char="●"/>
               <a:defRPr sz="1400"/>
             </a:lvl1pPr>
-            <a:lvl2pPr indent="-304800" lvl="1" marL="914400">
+            <a:lvl2pPr marL="914400" lvl="1" indent="-304800">
               <a:spcBef>
                 <a:spcPts val="0"/>
               </a:spcBef>
@@ -2309,7 +2366,7 @@
               <a:buChar char="○"/>
               <a:defRPr sz="1200"/>
             </a:lvl2pPr>
-            <a:lvl3pPr indent="-304800" lvl="2" marL="1371600">
+            <a:lvl3pPr marL="1371600" lvl="2" indent="-304800">
               <a:spcBef>
                 <a:spcPts val="0"/>
               </a:spcBef>
@@ -2320,7 +2377,7 @@
               <a:buChar char="■"/>
               <a:defRPr sz="1200"/>
             </a:lvl3pPr>
-            <a:lvl4pPr indent="-304800" lvl="3" marL="1828800">
+            <a:lvl4pPr marL="1828800" lvl="3" indent="-304800">
               <a:spcBef>
                 <a:spcPts val="0"/>
               </a:spcBef>
@@ -2331,7 +2388,7 @@
               <a:buChar char="●"/>
               <a:defRPr sz="1200"/>
             </a:lvl4pPr>
-            <a:lvl5pPr indent="-304800" lvl="4" marL="2286000">
+            <a:lvl5pPr marL="2286000" lvl="4" indent="-304800">
               <a:spcBef>
                 <a:spcPts val="0"/>
               </a:spcBef>
@@ -2342,7 +2399,7 @@
               <a:buChar char="○"/>
               <a:defRPr sz="1200"/>
             </a:lvl5pPr>
-            <a:lvl6pPr indent="-304800" lvl="5" marL="2743200">
+            <a:lvl6pPr marL="2743200" lvl="5" indent="-304800">
               <a:spcBef>
                 <a:spcPts val="0"/>
               </a:spcBef>
@@ -2353,7 +2410,7 @@
               <a:buChar char="■"/>
               <a:defRPr sz="1200"/>
             </a:lvl6pPr>
-            <a:lvl7pPr indent="-304800" lvl="6" marL="3200400">
+            <a:lvl7pPr marL="3200400" lvl="6" indent="-304800">
               <a:spcBef>
                 <a:spcPts val="0"/>
               </a:spcBef>
@@ -2364,7 +2421,7 @@
               <a:buChar char="●"/>
               <a:defRPr sz="1200"/>
             </a:lvl7pPr>
-            <a:lvl8pPr indent="-304800" lvl="7" marL="3657600">
+            <a:lvl8pPr marL="3657600" lvl="7" indent="-304800">
               <a:spcBef>
                 <a:spcPts val="0"/>
               </a:spcBef>
@@ -2375,7 +2432,7 @@
               <a:buChar char="○"/>
               <a:defRPr sz="1200"/>
             </a:lvl8pPr>
-            <a:lvl9pPr indent="-304800" lvl="8" marL="4114800">
+            <a:lvl9pPr marL="4114800" lvl="8" indent="-304800">
               <a:spcBef>
                 <a:spcPts val="0"/>
               </a:spcBef>
@@ -2387,15 +2444,19 @@
               <a:defRPr sz="1200"/>
             </a:lvl9pPr>
           </a:lstStyle>
-          <a:p/>
+          <a:p>
+            <a:endParaRPr/>
+          </a:p>
         </p:txBody>
       </p:sp>
       <p:sp>
         <p:nvSpPr>
           <p:cNvPr id="28" name="Google Shape;28;p5"/>
-          <p:cNvSpPr txBox="1"/>
+          <p:cNvSpPr txBox="1">
+            <a:spLocks noGrp="1"/>
+          </p:cNvSpPr>
           <p:nvPr>
-            <p:ph idx="2" type="body"/>
+            <p:ph type="body" idx="2"/>
           </p:nvPr>
         </p:nvSpPr>
         <p:spPr>
@@ -2408,11 +2469,11 @@
           </a:prstGeom>
         </p:spPr>
         <p:txBody>
-          <a:bodyPr anchorCtr="0" anchor="t" bIns="91425" lIns="91425" spcFirstLastPara="1" rIns="91425" wrap="square" tIns="91425">
+          <a:bodyPr spcFirstLastPara="1" wrap="square" lIns="91425" tIns="91425" rIns="91425" bIns="91425" anchor="t" anchorCtr="0">
             <a:normAutofit/>
           </a:bodyPr>
           <a:lstStyle>
-            <a:lvl1pPr indent="-317500" lvl="0" marL="457200">
+            <a:lvl1pPr marL="457200" lvl="0" indent="-317500">
               <a:spcBef>
                 <a:spcPts val="0"/>
               </a:spcBef>
@@ -2423,7 +2484,7 @@
               <a:buChar char="●"/>
               <a:defRPr sz="1400"/>
             </a:lvl1pPr>
-            <a:lvl2pPr indent="-304800" lvl="1" marL="914400">
+            <a:lvl2pPr marL="914400" lvl="1" indent="-304800">
               <a:spcBef>
                 <a:spcPts val="0"/>
               </a:spcBef>
@@ -2434,7 +2495,7 @@
               <a:buChar char="○"/>
               <a:defRPr sz="1200"/>
             </a:lvl2pPr>
-            <a:lvl3pPr indent="-304800" lvl="2" marL="1371600">
+            <a:lvl3pPr marL="1371600" lvl="2" indent="-304800">
               <a:spcBef>
                 <a:spcPts val="0"/>
               </a:spcBef>
@@ -2445,7 +2506,7 @@
               <a:buChar char="■"/>
               <a:defRPr sz="1200"/>
             </a:lvl3pPr>
-            <a:lvl4pPr indent="-304800" lvl="3" marL="1828800">
+            <a:lvl4pPr marL="1828800" lvl="3" indent="-304800">
               <a:spcBef>
                 <a:spcPts val="0"/>
               </a:spcBef>
@@ -2456,7 +2517,7 @@
               <a:buChar char="●"/>
               <a:defRPr sz="1200"/>
             </a:lvl4pPr>
-            <a:lvl5pPr indent="-304800" lvl="4" marL="2286000">
+            <a:lvl5pPr marL="2286000" lvl="4" indent="-304800">
               <a:spcBef>
                 <a:spcPts val="0"/>
               </a:spcBef>
@@ -2467,7 +2528,7 @@
               <a:buChar char="○"/>
               <a:defRPr sz="1200"/>
             </a:lvl5pPr>
-            <a:lvl6pPr indent="-304800" lvl="5" marL="2743200">
+            <a:lvl6pPr marL="2743200" lvl="5" indent="-304800">
               <a:spcBef>
                 <a:spcPts val="0"/>
               </a:spcBef>
@@ -2478,7 +2539,7 @@
               <a:buChar char="■"/>
               <a:defRPr sz="1200"/>
             </a:lvl6pPr>
-            <a:lvl7pPr indent="-304800" lvl="6" marL="3200400">
+            <a:lvl7pPr marL="3200400" lvl="6" indent="-304800">
               <a:spcBef>
                 <a:spcPts val="0"/>
               </a:spcBef>
@@ -2489,7 +2550,7 @@
               <a:buChar char="●"/>
               <a:defRPr sz="1200"/>
             </a:lvl7pPr>
-            <a:lvl8pPr indent="-304800" lvl="7" marL="3657600">
+            <a:lvl8pPr marL="3657600" lvl="7" indent="-304800">
               <a:spcBef>
                 <a:spcPts val="0"/>
               </a:spcBef>
@@ -2500,7 +2561,7 @@
               <a:buChar char="○"/>
               <a:defRPr sz="1200"/>
             </a:lvl8pPr>
-            <a:lvl9pPr indent="-304800" lvl="8" marL="4114800">
+            <a:lvl9pPr marL="4114800" lvl="8" indent="-304800">
               <a:spcBef>
                 <a:spcPts val="0"/>
               </a:spcBef>
@@ -2512,15 +2573,19 @@
               <a:defRPr sz="1200"/>
             </a:lvl9pPr>
           </a:lstStyle>
-          <a:p/>
+          <a:p>
+            <a:endParaRPr/>
+          </a:p>
         </p:txBody>
       </p:sp>
       <p:sp>
         <p:nvSpPr>
           <p:cNvPr id="29" name="Google Shape;29;p5"/>
-          <p:cNvSpPr txBox="1"/>
+          <p:cNvSpPr txBox="1">
+            <a:spLocks noGrp="1"/>
+          </p:cNvSpPr>
           <p:nvPr>
-            <p:ph idx="12" type="sldNum"/>
+            <p:ph type="sldNum" idx="12"/>
           </p:nvPr>
         </p:nvSpPr>
         <p:spPr>
@@ -2533,7 +2598,7 @@
           </a:prstGeom>
         </p:spPr>
         <p:txBody>
-          <a:bodyPr anchorCtr="0" anchor="ctr" bIns="91425" lIns="91425" spcFirstLastPara="1" rIns="91425" wrap="square" tIns="91425">
+          <a:bodyPr spcFirstLastPara="1" wrap="square" lIns="91425" tIns="91425" rIns="91425" bIns="91425" anchor="ctr" anchorCtr="0">
             <a:normAutofit/>
           </a:bodyPr>
           <a:lstStyle>
@@ -2575,7 +2640,7 @@
             </a:lvl9pPr>
           </a:lstStyle>
           <a:p>
-            <a:pPr indent="0" lvl="0" marL="0" rtl="0" algn="r">
+            <a:pPr marL="0" lvl="0" indent="0" algn="r" rtl="0">
               <a:spcBef>
                 <a:spcPts val="0"/>
               </a:spcBef>
@@ -2601,11 +2666,11 @@
 </file>
 
 <file path=ppt/slideLayouts/slideLayout5.xml><?xml version="1.0" encoding="utf-8"?>
-<p:sldLayout xmlns:a="http://schemas.openxmlformats.org/drawingml/2006/main" xmlns:r="http://schemas.openxmlformats.org/officeDocument/2006/relationships" xmlns:mc="http://schemas.openxmlformats.org/markup-compatibility/2006" xmlns:mv="urn:schemas-microsoft-com:mac:vml" xmlns:p="http://schemas.openxmlformats.org/presentationml/2006/main" xmlns:c="http://schemas.openxmlformats.org/drawingml/2006/chart" xmlns:dgm="http://schemas.openxmlformats.org/drawingml/2006/diagram" xmlns:o="urn:schemas-microsoft-com:office:office" xmlns:v="urn:schemas-microsoft-com:vml" xmlns:pvml="urn:schemas-microsoft-com:office:powerpoint" xmlns:com="http://schemas.openxmlformats.org/drawingml/2006/compatibility" xmlns:p14="http://schemas.microsoft.com/office/powerpoint/2010/main" xmlns:p15="http://schemas.microsoft.com/office/powerpoint/2012/main" xmlns:ahyp="http://schemas.microsoft.com/office/drawing/2018/hyperlinkcolor" matchingName="Title only" type="titleOnly">
+<p:sldLayout xmlns:a="http://schemas.openxmlformats.org/drawingml/2006/main" xmlns:r="http://schemas.openxmlformats.org/officeDocument/2006/relationships" xmlns:p="http://schemas.openxmlformats.org/presentationml/2006/main" matchingName="Title only" type="titleOnly">
   <p:cSld name="TITLE_ONLY">
     <p:spTree>
       <p:nvGrpSpPr>
-        <p:cNvPr id="30" name="Shape 30"/>
+        <p:cNvPr id="1" name="Shape 30"/>
         <p:cNvGrpSpPr/>
         <p:nvPr/>
       </p:nvGrpSpPr>
@@ -2620,7 +2685,9 @@
       <p:sp>
         <p:nvSpPr>
           <p:cNvPr id="31" name="Google Shape;31;p6"/>
-          <p:cNvSpPr txBox="1"/>
+          <p:cNvSpPr txBox="1">
+            <a:spLocks noGrp="1"/>
+          </p:cNvSpPr>
           <p:nvPr>
             <p:ph type="title"/>
           </p:nvPr>
@@ -2635,7 +2702,7 @@
           </a:prstGeom>
         </p:spPr>
         <p:txBody>
-          <a:bodyPr anchorCtr="0" anchor="t" bIns="91425" lIns="91425" spcFirstLastPara="1" rIns="91425" wrap="square" tIns="91425">
+          <a:bodyPr spcFirstLastPara="1" wrap="square" lIns="91425" tIns="91425" rIns="91425" bIns="91425" anchor="t" anchorCtr="0">
             <a:normAutofit/>
           </a:bodyPr>
           <a:lstStyle>
@@ -2739,15 +2806,19 @@
               <a:defRPr/>
             </a:lvl9pPr>
           </a:lstStyle>
-          <a:p/>
+          <a:p>
+            <a:endParaRPr/>
+          </a:p>
         </p:txBody>
       </p:sp>
       <p:sp>
         <p:nvSpPr>
           <p:cNvPr id="32" name="Google Shape;32;p6"/>
-          <p:cNvSpPr txBox="1"/>
+          <p:cNvSpPr txBox="1">
+            <a:spLocks noGrp="1"/>
+          </p:cNvSpPr>
           <p:nvPr>
-            <p:ph idx="12" type="sldNum"/>
+            <p:ph type="sldNum" idx="12"/>
           </p:nvPr>
         </p:nvSpPr>
         <p:spPr>
@@ -2760,7 +2831,7 @@
           </a:prstGeom>
         </p:spPr>
         <p:txBody>
-          <a:bodyPr anchorCtr="0" anchor="ctr" bIns="91425" lIns="91425" spcFirstLastPara="1" rIns="91425" wrap="square" tIns="91425">
+          <a:bodyPr spcFirstLastPara="1" wrap="square" lIns="91425" tIns="91425" rIns="91425" bIns="91425" anchor="ctr" anchorCtr="0">
             <a:normAutofit/>
           </a:bodyPr>
           <a:lstStyle>
@@ -2802,7 +2873,7 @@
             </a:lvl9pPr>
           </a:lstStyle>
           <a:p>
-            <a:pPr indent="0" lvl="0" marL="0" rtl="0" algn="r">
+            <a:pPr marL="0" lvl="0" indent="0" algn="r" rtl="0">
               <a:spcBef>
                 <a:spcPts val="0"/>
               </a:spcBef>
@@ -2828,11 +2899,11 @@
 </file>
 
 <file path=ppt/slideLayouts/slideLayout6.xml><?xml version="1.0" encoding="utf-8"?>
-<p:sldLayout xmlns:a="http://schemas.openxmlformats.org/drawingml/2006/main" xmlns:r="http://schemas.openxmlformats.org/officeDocument/2006/relationships" xmlns:mc="http://schemas.openxmlformats.org/markup-compatibility/2006" xmlns:mv="urn:schemas-microsoft-com:mac:vml" xmlns:p="http://schemas.openxmlformats.org/presentationml/2006/main" xmlns:c="http://schemas.openxmlformats.org/drawingml/2006/chart" xmlns:dgm="http://schemas.openxmlformats.org/drawingml/2006/diagram" xmlns:o="urn:schemas-microsoft-com:office:office" xmlns:v="urn:schemas-microsoft-com:vml" xmlns:pvml="urn:schemas-microsoft-com:office:powerpoint" xmlns:com="http://schemas.openxmlformats.org/drawingml/2006/compatibility" xmlns:p14="http://schemas.microsoft.com/office/powerpoint/2010/main" xmlns:p15="http://schemas.microsoft.com/office/powerpoint/2012/main" xmlns:ahyp="http://schemas.microsoft.com/office/drawing/2018/hyperlinkcolor" matchingName="One column text">
+<p:sldLayout xmlns:a="http://schemas.openxmlformats.org/drawingml/2006/main" xmlns:r="http://schemas.openxmlformats.org/officeDocument/2006/relationships" xmlns:p="http://schemas.openxmlformats.org/presentationml/2006/main" matchingName="One column text">
   <p:cSld name="ONE_COLUMN_TEXT">
     <p:spTree>
       <p:nvGrpSpPr>
-        <p:cNvPr id="33" name="Shape 33"/>
+        <p:cNvPr id="1" name="Shape 33"/>
         <p:cNvGrpSpPr/>
         <p:nvPr/>
       </p:nvGrpSpPr>
@@ -2847,7 +2918,9 @@
       <p:sp>
         <p:nvSpPr>
           <p:cNvPr id="34" name="Google Shape;34;p7"/>
-          <p:cNvSpPr txBox="1"/>
+          <p:cNvSpPr txBox="1">
+            <a:spLocks noGrp="1"/>
+          </p:cNvSpPr>
           <p:nvPr>
             <p:ph type="title"/>
           </p:nvPr>
@@ -2862,7 +2935,7 @@
           </a:prstGeom>
         </p:spPr>
         <p:txBody>
-          <a:bodyPr anchorCtr="0" anchor="b" bIns="91425" lIns="91425" spcFirstLastPara="1" rIns="91425" wrap="square" tIns="91425">
+          <a:bodyPr spcFirstLastPara="1" wrap="square" lIns="91425" tIns="91425" rIns="91425" bIns="91425" anchor="b" anchorCtr="0">
             <a:normAutofit/>
           </a:bodyPr>
           <a:lstStyle>
@@ -2966,15 +3039,19 @@
               <a:defRPr sz="2400"/>
             </a:lvl9pPr>
           </a:lstStyle>
-          <a:p/>
+          <a:p>
+            <a:endParaRPr/>
+          </a:p>
         </p:txBody>
       </p:sp>
       <p:sp>
         <p:nvSpPr>
           <p:cNvPr id="35" name="Google Shape;35;p7"/>
-          <p:cNvSpPr txBox="1"/>
+          <p:cNvSpPr txBox="1">
+            <a:spLocks noGrp="1"/>
+          </p:cNvSpPr>
           <p:nvPr>
-            <p:ph idx="1" type="body"/>
+            <p:ph type="body" idx="1"/>
           </p:nvPr>
         </p:nvSpPr>
         <p:spPr>
@@ -2987,11 +3064,11 @@
           </a:prstGeom>
         </p:spPr>
         <p:txBody>
-          <a:bodyPr anchorCtr="0" anchor="t" bIns="91425" lIns="91425" spcFirstLastPara="1" rIns="91425" wrap="square" tIns="91425">
+          <a:bodyPr spcFirstLastPara="1" wrap="square" lIns="91425" tIns="91425" rIns="91425" bIns="91425" anchor="t" anchorCtr="0">
             <a:normAutofit/>
           </a:bodyPr>
           <a:lstStyle>
-            <a:lvl1pPr indent="-304800" lvl="0" marL="457200">
+            <a:lvl1pPr marL="457200" lvl="0" indent="-304800">
               <a:spcBef>
                 <a:spcPts val="0"/>
               </a:spcBef>
@@ -3002,7 +3079,7 @@
               <a:buChar char="●"/>
               <a:defRPr sz="1200"/>
             </a:lvl1pPr>
-            <a:lvl2pPr indent="-304800" lvl="1" marL="914400">
+            <a:lvl2pPr marL="914400" lvl="1" indent="-304800">
               <a:spcBef>
                 <a:spcPts val="0"/>
               </a:spcBef>
@@ -3013,7 +3090,7 @@
               <a:buChar char="○"/>
               <a:defRPr sz="1200"/>
             </a:lvl2pPr>
-            <a:lvl3pPr indent="-304800" lvl="2" marL="1371600">
+            <a:lvl3pPr marL="1371600" lvl="2" indent="-304800">
               <a:spcBef>
                 <a:spcPts val="0"/>
               </a:spcBef>
@@ -3024,7 +3101,7 @@
               <a:buChar char="■"/>
               <a:defRPr sz="1200"/>
             </a:lvl3pPr>
-            <a:lvl4pPr indent="-304800" lvl="3" marL="1828800">
+            <a:lvl4pPr marL="1828800" lvl="3" indent="-304800">
               <a:spcBef>
                 <a:spcPts val="0"/>
               </a:spcBef>
@@ -3035,7 +3112,7 @@
               <a:buChar char="●"/>
               <a:defRPr sz="1200"/>
             </a:lvl4pPr>
-            <a:lvl5pPr indent="-304800" lvl="4" marL="2286000">
+            <a:lvl5pPr marL="2286000" lvl="4" indent="-304800">
               <a:spcBef>
                 <a:spcPts val="0"/>
               </a:spcBef>
@@ -3046,7 +3123,7 @@
               <a:buChar char="○"/>
               <a:defRPr sz="1200"/>
             </a:lvl5pPr>
-            <a:lvl6pPr indent="-304800" lvl="5" marL="2743200">
+            <a:lvl6pPr marL="2743200" lvl="5" indent="-304800">
               <a:spcBef>
                 <a:spcPts val="0"/>
               </a:spcBef>
@@ -3057,7 +3134,7 @@
               <a:buChar char="■"/>
               <a:defRPr sz="1200"/>
             </a:lvl6pPr>
-            <a:lvl7pPr indent="-304800" lvl="6" marL="3200400">
+            <a:lvl7pPr marL="3200400" lvl="6" indent="-304800">
               <a:spcBef>
                 <a:spcPts val="0"/>
               </a:spcBef>
@@ -3068,7 +3145,7 @@
               <a:buChar char="●"/>
               <a:defRPr sz="1200"/>
             </a:lvl7pPr>
-            <a:lvl8pPr indent="-304800" lvl="7" marL="3657600">
+            <a:lvl8pPr marL="3657600" lvl="7" indent="-304800">
               <a:spcBef>
                 <a:spcPts val="0"/>
               </a:spcBef>
@@ -3079,7 +3156,7 @@
               <a:buChar char="○"/>
               <a:defRPr sz="1200"/>
             </a:lvl8pPr>
-            <a:lvl9pPr indent="-304800" lvl="8" marL="4114800">
+            <a:lvl9pPr marL="4114800" lvl="8" indent="-304800">
               <a:spcBef>
                 <a:spcPts val="0"/>
               </a:spcBef>
@@ -3091,15 +3168,19 @@
               <a:defRPr sz="1200"/>
             </a:lvl9pPr>
           </a:lstStyle>
-          <a:p/>
+          <a:p>
+            <a:endParaRPr/>
+          </a:p>
         </p:txBody>
       </p:sp>
       <p:sp>
         <p:nvSpPr>
           <p:cNvPr id="36" name="Google Shape;36;p7"/>
-          <p:cNvSpPr txBox="1"/>
+          <p:cNvSpPr txBox="1">
+            <a:spLocks noGrp="1"/>
+          </p:cNvSpPr>
           <p:nvPr>
-            <p:ph idx="12" type="sldNum"/>
+            <p:ph type="sldNum" idx="12"/>
           </p:nvPr>
         </p:nvSpPr>
         <p:spPr>
@@ -3112,7 +3193,7 @@
           </a:prstGeom>
         </p:spPr>
         <p:txBody>
-          <a:bodyPr anchorCtr="0" anchor="ctr" bIns="91425" lIns="91425" spcFirstLastPara="1" rIns="91425" wrap="square" tIns="91425">
+          <a:bodyPr spcFirstLastPara="1" wrap="square" lIns="91425" tIns="91425" rIns="91425" bIns="91425" anchor="ctr" anchorCtr="0">
             <a:normAutofit/>
           </a:bodyPr>
           <a:lstStyle>
@@ -3154,7 +3235,7 @@
             </a:lvl9pPr>
           </a:lstStyle>
           <a:p>
-            <a:pPr indent="0" lvl="0" marL="0" rtl="0" algn="r">
+            <a:pPr marL="0" lvl="0" indent="0" algn="r" rtl="0">
               <a:spcBef>
                 <a:spcPts val="0"/>
               </a:spcBef>
@@ -3180,11 +3261,11 @@
 </file>
 
 <file path=ppt/slideLayouts/slideLayout7.xml><?xml version="1.0" encoding="utf-8"?>
-<p:sldLayout xmlns:a="http://schemas.openxmlformats.org/drawingml/2006/main" xmlns:r="http://schemas.openxmlformats.org/officeDocument/2006/relationships" xmlns:mc="http://schemas.openxmlformats.org/markup-compatibility/2006" xmlns:mv="urn:schemas-microsoft-com:mac:vml" xmlns:p="http://schemas.openxmlformats.org/presentationml/2006/main" xmlns:c="http://schemas.openxmlformats.org/drawingml/2006/chart" xmlns:dgm="http://schemas.openxmlformats.org/drawingml/2006/diagram" xmlns:o="urn:schemas-microsoft-com:office:office" xmlns:v="urn:schemas-microsoft-com:vml" xmlns:pvml="urn:schemas-microsoft-com:office:powerpoint" xmlns:com="http://schemas.openxmlformats.org/drawingml/2006/compatibility" xmlns:p14="http://schemas.microsoft.com/office/powerpoint/2010/main" xmlns:p15="http://schemas.microsoft.com/office/powerpoint/2012/main" xmlns:ahyp="http://schemas.microsoft.com/office/drawing/2018/hyperlinkcolor" matchingName="Main point">
+<p:sldLayout xmlns:a="http://schemas.openxmlformats.org/drawingml/2006/main" xmlns:r="http://schemas.openxmlformats.org/officeDocument/2006/relationships" xmlns:p="http://schemas.openxmlformats.org/presentationml/2006/main" matchingName="Main point">
   <p:cSld name="MAIN_POINT">
     <p:spTree>
       <p:nvGrpSpPr>
-        <p:cNvPr id="37" name="Shape 37"/>
+        <p:cNvPr id="1" name="Shape 37"/>
         <p:cNvGrpSpPr/>
         <p:nvPr/>
       </p:nvGrpSpPr>
@@ -3199,7 +3280,9 @@
       <p:sp>
         <p:nvSpPr>
           <p:cNvPr id="38" name="Google Shape;38;p8"/>
-          <p:cNvSpPr txBox="1"/>
+          <p:cNvSpPr txBox="1">
+            <a:spLocks noGrp="1"/>
+          </p:cNvSpPr>
           <p:nvPr>
             <p:ph type="title"/>
           </p:nvPr>
@@ -3214,7 +3297,7 @@
           </a:prstGeom>
         </p:spPr>
         <p:txBody>
-          <a:bodyPr anchorCtr="0" anchor="ctr" bIns="91425" lIns="91425" spcFirstLastPara="1" rIns="91425" wrap="square" tIns="91425">
+          <a:bodyPr spcFirstLastPara="1" wrap="square" lIns="91425" tIns="91425" rIns="91425" bIns="91425" anchor="ctr" anchorCtr="0">
             <a:normAutofit/>
           </a:bodyPr>
           <a:lstStyle>
@@ -3318,15 +3401,19 @@
               <a:defRPr sz="4800"/>
             </a:lvl9pPr>
           </a:lstStyle>
-          <a:p/>
+          <a:p>
+            <a:endParaRPr/>
+          </a:p>
         </p:txBody>
       </p:sp>
       <p:sp>
         <p:nvSpPr>
           <p:cNvPr id="39" name="Google Shape;39;p8"/>
-          <p:cNvSpPr txBox="1"/>
+          <p:cNvSpPr txBox="1">
+            <a:spLocks noGrp="1"/>
+          </p:cNvSpPr>
           <p:nvPr>
-            <p:ph idx="12" type="sldNum"/>
+            <p:ph type="sldNum" idx="12"/>
           </p:nvPr>
         </p:nvSpPr>
         <p:spPr>
@@ -3339,7 +3426,7 @@
           </a:prstGeom>
         </p:spPr>
         <p:txBody>
-          <a:bodyPr anchorCtr="0" anchor="ctr" bIns="91425" lIns="91425" spcFirstLastPara="1" rIns="91425" wrap="square" tIns="91425">
+          <a:bodyPr spcFirstLastPara="1" wrap="square" lIns="91425" tIns="91425" rIns="91425" bIns="91425" anchor="ctr" anchorCtr="0">
             <a:normAutofit/>
           </a:bodyPr>
           <a:lstStyle>
@@ -3381,7 +3468,7 @@
             </a:lvl9pPr>
           </a:lstStyle>
           <a:p>
-            <a:pPr indent="0" lvl="0" marL="0" rtl="0" algn="r">
+            <a:pPr marL="0" lvl="0" indent="0" algn="r" rtl="0">
               <a:spcBef>
                 <a:spcPts val="0"/>
               </a:spcBef>
@@ -3407,11 +3494,11 @@
 </file>
 
 <file path=ppt/slideLayouts/slideLayout8.xml><?xml version="1.0" encoding="utf-8"?>
-<p:sldLayout xmlns:a="http://schemas.openxmlformats.org/drawingml/2006/main" xmlns:r="http://schemas.openxmlformats.org/officeDocument/2006/relationships" xmlns:mc="http://schemas.openxmlformats.org/markup-compatibility/2006" xmlns:mv="urn:schemas-microsoft-com:mac:vml" xmlns:p="http://schemas.openxmlformats.org/presentationml/2006/main" xmlns:c="http://schemas.openxmlformats.org/drawingml/2006/chart" xmlns:dgm="http://schemas.openxmlformats.org/drawingml/2006/diagram" xmlns:o="urn:schemas-microsoft-com:office:office" xmlns:v="urn:schemas-microsoft-com:vml" xmlns:pvml="urn:schemas-microsoft-com:office:powerpoint" xmlns:com="http://schemas.openxmlformats.org/drawingml/2006/compatibility" xmlns:p14="http://schemas.microsoft.com/office/powerpoint/2010/main" xmlns:p15="http://schemas.microsoft.com/office/powerpoint/2012/main" xmlns:ahyp="http://schemas.microsoft.com/office/drawing/2018/hyperlinkcolor" matchingName="Section title and description">
+<p:sldLayout xmlns:a="http://schemas.openxmlformats.org/drawingml/2006/main" xmlns:r="http://schemas.openxmlformats.org/officeDocument/2006/relationships" xmlns:p="http://schemas.openxmlformats.org/presentationml/2006/main" matchingName="Section title and description">
   <p:cSld name="SECTION_TITLE_AND_DESCRIPTION">
     <p:spTree>
       <p:nvGrpSpPr>
-        <p:cNvPr id="40" name="Shape 40"/>
+        <p:cNvPr id="1" name="Shape 40"/>
         <p:cNvGrpSpPr/>
         <p:nvPr/>
       </p:nvGrpSpPr>
@@ -3445,23 +3532,20 @@
           </a:ln>
         </p:spPr>
         <p:txBody>
-          <a:bodyPr anchorCtr="0" anchor="ctr" bIns="91425" lIns="91425" spcFirstLastPara="1" rIns="91425" wrap="square" tIns="91425">
+          <a:bodyPr spcFirstLastPara="1" wrap="square" lIns="91425" tIns="91425" rIns="91425" bIns="91425" anchor="ctr" anchorCtr="0">
             <a:noAutofit/>
           </a:bodyPr>
           <a:lstStyle/>
           <a:p>
-            <a:pPr indent="0" lvl="0" marL="0" rtl="0" algn="l">
-              <a:spcBef>
-                <a:spcPts val="0"/>
-              </a:spcBef>
-              <a:spcAft>
-                <a:spcPts val="0"/>
-              </a:spcAft>
-              <a:buNone/>
-            </a:pPr>
-            <a:r>
-              <a:t/>
-            </a:r>
+            <a:pPr marL="0" lvl="0" indent="0" algn="l" rtl="0">
+              <a:spcBef>
+                <a:spcPts val="0"/>
+              </a:spcBef>
+              <a:spcAft>
+                <a:spcPts val="0"/>
+              </a:spcAft>
+              <a:buNone/>
+            </a:pPr>
             <a:endParaRPr/>
           </a:p>
         </p:txBody>
@@ -3469,7 +3553,9 @@
       <p:sp>
         <p:nvSpPr>
           <p:cNvPr id="42" name="Google Shape;42;p9"/>
-          <p:cNvSpPr txBox="1"/>
+          <p:cNvSpPr txBox="1">
+            <a:spLocks noGrp="1"/>
+          </p:cNvSpPr>
           <p:nvPr>
             <p:ph type="title"/>
           </p:nvPr>
@@ -3484,7 +3570,7 @@
           </a:prstGeom>
         </p:spPr>
         <p:txBody>
-          <a:bodyPr anchorCtr="0" anchor="b" bIns="91425" lIns="91425" spcFirstLastPara="1" rIns="91425" wrap="square" tIns="91425">
+          <a:bodyPr spcFirstLastPara="1" wrap="square" lIns="91425" tIns="91425" rIns="91425" bIns="91425" anchor="b" anchorCtr="0">
             <a:normAutofit/>
           </a:bodyPr>
           <a:lstStyle>
@@ -3588,15 +3674,19 @@
               <a:defRPr sz="4200"/>
             </a:lvl9pPr>
           </a:lstStyle>
-          <a:p/>
+          <a:p>
+            <a:endParaRPr/>
+          </a:p>
         </p:txBody>
       </p:sp>
       <p:sp>
         <p:nvSpPr>
           <p:cNvPr id="43" name="Google Shape;43;p9"/>
-          <p:cNvSpPr txBox="1"/>
+          <p:cNvSpPr txBox="1">
+            <a:spLocks noGrp="1"/>
+          </p:cNvSpPr>
           <p:nvPr>
-            <p:ph idx="1" type="subTitle"/>
+            <p:ph type="subTitle" idx="1"/>
           </p:nvPr>
         </p:nvSpPr>
         <p:spPr>
@@ -3609,7 +3699,7 @@
           </a:prstGeom>
         </p:spPr>
         <p:txBody>
-          <a:bodyPr anchorCtr="0" anchor="t" bIns="91425" lIns="91425" spcFirstLastPara="1" rIns="91425" wrap="square" tIns="91425">
+          <a:bodyPr spcFirstLastPara="1" wrap="square" lIns="91425" tIns="91425" rIns="91425" bIns="91425" anchor="t" anchorCtr="0">
             <a:normAutofit/>
           </a:bodyPr>
           <a:lstStyle>
@@ -3740,15 +3830,19 @@
               <a:defRPr sz="2100"/>
             </a:lvl9pPr>
           </a:lstStyle>
-          <a:p/>
+          <a:p>
+            <a:endParaRPr/>
+          </a:p>
         </p:txBody>
       </p:sp>
       <p:sp>
         <p:nvSpPr>
           <p:cNvPr id="44" name="Google Shape;44;p9"/>
-          <p:cNvSpPr txBox="1"/>
+          <p:cNvSpPr txBox="1">
+            <a:spLocks noGrp="1"/>
+          </p:cNvSpPr>
           <p:nvPr>
-            <p:ph idx="2" type="body"/>
+            <p:ph type="body" idx="2"/>
           </p:nvPr>
         </p:nvSpPr>
         <p:spPr>
@@ -3761,11 +3855,11 @@
           </a:prstGeom>
         </p:spPr>
         <p:txBody>
-          <a:bodyPr anchorCtr="0" anchor="ctr" bIns="91425" lIns="91425" spcFirstLastPara="1" rIns="91425" wrap="square" tIns="91425">
+          <a:bodyPr spcFirstLastPara="1" wrap="square" lIns="91425" tIns="91425" rIns="91425" bIns="91425" anchor="ctr" anchorCtr="0">
             <a:normAutofit/>
           </a:bodyPr>
           <a:lstStyle>
-            <a:lvl1pPr indent="-342900" lvl="0" marL="457200">
+            <a:lvl1pPr marL="457200" lvl="0" indent="-342900">
               <a:spcBef>
                 <a:spcPts val="0"/>
               </a:spcBef>
@@ -3776,7 +3870,7 @@
               <a:buChar char="●"/>
               <a:defRPr/>
             </a:lvl1pPr>
-            <a:lvl2pPr indent="-317500" lvl="1" marL="914400">
+            <a:lvl2pPr marL="914400" lvl="1" indent="-317500">
               <a:spcBef>
                 <a:spcPts val="0"/>
               </a:spcBef>
@@ -3787,7 +3881,7 @@
               <a:buChar char="○"/>
               <a:defRPr/>
             </a:lvl2pPr>
-            <a:lvl3pPr indent="-317500" lvl="2" marL="1371600">
+            <a:lvl3pPr marL="1371600" lvl="2" indent="-317500">
               <a:spcBef>
                 <a:spcPts val="0"/>
               </a:spcBef>
@@ -3798,7 +3892,7 @@
               <a:buChar char="■"/>
               <a:defRPr/>
             </a:lvl3pPr>
-            <a:lvl4pPr indent="-317500" lvl="3" marL="1828800">
+            <a:lvl4pPr marL="1828800" lvl="3" indent="-317500">
               <a:spcBef>
                 <a:spcPts val="0"/>
               </a:spcBef>
@@ -3809,7 +3903,7 @@
               <a:buChar char="●"/>
               <a:defRPr/>
             </a:lvl4pPr>
-            <a:lvl5pPr indent="-317500" lvl="4" marL="2286000">
+            <a:lvl5pPr marL="2286000" lvl="4" indent="-317500">
               <a:spcBef>
                 <a:spcPts val="0"/>
               </a:spcBef>
@@ -3820,7 +3914,7 @@
               <a:buChar char="○"/>
               <a:defRPr/>
             </a:lvl5pPr>
-            <a:lvl6pPr indent="-317500" lvl="5" marL="2743200">
+            <a:lvl6pPr marL="2743200" lvl="5" indent="-317500">
               <a:spcBef>
                 <a:spcPts val="0"/>
               </a:spcBef>
@@ -3831,7 +3925,7 @@
               <a:buChar char="■"/>
               <a:defRPr/>
             </a:lvl6pPr>
-            <a:lvl7pPr indent="-317500" lvl="6" marL="3200400">
+            <a:lvl7pPr marL="3200400" lvl="6" indent="-317500">
               <a:spcBef>
                 <a:spcPts val="0"/>
               </a:spcBef>
@@ -3842,7 +3936,7 @@
               <a:buChar char="●"/>
               <a:defRPr/>
             </a:lvl7pPr>
-            <a:lvl8pPr indent="-317500" lvl="7" marL="3657600">
+            <a:lvl8pPr marL="3657600" lvl="7" indent="-317500">
               <a:spcBef>
                 <a:spcPts val="0"/>
               </a:spcBef>
@@ -3853,7 +3947,7 @@
               <a:buChar char="○"/>
               <a:defRPr/>
             </a:lvl8pPr>
-            <a:lvl9pPr indent="-317500" lvl="8" marL="4114800">
+            <a:lvl9pPr marL="4114800" lvl="8" indent="-317500">
               <a:spcBef>
                 <a:spcPts val="0"/>
               </a:spcBef>
@@ -3865,15 +3959,19 @@
               <a:defRPr/>
             </a:lvl9pPr>
           </a:lstStyle>
-          <a:p/>
+          <a:p>
+            <a:endParaRPr/>
+          </a:p>
         </p:txBody>
       </p:sp>
       <p:sp>
         <p:nvSpPr>
           <p:cNvPr id="45" name="Google Shape;45;p9"/>
-          <p:cNvSpPr txBox="1"/>
+          <p:cNvSpPr txBox="1">
+            <a:spLocks noGrp="1"/>
+          </p:cNvSpPr>
           <p:nvPr>
-            <p:ph idx="12" type="sldNum"/>
+            <p:ph type="sldNum" idx="12"/>
           </p:nvPr>
         </p:nvSpPr>
         <p:spPr>
@@ -3886,7 +3984,7 @@
           </a:prstGeom>
         </p:spPr>
         <p:txBody>
-          <a:bodyPr anchorCtr="0" anchor="ctr" bIns="91425" lIns="91425" spcFirstLastPara="1" rIns="91425" wrap="square" tIns="91425">
+          <a:bodyPr spcFirstLastPara="1" wrap="square" lIns="91425" tIns="91425" rIns="91425" bIns="91425" anchor="ctr" anchorCtr="0">
             <a:normAutofit/>
           </a:bodyPr>
           <a:lstStyle>
@@ -3928,7 +4026,7 @@
             </a:lvl9pPr>
           </a:lstStyle>
           <a:p>
-            <a:pPr indent="0" lvl="0" marL="0" rtl="0" algn="r">
+            <a:pPr marL="0" lvl="0" indent="0" algn="r" rtl="0">
               <a:spcBef>
                 <a:spcPts val="0"/>
               </a:spcBef>
@@ -3954,11 +4052,11 @@
 </file>
 
 <file path=ppt/slideLayouts/slideLayout9.xml><?xml version="1.0" encoding="utf-8"?>
-<p:sldLayout xmlns:a="http://schemas.openxmlformats.org/drawingml/2006/main" xmlns:r="http://schemas.openxmlformats.org/officeDocument/2006/relationships" xmlns:mc="http://schemas.openxmlformats.org/markup-compatibility/2006" xmlns:mv="urn:schemas-microsoft-com:mac:vml" xmlns:p="http://schemas.openxmlformats.org/presentationml/2006/main" xmlns:c="http://schemas.openxmlformats.org/drawingml/2006/chart" xmlns:dgm="http://schemas.openxmlformats.org/drawingml/2006/diagram" xmlns:o="urn:schemas-microsoft-com:office:office" xmlns:v="urn:schemas-microsoft-com:vml" xmlns:pvml="urn:schemas-microsoft-com:office:powerpoint" xmlns:com="http://schemas.openxmlformats.org/drawingml/2006/compatibility" xmlns:p14="http://schemas.microsoft.com/office/powerpoint/2010/main" xmlns:p15="http://schemas.microsoft.com/office/powerpoint/2012/main" xmlns:ahyp="http://schemas.microsoft.com/office/drawing/2018/hyperlinkcolor" matchingName="Caption">
+<p:sldLayout xmlns:a="http://schemas.openxmlformats.org/drawingml/2006/main" xmlns:r="http://schemas.openxmlformats.org/officeDocument/2006/relationships" xmlns:p="http://schemas.openxmlformats.org/presentationml/2006/main" matchingName="Caption">
   <p:cSld name="CAPTION_ONLY">
     <p:spTree>
       <p:nvGrpSpPr>
-        <p:cNvPr id="46" name="Shape 46"/>
+        <p:cNvPr id="1" name="Shape 46"/>
         <p:cNvGrpSpPr/>
         <p:nvPr/>
       </p:nvGrpSpPr>
@@ -3973,9 +4071,11 @@
       <p:sp>
         <p:nvSpPr>
           <p:cNvPr id="47" name="Google Shape;47;p10"/>
-          <p:cNvSpPr txBox="1"/>
+          <p:cNvSpPr txBox="1">
+            <a:spLocks noGrp="1"/>
+          </p:cNvSpPr>
           <p:nvPr>
-            <p:ph idx="1" type="body"/>
+            <p:ph type="body" idx="1"/>
           </p:nvPr>
         </p:nvSpPr>
         <p:spPr>
@@ -3988,11 +4088,11 @@
           </a:prstGeom>
         </p:spPr>
         <p:txBody>
-          <a:bodyPr anchorCtr="0" anchor="ctr" bIns="91425" lIns="91425" spcFirstLastPara="1" rIns="91425" wrap="square" tIns="91425">
+          <a:bodyPr spcFirstLastPara="1" wrap="square" lIns="91425" tIns="91425" rIns="91425" bIns="91425" anchor="ctr" anchorCtr="0">
             <a:normAutofit/>
           </a:bodyPr>
           <a:lstStyle>
-            <a:lvl1pPr indent="-228600" lvl="0" marL="457200">
+            <a:lvl1pPr marL="457200" lvl="0" indent="-228600">
               <a:lnSpc>
                 <a:spcPct val="100000"/>
               </a:lnSpc>
@@ -4007,15 +4107,19 @@
               <a:defRPr/>
             </a:lvl1pPr>
           </a:lstStyle>
-          <a:p/>
+          <a:p>
+            <a:endParaRPr/>
+          </a:p>
         </p:txBody>
       </p:sp>
       <p:sp>
         <p:nvSpPr>
           <p:cNvPr id="48" name="Google Shape;48;p10"/>
-          <p:cNvSpPr txBox="1"/>
+          <p:cNvSpPr txBox="1">
+            <a:spLocks noGrp="1"/>
+          </p:cNvSpPr>
           <p:nvPr>
-            <p:ph idx="12" type="sldNum"/>
+            <p:ph type="sldNum" idx="12"/>
           </p:nvPr>
         </p:nvSpPr>
         <p:spPr>
@@ -4028,7 +4132,7 @@
           </a:prstGeom>
         </p:spPr>
         <p:txBody>
-          <a:bodyPr anchorCtr="0" anchor="ctr" bIns="91425" lIns="91425" spcFirstLastPara="1" rIns="91425" wrap="square" tIns="91425">
+          <a:bodyPr spcFirstLastPara="1" wrap="square" lIns="91425" tIns="91425" rIns="91425" bIns="91425" anchor="ctr" anchorCtr="0">
             <a:normAutofit/>
           </a:bodyPr>
           <a:lstStyle>
@@ -4070,7 +4174,7 @@
             </a:lvl9pPr>
           </a:lstStyle>
           <a:p>
-            <a:pPr indent="0" lvl="0" marL="0" rtl="0" algn="r">
+            <a:pPr marL="0" lvl="0" indent="0" algn="r" rtl="0">
               <a:spcBef>
                 <a:spcPts val="0"/>
               </a:spcBef>
@@ -4096,18 +4200,19 @@
 </file>
 
 <file path=ppt/slideMasters/slideMaster1.xml><?xml version="1.0" encoding="utf-8"?>
-<p:sldMaster xmlns:a="http://schemas.openxmlformats.org/drawingml/2006/main" xmlns:r="http://schemas.openxmlformats.org/officeDocument/2006/relationships" xmlns:mc="http://schemas.openxmlformats.org/markup-compatibility/2006" xmlns:mv="urn:schemas-microsoft-com:mac:vml" xmlns:p="http://schemas.openxmlformats.org/presentationml/2006/main" xmlns:c="http://schemas.openxmlformats.org/drawingml/2006/chart" xmlns:dgm="http://schemas.openxmlformats.org/drawingml/2006/diagram" xmlns:o="urn:schemas-microsoft-com:office:office" xmlns:v="urn:schemas-microsoft-com:vml" xmlns:pvml="urn:schemas-microsoft-com:office:powerpoint" xmlns:com="http://schemas.openxmlformats.org/drawingml/2006/compatibility" xmlns:p14="http://schemas.microsoft.com/office/powerpoint/2010/main" xmlns:p15="http://schemas.microsoft.com/office/powerpoint/2012/main" xmlns:ahyp="http://schemas.microsoft.com/office/drawing/2018/hyperlinkcolor">
+<p:sldMaster xmlns:a="http://schemas.openxmlformats.org/drawingml/2006/main" xmlns:r="http://schemas.openxmlformats.org/officeDocument/2006/relationships" xmlns:p="http://schemas.openxmlformats.org/presentationml/2006/main">
   <p:cSld name="simple-light-2">
     <p:bg>
       <p:bgPr>
         <a:solidFill>
           <a:schemeClr val="lt1"/>
         </a:solidFill>
+        <a:effectLst/>
       </p:bgPr>
     </p:bg>
     <p:spTree>
       <p:nvGrpSpPr>
-        <p:cNvPr id="5" name="Shape 5"/>
+        <p:cNvPr id="1" name="Shape 5"/>
         <p:cNvGrpSpPr/>
         <p:nvPr/>
       </p:nvGrpSpPr>
@@ -4122,7 +4227,9 @@
       <p:sp>
         <p:nvSpPr>
           <p:cNvPr id="6" name="Google Shape;6;p1"/>
-          <p:cNvSpPr txBox="1"/>
+          <p:cNvSpPr txBox="1">
+            <a:spLocks noGrp="1"/>
+          </p:cNvSpPr>
           <p:nvPr>
             <p:ph type="title"/>
           </p:nvPr>
@@ -4141,7 +4248,7 @@
           </a:ln>
         </p:spPr>
         <p:txBody>
-          <a:bodyPr anchorCtr="0" anchor="t" bIns="91425" lIns="91425" spcFirstLastPara="1" rIns="91425" wrap="square" tIns="91425">
+          <a:bodyPr spcFirstLastPara="1" wrap="square" lIns="91425" tIns="91425" rIns="91425" bIns="91425" anchor="t" anchorCtr="0">
             <a:normAutofit/>
           </a:bodyPr>
           <a:lstStyle>
@@ -4308,15 +4415,19 @@
               </a:defRPr>
             </a:lvl9pPr>
           </a:lstStyle>
-          <a:p/>
+          <a:p>
+            <a:endParaRPr/>
+          </a:p>
         </p:txBody>
       </p:sp>
       <p:sp>
         <p:nvSpPr>
           <p:cNvPr id="7" name="Google Shape;7;p1"/>
-          <p:cNvSpPr txBox="1"/>
+          <p:cNvSpPr txBox="1">
+            <a:spLocks noGrp="1"/>
+          </p:cNvSpPr>
           <p:nvPr>
-            <p:ph idx="1" type="body"/>
+            <p:ph type="body" idx="1"/>
           </p:nvPr>
         </p:nvSpPr>
         <p:spPr>
@@ -4333,11 +4444,11 @@
           </a:ln>
         </p:spPr>
         <p:txBody>
-          <a:bodyPr anchorCtr="0" anchor="t" bIns="91425" lIns="91425" spcFirstLastPara="1" rIns="91425" wrap="square" tIns="91425">
+          <a:bodyPr spcFirstLastPara="1" wrap="square" lIns="91425" tIns="91425" rIns="91425" bIns="91425" anchor="t" anchorCtr="0">
             <a:normAutofit/>
           </a:bodyPr>
           <a:lstStyle>
-            <a:lvl1pPr indent="-342900" lvl="0" marL="457200">
+            <a:lvl1pPr marL="457200" lvl="0" indent="-342900">
               <a:lnSpc>
                 <a:spcPct val="115000"/>
               </a:lnSpc>
@@ -4358,7 +4469,7 @@
                 </a:solidFill>
               </a:defRPr>
             </a:lvl1pPr>
-            <a:lvl2pPr indent="-317500" lvl="1" marL="914400">
+            <a:lvl2pPr marL="914400" lvl="1" indent="-317500">
               <a:lnSpc>
                 <a:spcPct val="115000"/>
               </a:lnSpc>
@@ -4379,7 +4490,7 @@
                 </a:solidFill>
               </a:defRPr>
             </a:lvl2pPr>
-            <a:lvl3pPr indent="-317500" lvl="2" marL="1371600">
+            <a:lvl3pPr marL="1371600" lvl="2" indent="-317500">
               <a:lnSpc>
                 <a:spcPct val="115000"/>
               </a:lnSpc>
@@ -4400,7 +4511,7 @@
                 </a:solidFill>
               </a:defRPr>
             </a:lvl3pPr>
-            <a:lvl4pPr indent="-317500" lvl="3" marL="1828800">
+            <a:lvl4pPr marL="1828800" lvl="3" indent="-317500">
               <a:lnSpc>
                 <a:spcPct val="115000"/>
               </a:lnSpc>
@@ -4421,7 +4532,7 @@
                 </a:solidFill>
               </a:defRPr>
             </a:lvl4pPr>
-            <a:lvl5pPr indent="-317500" lvl="4" marL="2286000">
+            <a:lvl5pPr marL="2286000" lvl="4" indent="-317500">
               <a:lnSpc>
                 <a:spcPct val="115000"/>
               </a:lnSpc>
@@ -4442,7 +4553,7 @@
                 </a:solidFill>
               </a:defRPr>
             </a:lvl5pPr>
-            <a:lvl6pPr indent="-317500" lvl="5" marL="2743200">
+            <a:lvl6pPr marL="2743200" lvl="5" indent="-317500">
               <a:lnSpc>
                 <a:spcPct val="115000"/>
               </a:lnSpc>
@@ -4463,7 +4574,7 @@
                 </a:solidFill>
               </a:defRPr>
             </a:lvl6pPr>
-            <a:lvl7pPr indent="-317500" lvl="6" marL="3200400">
+            <a:lvl7pPr marL="3200400" lvl="6" indent="-317500">
               <a:lnSpc>
                 <a:spcPct val="115000"/>
               </a:lnSpc>
@@ -4484,7 +4595,7 @@
                 </a:solidFill>
               </a:defRPr>
             </a:lvl7pPr>
-            <a:lvl8pPr indent="-317500" lvl="7" marL="3657600">
+            <a:lvl8pPr marL="3657600" lvl="7" indent="-317500">
               <a:lnSpc>
                 <a:spcPct val="115000"/>
               </a:lnSpc>
@@ -4505,7 +4616,7 @@
                 </a:solidFill>
               </a:defRPr>
             </a:lvl8pPr>
-            <a:lvl9pPr indent="-317500" lvl="8" marL="4114800">
+            <a:lvl9pPr marL="4114800" lvl="8" indent="-317500">
               <a:lnSpc>
                 <a:spcPct val="115000"/>
               </a:lnSpc>
@@ -4527,15 +4638,19 @@
               </a:defRPr>
             </a:lvl9pPr>
           </a:lstStyle>
-          <a:p/>
+          <a:p>
+            <a:endParaRPr/>
+          </a:p>
         </p:txBody>
       </p:sp>
       <p:sp>
         <p:nvSpPr>
           <p:cNvPr id="8" name="Google Shape;8;p1"/>
-          <p:cNvSpPr txBox="1"/>
+          <p:cNvSpPr txBox="1">
+            <a:spLocks noGrp="1"/>
+          </p:cNvSpPr>
           <p:nvPr>
-            <p:ph idx="12" type="sldNum"/>
+            <p:ph type="sldNum" idx="12"/>
           </p:nvPr>
         </p:nvSpPr>
         <p:spPr>
@@ -4552,7 +4667,7 @@
           </a:ln>
         </p:spPr>
         <p:txBody>
-          <a:bodyPr anchorCtr="0" anchor="ctr" bIns="91425" lIns="91425" spcFirstLastPara="1" rIns="91425" wrap="square" tIns="91425">
+          <a:bodyPr spcFirstLastPara="1" wrap="square" lIns="91425" tIns="91425" rIns="91425" bIns="91425" anchor="ctr" anchorCtr="0">
             <a:normAutofit/>
           </a:bodyPr>
           <a:lstStyle>
@@ -4630,7 +4745,7 @@
             </a:lvl9pPr>
           </a:lstStyle>
           <a:p>
-            <a:pPr indent="0" lvl="0" marL="0" rtl="0" algn="r">
+            <a:pPr marL="0" lvl="0" indent="0" algn="r" rtl="0">
               <a:spcBef>
                 <a:spcPts val="0"/>
               </a:spcBef>
@@ -4649,12 +4764,12 @@
       </p:sp>
       <p:pic>
         <p:nvPicPr>
-          <p:cNvPr descr="logo" id="9" name="Google Shape;9;p1"/>
+          <p:cNvPr id="9" name="Google Shape;9;p1" descr="logo"/>
           <p:cNvPicPr preferRelativeResize="0"/>
           <p:nvPr/>
         </p:nvPicPr>
         <p:blipFill>
-          <a:blip r:embed="rId1">
+          <a:blip r:embed="rId13">
             <a:alphaModFix/>
           </a:blip>
           <a:stretch>
@@ -4692,34 +4807,31 @@
           <a:solidFill>
             <a:schemeClr val="accent1"/>
           </a:solidFill>
-          <a:ln cap="flat" cmpd="sng" w="9525">
+          <a:ln w="9525" cap="flat" cmpd="sng">
             <a:solidFill>
               <a:schemeClr val="dk2"/>
             </a:solidFill>
             <a:prstDash val="solid"/>
             <a:round/>
-            <a:headEnd len="sm" w="sm" type="none"/>
-            <a:tailEnd len="sm" w="sm" type="none"/>
+            <a:headEnd type="none" w="sm" len="sm"/>
+            <a:tailEnd type="none" w="sm" len="sm"/>
           </a:ln>
         </p:spPr>
         <p:txBody>
-          <a:bodyPr anchorCtr="0" anchor="ctr" bIns="91425" lIns="91425" spcFirstLastPara="1" rIns="91425" wrap="square" tIns="91425">
+          <a:bodyPr spcFirstLastPara="1" wrap="square" lIns="91425" tIns="91425" rIns="91425" bIns="91425" anchor="ctr" anchorCtr="0">
             <a:noAutofit/>
           </a:bodyPr>
           <a:lstStyle/>
           <a:p>
-            <a:pPr indent="0" lvl="0" marL="0" rtl="0" algn="ctr">
-              <a:spcBef>
-                <a:spcPts val="0"/>
-              </a:spcBef>
-              <a:spcAft>
-                <a:spcPts val="0"/>
-              </a:spcAft>
-              <a:buNone/>
-            </a:pPr>
-            <a:r>
-              <a:t/>
-            </a:r>
+            <a:pPr marL="0" lvl="0" indent="0" algn="ctr" rtl="0">
+              <a:spcBef>
+                <a:spcPts val="0"/>
+              </a:spcBef>
+              <a:spcAft>
+                <a:spcPts val="0"/>
+              </a:spcAft>
+              <a:buNone/>
+            </a:pPr>
             <a:endParaRPr/>
           </a:p>
         </p:txBody>
@@ -4744,12 +4856,12 @@
           </a:ln>
         </p:spPr>
         <p:txBody>
-          <a:bodyPr anchorCtr="0" anchor="t" bIns="91425" lIns="91425" spcFirstLastPara="1" rIns="91425" wrap="square" tIns="91425">
+          <a:bodyPr spcFirstLastPara="1" wrap="square" lIns="91425" tIns="91425" rIns="91425" bIns="91425" anchor="t" anchorCtr="0">
             <a:noAutofit/>
           </a:bodyPr>
           <a:lstStyle/>
           <a:p>
-            <a:pPr indent="0" lvl="0" marL="0" rtl="0" algn="ctr">
+            <a:pPr marL="0" lvl="0" indent="0" algn="ctr" rtl="0">
               <a:spcBef>
                 <a:spcPts val="0"/>
               </a:spcBef>
@@ -4781,7 +4893,7 @@
           <p:nvPr/>
         </p:nvPicPr>
         <p:blipFill>
-          <a:blip r:embed="rId2">
+          <a:blip r:embed="rId14">
             <a:alphaModFix/>
           </a:blip>
           <a:stretch>
@@ -4822,12 +4934,12 @@
           </a:ln>
         </p:spPr>
         <p:txBody>
-          <a:bodyPr anchorCtr="0" anchor="t" bIns="91425" lIns="91425" spcFirstLastPara="1" rIns="91425" wrap="square" tIns="91425">
+          <a:bodyPr spcFirstLastPara="1" wrap="square" lIns="91425" tIns="91425" rIns="91425" bIns="91425" anchor="t" anchorCtr="0">
             <a:noAutofit/>
           </a:bodyPr>
           <a:lstStyle/>
           <a:p>
-            <a:pPr indent="0" lvl="0" marL="0" rtl="0" algn="ctr">
+            <a:pPr marL="0" lvl="0" indent="0" algn="ctr" rtl="0">
               <a:spcBef>
                 <a:spcPts val="0"/>
               </a:spcBef>
@@ -4845,14 +4957,14 @@
               <a:t>BATCH 2022</a:t>
             </a:r>
             <a:r>
-              <a:rPr i="1" lang="en-GB" sz="1800">
+              <a:rPr lang="en-GB" sz="1800" i="1">
                 <a:solidFill>
                   <a:schemeClr val="lt1"/>
                 </a:solidFill>
               </a:rPr>
               <a:t> </a:t>
             </a:r>
-            <a:endParaRPr i="1" sz="1800">
+            <a:endParaRPr sz="1800" i="1">
               <a:solidFill>
                 <a:schemeClr val="lt1"/>
               </a:solidFill>
@@ -4862,24 +4974,24 @@
       </p:sp>
     </p:spTree>
   </p:cSld>
-  <p:clrMap accent1="accent1" accent2="accent2" accent3="accent3" accent4="accent4" accent5="accent5" accent6="accent6" bg1="lt1" bg2="dk2" tx1="dk1" tx2="lt2" folHlink="folHlink" hlink="hlink"/>
+  <p:clrMap bg1="lt1" tx1="dk1" bg2="dk2" tx2="lt2" accent1="accent1" accent2="accent2" accent3="accent3" accent4="accent4" accent5="accent5" accent6="accent6" hlink="hlink" folHlink="folHlink"/>
   <p:sldLayoutIdLst>
-    <p:sldLayoutId id="2147483648" r:id="rId3"/>
-    <p:sldLayoutId id="2147483649" r:id="rId4"/>
-    <p:sldLayoutId id="2147483650" r:id="rId5"/>
-    <p:sldLayoutId id="2147483651" r:id="rId6"/>
-    <p:sldLayoutId id="2147483652" r:id="rId7"/>
-    <p:sldLayoutId id="2147483653" r:id="rId8"/>
-    <p:sldLayoutId id="2147483654" r:id="rId9"/>
-    <p:sldLayoutId id="2147483655" r:id="rId10"/>
-    <p:sldLayoutId id="2147483656" r:id="rId11"/>
-    <p:sldLayoutId id="2147483657" r:id="rId12"/>
-    <p:sldLayoutId id="2147483658" r:id="rId13"/>
+    <p:sldLayoutId id="2147483648" r:id="rId1"/>
+    <p:sldLayoutId id="2147483649" r:id="rId2"/>
+    <p:sldLayoutId id="2147483650" r:id="rId3"/>
+    <p:sldLayoutId id="2147483651" r:id="rId4"/>
+    <p:sldLayoutId id="2147483652" r:id="rId5"/>
+    <p:sldLayoutId id="2147483653" r:id="rId6"/>
+    <p:sldLayoutId id="2147483654" r:id="rId7"/>
+    <p:sldLayoutId id="2147483655" r:id="rId8"/>
+    <p:sldLayoutId id="2147483656" r:id="rId9"/>
+    <p:sldLayoutId id="2147483657" r:id="rId10"/>
+    <p:sldLayoutId id="2147483658" r:id="rId11"/>
   </p:sldLayoutIdLst>
-  <p:hf dt="0" ftr="0" hdr="0" sldNum="0"/>
+  <p:hf sldNum="0" hdr="0" ftr="0" dt="0"/>
   <p:txStyles>
     <p:titleStyle>
-      <a:defPPr lvl="0" marR="0" rtl="0" algn="l">
+      <a:defPPr marR="0" lvl="0" algn="l" rtl="0">
         <a:lnSpc>
           <a:spcPct val="100000"/>
         </a:lnSpc>
@@ -4890,7 +5002,7 @@
           <a:spcPts val="0"/>
         </a:spcAft>
       </a:defPPr>
-      <a:lvl1pPr lvl="0" marR="0" rtl="0" algn="l">
+      <a:lvl1pPr marR="0" lvl="0" algn="l" rtl="0">
         <a:lnSpc>
           <a:spcPct val="100000"/>
         </a:lnSpc>
@@ -4904,7 +5016,7 @@
           <a:srgbClr val="000000"/>
         </a:buClr>
         <a:buFont typeface="Arial"/>
-        <a:defRPr b="0" i="0" sz="1400" u="none" cap="none" strike="noStrike">
+        <a:defRPr sz="1400" b="0" i="0" u="none" strike="noStrike" cap="none">
           <a:solidFill>
             <a:srgbClr val="000000"/>
           </a:solidFill>
@@ -4914,7 +5026,7 @@
           <a:sym typeface="Arial"/>
         </a:defRPr>
       </a:lvl1pPr>
-      <a:lvl2pPr lvl="1" marR="0" rtl="0" algn="l">
+      <a:lvl2pPr marR="0" lvl="1" algn="l" rtl="0">
         <a:lnSpc>
           <a:spcPct val="100000"/>
         </a:lnSpc>
@@ -4928,7 +5040,7 @@
           <a:srgbClr val="000000"/>
         </a:buClr>
         <a:buFont typeface="Arial"/>
-        <a:defRPr b="0" i="0" sz="1400" u="none" cap="none" strike="noStrike">
+        <a:defRPr sz="1400" b="0" i="0" u="none" strike="noStrike" cap="none">
           <a:solidFill>
             <a:srgbClr val="000000"/>
           </a:solidFill>
@@ -4938,7 +5050,7 @@
           <a:sym typeface="Arial"/>
         </a:defRPr>
       </a:lvl2pPr>
-      <a:lvl3pPr lvl="2" marR="0" rtl="0" algn="l">
+      <a:lvl3pPr marR="0" lvl="2" algn="l" rtl="0">
         <a:lnSpc>
           <a:spcPct val="100000"/>
         </a:lnSpc>
@@ -4952,7 +5064,7 @@
           <a:srgbClr val="000000"/>
         </a:buClr>
         <a:buFont typeface="Arial"/>
-        <a:defRPr b="0" i="0" sz="1400" u="none" cap="none" strike="noStrike">
+        <a:defRPr sz="1400" b="0" i="0" u="none" strike="noStrike" cap="none">
           <a:solidFill>
             <a:srgbClr val="000000"/>
           </a:solidFill>
@@ -4962,7 +5074,7 @@
           <a:sym typeface="Arial"/>
         </a:defRPr>
       </a:lvl3pPr>
-      <a:lvl4pPr lvl="3" marR="0" rtl="0" algn="l">
+      <a:lvl4pPr marR="0" lvl="3" algn="l" rtl="0">
         <a:lnSpc>
           <a:spcPct val="100000"/>
         </a:lnSpc>
@@ -4976,7 +5088,7 @@
           <a:srgbClr val="000000"/>
         </a:buClr>
         <a:buFont typeface="Arial"/>
-        <a:defRPr b="0" i="0" sz="1400" u="none" cap="none" strike="noStrike">
+        <a:defRPr sz="1400" b="0" i="0" u="none" strike="noStrike" cap="none">
           <a:solidFill>
             <a:srgbClr val="000000"/>
           </a:solidFill>
@@ -4986,7 +5098,7 @@
           <a:sym typeface="Arial"/>
         </a:defRPr>
       </a:lvl4pPr>
-      <a:lvl5pPr lvl="4" marR="0" rtl="0" algn="l">
+      <a:lvl5pPr marR="0" lvl="4" algn="l" rtl="0">
         <a:lnSpc>
           <a:spcPct val="100000"/>
         </a:lnSpc>
@@ -5000,7 +5112,7 @@
           <a:srgbClr val="000000"/>
         </a:buClr>
         <a:buFont typeface="Arial"/>
-        <a:defRPr b="0" i="0" sz="1400" u="none" cap="none" strike="noStrike">
+        <a:defRPr sz="1400" b="0" i="0" u="none" strike="noStrike" cap="none">
           <a:solidFill>
             <a:srgbClr val="000000"/>
           </a:solidFill>
@@ -5010,7 +5122,7 @@
           <a:sym typeface="Arial"/>
         </a:defRPr>
       </a:lvl5pPr>
-      <a:lvl6pPr lvl="5" marR="0" rtl="0" algn="l">
+      <a:lvl6pPr marR="0" lvl="5" algn="l" rtl="0">
         <a:lnSpc>
           <a:spcPct val="100000"/>
         </a:lnSpc>
@@ -5024,7 +5136,7 @@
           <a:srgbClr val="000000"/>
         </a:buClr>
         <a:buFont typeface="Arial"/>
-        <a:defRPr b="0" i="0" sz="1400" u="none" cap="none" strike="noStrike">
+        <a:defRPr sz="1400" b="0" i="0" u="none" strike="noStrike" cap="none">
           <a:solidFill>
             <a:srgbClr val="000000"/>
           </a:solidFill>
@@ -5034,7 +5146,7 @@
           <a:sym typeface="Arial"/>
         </a:defRPr>
       </a:lvl6pPr>
-      <a:lvl7pPr lvl="6" marR="0" rtl="0" algn="l">
+      <a:lvl7pPr marR="0" lvl="6" algn="l" rtl="0">
         <a:lnSpc>
           <a:spcPct val="100000"/>
         </a:lnSpc>
@@ -5048,7 +5160,7 @@
           <a:srgbClr val="000000"/>
         </a:buClr>
         <a:buFont typeface="Arial"/>
-        <a:defRPr b="0" i="0" sz="1400" u="none" cap="none" strike="noStrike">
+        <a:defRPr sz="1400" b="0" i="0" u="none" strike="noStrike" cap="none">
           <a:solidFill>
             <a:srgbClr val="000000"/>
           </a:solidFill>
@@ -5058,7 +5170,7 @@
           <a:sym typeface="Arial"/>
         </a:defRPr>
       </a:lvl7pPr>
-      <a:lvl8pPr lvl="7" marR="0" rtl="0" algn="l">
+      <a:lvl8pPr marR="0" lvl="7" algn="l" rtl="0">
         <a:lnSpc>
           <a:spcPct val="100000"/>
         </a:lnSpc>
@@ -5072,7 +5184,7 @@
           <a:srgbClr val="000000"/>
         </a:buClr>
         <a:buFont typeface="Arial"/>
-        <a:defRPr b="0" i="0" sz="1400" u="none" cap="none" strike="noStrike">
+        <a:defRPr sz="1400" b="0" i="0" u="none" strike="noStrike" cap="none">
           <a:solidFill>
             <a:srgbClr val="000000"/>
           </a:solidFill>
@@ -5082,7 +5194,7 @@
           <a:sym typeface="Arial"/>
         </a:defRPr>
       </a:lvl8pPr>
-      <a:lvl9pPr lvl="8" marR="0" rtl="0" algn="l">
+      <a:lvl9pPr marR="0" lvl="8" algn="l" rtl="0">
         <a:lnSpc>
           <a:spcPct val="100000"/>
         </a:lnSpc>
@@ -5096,7 +5208,7 @@
           <a:srgbClr val="000000"/>
         </a:buClr>
         <a:buFont typeface="Arial"/>
-        <a:defRPr b="0" i="0" sz="1400" u="none" cap="none" strike="noStrike">
+        <a:defRPr sz="1400" b="0" i="0" u="none" strike="noStrike" cap="none">
           <a:solidFill>
             <a:srgbClr val="000000"/>
           </a:solidFill>
@@ -5108,7 +5220,7 @@
       </a:lvl9pPr>
     </p:titleStyle>
     <p:bodyStyle>
-      <a:defPPr lvl="0" marR="0" rtl="0" algn="l">
+      <a:defPPr marR="0" lvl="0" algn="l" rtl="0">
         <a:lnSpc>
           <a:spcPct val="100000"/>
         </a:lnSpc>
@@ -5119,7 +5231,7 @@
           <a:spcPts val="0"/>
         </a:spcAft>
       </a:defPPr>
-      <a:lvl1pPr lvl="0" marR="0" rtl="0" algn="l">
+      <a:lvl1pPr marR="0" lvl="0" algn="l" rtl="0">
         <a:lnSpc>
           <a:spcPct val="100000"/>
         </a:lnSpc>
@@ -5133,7 +5245,7 @@
           <a:srgbClr val="000000"/>
         </a:buClr>
         <a:buFont typeface="Arial"/>
-        <a:defRPr b="0" i="0" sz="1400" u="none" cap="none" strike="noStrike">
+        <a:defRPr sz="1400" b="0" i="0" u="none" strike="noStrike" cap="none">
           <a:solidFill>
             <a:srgbClr val="000000"/>
           </a:solidFill>
@@ -5143,7 +5255,7 @@
           <a:sym typeface="Arial"/>
         </a:defRPr>
       </a:lvl1pPr>
-      <a:lvl2pPr lvl="1" marR="0" rtl="0" algn="l">
+      <a:lvl2pPr marR="0" lvl="1" algn="l" rtl="0">
         <a:lnSpc>
           <a:spcPct val="100000"/>
         </a:lnSpc>
@@ -5157,7 +5269,7 @@
           <a:srgbClr val="000000"/>
         </a:buClr>
         <a:buFont typeface="Arial"/>
-        <a:defRPr b="0" i="0" sz="1400" u="none" cap="none" strike="noStrike">
+        <a:defRPr sz="1400" b="0" i="0" u="none" strike="noStrike" cap="none">
           <a:solidFill>
             <a:srgbClr val="000000"/>
           </a:solidFill>
@@ -5167,7 +5279,7 @@
           <a:sym typeface="Arial"/>
         </a:defRPr>
       </a:lvl2pPr>
-      <a:lvl3pPr lvl="2" marR="0" rtl="0" algn="l">
+      <a:lvl3pPr marR="0" lvl="2" algn="l" rtl="0">
         <a:lnSpc>
           <a:spcPct val="100000"/>
         </a:lnSpc>
@@ -5181,7 +5293,7 @@
           <a:srgbClr val="000000"/>
         </a:buClr>
         <a:buFont typeface="Arial"/>
-        <a:defRPr b="0" i="0" sz="1400" u="none" cap="none" strike="noStrike">
+        <a:defRPr sz="1400" b="0" i="0" u="none" strike="noStrike" cap="none">
           <a:solidFill>
             <a:srgbClr val="000000"/>
           </a:solidFill>
@@ -5191,7 +5303,7 @@
           <a:sym typeface="Arial"/>
         </a:defRPr>
       </a:lvl3pPr>
-      <a:lvl4pPr lvl="3" marR="0" rtl="0" algn="l">
+      <a:lvl4pPr marR="0" lvl="3" algn="l" rtl="0">
         <a:lnSpc>
           <a:spcPct val="100000"/>
         </a:lnSpc>
@@ -5205,7 +5317,7 @@
           <a:srgbClr val="000000"/>
         </a:buClr>
         <a:buFont typeface="Arial"/>
-        <a:defRPr b="0" i="0" sz="1400" u="none" cap="none" strike="noStrike">
+        <a:defRPr sz="1400" b="0" i="0" u="none" strike="noStrike" cap="none">
           <a:solidFill>
             <a:srgbClr val="000000"/>
           </a:solidFill>
@@ -5215,7 +5327,7 @@
           <a:sym typeface="Arial"/>
         </a:defRPr>
       </a:lvl4pPr>
-      <a:lvl5pPr lvl="4" marR="0" rtl="0" algn="l">
+      <a:lvl5pPr marR="0" lvl="4" algn="l" rtl="0">
         <a:lnSpc>
           <a:spcPct val="100000"/>
         </a:lnSpc>
@@ -5229,7 +5341,7 @@
           <a:srgbClr val="000000"/>
         </a:buClr>
         <a:buFont typeface="Arial"/>
-        <a:defRPr b="0" i="0" sz="1400" u="none" cap="none" strike="noStrike">
+        <a:defRPr sz="1400" b="0" i="0" u="none" strike="noStrike" cap="none">
           <a:solidFill>
             <a:srgbClr val="000000"/>
           </a:solidFill>
@@ -5239,7 +5351,7 @@
           <a:sym typeface="Arial"/>
         </a:defRPr>
       </a:lvl5pPr>
-      <a:lvl6pPr lvl="5" marR="0" rtl="0" algn="l">
+      <a:lvl6pPr marR="0" lvl="5" algn="l" rtl="0">
         <a:lnSpc>
           <a:spcPct val="100000"/>
         </a:lnSpc>
@@ -5253,7 +5365,7 @@
           <a:srgbClr val="000000"/>
         </a:buClr>
         <a:buFont typeface="Arial"/>
-        <a:defRPr b="0" i="0" sz="1400" u="none" cap="none" strike="noStrike">
+        <a:defRPr sz="1400" b="0" i="0" u="none" strike="noStrike" cap="none">
           <a:solidFill>
             <a:srgbClr val="000000"/>
           </a:solidFill>
@@ -5263,7 +5375,7 @@
           <a:sym typeface="Arial"/>
         </a:defRPr>
       </a:lvl6pPr>
-      <a:lvl7pPr lvl="6" marR="0" rtl="0" algn="l">
+      <a:lvl7pPr marR="0" lvl="6" algn="l" rtl="0">
         <a:lnSpc>
           <a:spcPct val="100000"/>
         </a:lnSpc>
@@ -5277,7 +5389,7 @@
           <a:srgbClr val="000000"/>
         </a:buClr>
         <a:buFont typeface="Arial"/>
-        <a:defRPr b="0" i="0" sz="1400" u="none" cap="none" strike="noStrike">
+        <a:defRPr sz="1400" b="0" i="0" u="none" strike="noStrike" cap="none">
           <a:solidFill>
             <a:srgbClr val="000000"/>
           </a:solidFill>
@@ -5287,7 +5399,7 @@
           <a:sym typeface="Arial"/>
         </a:defRPr>
       </a:lvl7pPr>
-      <a:lvl8pPr lvl="7" marR="0" rtl="0" algn="l">
+      <a:lvl8pPr marR="0" lvl="7" algn="l" rtl="0">
         <a:lnSpc>
           <a:spcPct val="100000"/>
         </a:lnSpc>
@@ -5301,7 +5413,7 @@
           <a:srgbClr val="000000"/>
         </a:buClr>
         <a:buFont typeface="Arial"/>
-        <a:defRPr b="0" i="0" sz="1400" u="none" cap="none" strike="noStrike">
+        <a:defRPr sz="1400" b="0" i="0" u="none" strike="noStrike" cap="none">
           <a:solidFill>
             <a:srgbClr val="000000"/>
           </a:solidFill>
@@ -5311,7 +5423,7 @@
           <a:sym typeface="Arial"/>
         </a:defRPr>
       </a:lvl8pPr>
-      <a:lvl9pPr lvl="8" marR="0" rtl="0" algn="l">
+      <a:lvl9pPr marR="0" lvl="8" algn="l" rtl="0">
         <a:lnSpc>
           <a:spcPct val="100000"/>
         </a:lnSpc>
@@ -5325,7 +5437,7 @@
           <a:srgbClr val="000000"/>
         </a:buClr>
         <a:buFont typeface="Arial"/>
-        <a:defRPr b="0" i="0" sz="1400" u="none" cap="none" strike="noStrike">
+        <a:defRPr sz="1400" b="0" i="0" u="none" strike="noStrike" cap="none">
           <a:solidFill>
             <a:srgbClr val="000000"/>
           </a:solidFill>
@@ -5337,7 +5449,7 @@
       </a:lvl9pPr>
     </p:bodyStyle>
     <p:otherStyle>
-      <a:defPPr lvl="0" marR="0" rtl="0" algn="l">
+      <a:defPPr marR="0" lvl="0" algn="l" rtl="0">
         <a:lnSpc>
           <a:spcPct val="100000"/>
         </a:lnSpc>
@@ -5348,7 +5460,7 @@
           <a:spcPts val="0"/>
         </a:spcAft>
       </a:defPPr>
-      <a:lvl1pPr lvl="0" marR="0" rtl="0" algn="l">
+      <a:lvl1pPr marR="0" lvl="0" algn="l" rtl="0">
         <a:lnSpc>
           <a:spcPct val="100000"/>
         </a:lnSpc>
@@ -5362,7 +5474,7 @@
           <a:srgbClr val="000000"/>
         </a:buClr>
         <a:buFont typeface="Arial"/>
-        <a:defRPr b="0" i="0" sz="1400" u="none" cap="none" strike="noStrike">
+        <a:defRPr sz="1400" b="0" i="0" u="none" strike="noStrike" cap="none">
           <a:solidFill>
             <a:srgbClr val="000000"/>
           </a:solidFill>
@@ -5372,7 +5484,7 @@
           <a:sym typeface="Arial"/>
         </a:defRPr>
       </a:lvl1pPr>
-      <a:lvl2pPr lvl="1" marR="0" rtl="0" algn="l">
+      <a:lvl2pPr marR="0" lvl="1" algn="l" rtl="0">
         <a:lnSpc>
           <a:spcPct val="100000"/>
         </a:lnSpc>
@@ -5386,7 +5498,7 @@
           <a:srgbClr val="000000"/>
         </a:buClr>
         <a:buFont typeface="Arial"/>
-        <a:defRPr b="0" i="0" sz="1400" u="none" cap="none" strike="noStrike">
+        <a:defRPr sz="1400" b="0" i="0" u="none" strike="noStrike" cap="none">
           <a:solidFill>
             <a:srgbClr val="000000"/>
           </a:solidFill>
@@ -5396,7 +5508,7 @@
           <a:sym typeface="Arial"/>
         </a:defRPr>
       </a:lvl2pPr>
-      <a:lvl3pPr lvl="2" marR="0" rtl="0" algn="l">
+      <a:lvl3pPr marR="0" lvl="2" algn="l" rtl="0">
         <a:lnSpc>
           <a:spcPct val="100000"/>
         </a:lnSpc>
@@ -5410,7 +5522,7 @@
           <a:srgbClr val="000000"/>
         </a:buClr>
         <a:buFont typeface="Arial"/>
-        <a:defRPr b="0" i="0" sz="1400" u="none" cap="none" strike="noStrike">
+        <a:defRPr sz="1400" b="0" i="0" u="none" strike="noStrike" cap="none">
           <a:solidFill>
             <a:srgbClr val="000000"/>
           </a:solidFill>
@@ -5420,7 +5532,7 @@
           <a:sym typeface="Arial"/>
         </a:defRPr>
       </a:lvl3pPr>
-      <a:lvl4pPr lvl="3" marR="0" rtl="0" algn="l">
+      <a:lvl4pPr marR="0" lvl="3" algn="l" rtl="0">
         <a:lnSpc>
           <a:spcPct val="100000"/>
         </a:lnSpc>
@@ -5434,7 +5546,7 @@
           <a:srgbClr val="000000"/>
         </a:buClr>
         <a:buFont typeface="Arial"/>
-        <a:defRPr b="0" i="0" sz="1400" u="none" cap="none" strike="noStrike">
+        <a:defRPr sz="1400" b="0" i="0" u="none" strike="noStrike" cap="none">
           <a:solidFill>
             <a:srgbClr val="000000"/>
           </a:solidFill>
@@ -5444,7 +5556,7 @@
           <a:sym typeface="Arial"/>
         </a:defRPr>
       </a:lvl4pPr>
-      <a:lvl5pPr lvl="4" marR="0" rtl="0" algn="l">
+      <a:lvl5pPr marR="0" lvl="4" algn="l" rtl="0">
         <a:lnSpc>
           <a:spcPct val="100000"/>
         </a:lnSpc>
@@ -5458,7 +5570,7 @@
           <a:srgbClr val="000000"/>
         </a:buClr>
         <a:buFont typeface="Arial"/>
-        <a:defRPr b="0" i="0" sz="1400" u="none" cap="none" strike="noStrike">
+        <a:defRPr sz="1400" b="0" i="0" u="none" strike="noStrike" cap="none">
           <a:solidFill>
             <a:srgbClr val="000000"/>
           </a:solidFill>
@@ -5468,7 +5580,7 @@
           <a:sym typeface="Arial"/>
         </a:defRPr>
       </a:lvl5pPr>
-      <a:lvl6pPr lvl="5" marR="0" rtl="0" algn="l">
+      <a:lvl6pPr marR="0" lvl="5" algn="l" rtl="0">
         <a:lnSpc>
           <a:spcPct val="100000"/>
         </a:lnSpc>
@@ -5482,7 +5594,7 @@
           <a:srgbClr val="000000"/>
         </a:buClr>
         <a:buFont typeface="Arial"/>
-        <a:defRPr b="0" i="0" sz="1400" u="none" cap="none" strike="noStrike">
+        <a:defRPr sz="1400" b="0" i="0" u="none" strike="noStrike" cap="none">
           <a:solidFill>
             <a:srgbClr val="000000"/>
           </a:solidFill>
@@ -5492,7 +5604,7 @@
           <a:sym typeface="Arial"/>
         </a:defRPr>
       </a:lvl6pPr>
-      <a:lvl7pPr lvl="6" marR="0" rtl="0" algn="l">
+      <a:lvl7pPr marR="0" lvl="6" algn="l" rtl="0">
         <a:lnSpc>
           <a:spcPct val="100000"/>
         </a:lnSpc>
@@ -5506,7 +5618,7 @@
           <a:srgbClr val="000000"/>
         </a:buClr>
         <a:buFont typeface="Arial"/>
-        <a:defRPr b="0" i="0" sz="1400" u="none" cap="none" strike="noStrike">
+        <a:defRPr sz="1400" b="0" i="0" u="none" strike="noStrike" cap="none">
           <a:solidFill>
             <a:srgbClr val="000000"/>
           </a:solidFill>
@@ -5516,7 +5628,7 @@
           <a:sym typeface="Arial"/>
         </a:defRPr>
       </a:lvl7pPr>
-      <a:lvl8pPr lvl="7" marR="0" rtl="0" algn="l">
+      <a:lvl8pPr marR="0" lvl="7" algn="l" rtl="0">
         <a:lnSpc>
           <a:spcPct val="100000"/>
         </a:lnSpc>
@@ -5530,7 +5642,7 @@
           <a:srgbClr val="000000"/>
         </a:buClr>
         <a:buFont typeface="Arial"/>
-        <a:defRPr b="0" i="0" sz="1400" u="none" cap="none" strike="noStrike">
+        <a:defRPr sz="1400" b="0" i="0" u="none" strike="noStrike" cap="none">
           <a:solidFill>
             <a:srgbClr val="000000"/>
           </a:solidFill>
@@ -5540,7 +5652,7 @@
           <a:sym typeface="Arial"/>
         </a:defRPr>
       </a:lvl8pPr>
-      <a:lvl9pPr lvl="8" marR="0" rtl="0" algn="l">
+      <a:lvl9pPr marR="0" lvl="8" algn="l" rtl="0">
         <a:lnSpc>
           <a:spcPct val="100000"/>
         </a:lnSpc>
@@ -5554,7 +5666,7 @@
           <a:srgbClr val="000000"/>
         </a:buClr>
         <a:buFont typeface="Arial"/>
-        <a:defRPr b="0" i="0" sz="1400" u="none" cap="none" strike="noStrike">
+        <a:defRPr sz="1400" b="0" i="0" u="none" strike="noStrike" cap="none">
           <a:solidFill>
             <a:srgbClr val="000000"/>
           </a:solidFill>
@@ -5570,7 +5682,7 @@
 </file>
 
 <file path=ppt/slides/slide1.xml><?xml version="1.0" encoding="utf-8"?>
-<p:sld xmlns:a="http://schemas.openxmlformats.org/drawingml/2006/main" xmlns:p="http://schemas.openxmlformats.org/presentationml/2006/main" xmlns:r="http://schemas.openxmlformats.org/officeDocument/2006/relationships">
+<p:sld xmlns:a="http://schemas.openxmlformats.org/drawingml/2006/main" xmlns:r="http://schemas.openxmlformats.org/officeDocument/2006/relationships" xmlns:p="http://schemas.openxmlformats.org/presentationml/2006/main">
   <p:cSld>
     <p:bg>
       <p:bgPr>
@@ -5586,7 +5698,14 @@
         <p:cNvGrpSpPr/>
         <p:nvPr/>
       </p:nvGrpSpPr>
-      <p:grpSpPr/>
+      <p:grpSpPr>
+        <a:xfrm>
+          <a:off x="0" y="0"/>
+          <a:ext cx="0" cy="0"/>
+          <a:chOff x="0" y="0"/>
+          <a:chExt cx="0" cy="0"/>
+        </a:xfrm>
+      </p:grpSpPr>
       <p:sp>
         <p:nvSpPr>
           <p:cNvPr id="2" name="Rectangle 1"/>
@@ -5628,6 +5747,7 @@
           <a:lstStyle/>
           <a:p>
             <a:pPr algn="ctr"/>
+            <a:endParaRPr/>
           </a:p>
         </p:txBody>
       </p:sp>
@@ -5648,7 +5768,7 @@
           <a:noFill/>
         </p:spPr>
         <p:txBody>
-          <a:bodyPr wrap="square" anchor="t" lIns="0" rIns="0" tIns="0" bIns="0">
+          <a:bodyPr wrap="square" lIns="0" tIns="0" rIns="0" bIns="0" anchor="t">
             <a:noAutofit/>
           </a:bodyPr>
           <a:lstStyle/>
@@ -5789,7 +5909,7 @@
 </file>
 
 <file path=ppt/slides/slide10.xml><?xml version="1.0" encoding="utf-8"?>
-<p:sld xmlns:a="http://schemas.openxmlformats.org/drawingml/2006/main" xmlns:p="http://schemas.openxmlformats.org/presentationml/2006/main" xmlns:r="http://schemas.openxmlformats.org/officeDocument/2006/relationships">
+<p:sld xmlns:a="http://schemas.openxmlformats.org/drawingml/2006/main" xmlns:r="http://schemas.openxmlformats.org/officeDocument/2006/relationships" xmlns:p="http://schemas.openxmlformats.org/presentationml/2006/main">
   <p:cSld>
     <p:bg>
       <p:bgPr>
@@ -5805,7 +5925,14 @@
         <p:cNvGrpSpPr/>
         <p:nvPr/>
       </p:nvGrpSpPr>
-      <p:grpSpPr/>
+      <p:grpSpPr>
+        <a:xfrm>
+          <a:off x="0" y="0"/>
+          <a:ext cx="0" cy="0"/>
+          <a:chOff x="0" y="0"/>
+          <a:chExt cx="0" cy="0"/>
+        </a:xfrm>
+      </p:grpSpPr>
       <p:sp>
         <p:nvSpPr>
           <p:cNvPr id="2" name="TextBox 1"/>
@@ -5823,7 +5950,7 @@
           <a:noFill/>
         </p:spPr>
         <p:txBody>
-          <a:bodyPr wrap="square" anchor="t" lIns="0" rIns="0" tIns="0" bIns="0">
+          <a:bodyPr wrap="square" lIns="0" tIns="0" rIns="0" bIns="0" anchor="t">
             <a:noAutofit/>
           </a:bodyPr>
           <a:lstStyle/>
@@ -5867,7 +5994,7 @@
           <a:noFill/>
         </p:spPr>
         <p:txBody>
-          <a:bodyPr wrap="square" anchor="ctr" lIns="0" rIns="0" tIns="0" bIns="0">
+          <a:bodyPr wrap="square" lIns="0" tIns="0" rIns="0" bIns="0" anchor="ctr">
             <a:noAutofit/>
           </a:bodyPr>
           <a:lstStyle/>
@@ -5935,6 +6062,7 @@
           <a:lstStyle/>
           <a:p>
             <a:pPr algn="ctr"/>
+            <a:endParaRPr/>
           </a:p>
         </p:txBody>
       </p:sp>
@@ -5955,7 +6083,7 @@
           <a:noFill/>
         </p:spPr>
         <p:txBody>
-          <a:bodyPr wrap="square" anchor="t" lIns="0" rIns="0" tIns="0" bIns="0">
+          <a:bodyPr wrap="square" lIns="0" tIns="0" rIns="0" bIns="0" anchor="t">
             <a:noAutofit/>
           </a:bodyPr>
           <a:lstStyle/>
@@ -6023,7 +6151,7 @@
           <a:noFill/>
         </p:spPr>
         <p:txBody>
-          <a:bodyPr wrap="square" anchor="t" lIns="0" rIns="0" tIns="0" bIns="0">
+          <a:bodyPr wrap="square" lIns="0" tIns="0" rIns="0" bIns="0" anchor="t">
             <a:noAutofit/>
           </a:bodyPr>
           <a:lstStyle/>
@@ -6091,7 +6219,7 @@
           <a:noFill/>
         </p:spPr>
         <p:txBody>
-          <a:bodyPr wrap="square" anchor="t" lIns="0" rIns="0" tIns="0" bIns="0">
+          <a:bodyPr wrap="square" lIns="0" tIns="0" rIns="0" bIns="0" anchor="t">
             <a:noAutofit/>
           </a:bodyPr>
           <a:lstStyle/>
@@ -6127,7 +6255,7 @@
 </file>
 
 <file path=ppt/slides/slide11.xml><?xml version="1.0" encoding="utf-8"?>
-<p:sld xmlns:a="http://schemas.openxmlformats.org/drawingml/2006/main" xmlns:p="http://schemas.openxmlformats.org/presentationml/2006/main" xmlns:r="http://schemas.openxmlformats.org/officeDocument/2006/relationships">
+<p:sld xmlns:a="http://schemas.openxmlformats.org/drawingml/2006/main" xmlns:r="http://schemas.openxmlformats.org/officeDocument/2006/relationships" xmlns:p="http://schemas.openxmlformats.org/presentationml/2006/main">
   <p:cSld>
     <p:bg>
       <p:bgPr>
@@ -6143,7 +6271,14 @@
         <p:cNvGrpSpPr/>
         <p:nvPr/>
       </p:nvGrpSpPr>
-      <p:grpSpPr/>
+      <p:grpSpPr>
+        <a:xfrm>
+          <a:off x="0" y="0"/>
+          <a:ext cx="0" cy="0"/>
+          <a:chOff x="0" y="0"/>
+          <a:chExt cx="0" cy="0"/>
+        </a:xfrm>
+      </p:grpSpPr>
       <p:sp>
         <p:nvSpPr>
           <p:cNvPr id="2" name="TextBox 1"/>
@@ -6161,7 +6296,7 @@
           <a:noFill/>
         </p:spPr>
         <p:txBody>
-          <a:bodyPr wrap="square" anchor="t" lIns="0" rIns="0" tIns="0" bIns="0">
+          <a:bodyPr wrap="square" lIns="0" tIns="0" rIns="0" bIns="0" anchor="t">
             <a:noAutofit/>
           </a:bodyPr>
           <a:lstStyle/>
@@ -6205,7 +6340,7 @@
           <a:noFill/>
         </p:spPr>
         <p:txBody>
-          <a:bodyPr wrap="square" anchor="ctr" lIns="0" rIns="0" tIns="0" bIns="0">
+          <a:bodyPr wrap="square" lIns="0" tIns="0" rIns="0" bIns="0" anchor="ctr">
             <a:noAutofit/>
           </a:bodyPr>
           <a:lstStyle/>
@@ -6273,6 +6408,7 @@
           <a:lstStyle/>
           <a:p>
             <a:pPr algn="ctr"/>
+            <a:endParaRPr/>
           </a:p>
         </p:txBody>
       </p:sp>
@@ -6293,7 +6429,7 @@
           <a:noFill/>
         </p:spPr>
         <p:txBody>
-          <a:bodyPr wrap="square" anchor="t" lIns="0" rIns="0" tIns="0" bIns="0">
+          <a:bodyPr wrap="square" lIns="0" tIns="0" rIns="0" bIns="0" anchor="t">
             <a:noAutofit/>
           </a:bodyPr>
           <a:lstStyle/>
@@ -6353,7 +6489,7 @@
 </file>
 
 <file path=ppt/slides/slide12.xml><?xml version="1.0" encoding="utf-8"?>
-<p:sld xmlns:a="http://schemas.openxmlformats.org/drawingml/2006/main" xmlns:p="http://schemas.openxmlformats.org/presentationml/2006/main" xmlns:r="http://schemas.openxmlformats.org/officeDocument/2006/relationships">
+<p:sld xmlns:a="http://schemas.openxmlformats.org/drawingml/2006/main" xmlns:r="http://schemas.openxmlformats.org/officeDocument/2006/relationships" xmlns:p="http://schemas.openxmlformats.org/presentationml/2006/main">
   <p:cSld>
     <p:bg>
       <p:bgPr>
@@ -6369,7 +6505,14 @@
         <p:cNvGrpSpPr/>
         <p:nvPr/>
       </p:nvGrpSpPr>
-      <p:grpSpPr/>
+      <p:grpSpPr>
+        <a:xfrm>
+          <a:off x="0" y="0"/>
+          <a:ext cx="0" cy="0"/>
+          <a:chOff x="0" y="0"/>
+          <a:chExt cx="0" cy="0"/>
+        </a:xfrm>
+      </p:grpSpPr>
       <p:sp>
         <p:nvSpPr>
           <p:cNvPr id="2" name="TextBox 1"/>
@@ -6387,7 +6530,7 @@
           <a:noFill/>
         </p:spPr>
         <p:txBody>
-          <a:bodyPr wrap="square" anchor="ctr" lIns="0" rIns="0" tIns="0" bIns="0">
+          <a:bodyPr wrap="square" lIns="0" tIns="0" rIns="0" bIns="0" anchor="ctr">
             <a:noAutofit/>
           </a:bodyPr>
           <a:lstStyle/>
@@ -6455,6 +6598,7 @@
           <a:lstStyle/>
           <a:p>
             <a:pPr algn="ctr"/>
+            <a:endParaRPr/>
           </a:p>
         </p:txBody>
       </p:sp>
@@ -6475,7 +6619,7 @@
           <a:noFill/>
         </p:spPr>
         <p:txBody>
-          <a:bodyPr wrap="square" anchor="t" lIns="0" rIns="0" tIns="0" bIns="0">
+          <a:bodyPr wrap="square" lIns="0" tIns="0" rIns="0" bIns="0" anchor="t">
             <a:noAutofit/>
           </a:bodyPr>
           <a:lstStyle/>
@@ -6519,7 +6663,7 @@
           <a:noFill/>
         </p:spPr>
         <p:txBody>
-          <a:bodyPr wrap="square" anchor="ctr" lIns="0" rIns="0" tIns="0" bIns="0">
+          <a:bodyPr wrap="square" lIns="0" tIns="0" rIns="0" bIns="0" anchor="ctr">
             <a:noAutofit/>
           </a:bodyPr>
           <a:lstStyle/>
@@ -6591,6 +6735,7 @@
           <a:lstStyle/>
           <a:p>
             <a:pPr algn="ctr"/>
+            <a:endParaRPr/>
           </a:p>
         </p:txBody>
       </p:sp>
@@ -6635,6 +6780,7 @@
           <a:lstStyle/>
           <a:p>
             <a:pPr algn="ctr"/>
+            <a:endParaRPr/>
           </a:p>
         </p:txBody>
       </p:sp>
@@ -6655,7 +6801,7 @@
           <a:noFill/>
         </p:spPr>
         <p:txBody>
-          <a:bodyPr wrap="square" anchor="ctr" lIns="0" rIns="0" tIns="0" bIns="0">
+          <a:bodyPr wrap="square" lIns="0" tIns="0" rIns="0" bIns="0" anchor="ctr">
             <a:noAutofit/>
           </a:bodyPr>
           <a:lstStyle/>
@@ -6699,7 +6845,7 @@
           <a:noFill/>
         </p:spPr>
         <p:txBody>
-          <a:bodyPr wrap="square" anchor="ctr" lIns="0" rIns="0" tIns="0" bIns="0">
+          <a:bodyPr wrap="square" lIns="0" tIns="0" rIns="0" bIns="0" anchor="ctr">
             <a:noAutofit/>
           </a:bodyPr>
           <a:lstStyle/>
@@ -6764,7 +6910,7 @@
           <a:noFill/>
         </p:spPr>
         <p:txBody>
-          <a:bodyPr wrap="square" anchor="ctr" lIns="0" rIns="0" tIns="0" bIns="0">
+          <a:bodyPr wrap="square" lIns="0" tIns="0" rIns="0" bIns="0" anchor="ctr">
             <a:noAutofit/>
           </a:bodyPr>
           <a:lstStyle/>
@@ -6836,6 +6982,7 @@
           <a:lstStyle/>
           <a:p>
             <a:pPr algn="ctr"/>
+            <a:endParaRPr/>
           </a:p>
         </p:txBody>
       </p:sp>
@@ -6880,6 +7027,7 @@
           <a:lstStyle/>
           <a:p>
             <a:pPr algn="ctr"/>
+            <a:endParaRPr/>
           </a:p>
         </p:txBody>
       </p:sp>
@@ -6900,7 +7048,7 @@
           <a:noFill/>
         </p:spPr>
         <p:txBody>
-          <a:bodyPr wrap="square" anchor="ctr" lIns="0" rIns="0" tIns="0" bIns="0">
+          <a:bodyPr wrap="square" lIns="0" tIns="0" rIns="0" bIns="0" anchor="ctr">
             <a:noAutofit/>
           </a:bodyPr>
           <a:lstStyle/>
@@ -6944,7 +7092,7 @@
           <a:noFill/>
         </p:spPr>
         <p:txBody>
-          <a:bodyPr wrap="square" anchor="ctr" lIns="0" rIns="0" tIns="0" bIns="0">
+          <a:bodyPr wrap="square" lIns="0" tIns="0" rIns="0" bIns="0" anchor="ctr">
             <a:noAutofit/>
           </a:bodyPr>
           <a:lstStyle/>
@@ -7009,7 +7157,7 @@
           <a:noFill/>
         </p:spPr>
         <p:txBody>
-          <a:bodyPr wrap="square" anchor="ctr" lIns="0" rIns="0" tIns="0" bIns="0">
+          <a:bodyPr wrap="square" lIns="0" tIns="0" rIns="0" bIns="0" anchor="ctr">
             <a:noAutofit/>
           </a:bodyPr>
           <a:lstStyle/>
@@ -7081,6 +7229,7 @@
           <a:lstStyle/>
           <a:p>
             <a:pPr algn="ctr"/>
+            <a:endParaRPr/>
           </a:p>
         </p:txBody>
       </p:sp>
@@ -7125,6 +7274,7 @@
           <a:lstStyle/>
           <a:p>
             <a:pPr algn="ctr"/>
+            <a:endParaRPr/>
           </a:p>
         </p:txBody>
       </p:sp>
@@ -7145,7 +7295,7 @@
           <a:noFill/>
         </p:spPr>
         <p:txBody>
-          <a:bodyPr wrap="square" anchor="ctr" lIns="0" rIns="0" tIns="0" bIns="0">
+          <a:bodyPr wrap="square" lIns="0" tIns="0" rIns="0" bIns="0" anchor="ctr">
             <a:noAutofit/>
           </a:bodyPr>
           <a:lstStyle/>
@@ -7189,7 +7339,7 @@
           <a:noFill/>
         </p:spPr>
         <p:txBody>
-          <a:bodyPr wrap="square" anchor="ctr" lIns="0" rIns="0" tIns="0" bIns="0">
+          <a:bodyPr wrap="square" lIns="0" tIns="0" rIns="0" bIns="0" anchor="ctr">
             <a:noAutofit/>
           </a:bodyPr>
           <a:lstStyle/>
@@ -7254,7 +7404,7 @@
           <a:noFill/>
         </p:spPr>
         <p:txBody>
-          <a:bodyPr wrap="square" anchor="ctr" lIns="0" rIns="0" tIns="0" bIns="0">
+          <a:bodyPr wrap="square" lIns="0" tIns="0" rIns="0" bIns="0" anchor="ctr">
             <a:noAutofit/>
           </a:bodyPr>
           <a:lstStyle/>
@@ -7326,6 +7476,7 @@
           <a:lstStyle/>
           <a:p>
             <a:pPr algn="ctr"/>
+            <a:endParaRPr/>
           </a:p>
         </p:txBody>
       </p:sp>
@@ -7370,6 +7521,7 @@
           <a:lstStyle/>
           <a:p>
             <a:pPr algn="ctr"/>
+            <a:endParaRPr/>
           </a:p>
         </p:txBody>
       </p:sp>
@@ -7390,7 +7542,7 @@
           <a:noFill/>
         </p:spPr>
         <p:txBody>
-          <a:bodyPr wrap="square" anchor="ctr" lIns="0" rIns="0" tIns="0" bIns="0">
+          <a:bodyPr wrap="square" lIns="0" tIns="0" rIns="0" bIns="0" anchor="ctr">
             <a:noAutofit/>
           </a:bodyPr>
           <a:lstStyle/>
@@ -7434,7 +7586,7 @@
           <a:noFill/>
         </p:spPr>
         <p:txBody>
-          <a:bodyPr wrap="square" anchor="ctr" lIns="0" rIns="0" tIns="0" bIns="0">
+          <a:bodyPr wrap="square" lIns="0" tIns="0" rIns="0" bIns="0" anchor="ctr">
             <a:noAutofit/>
           </a:bodyPr>
           <a:lstStyle/>
@@ -7499,7 +7651,7 @@
           <a:noFill/>
         </p:spPr>
         <p:txBody>
-          <a:bodyPr wrap="square" anchor="ctr" lIns="0" rIns="0" tIns="0" bIns="0">
+          <a:bodyPr wrap="square" lIns="0" tIns="0" rIns="0" bIns="0" anchor="ctr">
             <a:noAutofit/>
           </a:bodyPr>
           <a:lstStyle/>
@@ -7571,6 +7723,7 @@
           <a:lstStyle/>
           <a:p>
             <a:pPr algn="ctr"/>
+            <a:endParaRPr/>
           </a:p>
         </p:txBody>
       </p:sp>
@@ -7615,6 +7768,7 @@
           <a:lstStyle/>
           <a:p>
             <a:pPr algn="ctr"/>
+            <a:endParaRPr/>
           </a:p>
         </p:txBody>
       </p:sp>
@@ -7635,7 +7789,7 @@
           <a:noFill/>
         </p:spPr>
         <p:txBody>
-          <a:bodyPr wrap="square" anchor="ctr" lIns="0" rIns="0" tIns="0" bIns="0">
+          <a:bodyPr wrap="square" lIns="0" tIns="0" rIns="0" bIns="0" anchor="ctr">
             <a:noAutofit/>
           </a:bodyPr>
           <a:lstStyle/>
@@ -7679,7 +7833,7 @@
           <a:noFill/>
         </p:spPr>
         <p:txBody>
-          <a:bodyPr wrap="square" anchor="ctr" lIns="0" rIns="0" tIns="0" bIns="0">
+          <a:bodyPr wrap="square" lIns="0" tIns="0" rIns="0" bIns="0" anchor="ctr">
             <a:noAutofit/>
           </a:bodyPr>
           <a:lstStyle/>
@@ -7736,7 +7890,7 @@
 </file>
 
 <file path=ppt/slides/slide13.xml><?xml version="1.0" encoding="utf-8"?>
-<p:sld xmlns:a="http://schemas.openxmlformats.org/drawingml/2006/main" xmlns:p="http://schemas.openxmlformats.org/presentationml/2006/main" xmlns:r="http://schemas.openxmlformats.org/officeDocument/2006/relationships">
+<p:sld xmlns:a="http://schemas.openxmlformats.org/drawingml/2006/main" xmlns:r="http://schemas.openxmlformats.org/officeDocument/2006/relationships" xmlns:p="http://schemas.openxmlformats.org/presentationml/2006/main">
   <p:cSld>
     <p:bg>
       <p:bgPr>
@@ -7752,7 +7906,14 @@
         <p:cNvGrpSpPr/>
         <p:nvPr/>
       </p:nvGrpSpPr>
-      <p:grpSpPr/>
+      <p:grpSpPr>
+        <a:xfrm>
+          <a:off x="0" y="0"/>
+          <a:ext cx="0" cy="0"/>
+          <a:chOff x="0" y="0"/>
+          <a:chExt cx="0" cy="0"/>
+        </a:xfrm>
+      </p:grpSpPr>
       <p:sp>
         <p:nvSpPr>
           <p:cNvPr id="2" name="TextBox 1"/>
@@ -7770,7 +7931,7 @@
           <a:noFill/>
         </p:spPr>
         <p:txBody>
-          <a:bodyPr wrap="square" anchor="ctr" lIns="0" rIns="0" tIns="0" bIns="0">
+          <a:bodyPr wrap="square" lIns="0" tIns="0" rIns="0" bIns="0" anchor="ctr">
             <a:noAutofit/>
           </a:bodyPr>
           <a:lstStyle/>
@@ -7838,6 +7999,7 @@
           <a:lstStyle/>
           <a:p>
             <a:pPr algn="ctr"/>
+            <a:endParaRPr/>
           </a:p>
         </p:txBody>
       </p:sp>
@@ -7858,7 +8020,7 @@
           <a:noFill/>
         </p:spPr>
         <p:txBody>
-          <a:bodyPr wrap="square" anchor="t" lIns="0" rIns="0" tIns="0" bIns="0">
+          <a:bodyPr wrap="square" lIns="0" tIns="0" rIns="0" bIns="0" anchor="t">
             <a:noAutofit/>
           </a:bodyPr>
           <a:lstStyle/>
@@ -7902,7 +8064,7 @@
           <a:noFill/>
         </p:spPr>
         <p:txBody>
-          <a:bodyPr wrap="square" anchor="ctr" lIns="0" rIns="0" tIns="0" bIns="0">
+          <a:bodyPr wrap="square" lIns="0" tIns="0" rIns="0" bIns="0" anchor="ctr">
             <a:noAutofit/>
           </a:bodyPr>
           <a:lstStyle/>
@@ -7974,6 +8136,7 @@
           <a:lstStyle/>
           <a:p>
             <a:pPr algn="ctr"/>
+            <a:endParaRPr/>
           </a:p>
         </p:txBody>
       </p:sp>
@@ -7994,7 +8157,7 @@
           <a:noFill/>
         </p:spPr>
         <p:txBody>
-          <a:bodyPr wrap="square" anchor="ctr" lIns="0" rIns="0" tIns="0" bIns="0">
+          <a:bodyPr wrap="square" lIns="0" tIns="0" rIns="0" bIns="0" anchor="ctr">
             <a:noAutofit/>
           </a:bodyPr>
           <a:lstStyle/>
@@ -8087,6 +8250,7 @@
           <a:lstStyle/>
           <a:p>
             <a:pPr algn="ctr"/>
+            <a:endParaRPr/>
           </a:p>
         </p:txBody>
       </p:sp>
@@ -8107,7 +8271,7 @@
           <a:noFill/>
         </p:spPr>
         <p:txBody>
-          <a:bodyPr wrap="square" anchor="ctr" lIns="0" rIns="0" tIns="0" bIns="0">
+          <a:bodyPr wrap="square" lIns="0" tIns="0" rIns="0" bIns="0" anchor="ctr">
             <a:noAutofit/>
           </a:bodyPr>
           <a:lstStyle/>
@@ -8200,6 +8364,7 @@
           <a:lstStyle/>
           <a:p>
             <a:pPr algn="ctr"/>
+            <a:endParaRPr/>
           </a:p>
         </p:txBody>
       </p:sp>
@@ -8220,7 +8385,7 @@
           <a:noFill/>
         </p:spPr>
         <p:txBody>
-          <a:bodyPr wrap="square" anchor="ctr" lIns="0" rIns="0" tIns="0" bIns="0">
+          <a:bodyPr wrap="square" lIns="0" tIns="0" rIns="0" bIns="0" anchor="ctr">
             <a:noAutofit/>
           </a:bodyPr>
           <a:lstStyle/>
@@ -8313,6 +8478,7 @@
           <a:lstStyle/>
           <a:p>
             <a:pPr algn="ctr"/>
+            <a:endParaRPr/>
           </a:p>
         </p:txBody>
       </p:sp>
@@ -8333,7 +8499,7 @@
           <a:noFill/>
         </p:spPr>
         <p:txBody>
-          <a:bodyPr wrap="square" anchor="ctr" lIns="0" rIns="0" tIns="0" bIns="0">
+          <a:bodyPr wrap="square" lIns="0" tIns="0" rIns="0" bIns="0" anchor="ctr">
             <a:noAutofit/>
           </a:bodyPr>
           <a:lstStyle/>
@@ -8390,7 +8556,7 @@
 </file>
 
 <file path=ppt/slides/slide14.xml><?xml version="1.0" encoding="utf-8"?>
-<p:sld xmlns:a="http://schemas.openxmlformats.org/drawingml/2006/main" xmlns:p="http://schemas.openxmlformats.org/presentationml/2006/main" xmlns:r="http://schemas.openxmlformats.org/officeDocument/2006/relationships">
+<p:sld xmlns:a="http://schemas.openxmlformats.org/drawingml/2006/main" xmlns:r="http://schemas.openxmlformats.org/officeDocument/2006/relationships" xmlns:p="http://schemas.openxmlformats.org/presentationml/2006/main">
   <p:cSld>
     <p:bg>
       <p:bgPr>
@@ -8406,7 +8572,14 @@
         <p:cNvGrpSpPr/>
         <p:nvPr/>
       </p:nvGrpSpPr>
-      <p:grpSpPr/>
+      <p:grpSpPr>
+        <a:xfrm>
+          <a:off x="0" y="0"/>
+          <a:ext cx="0" cy="0"/>
+          <a:chOff x="0" y="0"/>
+          <a:chExt cx="0" cy="0"/>
+        </a:xfrm>
+      </p:grpSpPr>
       <p:sp>
         <p:nvSpPr>
           <p:cNvPr id="2" name="TextBox 1"/>
@@ -8424,7 +8597,7 @@
           <a:noFill/>
         </p:spPr>
         <p:txBody>
-          <a:bodyPr wrap="square" anchor="ctr" lIns="0" rIns="0" tIns="0" bIns="0">
+          <a:bodyPr wrap="square" lIns="0" tIns="0" rIns="0" bIns="0" anchor="ctr">
             <a:noAutofit/>
           </a:bodyPr>
           <a:lstStyle/>
@@ -8492,6 +8665,7 @@
           <a:lstStyle/>
           <a:p>
             <a:pPr algn="ctr"/>
+            <a:endParaRPr/>
           </a:p>
         </p:txBody>
       </p:sp>
@@ -8512,7 +8686,7 @@
           <a:noFill/>
         </p:spPr>
         <p:txBody>
-          <a:bodyPr wrap="square" anchor="t" lIns="0" rIns="0" tIns="0" bIns="0">
+          <a:bodyPr wrap="square" lIns="0" tIns="0" rIns="0" bIns="0" anchor="t">
             <a:noAutofit/>
           </a:bodyPr>
           <a:lstStyle/>
@@ -8556,7 +8730,7 @@
           <a:noFill/>
         </p:spPr>
         <p:txBody>
-          <a:bodyPr wrap="square" anchor="ctr" lIns="0" rIns="0" tIns="0" bIns="0">
+          <a:bodyPr wrap="square" lIns="0" tIns="0" rIns="0" bIns="0" anchor="ctr">
             <a:noAutofit/>
           </a:bodyPr>
           <a:lstStyle/>
@@ -8628,6 +8802,7 @@
           <a:lstStyle/>
           <a:p>
             <a:pPr algn="ctr"/>
+            <a:endParaRPr/>
           </a:p>
         </p:txBody>
       </p:sp>
@@ -8648,7 +8823,7 @@
           <a:noFill/>
         </p:spPr>
         <p:txBody>
-          <a:bodyPr wrap="square" anchor="ctr" lIns="0" rIns="0" tIns="0" bIns="0">
+          <a:bodyPr wrap="square" lIns="0" tIns="0" rIns="0" bIns="0" anchor="ctr">
             <a:noAutofit/>
           </a:bodyPr>
           <a:lstStyle/>
@@ -8741,6 +8916,7 @@
           <a:lstStyle/>
           <a:p>
             <a:pPr algn="ctr"/>
+            <a:endParaRPr/>
           </a:p>
         </p:txBody>
       </p:sp>
@@ -8761,7 +8937,7 @@
           <a:noFill/>
         </p:spPr>
         <p:txBody>
-          <a:bodyPr wrap="square" anchor="ctr" lIns="0" rIns="0" tIns="0" bIns="0">
+          <a:bodyPr wrap="square" lIns="0" tIns="0" rIns="0" bIns="0" anchor="ctr">
             <a:noAutofit/>
           </a:bodyPr>
           <a:lstStyle/>
@@ -8783,8 +8959,14 @@
               </a:defRPr>
             </a:pPr>
             <a:r>
-              <a:t>HSV colour</a:t>
-            </a:r>
+              <a:rPr dirty="0"/>
+              <a:t>HSV </a:t>
+            </a:r>
+            <a:r>
+              <a:rPr dirty="0" err="1"/>
+              <a:t>colour</a:t>
+            </a:r>
+            <a:endParaRPr dirty="0"/>
           </a:p>
           <a:p>
             <a:pPr algn="l">
@@ -8804,7 +8986,24 @@
               </a:defRPr>
             </a:pPr>
             <a:r>
-              <a:t>A colour space that isolates one ball colour despite light.</a:t>
+              <a:rPr dirty="0"/>
+              <a:t>A </a:t>
+            </a:r>
+            <a:r>
+              <a:rPr dirty="0" err="1"/>
+              <a:t>colour</a:t>
+            </a:r>
+            <a:r>
+              <a:rPr dirty="0"/>
+              <a:t> space that isolates one ball </a:t>
+            </a:r>
+            <a:r>
+              <a:rPr dirty="0" err="1"/>
+              <a:t>colour</a:t>
+            </a:r>
+            <a:r>
+              <a:rPr dirty="0"/>
+              <a:t> despite light.</a:t>
             </a:r>
           </a:p>
         </p:txBody>
@@ -8854,6 +9053,7 @@
           <a:lstStyle/>
           <a:p>
             <a:pPr algn="ctr"/>
+            <a:endParaRPr/>
           </a:p>
         </p:txBody>
       </p:sp>
@@ -8874,7 +9074,7 @@
           <a:noFill/>
         </p:spPr>
         <p:txBody>
-          <a:bodyPr wrap="square" anchor="ctr" lIns="0" rIns="0" tIns="0" bIns="0">
+          <a:bodyPr wrap="square" lIns="0" tIns="0" rIns="0" bIns="0" anchor="ctr">
             <a:noAutofit/>
           </a:bodyPr>
           <a:lstStyle/>
@@ -8896,6 +9096,7 @@
               </a:defRPr>
             </a:pPr>
             <a:r>
+              <a:rPr dirty="0"/>
               <a:t>YOLO</a:t>
             </a:r>
           </a:p>
@@ -8917,6 +9118,7 @@
               </a:defRPr>
             </a:pPr>
             <a:r>
+              <a:rPr dirty="0"/>
               <a:t>A trained network that spots the cricket ball in a frame.</a:t>
             </a:r>
           </a:p>
@@ -8967,6 +9169,7 @@
           <a:lstStyle/>
           <a:p>
             <a:pPr algn="ctr"/>
+            <a:endParaRPr/>
           </a:p>
         </p:txBody>
       </p:sp>
@@ -8987,7 +9190,7 @@
           <a:noFill/>
         </p:spPr>
         <p:txBody>
-          <a:bodyPr wrap="square" anchor="ctr" lIns="0" rIns="0" tIns="0" bIns="0">
+          <a:bodyPr wrap="square" lIns="0" tIns="0" rIns="0" bIns="0" anchor="ctr">
             <a:noAutofit/>
           </a:bodyPr>
           <a:lstStyle/>
@@ -9009,6 +9212,7 @@
               </a:defRPr>
             </a:pPr>
             <a:r>
+              <a:rPr dirty="0"/>
               <a:t>Depth-from-size</a:t>
             </a:r>
           </a:p>
@@ -9030,6 +9234,7 @@
               </a:defRPr>
             </a:pPr>
             <a:r>
+              <a:rPr dirty="0"/>
               <a:t>Smaller ball looks farther; recovers 3D from one camera.</a:t>
             </a:r>
           </a:p>
@@ -9044,7 +9249,7 @@
 </file>
 
 <file path=ppt/slides/slide15.xml><?xml version="1.0" encoding="utf-8"?>
-<p:sld xmlns:a="http://schemas.openxmlformats.org/drawingml/2006/main" xmlns:p="http://schemas.openxmlformats.org/presentationml/2006/main" xmlns:r="http://schemas.openxmlformats.org/officeDocument/2006/relationships">
+<p:sld xmlns:a="http://schemas.openxmlformats.org/drawingml/2006/main" xmlns:r="http://schemas.openxmlformats.org/officeDocument/2006/relationships" xmlns:p="http://schemas.openxmlformats.org/presentationml/2006/main">
   <p:cSld>
     <p:bg>
       <p:bgPr>
@@ -9060,7 +9265,14 @@
         <p:cNvGrpSpPr/>
         <p:nvPr/>
       </p:nvGrpSpPr>
-      <p:grpSpPr/>
+      <p:grpSpPr>
+        <a:xfrm>
+          <a:off x="0" y="0"/>
+          <a:ext cx="0" cy="0"/>
+          <a:chOff x="0" y="0"/>
+          <a:chExt cx="0" cy="0"/>
+        </a:xfrm>
+      </p:grpSpPr>
       <p:sp>
         <p:nvSpPr>
           <p:cNvPr id="2" name="TextBox 1"/>
@@ -9078,7 +9290,7 @@
           <a:noFill/>
         </p:spPr>
         <p:txBody>
-          <a:bodyPr wrap="square" anchor="ctr" lIns="0" rIns="0" tIns="0" bIns="0">
+          <a:bodyPr wrap="square" lIns="0" tIns="0" rIns="0" bIns="0" anchor="ctr">
             <a:noAutofit/>
           </a:bodyPr>
           <a:lstStyle/>
@@ -9146,6 +9358,7 @@
           <a:lstStyle/>
           <a:p>
             <a:pPr algn="ctr"/>
+            <a:endParaRPr/>
           </a:p>
         </p:txBody>
       </p:sp>
@@ -9166,7 +9379,7 @@
           <a:noFill/>
         </p:spPr>
         <p:txBody>
-          <a:bodyPr wrap="square" anchor="t" lIns="0" rIns="0" tIns="0" bIns="0">
+          <a:bodyPr wrap="square" lIns="0" tIns="0" rIns="0" bIns="0" anchor="t">
             <a:noAutofit/>
           </a:bodyPr>
           <a:lstStyle/>
@@ -9210,7 +9423,7 @@
           <a:noFill/>
         </p:spPr>
         <p:txBody>
-          <a:bodyPr wrap="square" anchor="ctr" lIns="0" rIns="0" tIns="0" bIns="0">
+          <a:bodyPr wrap="square" lIns="0" tIns="0" rIns="0" bIns="0" anchor="ctr">
             <a:noAutofit/>
           </a:bodyPr>
           <a:lstStyle/>
@@ -9254,7 +9467,7 @@
           <a:noFill/>
         </p:spPr>
         <p:txBody>
-          <a:bodyPr wrap="square" anchor="t" lIns="0" rIns="0" tIns="0" bIns="0">
+          <a:bodyPr wrap="square" lIns="0" tIns="0" rIns="0" bIns="0" anchor="t">
             <a:noAutofit/>
           </a:bodyPr>
           <a:lstStyle/>
@@ -9373,7 +9586,7 @@
 </file>
 
 <file path=ppt/slides/slide16.xml><?xml version="1.0" encoding="utf-8"?>
-<p:sld xmlns:a="http://schemas.openxmlformats.org/drawingml/2006/main" xmlns:p="http://schemas.openxmlformats.org/presentationml/2006/main" xmlns:r="http://schemas.openxmlformats.org/officeDocument/2006/relationships">
+<p:sld xmlns:a="http://schemas.openxmlformats.org/drawingml/2006/main" xmlns:r="http://schemas.openxmlformats.org/officeDocument/2006/relationships" xmlns:p="http://schemas.openxmlformats.org/presentationml/2006/main">
   <p:cSld>
     <p:bg>
       <p:bgPr>
@@ -9389,7 +9602,14 @@
         <p:cNvGrpSpPr/>
         <p:nvPr/>
       </p:nvGrpSpPr>
-      <p:grpSpPr/>
+      <p:grpSpPr>
+        <a:xfrm>
+          <a:off x="0" y="0"/>
+          <a:ext cx="0" cy="0"/>
+          <a:chOff x="0" y="0"/>
+          <a:chExt cx="0" cy="0"/>
+        </a:xfrm>
+      </p:grpSpPr>
       <p:sp>
         <p:nvSpPr>
           <p:cNvPr id="2" name="TextBox 1"/>
@@ -9407,7 +9627,7 @@
           <a:noFill/>
         </p:spPr>
         <p:txBody>
-          <a:bodyPr wrap="square" anchor="t" lIns="0" rIns="0" tIns="0" bIns="0">
+          <a:bodyPr wrap="square" lIns="0" tIns="0" rIns="0" bIns="0" anchor="t">
             <a:noAutofit/>
           </a:bodyPr>
           <a:lstStyle/>
@@ -9451,7 +9671,7 @@
           <a:noFill/>
         </p:spPr>
         <p:txBody>
-          <a:bodyPr wrap="square" anchor="ctr" lIns="0" rIns="0" tIns="0" bIns="0">
+          <a:bodyPr wrap="square" lIns="0" tIns="0" rIns="0" bIns="0" anchor="ctr">
             <a:noAutofit/>
           </a:bodyPr>
           <a:lstStyle/>
@@ -9519,6 +9739,7 @@
           <a:lstStyle/>
           <a:p>
             <a:pPr algn="ctr"/>
+            <a:endParaRPr/>
           </a:p>
         </p:txBody>
       </p:sp>
@@ -9539,7 +9760,7 @@
           <a:noFill/>
         </p:spPr>
         <p:txBody>
-          <a:bodyPr wrap="square" anchor="t" lIns="0" rIns="0" tIns="0" bIns="0">
+          <a:bodyPr wrap="square" lIns="0" tIns="0" rIns="0" bIns="0" anchor="t">
             <a:noAutofit/>
           </a:bodyPr>
           <a:lstStyle/>
@@ -9583,7 +9804,7 @@
           <a:noFill/>
         </p:spPr>
         <p:txBody>
-          <a:bodyPr wrap="square" anchor="ctr" lIns="0" rIns="0" tIns="0" bIns="0">
+          <a:bodyPr wrap="square" lIns="0" tIns="0" rIns="0" bIns="0" anchor="ctr">
             <a:noAutofit/>
           </a:bodyPr>
           <a:lstStyle/>
@@ -9627,7 +9848,7 @@
           <a:noFill/>
         </p:spPr>
         <p:txBody>
-          <a:bodyPr wrap="square" anchor="t" lIns="0" rIns="0" tIns="0" bIns="0">
+          <a:bodyPr wrap="square" lIns="0" tIns="0" rIns="0" bIns="0" anchor="t">
             <a:noAutofit/>
           </a:bodyPr>
           <a:lstStyle/>
@@ -9746,7 +9967,7 @@
 </file>
 
 <file path=ppt/slides/slide17.xml><?xml version="1.0" encoding="utf-8"?>
-<p:sld xmlns:a="http://schemas.openxmlformats.org/drawingml/2006/main" xmlns:p="http://schemas.openxmlformats.org/presentationml/2006/main" xmlns:r="http://schemas.openxmlformats.org/officeDocument/2006/relationships">
+<p:sld xmlns:a="http://schemas.openxmlformats.org/drawingml/2006/main" xmlns:r="http://schemas.openxmlformats.org/officeDocument/2006/relationships" xmlns:p="http://schemas.openxmlformats.org/presentationml/2006/main">
   <p:cSld>
     <p:bg>
       <p:bgPr>
@@ -9762,7 +9983,14 @@
         <p:cNvGrpSpPr/>
         <p:nvPr/>
       </p:nvGrpSpPr>
-      <p:grpSpPr/>
+      <p:grpSpPr>
+        <a:xfrm>
+          <a:off x="0" y="0"/>
+          <a:ext cx="0" cy="0"/>
+          <a:chOff x="0" y="0"/>
+          <a:chExt cx="0" cy="0"/>
+        </a:xfrm>
+      </p:grpSpPr>
       <p:sp>
         <p:nvSpPr>
           <p:cNvPr id="2" name="TextBox 1"/>
@@ -9780,7 +10008,7 @@
           <a:noFill/>
         </p:spPr>
         <p:txBody>
-          <a:bodyPr wrap="square" anchor="t" lIns="0" rIns="0" tIns="0" bIns="0">
+          <a:bodyPr wrap="square" lIns="0" tIns="0" rIns="0" bIns="0" anchor="t">
             <a:noAutofit/>
           </a:bodyPr>
           <a:lstStyle/>
@@ -9824,7 +10052,7 @@
           <a:noFill/>
         </p:spPr>
         <p:txBody>
-          <a:bodyPr wrap="square" anchor="ctr" lIns="0" rIns="0" tIns="0" bIns="0">
+          <a:bodyPr wrap="square" lIns="0" tIns="0" rIns="0" bIns="0" anchor="ctr">
             <a:noAutofit/>
           </a:bodyPr>
           <a:lstStyle/>
@@ -9892,6 +10120,7 @@
           <a:lstStyle/>
           <a:p>
             <a:pPr algn="ctr"/>
+            <a:endParaRPr/>
           </a:p>
         </p:txBody>
       </p:sp>
@@ -9912,7 +10141,7 @@
           <a:noFill/>
         </p:spPr>
         <p:txBody>
-          <a:bodyPr wrap="square" anchor="t" lIns="0" rIns="0" tIns="0" bIns="0">
+          <a:bodyPr wrap="square" lIns="0" tIns="0" rIns="0" bIns="0" anchor="t">
             <a:noAutofit/>
           </a:bodyPr>
           <a:lstStyle/>
@@ -9956,7 +10185,7 @@
           <a:noFill/>
         </p:spPr>
         <p:txBody>
-          <a:bodyPr wrap="square" anchor="ctr" lIns="0" rIns="0" tIns="0" bIns="0">
+          <a:bodyPr wrap="square" lIns="0" tIns="0" rIns="0" bIns="0" anchor="ctr">
             <a:noAutofit/>
           </a:bodyPr>
           <a:lstStyle/>
@@ -10052,6 +10281,7 @@
           <a:lstStyle/>
           <a:p>
             <a:pPr algn="ctr"/>
+            <a:endParaRPr/>
           </a:p>
         </p:txBody>
       </p:sp>
@@ -10072,7 +10302,7 @@
           <a:noFill/>
         </p:spPr>
         <p:txBody>
-          <a:bodyPr wrap="square" anchor="ctr" lIns="0" rIns="0" tIns="0" bIns="0">
+          <a:bodyPr wrap="square" lIns="0" tIns="0" rIns="0" bIns="0" anchor="ctr">
             <a:noAutofit/>
           </a:bodyPr>
           <a:lstStyle/>
@@ -10165,6 +10395,7 @@
           <a:lstStyle/>
           <a:p>
             <a:pPr algn="ctr"/>
+            <a:endParaRPr/>
           </a:p>
         </p:txBody>
       </p:sp>
@@ -10185,7 +10416,7 @@
           <a:noFill/>
         </p:spPr>
         <p:txBody>
-          <a:bodyPr wrap="square" anchor="ctr" lIns="0" rIns="0" tIns="0" bIns="0">
+          <a:bodyPr wrap="square" lIns="0" tIns="0" rIns="0" bIns="0" anchor="ctr">
             <a:noAutofit/>
           </a:bodyPr>
           <a:lstStyle/>
@@ -10278,6 +10509,7 @@
           <a:lstStyle/>
           <a:p>
             <a:pPr algn="ctr"/>
+            <a:endParaRPr/>
           </a:p>
         </p:txBody>
       </p:sp>
@@ -10298,7 +10530,7 @@
           <a:noFill/>
         </p:spPr>
         <p:txBody>
-          <a:bodyPr wrap="square" anchor="ctr" lIns="0" rIns="0" tIns="0" bIns="0">
+          <a:bodyPr wrap="square" lIns="0" tIns="0" rIns="0" bIns="0" anchor="ctr">
             <a:noAutofit/>
           </a:bodyPr>
           <a:lstStyle/>
@@ -10391,6 +10623,7 @@
           <a:lstStyle/>
           <a:p>
             <a:pPr algn="ctr"/>
+            <a:endParaRPr/>
           </a:p>
         </p:txBody>
       </p:sp>
@@ -10411,7 +10644,7 @@
           <a:noFill/>
         </p:spPr>
         <p:txBody>
-          <a:bodyPr wrap="square" anchor="ctr" lIns="0" rIns="0" tIns="0" bIns="0">
+          <a:bodyPr wrap="square" lIns="0" tIns="0" rIns="0" bIns="0" anchor="ctr">
             <a:noAutofit/>
           </a:bodyPr>
           <a:lstStyle/>
@@ -10502,6 +10735,7 @@
           <a:lstStyle/>
           <a:p>
             <a:pPr algn="ctr"/>
+            <a:endParaRPr/>
           </a:p>
         </p:txBody>
       </p:sp>
@@ -10522,7 +10756,7 @@
           <a:noFill/>
         </p:spPr>
         <p:txBody>
-          <a:bodyPr wrap="square" anchor="ctr" lIns="0" rIns="0" tIns="0" bIns="0">
+          <a:bodyPr wrap="square" lIns="0" tIns="0" rIns="0" bIns="0" anchor="ctr">
             <a:noAutofit/>
           </a:bodyPr>
           <a:lstStyle/>
@@ -10558,7 +10792,7 @@
 </file>
 
 <file path=ppt/slides/slide18.xml><?xml version="1.0" encoding="utf-8"?>
-<p:sld xmlns:a="http://schemas.openxmlformats.org/drawingml/2006/main" xmlns:p="http://schemas.openxmlformats.org/presentationml/2006/main" xmlns:r="http://schemas.openxmlformats.org/officeDocument/2006/relationships">
+<p:sld xmlns:a="http://schemas.openxmlformats.org/drawingml/2006/main" xmlns:r="http://schemas.openxmlformats.org/officeDocument/2006/relationships" xmlns:p="http://schemas.openxmlformats.org/presentationml/2006/main">
   <p:cSld>
     <p:bg>
       <p:bgPr>
@@ -10574,7 +10808,14 @@
         <p:cNvGrpSpPr/>
         <p:nvPr/>
       </p:nvGrpSpPr>
-      <p:grpSpPr/>
+      <p:grpSpPr>
+        <a:xfrm>
+          <a:off x="0" y="0"/>
+          <a:ext cx="0" cy="0"/>
+          <a:chOff x="0" y="0"/>
+          <a:chExt cx="0" cy="0"/>
+        </a:xfrm>
+      </p:grpSpPr>
       <p:sp>
         <p:nvSpPr>
           <p:cNvPr id="2" name="TextBox 1"/>
@@ -10592,7 +10833,7 @@
           <a:noFill/>
         </p:spPr>
         <p:txBody>
-          <a:bodyPr wrap="square" anchor="t" lIns="0" rIns="0" tIns="0" bIns="0">
+          <a:bodyPr wrap="square" lIns="0" tIns="0" rIns="0" bIns="0" anchor="t">
             <a:noAutofit/>
           </a:bodyPr>
           <a:lstStyle/>
@@ -10636,7 +10877,7 @@
           <a:noFill/>
         </p:spPr>
         <p:txBody>
-          <a:bodyPr wrap="square" anchor="ctr" lIns="0" rIns="0" tIns="0" bIns="0">
+          <a:bodyPr wrap="square" lIns="0" tIns="0" rIns="0" bIns="0" anchor="ctr">
             <a:noAutofit/>
           </a:bodyPr>
           <a:lstStyle/>
@@ -10704,6 +10945,7 @@
           <a:lstStyle/>
           <a:p>
             <a:pPr algn="ctr"/>
+            <a:endParaRPr/>
           </a:p>
         </p:txBody>
       </p:sp>
@@ -10724,7 +10966,7 @@
           <a:noFill/>
         </p:spPr>
         <p:txBody>
-          <a:bodyPr wrap="square" anchor="t" lIns="0" rIns="0" tIns="0" bIns="0">
+          <a:bodyPr wrap="square" lIns="0" tIns="0" rIns="0" bIns="0" anchor="t">
             <a:noAutofit/>
           </a:bodyPr>
           <a:lstStyle/>
@@ -10784,7 +11026,7 @@
 </file>
 
 <file path=ppt/slides/slide19.xml><?xml version="1.0" encoding="utf-8"?>
-<p:sld xmlns:a="http://schemas.openxmlformats.org/drawingml/2006/main" xmlns:p="http://schemas.openxmlformats.org/presentationml/2006/main" xmlns:r="http://schemas.openxmlformats.org/officeDocument/2006/relationships">
+<p:sld xmlns:a="http://schemas.openxmlformats.org/drawingml/2006/main" xmlns:r="http://schemas.openxmlformats.org/officeDocument/2006/relationships" xmlns:p="http://schemas.openxmlformats.org/presentationml/2006/main">
   <p:cSld>
     <p:bg>
       <p:bgPr>
@@ -10800,7 +11042,14 @@
         <p:cNvGrpSpPr/>
         <p:nvPr/>
       </p:nvGrpSpPr>
-      <p:grpSpPr/>
+      <p:grpSpPr>
+        <a:xfrm>
+          <a:off x="0" y="0"/>
+          <a:ext cx="0" cy="0"/>
+          <a:chOff x="0" y="0"/>
+          <a:chExt cx="0" cy="0"/>
+        </a:xfrm>
+      </p:grpSpPr>
       <p:sp>
         <p:nvSpPr>
           <p:cNvPr id="2" name="TextBox 1"/>
@@ -10818,7 +11067,7 @@
           <a:noFill/>
         </p:spPr>
         <p:txBody>
-          <a:bodyPr wrap="square" anchor="t" lIns="0" rIns="0" tIns="0" bIns="0">
+          <a:bodyPr wrap="square" lIns="0" tIns="0" rIns="0" bIns="0" anchor="t">
             <a:noAutofit/>
           </a:bodyPr>
           <a:lstStyle/>
@@ -10862,7 +11111,7 @@
           <a:noFill/>
         </p:spPr>
         <p:txBody>
-          <a:bodyPr wrap="square" anchor="ctr" lIns="0" rIns="0" tIns="0" bIns="0">
+          <a:bodyPr wrap="square" lIns="0" tIns="0" rIns="0" bIns="0" anchor="ctr">
             <a:noAutofit/>
           </a:bodyPr>
           <a:lstStyle/>
@@ -10930,6 +11179,7 @@
           <a:lstStyle/>
           <a:p>
             <a:pPr algn="ctr"/>
+            <a:endParaRPr/>
           </a:p>
         </p:txBody>
       </p:sp>
@@ -10950,7 +11200,7 @@
           <a:noFill/>
         </p:spPr>
         <p:txBody>
-          <a:bodyPr wrap="square" anchor="t" lIns="0" rIns="0" tIns="0" bIns="0">
+          <a:bodyPr wrap="square" lIns="0" tIns="0" rIns="0" bIns="0" anchor="t">
             <a:noAutofit/>
           </a:bodyPr>
           <a:lstStyle/>
@@ -11018,7 +11268,7 @@
           <a:noFill/>
         </p:spPr>
         <p:txBody>
-          <a:bodyPr wrap="square" anchor="t" lIns="0" rIns="0" tIns="0" bIns="0">
+          <a:bodyPr wrap="square" lIns="0" tIns="0" rIns="0" bIns="0" anchor="t">
             <a:noAutofit/>
           </a:bodyPr>
           <a:lstStyle/>
@@ -11083,7 +11333,7 @@
           <a:noFill/>
         </p:spPr>
         <p:txBody>
-          <a:bodyPr wrap="square" anchor="t" lIns="0" rIns="0" tIns="0" bIns="0">
+          <a:bodyPr wrap="square" lIns="0" tIns="0" rIns="0" bIns="0" anchor="t">
             <a:noAutofit/>
           </a:bodyPr>
           <a:lstStyle/>
@@ -11202,7 +11452,7 @@
 </file>
 
 <file path=ppt/slides/slide2.xml><?xml version="1.0" encoding="utf-8"?>
-<p:sld xmlns:a="http://schemas.openxmlformats.org/drawingml/2006/main" xmlns:p="http://schemas.openxmlformats.org/presentationml/2006/main" xmlns:r="http://schemas.openxmlformats.org/officeDocument/2006/relationships">
+<p:sld xmlns:a="http://schemas.openxmlformats.org/drawingml/2006/main" xmlns:r="http://schemas.openxmlformats.org/officeDocument/2006/relationships" xmlns:p="http://schemas.openxmlformats.org/presentationml/2006/main">
   <p:cSld>
     <p:bg>
       <p:bgPr>
@@ -11218,7 +11468,14 @@
         <p:cNvGrpSpPr/>
         <p:nvPr/>
       </p:nvGrpSpPr>
-      <p:grpSpPr/>
+      <p:grpSpPr>
+        <a:xfrm>
+          <a:off x="0" y="0"/>
+          <a:ext cx="0" cy="0"/>
+          <a:chOff x="0" y="0"/>
+          <a:chExt cx="0" cy="0"/>
+        </a:xfrm>
+      </p:grpSpPr>
       <p:sp>
         <p:nvSpPr>
           <p:cNvPr id="2" name="TextBox 1"/>
@@ -11236,7 +11493,7 @@
           <a:noFill/>
         </p:spPr>
         <p:txBody>
-          <a:bodyPr wrap="square" anchor="ctr" lIns="0" rIns="0" tIns="0" bIns="0">
+          <a:bodyPr wrap="square" lIns="0" tIns="0" rIns="0" bIns="0" anchor="ctr">
             <a:noAutofit/>
           </a:bodyPr>
           <a:lstStyle/>
@@ -11304,6 +11561,7 @@
           <a:lstStyle/>
           <a:p>
             <a:pPr algn="ctr"/>
+            <a:endParaRPr/>
           </a:p>
         </p:txBody>
       </p:sp>
@@ -11324,7 +11582,7 @@
           <a:noFill/>
         </p:spPr>
         <p:txBody>
-          <a:bodyPr wrap="square" anchor="t" lIns="0" rIns="0" tIns="0" bIns="0">
+          <a:bodyPr wrap="square" lIns="0" tIns="0" rIns="0" bIns="0" anchor="t">
             <a:noAutofit/>
           </a:bodyPr>
           <a:lstStyle/>
@@ -11368,7 +11626,7 @@
           <a:noFill/>
         </p:spPr>
         <p:txBody>
-          <a:bodyPr wrap="square" anchor="ctr" lIns="0" rIns="0" tIns="0" bIns="0">
+          <a:bodyPr wrap="square" lIns="0" tIns="0" rIns="0" bIns="0" anchor="ctr">
             <a:noAutofit/>
           </a:bodyPr>
           <a:lstStyle/>
@@ -11591,7 +11849,7 @@
 </file>
 
 <file path=ppt/slides/slide20.xml><?xml version="1.0" encoding="utf-8"?>
-<p:sld xmlns:a="http://schemas.openxmlformats.org/drawingml/2006/main" xmlns:p="http://schemas.openxmlformats.org/presentationml/2006/main" xmlns:r="http://schemas.openxmlformats.org/officeDocument/2006/relationships">
+<p:sld xmlns:a="http://schemas.openxmlformats.org/drawingml/2006/main" xmlns:r="http://schemas.openxmlformats.org/officeDocument/2006/relationships" xmlns:p="http://schemas.openxmlformats.org/presentationml/2006/main">
   <p:cSld>
     <p:bg>
       <p:bgPr>
@@ -11607,7 +11865,14 @@
         <p:cNvGrpSpPr/>
         <p:nvPr/>
       </p:nvGrpSpPr>
-      <p:grpSpPr/>
+      <p:grpSpPr>
+        <a:xfrm>
+          <a:off x="0" y="0"/>
+          <a:ext cx="0" cy="0"/>
+          <a:chOff x="0" y="0"/>
+          <a:chExt cx="0" cy="0"/>
+        </a:xfrm>
+      </p:grpSpPr>
       <p:sp>
         <p:nvSpPr>
           <p:cNvPr id="2" name="TextBox 1"/>
@@ -11625,7 +11890,7 @@
           <a:noFill/>
         </p:spPr>
         <p:txBody>
-          <a:bodyPr wrap="square" anchor="ctr" lIns="0" rIns="0" tIns="0" bIns="0">
+          <a:bodyPr wrap="square" lIns="0" tIns="0" rIns="0" bIns="0" anchor="ctr">
             <a:noAutofit/>
           </a:bodyPr>
           <a:lstStyle/>
@@ -11693,6 +11958,7 @@
           <a:lstStyle/>
           <a:p>
             <a:pPr algn="ctr"/>
+            <a:endParaRPr/>
           </a:p>
         </p:txBody>
       </p:sp>
@@ -11713,7 +11979,7 @@
           <a:noFill/>
         </p:spPr>
         <p:txBody>
-          <a:bodyPr wrap="square" anchor="t" lIns="0" rIns="0" tIns="0" bIns="0">
+          <a:bodyPr wrap="square" lIns="0" tIns="0" rIns="0" bIns="0" anchor="t">
             <a:noAutofit/>
           </a:bodyPr>
           <a:lstStyle/>
@@ -11757,7 +12023,7 @@
           <a:noFill/>
         </p:spPr>
         <p:txBody>
-          <a:bodyPr wrap="square" anchor="ctr" lIns="0" rIns="0" tIns="0" bIns="0">
+          <a:bodyPr wrap="square" lIns="0" tIns="0" rIns="0" bIns="0" anchor="ctr">
             <a:noAutofit/>
           </a:bodyPr>
           <a:lstStyle/>
@@ -11801,7 +12067,7 @@
           <a:noFill/>
         </p:spPr>
         <p:txBody>
-          <a:bodyPr wrap="square" anchor="t" lIns="0" rIns="0" tIns="0" bIns="0">
+          <a:bodyPr wrap="square" lIns="0" tIns="0" rIns="0" bIns="0" anchor="t">
             <a:noAutofit/>
           </a:bodyPr>
           <a:lstStyle/>
@@ -11920,7 +12186,7 @@
 </file>
 
 <file path=ppt/slides/slide21.xml><?xml version="1.0" encoding="utf-8"?>
-<p:sld xmlns:a="http://schemas.openxmlformats.org/drawingml/2006/main" xmlns:p="http://schemas.openxmlformats.org/presentationml/2006/main" xmlns:r="http://schemas.openxmlformats.org/officeDocument/2006/relationships">
+<p:sld xmlns:a="http://schemas.openxmlformats.org/drawingml/2006/main" xmlns:r="http://schemas.openxmlformats.org/officeDocument/2006/relationships" xmlns:p="http://schemas.openxmlformats.org/presentationml/2006/main">
   <p:cSld>
     <p:bg>
       <p:bgPr>
@@ -11936,7 +12202,14 @@
         <p:cNvGrpSpPr/>
         <p:nvPr/>
       </p:nvGrpSpPr>
-      <p:grpSpPr/>
+      <p:grpSpPr>
+        <a:xfrm>
+          <a:off x="0" y="0"/>
+          <a:ext cx="0" cy="0"/>
+          <a:chOff x="0" y="0"/>
+          <a:chExt cx="0" cy="0"/>
+        </a:xfrm>
+      </p:grpSpPr>
       <p:sp>
         <p:nvSpPr>
           <p:cNvPr id="2" name="TextBox 1"/>
@@ -11954,7 +12227,7 @@
           <a:noFill/>
         </p:spPr>
         <p:txBody>
-          <a:bodyPr wrap="square" anchor="ctr" lIns="0" rIns="0" tIns="0" bIns="0">
+          <a:bodyPr wrap="square" lIns="0" tIns="0" rIns="0" bIns="0" anchor="ctr">
             <a:noAutofit/>
           </a:bodyPr>
           <a:lstStyle/>
@@ -12022,6 +12295,7 @@
           <a:lstStyle/>
           <a:p>
             <a:pPr algn="ctr"/>
+            <a:endParaRPr/>
           </a:p>
         </p:txBody>
       </p:sp>
@@ -12042,7 +12316,7 @@
           <a:noFill/>
         </p:spPr>
         <p:txBody>
-          <a:bodyPr wrap="square" anchor="t" lIns="0" rIns="0" tIns="0" bIns="0">
+          <a:bodyPr wrap="square" lIns="0" tIns="0" rIns="0" bIns="0" anchor="t">
             <a:noAutofit/>
           </a:bodyPr>
           <a:lstStyle/>
@@ -12086,7 +12360,7 @@
           <a:noFill/>
         </p:spPr>
         <p:txBody>
-          <a:bodyPr wrap="square" anchor="ctr" lIns="0" rIns="0" tIns="0" bIns="0">
+          <a:bodyPr wrap="square" lIns="0" tIns="0" rIns="0" bIns="0" anchor="ctr">
             <a:noAutofit/>
           </a:bodyPr>
           <a:lstStyle/>
@@ -12130,7 +12404,7 @@
           <a:noFill/>
         </p:spPr>
         <p:txBody>
-          <a:bodyPr wrap="square" anchor="t" lIns="0" rIns="0" tIns="0" bIns="0">
+          <a:bodyPr wrap="square" lIns="0" tIns="0" rIns="0" bIns="0" anchor="t">
             <a:noAutofit/>
           </a:bodyPr>
           <a:lstStyle/>
@@ -12249,7 +12523,7 @@
 </file>
 
 <file path=ppt/slides/slide22.xml><?xml version="1.0" encoding="utf-8"?>
-<p:sld xmlns:a="http://schemas.openxmlformats.org/drawingml/2006/main" xmlns:p="http://schemas.openxmlformats.org/presentationml/2006/main" xmlns:r="http://schemas.openxmlformats.org/officeDocument/2006/relationships">
+<p:sld xmlns:a="http://schemas.openxmlformats.org/drawingml/2006/main" xmlns:r="http://schemas.openxmlformats.org/officeDocument/2006/relationships" xmlns:p="http://schemas.openxmlformats.org/presentationml/2006/main">
   <p:cSld>
     <p:bg>
       <p:bgPr>
@@ -12265,7 +12539,14 @@
         <p:cNvGrpSpPr/>
         <p:nvPr/>
       </p:nvGrpSpPr>
-      <p:grpSpPr/>
+      <p:grpSpPr>
+        <a:xfrm>
+          <a:off x="0" y="0"/>
+          <a:ext cx="0" cy="0"/>
+          <a:chOff x="0" y="0"/>
+          <a:chExt cx="0" cy="0"/>
+        </a:xfrm>
+      </p:grpSpPr>
       <p:sp>
         <p:nvSpPr>
           <p:cNvPr id="2" name="TextBox 1"/>
@@ -12283,7 +12564,7 @@
           <a:noFill/>
         </p:spPr>
         <p:txBody>
-          <a:bodyPr wrap="square" anchor="t" lIns="0" rIns="0" tIns="0" bIns="0">
+          <a:bodyPr wrap="square" lIns="0" tIns="0" rIns="0" bIns="0" anchor="t">
             <a:noAutofit/>
           </a:bodyPr>
           <a:lstStyle/>
@@ -12351,6 +12632,7 @@
           <a:lstStyle/>
           <a:p>
             <a:pPr algn="ctr"/>
+            <a:endParaRPr/>
           </a:p>
         </p:txBody>
       </p:sp>
@@ -12371,7 +12653,7 @@
           <a:noFill/>
         </p:spPr>
         <p:txBody>
-          <a:bodyPr wrap="square" anchor="t" lIns="0" rIns="0" tIns="0" bIns="0">
+          <a:bodyPr wrap="square" lIns="0" tIns="0" rIns="0" bIns="0" anchor="t">
             <a:noAutofit/>
           </a:bodyPr>
           <a:lstStyle/>
@@ -12449,7 +12731,7 @@
 </file>
 
 <file path=ppt/slides/slide3.xml><?xml version="1.0" encoding="utf-8"?>
-<p:sld xmlns:a="http://schemas.openxmlformats.org/drawingml/2006/main" xmlns:p="http://schemas.openxmlformats.org/presentationml/2006/main" xmlns:r="http://schemas.openxmlformats.org/officeDocument/2006/relationships">
+<p:sld xmlns:a="http://schemas.openxmlformats.org/drawingml/2006/main" xmlns:r="http://schemas.openxmlformats.org/officeDocument/2006/relationships" xmlns:p="http://schemas.openxmlformats.org/presentationml/2006/main">
   <p:cSld>
     <p:bg>
       <p:bgPr>
@@ -12465,7 +12747,14 @@
         <p:cNvGrpSpPr/>
         <p:nvPr/>
       </p:nvGrpSpPr>
-      <p:grpSpPr/>
+      <p:grpSpPr>
+        <a:xfrm>
+          <a:off x="0" y="0"/>
+          <a:ext cx="0" cy="0"/>
+          <a:chOff x="0" y="0"/>
+          <a:chExt cx="0" cy="0"/>
+        </a:xfrm>
+      </p:grpSpPr>
       <p:sp>
         <p:nvSpPr>
           <p:cNvPr id="2" name="TextBox 1"/>
@@ -12483,7 +12772,7 @@
           <a:noFill/>
         </p:spPr>
         <p:txBody>
-          <a:bodyPr wrap="square" anchor="ctr" lIns="0" rIns="0" tIns="0" bIns="0">
+          <a:bodyPr wrap="square" lIns="0" tIns="0" rIns="0" bIns="0" anchor="ctr">
             <a:noAutofit/>
           </a:bodyPr>
           <a:lstStyle/>
@@ -12551,6 +12840,7 @@
           <a:lstStyle/>
           <a:p>
             <a:pPr algn="ctr"/>
+            <a:endParaRPr/>
           </a:p>
         </p:txBody>
       </p:sp>
@@ -12571,7 +12861,7 @@
           <a:noFill/>
         </p:spPr>
         <p:txBody>
-          <a:bodyPr wrap="square" anchor="t" lIns="0" rIns="0" tIns="0" bIns="0">
+          <a:bodyPr wrap="square" lIns="0" tIns="0" rIns="0" bIns="0" anchor="t">
             <a:noAutofit/>
           </a:bodyPr>
           <a:lstStyle/>
@@ -12615,7 +12905,7 @@
           <a:noFill/>
         </p:spPr>
         <p:txBody>
-          <a:bodyPr wrap="square" anchor="ctr" lIns="0" rIns="0" tIns="0" bIns="0">
+          <a:bodyPr wrap="square" lIns="0" tIns="0" rIns="0" bIns="0" anchor="ctr">
             <a:noAutofit/>
           </a:bodyPr>
           <a:lstStyle/>
@@ -12659,7 +12949,7 @@
           <a:noFill/>
         </p:spPr>
         <p:txBody>
-          <a:bodyPr wrap="square" anchor="t" lIns="0" rIns="0" tIns="0" bIns="0">
+          <a:bodyPr wrap="square" lIns="0" tIns="0" rIns="0" bIns="0" anchor="t">
             <a:noAutofit/>
           </a:bodyPr>
           <a:lstStyle/>
@@ -12778,7 +13068,7 @@
 </file>
 
 <file path=ppt/slides/slide4.xml><?xml version="1.0" encoding="utf-8"?>
-<p:sld xmlns:a="http://schemas.openxmlformats.org/drawingml/2006/main" xmlns:p="http://schemas.openxmlformats.org/presentationml/2006/main" xmlns:r="http://schemas.openxmlformats.org/officeDocument/2006/relationships">
+<p:sld xmlns:a="http://schemas.openxmlformats.org/drawingml/2006/main" xmlns:r="http://schemas.openxmlformats.org/officeDocument/2006/relationships" xmlns:p="http://schemas.openxmlformats.org/presentationml/2006/main">
   <p:cSld>
     <p:bg>
       <p:bgPr>
@@ -12794,7 +13084,14 @@
         <p:cNvGrpSpPr/>
         <p:nvPr/>
       </p:nvGrpSpPr>
-      <p:grpSpPr/>
+      <p:grpSpPr>
+        <a:xfrm>
+          <a:off x="0" y="0"/>
+          <a:ext cx="0" cy="0"/>
+          <a:chOff x="0" y="0"/>
+          <a:chExt cx="0" cy="0"/>
+        </a:xfrm>
+      </p:grpSpPr>
       <p:sp>
         <p:nvSpPr>
           <p:cNvPr id="2" name="TextBox 1"/>
@@ -12812,7 +13109,7 @@
           <a:noFill/>
         </p:spPr>
         <p:txBody>
-          <a:bodyPr wrap="square" anchor="t" lIns="0" rIns="0" tIns="0" bIns="0">
+          <a:bodyPr wrap="square" lIns="0" tIns="0" rIns="0" bIns="0" anchor="t">
             <a:noAutofit/>
           </a:bodyPr>
           <a:lstStyle/>
@@ -12856,7 +13153,7 @@
           <a:noFill/>
         </p:spPr>
         <p:txBody>
-          <a:bodyPr wrap="square" anchor="ctr" lIns="0" rIns="0" tIns="0" bIns="0">
+          <a:bodyPr wrap="square" lIns="0" tIns="0" rIns="0" bIns="0" anchor="ctr">
             <a:noAutofit/>
           </a:bodyPr>
           <a:lstStyle/>
@@ -12924,6 +13221,7 @@
           <a:lstStyle/>
           <a:p>
             <a:pPr algn="ctr"/>
+            <a:endParaRPr/>
           </a:p>
         </p:txBody>
       </p:sp>
@@ -12944,7 +13242,7 @@
           <a:noFill/>
         </p:spPr>
         <p:txBody>
-          <a:bodyPr wrap="square" anchor="t" lIns="0" rIns="0" tIns="0" bIns="0">
+          <a:bodyPr wrap="square" lIns="0" tIns="0" rIns="0" bIns="0" anchor="t">
             <a:noAutofit/>
           </a:bodyPr>
           <a:lstStyle/>
@@ -12988,7 +13286,7 @@
           <a:noFill/>
         </p:spPr>
         <p:txBody>
-          <a:bodyPr wrap="square" anchor="ctr" lIns="0" rIns="0" tIns="0" bIns="0">
+          <a:bodyPr wrap="square" lIns="0" tIns="0" rIns="0" bIns="0" anchor="ctr">
             <a:noAutofit/>
           </a:bodyPr>
           <a:lstStyle/>
@@ -13032,7 +13330,7 @@
           <a:noFill/>
         </p:spPr>
         <p:txBody>
-          <a:bodyPr wrap="square" anchor="t" lIns="0" rIns="0" tIns="0" bIns="0">
+          <a:bodyPr wrap="square" lIns="0" tIns="0" rIns="0" bIns="0" anchor="t">
             <a:noAutofit/>
           </a:bodyPr>
           <a:lstStyle/>
@@ -13046,7 +13344,7 @@
               </a:spcAft>
             </a:pPr>
             <a:r>
-              <a:rPr sz="1300" b="1">
+              <a:rPr sz="1300" b="1" dirty="0">
                 <a:solidFill>
                   <a:srgbClr val="2E6FB5"/>
                 </a:solidFill>
@@ -13054,7 +13352,7 @@
               <a:t>▪  </a:t>
             </a:r>
             <a:r>
-              <a:rPr sz="1500">
+              <a:rPr sz="1500" dirty="0">
                 <a:solidFill>
                   <a:srgbClr val="2A2A2A"/>
                 </a:solidFill>
@@ -13072,7 +13370,7 @@
               </a:spcAft>
             </a:pPr>
             <a:r>
-              <a:rPr sz="1300" b="1">
+              <a:rPr sz="1300" b="1" dirty="0">
                 <a:solidFill>
                   <a:srgbClr val="2E6FB5"/>
                 </a:solidFill>
@@ -13080,7 +13378,7 @@
               <a:t>▪  </a:t>
             </a:r>
             <a:r>
-              <a:rPr sz="1500">
+              <a:rPr sz="1500" dirty="0">
                 <a:solidFill>
                   <a:srgbClr val="2A2A2A"/>
                 </a:solidFill>
@@ -13098,7 +13396,7 @@
               </a:spcAft>
             </a:pPr>
             <a:r>
-              <a:rPr sz="1300" b="1">
+              <a:rPr sz="1300" b="1" dirty="0">
                 <a:solidFill>
                   <a:srgbClr val="2E6FB5"/>
                 </a:solidFill>
@@ -13106,12 +13404,12 @@
               <a:t>▪  </a:t>
             </a:r>
             <a:r>
-              <a:rPr sz="1500">
+              <a:rPr sz="1500" dirty="0">
                 <a:solidFill>
                   <a:srgbClr val="2A2A2A"/>
                 </a:solidFill>
               </a:rPr>
-              <a:t>One phone gives flat 2D only: unknown depth, motion blur, occlusion.</a:t>
+              <a:t>One phone gives flat 2D only: unknown depth, motion blur.</a:t>
             </a:r>
           </a:p>
           <a:p>
@@ -13124,7 +13422,7 @@
               </a:spcAft>
             </a:pPr>
             <a:r>
-              <a:rPr sz="1300" b="1">
+              <a:rPr sz="1300" b="1" dirty="0">
                 <a:solidFill>
                   <a:srgbClr val="2E6FB5"/>
                 </a:solidFill>
@@ -13132,7 +13430,7 @@
               <a:t>▪  </a:t>
             </a:r>
             <a:r>
-              <a:rPr sz="1500">
+              <a:rPr sz="1500" dirty="0">
                 <a:solidFill>
                   <a:srgbClr val="2A2A2A"/>
                 </a:solidFill>
@@ -13151,7 +13449,7 @@
 </file>
 
 <file path=ppt/slides/slide5.xml><?xml version="1.0" encoding="utf-8"?>
-<p:sld xmlns:a="http://schemas.openxmlformats.org/drawingml/2006/main" xmlns:p="http://schemas.openxmlformats.org/presentationml/2006/main" xmlns:r="http://schemas.openxmlformats.org/officeDocument/2006/relationships">
+<p:sld xmlns:a="http://schemas.openxmlformats.org/drawingml/2006/main" xmlns:r="http://schemas.openxmlformats.org/officeDocument/2006/relationships" xmlns:p="http://schemas.openxmlformats.org/presentationml/2006/main">
   <p:cSld>
     <p:bg>
       <p:bgPr>
@@ -13167,7 +13465,14 @@
         <p:cNvGrpSpPr/>
         <p:nvPr/>
       </p:nvGrpSpPr>
-      <p:grpSpPr/>
+      <p:grpSpPr>
+        <a:xfrm>
+          <a:off x="0" y="0"/>
+          <a:ext cx="0" cy="0"/>
+          <a:chOff x="0" y="0"/>
+          <a:chExt cx="0" cy="0"/>
+        </a:xfrm>
+      </p:grpSpPr>
       <p:sp>
         <p:nvSpPr>
           <p:cNvPr id="2" name="TextBox 1"/>
@@ -13185,7 +13490,7 @@
           <a:noFill/>
         </p:spPr>
         <p:txBody>
-          <a:bodyPr wrap="square" anchor="t" lIns="0" rIns="0" tIns="0" bIns="0">
+          <a:bodyPr wrap="square" lIns="0" tIns="0" rIns="0" bIns="0" anchor="t">
             <a:noAutofit/>
           </a:bodyPr>
           <a:lstStyle/>
@@ -13229,7 +13534,7 @@
           <a:noFill/>
         </p:spPr>
         <p:txBody>
-          <a:bodyPr wrap="square" anchor="ctr" lIns="0" rIns="0" tIns="0" bIns="0">
+          <a:bodyPr wrap="square" lIns="0" tIns="0" rIns="0" bIns="0" anchor="ctr">
             <a:noAutofit/>
           </a:bodyPr>
           <a:lstStyle/>
@@ -13297,6 +13602,7 @@
           <a:lstStyle/>
           <a:p>
             <a:pPr algn="ctr"/>
+            <a:endParaRPr/>
           </a:p>
         </p:txBody>
       </p:sp>
@@ -13317,7 +13623,7 @@
           <a:noFill/>
         </p:spPr>
         <p:txBody>
-          <a:bodyPr wrap="square" anchor="t" lIns="0" rIns="0" tIns="0" bIns="0">
+          <a:bodyPr wrap="square" lIns="0" tIns="0" rIns="0" bIns="0" anchor="t">
             <a:noAutofit/>
           </a:bodyPr>
           <a:lstStyle/>
@@ -13361,7 +13667,7 @@
           <a:noFill/>
         </p:spPr>
         <p:txBody>
-          <a:bodyPr wrap="square" anchor="ctr" lIns="0" rIns="0" tIns="0" bIns="0">
+          <a:bodyPr wrap="square" lIns="0" tIns="0" rIns="0" bIns="0" anchor="ctr">
             <a:noAutofit/>
           </a:bodyPr>
           <a:lstStyle/>
@@ -13405,7 +13711,7 @@
           <a:noFill/>
         </p:spPr>
         <p:txBody>
-          <a:bodyPr wrap="square" anchor="t" lIns="0" rIns="0" tIns="0" bIns="0">
+          <a:bodyPr wrap="square" lIns="0" tIns="0" rIns="0" bIns="0" anchor="t">
             <a:noAutofit/>
           </a:bodyPr>
           <a:lstStyle/>
@@ -13524,7 +13830,7 @@
 </file>
 
 <file path=ppt/slides/slide6.xml><?xml version="1.0" encoding="utf-8"?>
-<p:sld xmlns:a="http://schemas.openxmlformats.org/drawingml/2006/main" xmlns:p="http://schemas.openxmlformats.org/presentationml/2006/main" xmlns:r="http://schemas.openxmlformats.org/officeDocument/2006/relationships">
+<p:sld xmlns:a="http://schemas.openxmlformats.org/drawingml/2006/main" xmlns:r="http://schemas.openxmlformats.org/officeDocument/2006/relationships" xmlns:p="http://schemas.openxmlformats.org/presentationml/2006/main">
   <p:cSld>
     <p:bg>
       <p:bgPr>
@@ -13540,7 +13846,14 @@
         <p:cNvGrpSpPr/>
         <p:nvPr/>
       </p:nvGrpSpPr>
-      <p:grpSpPr/>
+      <p:grpSpPr>
+        <a:xfrm>
+          <a:off x="0" y="0"/>
+          <a:ext cx="0" cy="0"/>
+          <a:chOff x="0" y="0"/>
+          <a:chExt cx="0" cy="0"/>
+        </a:xfrm>
+      </p:grpSpPr>
       <p:sp>
         <p:nvSpPr>
           <p:cNvPr id="2" name="TextBox 1"/>
@@ -13558,7 +13871,7 @@
           <a:noFill/>
         </p:spPr>
         <p:txBody>
-          <a:bodyPr wrap="square" anchor="ctr" lIns="0" rIns="0" tIns="0" bIns="0">
+          <a:bodyPr wrap="square" lIns="0" tIns="0" rIns="0" bIns="0" anchor="ctr">
             <a:noAutofit/>
           </a:bodyPr>
           <a:lstStyle/>
@@ -13626,6 +13939,7 @@
           <a:lstStyle/>
           <a:p>
             <a:pPr algn="ctr"/>
+            <a:endParaRPr/>
           </a:p>
         </p:txBody>
       </p:sp>
@@ -13646,7 +13960,7 @@
           <a:noFill/>
         </p:spPr>
         <p:txBody>
-          <a:bodyPr wrap="square" anchor="t" lIns="0" rIns="0" tIns="0" bIns="0">
+          <a:bodyPr wrap="square" lIns="0" tIns="0" rIns="0" bIns="0" anchor="t">
             <a:noAutofit/>
           </a:bodyPr>
           <a:lstStyle/>
@@ -13690,7 +14004,7 @@
           <a:noFill/>
         </p:spPr>
         <p:txBody>
-          <a:bodyPr wrap="square" anchor="ctr" lIns="0" rIns="0" tIns="0" bIns="0">
+          <a:bodyPr wrap="square" lIns="0" tIns="0" rIns="0" bIns="0" anchor="ctr">
             <a:noAutofit/>
           </a:bodyPr>
           <a:lstStyle/>
@@ -13712,7 +14026,28 @@
               </a:defRPr>
             </a:pPr>
             <a:r>
-              <a:t>Twelve requirements: capture, calibrate, analyse, visualise.</a:t>
+              <a:rPr lang="en-US" dirty="0"/>
+              <a:t>C</a:t>
+            </a:r>
+            <a:r>
+              <a:rPr dirty="0"/>
+              <a:t>apture, calibrate, </a:t>
+            </a:r>
+            <a:r>
+              <a:rPr dirty="0" err="1"/>
+              <a:t>analyse</a:t>
+            </a:r>
+            <a:r>
+              <a:rPr dirty="0"/>
+              <a:t>, </a:t>
+            </a:r>
+            <a:r>
+              <a:rPr dirty="0" err="1"/>
+              <a:t>visualise</a:t>
+            </a:r>
+            <a:r>
+              <a:rPr dirty="0"/>
+              <a:t>.</a:t>
             </a:r>
           </a:p>
         </p:txBody>
@@ -13734,7 +14069,7 @@
           <a:noFill/>
         </p:spPr>
         <p:txBody>
-          <a:bodyPr wrap="square" anchor="t" lIns="0" rIns="0" tIns="0" bIns="0">
+          <a:bodyPr wrap="square" lIns="0" tIns="0" rIns="0" bIns="0" anchor="t">
             <a:noAutofit/>
           </a:bodyPr>
           <a:lstStyle/>
@@ -13853,7 +14188,7 @@
 </file>
 
 <file path=ppt/slides/slide7.xml><?xml version="1.0" encoding="utf-8"?>
-<p:sld xmlns:a="http://schemas.openxmlformats.org/drawingml/2006/main" xmlns:p="http://schemas.openxmlformats.org/presentationml/2006/main" xmlns:r="http://schemas.openxmlformats.org/officeDocument/2006/relationships">
+<p:sld xmlns:a="http://schemas.openxmlformats.org/drawingml/2006/main" xmlns:r="http://schemas.openxmlformats.org/officeDocument/2006/relationships" xmlns:p="http://schemas.openxmlformats.org/presentationml/2006/main">
   <p:cSld>
     <p:bg>
       <p:bgPr>
@@ -13869,7 +14204,14 @@
         <p:cNvGrpSpPr/>
         <p:nvPr/>
       </p:nvGrpSpPr>
-      <p:grpSpPr/>
+      <p:grpSpPr>
+        <a:xfrm>
+          <a:off x="0" y="0"/>
+          <a:ext cx="0" cy="0"/>
+          <a:chOff x="0" y="0"/>
+          <a:chExt cx="0" cy="0"/>
+        </a:xfrm>
+      </p:grpSpPr>
       <p:sp>
         <p:nvSpPr>
           <p:cNvPr id="2" name="TextBox 1"/>
@@ -13887,7 +14229,7 @@
           <a:noFill/>
         </p:spPr>
         <p:txBody>
-          <a:bodyPr wrap="square" anchor="ctr" lIns="0" rIns="0" tIns="0" bIns="0">
+          <a:bodyPr wrap="square" lIns="0" tIns="0" rIns="0" bIns="0" anchor="ctr">
             <a:noAutofit/>
           </a:bodyPr>
           <a:lstStyle/>
@@ -13955,6 +14297,7 @@
           <a:lstStyle/>
           <a:p>
             <a:pPr algn="ctr"/>
+            <a:endParaRPr/>
           </a:p>
         </p:txBody>
       </p:sp>
@@ -13975,7 +14318,7 @@
           <a:noFill/>
         </p:spPr>
         <p:txBody>
-          <a:bodyPr wrap="square" anchor="t" lIns="0" rIns="0" tIns="0" bIns="0">
+          <a:bodyPr wrap="square" lIns="0" tIns="0" rIns="0" bIns="0" anchor="t">
             <a:noAutofit/>
           </a:bodyPr>
           <a:lstStyle/>
@@ -14019,7 +14362,7 @@
           <a:noFill/>
         </p:spPr>
         <p:txBody>
-          <a:bodyPr wrap="square" anchor="ctr" lIns="0" rIns="0" tIns="0" bIns="0">
+          <a:bodyPr wrap="square" lIns="0" tIns="0" rIns="0" bIns="0" anchor="ctr">
             <a:noAutofit/>
           </a:bodyPr>
           <a:lstStyle/>
@@ -14063,7 +14406,7 @@
           <a:noFill/>
         </p:spPr>
         <p:txBody>
-          <a:bodyPr wrap="square" anchor="t" lIns="0" rIns="0" tIns="0" bIns="0">
+          <a:bodyPr wrap="square" lIns="0" tIns="0" rIns="0" bIns="0" anchor="t">
             <a:noAutofit/>
           </a:bodyPr>
           <a:lstStyle/>
@@ -14182,7 +14525,7 @@
 </file>
 
 <file path=ppt/slides/slide8.xml><?xml version="1.0" encoding="utf-8"?>
-<p:sld xmlns:a="http://schemas.openxmlformats.org/drawingml/2006/main" xmlns:p="http://schemas.openxmlformats.org/presentationml/2006/main" xmlns:r="http://schemas.openxmlformats.org/officeDocument/2006/relationships">
+<p:sld xmlns:a="http://schemas.openxmlformats.org/drawingml/2006/main" xmlns:r="http://schemas.openxmlformats.org/officeDocument/2006/relationships" xmlns:p="http://schemas.openxmlformats.org/presentationml/2006/main">
   <p:cSld>
     <p:bg>
       <p:bgPr>
@@ -14198,7 +14541,14 @@
         <p:cNvGrpSpPr/>
         <p:nvPr/>
       </p:nvGrpSpPr>
-      <p:grpSpPr/>
+      <p:grpSpPr>
+        <a:xfrm>
+          <a:off x="0" y="0"/>
+          <a:ext cx="0" cy="0"/>
+          <a:chOff x="0" y="0"/>
+          <a:chExt cx="0" cy="0"/>
+        </a:xfrm>
+      </p:grpSpPr>
       <p:sp>
         <p:nvSpPr>
           <p:cNvPr id="2" name="TextBox 1"/>
@@ -14216,7 +14566,7 @@
           <a:noFill/>
         </p:spPr>
         <p:txBody>
-          <a:bodyPr wrap="square" anchor="t" lIns="0" rIns="0" tIns="0" bIns="0">
+          <a:bodyPr wrap="square" lIns="0" tIns="0" rIns="0" bIns="0" anchor="t">
             <a:noAutofit/>
           </a:bodyPr>
           <a:lstStyle/>
@@ -14260,7 +14610,7 @@
           <a:noFill/>
         </p:spPr>
         <p:txBody>
-          <a:bodyPr wrap="square" anchor="ctr" lIns="0" rIns="0" tIns="0" bIns="0">
+          <a:bodyPr wrap="square" lIns="0" tIns="0" rIns="0" bIns="0" anchor="ctr">
             <a:noAutofit/>
           </a:bodyPr>
           <a:lstStyle/>
@@ -14328,6 +14678,7 @@
           <a:lstStyle/>
           <a:p>
             <a:pPr algn="ctr"/>
+            <a:endParaRPr/>
           </a:p>
         </p:txBody>
       </p:sp>
@@ -14348,7 +14699,7 @@
           <a:noFill/>
         </p:spPr>
         <p:txBody>
-          <a:bodyPr wrap="square" anchor="t" lIns="0" rIns="0" tIns="0" bIns="0">
+          <a:bodyPr wrap="square" lIns="0" tIns="0" rIns="0" bIns="0" anchor="t">
             <a:noAutofit/>
           </a:bodyPr>
           <a:lstStyle/>
@@ -14408,7 +14759,7 @@
 </file>
 
 <file path=ppt/slides/slide9.xml><?xml version="1.0" encoding="utf-8"?>
-<p:sld xmlns:a="http://schemas.openxmlformats.org/drawingml/2006/main" xmlns:p="http://schemas.openxmlformats.org/presentationml/2006/main" xmlns:r="http://schemas.openxmlformats.org/officeDocument/2006/relationships">
+<p:sld xmlns:a="http://schemas.openxmlformats.org/drawingml/2006/main" xmlns:r="http://schemas.openxmlformats.org/officeDocument/2006/relationships" xmlns:p="http://schemas.openxmlformats.org/presentationml/2006/main">
   <p:cSld>
     <p:bg>
       <p:bgPr>
@@ -14424,7 +14775,14 @@
         <p:cNvGrpSpPr/>
         <p:nvPr/>
       </p:nvGrpSpPr>
-      <p:grpSpPr/>
+      <p:grpSpPr>
+        <a:xfrm>
+          <a:off x="0" y="0"/>
+          <a:ext cx="0" cy="0"/>
+          <a:chOff x="0" y="0"/>
+          <a:chExt cx="0" cy="0"/>
+        </a:xfrm>
+      </p:grpSpPr>
       <p:sp>
         <p:nvSpPr>
           <p:cNvPr id="2" name="TextBox 1"/>
@@ -14442,7 +14800,7 @@
           <a:noFill/>
         </p:spPr>
         <p:txBody>
-          <a:bodyPr wrap="square" anchor="t" lIns="0" rIns="0" tIns="0" bIns="0">
+          <a:bodyPr wrap="square" lIns="0" tIns="0" rIns="0" bIns="0" anchor="t">
             <a:noAutofit/>
           </a:bodyPr>
           <a:lstStyle/>
@@ -14486,7 +14844,7 @@
           <a:noFill/>
         </p:spPr>
         <p:txBody>
-          <a:bodyPr wrap="square" anchor="ctr" lIns="0" rIns="0" tIns="0" bIns="0">
+          <a:bodyPr wrap="square" lIns="0" tIns="0" rIns="0" bIns="0" anchor="ctr">
             <a:noAutofit/>
           </a:bodyPr>
           <a:lstStyle/>
@@ -14554,6 +14912,7 @@
           <a:lstStyle/>
           <a:p>
             <a:pPr algn="ctr"/>
+            <a:endParaRPr/>
           </a:p>
         </p:txBody>
       </p:sp>
@@ -14574,7 +14933,7 @@
           <a:noFill/>
         </p:spPr>
         <p:txBody>
-          <a:bodyPr wrap="square" anchor="t" lIns="0" rIns="0" tIns="0" bIns="0">
+          <a:bodyPr wrap="square" lIns="0" tIns="0" rIns="0" bIns="0" anchor="t">
             <a:noAutofit/>
           </a:bodyPr>
           <a:lstStyle/>
@@ -14634,7 +14993,7 @@
 </file>
 
 <file path=ppt/theme/theme1.xml><?xml version="1.0" encoding="utf-8"?>
-<a:theme xmlns:a="http://schemas.openxmlformats.org/drawingml/2006/main" xmlns:r="http://schemas.openxmlformats.org/officeDocument/2006/relationships" name="Simple Light">
+<a:theme xmlns:a="http://schemas.openxmlformats.org/drawingml/2006/main" name="Simple Light">
   <a:themeElements>
     <a:clrScheme name="Simple Light">
       <a:dk1>
@@ -14909,11 +15268,13 @@
       </a:bgFillStyleLst>
     </a:fmtScheme>
   </a:themeElements>
+  <a:objectDefaults/>
+  <a:extraClrSchemeLst/>
 </a:theme>
 </file>
 
 <file path=ppt/theme/theme2.xml><?xml version="1.0" encoding="utf-8"?>
-<a:theme xmlns:a="http://schemas.openxmlformats.org/drawingml/2006/main" xmlns:r="http://schemas.openxmlformats.org/officeDocument/2006/relationships">
+<a:theme xmlns:a="http://schemas.openxmlformats.org/drawingml/2006/main">
   <a:themeElements>
     <a:clrScheme name="Default">
       <a:dk1>
@@ -15188,5 +15549,7 @@
       </a:bgFillStyleLst>
     </a:fmtScheme>
   </a:themeElements>
+  <a:objectDefaults/>
+  <a:extraClrSchemeLst/>
 </a:theme>
 </file>